--- a/downloads/presentations/modules/anl-200.pptx
+++ b/downloads/presentations/modules/anl-200.pptx
@@ -3524,13 +3524,11 @@
             </a:avLst>
           </a:prstGeom>
           <a:solidFill>
-            <a:srgbClr val="FFFFFF">
-              <a:alpha val="88000"/>
-            </a:srgbClr>
+            <a:srgbClr val="FFFFFF"/>
           </a:solidFill>
           <a:ln w="12700">
             <a:solidFill>
-              <a:srgbClr val="D6E8F2"/>
+              <a:srgbClr val="B9D7E6"/>
             </a:solidFill>
             <a:prstDash val="solid"/>
           </a:ln>
@@ -3538,261 +3536,112 @@
       </p:sp>
       <p:sp>
         <p:nvSpPr>
-          <p:cNvPr id="14" name="Shape 12"/>
-          <p:cNvSpPr/>
-          <p:nvPr/>
-        </p:nvSpPr>
-        <p:spPr>
-          <a:xfrm>
-            <a:off x="8138160" y="3291840"/>
-            <a:ext cx="329184" cy="329184"/>
-          </a:xfrm>
-          <a:prstGeom prst="ellipse">
-            <a:avLst/>
-          </a:prstGeom>
-          <a:solidFill>
-            <a:srgbClr val="0068B7"/>
-          </a:solidFill>
-          <a:ln w="12700">
-            <a:solidFill>
-              <a:srgbClr val="0068B7"/>
-            </a:solidFill>
-            <a:prstDash val="solid"/>
-          </a:ln>
-        </p:spPr>
-      </p:sp>
-      <p:sp>
-        <p:nvSpPr>
-          <p:cNvPr id="15" name="Shape 13"/>
-          <p:cNvSpPr/>
-          <p:nvPr/>
-        </p:nvSpPr>
-        <p:spPr>
-          <a:xfrm>
-            <a:off x="10332720" y="3383280"/>
-            <a:ext cx="329184" cy="329184"/>
-          </a:xfrm>
-          <a:prstGeom prst="ellipse">
-            <a:avLst/>
-          </a:prstGeom>
-          <a:solidFill>
-            <a:srgbClr val="2F8A28"/>
-          </a:solidFill>
-          <a:ln w="12700">
-            <a:solidFill>
-              <a:srgbClr val="2F8A28"/>
-            </a:solidFill>
-            <a:prstDash val="solid"/>
-          </a:ln>
-        </p:spPr>
+          <p:cNvPr id="14" name="Text 12"/>
+          <p:cNvSpPr/>
+          <p:nvPr/>
+        </p:nvSpPr>
+        <p:spPr>
+          <a:xfrm>
+            <a:off x="7799832" y="2935224"/>
+            <a:ext cx="3145536" cy="256032"/>
+          </a:xfrm>
+          <a:prstGeom prst="rect">
+            <a:avLst/>
+          </a:prstGeom>
+          <a:noFill/>
+          <a:ln/>
+        </p:spPr>
+        <p:txBody>
+          <a:bodyPr wrap="square" lIns="0" tIns="0" rIns="0" bIns="0" rtlCol="0" anchor="ctr"/>
+          <a:lstStyle/>
+          <a:p>
+            <a:pPr indent="0" marL="0">
+              <a:buNone/>
+            </a:pPr>
+            <a:r>
+              <a:rPr lang="en-US" sz="1300" b="1" dirty="0">
+                <a:solidFill>
+                  <a:srgbClr val="0068B7"/>
+                </a:solidFill>
+                <a:latin typeface="Aptos" pitchFamily="34" charset="0"/>
+                <a:ea typeface="Aptos" pitchFamily="34" charset="-122"/>
+                <a:cs typeface="Aptos" pitchFamily="34" charset="-120"/>
+              </a:rPr>
+              <a:t>Concept checkpoints</a:t>
+            </a:r>
+            <a:endParaRPr lang="en-US" sz="1300" dirty="0"/>
+          </a:p>
+        </p:txBody>
+      </p:sp>
+      <p:sp>
+        <p:nvSpPr>
+          <p:cNvPr id="15" name="Text 13"/>
+          <p:cNvSpPr/>
+          <p:nvPr/>
+        </p:nvSpPr>
+        <p:spPr>
+          <a:xfrm>
+            <a:off x="7818120" y="3300984"/>
+            <a:ext cx="3090672" cy="877824"/>
+          </a:xfrm>
+          <a:prstGeom prst="rect">
+            <a:avLst/>
+          </a:prstGeom>
+          <a:noFill/>
+          <a:ln/>
+        </p:spPr>
+        <p:txBody>
+          <a:bodyPr wrap="square" lIns="254" tIns="254" rIns="254" bIns="254" rtlCol="0" anchor="t">
+            <a:normAutofit/>
+          </a:bodyPr>
+          <a:lstStyle/>
+          <a:p>
+            <a:r>
+              <a:rPr lang="en-US" sz="1380" dirty="0">
+                <a:solidFill>
+                  <a:srgbClr val="17364A"/>
+                </a:solidFill>
+                <a:latin typeface="Aptos" pitchFamily="34" charset="0"/>
+                <a:ea typeface="Aptos" pitchFamily="34" charset="-122"/>
+                <a:cs typeface="Aptos" pitchFamily="34" charset="-120"/>
+              </a:rPr>
+              <a:t>NLP could classify messages by topic, identify urgent issues, and draft response summaries.</a:t>
+            </a:r>
+            <a:endParaRPr lang="en-US" sz="1380" dirty="0"/>
+          </a:p>
+          <a:p>
+            <a:r>
+              <a:rPr lang="en-US" sz="1380" dirty="0">
+                <a:solidFill>
+                  <a:srgbClr val="17364A"/>
+                </a:solidFill>
+                <a:latin typeface="Aptos" pitchFamily="34" charset="0"/>
+                <a:ea typeface="Aptos" pitchFamily="34" charset="-122"/>
+                <a:cs typeface="Aptos" pitchFamily="34" charset="-120"/>
+              </a:rPr>
+              <a:t>This can improve timeliness, but messages may contain sensitive information, emotional.</a:t>
+            </a:r>
+            <a:endParaRPr lang="en-US" sz="1380" dirty="0"/>
+          </a:p>
+          <a:p>
+            <a:r>
+              <a:rPr lang="en-US" sz="1380" dirty="0">
+                <a:solidFill>
+                  <a:srgbClr val="17364A"/>
+                </a:solidFill>
+                <a:latin typeface="Aptos" pitchFamily="34" charset="0"/>
+                <a:ea typeface="Aptos" pitchFamily="34" charset="-122"/>
+                <a:cs typeface="Aptos" pitchFamily="34" charset="-120"/>
+              </a:rPr>
+              <a:t>Staff need review procedures and escalation criteria.</a:t>
+            </a:r>
+            <a:endParaRPr lang="en-US" sz="1380" dirty="0"/>
+          </a:p>
+        </p:txBody>
       </p:sp>
       <p:sp>
         <p:nvSpPr>
           <p:cNvPr id="16" name="Shape 14"/>
-          <p:cNvSpPr/>
-          <p:nvPr/>
-        </p:nvSpPr>
-        <p:spPr>
-          <a:xfrm>
-            <a:off x="9235440" y="3502152"/>
-            <a:ext cx="329184" cy="329184"/>
-          </a:xfrm>
-          <a:prstGeom prst="ellipse">
-            <a:avLst/>
-          </a:prstGeom>
-          <a:solidFill>
-            <a:srgbClr val="D69A2D"/>
-          </a:solidFill>
-          <a:ln w="12700">
-            <a:solidFill>
-              <a:srgbClr val="D69A2D"/>
-            </a:solidFill>
-            <a:prstDash val="solid"/>
-          </a:ln>
-        </p:spPr>
-      </p:sp>
-      <p:sp>
-        <p:nvSpPr>
-          <p:cNvPr id="17" name="Shape 15"/>
-          <p:cNvSpPr/>
-          <p:nvPr/>
-        </p:nvSpPr>
-        <p:spPr>
-          <a:xfrm>
-            <a:off x="9235440" y="3657600"/>
-            <a:ext cx="329184" cy="329184"/>
-          </a:xfrm>
-          <a:prstGeom prst="ellipse">
-            <a:avLst/>
-          </a:prstGeom>
-          <a:solidFill>
-            <a:srgbClr val="6A4CA3"/>
-          </a:solidFill>
-          <a:ln w="12700">
-            <a:solidFill>
-              <a:srgbClr val="6A4CA3"/>
-            </a:solidFill>
-            <a:prstDash val="solid"/>
-          </a:ln>
-        </p:spPr>
-      </p:sp>
-      <p:sp>
-        <p:nvSpPr>
-          <p:cNvPr id="18" name="Shape 16"/>
-          <p:cNvSpPr/>
-          <p:nvPr/>
-        </p:nvSpPr>
-        <p:spPr>
-          <a:xfrm>
-            <a:off x="8302752" y="3456432"/>
-            <a:ext cx="1097280" cy="365760"/>
-          </a:xfrm>
-          <a:prstGeom prst="line">
-            <a:avLst/>
-          </a:prstGeom>
-          <a:noFill/>
-          <a:ln w="19050">
-            <a:solidFill>
-              <a:srgbClr val="8ABBD8"/>
-            </a:solidFill>
-            <a:prstDash val="solid"/>
-          </a:ln>
-        </p:spPr>
-      </p:sp>
-      <p:sp>
-        <p:nvSpPr>
-          <p:cNvPr id="19" name="Shape 17"/>
-          <p:cNvSpPr/>
-          <p:nvPr/>
-        </p:nvSpPr>
-        <p:spPr>
-          <a:xfrm>
-            <a:off x="10497312" y="3547872"/>
-            <a:ext cx="-1097280" cy="274320"/>
-          </a:xfrm>
-          <a:prstGeom prst="line">
-            <a:avLst/>
-          </a:prstGeom>
-          <a:noFill/>
-          <a:ln w="19050">
-            <a:solidFill>
-              <a:srgbClr val="8ABBD8"/>
-            </a:solidFill>
-            <a:prstDash val="solid"/>
-          </a:ln>
-        </p:spPr>
-      </p:sp>
-      <p:sp>
-        <p:nvSpPr>
-          <p:cNvPr id="20" name="Shape 18"/>
-          <p:cNvSpPr/>
-          <p:nvPr/>
-        </p:nvSpPr>
-        <p:spPr>
-          <a:xfrm>
-            <a:off x="9400032" y="3666744"/>
-            <a:ext cx="0" cy="155448"/>
-          </a:xfrm>
-          <a:prstGeom prst="line">
-            <a:avLst/>
-          </a:prstGeom>
-          <a:noFill/>
-          <a:ln w="19050">
-            <a:solidFill>
-              <a:srgbClr val="8ABBD8"/>
-            </a:solidFill>
-            <a:prstDash val="solid"/>
-          </a:ln>
-        </p:spPr>
-      </p:sp>
-      <p:sp>
-        <p:nvSpPr>
-          <p:cNvPr id="21" name="Shape 19"/>
-          <p:cNvSpPr/>
-          <p:nvPr/>
-        </p:nvSpPr>
-        <p:spPr>
-          <a:xfrm>
-            <a:off x="8302752" y="3456432"/>
-            <a:ext cx="1097280" cy="210312"/>
-          </a:xfrm>
-          <a:prstGeom prst="line">
-            <a:avLst/>
-          </a:prstGeom>
-          <a:noFill/>
-          <a:ln w="19050">
-            <a:solidFill>
-              <a:srgbClr val="8ABBD8"/>
-            </a:solidFill>
-            <a:prstDash val="solid"/>
-          </a:ln>
-        </p:spPr>
-      </p:sp>
-      <p:sp>
-        <p:nvSpPr>
-          <p:cNvPr id="22" name="Shape 20"/>
-          <p:cNvSpPr/>
-          <p:nvPr/>
-        </p:nvSpPr>
-        <p:spPr>
-          <a:xfrm>
-            <a:off x="10497312" y="3547872"/>
-            <a:ext cx="-1097280" cy="118872"/>
-          </a:xfrm>
-          <a:prstGeom prst="line">
-            <a:avLst/>
-          </a:prstGeom>
-          <a:noFill/>
-          <a:ln w="19050">
-            <a:solidFill>
-              <a:srgbClr val="8ABBD8"/>
-            </a:solidFill>
-            <a:prstDash val="solid"/>
-          </a:ln>
-        </p:spPr>
-      </p:sp>
-      <p:sp>
-        <p:nvSpPr>
-          <p:cNvPr id="23" name="Text 21"/>
-          <p:cNvSpPr/>
-          <p:nvPr/>
-        </p:nvSpPr>
-        <p:spPr>
-          <a:xfrm>
-            <a:off x="7909560" y="3977640"/>
-            <a:ext cx="2926080" cy="182880"/>
-          </a:xfrm>
-          <a:prstGeom prst="rect">
-            <a:avLst/>
-          </a:prstGeom>
-          <a:noFill/>
-          <a:ln/>
-        </p:spPr>
-        <p:txBody>
-          <a:bodyPr wrap="square" lIns="0" tIns="0" rIns="0" bIns="0" rtlCol="0" anchor="ctr"/>
-          <a:lstStyle/>
-          <a:p>
-            <a:pPr algn="ctr" indent="0" marL="0">
-              <a:buNone/>
-            </a:pPr>
-            <a:r>
-              <a:rPr lang="en-US" sz="1000" dirty="0">
-                <a:solidFill>
-                  <a:srgbClr val="003A63"/>
-                </a:solidFill>
-                <a:latin typeface="Aptos" pitchFamily="34" charset="0"/>
-                <a:ea typeface="Aptos" pitchFamily="34" charset="-122"/>
-                <a:cs typeface="Aptos" pitchFamily="34" charset="-120"/>
-              </a:rPr>
-              <a:t>People and trust</a:t>
-            </a:r>
-            <a:endParaRPr lang="en-US" sz="1000" dirty="0"/>
-          </a:p>
-        </p:txBody>
-      </p:sp>
-      <p:sp>
-        <p:nvSpPr>
-          <p:cNvPr id="24" name="Shape 22"/>
           <p:cNvSpPr/>
           <p:nvPr/>
         </p:nvSpPr>
@@ -3819,7 +3668,7 @@
       </p:sp>
       <p:sp>
         <p:nvSpPr>
-          <p:cNvPr id="25" name="Text 23"/>
+          <p:cNvPr id="17" name="Text 15"/>
           <p:cNvSpPr/>
           <p:nvPr/>
         </p:nvSpPr>
@@ -3858,7 +3707,7 @@
       </p:sp>
       <p:sp>
         <p:nvSpPr>
-          <p:cNvPr id="26" name="Text 24"/>
+          <p:cNvPr id="18" name="Text 16"/>
           <p:cNvSpPr/>
           <p:nvPr/>
         </p:nvSpPr>
@@ -4366,13 +4215,11 @@
             </a:avLst>
           </a:prstGeom>
           <a:solidFill>
-            <a:srgbClr val="FFFFFF">
-              <a:alpha val="88000"/>
-            </a:srgbClr>
+            <a:srgbClr val="FFFFFF"/>
           </a:solidFill>
           <a:ln w="12700">
             <a:solidFill>
-              <a:srgbClr val="D6E8F2"/>
+              <a:srgbClr val="B9D7E6"/>
             </a:solidFill>
             <a:prstDash val="solid"/>
           </a:ln>
@@ -4380,261 +4227,112 @@
       </p:sp>
       <p:sp>
         <p:nvSpPr>
-          <p:cNvPr id="14" name="Shape 12"/>
-          <p:cNvSpPr/>
-          <p:nvPr/>
-        </p:nvSpPr>
-        <p:spPr>
-          <a:xfrm>
-            <a:off x="8138160" y="3291840"/>
-            <a:ext cx="329184" cy="329184"/>
-          </a:xfrm>
-          <a:prstGeom prst="ellipse">
-            <a:avLst/>
-          </a:prstGeom>
-          <a:solidFill>
-            <a:srgbClr val="0068B7"/>
-          </a:solidFill>
-          <a:ln w="12700">
-            <a:solidFill>
-              <a:srgbClr val="0068B7"/>
-            </a:solidFill>
-            <a:prstDash val="solid"/>
-          </a:ln>
-        </p:spPr>
-      </p:sp>
-      <p:sp>
-        <p:nvSpPr>
-          <p:cNvPr id="15" name="Shape 13"/>
-          <p:cNvSpPr/>
-          <p:nvPr/>
-        </p:nvSpPr>
-        <p:spPr>
-          <a:xfrm>
-            <a:off x="10332720" y="3383280"/>
-            <a:ext cx="329184" cy="329184"/>
-          </a:xfrm>
-          <a:prstGeom prst="ellipse">
-            <a:avLst/>
-          </a:prstGeom>
-          <a:solidFill>
-            <a:srgbClr val="2F8A28"/>
-          </a:solidFill>
-          <a:ln w="12700">
-            <a:solidFill>
-              <a:srgbClr val="2F8A28"/>
-            </a:solidFill>
-            <a:prstDash val="solid"/>
-          </a:ln>
-        </p:spPr>
+          <p:cNvPr id="14" name="Text 12"/>
+          <p:cNvSpPr/>
+          <p:nvPr/>
+        </p:nvSpPr>
+        <p:spPr>
+          <a:xfrm>
+            <a:off x="7799832" y="2935224"/>
+            <a:ext cx="3145536" cy="256032"/>
+          </a:xfrm>
+          <a:prstGeom prst="rect">
+            <a:avLst/>
+          </a:prstGeom>
+          <a:noFill/>
+          <a:ln/>
+        </p:spPr>
+        <p:txBody>
+          <a:bodyPr wrap="square" lIns="0" tIns="0" rIns="0" bIns="0" rtlCol="0" anchor="ctr"/>
+          <a:lstStyle/>
+          <a:p>
+            <a:pPr indent="0" marL="0">
+              <a:buNone/>
+            </a:pPr>
+            <a:r>
+              <a:rPr lang="en-US" sz="1300" b="1" dirty="0">
+                <a:solidFill>
+                  <a:srgbClr val="0068B7"/>
+                </a:solidFill>
+                <a:latin typeface="Aptos" pitchFamily="34" charset="0"/>
+                <a:ea typeface="Aptos" pitchFamily="34" charset="-122"/>
+                <a:cs typeface="Aptos" pitchFamily="34" charset="-120"/>
+              </a:rPr>
+              <a:t>Concept checkpoints</a:t>
+            </a:r>
+            <a:endParaRPr lang="en-US" sz="1300" dirty="0"/>
+          </a:p>
+        </p:txBody>
+      </p:sp>
+      <p:sp>
+        <p:nvSpPr>
+          <p:cNvPr id="15" name="Text 13"/>
+          <p:cNvSpPr/>
+          <p:nvPr/>
+        </p:nvSpPr>
+        <p:spPr>
+          <a:xfrm>
+            <a:off x="7818120" y="3300984"/>
+            <a:ext cx="3090672" cy="877824"/>
+          </a:xfrm>
+          <a:prstGeom prst="rect">
+            <a:avLst/>
+          </a:prstGeom>
+          <a:noFill/>
+          <a:ln/>
+        </p:spPr>
+        <p:txBody>
+          <a:bodyPr wrap="square" lIns="254" tIns="254" rIns="254" bIns="254" rtlCol="0" anchor="t">
+            <a:normAutofit/>
+          </a:bodyPr>
+          <a:lstStyle/>
+          <a:p>
+            <a:r>
+              <a:rPr lang="en-US" sz="1380" dirty="0">
+                <a:solidFill>
+                  <a:srgbClr val="17364A"/>
+                </a:solidFill>
+                <a:latin typeface="Aptos" pitchFamily="34" charset="0"/>
+                <a:ea typeface="Aptos" pitchFamily="34" charset="-122"/>
+                <a:cs typeface="Aptos" pitchFamily="34" charset="-120"/>
+              </a:rPr>
+              <a:t>Extraction, classification, summarization, translation, topic modeling, and question.</a:t>
+            </a:r>
+            <a:endParaRPr lang="en-US" sz="1380" dirty="0"/>
+          </a:p>
+          <a:p>
+            <a:r>
+              <a:rPr lang="en-US" sz="1380" dirty="0">
+                <a:solidFill>
+                  <a:srgbClr val="17364A"/>
+                </a:solidFill>
+                <a:latin typeface="Aptos" pitchFamily="34" charset="0"/>
+                <a:ea typeface="Aptos" pitchFamily="34" charset="-122"/>
+                <a:cs typeface="Aptos" pitchFamily="34" charset="-120"/>
+              </a:rPr>
+              <a:t>Staff should define the task narrowly before selecting or testing a tool.</a:t>
+            </a:r>
+            <a:endParaRPr lang="en-US" sz="1380" dirty="0"/>
+          </a:p>
+          <a:p>
+            <a:r>
+              <a:rPr lang="en-US" sz="1380" dirty="0">
+                <a:solidFill>
+                  <a:srgbClr val="17364A"/>
+                </a:solidFill>
+                <a:latin typeface="Aptos" pitchFamily="34" charset="0"/>
+                <a:ea typeface="Aptos" pitchFamily="34" charset="-122"/>
+                <a:cs typeface="Aptos" pitchFamily="34" charset="-120"/>
+              </a:rPr>
+              <a:t>Evaluation should use representative source text.</a:t>
+            </a:r>
+            <a:endParaRPr lang="en-US" sz="1380" dirty="0"/>
+          </a:p>
+        </p:txBody>
       </p:sp>
       <p:sp>
         <p:nvSpPr>
           <p:cNvPr id="16" name="Shape 14"/>
-          <p:cNvSpPr/>
-          <p:nvPr/>
-        </p:nvSpPr>
-        <p:spPr>
-          <a:xfrm>
-            <a:off x="9235440" y="3502152"/>
-            <a:ext cx="329184" cy="329184"/>
-          </a:xfrm>
-          <a:prstGeom prst="ellipse">
-            <a:avLst/>
-          </a:prstGeom>
-          <a:solidFill>
-            <a:srgbClr val="D69A2D"/>
-          </a:solidFill>
-          <a:ln w="12700">
-            <a:solidFill>
-              <a:srgbClr val="D69A2D"/>
-            </a:solidFill>
-            <a:prstDash val="solid"/>
-          </a:ln>
-        </p:spPr>
-      </p:sp>
-      <p:sp>
-        <p:nvSpPr>
-          <p:cNvPr id="17" name="Shape 15"/>
-          <p:cNvSpPr/>
-          <p:nvPr/>
-        </p:nvSpPr>
-        <p:spPr>
-          <a:xfrm>
-            <a:off x="9235440" y="3657600"/>
-            <a:ext cx="329184" cy="329184"/>
-          </a:xfrm>
-          <a:prstGeom prst="ellipse">
-            <a:avLst/>
-          </a:prstGeom>
-          <a:solidFill>
-            <a:srgbClr val="6A4CA3"/>
-          </a:solidFill>
-          <a:ln w="12700">
-            <a:solidFill>
-              <a:srgbClr val="6A4CA3"/>
-            </a:solidFill>
-            <a:prstDash val="solid"/>
-          </a:ln>
-        </p:spPr>
-      </p:sp>
-      <p:sp>
-        <p:nvSpPr>
-          <p:cNvPr id="18" name="Shape 16"/>
-          <p:cNvSpPr/>
-          <p:nvPr/>
-        </p:nvSpPr>
-        <p:spPr>
-          <a:xfrm>
-            <a:off x="8302752" y="3456432"/>
-            <a:ext cx="1097280" cy="365760"/>
-          </a:xfrm>
-          <a:prstGeom prst="line">
-            <a:avLst/>
-          </a:prstGeom>
-          <a:noFill/>
-          <a:ln w="19050">
-            <a:solidFill>
-              <a:srgbClr val="8ABBD8"/>
-            </a:solidFill>
-            <a:prstDash val="solid"/>
-          </a:ln>
-        </p:spPr>
-      </p:sp>
-      <p:sp>
-        <p:nvSpPr>
-          <p:cNvPr id="19" name="Shape 17"/>
-          <p:cNvSpPr/>
-          <p:nvPr/>
-        </p:nvSpPr>
-        <p:spPr>
-          <a:xfrm>
-            <a:off x="10497312" y="3547872"/>
-            <a:ext cx="-1097280" cy="274320"/>
-          </a:xfrm>
-          <a:prstGeom prst="line">
-            <a:avLst/>
-          </a:prstGeom>
-          <a:noFill/>
-          <a:ln w="19050">
-            <a:solidFill>
-              <a:srgbClr val="8ABBD8"/>
-            </a:solidFill>
-            <a:prstDash val="solid"/>
-          </a:ln>
-        </p:spPr>
-      </p:sp>
-      <p:sp>
-        <p:nvSpPr>
-          <p:cNvPr id="20" name="Shape 18"/>
-          <p:cNvSpPr/>
-          <p:nvPr/>
-        </p:nvSpPr>
-        <p:spPr>
-          <a:xfrm>
-            <a:off x="9400032" y="3666744"/>
-            <a:ext cx="0" cy="155448"/>
-          </a:xfrm>
-          <a:prstGeom prst="line">
-            <a:avLst/>
-          </a:prstGeom>
-          <a:noFill/>
-          <a:ln w="19050">
-            <a:solidFill>
-              <a:srgbClr val="8ABBD8"/>
-            </a:solidFill>
-            <a:prstDash val="solid"/>
-          </a:ln>
-        </p:spPr>
-      </p:sp>
-      <p:sp>
-        <p:nvSpPr>
-          <p:cNvPr id="21" name="Shape 19"/>
-          <p:cNvSpPr/>
-          <p:nvPr/>
-        </p:nvSpPr>
-        <p:spPr>
-          <a:xfrm>
-            <a:off x="8302752" y="3456432"/>
-            <a:ext cx="1097280" cy="210312"/>
-          </a:xfrm>
-          <a:prstGeom prst="line">
-            <a:avLst/>
-          </a:prstGeom>
-          <a:noFill/>
-          <a:ln w="19050">
-            <a:solidFill>
-              <a:srgbClr val="8ABBD8"/>
-            </a:solidFill>
-            <a:prstDash val="solid"/>
-          </a:ln>
-        </p:spPr>
-      </p:sp>
-      <p:sp>
-        <p:nvSpPr>
-          <p:cNvPr id="22" name="Shape 20"/>
-          <p:cNvSpPr/>
-          <p:nvPr/>
-        </p:nvSpPr>
-        <p:spPr>
-          <a:xfrm>
-            <a:off x="10497312" y="3547872"/>
-            <a:ext cx="-1097280" cy="118872"/>
-          </a:xfrm>
-          <a:prstGeom prst="line">
-            <a:avLst/>
-          </a:prstGeom>
-          <a:noFill/>
-          <a:ln w="19050">
-            <a:solidFill>
-              <a:srgbClr val="8ABBD8"/>
-            </a:solidFill>
-            <a:prstDash val="solid"/>
-          </a:ln>
-        </p:spPr>
-      </p:sp>
-      <p:sp>
-        <p:nvSpPr>
-          <p:cNvPr id="23" name="Text 21"/>
-          <p:cNvSpPr/>
-          <p:nvPr/>
-        </p:nvSpPr>
-        <p:spPr>
-          <a:xfrm>
-            <a:off x="7909560" y="3977640"/>
-            <a:ext cx="2926080" cy="182880"/>
-          </a:xfrm>
-          <a:prstGeom prst="rect">
-            <a:avLst/>
-          </a:prstGeom>
-          <a:noFill/>
-          <a:ln/>
-        </p:spPr>
-        <p:txBody>
-          <a:bodyPr wrap="square" lIns="0" tIns="0" rIns="0" bIns="0" rtlCol="0" anchor="ctr"/>
-          <a:lstStyle/>
-          <a:p>
-            <a:pPr algn="ctr" indent="0" marL="0">
-              <a:buNone/>
-            </a:pPr>
-            <a:r>
-              <a:rPr lang="en-US" sz="1000" dirty="0">
-                <a:solidFill>
-                  <a:srgbClr val="003A63"/>
-                </a:solidFill>
-                <a:latin typeface="Aptos" pitchFamily="34" charset="0"/>
-                <a:ea typeface="Aptos" pitchFamily="34" charset="-122"/>
-                <a:cs typeface="Aptos" pitchFamily="34" charset="-120"/>
-              </a:rPr>
-              <a:t>People and trust</a:t>
-            </a:r>
-            <a:endParaRPr lang="en-US" sz="1000" dirty="0"/>
-          </a:p>
-        </p:txBody>
-      </p:sp>
-      <p:sp>
-        <p:nvSpPr>
-          <p:cNvPr id="24" name="Shape 22"/>
           <p:cNvSpPr/>
           <p:nvPr/>
         </p:nvSpPr>
@@ -4661,7 +4359,7 @@
       </p:sp>
       <p:sp>
         <p:nvSpPr>
-          <p:cNvPr id="25" name="Text 23"/>
+          <p:cNvPr id="17" name="Text 15"/>
           <p:cNvSpPr/>
           <p:nvPr/>
         </p:nvSpPr>
@@ -4700,7 +4398,7 @@
       </p:sp>
       <p:sp>
         <p:nvSpPr>
-          <p:cNvPr id="26" name="Text 24"/>
+          <p:cNvPr id="18" name="Text 16"/>
           <p:cNvSpPr/>
           <p:nvPr/>
         </p:nvSpPr>
@@ -5208,13 +4906,11 @@
             </a:avLst>
           </a:prstGeom>
           <a:solidFill>
-            <a:srgbClr val="FFFFFF">
-              <a:alpha val="88000"/>
-            </a:srgbClr>
+            <a:srgbClr val="FFFFFF"/>
           </a:solidFill>
           <a:ln w="12700">
             <a:solidFill>
-              <a:srgbClr val="D6E8F2"/>
+              <a:srgbClr val="B9D7E6"/>
             </a:solidFill>
             <a:prstDash val="solid"/>
           </a:ln>
@@ -5222,26 +4918,42 @@
       </p:sp>
       <p:sp>
         <p:nvSpPr>
-          <p:cNvPr id="14" name="Shape 12"/>
-          <p:cNvSpPr/>
-          <p:nvPr/>
-        </p:nvSpPr>
-        <p:spPr>
-          <a:xfrm>
-            <a:off x="8046720" y="3108960"/>
-            <a:ext cx="2651760" cy="896112"/>
-          </a:xfrm>
-          <a:prstGeom prst="arc">
-            <a:avLst/>
-          </a:prstGeom>
-          <a:noFill/>
-          <a:ln w="25400">
-            <a:solidFill>
-              <a:srgbClr val="0068B7"/>
-            </a:solidFill>
-            <a:prstDash val="solid"/>
-          </a:ln>
-        </p:spPr>
+          <p:cNvPr id="14" name="Text 12"/>
+          <p:cNvSpPr/>
+          <p:nvPr/>
+        </p:nvSpPr>
+        <p:spPr>
+          <a:xfrm>
+            <a:off x="7799832" y="2935224"/>
+            <a:ext cx="3145536" cy="256032"/>
+          </a:xfrm>
+          <a:prstGeom prst="rect">
+            <a:avLst/>
+          </a:prstGeom>
+          <a:noFill/>
+          <a:ln/>
+        </p:spPr>
+        <p:txBody>
+          <a:bodyPr wrap="square" lIns="0" tIns="0" rIns="0" bIns="0" rtlCol="0" anchor="ctr"/>
+          <a:lstStyle/>
+          <a:p>
+            <a:pPr indent="0" marL="0">
+              <a:buNone/>
+            </a:pPr>
+            <a:r>
+              <a:rPr lang="en-US" sz="1300" b="1" dirty="0">
+                <a:solidFill>
+                  <a:srgbClr val="0068B7"/>
+                </a:solidFill>
+                <a:latin typeface="Aptos" pitchFamily="34" charset="0"/>
+                <a:ea typeface="Aptos" pitchFamily="34" charset="-122"/>
+                <a:cs typeface="Aptos" pitchFamily="34" charset="-120"/>
+              </a:rPr>
+              <a:t>Concept checkpoints</a:t>
+            </a:r>
+            <a:endParaRPr lang="en-US" sz="1300" dirty="0"/>
+          </a:p>
+        </p:txBody>
       </p:sp>
       <p:sp>
         <p:nvSpPr>
@@ -5251,102 +4963,67 @@
         </p:nvSpPr>
         <p:spPr>
           <a:xfrm>
-            <a:off x="7909560" y="3099816"/>
-            <a:ext cx="2926080" cy="256032"/>
-          </a:xfrm>
-          <a:prstGeom prst="rect">
-            <a:avLst/>
-          </a:prstGeom>
-          <a:noFill/>
-          <a:ln/>
-        </p:spPr>
-        <p:txBody>
-          <a:bodyPr wrap="square" lIns="0" tIns="0" rIns="0" bIns="0" rtlCol="0" anchor="ctr"/>
-          <a:lstStyle/>
-          <a:p>
-            <a:pPr algn="ctr" indent="0" marL="0">
-              <a:buNone/>
-            </a:pPr>
-            <a:r>
-              <a:rPr lang="en-US" sz="1500" b="1" dirty="0">
-                <a:solidFill>
-                  <a:srgbClr val="003A63"/>
-                </a:solidFill>
-                <a:latin typeface="Aptos" pitchFamily="34" charset="0"/>
-                <a:ea typeface="Aptos" pitchFamily="34" charset="-122"/>
-                <a:cs typeface="Aptos" pitchFamily="34" charset="-120"/>
-              </a:rPr>
-              <a:t>Risk</a:t>
-            </a:r>
-            <a:endParaRPr lang="en-US" sz="1500" dirty="0"/>
+            <a:off x="7818120" y="3300984"/>
+            <a:ext cx="3090672" cy="877824"/>
+          </a:xfrm>
+          <a:prstGeom prst="rect">
+            <a:avLst/>
+          </a:prstGeom>
+          <a:noFill/>
+          <a:ln/>
+        </p:spPr>
+        <p:txBody>
+          <a:bodyPr wrap="square" lIns="254" tIns="254" rIns="254" bIns="254" rtlCol="0" anchor="t">
+            <a:normAutofit/>
+          </a:bodyPr>
+          <a:lstStyle/>
+          <a:p>
+            <a:r>
+              <a:rPr lang="en-US" sz="1380" dirty="0">
+                <a:solidFill>
+                  <a:srgbClr val="17364A"/>
+                </a:solidFill>
+                <a:latin typeface="Aptos" pitchFamily="34" charset="0"/>
+                <a:ea typeface="Aptos" pitchFamily="34" charset="-122"/>
+                <a:cs typeface="Aptos" pitchFamily="34" charset="-120"/>
+              </a:rPr>
+              <a:t>Language and accessibility gaps.</a:t>
+            </a:r>
+            <a:endParaRPr lang="en-US" sz="1380" dirty="0"/>
+          </a:p>
+          <a:p>
+            <a:r>
+              <a:rPr lang="en-US" sz="1380" dirty="0">
+                <a:solidFill>
+                  <a:srgbClr val="17364A"/>
+                </a:solidFill>
+                <a:latin typeface="Aptos" pitchFamily="34" charset="0"/>
+                <a:ea typeface="Aptos" pitchFamily="34" charset="-122"/>
+                <a:cs typeface="Aptos" pitchFamily="34" charset="-120"/>
+              </a:rPr>
+              <a:t>Models may perform differently across languages, dialects, literacy levels, or.</a:t>
+            </a:r>
+            <a:endParaRPr lang="en-US" sz="1380" dirty="0"/>
+          </a:p>
+          <a:p>
+            <a:r>
+              <a:rPr lang="en-US" sz="1380" dirty="0">
+                <a:solidFill>
+                  <a:srgbClr val="17364A"/>
+                </a:solidFill>
+                <a:latin typeface="Aptos" pitchFamily="34" charset="0"/>
+                <a:ea typeface="Aptos" pitchFamily="34" charset="-122"/>
+                <a:cs typeface="Aptos" pitchFamily="34" charset="-120"/>
+              </a:rPr>
+              <a:t>Guardrails include multilingual evaluation, accessibility review, and community context.</a:t>
+            </a:r>
+            <a:endParaRPr lang="en-US" sz="1380" dirty="0"/>
           </a:p>
         </p:txBody>
       </p:sp>
       <p:sp>
         <p:nvSpPr>
           <p:cNvPr id="16" name="Shape 14"/>
-          <p:cNvSpPr/>
-          <p:nvPr/>
-        </p:nvSpPr>
-        <p:spPr>
-          <a:xfrm>
-            <a:off x="8366760" y="3639312"/>
-            <a:ext cx="2011680" cy="0"/>
-          </a:xfrm>
-          <a:prstGeom prst="line">
-            <a:avLst/>
-          </a:prstGeom>
-          <a:noFill/>
-          <a:ln w="63500">
-            <a:solidFill>
-              <a:srgbClr val="2F8A28"/>
-            </a:solidFill>
-            <a:prstDash val="solid"/>
-          </a:ln>
-        </p:spPr>
-      </p:sp>
-      <p:sp>
-        <p:nvSpPr>
-          <p:cNvPr id="17" name="Text 15"/>
-          <p:cNvSpPr/>
-          <p:nvPr/>
-        </p:nvSpPr>
-        <p:spPr>
-          <a:xfrm>
-            <a:off x="7909560" y="3849624"/>
-            <a:ext cx="2926080" cy="164592"/>
-          </a:xfrm>
-          <a:prstGeom prst="rect">
-            <a:avLst/>
-          </a:prstGeom>
-          <a:noFill/>
-          <a:ln/>
-        </p:spPr>
-        <p:txBody>
-          <a:bodyPr wrap="square" lIns="0" tIns="0" rIns="0" bIns="0" rtlCol="0" anchor="ctr"/>
-          <a:lstStyle/>
-          <a:p>
-            <a:pPr algn="ctr" indent="0" marL="0">
-              <a:buNone/>
-            </a:pPr>
-            <a:r>
-              <a:rPr lang="en-US" sz="900" dirty="0">
-                <a:solidFill>
-                  <a:srgbClr val="003A63"/>
-                </a:solidFill>
-                <a:latin typeface="Aptos" pitchFamily="34" charset="0"/>
-                <a:ea typeface="Aptos" pitchFamily="34" charset="-122"/>
-                <a:cs typeface="Aptos" pitchFamily="34" charset="-120"/>
-              </a:rPr>
-              <a:t>Human review</a:t>
-            </a:r>
-            <a:endParaRPr lang="en-US" sz="900" dirty="0"/>
-          </a:p>
-        </p:txBody>
-      </p:sp>
-      <p:sp>
-        <p:nvSpPr>
-          <p:cNvPr id="18" name="Shape 16"/>
           <p:cNvSpPr/>
           <p:nvPr/>
         </p:nvSpPr>
@@ -5373,7 +5050,7 @@
       </p:sp>
       <p:sp>
         <p:nvSpPr>
-          <p:cNvPr id="19" name="Text 17"/>
+          <p:cNvPr id="17" name="Text 15"/>
           <p:cNvSpPr/>
           <p:nvPr/>
         </p:nvSpPr>
@@ -5412,7 +5089,7 @@
       </p:sp>
       <p:sp>
         <p:nvSpPr>
-          <p:cNvPr id="20" name="Text 18"/>
+          <p:cNvPr id="18" name="Text 16"/>
           <p:cNvSpPr/>
           <p:nvPr/>
         </p:nvSpPr>
@@ -5920,13 +5597,11 @@
             </a:avLst>
           </a:prstGeom>
           <a:solidFill>
-            <a:srgbClr val="FFFFFF">
-              <a:alpha val="88000"/>
-            </a:srgbClr>
+            <a:srgbClr val="FFFFFF"/>
           </a:solidFill>
           <a:ln w="12700">
             <a:solidFill>
-              <a:srgbClr val="D6E8F2"/>
+              <a:srgbClr val="B9D7E6"/>
             </a:solidFill>
             <a:prstDash val="solid"/>
           </a:ln>
@@ -5934,26 +5609,42 @@
       </p:sp>
       <p:sp>
         <p:nvSpPr>
-          <p:cNvPr id="14" name="Shape 12"/>
-          <p:cNvSpPr/>
-          <p:nvPr/>
-        </p:nvSpPr>
-        <p:spPr>
-          <a:xfrm>
-            <a:off x="8046720" y="3108960"/>
-            <a:ext cx="2651760" cy="896112"/>
-          </a:xfrm>
-          <a:prstGeom prst="arc">
-            <a:avLst/>
-          </a:prstGeom>
-          <a:noFill/>
-          <a:ln w="25400">
-            <a:solidFill>
-              <a:srgbClr val="0068B7"/>
-            </a:solidFill>
-            <a:prstDash val="solid"/>
-          </a:ln>
-        </p:spPr>
+          <p:cNvPr id="14" name="Text 12"/>
+          <p:cNvSpPr/>
+          <p:nvPr/>
+        </p:nvSpPr>
+        <p:spPr>
+          <a:xfrm>
+            <a:off x="7799832" y="2935224"/>
+            <a:ext cx="3145536" cy="256032"/>
+          </a:xfrm>
+          <a:prstGeom prst="rect">
+            <a:avLst/>
+          </a:prstGeom>
+          <a:noFill/>
+          <a:ln/>
+        </p:spPr>
+        <p:txBody>
+          <a:bodyPr wrap="square" lIns="0" tIns="0" rIns="0" bIns="0" rtlCol="0" anchor="ctr"/>
+          <a:lstStyle/>
+          <a:p>
+            <a:pPr indent="0" marL="0">
+              <a:buNone/>
+            </a:pPr>
+            <a:r>
+              <a:rPr lang="en-US" sz="1300" b="1" dirty="0">
+                <a:solidFill>
+                  <a:srgbClr val="0068B7"/>
+                </a:solidFill>
+                <a:latin typeface="Aptos" pitchFamily="34" charset="0"/>
+                <a:ea typeface="Aptos" pitchFamily="34" charset="-122"/>
+                <a:cs typeface="Aptos" pitchFamily="34" charset="-120"/>
+              </a:rPr>
+              <a:t>Concept checkpoints</a:t>
+            </a:r>
+            <a:endParaRPr lang="en-US" sz="1300" dirty="0"/>
+          </a:p>
+        </p:txBody>
       </p:sp>
       <p:sp>
         <p:nvSpPr>
@@ -5963,102 +5654,67 @@
         </p:nvSpPr>
         <p:spPr>
           <a:xfrm>
-            <a:off x="7909560" y="3099816"/>
-            <a:ext cx="2926080" cy="256032"/>
-          </a:xfrm>
-          <a:prstGeom prst="rect">
-            <a:avLst/>
-          </a:prstGeom>
-          <a:noFill/>
-          <a:ln/>
-        </p:spPr>
-        <p:txBody>
-          <a:bodyPr wrap="square" lIns="0" tIns="0" rIns="0" bIns="0" rtlCol="0" anchor="ctr"/>
-          <a:lstStyle/>
-          <a:p>
-            <a:pPr algn="ctr" indent="0" marL="0">
-              <a:buNone/>
-            </a:pPr>
-            <a:r>
-              <a:rPr lang="en-US" sz="1500" b="1" dirty="0">
-                <a:solidFill>
-                  <a:srgbClr val="003A63"/>
-                </a:solidFill>
-                <a:latin typeface="Aptos" pitchFamily="34" charset="0"/>
-                <a:ea typeface="Aptos" pitchFamily="34" charset="-122"/>
-                <a:cs typeface="Aptos" pitchFamily="34" charset="-120"/>
-              </a:rPr>
-              <a:t>Risk</a:t>
-            </a:r>
-            <a:endParaRPr lang="en-US" sz="1500" dirty="0"/>
+            <a:off x="7818120" y="3300984"/>
+            <a:ext cx="3090672" cy="877824"/>
+          </a:xfrm>
+          <a:prstGeom prst="rect">
+            <a:avLst/>
+          </a:prstGeom>
+          <a:noFill/>
+          <a:ln/>
+        </p:spPr>
+        <p:txBody>
+          <a:bodyPr wrap="square" lIns="254" tIns="254" rIns="254" bIns="254" rtlCol="0" anchor="t">
+            <a:normAutofit/>
+          </a:bodyPr>
+          <a:lstStyle/>
+          <a:p>
+            <a:r>
+              <a:rPr lang="en-US" sz="1380" dirty="0">
+                <a:solidFill>
+                  <a:srgbClr val="17364A"/>
+                </a:solidFill>
+                <a:latin typeface="Aptos" pitchFamily="34" charset="0"/>
+                <a:ea typeface="Aptos" pitchFamily="34" charset="-122"/>
+                <a:cs typeface="Aptos" pitchFamily="34" charset="-120"/>
+              </a:rPr>
+              <a:t>Misclassification.</a:t>
+            </a:r>
+            <a:endParaRPr lang="en-US" sz="1380" dirty="0"/>
+          </a:p>
+          <a:p>
+            <a:r>
+              <a:rPr lang="en-US" sz="1380" dirty="0">
+                <a:solidFill>
+                  <a:srgbClr val="17364A"/>
+                </a:solidFill>
+                <a:latin typeface="Aptos" pitchFamily="34" charset="0"/>
+                <a:ea typeface="Aptos" pitchFamily="34" charset="-122"/>
+                <a:cs typeface="Aptos" pitchFamily="34" charset="-120"/>
+              </a:rPr>
+              <a:t>Incorrect labels can affect routing or priority.</a:t>
+            </a:r>
+            <a:endParaRPr lang="en-US" sz="1380" dirty="0"/>
+          </a:p>
+          <a:p>
+            <a:r>
+              <a:rPr lang="en-US" sz="1380" dirty="0">
+                <a:solidFill>
+                  <a:srgbClr val="17364A"/>
+                </a:solidFill>
+                <a:latin typeface="Aptos" pitchFamily="34" charset="0"/>
+                <a:ea typeface="Aptos" pitchFamily="34" charset="-122"/>
+                <a:cs typeface="Aptos" pitchFamily="34" charset="-120"/>
+              </a:rPr>
+              <a:t>Guardrails include validation, confidence thresholds, review queues, and monitoring of.</a:t>
+            </a:r>
+            <a:endParaRPr lang="en-US" sz="1380" dirty="0"/>
           </a:p>
         </p:txBody>
       </p:sp>
       <p:sp>
         <p:nvSpPr>
           <p:cNvPr id="16" name="Shape 14"/>
-          <p:cNvSpPr/>
-          <p:nvPr/>
-        </p:nvSpPr>
-        <p:spPr>
-          <a:xfrm>
-            <a:off x="8366760" y="3639312"/>
-            <a:ext cx="2011680" cy="0"/>
-          </a:xfrm>
-          <a:prstGeom prst="line">
-            <a:avLst/>
-          </a:prstGeom>
-          <a:noFill/>
-          <a:ln w="63500">
-            <a:solidFill>
-              <a:srgbClr val="2F8A28"/>
-            </a:solidFill>
-            <a:prstDash val="solid"/>
-          </a:ln>
-        </p:spPr>
-      </p:sp>
-      <p:sp>
-        <p:nvSpPr>
-          <p:cNvPr id="17" name="Text 15"/>
-          <p:cNvSpPr/>
-          <p:nvPr/>
-        </p:nvSpPr>
-        <p:spPr>
-          <a:xfrm>
-            <a:off x="7909560" y="3849624"/>
-            <a:ext cx="2926080" cy="164592"/>
-          </a:xfrm>
-          <a:prstGeom prst="rect">
-            <a:avLst/>
-          </a:prstGeom>
-          <a:noFill/>
-          <a:ln/>
-        </p:spPr>
-        <p:txBody>
-          <a:bodyPr wrap="square" lIns="0" tIns="0" rIns="0" bIns="0" rtlCol="0" anchor="ctr"/>
-          <a:lstStyle/>
-          <a:p>
-            <a:pPr algn="ctr" indent="0" marL="0">
-              <a:buNone/>
-            </a:pPr>
-            <a:r>
-              <a:rPr lang="en-US" sz="900" dirty="0">
-                <a:solidFill>
-                  <a:srgbClr val="003A63"/>
-                </a:solidFill>
-                <a:latin typeface="Aptos" pitchFamily="34" charset="0"/>
-                <a:ea typeface="Aptos" pitchFamily="34" charset="-122"/>
-                <a:cs typeface="Aptos" pitchFamily="34" charset="-120"/>
-              </a:rPr>
-              <a:t>Human review</a:t>
-            </a:r>
-            <a:endParaRPr lang="en-US" sz="900" dirty="0"/>
-          </a:p>
-        </p:txBody>
-      </p:sp>
-      <p:sp>
-        <p:nvSpPr>
-          <p:cNvPr id="18" name="Shape 16"/>
           <p:cNvSpPr/>
           <p:nvPr/>
         </p:nvSpPr>
@@ -6085,7 +5741,7 @@
       </p:sp>
       <p:sp>
         <p:nvSpPr>
-          <p:cNvPr id="19" name="Text 17"/>
+          <p:cNvPr id="17" name="Text 15"/>
           <p:cNvSpPr/>
           <p:nvPr/>
         </p:nvSpPr>
@@ -6124,7 +5780,7 @@
       </p:sp>
       <p:sp>
         <p:nvSpPr>
-          <p:cNvPr id="20" name="Text 18"/>
+          <p:cNvPr id="18" name="Text 16"/>
           <p:cNvSpPr/>
           <p:nvPr/>
         </p:nvSpPr>
@@ -6632,13 +6288,11 @@
             </a:avLst>
           </a:prstGeom>
           <a:solidFill>
-            <a:srgbClr val="FFFFFF">
-              <a:alpha val="88000"/>
-            </a:srgbClr>
+            <a:srgbClr val="FFFFFF"/>
           </a:solidFill>
           <a:ln w="12700">
             <a:solidFill>
-              <a:srgbClr val="D6E8F2"/>
+              <a:srgbClr val="B9D7E6"/>
             </a:solidFill>
             <a:prstDash val="solid"/>
           </a:ln>
@@ -6646,30 +6300,42 @@
       </p:sp>
       <p:sp>
         <p:nvSpPr>
-          <p:cNvPr id="14" name="Shape 12"/>
-          <p:cNvSpPr/>
-          <p:nvPr/>
-        </p:nvSpPr>
-        <p:spPr>
-          <a:xfrm>
-            <a:off x="7927848" y="3319272"/>
-            <a:ext cx="792480" cy="749808"/>
-          </a:xfrm>
-          <a:prstGeom prst="roundRect">
-            <a:avLst>
-              <a:gd name="adj" fmla="val 14634"/>
-            </a:avLst>
-          </a:prstGeom>
-          <a:solidFill>
-            <a:srgbClr val="0068B7"/>
-          </a:solidFill>
-          <a:ln w="12700">
-            <a:solidFill>
-              <a:srgbClr val="0068B7"/>
-            </a:solidFill>
-            <a:prstDash val="solid"/>
-          </a:ln>
-        </p:spPr>
+          <p:cNvPr id="14" name="Text 12"/>
+          <p:cNvSpPr/>
+          <p:nvPr/>
+        </p:nvSpPr>
+        <p:spPr>
+          <a:xfrm>
+            <a:off x="7799832" y="2935224"/>
+            <a:ext cx="3145536" cy="256032"/>
+          </a:xfrm>
+          <a:prstGeom prst="rect">
+            <a:avLst/>
+          </a:prstGeom>
+          <a:noFill/>
+          <a:ln/>
+        </p:spPr>
+        <p:txBody>
+          <a:bodyPr wrap="square" lIns="0" tIns="0" rIns="0" bIns="0" rtlCol="0" anchor="ctr"/>
+          <a:lstStyle/>
+          <a:p>
+            <a:pPr indent="0" marL="0">
+              <a:buNone/>
+            </a:pPr>
+            <a:r>
+              <a:rPr lang="en-US" sz="1300" b="1" dirty="0">
+                <a:solidFill>
+                  <a:srgbClr val="0068B7"/>
+                </a:solidFill>
+                <a:latin typeface="Aptos" pitchFamily="34" charset="0"/>
+                <a:ea typeface="Aptos" pitchFamily="34" charset="-122"/>
+                <a:cs typeface="Aptos" pitchFamily="34" charset="-120"/>
+              </a:rPr>
+              <a:t>Concept checkpoints</a:t>
+            </a:r>
+            <a:endParaRPr lang="en-US" sz="1300" dirty="0"/>
+          </a:p>
+        </p:txBody>
       </p:sp>
       <p:sp>
         <p:nvSpPr>
@@ -6679,240 +6345,67 @@
         </p:nvSpPr>
         <p:spPr>
           <a:xfrm>
-            <a:off x="8001000" y="3511296"/>
-            <a:ext cx="646176" cy="310896"/>
-          </a:xfrm>
-          <a:prstGeom prst="rect">
-            <a:avLst/>
-          </a:prstGeom>
-          <a:noFill/>
-          <a:ln/>
-        </p:spPr>
-        <p:txBody>
-          <a:bodyPr wrap="square" lIns="0" tIns="0" rIns="0" bIns="0" rtlCol="0" anchor="ctr">
+            <a:off x="7818120" y="3300984"/>
+            <a:ext cx="3090672" cy="877824"/>
+          </a:xfrm>
+          <a:prstGeom prst="rect">
+            <a:avLst/>
+          </a:prstGeom>
+          <a:noFill/>
+          <a:ln/>
+        </p:spPr>
+        <p:txBody>
+          <a:bodyPr wrap="square" lIns="254" tIns="254" rIns="254" bIns="254" rtlCol="0" anchor="t">
             <a:normAutofit/>
           </a:bodyPr>
           <a:lstStyle/>
           <a:p>
-            <a:pPr algn="ctr" indent="0" marL="0">
-              <a:buNone/>
-            </a:pPr>
-            <a:r>
-              <a:rPr lang="en-US" sz="1500" b="1" dirty="0">
-                <a:solidFill>
-                  <a:srgbClr val="FFFFFF"/>
-                </a:solidFill>
-                <a:latin typeface="Aptos" pitchFamily="34" charset="0"/>
-                <a:ea typeface="Aptos" pitchFamily="34" charset="-122"/>
-                <a:cs typeface="Aptos" pitchFamily="34" charset="-120"/>
-              </a:rPr>
-              <a:t>Plan</a:t>
-            </a:r>
-            <a:endParaRPr lang="en-US" sz="1500" dirty="0"/>
+            <a:r>
+              <a:rPr lang="en-US" sz="1380" dirty="0">
+                <a:solidFill>
+                  <a:srgbClr val="17364A"/>
+                </a:solidFill>
+                <a:latin typeface="Aptos" pitchFamily="34" charset="0"/>
+                <a:ea typeface="Aptos" pitchFamily="34" charset="-122"/>
+                <a:cs typeface="Aptos" pitchFamily="34" charset="-120"/>
+              </a:rPr>
+              <a:t>Generative AI is often used for summarization, drafting, and question answering, but.</a:t>
+            </a:r>
+            <a:endParaRPr lang="en-US" sz="1380" dirty="0"/>
+          </a:p>
+          <a:p>
+            <a:r>
+              <a:rPr lang="en-US" sz="1380" dirty="0">
+                <a:solidFill>
+                  <a:srgbClr val="17364A"/>
+                </a:solidFill>
+                <a:latin typeface="Aptos" pitchFamily="34" charset="0"/>
+                <a:ea typeface="Aptos" pitchFamily="34" charset="-122"/>
+                <a:cs typeface="Aptos" pitchFamily="34" charset="-120"/>
+              </a:rPr>
+              <a:t>RAG systems use NLP to retrieve and summarize documents, which requires document.</a:t>
+            </a:r>
+            <a:endParaRPr lang="en-US" sz="1380" dirty="0"/>
+          </a:p>
+          <a:p>
+            <a:r>
+              <a:rPr lang="en-US" sz="1380" dirty="0">
+                <a:solidFill>
+                  <a:srgbClr val="17364A"/>
+                </a:solidFill>
+                <a:latin typeface="Aptos" pitchFamily="34" charset="0"/>
+                <a:ea typeface="Aptos" pitchFamily="34" charset="-122"/>
+                <a:cs typeface="Aptos" pitchFamily="34" charset="-120"/>
+              </a:rPr>
+              <a:t>Agentic AI using NLP to trigger actions should require clear thresholds and human approval.</a:t>
+            </a:r>
+            <a:endParaRPr lang="en-US" sz="1380" dirty="0"/>
           </a:p>
         </p:txBody>
       </p:sp>
       <p:sp>
         <p:nvSpPr>
           <p:cNvPr id="16" name="Shape 14"/>
-          <p:cNvSpPr/>
-          <p:nvPr/>
-        </p:nvSpPr>
-        <p:spPr>
-          <a:xfrm>
-            <a:off x="8976360" y="3319272"/>
-            <a:ext cx="792480" cy="749808"/>
-          </a:xfrm>
-          <a:prstGeom prst="roundRect">
-            <a:avLst>
-              <a:gd name="adj" fmla="val 14634"/>
-            </a:avLst>
-          </a:prstGeom>
-          <a:solidFill>
-            <a:srgbClr val="2F8A28"/>
-          </a:solidFill>
-          <a:ln w="12700">
-            <a:solidFill>
-              <a:srgbClr val="2F8A28"/>
-            </a:solidFill>
-            <a:prstDash val="solid"/>
-          </a:ln>
-        </p:spPr>
-      </p:sp>
-      <p:sp>
-        <p:nvSpPr>
-          <p:cNvPr id="17" name="Text 15"/>
-          <p:cNvSpPr/>
-          <p:nvPr/>
-        </p:nvSpPr>
-        <p:spPr>
-          <a:xfrm>
-            <a:off x="9049512" y="3511296"/>
-            <a:ext cx="646176" cy="310896"/>
-          </a:xfrm>
-          <a:prstGeom prst="rect">
-            <a:avLst/>
-          </a:prstGeom>
-          <a:noFill/>
-          <a:ln/>
-        </p:spPr>
-        <p:txBody>
-          <a:bodyPr wrap="square" lIns="0" tIns="0" rIns="0" bIns="0" rtlCol="0" anchor="ctr">
-            <a:normAutofit/>
-          </a:bodyPr>
-          <a:lstStyle/>
-          <a:p>
-            <a:pPr algn="ctr" indent="0" marL="0">
-              <a:buNone/>
-            </a:pPr>
-            <a:r>
-              <a:rPr lang="en-US" sz="1500" b="1" dirty="0">
-                <a:solidFill>
-                  <a:srgbClr val="FFFFFF"/>
-                </a:solidFill>
-                <a:latin typeface="Aptos" pitchFamily="34" charset="0"/>
-                <a:ea typeface="Aptos" pitchFamily="34" charset="-122"/>
-                <a:cs typeface="Aptos" pitchFamily="34" charset="-120"/>
-              </a:rPr>
-              <a:t>Do</a:t>
-            </a:r>
-            <a:endParaRPr lang="en-US" sz="1500" dirty="0"/>
-          </a:p>
-        </p:txBody>
-      </p:sp>
-      <p:sp>
-        <p:nvSpPr>
-          <p:cNvPr id="18" name="Shape 16"/>
-          <p:cNvSpPr/>
-          <p:nvPr/>
-        </p:nvSpPr>
-        <p:spPr>
-          <a:xfrm>
-            <a:off x="10024872" y="3319272"/>
-            <a:ext cx="792480" cy="749808"/>
-          </a:xfrm>
-          <a:prstGeom prst="roundRect">
-            <a:avLst>
-              <a:gd name="adj" fmla="val 14634"/>
-            </a:avLst>
-          </a:prstGeom>
-          <a:solidFill>
-            <a:srgbClr val="D69A2D"/>
-          </a:solidFill>
-          <a:ln w="12700">
-            <a:solidFill>
-              <a:srgbClr val="D69A2D"/>
-            </a:solidFill>
-            <a:prstDash val="solid"/>
-          </a:ln>
-        </p:spPr>
-      </p:sp>
-      <p:sp>
-        <p:nvSpPr>
-          <p:cNvPr id="19" name="Text 17"/>
-          <p:cNvSpPr/>
-          <p:nvPr/>
-        </p:nvSpPr>
-        <p:spPr>
-          <a:xfrm>
-            <a:off x="10098024" y="3511296"/>
-            <a:ext cx="646176" cy="310896"/>
-          </a:xfrm>
-          <a:prstGeom prst="rect">
-            <a:avLst/>
-          </a:prstGeom>
-          <a:noFill/>
-          <a:ln/>
-        </p:spPr>
-        <p:txBody>
-          <a:bodyPr wrap="square" lIns="0" tIns="0" rIns="0" bIns="0" rtlCol="0" anchor="ctr">
-            <a:normAutofit/>
-          </a:bodyPr>
-          <a:lstStyle/>
-          <a:p>
-            <a:pPr algn="ctr" indent="0" marL="0">
-              <a:buNone/>
-            </a:pPr>
-            <a:r>
-              <a:rPr lang="en-US" sz="1500" b="1" dirty="0">
-                <a:solidFill>
-                  <a:srgbClr val="FFFFFF"/>
-                </a:solidFill>
-                <a:latin typeface="Aptos" pitchFamily="34" charset="0"/>
-                <a:ea typeface="Aptos" pitchFamily="34" charset="-122"/>
-                <a:cs typeface="Aptos" pitchFamily="34" charset="-120"/>
-              </a:rPr>
-              <a:t>Review</a:t>
-            </a:r>
-            <a:endParaRPr lang="en-US" sz="1500" dirty="0"/>
-          </a:p>
-        </p:txBody>
-      </p:sp>
-      <p:sp>
-        <p:nvSpPr>
-          <p:cNvPr id="20" name="Shape 18"/>
-          <p:cNvSpPr/>
-          <p:nvPr/>
-        </p:nvSpPr>
-        <p:spPr>
-          <a:xfrm>
-            <a:off x="8293608" y="4389120"/>
-            <a:ext cx="2157984" cy="0"/>
-          </a:xfrm>
-          <a:prstGeom prst="line">
-            <a:avLst/>
-          </a:prstGeom>
-          <a:noFill/>
-          <a:ln w="25400">
-            <a:solidFill>
-              <a:srgbClr val="8ABBD8"/>
-            </a:solidFill>
-            <a:prstDash val="solid"/>
-          </a:ln>
-        </p:spPr>
-      </p:sp>
-      <p:sp>
-        <p:nvSpPr>
-          <p:cNvPr id="21" name="Text 19"/>
-          <p:cNvSpPr/>
-          <p:nvPr/>
-        </p:nvSpPr>
-        <p:spPr>
-          <a:xfrm>
-            <a:off x="7909560" y="3977640"/>
-            <a:ext cx="2926080" cy="182880"/>
-          </a:xfrm>
-          <a:prstGeom prst="rect">
-            <a:avLst/>
-          </a:prstGeom>
-          <a:noFill/>
-          <a:ln/>
-        </p:spPr>
-        <p:txBody>
-          <a:bodyPr wrap="square" lIns="0" tIns="0" rIns="0" bIns="0" rtlCol="0" anchor="ctr"/>
-          <a:lstStyle/>
-          <a:p>
-            <a:pPr algn="ctr" indent="0" marL="0">
-              <a:buNone/>
-            </a:pPr>
-            <a:r>
-              <a:rPr lang="en-US" sz="1000" dirty="0">
-                <a:solidFill>
-                  <a:srgbClr val="003A63"/>
-                </a:solidFill>
-                <a:latin typeface="Aptos" pitchFamily="34" charset="0"/>
-                <a:ea typeface="Aptos" pitchFamily="34" charset="-122"/>
-                <a:cs typeface="Aptos" pitchFamily="34" charset="-120"/>
-              </a:rPr>
-              <a:t>Dependencies visible</a:t>
-            </a:r>
-            <a:endParaRPr lang="en-US" sz="1000" dirty="0"/>
-          </a:p>
-        </p:txBody>
-      </p:sp>
-      <p:sp>
-        <p:nvSpPr>
-          <p:cNvPr id="22" name="Shape 20"/>
           <p:cNvSpPr/>
           <p:nvPr/>
         </p:nvSpPr>
@@ -6939,7 +6432,7 @@
       </p:sp>
       <p:sp>
         <p:nvSpPr>
-          <p:cNvPr id="23" name="Text 21"/>
+          <p:cNvPr id="17" name="Text 15"/>
           <p:cNvSpPr/>
           <p:nvPr/>
         </p:nvSpPr>
@@ -6978,7 +6471,7 @@
       </p:sp>
       <p:sp>
         <p:nvSpPr>
-          <p:cNvPr id="24" name="Text 22"/>
+          <p:cNvPr id="18" name="Text 16"/>
           <p:cNvSpPr/>
           <p:nvPr/>
         </p:nvSpPr>
@@ -7486,13 +6979,11 @@
             </a:avLst>
           </a:prstGeom>
           <a:solidFill>
-            <a:srgbClr val="FFFFFF">
-              <a:alpha val="88000"/>
-            </a:srgbClr>
+            <a:srgbClr val="FFFFFF"/>
           </a:solidFill>
           <a:ln w="12700">
             <a:solidFill>
-              <a:srgbClr val="D6E8F2"/>
+              <a:srgbClr val="B9D7E6"/>
             </a:solidFill>
             <a:prstDash val="solid"/>
           </a:ln>
@@ -7500,261 +6991,112 @@
       </p:sp>
       <p:sp>
         <p:nvSpPr>
-          <p:cNvPr id="14" name="Shape 12"/>
-          <p:cNvSpPr/>
-          <p:nvPr/>
-        </p:nvSpPr>
-        <p:spPr>
-          <a:xfrm>
-            <a:off x="8138160" y="3291840"/>
-            <a:ext cx="329184" cy="329184"/>
-          </a:xfrm>
-          <a:prstGeom prst="ellipse">
-            <a:avLst/>
-          </a:prstGeom>
-          <a:solidFill>
-            <a:srgbClr val="0068B7"/>
-          </a:solidFill>
-          <a:ln w="12700">
-            <a:solidFill>
-              <a:srgbClr val="0068B7"/>
-            </a:solidFill>
-            <a:prstDash val="solid"/>
-          </a:ln>
-        </p:spPr>
-      </p:sp>
-      <p:sp>
-        <p:nvSpPr>
-          <p:cNvPr id="15" name="Shape 13"/>
-          <p:cNvSpPr/>
-          <p:nvPr/>
-        </p:nvSpPr>
-        <p:spPr>
-          <a:xfrm>
-            <a:off x="10332720" y="3383280"/>
-            <a:ext cx="329184" cy="329184"/>
-          </a:xfrm>
-          <a:prstGeom prst="ellipse">
-            <a:avLst/>
-          </a:prstGeom>
-          <a:solidFill>
-            <a:srgbClr val="2F8A28"/>
-          </a:solidFill>
-          <a:ln w="12700">
-            <a:solidFill>
-              <a:srgbClr val="2F8A28"/>
-            </a:solidFill>
-            <a:prstDash val="solid"/>
-          </a:ln>
-        </p:spPr>
+          <p:cNvPr id="14" name="Text 12"/>
+          <p:cNvSpPr/>
+          <p:nvPr/>
+        </p:nvSpPr>
+        <p:spPr>
+          <a:xfrm>
+            <a:off x="7799832" y="2935224"/>
+            <a:ext cx="3145536" cy="256032"/>
+          </a:xfrm>
+          <a:prstGeom prst="rect">
+            <a:avLst/>
+          </a:prstGeom>
+          <a:noFill/>
+          <a:ln/>
+        </p:spPr>
+        <p:txBody>
+          <a:bodyPr wrap="square" lIns="0" tIns="0" rIns="0" bIns="0" rtlCol="0" anchor="ctr"/>
+          <a:lstStyle/>
+          <a:p>
+            <a:pPr indent="0" marL="0">
+              <a:buNone/>
+            </a:pPr>
+            <a:r>
+              <a:rPr lang="en-US" sz="1300" b="1" dirty="0">
+                <a:solidFill>
+                  <a:srgbClr val="0068B7"/>
+                </a:solidFill>
+                <a:latin typeface="Aptos" pitchFamily="34" charset="0"/>
+                <a:ea typeface="Aptos" pitchFamily="34" charset="-122"/>
+                <a:cs typeface="Aptos" pitchFamily="34" charset="-120"/>
+              </a:rPr>
+              <a:t>Concept checkpoints</a:t>
+            </a:r>
+            <a:endParaRPr lang="en-US" sz="1300" dirty="0"/>
+          </a:p>
+        </p:txBody>
+      </p:sp>
+      <p:sp>
+        <p:nvSpPr>
+          <p:cNvPr id="15" name="Text 13"/>
+          <p:cNvSpPr/>
+          <p:nvPr/>
+        </p:nvSpPr>
+        <p:spPr>
+          <a:xfrm>
+            <a:off x="7818120" y="3300984"/>
+            <a:ext cx="3090672" cy="877824"/>
+          </a:xfrm>
+          <a:prstGeom prst="rect">
+            <a:avLst/>
+          </a:prstGeom>
+          <a:noFill/>
+          <a:ln/>
+        </p:spPr>
+        <p:txBody>
+          <a:bodyPr wrap="square" lIns="254" tIns="254" rIns="254" bIns="254" rtlCol="0" anchor="t">
+            <a:normAutofit/>
+          </a:bodyPr>
+          <a:lstStyle/>
+          <a:p>
+            <a:r>
+              <a:rPr lang="en-US" sz="1380" dirty="0">
+                <a:solidFill>
+                  <a:srgbClr val="17364A"/>
+                </a:solidFill>
+                <a:latin typeface="Aptos" pitchFamily="34" charset="0"/>
+                <a:ea typeface="Aptos" pitchFamily="34" charset="-122"/>
+                <a:cs typeface="Aptos" pitchFamily="34" charset="-120"/>
+              </a:rPr>
+              <a:t>Which public health workflows involve large volumes of free text?</a:t>
+            </a:r>
+            <a:endParaRPr lang="en-US" sz="1380" dirty="0"/>
+          </a:p>
+          <a:p>
+            <a:r>
+              <a:rPr lang="en-US" sz="1380" dirty="0">
+                <a:solidFill>
+                  <a:srgbClr val="17364A"/>
+                </a:solidFill>
+                <a:latin typeface="Aptos" pitchFamily="34" charset="0"/>
+                <a:ea typeface="Aptos" pitchFamily="34" charset="-122"/>
+                <a:cs typeface="Aptos" pitchFamily="34" charset="-120"/>
+              </a:rPr>
+              <a:t>What task would NLP support: extraction, classification, summarization, translation, or.</a:t>
+            </a:r>
+            <a:endParaRPr lang="en-US" sz="1380" dirty="0"/>
+          </a:p>
+          <a:p>
+            <a:r>
+              <a:rPr lang="en-US" sz="1380" dirty="0">
+                <a:solidFill>
+                  <a:srgbClr val="17364A"/>
+                </a:solidFill>
+                <a:latin typeface="Aptos" pitchFamily="34" charset="0"/>
+                <a:ea typeface="Aptos" pitchFamily="34" charset="-122"/>
+                <a:cs typeface="Aptos" pitchFamily="34" charset="-120"/>
+              </a:rPr>
+              <a:t>What errors would be most harmful?</a:t>
+            </a:r>
+            <a:endParaRPr lang="en-US" sz="1380" dirty="0"/>
+          </a:p>
+        </p:txBody>
       </p:sp>
       <p:sp>
         <p:nvSpPr>
           <p:cNvPr id="16" name="Shape 14"/>
-          <p:cNvSpPr/>
-          <p:nvPr/>
-        </p:nvSpPr>
-        <p:spPr>
-          <a:xfrm>
-            <a:off x="9235440" y="3502152"/>
-            <a:ext cx="329184" cy="329184"/>
-          </a:xfrm>
-          <a:prstGeom prst="ellipse">
-            <a:avLst/>
-          </a:prstGeom>
-          <a:solidFill>
-            <a:srgbClr val="D69A2D"/>
-          </a:solidFill>
-          <a:ln w="12700">
-            <a:solidFill>
-              <a:srgbClr val="D69A2D"/>
-            </a:solidFill>
-            <a:prstDash val="solid"/>
-          </a:ln>
-        </p:spPr>
-      </p:sp>
-      <p:sp>
-        <p:nvSpPr>
-          <p:cNvPr id="17" name="Shape 15"/>
-          <p:cNvSpPr/>
-          <p:nvPr/>
-        </p:nvSpPr>
-        <p:spPr>
-          <a:xfrm>
-            <a:off x="9235440" y="3657600"/>
-            <a:ext cx="329184" cy="329184"/>
-          </a:xfrm>
-          <a:prstGeom prst="ellipse">
-            <a:avLst/>
-          </a:prstGeom>
-          <a:solidFill>
-            <a:srgbClr val="6A4CA3"/>
-          </a:solidFill>
-          <a:ln w="12700">
-            <a:solidFill>
-              <a:srgbClr val="6A4CA3"/>
-            </a:solidFill>
-            <a:prstDash val="solid"/>
-          </a:ln>
-        </p:spPr>
-      </p:sp>
-      <p:sp>
-        <p:nvSpPr>
-          <p:cNvPr id="18" name="Shape 16"/>
-          <p:cNvSpPr/>
-          <p:nvPr/>
-        </p:nvSpPr>
-        <p:spPr>
-          <a:xfrm>
-            <a:off x="8302752" y="3456432"/>
-            <a:ext cx="1097280" cy="365760"/>
-          </a:xfrm>
-          <a:prstGeom prst="line">
-            <a:avLst/>
-          </a:prstGeom>
-          <a:noFill/>
-          <a:ln w="19050">
-            <a:solidFill>
-              <a:srgbClr val="8ABBD8"/>
-            </a:solidFill>
-            <a:prstDash val="solid"/>
-          </a:ln>
-        </p:spPr>
-      </p:sp>
-      <p:sp>
-        <p:nvSpPr>
-          <p:cNvPr id="19" name="Shape 17"/>
-          <p:cNvSpPr/>
-          <p:nvPr/>
-        </p:nvSpPr>
-        <p:spPr>
-          <a:xfrm>
-            <a:off x="10497312" y="3547872"/>
-            <a:ext cx="-1097280" cy="274320"/>
-          </a:xfrm>
-          <a:prstGeom prst="line">
-            <a:avLst/>
-          </a:prstGeom>
-          <a:noFill/>
-          <a:ln w="19050">
-            <a:solidFill>
-              <a:srgbClr val="8ABBD8"/>
-            </a:solidFill>
-            <a:prstDash val="solid"/>
-          </a:ln>
-        </p:spPr>
-      </p:sp>
-      <p:sp>
-        <p:nvSpPr>
-          <p:cNvPr id="20" name="Shape 18"/>
-          <p:cNvSpPr/>
-          <p:nvPr/>
-        </p:nvSpPr>
-        <p:spPr>
-          <a:xfrm>
-            <a:off x="9400032" y="3666744"/>
-            <a:ext cx="0" cy="155448"/>
-          </a:xfrm>
-          <a:prstGeom prst="line">
-            <a:avLst/>
-          </a:prstGeom>
-          <a:noFill/>
-          <a:ln w="19050">
-            <a:solidFill>
-              <a:srgbClr val="8ABBD8"/>
-            </a:solidFill>
-            <a:prstDash val="solid"/>
-          </a:ln>
-        </p:spPr>
-      </p:sp>
-      <p:sp>
-        <p:nvSpPr>
-          <p:cNvPr id="21" name="Shape 19"/>
-          <p:cNvSpPr/>
-          <p:nvPr/>
-        </p:nvSpPr>
-        <p:spPr>
-          <a:xfrm>
-            <a:off x="8302752" y="3456432"/>
-            <a:ext cx="1097280" cy="210312"/>
-          </a:xfrm>
-          <a:prstGeom prst="line">
-            <a:avLst/>
-          </a:prstGeom>
-          <a:noFill/>
-          <a:ln w="19050">
-            <a:solidFill>
-              <a:srgbClr val="8ABBD8"/>
-            </a:solidFill>
-            <a:prstDash val="solid"/>
-          </a:ln>
-        </p:spPr>
-      </p:sp>
-      <p:sp>
-        <p:nvSpPr>
-          <p:cNvPr id="22" name="Shape 20"/>
-          <p:cNvSpPr/>
-          <p:nvPr/>
-        </p:nvSpPr>
-        <p:spPr>
-          <a:xfrm>
-            <a:off x="10497312" y="3547872"/>
-            <a:ext cx="-1097280" cy="118872"/>
-          </a:xfrm>
-          <a:prstGeom prst="line">
-            <a:avLst/>
-          </a:prstGeom>
-          <a:noFill/>
-          <a:ln w="19050">
-            <a:solidFill>
-              <a:srgbClr val="8ABBD8"/>
-            </a:solidFill>
-            <a:prstDash val="solid"/>
-          </a:ln>
-        </p:spPr>
-      </p:sp>
-      <p:sp>
-        <p:nvSpPr>
-          <p:cNvPr id="23" name="Text 21"/>
-          <p:cNvSpPr/>
-          <p:nvPr/>
-        </p:nvSpPr>
-        <p:spPr>
-          <a:xfrm>
-            <a:off x="7909560" y="3977640"/>
-            <a:ext cx="2926080" cy="182880"/>
-          </a:xfrm>
-          <a:prstGeom prst="rect">
-            <a:avLst/>
-          </a:prstGeom>
-          <a:noFill/>
-          <a:ln/>
-        </p:spPr>
-        <p:txBody>
-          <a:bodyPr wrap="square" lIns="0" tIns="0" rIns="0" bIns="0" rtlCol="0" anchor="ctr"/>
-          <a:lstStyle/>
-          <a:p>
-            <a:pPr algn="ctr" indent="0" marL="0">
-              <a:buNone/>
-            </a:pPr>
-            <a:r>
-              <a:rPr lang="en-US" sz="1000" dirty="0">
-                <a:solidFill>
-                  <a:srgbClr val="003A63"/>
-                </a:solidFill>
-                <a:latin typeface="Aptos" pitchFamily="34" charset="0"/>
-                <a:ea typeface="Aptos" pitchFamily="34" charset="-122"/>
-                <a:cs typeface="Aptos" pitchFamily="34" charset="-120"/>
-              </a:rPr>
-              <a:t>People and trust</a:t>
-            </a:r>
-            <a:endParaRPr lang="en-US" sz="1000" dirty="0"/>
-          </a:p>
-        </p:txBody>
-      </p:sp>
-      <p:sp>
-        <p:nvSpPr>
-          <p:cNvPr id="24" name="Shape 22"/>
           <p:cNvSpPr/>
           <p:nvPr/>
         </p:nvSpPr>
@@ -7781,7 +7123,7 @@
       </p:sp>
       <p:sp>
         <p:nvSpPr>
-          <p:cNvPr id="25" name="Text 23"/>
+          <p:cNvPr id="17" name="Text 15"/>
           <p:cNvSpPr/>
           <p:nvPr/>
         </p:nvSpPr>
@@ -7820,7 +7162,7 @@
       </p:sp>
       <p:sp>
         <p:nvSpPr>
-          <p:cNvPr id="26" name="Text 24"/>
+          <p:cNvPr id="18" name="Text 16"/>
           <p:cNvSpPr/>
           <p:nvPr/>
         </p:nvSpPr>
@@ -8314,13 +7656,11 @@
             </a:avLst>
           </a:prstGeom>
           <a:solidFill>
-            <a:srgbClr val="FFFFFF">
-              <a:alpha val="88000"/>
-            </a:srgbClr>
+            <a:srgbClr val="FFFFFF"/>
           </a:solidFill>
           <a:ln w="12700">
             <a:solidFill>
-              <a:srgbClr val="D6E8F2"/>
+              <a:srgbClr val="B9D7E6"/>
             </a:solidFill>
             <a:prstDash val="solid"/>
           </a:ln>
@@ -8328,261 +7668,98 @@
       </p:sp>
       <p:sp>
         <p:nvSpPr>
-          <p:cNvPr id="14" name="Shape 12"/>
-          <p:cNvSpPr/>
-          <p:nvPr/>
-        </p:nvSpPr>
-        <p:spPr>
-          <a:xfrm>
-            <a:off x="8138160" y="3291840"/>
-            <a:ext cx="329184" cy="329184"/>
-          </a:xfrm>
-          <a:prstGeom prst="ellipse">
-            <a:avLst/>
-          </a:prstGeom>
-          <a:solidFill>
-            <a:srgbClr val="0068B7"/>
-          </a:solidFill>
-          <a:ln w="12700">
-            <a:solidFill>
-              <a:srgbClr val="0068B7"/>
-            </a:solidFill>
-            <a:prstDash val="solid"/>
-          </a:ln>
-        </p:spPr>
-      </p:sp>
-      <p:sp>
-        <p:nvSpPr>
-          <p:cNvPr id="15" name="Shape 13"/>
-          <p:cNvSpPr/>
-          <p:nvPr/>
-        </p:nvSpPr>
-        <p:spPr>
-          <a:xfrm>
-            <a:off x="10332720" y="3383280"/>
-            <a:ext cx="329184" cy="329184"/>
-          </a:xfrm>
-          <a:prstGeom prst="ellipse">
-            <a:avLst/>
-          </a:prstGeom>
-          <a:solidFill>
-            <a:srgbClr val="2F8A28"/>
-          </a:solidFill>
-          <a:ln w="12700">
-            <a:solidFill>
-              <a:srgbClr val="2F8A28"/>
-            </a:solidFill>
-            <a:prstDash val="solid"/>
-          </a:ln>
-        </p:spPr>
+          <p:cNvPr id="14" name="Text 12"/>
+          <p:cNvSpPr/>
+          <p:nvPr/>
+        </p:nvSpPr>
+        <p:spPr>
+          <a:xfrm>
+            <a:off x="7799832" y="2935224"/>
+            <a:ext cx="3145536" cy="256032"/>
+          </a:xfrm>
+          <a:prstGeom prst="rect">
+            <a:avLst/>
+          </a:prstGeom>
+          <a:noFill/>
+          <a:ln/>
+        </p:spPr>
+        <p:txBody>
+          <a:bodyPr wrap="square" lIns="0" tIns="0" rIns="0" bIns="0" rtlCol="0" anchor="ctr"/>
+          <a:lstStyle/>
+          <a:p>
+            <a:pPr indent="0" marL="0">
+              <a:buNone/>
+            </a:pPr>
+            <a:r>
+              <a:rPr lang="en-US" sz="1300" b="1" dirty="0">
+                <a:solidFill>
+                  <a:srgbClr val="0068B7"/>
+                </a:solidFill>
+                <a:latin typeface="Aptos" pitchFamily="34" charset="0"/>
+                <a:ea typeface="Aptos" pitchFamily="34" charset="-122"/>
+                <a:cs typeface="Aptos" pitchFamily="34" charset="-120"/>
+              </a:rPr>
+              <a:t>Concept checkpoints</a:t>
+            </a:r>
+            <a:endParaRPr lang="en-US" sz="1300" dirty="0"/>
+          </a:p>
+        </p:txBody>
+      </p:sp>
+      <p:sp>
+        <p:nvSpPr>
+          <p:cNvPr id="15" name="Text 13"/>
+          <p:cNvSpPr/>
+          <p:nvPr/>
+        </p:nvSpPr>
+        <p:spPr>
+          <a:xfrm>
+            <a:off x="7818120" y="3300984"/>
+            <a:ext cx="3090672" cy="877824"/>
+          </a:xfrm>
+          <a:prstGeom prst="rect">
+            <a:avLst/>
+          </a:prstGeom>
+          <a:noFill/>
+          <a:ln/>
+        </p:spPr>
+        <p:txBody>
+          <a:bodyPr wrap="square" lIns="254" tIns="254" rIns="254" bIns="254" rtlCol="0" anchor="t">
+            <a:normAutofit/>
+          </a:bodyPr>
+          <a:lstStyle/>
+          <a:p>
+            <a:r>
+              <a:rPr lang="en-US" sz="1380" dirty="0">
+                <a:solidFill>
+                  <a:srgbClr val="17364A"/>
+                </a:solidFill>
+                <a:latin typeface="Aptos" pitchFamily="34" charset="0"/>
+                <a:ea typeface="Aptos" pitchFamily="34" charset="-122"/>
+                <a:cs typeface="Aptos" pitchFamily="34" charset="-120"/>
+              </a:rPr>
+              <a:t>What source material must be retained for human review?</a:t>
+            </a:r>
+            <a:endParaRPr lang="en-US" sz="1380" dirty="0"/>
+          </a:p>
+          <a:p>
+            <a:r>
+              <a:rPr lang="en-US" sz="1380" dirty="0">
+                <a:solidFill>
+                  <a:srgbClr val="17364A"/>
+                </a:solidFill>
+                <a:latin typeface="Aptos" pitchFamily="34" charset="0"/>
+                <a:ea typeface="Aptos" pitchFamily="34" charset="-122"/>
+                <a:cs typeface="Aptos" pitchFamily="34" charset="-120"/>
+              </a:rPr>
+              <a:t>How will staff evaluate accuracy across languages, populations, and program areas?</a:t>
+            </a:r>
+            <a:endParaRPr lang="en-US" sz="1380" dirty="0"/>
+          </a:p>
+        </p:txBody>
       </p:sp>
       <p:sp>
         <p:nvSpPr>
           <p:cNvPr id="16" name="Shape 14"/>
-          <p:cNvSpPr/>
-          <p:nvPr/>
-        </p:nvSpPr>
-        <p:spPr>
-          <a:xfrm>
-            <a:off x="9235440" y="3502152"/>
-            <a:ext cx="329184" cy="329184"/>
-          </a:xfrm>
-          <a:prstGeom prst="ellipse">
-            <a:avLst/>
-          </a:prstGeom>
-          <a:solidFill>
-            <a:srgbClr val="D69A2D"/>
-          </a:solidFill>
-          <a:ln w="12700">
-            <a:solidFill>
-              <a:srgbClr val="D69A2D"/>
-            </a:solidFill>
-            <a:prstDash val="solid"/>
-          </a:ln>
-        </p:spPr>
-      </p:sp>
-      <p:sp>
-        <p:nvSpPr>
-          <p:cNvPr id="17" name="Shape 15"/>
-          <p:cNvSpPr/>
-          <p:nvPr/>
-        </p:nvSpPr>
-        <p:spPr>
-          <a:xfrm>
-            <a:off x="9235440" y="3657600"/>
-            <a:ext cx="329184" cy="329184"/>
-          </a:xfrm>
-          <a:prstGeom prst="ellipse">
-            <a:avLst/>
-          </a:prstGeom>
-          <a:solidFill>
-            <a:srgbClr val="6A4CA3"/>
-          </a:solidFill>
-          <a:ln w="12700">
-            <a:solidFill>
-              <a:srgbClr val="6A4CA3"/>
-            </a:solidFill>
-            <a:prstDash val="solid"/>
-          </a:ln>
-        </p:spPr>
-      </p:sp>
-      <p:sp>
-        <p:nvSpPr>
-          <p:cNvPr id="18" name="Shape 16"/>
-          <p:cNvSpPr/>
-          <p:nvPr/>
-        </p:nvSpPr>
-        <p:spPr>
-          <a:xfrm>
-            <a:off x="8302752" y="3456432"/>
-            <a:ext cx="1097280" cy="365760"/>
-          </a:xfrm>
-          <a:prstGeom prst="line">
-            <a:avLst/>
-          </a:prstGeom>
-          <a:noFill/>
-          <a:ln w="19050">
-            <a:solidFill>
-              <a:srgbClr val="8ABBD8"/>
-            </a:solidFill>
-            <a:prstDash val="solid"/>
-          </a:ln>
-        </p:spPr>
-      </p:sp>
-      <p:sp>
-        <p:nvSpPr>
-          <p:cNvPr id="19" name="Shape 17"/>
-          <p:cNvSpPr/>
-          <p:nvPr/>
-        </p:nvSpPr>
-        <p:spPr>
-          <a:xfrm>
-            <a:off x="10497312" y="3547872"/>
-            <a:ext cx="-1097280" cy="274320"/>
-          </a:xfrm>
-          <a:prstGeom prst="line">
-            <a:avLst/>
-          </a:prstGeom>
-          <a:noFill/>
-          <a:ln w="19050">
-            <a:solidFill>
-              <a:srgbClr val="8ABBD8"/>
-            </a:solidFill>
-            <a:prstDash val="solid"/>
-          </a:ln>
-        </p:spPr>
-      </p:sp>
-      <p:sp>
-        <p:nvSpPr>
-          <p:cNvPr id="20" name="Shape 18"/>
-          <p:cNvSpPr/>
-          <p:nvPr/>
-        </p:nvSpPr>
-        <p:spPr>
-          <a:xfrm>
-            <a:off x="9400032" y="3666744"/>
-            <a:ext cx="0" cy="155448"/>
-          </a:xfrm>
-          <a:prstGeom prst="line">
-            <a:avLst/>
-          </a:prstGeom>
-          <a:noFill/>
-          <a:ln w="19050">
-            <a:solidFill>
-              <a:srgbClr val="8ABBD8"/>
-            </a:solidFill>
-            <a:prstDash val="solid"/>
-          </a:ln>
-        </p:spPr>
-      </p:sp>
-      <p:sp>
-        <p:nvSpPr>
-          <p:cNvPr id="21" name="Shape 19"/>
-          <p:cNvSpPr/>
-          <p:nvPr/>
-        </p:nvSpPr>
-        <p:spPr>
-          <a:xfrm>
-            <a:off x="8302752" y="3456432"/>
-            <a:ext cx="1097280" cy="210312"/>
-          </a:xfrm>
-          <a:prstGeom prst="line">
-            <a:avLst/>
-          </a:prstGeom>
-          <a:noFill/>
-          <a:ln w="19050">
-            <a:solidFill>
-              <a:srgbClr val="8ABBD8"/>
-            </a:solidFill>
-            <a:prstDash val="solid"/>
-          </a:ln>
-        </p:spPr>
-      </p:sp>
-      <p:sp>
-        <p:nvSpPr>
-          <p:cNvPr id="22" name="Shape 20"/>
-          <p:cNvSpPr/>
-          <p:nvPr/>
-        </p:nvSpPr>
-        <p:spPr>
-          <a:xfrm>
-            <a:off x="10497312" y="3547872"/>
-            <a:ext cx="-1097280" cy="118872"/>
-          </a:xfrm>
-          <a:prstGeom prst="line">
-            <a:avLst/>
-          </a:prstGeom>
-          <a:noFill/>
-          <a:ln w="19050">
-            <a:solidFill>
-              <a:srgbClr val="8ABBD8"/>
-            </a:solidFill>
-            <a:prstDash val="solid"/>
-          </a:ln>
-        </p:spPr>
-      </p:sp>
-      <p:sp>
-        <p:nvSpPr>
-          <p:cNvPr id="23" name="Text 21"/>
-          <p:cNvSpPr/>
-          <p:nvPr/>
-        </p:nvSpPr>
-        <p:spPr>
-          <a:xfrm>
-            <a:off x="7909560" y="3977640"/>
-            <a:ext cx="2926080" cy="182880"/>
-          </a:xfrm>
-          <a:prstGeom prst="rect">
-            <a:avLst/>
-          </a:prstGeom>
-          <a:noFill/>
-          <a:ln/>
-        </p:spPr>
-        <p:txBody>
-          <a:bodyPr wrap="square" lIns="0" tIns="0" rIns="0" bIns="0" rtlCol="0" anchor="ctr"/>
-          <a:lstStyle/>
-          <a:p>
-            <a:pPr algn="ctr" indent="0" marL="0">
-              <a:buNone/>
-            </a:pPr>
-            <a:r>
-              <a:rPr lang="en-US" sz="1000" dirty="0">
-                <a:solidFill>
-                  <a:srgbClr val="003A63"/>
-                </a:solidFill>
-                <a:latin typeface="Aptos" pitchFamily="34" charset="0"/>
-                <a:ea typeface="Aptos" pitchFamily="34" charset="-122"/>
-                <a:cs typeface="Aptos" pitchFamily="34" charset="-120"/>
-              </a:rPr>
-              <a:t>People and trust</a:t>
-            </a:r>
-            <a:endParaRPr lang="en-US" sz="1000" dirty="0"/>
-          </a:p>
-        </p:txBody>
-      </p:sp>
-      <p:sp>
-        <p:nvSpPr>
-          <p:cNvPr id="24" name="Shape 22"/>
           <p:cNvSpPr/>
           <p:nvPr/>
         </p:nvSpPr>
@@ -8609,7 +7786,7 @@
       </p:sp>
       <p:sp>
         <p:nvSpPr>
-          <p:cNvPr id="25" name="Text 23"/>
+          <p:cNvPr id="17" name="Text 15"/>
           <p:cNvSpPr/>
           <p:nvPr/>
         </p:nvSpPr>
@@ -8648,7 +7825,7 @@
       </p:sp>
       <p:sp>
         <p:nvSpPr>
-          <p:cNvPr id="26" name="Text 24"/>
+          <p:cNvPr id="18" name="Text 16"/>
           <p:cNvSpPr/>
           <p:nvPr/>
         </p:nvSpPr>
@@ -9142,13 +8319,11 @@
             </a:avLst>
           </a:prstGeom>
           <a:solidFill>
-            <a:srgbClr val="FFFFFF">
-              <a:alpha val="88000"/>
-            </a:srgbClr>
+            <a:srgbClr val="FFFFFF"/>
           </a:solidFill>
           <a:ln w="12700">
             <a:solidFill>
-              <a:srgbClr val="D6E8F2"/>
+              <a:srgbClr val="B9D7E6"/>
             </a:solidFill>
             <a:prstDash val="solid"/>
           </a:ln>
@@ -9156,261 +8331,98 @@
       </p:sp>
       <p:sp>
         <p:nvSpPr>
-          <p:cNvPr id="14" name="Shape 12"/>
-          <p:cNvSpPr/>
-          <p:nvPr/>
-        </p:nvSpPr>
-        <p:spPr>
-          <a:xfrm>
-            <a:off x="8138160" y="3291840"/>
-            <a:ext cx="329184" cy="329184"/>
-          </a:xfrm>
-          <a:prstGeom prst="ellipse">
-            <a:avLst/>
-          </a:prstGeom>
-          <a:solidFill>
-            <a:srgbClr val="0068B7"/>
-          </a:solidFill>
-          <a:ln w="12700">
-            <a:solidFill>
-              <a:srgbClr val="0068B7"/>
-            </a:solidFill>
-            <a:prstDash val="solid"/>
-          </a:ln>
-        </p:spPr>
-      </p:sp>
-      <p:sp>
-        <p:nvSpPr>
-          <p:cNvPr id="15" name="Shape 13"/>
-          <p:cNvSpPr/>
-          <p:nvPr/>
-        </p:nvSpPr>
-        <p:spPr>
-          <a:xfrm>
-            <a:off x="10332720" y="3383280"/>
-            <a:ext cx="329184" cy="329184"/>
-          </a:xfrm>
-          <a:prstGeom prst="ellipse">
-            <a:avLst/>
-          </a:prstGeom>
-          <a:solidFill>
-            <a:srgbClr val="2F8A28"/>
-          </a:solidFill>
-          <a:ln w="12700">
-            <a:solidFill>
-              <a:srgbClr val="2F8A28"/>
-            </a:solidFill>
-            <a:prstDash val="solid"/>
-          </a:ln>
-        </p:spPr>
+          <p:cNvPr id="14" name="Text 12"/>
+          <p:cNvSpPr/>
+          <p:nvPr/>
+        </p:nvSpPr>
+        <p:spPr>
+          <a:xfrm>
+            <a:off x="7799832" y="2935224"/>
+            <a:ext cx="3145536" cy="256032"/>
+          </a:xfrm>
+          <a:prstGeom prst="rect">
+            <a:avLst/>
+          </a:prstGeom>
+          <a:noFill/>
+          <a:ln/>
+        </p:spPr>
+        <p:txBody>
+          <a:bodyPr wrap="square" lIns="0" tIns="0" rIns="0" bIns="0" rtlCol="0" anchor="ctr"/>
+          <a:lstStyle/>
+          <a:p>
+            <a:pPr indent="0" marL="0">
+              <a:buNone/>
+            </a:pPr>
+            <a:r>
+              <a:rPr lang="en-US" sz="1300" b="1" dirty="0">
+                <a:solidFill>
+                  <a:srgbClr val="0068B7"/>
+                </a:solidFill>
+                <a:latin typeface="Aptos" pitchFamily="34" charset="0"/>
+                <a:ea typeface="Aptos" pitchFamily="34" charset="-122"/>
+                <a:cs typeface="Aptos" pitchFamily="34" charset="-120"/>
+              </a:rPr>
+              <a:t>Concept checkpoints</a:t>
+            </a:r>
+            <a:endParaRPr lang="en-US" sz="1300" dirty="0"/>
+          </a:p>
+        </p:txBody>
+      </p:sp>
+      <p:sp>
+        <p:nvSpPr>
+          <p:cNvPr id="15" name="Text 13"/>
+          <p:cNvSpPr/>
+          <p:nvPr/>
+        </p:nvSpPr>
+        <p:spPr>
+          <a:xfrm>
+            <a:off x="7818120" y="3300984"/>
+            <a:ext cx="3090672" cy="877824"/>
+          </a:xfrm>
+          <a:prstGeom prst="rect">
+            <a:avLst/>
+          </a:prstGeom>
+          <a:noFill/>
+          <a:ln/>
+        </p:spPr>
+        <p:txBody>
+          <a:bodyPr wrap="square" lIns="254" tIns="254" rIns="254" bIns="254" rtlCol="0" anchor="t">
+            <a:normAutofit/>
+          </a:bodyPr>
+          <a:lstStyle/>
+          <a:p>
+            <a:r>
+              <a:rPr lang="en-US" sz="1380" dirty="0">
+                <a:solidFill>
+                  <a:srgbClr val="17364A"/>
+                </a:solidFill>
+                <a:latin typeface="Aptos" pitchFamily="34" charset="0"/>
+                <a:ea typeface="Aptos" pitchFamily="34" charset="-122"/>
+                <a:cs typeface="Aptos" pitchFamily="34" charset="-120"/>
+              </a:rPr>
+              <a:t>Create an NLP evaluation plan for one public health workflow.</a:t>
+            </a:r>
+            <a:endParaRPr lang="en-US" sz="1380" dirty="0"/>
+          </a:p>
+          <a:p>
+            <a:r>
+              <a:rPr lang="en-US" sz="1380" dirty="0">
+                <a:solidFill>
+                  <a:srgbClr val="17364A"/>
+                </a:solidFill>
+                <a:latin typeface="Aptos" pitchFamily="34" charset="0"/>
+                <a:ea typeface="Aptos" pitchFamily="34" charset="-122"/>
+                <a:cs typeface="Aptos" pitchFamily="34" charset="-120"/>
+              </a:rPr>
+              <a:t>Include the text source, NLP task, intended use, prohibited use, required human review,.</a:t>
+            </a:r>
+            <a:endParaRPr lang="en-US" sz="1380" dirty="0"/>
+          </a:p>
+        </p:txBody>
       </p:sp>
       <p:sp>
         <p:nvSpPr>
           <p:cNvPr id="16" name="Shape 14"/>
-          <p:cNvSpPr/>
-          <p:nvPr/>
-        </p:nvSpPr>
-        <p:spPr>
-          <a:xfrm>
-            <a:off x="9235440" y="3502152"/>
-            <a:ext cx="329184" cy="329184"/>
-          </a:xfrm>
-          <a:prstGeom prst="ellipse">
-            <a:avLst/>
-          </a:prstGeom>
-          <a:solidFill>
-            <a:srgbClr val="D69A2D"/>
-          </a:solidFill>
-          <a:ln w="12700">
-            <a:solidFill>
-              <a:srgbClr val="D69A2D"/>
-            </a:solidFill>
-            <a:prstDash val="solid"/>
-          </a:ln>
-        </p:spPr>
-      </p:sp>
-      <p:sp>
-        <p:nvSpPr>
-          <p:cNvPr id="17" name="Shape 15"/>
-          <p:cNvSpPr/>
-          <p:nvPr/>
-        </p:nvSpPr>
-        <p:spPr>
-          <a:xfrm>
-            <a:off x="9235440" y="3657600"/>
-            <a:ext cx="329184" cy="329184"/>
-          </a:xfrm>
-          <a:prstGeom prst="ellipse">
-            <a:avLst/>
-          </a:prstGeom>
-          <a:solidFill>
-            <a:srgbClr val="6A4CA3"/>
-          </a:solidFill>
-          <a:ln w="12700">
-            <a:solidFill>
-              <a:srgbClr val="6A4CA3"/>
-            </a:solidFill>
-            <a:prstDash val="solid"/>
-          </a:ln>
-        </p:spPr>
-      </p:sp>
-      <p:sp>
-        <p:nvSpPr>
-          <p:cNvPr id="18" name="Shape 16"/>
-          <p:cNvSpPr/>
-          <p:nvPr/>
-        </p:nvSpPr>
-        <p:spPr>
-          <a:xfrm>
-            <a:off x="8302752" y="3456432"/>
-            <a:ext cx="1097280" cy="365760"/>
-          </a:xfrm>
-          <a:prstGeom prst="line">
-            <a:avLst/>
-          </a:prstGeom>
-          <a:noFill/>
-          <a:ln w="19050">
-            <a:solidFill>
-              <a:srgbClr val="8ABBD8"/>
-            </a:solidFill>
-            <a:prstDash val="solid"/>
-          </a:ln>
-        </p:spPr>
-      </p:sp>
-      <p:sp>
-        <p:nvSpPr>
-          <p:cNvPr id="19" name="Shape 17"/>
-          <p:cNvSpPr/>
-          <p:nvPr/>
-        </p:nvSpPr>
-        <p:spPr>
-          <a:xfrm>
-            <a:off x="10497312" y="3547872"/>
-            <a:ext cx="-1097280" cy="274320"/>
-          </a:xfrm>
-          <a:prstGeom prst="line">
-            <a:avLst/>
-          </a:prstGeom>
-          <a:noFill/>
-          <a:ln w="19050">
-            <a:solidFill>
-              <a:srgbClr val="8ABBD8"/>
-            </a:solidFill>
-            <a:prstDash val="solid"/>
-          </a:ln>
-        </p:spPr>
-      </p:sp>
-      <p:sp>
-        <p:nvSpPr>
-          <p:cNvPr id="20" name="Shape 18"/>
-          <p:cNvSpPr/>
-          <p:nvPr/>
-        </p:nvSpPr>
-        <p:spPr>
-          <a:xfrm>
-            <a:off x="9400032" y="3666744"/>
-            <a:ext cx="0" cy="155448"/>
-          </a:xfrm>
-          <a:prstGeom prst="line">
-            <a:avLst/>
-          </a:prstGeom>
-          <a:noFill/>
-          <a:ln w="19050">
-            <a:solidFill>
-              <a:srgbClr val="8ABBD8"/>
-            </a:solidFill>
-            <a:prstDash val="solid"/>
-          </a:ln>
-        </p:spPr>
-      </p:sp>
-      <p:sp>
-        <p:nvSpPr>
-          <p:cNvPr id="21" name="Shape 19"/>
-          <p:cNvSpPr/>
-          <p:nvPr/>
-        </p:nvSpPr>
-        <p:spPr>
-          <a:xfrm>
-            <a:off x="8302752" y="3456432"/>
-            <a:ext cx="1097280" cy="210312"/>
-          </a:xfrm>
-          <a:prstGeom prst="line">
-            <a:avLst/>
-          </a:prstGeom>
-          <a:noFill/>
-          <a:ln w="19050">
-            <a:solidFill>
-              <a:srgbClr val="8ABBD8"/>
-            </a:solidFill>
-            <a:prstDash val="solid"/>
-          </a:ln>
-        </p:spPr>
-      </p:sp>
-      <p:sp>
-        <p:nvSpPr>
-          <p:cNvPr id="22" name="Shape 20"/>
-          <p:cNvSpPr/>
-          <p:nvPr/>
-        </p:nvSpPr>
-        <p:spPr>
-          <a:xfrm>
-            <a:off x="10497312" y="3547872"/>
-            <a:ext cx="-1097280" cy="118872"/>
-          </a:xfrm>
-          <a:prstGeom prst="line">
-            <a:avLst/>
-          </a:prstGeom>
-          <a:noFill/>
-          <a:ln w="19050">
-            <a:solidFill>
-              <a:srgbClr val="8ABBD8"/>
-            </a:solidFill>
-            <a:prstDash val="solid"/>
-          </a:ln>
-        </p:spPr>
-      </p:sp>
-      <p:sp>
-        <p:nvSpPr>
-          <p:cNvPr id="23" name="Text 21"/>
-          <p:cNvSpPr/>
-          <p:nvPr/>
-        </p:nvSpPr>
-        <p:spPr>
-          <a:xfrm>
-            <a:off x="7909560" y="3977640"/>
-            <a:ext cx="2926080" cy="182880"/>
-          </a:xfrm>
-          <a:prstGeom prst="rect">
-            <a:avLst/>
-          </a:prstGeom>
-          <a:noFill/>
-          <a:ln/>
-        </p:spPr>
-        <p:txBody>
-          <a:bodyPr wrap="square" lIns="0" tIns="0" rIns="0" bIns="0" rtlCol="0" anchor="ctr"/>
-          <a:lstStyle/>
-          <a:p>
-            <a:pPr algn="ctr" indent="0" marL="0">
-              <a:buNone/>
-            </a:pPr>
-            <a:r>
-              <a:rPr lang="en-US" sz="1000" dirty="0">
-                <a:solidFill>
-                  <a:srgbClr val="003A63"/>
-                </a:solidFill>
-                <a:latin typeface="Aptos" pitchFamily="34" charset="0"/>
-                <a:ea typeface="Aptos" pitchFamily="34" charset="-122"/>
-                <a:cs typeface="Aptos" pitchFamily="34" charset="-120"/>
-              </a:rPr>
-              <a:t>People and trust</a:t>
-            </a:r>
-            <a:endParaRPr lang="en-US" sz="1000" dirty="0"/>
-          </a:p>
-        </p:txBody>
-      </p:sp>
-      <p:sp>
-        <p:nvSpPr>
-          <p:cNvPr id="24" name="Shape 22"/>
           <p:cNvSpPr/>
           <p:nvPr/>
         </p:nvSpPr>
@@ -9437,7 +8449,7 @@
       </p:sp>
       <p:sp>
         <p:nvSpPr>
-          <p:cNvPr id="25" name="Text 23"/>
+          <p:cNvPr id="17" name="Text 15"/>
           <p:cNvSpPr/>
           <p:nvPr/>
         </p:nvSpPr>
@@ -9476,7 +8488,7 @@
       </p:sp>
       <p:sp>
         <p:nvSpPr>
-          <p:cNvPr id="26" name="Text 24"/>
+          <p:cNvPr id="18" name="Text 16"/>
           <p:cNvSpPr/>
           <p:nvPr/>
         </p:nvSpPr>
@@ -9984,13 +8996,11 @@
             </a:avLst>
           </a:prstGeom>
           <a:solidFill>
-            <a:srgbClr val="FFFFFF">
-              <a:alpha val="88000"/>
-            </a:srgbClr>
+            <a:srgbClr val="FFFFFF"/>
           </a:solidFill>
           <a:ln w="12700">
             <a:solidFill>
-              <a:srgbClr val="D6E8F2"/>
+              <a:srgbClr val="B9D7E6"/>
             </a:solidFill>
             <a:prstDash val="solid"/>
           </a:ln>
@@ -9998,261 +9008,112 @@
       </p:sp>
       <p:sp>
         <p:nvSpPr>
-          <p:cNvPr id="14" name="Shape 12"/>
-          <p:cNvSpPr/>
-          <p:nvPr/>
-        </p:nvSpPr>
-        <p:spPr>
-          <a:xfrm>
-            <a:off x="8138160" y="3291840"/>
-            <a:ext cx="329184" cy="329184"/>
-          </a:xfrm>
-          <a:prstGeom prst="ellipse">
-            <a:avLst/>
-          </a:prstGeom>
-          <a:solidFill>
-            <a:srgbClr val="0068B7"/>
-          </a:solidFill>
-          <a:ln w="12700">
-            <a:solidFill>
-              <a:srgbClr val="0068B7"/>
-            </a:solidFill>
-            <a:prstDash val="solid"/>
-          </a:ln>
-        </p:spPr>
-      </p:sp>
-      <p:sp>
-        <p:nvSpPr>
-          <p:cNvPr id="15" name="Shape 13"/>
-          <p:cNvSpPr/>
-          <p:nvPr/>
-        </p:nvSpPr>
-        <p:spPr>
-          <a:xfrm>
-            <a:off x="10332720" y="3383280"/>
-            <a:ext cx="329184" cy="329184"/>
-          </a:xfrm>
-          <a:prstGeom prst="ellipse">
-            <a:avLst/>
-          </a:prstGeom>
-          <a:solidFill>
-            <a:srgbClr val="2F8A28"/>
-          </a:solidFill>
-          <a:ln w="12700">
-            <a:solidFill>
-              <a:srgbClr val="2F8A28"/>
-            </a:solidFill>
-            <a:prstDash val="solid"/>
-          </a:ln>
-        </p:spPr>
+          <p:cNvPr id="14" name="Text 12"/>
+          <p:cNvSpPr/>
+          <p:nvPr/>
+        </p:nvSpPr>
+        <p:spPr>
+          <a:xfrm>
+            <a:off x="7799832" y="2935224"/>
+            <a:ext cx="3145536" cy="256032"/>
+          </a:xfrm>
+          <a:prstGeom prst="rect">
+            <a:avLst/>
+          </a:prstGeom>
+          <a:noFill/>
+          <a:ln/>
+        </p:spPr>
+        <p:txBody>
+          <a:bodyPr wrap="square" lIns="0" tIns="0" rIns="0" bIns="0" rtlCol="0" anchor="ctr"/>
+          <a:lstStyle/>
+          <a:p>
+            <a:pPr indent="0" marL="0">
+              <a:buNone/>
+            </a:pPr>
+            <a:r>
+              <a:rPr lang="en-US" sz="1300" b="1" dirty="0">
+                <a:solidFill>
+                  <a:srgbClr val="0068B7"/>
+                </a:solidFill>
+                <a:latin typeface="Aptos" pitchFamily="34" charset="0"/>
+                <a:ea typeface="Aptos" pitchFamily="34" charset="-122"/>
+                <a:cs typeface="Aptos" pitchFamily="34" charset="-120"/>
+              </a:rPr>
+              <a:t>Concept checkpoints</a:t>
+            </a:r>
+            <a:endParaRPr lang="en-US" sz="1300" dirty="0"/>
+          </a:p>
+        </p:txBody>
+      </p:sp>
+      <p:sp>
+        <p:nvSpPr>
+          <p:cNvPr id="15" name="Text 13"/>
+          <p:cNvSpPr/>
+          <p:nvPr/>
+        </p:nvSpPr>
+        <p:spPr>
+          <a:xfrm>
+            <a:off x="7818120" y="3300984"/>
+            <a:ext cx="3090672" cy="877824"/>
+          </a:xfrm>
+          <a:prstGeom prst="rect">
+            <a:avLst/>
+          </a:prstGeom>
+          <a:noFill/>
+          <a:ln/>
+        </p:spPr>
+        <p:txBody>
+          <a:bodyPr wrap="square" lIns="254" tIns="254" rIns="254" bIns="254" rtlCol="0" anchor="t">
+            <a:normAutofit/>
+          </a:bodyPr>
+          <a:lstStyle/>
+          <a:p>
+            <a:r>
+              <a:rPr lang="en-US" sz="1380" dirty="0">
+                <a:solidFill>
+                  <a:srgbClr val="17364A"/>
+                </a:solidFill>
+                <a:latin typeface="Aptos" pitchFamily="34" charset="0"/>
+                <a:ea typeface="Aptos" pitchFamily="34" charset="-122"/>
+                <a:cs typeface="Aptos" pitchFamily="34" charset="-120"/>
+              </a:rPr>
+              <a:t>NLP use case description</a:t>
+            </a:r>
+            <a:endParaRPr lang="en-US" sz="1380" dirty="0"/>
+          </a:p>
+          <a:p>
+            <a:r>
+              <a:rPr lang="en-US" sz="1380" dirty="0">
+                <a:solidFill>
+                  <a:srgbClr val="17364A"/>
+                </a:solidFill>
+                <a:latin typeface="Aptos" pitchFamily="34" charset="0"/>
+                <a:ea typeface="Aptos" pitchFamily="34" charset="-122"/>
+                <a:cs typeface="Aptos" pitchFamily="34" charset="-120"/>
+              </a:rPr>
+              <a:t>NLP evaluation plan</a:t>
+            </a:r>
+            <a:endParaRPr lang="en-US" sz="1380" dirty="0"/>
+          </a:p>
+          <a:p>
+            <a:r>
+              <a:rPr lang="en-US" sz="1380" dirty="0">
+                <a:solidFill>
+                  <a:srgbClr val="17364A"/>
+                </a:solidFill>
+                <a:latin typeface="Aptos" pitchFamily="34" charset="0"/>
+                <a:ea typeface="Aptos" pitchFamily="34" charset="-122"/>
+                <a:cs typeface="Aptos" pitchFamily="34" charset="-120"/>
+              </a:rPr>
+              <a:t>Human review checklist</a:t>
+            </a:r>
+            <a:endParaRPr lang="en-US" sz="1380" dirty="0"/>
+          </a:p>
+        </p:txBody>
       </p:sp>
       <p:sp>
         <p:nvSpPr>
           <p:cNvPr id="16" name="Shape 14"/>
-          <p:cNvSpPr/>
-          <p:nvPr/>
-        </p:nvSpPr>
-        <p:spPr>
-          <a:xfrm>
-            <a:off x="9235440" y="3502152"/>
-            <a:ext cx="329184" cy="329184"/>
-          </a:xfrm>
-          <a:prstGeom prst="ellipse">
-            <a:avLst/>
-          </a:prstGeom>
-          <a:solidFill>
-            <a:srgbClr val="D69A2D"/>
-          </a:solidFill>
-          <a:ln w="12700">
-            <a:solidFill>
-              <a:srgbClr val="D69A2D"/>
-            </a:solidFill>
-            <a:prstDash val="solid"/>
-          </a:ln>
-        </p:spPr>
-      </p:sp>
-      <p:sp>
-        <p:nvSpPr>
-          <p:cNvPr id="17" name="Shape 15"/>
-          <p:cNvSpPr/>
-          <p:nvPr/>
-        </p:nvSpPr>
-        <p:spPr>
-          <a:xfrm>
-            <a:off x="9235440" y="3657600"/>
-            <a:ext cx="329184" cy="329184"/>
-          </a:xfrm>
-          <a:prstGeom prst="ellipse">
-            <a:avLst/>
-          </a:prstGeom>
-          <a:solidFill>
-            <a:srgbClr val="6A4CA3"/>
-          </a:solidFill>
-          <a:ln w="12700">
-            <a:solidFill>
-              <a:srgbClr val="6A4CA3"/>
-            </a:solidFill>
-            <a:prstDash val="solid"/>
-          </a:ln>
-        </p:spPr>
-      </p:sp>
-      <p:sp>
-        <p:nvSpPr>
-          <p:cNvPr id="18" name="Shape 16"/>
-          <p:cNvSpPr/>
-          <p:nvPr/>
-        </p:nvSpPr>
-        <p:spPr>
-          <a:xfrm>
-            <a:off x="8302752" y="3456432"/>
-            <a:ext cx="1097280" cy="365760"/>
-          </a:xfrm>
-          <a:prstGeom prst="line">
-            <a:avLst/>
-          </a:prstGeom>
-          <a:noFill/>
-          <a:ln w="19050">
-            <a:solidFill>
-              <a:srgbClr val="8ABBD8"/>
-            </a:solidFill>
-            <a:prstDash val="solid"/>
-          </a:ln>
-        </p:spPr>
-      </p:sp>
-      <p:sp>
-        <p:nvSpPr>
-          <p:cNvPr id="19" name="Shape 17"/>
-          <p:cNvSpPr/>
-          <p:nvPr/>
-        </p:nvSpPr>
-        <p:spPr>
-          <a:xfrm>
-            <a:off x="10497312" y="3547872"/>
-            <a:ext cx="-1097280" cy="274320"/>
-          </a:xfrm>
-          <a:prstGeom prst="line">
-            <a:avLst/>
-          </a:prstGeom>
-          <a:noFill/>
-          <a:ln w="19050">
-            <a:solidFill>
-              <a:srgbClr val="8ABBD8"/>
-            </a:solidFill>
-            <a:prstDash val="solid"/>
-          </a:ln>
-        </p:spPr>
-      </p:sp>
-      <p:sp>
-        <p:nvSpPr>
-          <p:cNvPr id="20" name="Shape 18"/>
-          <p:cNvSpPr/>
-          <p:nvPr/>
-        </p:nvSpPr>
-        <p:spPr>
-          <a:xfrm>
-            <a:off x="9400032" y="3666744"/>
-            <a:ext cx="0" cy="155448"/>
-          </a:xfrm>
-          <a:prstGeom prst="line">
-            <a:avLst/>
-          </a:prstGeom>
-          <a:noFill/>
-          <a:ln w="19050">
-            <a:solidFill>
-              <a:srgbClr val="8ABBD8"/>
-            </a:solidFill>
-            <a:prstDash val="solid"/>
-          </a:ln>
-        </p:spPr>
-      </p:sp>
-      <p:sp>
-        <p:nvSpPr>
-          <p:cNvPr id="21" name="Shape 19"/>
-          <p:cNvSpPr/>
-          <p:nvPr/>
-        </p:nvSpPr>
-        <p:spPr>
-          <a:xfrm>
-            <a:off x="8302752" y="3456432"/>
-            <a:ext cx="1097280" cy="210312"/>
-          </a:xfrm>
-          <a:prstGeom prst="line">
-            <a:avLst/>
-          </a:prstGeom>
-          <a:noFill/>
-          <a:ln w="19050">
-            <a:solidFill>
-              <a:srgbClr val="8ABBD8"/>
-            </a:solidFill>
-            <a:prstDash val="solid"/>
-          </a:ln>
-        </p:spPr>
-      </p:sp>
-      <p:sp>
-        <p:nvSpPr>
-          <p:cNvPr id="22" name="Shape 20"/>
-          <p:cNvSpPr/>
-          <p:nvPr/>
-        </p:nvSpPr>
-        <p:spPr>
-          <a:xfrm>
-            <a:off x="10497312" y="3547872"/>
-            <a:ext cx="-1097280" cy="118872"/>
-          </a:xfrm>
-          <a:prstGeom prst="line">
-            <a:avLst/>
-          </a:prstGeom>
-          <a:noFill/>
-          <a:ln w="19050">
-            <a:solidFill>
-              <a:srgbClr val="8ABBD8"/>
-            </a:solidFill>
-            <a:prstDash val="solid"/>
-          </a:ln>
-        </p:spPr>
-      </p:sp>
-      <p:sp>
-        <p:nvSpPr>
-          <p:cNvPr id="23" name="Text 21"/>
-          <p:cNvSpPr/>
-          <p:nvPr/>
-        </p:nvSpPr>
-        <p:spPr>
-          <a:xfrm>
-            <a:off x="7909560" y="3977640"/>
-            <a:ext cx="2926080" cy="182880"/>
-          </a:xfrm>
-          <a:prstGeom prst="rect">
-            <a:avLst/>
-          </a:prstGeom>
-          <a:noFill/>
-          <a:ln/>
-        </p:spPr>
-        <p:txBody>
-          <a:bodyPr wrap="square" lIns="0" tIns="0" rIns="0" bIns="0" rtlCol="0" anchor="ctr"/>
-          <a:lstStyle/>
-          <a:p>
-            <a:pPr algn="ctr" indent="0" marL="0">
-              <a:buNone/>
-            </a:pPr>
-            <a:r>
-              <a:rPr lang="en-US" sz="1000" dirty="0">
-                <a:solidFill>
-                  <a:srgbClr val="003A63"/>
-                </a:solidFill>
-                <a:latin typeface="Aptos" pitchFamily="34" charset="0"/>
-                <a:ea typeface="Aptos" pitchFamily="34" charset="-122"/>
-                <a:cs typeface="Aptos" pitchFamily="34" charset="-120"/>
-              </a:rPr>
-              <a:t>People and trust</a:t>
-            </a:r>
-            <a:endParaRPr lang="en-US" sz="1000" dirty="0"/>
-          </a:p>
-        </p:txBody>
-      </p:sp>
-      <p:sp>
-        <p:nvSpPr>
-          <p:cNvPr id="24" name="Shape 22"/>
           <p:cNvSpPr/>
           <p:nvPr/>
         </p:nvSpPr>
@@ -10279,7 +9140,7 @@
       </p:sp>
       <p:sp>
         <p:nvSpPr>
-          <p:cNvPr id="25" name="Text 23"/>
+          <p:cNvPr id="17" name="Text 15"/>
           <p:cNvSpPr/>
           <p:nvPr/>
         </p:nvSpPr>
@@ -10318,7 +9179,7 @@
       </p:sp>
       <p:sp>
         <p:nvSpPr>
-          <p:cNvPr id="26" name="Text 24"/>
+          <p:cNvPr id="18" name="Text 16"/>
           <p:cNvSpPr/>
           <p:nvPr/>
         </p:nvSpPr>
@@ -10798,13 +9659,11 @@
             </a:avLst>
           </a:prstGeom>
           <a:solidFill>
-            <a:srgbClr val="FFFFFF">
-              <a:alpha val="88000"/>
-            </a:srgbClr>
+            <a:srgbClr val="FFFFFF"/>
           </a:solidFill>
           <a:ln w="12700">
             <a:solidFill>
-              <a:srgbClr val="D6E8F2"/>
+              <a:srgbClr val="B9D7E6"/>
             </a:solidFill>
             <a:prstDash val="solid"/>
           </a:ln>
@@ -10812,261 +9671,84 @@
       </p:sp>
       <p:sp>
         <p:nvSpPr>
-          <p:cNvPr id="14" name="Shape 12"/>
-          <p:cNvSpPr/>
-          <p:nvPr/>
-        </p:nvSpPr>
-        <p:spPr>
-          <a:xfrm>
-            <a:off x="8138160" y="3291840"/>
-            <a:ext cx="329184" cy="329184"/>
-          </a:xfrm>
-          <a:prstGeom prst="ellipse">
-            <a:avLst/>
-          </a:prstGeom>
-          <a:solidFill>
-            <a:srgbClr val="0068B7"/>
-          </a:solidFill>
-          <a:ln w="12700">
-            <a:solidFill>
-              <a:srgbClr val="0068B7"/>
-            </a:solidFill>
-            <a:prstDash val="solid"/>
-          </a:ln>
-        </p:spPr>
-      </p:sp>
-      <p:sp>
-        <p:nvSpPr>
-          <p:cNvPr id="15" name="Shape 13"/>
-          <p:cNvSpPr/>
-          <p:nvPr/>
-        </p:nvSpPr>
-        <p:spPr>
-          <a:xfrm>
-            <a:off x="10332720" y="3383280"/>
-            <a:ext cx="329184" cy="329184"/>
-          </a:xfrm>
-          <a:prstGeom prst="ellipse">
-            <a:avLst/>
-          </a:prstGeom>
-          <a:solidFill>
-            <a:srgbClr val="2F8A28"/>
-          </a:solidFill>
-          <a:ln w="12700">
-            <a:solidFill>
-              <a:srgbClr val="2F8A28"/>
-            </a:solidFill>
-            <a:prstDash val="solid"/>
-          </a:ln>
-        </p:spPr>
+          <p:cNvPr id="14" name="Text 12"/>
+          <p:cNvSpPr/>
+          <p:nvPr/>
+        </p:nvSpPr>
+        <p:spPr>
+          <a:xfrm>
+            <a:off x="7799832" y="2935224"/>
+            <a:ext cx="3145536" cy="256032"/>
+          </a:xfrm>
+          <a:prstGeom prst="rect">
+            <a:avLst/>
+          </a:prstGeom>
+          <a:noFill/>
+          <a:ln/>
+        </p:spPr>
+        <p:txBody>
+          <a:bodyPr wrap="square" lIns="0" tIns="0" rIns="0" bIns="0" rtlCol="0" anchor="ctr"/>
+          <a:lstStyle/>
+          <a:p>
+            <a:pPr indent="0" marL="0">
+              <a:buNone/>
+            </a:pPr>
+            <a:r>
+              <a:rPr lang="en-US" sz="1300" b="1" dirty="0">
+                <a:solidFill>
+                  <a:srgbClr val="0068B7"/>
+                </a:solidFill>
+                <a:latin typeface="Aptos" pitchFamily="34" charset="0"/>
+                <a:ea typeface="Aptos" pitchFamily="34" charset="-122"/>
+                <a:cs typeface="Aptos" pitchFamily="34" charset="-120"/>
+              </a:rPr>
+              <a:t>Concept checkpoints</a:t>
+            </a:r>
+            <a:endParaRPr lang="en-US" sz="1300" dirty="0"/>
+          </a:p>
+        </p:txBody>
+      </p:sp>
+      <p:sp>
+        <p:nvSpPr>
+          <p:cNvPr id="15" name="Text 13"/>
+          <p:cNvSpPr/>
+          <p:nvPr/>
+        </p:nvSpPr>
+        <p:spPr>
+          <a:xfrm>
+            <a:off x="7818120" y="3300984"/>
+            <a:ext cx="3090672" cy="877824"/>
+          </a:xfrm>
+          <a:prstGeom prst="rect">
+            <a:avLst/>
+          </a:prstGeom>
+          <a:noFill/>
+          <a:ln/>
+        </p:spPr>
+        <p:txBody>
+          <a:bodyPr wrap="square" lIns="254" tIns="254" rIns="254" bIns="254" rtlCol="0" anchor="t">
+            <a:normAutofit/>
+          </a:bodyPr>
+          <a:lstStyle/>
+          <a:p>
+            <a:r>
+              <a:rPr lang="en-US" sz="1380" dirty="0">
+                <a:solidFill>
+                  <a:srgbClr val="17364A"/>
+                </a:solidFill>
+                <a:latin typeface="Aptos" pitchFamily="34" charset="0"/>
+                <a:ea typeface="Aptos" pitchFamily="34" charset="-122"/>
+                <a:cs typeface="Aptos" pitchFamily="34" charset="-120"/>
+              </a:rPr>
+              <a:t>Source verification and privacy safeguards</a:t>
+            </a:r>
+            <a:endParaRPr lang="en-US" sz="1380" dirty="0"/>
+          </a:p>
+        </p:txBody>
       </p:sp>
       <p:sp>
         <p:nvSpPr>
           <p:cNvPr id="16" name="Shape 14"/>
-          <p:cNvSpPr/>
-          <p:nvPr/>
-        </p:nvSpPr>
-        <p:spPr>
-          <a:xfrm>
-            <a:off x="9235440" y="3502152"/>
-            <a:ext cx="329184" cy="329184"/>
-          </a:xfrm>
-          <a:prstGeom prst="ellipse">
-            <a:avLst/>
-          </a:prstGeom>
-          <a:solidFill>
-            <a:srgbClr val="D69A2D"/>
-          </a:solidFill>
-          <a:ln w="12700">
-            <a:solidFill>
-              <a:srgbClr val="D69A2D"/>
-            </a:solidFill>
-            <a:prstDash val="solid"/>
-          </a:ln>
-        </p:spPr>
-      </p:sp>
-      <p:sp>
-        <p:nvSpPr>
-          <p:cNvPr id="17" name="Shape 15"/>
-          <p:cNvSpPr/>
-          <p:nvPr/>
-        </p:nvSpPr>
-        <p:spPr>
-          <a:xfrm>
-            <a:off x="9235440" y="3657600"/>
-            <a:ext cx="329184" cy="329184"/>
-          </a:xfrm>
-          <a:prstGeom prst="ellipse">
-            <a:avLst/>
-          </a:prstGeom>
-          <a:solidFill>
-            <a:srgbClr val="6A4CA3"/>
-          </a:solidFill>
-          <a:ln w="12700">
-            <a:solidFill>
-              <a:srgbClr val="6A4CA3"/>
-            </a:solidFill>
-            <a:prstDash val="solid"/>
-          </a:ln>
-        </p:spPr>
-      </p:sp>
-      <p:sp>
-        <p:nvSpPr>
-          <p:cNvPr id="18" name="Shape 16"/>
-          <p:cNvSpPr/>
-          <p:nvPr/>
-        </p:nvSpPr>
-        <p:spPr>
-          <a:xfrm>
-            <a:off x="8302752" y="3456432"/>
-            <a:ext cx="1097280" cy="365760"/>
-          </a:xfrm>
-          <a:prstGeom prst="line">
-            <a:avLst/>
-          </a:prstGeom>
-          <a:noFill/>
-          <a:ln w="19050">
-            <a:solidFill>
-              <a:srgbClr val="8ABBD8"/>
-            </a:solidFill>
-            <a:prstDash val="solid"/>
-          </a:ln>
-        </p:spPr>
-      </p:sp>
-      <p:sp>
-        <p:nvSpPr>
-          <p:cNvPr id="19" name="Shape 17"/>
-          <p:cNvSpPr/>
-          <p:nvPr/>
-        </p:nvSpPr>
-        <p:spPr>
-          <a:xfrm>
-            <a:off x="10497312" y="3547872"/>
-            <a:ext cx="-1097280" cy="274320"/>
-          </a:xfrm>
-          <a:prstGeom prst="line">
-            <a:avLst/>
-          </a:prstGeom>
-          <a:noFill/>
-          <a:ln w="19050">
-            <a:solidFill>
-              <a:srgbClr val="8ABBD8"/>
-            </a:solidFill>
-            <a:prstDash val="solid"/>
-          </a:ln>
-        </p:spPr>
-      </p:sp>
-      <p:sp>
-        <p:nvSpPr>
-          <p:cNvPr id="20" name="Shape 18"/>
-          <p:cNvSpPr/>
-          <p:nvPr/>
-        </p:nvSpPr>
-        <p:spPr>
-          <a:xfrm>
-            <a:off x="9400032" y="3666744"/>
-            <a:ext cx="0" cy="155448"/>
-          </a:xfrm>
-          <a:prstGeom prst="line">
-            <a:avLst/>
-          </a:prstGeom>
-          <a:noFill/>
-          <a:ln w="19050">
-            <a:solidFill>
-              <a:srgbClr val="8ABBD8"/>
-            </a:solidFill>
-            <a:prstDash val="solid"/>
-          </a:ln>
-        </p:spPr>
-      </p:sp>
-      <p:sp>
-        <p:nvSpPr>
-          <p:cNvPr id="21" name="Shape 19"/>
-          <p:cNvSpPr/>
-          <p:nvPr/>
-        </p:nvSpPr>
-        <p:spPr>
-          <a:xfrm>
-            <a:off x="8302752" y="3456432"/>
-            <a:ext cx="1097280" cy="210312"/>
-          </a:xfrm>
-          <a:prstGeom prst="line">
-            <a:avLst/>
-          </a:prstGeom>
-          <a:noFill/>
-          <a:ln w="19050">
-            <a:solidFill>
-              <a:srgbClr val="8ABBD8"/>
-            </a:solidFill>
-            <a:prstDash val="solid"/>
-          </a:ln>
-        </p:spPr>
-      </p:sp>
-      <p:sp>
-        <p:nvSpPr>
-          <p:cNvPr id="22" name="Shape 20"/>
-          <p:cNvSpPr/>
-          <p:nvPr/>
-        </p:nvSpPr>
-        <p:spPr>
-          <a:xfrm>
-            <a:off x="10497312" y="3547872"/>
-            <a:ext cx="-1097280" cy="118872"/>
-          </a:xfrm>
-          <a:prstGeom prst="line">
-            <a:avLst/>
-          </a:prstGeom>
-          <a:noFill/>
-          <a:ln w="19050">
-            <a:solidFill>
-              <a:srgbClr val="8ABBD8"/>
-            </a:solidFill>
-            <a:prstDash val="solid"/>
-          </a:ln>
-        </p:spPr>
-      </p:sp>
-      <p:sp>
-        <p:nvSpPr>
-          <p:cNvPr id="23" name="Text 21"/>
-          <p:cNvSpPr/>
-          <p:nvPr/>
-        </p:nvSpPr>
-        <p:spPr>
-          <a:xfrm>
-            <a:off x="7909560" y="3977640"/>
-            <a:ext cx="2926080" cy="182880"/>
-          </a:xfrm>
-          <a:prstGeom prst="rect">
-            <a:avLst/>
-          </a:prstGeom>
-          <a:noFill/>
-          <a:ln/>
-        </p:spPr>
-        <p:txBody>
-          <a:bodyPr wrap="square" lIns="0" tIns="0" rIns="0" bIns="0" rtlCol="0" anchor="ctr"/>
-          <a:lstStyle/>
-          <a:p>
-            <a:pPr algn="ctr" indent="0" marL="0">
-              <a:buNone/>
-            </a:pPr>
-            <a:r>
-              <a:rPr lang="en-US" sz="1000" dirty="0">
-                <a:solidFill>
-                  <a:srgbClr val="003A63"/>
-                </a:solidFill>
-                <a:latin typeface="Aptos" pitchFamily="34" charset="0"/>
-                <a:ea typeface="Aptos" pitchFamily="34" charset="-122"/>
-                <a:cs typeface="Aptos" pitchFamily="34" charset="-120"/>
-              </a:rPr>
-              <a:t>People and trust</a:t>
-            </a:r>
-            <a:endParaRPr lang="en-US" sz="1000" dirty="0"/>
-          </a:p>
-        </p:txBody>
-      </p:sp>
-      <p:sp>
-        <p:nvSpPr>
-          <p:cNvPr id="24" name="Shape 22"/>
           <p:cNvSpPr/>
           <p:nvPr/>
         </p:nvSpPr>
@@ -11093,7 +9775,7 @@
       </p:sp>
       <p:sp>
         <p:nvSpPr>
-          <p:cNvPr id="25" name="Text 23"/>
+          <p:cNvPr id="17" name="Text 15"/>
           <p:cNvSpPr/>
           <p:nvPr/>
         </p:nvSpPr>
@@ -11132,7 +9814,7 @@
       </p:sp>
       <p:sp>
         <p:nvSpPr>
-          <p:cNvPr id="26" name="Text 24"/>
+          <p:cNvPr id="18" name="Text 16"/>
           <p:cNvSpPr/>
           <p:nvPr/>
         </p:nvSpPr>
@@ -11665,20 +10347,20 @@
         </p:nvSpPr>
         <p:spPr>
           <a:xfrm>
-            <a:off x="7635240" y="3730752"/>
-            <a:ext cx="1033272" cy="749808"/>
+            <a:off x="7909560" y="3675888"/>
+            <a:ext cx="3154680" cy="1691640"/>
           </a:xfrm>
           <a:prstGeom prst="roundRect">
             <a:avLst>
-              <a:gd name="adj" fmla="val 14634"/>
+              <a:gd name="adj" fmla="val 6486"/>
             </a:avLst>
           </a:prstGeom>
           <a:solidFill>
-            <a:srgbClr val="0068B7"/>
+            <a:srgbClr val="FFFFFF"/>
           </a:solidFill>
           <a:ln w="12700">
             <a:solidFill>
-              <a:srgbClr val="0068B7"/>
+              <a:srgbClr val="B9D7E6"/>
             </a:solidFill>
             <a:prstDash val="solid"/>
           </a:ln>
@@ -11692,172 +10374,100 @@
         </p:nvSpPr>
         <p:spPr>
           <a:xfrm>
-            <a:off x="7708392" y="3922776"/>
-            <a:ext cx="886968" cy="310896"/>
-          </a:xfrm>
-          <a:prstGeom prst="rect">
-            <a:avLst/>
-          </a:prstGeom>
-          <a:noFill/>
-          <a:ln/>
-        </p:spPr>
-        <p:txBody>
-          <a:bodyPr wrap="square" lIns="0" tIns="0" rIns="0" bIns="0" rtlCol="0" anchor="ctr">
+            <a:off x="8074152" y="3822192"/>
+            <a:ext cx="2825496" cy="256032"/>
+          </a:xfrm>
+          <a:prstGeom prst="rect">
+            <a:avLst/>
+          </a:prstGeom>
+          <a:noFill/>
+          <a:ln/>
+        </p:spPr>
+        <p:txBody>
+          <a:bodyPr wrap="square" lIns="0" tIns="0" rIns="0" bIns="0" rtlCol="0" anchor="ctr"/>
+          <a:lstStyle/>
+          <a:p>
+            <a:pPr indent="0" marL="0">
+              <a:buNone/>
+            </a:pPr>
+            <a:r>
+              <a:rPr lang="en-US" sz="1300" b="1" dirty="0">
+                <a:solidFill>
+                  <a:srgbClr val="0068B7"/>
+                </a:solidFill>
+                <a:latin typeface="Aptos" pitchFamily="34" charset="0"/>
+                <a:ea typeface="Aptos" pitchFamily="34" charset="-122"/>
+                <a:cs typeface="Aptos" pitchFamily="34" charset="-120"/>
+              </a:rPr>
+              <a:t>Learning sequence</a:t>
+            </a:r>
+            <a:endParaRPr lang="en-US" sz="1300" dirty="0"/>
+          </a:p>
+        </p:txBody>
+      </p:sp>
+      <p:sp>
+        <p:nvSpPr>
+          <p:cNvPr id="15" name="Text 13"/>
+          <p:cNvSpPr/>
+          <p:nvPr/>
+        </p:nvSpPr>
+        <p:spPr>
+          <a:xfrm>
+            <a:off x="8092440" y="4187952"/>
+            <a:ext cx="2770632" cy="1033272"/>
+          </a:xfrm>
+          <a:prstGeom prst="rect">
+            <a:avLst/>
+          </a:prstGeom>
+          <a:noFill/>
+          <a:ln/>
+        </p:spPr>
+        <p:txBody>
+          <a:bodyPr wrap="square" lIns="254" tIns="254" rIns="254" bIns="254" rtlCol="0" anchor="t">
             <a:normAutofit/>
           </a:bodyPr>
           <a:lstStyle/>
           <a:p>
-            <a:pPr algn="ctr" indent="0" marL="0">
-              <a:buNone/>
-            </a:pPr>
-            <a:r>
-              <a:rPr lang="en-US" sz="1500" b="1" dirty="0">
-                <a:solidFill>
-                  <a:srgbClr val="FFFFFF"/>
-                </a:solidFill>
-                <a:latin typeface="Aptos" pitchFamily="34" charset="0"/>
-                <a:ea typeface="Aptos" pitchFamily="34" charset="-122"/>
-                <a:cs typeface="Aptos" pitchFamily="34" charset="-120"/>
-              </a:rPr>
-              <a:t>Learn</a:t>
-            </a:r>
-            <a:endParaRPr lang="en-US" sz="1500" dirty="0"/>
-          </a:p>
-        </p:txBody>
-      </p:sp>
-      <p:sp>
-        <p:nvSpPr>
-          <p:cNvPr id="15" name="Shape 13"/>
-          <p:cNvSpPr/>
-          <p:nvPr/>
-        </p:nvSpPr>
-        <p:spPr>
-          <a:xfrm>
-            <a:off x="8924544" y="3730752"/>
-            <a:ext cx="1033272" cy="749808"/>
-          </a:xfrm>
-          <a:prstGeom prst="roundRect">
-            <a:avLst>
-              <a:gd name="adj" fmla="val 14634"/>
-            </a:avLst>
-          </a:prstGeom>
-          <a:solidFill>
-            <a:srgbClr val="2F8A28"/>
-          </a:solidFill>
-          <a:ln w="12700">
-            <a:solidFill>
-              <a:srgbClr val="2F8A28"/>
-            </a:solidFill>
-            <a:prstDash val="solid"/>
-          </a:ln>
-        </p:spPr>
-      </p:sp>
-      <p:sp>
-        <p:nvSpPr>
-          <p:cNvPr id="16" name="Text 14"/>
-          <p:cNvSpPr/>
-          <p:nvPr/>
-        </p:nvSpPr>
-        <p:spPr>
-          <a:xfrm>
-            <a:off x="8997696" y="3922776"/>
-            <a:ext cx="886968" cy="310896"/>
-          </a:xfrm>
-          <a:prstGeom prst="rect">
-            <a:avLst/>
-          </a:prstGeom>
-          <a:noFill/>
-          <a:ln/>
-        </p:spPr>
-        <p:txBody>
-          <a:bodyPr wrap="square" lIns="0" tIns="0" rIns="0" bIns="0" rtlCol="0" anchor="ctr">
-            <a:normAutofit/>
-          </a:bodyPr>
-          <a:lstStyle/>
-          <a:p>
-            <a:pPr algn="ctr" indent="0" marL="0">
-              <a:buNone/>
-            </a:pPr>
-            <a:r>
-              <a:rPr lang="en-US" sz="1500" b="1" dirty="0">
-                <a:solidFill>
-                  <a:srgbClr val="FFFFFF"/>
-                </a:solidFill>
-                <a:latin typeface="Aptos" pitchFamily="34" charset="0"/>
-                <a:ea typeface="Aptos" pitchFamily="34" charset="-122"/>
-                <a:cs typeface="Aptos" pitchFamily="34" charset="-120"/>
-              </a:rPr>
-              <a:t>Apply</a:t>
-            </a:r>
-            <a:endParaRPr lang="en-US" sz="1500" dirty="0"/>
-          </a:p>
-        </p:txBody>
-      </p:sp>
-      <p:sp>
-        <p:nvSpPr>
-          <p:cNvPr id="17" name="Shape 15"/>
-          <p:cNvSpPr/>
-          <p:nvPr/>
-        </p:nvSpPr>
-        <p:spPr>
-          <a:xfrm>
-            <a:off x="10213848" y="3730752"/>
-            <a:ext cx="1033272" cy="749808"/>
-          </a:xfrm>
-          <a:prstGeom prst="roundRect">
-            <a:avLst>
-              <a:gd name="adj" fmla="val 14634"/>
-            </a:avLst>
-          </a:prstGeom>
-          <a:solidFill>
-            <a:srgbClr val="6A4CA3"/>
-          </a:solidFill>
-          <a:ln w="12700">
-            <a:solidFill>
-              <a:srgbClr val="6A4CA3"/>
-            </a:solidFill>
-            <a:prstDash val="solid"/>
-          </a:ln>
-        </p:spPr>
-      </p:sp>
-      <p:sp>
-        <p:nvSpPr>
-          <p:cNvPr id="18" name="Text 16"/>
-          <p:cNvSpPr/>
-          <p:nvPr/>
-        </p:nvSpPr>
-        <p:spPr>
-          <a:xfrm>
-            <a:off x="10287000" y="3922776"/>
-            <a:ext cx="886968" cy="310896"/>
-          </a:xfrm>
-          <a:prstGeom prst="rect">
-            <a:avLst/>
-          </a:prstGeom>
-          <a:noFill/>
-          <a:ln/>
-        </p:spPr>
-        <p:txBody>
-          <a:bodyPr wrap="square" lIns="0" tIns="0" rIns="0" bIns="0" rtlCol="0" anchor="ctr">
-            <a:normAutofit/>
-          </a:bodyPr>
-          <a:lstStyle/>
-          <a:p>
-            <a:pPr algn="ctr" indent="0" marL="0">
-              <a:buNone/>
-            </a:pPr>
-            <a:r>
-              <a:rPr lang="en-US" sz="1500" b="1" dirty="0">
-                <a:solidFill>
-                  <a:srgbClr val="FFFFFF"/>
-                </a:solidFill>
-                <a:latin typeface="Aptos" pitchFamily="34" charset="0"/>
-                <a:ea typeface="Aptos" pitchFamily="34" charset="-122"/>
-                <a:cs typeface="Aptos" pitchFamily="34" charset="-120"/>
-              </a:rPr>
-              <a:t>Document</a:t>
-            </a:r>
-            <a:endParaRPr lang="en-US" sz="1500" dirty="0"/>
+            <a:r>
+              <a:rPr lang="en-US" sz="1380" dirty="0">
+                <a:solidFill>
+                  <a:srgbClr val="17364A"/>
+                </a:solidFill>
+                <a:latin typeface="Aptos" pitchFamily="34" charset="0"/>
+                <a:ea typeface="Aptos" pitchFamily="34" charset="-122"/>
+                <a:cs typeface="Aptos" pitchFamily="34" charset="-120"/>
+              </a:rPr>
+              <a:t>Read the module for shared vocabulary and context.</a:t>
+            </a:r>
+            <a:endParaRPr lang="en-US" sz="1380" dirty="0"/>
+          </a:p>
+          <a:p>
+            <a:r>
+              <a:rPr lang="en-US" sz="1380" dirty="0">
+                <a:solidFill>
+                  <a:srgbClr val="17364A"/>
+                </a:solidFill>
+                <a:latin typeface="Aptos" pitchFamily="34" charset="0"/>
+                <a:ea typeface="Aptos" pitchFamily="34" charset="-122"/>
+                <a:cs typeface="Aptos" pitchFamily="34" charset="-120"/>
+              </a:rPr>
+              <a:t>Complete the practical exercise to apply the concept.</a:t>
+            </a:r>
+            <a:endParaRPr lang="en-US" sz="1380" dirty="0"/>
+          </a:p>
+          <a:p>
+            <a:r>
+              <a:rPr lang="en-US" sz="1380" dirty="0">
+                <a:solidFill>
+                  <a:srgbClr val="17364A"/>
+                </a:solidFill>
+                <a:latin typeface="Aptos" pitchFamily="34" charset="0"/>
+                <a:ea typeface="Aptos" pitchFamily="34" charset="-122"/>
+                <a:cs typeface="Aptos" pitchFamily="34" charset="-120"/>
+              </a:rPr>
+              <a:t>Use the notes and references for deeper review.</a:t>
+            </a:r>
+            <a:endParaRPr lang="en-US" sz="1380" dirty="0"/>
           </a:p>
         </p:txBody>
       </p:sp>
@@ -12330,13 +10940,11 @@
             </a:avLst>
           </a:prstGeom>
           <a:solidFill>
-            <a:srgbClr val="FFFFFF">
-              <a:alpha val="88000"/>
-            </a:srgbClr>
+            <a:srgbClr val="FFFFFF"/>
           </a:solidFill>
           <a:ln w="12700">
             <a:solidFill>
-              <a:srgbClr val="D6E8F2"/>
+              <a:srgbClr val="B9D7E6"/>
             </a:solidFill>
             <a:prstDash val="solid"/>
           </a:ln>
@@ -12344,261 +10952,112 @@
       </p:sp>
       <p:sp>
         <p:nvSpPr>
-          <p:cNvPr id="14" name="Shape 12"/>
-          <p:cNvSpPr/>
-          <p:nvPr/>
-        </p:nvSpPr>
-        <p:spPr>
-          <a:xfrm>
-            <a:off x="8138160" y="3291840"/>
-            <a:ext cx="329184" cy="329184"/>
-          </a:xfrm>
-          <a:prstGeom prst="ellipse">
-            <a:avLst/>
-          </a:prstGeom>
-          <a:solidFill>
-            <a:srgbClr val="0068B7"/>
-          </a:solidFill>
-          <a:ln w="12700">
-            <a:solidFill>
-              <a:srgbClr val="0068B7"/>
-            </a:solidFill>
-            <a:prstDash val="solid"/>
-          </a:ln>
-        </p:spPr>
-      </p:sp>
-      <p:sp>
-        <p:nvSpPr>
-          <p:cNvPr id="15" name="Shape 13"/>
-          <p:cNvSpPr/>
-          <p:nvPr/>
-        </p:nvSpPr>
-        <p:spPr>
-          <a:xfrm>
-            <a:off x="10332720" y="3383280"/>
-            <a:ext cx="329184" cy="329184"/>
-          </a:xfrm>
-          <a:prstGeom prst="ellipse">
-            <a:avLst/>
-          </a:prstGeom>
-          <a:solidFill>
-            <a:srgbClr val="2F8A28"/>
-          </a:solidFill>
-          <a:ln w="12700">
-            <a:solidFill>
-              <a:srgbClr val="2F8A28"/>
-            </a:solidFill>
-            <a:prstDash val="solid"/>
-          </a:ln>
-        </p:spPr>
+          <p:cNvPr id="14" name="Text 12"/>
+          <p:cNvSpPr/>
+          <p:nvPr/>
+        </p:nvSpPr>
+        <p:spPr>
+          <a:xfrm>
+            <a:off x="7799832" y="2935224"/>
+            <a:ext cx="3145536" cy="256032"/>
+          </a:xfrm>
+          <a:prstGeom prst="rect">
+            <a:avLst/>
+          </a:prstGeom>
+          <a:noFill/>
+          <a:ln/>
+        </p:spPr>
+        <p:txBody>
+          <a:bodyPr wrap="square" lIns="0" tIns="0" rIns="0" bIns="0" rtlCol="0" anchor="ctr"/>
+          <a:lstStyle/>
+          <a:p>
+            <a:pPr indent="0" marL="0">
+              <a:buNone/>
+            </a:pPr>
+            <a:r>
+              <a:rPr lang="en-US" sz="1300" b="1" dirty="0">
+                <a:solidFill>
+                  <a:srgbClr val="0068B7"/>
+                </a:solidFill>
+                <a:latin typeface="Aptos" pitchFamily="34" charset="0"/>
+                <a:ea typeface="Aptos" pitchFamily="34" charset="-122"/>
+                <a:cs typeface="Aptos" pitchFamily="34" charset="-120"/>
+              </a:rPr>
+              <a:t>Concept checkpoints</a:t>
+            </a:r>
+            <a:endParaRPr lang="en-US" sz="1300" dirty="0"/>
+          </a:p>
+        </p:txBody>
+      </p:sp>
+      <p:sp>
+        <p:nvSpPr>
+          <p:cNvPr id="15" name="Text 13"/>
+          <p:cNvSpPr/>
+          <p:nvPr/>
+        </p:nvSpPr>
+        <p:spPr>
+          <a:xfrm>
+            <a:off x="7818120" y="3300984"/>
+            <a:ext cx="3090672" cy="877824"/>
+          </a:xfrm>
+          <a:prstGeom prst="rect">
+            <a:avLst/>
+          </a:prstGeom>
+          <a:noFill/>
+          <a:ln/>
+        </p:spPr>
+        <p:txBody>
+          <a:bodyPr wrap="square" lIns="254" tIns="254" rIns="254" bIns="254" rtlCol="0" anchor="t">
+            <a:normAutofit/>
+          </a:bodyPr>
+          <a:lstStyle/>
+          <a:p>
+            <a:r>
+              <a:rPr lang="en-US" sz="1380" dirty="0">
+                <a:solidFill>
+                  <a:srgbClr val="17364A"/>
+                </a:solidFill>
+                <a:latin typeface="Aptos" pitchFamily="34" charset="0"/>
+                <a:ea typeface="Aptos" pitchFamily="34" charset="-122"/>
+                <a:cs typeface="Aptos" pitchFamily="34" charset="-120"/>
+              </a:rPr>
+              <a:t>NLP use case description</a:t>
+            </a:r>
+            <a:endParaRPr lang="en-US" sz="1380" dirty="0"/>
+          </a:p>
+          <a:p>
+            <a:r>
+              <a:rPr lang="en-US" sz="1380" dirty="0">
+                <a:solidFill>
+                  <a:srgbClr val="17364A"/>
+                </a:solidFill>
+                <a:latin typeface="Aptos" pitchFamily="34" charset="0"/>
+                <a:ea typeface="Aptos" pitchFamily="34" charset="-122"/>
+                <a:cs typeface="Aptos" pitchFamily="34" charset="-120"/>
+              </a:rPr>
+              <a:t>NLP evaluation plan</a:t>
+            </a:r>
+            <a:endParaRPr lang="en-US" sz="1380" dirty="0"/>
+          </a:p>
+          <a:p>
+            <a:r>
+              <a:rPr lang="en-US" sz="1380" dirty="0">
+                <a:solidFill>
+                  <a:srgbClr val="17364A"/>
+                </a:solidFill>
+                <a:latin typeface="Aptos" pitchFamily="34" charset="0"/>
+                <a:ea typeface="Aptos" pitchFamily="34" charset="-122"/>
+                <a:cs typeface="Aptos" pitchFamily="34" charset="-120"/>
+              </a:rPr>
+              <a:t>Human review checklist</a:t>
+            </a:r>
+            <a:endParaRPr lang="en-US" sz="1380" dirty="0"/>
+          </a:p>
+        </p:txBody>
       </p:sp>
       <p:sp>
         <p:nvSpPr>
           <p:cNvPr id="16" name="Shape 14"/>
-          <p:cNvSpPr/>
-          <p:nvPr/>
-        </p:nvSpPr>
-        <p:spPr>
-          <a:xfrm>
-            <a:off x="9235440" y="3502152"/>
-            <a:ext cx="329184" cy="329184"/>
-          </a:xfrm>
-          <a:prstGeom prst="ellipse">
-            <a:avLst/>
-          </a:prstGeom>
-          <a:solidFill>
-            <a:srgbClr val="D69A2D"/>
-          </a:solidFill>
-          <a:ln w="12700">
-            <a:solidFill>
-              <a:srgbClr val="D69A2D"/>
-            </a:solidFill>
-            <a:prstDash val="solid"/>
-          </a:ln>
-        </p:spPr>
-      </p:sp>
-      <p:sp>
-        <p:nvSpPr>
-          <p:cNvPr id="17" name="Shape 15"/>
-          <p:cNvSpPr/>
-          <p:nvPr/>
-        </p:nvSpPr>
-        <p:spPr>
-          <a:xfrm>
-            <a:off x="9235440" y="3657600"/>
-            <a:ext cx="329184" cy="329184"/>
-          </a:xfrm>
-          <a:prstGeom prst="ellipse">
-            <a:avLst/>
-          </a:prstGeom>
-          <a:solidFill>
-            <a:srgbClr val="6A4CA3"/>
-          </a:solidFill>
-          <a:ln w="12700">
-            <a:solidFill>
-              <a:srgbClr val="6A4CA3"/>
-            </a:solidFill>
-            <a:prstDash val="solid"/>
-          </a:ln>
-        </p:spPr>
-      </p:sp>
-      <p:sp>
-        <p:nvSpPr>
-          <p:cNvPr id="18" name="Shape 16"/>
-          <p:cNvSpPr/>
-          <p:nvPr/>
-        </p:nvSpPr>
-        <p:spPr>
-          <a:xfrm>
-            <a:off x="8302752" y="3456432"/>
-            <a:ext cx="1097280" cy="365760"/>
-          </a:xfrm>
-          <a:prstGeom prst="line">
-            <a:avLst/>
-          </a:prstGeom>
-          <a:noFill/>
-          <a:ln w="19050">
-            <a:solidFill>
-              <a:srgbClr val="8ABBD8"/>
-            </a:solidFill>
-            <a:prstDash val="solid"/>
-          </a:ln>
-        </p:spPr>
-      </p:sp>
-      <p:sp>
-        <p:nvSpPr>
-          <p:cNvPr id="19" name="Shape 17"/>
-          <p:cNvSpPr/>
-          <p:nvPr/>
-        </p:nvSpPr>
-        <p:spPr>
-          <a:xfrm>
-            <a:off x="10497312" y="3547872"/>
-            <a:ext cx="-1097280" cy="274320"/>
-          </a:xfrm>
-          <a:prstGeom prst="line">
-            <a:avLst/>
-          </a:prstGeom>
-          <a:noFill/>
-          <a:ln w="19050">
-            <a:solidFill>
-              <a:srgbClr val="8ABBD8"/>
-            </a:solidFill>
-            <a:prstDash val="solid"/>
-          </a:ln>
-        </p:spPr>
-      </p:sp>
-      <p:sp>
-        <p:nvSpPr>
-          <p:cNvPr id="20" name="Shape 18"/>
-          <p:cNvSpPr/>
-          <p:nvPr/>
-        </p:nvSpPr>
-        <p:spPr>
-          <a:xfrm>
-            <a:off x="9400032" y="3666744"/>
-            <a:ext cx="0" cy="155448"/>
-          </a:xfrm>
-          <a:prstGeom prst="line">
-            <a:avLst/>
-          </a:prstGeom>
-          <a:noFill/>
-          <a:ln w="19050">
-            <a:solidFill>
-              <a:srgbClr val="8ABBD8"/>
-            </a:solidFill>
-            <a:prstDash val="solid"/>
-          </a:ln>
-        </p:spPr>
-      </p:sp>
-      <p:sp>
-        <p:nvSpPr>
-          <p:cNvPr id="21" name="Shape 19"/>
-          <p:cNvSpPr/>
-          <p:nvPr/>
-        </p:nvSpPr>
-        <p:spPr>
-          <a:xfrm>
-            <a:off x="8302752" y="3456432"/>
-            <a:ext cx="1097280" cy="210312"/>
-          </a:xfrm>
-          <a:prstGeom prst="line">
-            <a:avLst/>
-          </a:prstGeom>
-          <a:noFill/>
-          <a:ln w="19050">
-            <a:solidFill>
-              <a:srgbClr val="8ABBD8"/>
-            </a:solidFill>
-            <a:prstDash val="solid"/>
-          </a:ln>
-        </p:spPr>
-      </p:sp>
-      <p:sp>
-        <p:nvSpPr>
-          <p:cNvPr id="22" name="Shape 20"/>
-          <p:cNvSpPr/>
-          <p:nvPr/>
-        </p:nvSpPr>
-        <p:spPr>
-          <a:xfrm>
-            <a:off x="10497312" y="3547872"/>
-            <a:ext cx="-1097280" cy="118872"/>
-          </a:xfrm>
-          <a:prstGeom prst="line">
-            <a:avLst/>
-          </a:prstGeom>
-          <a:noFill/>
-          <a:ln w="19050">
-            <a:solidFill>
-              <a:srgbClr val="8ABBD8"/>
-            </a:solidFill>
-            <a:prstDash val="solid"/>
-          </a:ln>
-        </p:spPr>
-      </p:sp>
-      <p:sp>
-        <p:nvSpPr>
-          <p:cNvPr id="23" name="Text 21"/>
-          <p:cNvSpPr/>
-          <p:nvPr/>
-        </p:nvSpPr>
-        <p:spPr>
-          <a:xfrm>
-            <a:off x="7909560" y="3977640"/>
-            <a:ext cx="2926080" cy="182880"/>
-          </a:xfrm>
-          <a:prstGeom prst="rect">
-            <a:avLst/>
-          </a:prstGeom>
-          <a:noFill/>
-          <a:ln/>
-        </p:spPr>
-        <p:txBody>
-          <a:bodyPr wrap="square" lIns="0" tIns="0" rIns="0" bIns="0" rtlCol="0" anchor="ctr"/>
-          <a:lstStyle/>
-          <a:p>
-            <a:pPr algn="ctr" indent="0" marL="0">
-              <a:buNone/>
-            </a:pPr>
-            <a:r>
-              <a:rPr lang="en-US" sz="1000" dirty="0">
-                <a:solidFill>
-                  <a:srgbClr val="003A63"/>
-                </a:solidFill>
-                <a:latin typeface="Aptos" pitchFamily="34" charset="0"/>
-                <a:ea typeface="Aptos" pitchFamily="34" charset="-122"/>
-                <a:cs typeface="Aptos" pitchFamily="34" charset="-120"/>
-              </a:rPr>
-              <a:t>People and trust</a:t>
-            </a:r>
-            <a:endParaRPr lang="en-US" sz="1000" dirty="0"/>
-          </a:p>
-        </p:txBody>
-      </p:sp>
-      <p:sp>
-        <p:nvSpPr>
-          <p:cNvPr id="24" name="Shape 22"/>
           <p:cNvSpPr/>
           <p:nvPr/>
         </p:nvSpPr>
@@ -12625,7 +11084,7 @@
       </p:sp>
       <p:sp>
         <p:nvSpPr>
-          <p:cNvPr id="25" name="Text 23"/>
+          <p:cNvPr id="17" name="Text 15"/>
           <p:cNvSpPr/>
           <p:nvPr/>
         </p:nvSpPr>
@@ -12664,7 +11123,7 @@
       </p:sp>
       <p:sp>
         <p:nvSpPr>
-          <p:cNvPr id="26" name="Text 24"/>
+          <p:cNvPr id="18" name="Text 16"/>
           <p:cNvSpPr/>
           <p:nvPr/>
         </p:nvSpPr>
@@ -13172,13 +11631,11 @@
             </a:avLst>
           </a:prstGeom>
           <a:solidFill>
-            <a:srgbClr val="FFFFFF">
-              <a:alpha val="88000"/>
-            </a:srgbClr>
+            <a:srgbClr val="FFFFFF"/>
           </a:solidFill>
           <a:ln w="12700">
             <a:solidFill>
-              <a:srgbClr val="D6E8F2"/>
+              <a:srgbClr val="B9D7E6"/>
             </a:solidFill>
             <a:prstDash val="solid"/>
           </a:ln>
@@ -13186,261 +11643,112 @@
       </p:sp>
       <p:sp>
         <p:nvSpPr>
-          <p:cNvPr id="14" name="Shape 12"/>
-          <p:cNvSpPr/>
-          <p:nvPr/>
-        </p:nvSpPr>
-        <p:spPr>
-          <a:xfrm>
-            <a:off x="8138160" y="3291840"/>
-            <a:ext cx="329184" cy="329184"/>
-          </a:xfrm>
-          <a:prstGeom prst="ellipse">
-            <a:avLst/>
-          </a:prstGeom>
-          <a:solidFill>
-            <a:srgbClr val="0068B7"/>
-          </a:solidFill>
-          <a:ln w="12700">
-            <a:solidFill>
-              <a:srgbClr val="0068B7"/>
-            </a:solidFill>
-            <a:prstDash val="solid"/>
-          </a:ln>
-        </p:spPr>
-      </p:sp>
-      <p:sp>
-        <p:nvSpPr>
-          <p:cNvPr id="15" name="Shape 13"/>
-          <p:cNvSpPr/>
-          <p:nvPr/>
-        </p:nvSpPr>
-        <p:spPr>
-          <a:xfrm>
-            <a:off x="10332720" y="3383280"/>
-            <a:ext cx="329184" cy="329184"/>
-          </a:xfrm>
-          <a:prstGeom prst="ellipse">
-            <a:avLst/>
-          </a:prstGeom>
-          <a:solidFill>
-            <a:srgbClr val="2F8A28"/>
-          </a:solidFill>
-          <a:ln w="12700">
-            <a:solidFill>
-              <a:srgbClr val="2F8A28"/>
-            </a:solidFill>
-            <a:prstDash val="solid"/>
-          </a:ln>
-        </p:spPr>
+          <p:cNvPr id="14" name="Text 12"/>
+          <p:cNvSpPr/>
+          <p:nvPr/>
+        </p:nvSpPr>
+        <p:spPr>
+          <a:xfrm>
+            <a:off x="7799832" y="2935224"/>
+            <a:ext cx="3145536" cy="256032"/>
+          </a:xfrm>
+          <a:prstGeom prst="rect">
+            <a:avLst/>
+          </a:prstGeom>
+          <a:noFill/>
+          <a:ln/>
+        </p:spPr>
+        <p:txBody>
+          <a:bodyPr wrap="square" lIns="0" tIns="0" rIns="0" bIns="0" rtlCol="0" anchor="ctr"/>
+          <a:lstStyle/>
+          <a:p>
+            <a:pPr indent="0" marL="0">
+              <a:buNone/>
+            </a:pPr>
+            <a:r>
+              <a:rPr lang="en-US" sz="1300" b="1" dirty="0">
+                <a:solidFill>
+                  <a:srgbClr val="0068B7"/>
+                </a:solidFill>
+                <a:latin typeface="Aptos" pitchFamily="34" charset="0"/>
+                <a:ea typeface="Aptos" pitchFamily="34" charset="-122"/>
+                <a:cs typeface="Aptos" pitchFamily="34" charset="-120"/>
+              </a:rPr>
+              <a:t>Concept checkpoints</a:t>
+            </a:r>
+            <a:endParaRPr lang="en-US" sz="1300" dirty="0"/>
+          </a:p>
+        </p:txBody>
+      </p:sp>
+      <p:sp>
+        <p:nvSpPr>
+          <p:cNvPr id="15" name="Text 13"/>
+          <p:cNvSpPr/>
+          <p:nvPr/>
+        </p:nvSpPr>
+        <p:spPr>
+          <a:xfrm>
+            <a:off x="7818120" y="3300984"/>
+            <a:ext cx="3090672" cy="877824"/>
+          </a:xfrm>
+          <a:prstGeom prst="rect">
+            <a:avLst/>
+          </a:prstGeom>
+          <a:noFill/>
+          <a:ln/>
+        </p:spPr>
+        <p:txBody>
+          <a:bodyPr wrap="square" lIns="254" tIns="254" rIns="254" bIns="254" rtlCol="0" anchor="t">
+            <a:normAutofit/>
+          </a:bodyPr>
+          <a:lstStyle/>
+          <a:p>
+            <a:r>
+              <a:rPr lang="en-US" sz="1380" dirty="0">
+                <a:solidFill>
+                  <a:srgbClr val="17364A"/>
+                </a:solidFill>
+                <a:latin typeface="Aptos" pitchFamily="34" charset="0"/>
+                <a:ea typeface="Aptos" pitchFamily="34" charset="-122"/>
+                <a:cs typeface="Aptos" pitchFamily="34" charset="-120"/>
+              </a:rPr>
+              <a:t>1.</a:t>
+            </a:r>
+            <a:endParaRPr lang="en-US" sz="1380" dirty="0"/>
+          </a:p>
+          <a:p>
+            <a:r>
+              <a:rPr lang="en-US" sz="1380" dirty="0">
+                <a:solidFill>
+                  <a:srgbClr val="17364A"/>
+                </a:solidFill>
+                <a:latin typeface="Aptos" pitchFamily="34" charset="0"/>
+                <a:ea typeface="Aptos" pitchFamily="34" charset="-122"/>
+                <a:cs typeface="Aptos" pitchFamily="34" charset="-120"/>
+              </a:rPr>
+              <a:t>What is NLP?</a:t>
+            </a:r>
+            <a:endParaRPr lang="en-US" sz="1380" dirty="0"/>
+          </a:p>
+          <a:p>
+            <a:r>
+              <a:rPr lang="en-US" sz="1380" dirty="0">
+                <a:solidFill>
+                  <a:srgbClr val="17364A"/>
+                </a:solidFill>
+                <a:latin typeface="Aptos" pitchFamily="34" charset="0"/>
+                <a:ea typeface="Aptos" pitchFamily="34" charset="-122"/>
+                <a:cs typeface="Aptos" pitchFamily="34" charset="-120"/>
+              </a:rPr>
+              <a:t>2.</a:t>
+            </a:r>
+            <a:endParaRPr lang="en-US" sz="1380" dirty="0"/>
+          </a:p>
+        </p:txBody>
       </p:sp>
       <p:sp>
         <p:nvSpPr>
           <p:cNvPr id="16" name="Shape 14"/>
-          <p:cNvSpPr/>
-          <p:nvPr/>
-        </p:nvSpPr>
-        <p:spPr>
-          <a:xfrm>
-            <a:off x="9235440" y="3502152"/>
-            <a:ext cx="329184" cy="329184"/>
-          </a:xfrm>
-          <a:prstGeom prst="ellipse">
-            <a:avLst/>
-          </a:prstGeom>
-          <a:solidFill>
-            <a:srgbClr val="D69A2D"/>
-          </a:solidFill>
-          <a:ln w="12700">
-            <a:solidFill>
-              <a:srgbClr val="D69A2D"/>
-            </a:solidFill>
-            <a:prstDash val="solid"/>
-          </a:ln>
-        </p:spPr>
-      </p:sp>
-      <p:sp>
-        <p:nvSpPr>
-          <p:cNvPr id="17" name="Shape 15"/>
-          <p:cNvSpPr/>
-          <p:nvPr/>
-        </p:nvSpPr>
-        <p:spPr>
-          <a:xfrm>
-            <a:off x="9235440" y="3657600"/>
-            <a:ext cx="329184" cy="329184"/>
-          </a:xfrm>
-          <a:prstGeom prst="ellipse">
-            <a:avLst/>
-          </a:prstGeom>
-          <a:solidFill>
-            <a:srgbClr val="6A4CA3"/>
-          </a:solidFill>
-          <a:ln w="12700">
-            <a:solidFill>
-              <a:srgbClr val="6A4CA3"/>
-            </a:solidFill>
-            <a:prstDash val="solid"/>
-          </a:ln>
-        </p:spPr>
-      </p:sp>
-      <p:sp>
-        <p:nvSpPr>
-          <p:cNvPr id="18" name="Shape 16"/>
-          <p:cNvSpPr/>
-          <p:nvPr/>
-        </p:nvSpPr>
-        <p:spPr>
-          <a:xfrm>
-            <a:off x="8302752" y="3456432"/>
-            <a:ext cx="1097280" cy="365760"/>
-          </a:xfrm>
-          <a:prstGeom prst="line">
-            <a:avLst/>
-          </a:prstGeom>
-          <a:noFill/>
-          <a:ln w="19050">
-            <a:solidFill>
-              <a:srgbClr val="8ABBD8"/>
-            </a:solidFill>
-            <a:prstDash val="solid"/>
-          </a:ln>
-        </p:spPr>
-      </p:sp>
-      <p:sp>
-        <p:nvSpPr>
-          <p:cNvPr id="19" name="Shape 17"/>
-          <p:cNvSpPr/>
-          <p:nvPr/>
-        </p:nvSpPr>
-        <p:spPr>
-          <a:xfrm>
-            <a:off x="10497312" y="3547872"/>
-            <a:ext cx="-1097280" cy="274320"/>
-          </a:xfrm>
-          <a:prstGeom prst="line">
-            <a:avLst/>
-          </a:prstGeom>
-          <a:noFill/>
-          <a:ln w="19050">
-            <a:solidFill>
-              <a:srgbClr val="8ABBD8"/>
-            </a:solidFill>
-            <a:prstDash val="solid"/>
-          </a:ln>
-        </p:spPr>
-      </p:sp>
-      <p:sp>
-        <p:nvSpPr>
-          <p:cNvPr id="20" name="Shape 18"/>
-          <p:cNvSpPr/>
-          <p:nvPr/>
-        </p:nvSpPr>
-        <p:spPr>
-          <a:xfrm>
-            <a:off x="9400032" y="3666744"/>
-            <a:ext cx="0" cy="155448"/>
-          </a:xfrm>
-          <a:prstGeom prst="line">
-            <a:avLst/>
-          </a:prstGeom>
-          <a:noFill/>
-          <a:ln w="19050">
-            <a:solidFill>
-              <a:srgbClr val="8ABBD8"/>
-            </a:solidFill>
-            <a:prstDash val="solid"/>
-          </a:ln>
-        </p:spPr>
-      </p:sp>
-      <p:sp>
-        <p:nvSpPr>
-          <p:cNvPr id="21" name="Shape 19"/>
-          <p:cNvSpPr/>
-          <p:nvPr/>
-        </p:nvSpPr>
-        <p:spPr>
-          <a:xfrm>
-            <a:off x="8302752" y="3456432"/>
-            <a:ext cx="1097280" cy="210312"/>
-          </a:xfrm>
-          <a:prstGeom prst="line">
-            <a:avLst/>
-          </a:prstGeom>
-          <a:noFill/>
-          <a:ln w="19050">
-            <a:solidFill>
-              <a:srgbClr val="8ABBD8"/>
-            </a:solidFill>
-            <a:prstDash val="solid"/>
-          </a:ln>
-        </p:spPr>
-      </p:sp>
-      <p:sp>
-        <p:nvSpPr>
-          <p:cNvPr id="22" name="Shape 20"/>
-          <p:cNvSpPr/>
-          <p:nvPr/>
-        </p:nvSpPr>
-        <p:spPr>
-          <a:xfrm>
-            <a:off x="10497312" y="3547872"/>
-            <a:ext cx="-1097280" cy="118872"/>
-          </a:xfrm>
-          <a:prstGeom prst="line">
-            <a:avLst/>
-          </a:prstGeom>
-          <a:noFill/>
-          <a:ln w="19050">
-            <a:solidFill>
-              <a:srgbClr val="8ABBD8"/>
-            </a:solidFill>
-            <a:prstDash val="solid"/>
-          </a:ln>
-        </p:spPr>
-      </p:sp>
-      <p:sp>
-        <p:nvSpPr>
-          <p:cNvPr id="23" name="Text 21"/>
-          <p:cNvSpPr/>
-          <p:nvPr/>
-        </p:nvSpPr>
-        <p:spPr>
-          <a:xfrm>
-            <a:off x="7909560" y="3977640"/>
-            <a:ext cx="2926080" cy="182880"/>
-          </a:xfrm>
-          <a:prstGeom prst="rect">
-            <a:avLst/>
-          </a:prstGeom>
-          <a:noFill/>
-          <a:ln/>
-        </p:spPr>
-        <p:txBody>
-          <a:bodyPr wrap="square" lIns="0" tIns="0" rIns="0" bIns="0" rtlCol="0" anchor="ctr"/>
-          <a:lstStyle/>
-          <a:p>
-            <a:pPr algn="ctr" indent="0" marL="0">
-              <a:buNone/>
-            </a:pPr>
-            <a:r>
-              <a:rPr lang="en-US" sz="1000" dirty="0">
-                <a:solidFill>
-                  <a:srgbClr val="003A63"/>
-                </a:solidFill>
-                <a:latin typeface="Aptos" pitchFamily="34" charset="0"/>
-                <a:ea typeface="Aptos" pitchFamily="34" charset="-122"/>
-                <a:cs typeface="Aptos" pitchFamily="34" charset="-120"/>
-              </a:rPr>
-              <a:t>People and trust</a:t>
-            </a:r>
-            <a:endParaRPr lang="en-US" sz="1000" dirty="0"/>
-          </a:p>
-        </p:txBody>
-      </p:sp>
-      <p:sp>
-        <p:nvSpPr>
-          <p:cNvPr id="24" name="Shape 22"/>
           <p:cNvSpPr/>
           <p:nvPr/>
         </p:nvSpPr>
@@ -13467,7 +11775,7 @@
       </p:sp>
       <p:sp>
         <p:nvSpPr>
-          <p:cNvPr id="25" name="Text 23"/>
+          <p:cNvPr id="17" name="Text 15"/>
           <p:cNvSpPr/>
           <p:nvPr/>
         </p:nvSpPr>
@@ -13506,7 +11814,7 @@
       </p:sp>
       <p:sp>
         <p:nvSpPr>
-          <p:cNvPr id="26" name="Text 24"/>
+          <p:cNvPr id="18" name="Text 16"/>
           <p:cNvSpPr/>
           <p:nvPr/>
         </p:nvSpPr>
@@ -14014,13 +12322,11 @@
             </a:avLst>
           </a:prstGeom>
           <a:solidFill>
-            <a:srgbClr val="FFFFFF">
-              <a:alpha val="88000"/>
-            </a:srgbClr>
+            <a:srgbClr val="FFFFFF"/>
           </a:solidFill>
           <a:ln w="12700">
             <a:solidFill>
-              <a:srgbClr val="D6E8F2"/>
+              <a:srgbClr val="B9D7E6"/>
             </a:solidFill>
             <a:prstDash val="solid"/>
           </a:ln>
@@ -14028,261 +12334,112 @@
       </p:sp>
       <p:sp>
         <p:nvSpPr>
-          <p:cNvPr id="14" name="Shape 12"/>
-          <p:cNvSpPr/>
-          <p:nvPr/>
-        </p:nvSpPr>
-        <p:spPr>
-          <a:xfrm>
-            <a:off x="8138160" y="3291840"/>
-            <a:ext cx="329184" cy="329184"/>
-          </a:xfrm>
-          <a:prstGeom prst="ellipse">
-            <a:avLst/>
-          </a:prstGeom>
-          <a:solidFill>
-            <a:srgbClr val="0068B7"/>
-          </a:solidFill>
-          <a:ln w="12700">
-            <a:solidFill>
-              <a:srgbClr val="0068B7"/>
-            </a:solidFill>
-            <a:prstDash val="solid"/>
-          </a:ln>
-        </p:spPr>
-      </p:sp>
-      <p:sp>
-        <p:nvSpPr>
-          <p:cNvPr id="15" name="Shape 13"/>
-          <p:cNvSpPr/>
-          <p:nvPr/>
-        </p:nvSpPr>
-        <p:spPr>
-          <a:xfrm>
-            <a:off x="10332720" y="3383280"/>
-            <a:ext cx="329184" cy="329184"/>
-          </a:xfrm>
-          <a:prstGeom prst="ellipse">
-            <a:avLst/>
-          </a:prstGeom>
-          <a:solidFill>
-            <a:srgbClr val="2F8A28"/>
-          </a:solidFill>
-          <a:ln w="12700">
-            <a:solidFill>
-              <a:srgbClr val="2F8A28"/>
-            </a:solidFill>
-            <a:prstDash val="solid"/>
-          </a:ln>
-        </p:spPr>
+          <p:cNvPr id="14" name="Text 12"/>
+          <p:cNvSpPr/>
+          <p:nvPr/>
+        </p:nvSpPr>
+        <p:spPr>
+          <a:xfrm>
+            <a:off x="7799832" y="2935224"/>
+            <a:ext cx="3145536" cy="256032"/>
+          </a:xfrm>
+          <a:prstGeom prst="rect">
+            <a:avLst/>
+          </a:prstGeom>
+          <a:noFill/>
+          <a:ln/>
+        </p:spPr>
+        <p:txBody>
+          <a:bodyPr wrap="square" lIns="0" tIns="0" rIns="0" bIns="0" rtlCol="0" anchor="ctr"/>
+          <a:lstStyle/>
+          <a:p>
+            <a:pPr indent="0" marL="0">
+              <a:buNone/>
+            </a:pPr>
+            <a:r>
+              <a:rPr lang="en-US" sz="1300" b="1" dirty="0">
+                <a:solidFill>
+                  <a:srgbClr val="0068B7"/>
+                </a:solidFill>
+                <a:latin typeface="Aptos" pitchFamily="34" charset="0"/>
+                <a:ea typeface="Aptos" pitchFamily="34" charset="-122"/>
+                <a:cs typeface="Aptos" pitchFamily="34" charset="-120"/>
+              </a:rPr>
+              <a:t>Concept checkpoints</a:t>
+            </a:r>
+            <a:endParaRPr lang="en-US" sz="1300" dirty="0"/>
+          </a:p>
+        </p:txBody>
+      </p:sp>
+      <p:sp>
+        <p:nvSpPr>
+          <p:cNvPr id="15" name="Text 13"/>
+          <p:cNvSpPr/>
+          <p:nvPr/>
+        </p:nvSpPr>
+        <p:spPr>
+          <a:xfrm>
+            <a:off x="7818120" y="3300984"/>
+            <a:ext cx="3090672" cy="877824"/>
+          </a:xfrm>
+          <a:prstGeom prst="rect">
+            <a:avLst/>
+          </a:prstGeom>
+          <a:noFill/>
+          <a:ln/>
+        </p:spPr>
+        <p:txBody>
+          <a:bodyPr wrap="square" lIns="254" tIns="254" rIns="254" bIns="254" rtlCol="0" anchor="t">
+            <a:normAutofit/>
+          </a:bodyPr>
+          <a:lstStyle/>
+          <a:p>
+            <a:r>
+              <a:rPr lang="en-US" sz="1380" dirty="0">
+                <a:solidFill>
+                  <a:srgbClr val="17364A"/>
+                </a:solidFill>
+                <a:latin typeface="Aptos" pitchFamily="34" charset="0"/>
+                <a:ea typeface="Aptos" pitchFamily="34" charset="-122"/>
+                <a:cs typeface="Aptos" pitchFamily="34" charset="-120"/>
+              </a:rPr>
+              <a:t>NIST Artificial Intelligence Risk Management Framework:.</a:t>
+            </a:r>
+            <a:endParaRPr lang="en-US" sz="1380" dirty="0"/>
+          </a:p>
+          <a:p>
+            <a:r>
+              <a:rPr lang="en-US" sz="1380" dirty="0">
+                <a:solidFill>
+                  <a:srgbClr val="17364A"/>
+                </a:solidFill>
+                <a:latin typeface="Aptos" pitchFamily="34" charset="0"/>
+                <a:ea typeface="Aptos" pitchFamily="34" charset="-122"/>
+                <a:cs typeface="Aptos" pitchFamily="34" charset="-120"/>
+              </a:rPr>
+              <a:t>CDC Public Health Data Strategy:.</a:t>
+            </a:r>
+            <a:endParaRPr lang="en-US" sz="1380" dirty="0"/>
+          </a:p>
+          <a:p>
+            <a:r>
+              <a:rPr lang="en-US" sz="1380" dirty="0">
+                <a:solidFill>
+                  <a:srgbClr val="17364A"/>
+                </a:solidFill>
+                <a:latin typeface="Aptos" pitchFamily="34" charset="0"/>
+                <a:ea typeface="Aptos" pitchFamily="34" charset="-122"/>
+                <a:cs typeface="Aptos" pitchFamily="34" charset="-120"/>
+              </a:rPr>
+              <a:t>Agency privacy, records, data governance, and program policies</a:t>
+            </a:r>
+            <a:endParaRPr lang="en-US" sz="1380" dirty="0"/>
+          </a:p>
+        </p:txBody>
       </p:sp>
       <p:sp>
         <p:nvSpPr>
           <p:cNvPr id="16" name="Shape 14"/>
-          <p:cNvSpPr/>
-          <p:nvPr/>
-        </p:nvSpPr>
-        <p:spPr>
-          <a:xfrm>
-            <a:off x="9235440" y="3502152"/>
-            <a:ext cx="329184" cy="329184"/>
-          </a:xfrm>
-          <a:prstGeom prst="ellipse">
-            <a:avLst/>
-          </a:prstGeom>
-          <a:solidFill>
-            <a:srgbClr val="D69A2D"/>
-          </a:solidFill>
-          <a:ln w="12700">
-            <a:solidFill>
-              <a:srgbClr val="D69A2D"/>
-            </a:solidFill>
-            <a:prstDash val="solid"/>
-          </a:ln>
-        </p:spPr>
-      </p:sp>
-      <p:sp>
-        <p:nvSpPr>
-          <p:cNvPr id="17" name="Shape 15"/>
-          <p:cNvSpPr/>
-          <p:nvPr/>
-        </p:nvSpPr>
-        <p:spPr>
-          <a:xfrm>
-            <a:off x="9235440" y="3657600"/>
-            <a:ext cx="329184" cy="329184"/>
-          </a:xfrm>
-          <a:prstGeom prst="ellipse">
-            <a:avLst/>
-          </a:prstGeom>
-          <a:solidFill>
-            <a:srgbClr val="6A4CA3"/>
-          </a:solidFill>
-          <a:ln w="12700">
-            <a:solidFill>
-              <a:srgbClr val="6A4CA3"/>
-            </a:solidFill>
-            <a:prstDash val="solid"/>
-          </a:ln>
-        </p:spPr>
-      </p:sp>
-      <p:sp>
-        <p:nvSpPr>
-          <p:cNvPr id="18" name="Shape 16"/>
-          <p:cNvSpPr/>
-          <p:nvPr/>
-        </p:nvSpPr>
-        <p:spPr>
-          <a:xfrm>
-            <a:off x="8302752" y="3456432"/>
-            <a:ext cx="1097280" cy="365760"/>
-          </a:xfrm>
-          <a:prstGeom prst="line">
-            <a:avLst/>
-          </a:prstGeom>
-          <a:noFill/>
-          <a:ln w="19050">
-            <a:solidFill>
-              <a:srgbClr val="8ABBD8"/>
-            </a:solidFill>
-            <a:prstDash val="solid"/>
-          </a:ln>
-        </p:spPr>
-      </p:sp>
-      <p:sp>
-        <p:nvSpPr>
-          <p:cNvPr id="19" name="Shape 17"/>
-          <p:cNvSpPr/>
-          <p:nvPr/>
-        </p:nvSpPr>
-        <p:spPr>
-          <a:xfrm>
-            <a:off x="10497312" y="3547872"/>
-            <a:ext cx="-1097280" cy="274320"/>
-          </a:xfrm>
-          <a:prstGeom prst="line">
-            <a:avLst/>
-          </a:prstGeom>
-          <a:noFill/>
-          <a:ln w="19050">
-            <a:solidFill>
-              <a:srgbClr val="8ABBD8"/>
-            </a:solidFill>
-            <a:prstDash val="solid"/>
-          </a:ln>
-        </p:spPr>
-      </p:sp>
-      <p:sp>
-        <p:nvSpPr>
-          <p:cNvPr id="20" name="Shape 18"/>
-          <p:cNvSpPr/>
-          <p:nvPr/>
-        </p:nvSpPr>
-        <p:spPr>
-          <a:xfrm>
-            <a:off x="9400032" y="3666744"/>
-            <a:ext cx="0" cy="155448"/>
-          </a:xfrm>
-          <a:prstGeom prst="line">
-            <a:avLst/>
-          </a:prstGeom>
-          <a:noFill/>
-          <a:ln w="19050">
-            <a:solidFill>
-              <a:srgbClr val="8ABBD8"/>
-            </a:solidFill>
-            <a:prstDash val="solid"/>
-          </a:ln>
-        </p:spPr>
-      </p:sp>
-      <p:sp>
-        <p:nvSpPr>
-          <p:cNvPr id="21" name="Shape 19"/>
-          <p:cNvSpPr/>
-          <p:nvPr/>
-        </p:nvSpPr>
-        <p:spPr>
-          <a:xfrm>
-            <a:off x="8302752" y="3456432"/>
-            <a:ext cx="1097280" cy="210312"/>
-          </a:xfrm>
-          <a:prstGeom prst="line">
-            <a:avLst/>
-          </a:prstGeom>
-          <a:noFill/>
-          <a:ln w="19050">
-            <a:solidFill>
-              <a:srgbClr val="8ABBD8"/>
-            </a:solidFill>
-            <a:prstDash val="solid"/>
-          </a:ln>
-        </p:spPr>
-      </p:sp>
-      <p:sp>
-        <p:nvSpPr>
-          <p:cNvPr id="22" name="Shape 20"/>
-          <p:cNvSpPr/>
-          <p:nvPr/>
-        </p:nvSpPr>
-        <p:spPr>
-          <a:xfrm>
-            <a:off x="10497312" y="3547872"/>
-            <a:ext cx="-1097280" cy="118872"/>
-          </a:xfrm>
-          <a:prstGeom prst="line">
-            <a:avLst/>
-          </a:prstGeom>
-          <a:noFill/>
-          <a:ln w="19050">
-            <a:solidFill>
-              <a:srgbClr val="8ABBD8"/>
-            </a:solidFill>
-            <a:prstDash val="solid"/>
-          </a:ln>
-        </p:spPr>
-      </p:sp>
-      <p:sp>
-        <p:nvSpPr>
-          <p:cNvPr id="23" name="Text 21"/>
-          <p:cNvSpPr/>
-          <p:nvPr/>
-        </p:nvSpPr>
-        <p:spPr>
-          <a:xfrm>
-            <a:off x="7909560" y="3977640"/>
-            <a:ext cx="2926080" cy="182880"/>
-          </a:xfrm>
-          <a:prstGeom prst="rect">
-            <a:avLst/>
-          </a:prstGeom>
-          <a:noFill/>
-          <a:ln/>
-        </p:spPr>
-        <p:txBody>
-          <a:bodyPr wrap="square" lIns="0" tIns="0" rIns="0" bIns="0" rtlCol="0" anchor="ctr"/>
-          <a:lstStyle/>
-          <a:p>
-            <a:pPr algn="ctr" indent="0" marL="0">
-              <a:buNone/>
-            </a:pPr>
-            <a:r>
-              <a:rPr lang="en-US" sz="1000" dirty="0">
-                <a:solidFill>
-                  <a:srgbClr val="003A63"/>
-                </a:solidFill>
-                <a:latin typeface="Aptos" pitchFamily="34" charset="0"/>
-                <a:ea typeface="Aptos" pitchFamily="34" charset="-122"/>
-                <a:cs typeface="Aptos" pitchFamily="34" charset="-120"/>
-              </a:rPr>
-              <a:t>People and trust</a:t>
-            </a:r>
-            <a:endParaRPr lang="en-US" sz="1000" dirty="0"/>
-          </a:p>
-        </p:txBody>
-      </p:sp>
-      <p:sp>
-        <p:nvSpPr>
-          <p:cNvPr id="24" name="Shape 22"/>
           <p:cNvSpPr/>
           <p:nvPr/>
         </p:nvSpPr>
@@ -14309,7 +12466,7 @@
       </p:sp>
       <p:sp>
         <p:nvSpPr>
-          <p:cNvPr id="25" name="Text 23"/>
+          <p:cNvPr id="17" name="Text 15"/>
           <p:cNvSpPr/>
           <p:nvPr/>
         </p:nvSpPr>
@@ -14348,7 +12505,7 @@
       </p:sp>
       <p:sp>
         <p:nvSpPr>
-          <p:cNvPr id="26" name="Text 24"/>
+          <p:cNvPr id="18" name="Text 16"/>
           <p:cNvSpPr/>
           <p:nvPr/>
         </p:nvSpPr>
@@ -14861,20 +13018,20 @@
         </p:nvSpPr>
         <p:spPr>
           <a:xfrm>
-            <a:off x="7818120" y="3977640"/>
-            <a:ext cx="972312" cy="749808"/>
+            <a:off x="8046720" y="3794760"/>
+            <a:ext cx="3063240" cy="1600200"/>
           </a:xfrm>
           <a:prstGeom prst="roundRect">
             <a:avLst>
-              <a:gd name="adj" fmla="val 14634"/>
+              <a:gd name="adj" fmla="val 6857"/>
             </a:avLst>
           </a:prstGeom>
           <a:solidFill>
-            <a:srgbClr val="0068B7"/>
+            <a:srgbClr val="FFFFFF"/>
           </a:solidFill>
           <a:ln w="12700">
             <a:solidFill>
-              <a:srgbClr val="0068B7"/>
+              <a:srgbClr val="B9D7E6"/>
             </a:solidFill>
             <a:prstDash val="solid"/>
           </a:ln>
@@ -14888,172 +13045,100 @@
         </p:nvSpPr>
         <p:spPr>
           <a:xfrm>
-            <a:off x="7891272" y="4169664"/>
-            <a:ext cx="826008" cy="310896"/>
-          </a:xfrm>
-          <a:prstGeom prst="rect">
-            <a:avLst/>
-          </a:prstGeom>
-          <a:noFill/>
-          <a:ln/>
-        </p:spPr>
-        <p:txBody>
-          <a:bodyPr wrap="square" lIns="0" tIns="0" rIns="0" bIns="0" rtlCol="0" anchor="ctr">
+            <a:off x="8211312" y="3941064"/>
+            <a:ext cx="2734056" cy="256032"/>
+          </a:xfrm>
+          <a:prstGeom prst="rect">
+            <a:avLst/>
+          </a:prstGeom>
+          <a:noFill/>
+          <a:ln/>
+        </p:spPr>
+        <p:txBody>
+          <a:bodyPr wrap="square" lIns="0" tIns="0" rIns="0" bIns="0" rtlCol="0" anchor="ctr"/>
+          <a:lstStyle/>
+          <a:p>
+            <a:pPr indent="0" marL="0">
+              <a:buNone/>
+            </a:pPr>
+            <a:r>
+              <a:rPr lang="en-US" sz="1300" b="1" dirty="0">
+                <a:solidFill>
+                  <a:srgbClr val="0068B7"/>
+                </a:solidFill>
+                <a:latin typeface="Aptos" pitchFamily="34" charset="0"/>
+                <a:ea typeface="Aptos" pitchFamily="34" charset="-122"/>
+                <a:cs typeface="Aptos" pitchFamily="34" charset="-120"/>
+              </a:rPr>
+              <a:t>Use the play links to</a:t>
+            </a:r>
+            <a:endParaRPr lang="en-US" sz="1300" dirty="0"/>
+          </a:p>
+        </p:txBody>
+      </p:sp>
+      <p:sp>
+        <p:nvSpPr>
+          <p:cNvPr id="15" name="Text 13"/>
+          <p:cNvSpPr/>
+          <p:nvPr/>
+        </p:nvSpPr>
+        <p:spPr>
+          <a:xfrm>
+            <a:off x="8229600" y="4306824"/>
+            <a:ext cx="2679192" cy="941832"/>
+          </a:xfrm>
+          <a:prstGeom prst="rect">
+            <a:avLst/>
+          </a:prstGeom>
+          <a:noFill/>
+          <a:ln/>
+        </p:spPr>
+        <p:txBody>
+          <a:bodyPr wrap="square" lIns="254" tIns="254" rIns="254" bIns="254" rtlCol="0" anchor="t">
             <a:normAutofit/>
           </a:bodyPr>
           <a:lstStyle/>
           <a:p>
-            <a:pPr algn="ctr" indent="0" marL="0">
-              <a:buNone/>
-            </a:pPr>
-            <a:r>
-              <a:rPr lang="en-US" sz="1500" b="1" dirty="0">
-                <a:solidFill>
-                  <a:srgbClr val="FFFFFF"/>
-                </a:solidFill>
-                <a:latin typeface="Aptos" pitchFamily="34" charset="0"/>
-                <a:ea typeface="Aptos" pitchFamily="34" charset="-122"/>
-                <a:cs typeface="Aptos" pitchFamily="34" charset="-120"/>
-              </a:rPr>
-              <a:t>Lesson</a:t>
-            </a:r>
-            <a:endParaRPr lang="en-US" sz="1500" dirty="0"/>
-          </a:p>
-        </p:txBody>
-      </p:sp>
-      <p:sp>
-        <p:nvSpPr>
-          <p:cNvPr id="15" name="Shape 13"/>
-          <p:cNvSpPr/>
-          <p:nvPr/>
-        </p:nvSpPr>
-        <p:spPr>
-          <a:xfrm>
-            <a:off x="9046464" y="3977640"/>
-            <a:ext cx="972312" cy="749808"/>
-          </a:xfrm>
-          <a:prstGeom prst="roundRect">
-            <a:avLst>
-              <a:gd name="adj" fmla="val 14634"/>
-            </a:avLst>
-          </a:prstGeom>
-          <a:solidFill>
-            <a:srgbClr val="2F8A28"/>
-          </a:solidFill>
-          <a:ln w="12700">
-            <a:solidFill>
-              <a:srgbClr val="2F8A28"/>
-            </a:solidFill>
-            <a:prstDash val="solid"/>
-          </a:ln>
-        </p:spPr>
-      </p:sp>
-      <p:sp>
-        <p:nvSpPr>
-          <p:cNvPr id="16" name="Text 14"/>
-          <p:cNvSpPr/>
-          <p:nvPr/>
-        </p:nvSpPr>
-        <p:spPr>
-          <a:xfrm>
-            <a:off x="9119616" y="4169664"/>
-            <a:ext cx="826008" cy="310896"/>
-          </a:xfrm>
-          <a:prstGeom prst="rect">
-            <a:avLst/>
-          </a:prstGeom>
-          <a:noFill/>
-          <a:ln/>
-        </p:spPr>
-        <p:txBody>
-          <a:bodyPr wrap="square" lIns="0" tIns="0" rIns="0" bIns="0" rtlCol="0" anchor="ctr">
-            <a:normAutofit/>
-          </a:bodyPr>
-          <a:lstStyle/>
-          <a:p>
-            <a:pPr algn="ctr" indent="0" marL="0">
-              <a:buNone/>
-            </a:pPr>
-            <a:r>
-              <a:rPr lang="en-US" sz="1500" b="1" dirty="0">
-                <a:solidFill>
-                  <a:srgbClr val="FFFFFF"/>
-                </a:solidFill>
-                <a:latin typeface="Aptos" pitchFamily="34" charset="0"/>
-                <a:ea typeface="Aptos" pitchFamily="34" charset="-122"/>
-                <a:cs typeface="Aptos" pitchFamily="34" charset="-120"/>
-              </a:rPr>
-              <a:t>Plays</a:t>
-            </a:r>
-            <a:endParaRPr lang="en-US" sz="1500" dirty="0"/>
-          </a:p>
-        </p:txBody>
-      </p:sp>
-      <p:sp>
-        <p:nvSpPr>
-          <p:cNvPr id="17" name="Shape 15"/>
-          <p:cNvSpPr/>
-          <p:nvPr/>
-        </p:nvSpPr>
-        <p:spPr>
-          <a:xfrm>
-            <a:off x="10274808" y="3977640"/>
-            <a:ext cx="972312" cy="749808"/>
-          </a:xfrm>
-          <a:prstGeom prst="roundRect">
-            <a:avLst>
-              <a:gd name="adj" fmla="val 14634"/>
-            </a:avLst>
-          </a:prstGeom>
-          <a:solidFill>
-            <a:srgbClr val="6A4CA3"/>
-          </a:solidFill>
-          <a:ln w="12700">
-            <a:solidFill>
-              <a:srgbClr val="6A4CA3"/>
-            </a:solidFill>
-            <a:prstDash val="solid"/>
-          </a:ln>
-        </p:spPr>
-      </p:sp>
-      <p:sp>
-        <p:nvSpPr>
-          <p:cNvPr id="18" name="Text 16"/>
-          <p:cNvSpPr/>
-          <p:nvPr/>
-        </p:nvSpPr>
-        <p:spPr>
-          <a:xfrm>
-            <a:off x="10347960" y="4169664"/>
-            <a:ext cx="826008" cy="310896"/>
-          </a:xfrm>
-          <a:prstGeom prst="rect">
-            <a:avLst/>
-          </a:prstGeom>
-          <a:noFill/>
-          <a:ln/>
-        </p:spPr>
-        <p:txBody>
-          <a:bodyPr wrap="square" lIns="0" tIns="0" rIns="0" bIns="0" rtlCol="0" anchor="ctr">
-            <a:normAutofit/>
-          </a:bodyPr>
-          <a:lstStyle/>
-          <a:p>
-            <a:pPr algn="ctr" indent="0" marL="0">
-              <a:buNone/>
-            </a:pPr>
-            <a:r>
-              <a:rPr lang="en-US" sz="1500" b="1" dirty="0">
-                <a:solidFill>
-                  <a:srgbClr val="FFFFFF"/>
-                </a:solidFill>
-                <a:latin typeface="Aptos" pitchFamily="34" charset="0"/>
-                <a:ea typeface="Aptos" pitchFamily="34" charset="-122"/>
-                <a:cs typeface="Aptos" pitchFamily="34" charset="-120"/>
-              </a:rPr>
-              <a:t>Action</a:t>
-            </a:r>
-            <a:endParaRPr lang="en-US" sz="1500" dirty="0"/>
+            <a:r>
+              <a:rPr lang="en-US" sz="1380" dirty="0">
+                <a:solidFill>
+                  <a:srgbClr val="17364A"/>
+                </a:solidFill>
+                <a:latin typeface="Aptos" pitchFamily="34" charset="0"/>
+                <a:ea typeface="Aptos" pitchFamily="34" charset="-122"/>
+                <a:cs typeface="Aptos" pitchFamily="34" charset="-120"/>
+              </a:rPr>
+              <a:t>Locate the decision point in the playbook sequence.</a:t>
+            </a:r>
+            <a:endParaRPr lang="en-US" sz="1380" dirty="0"/>
+          </a:p>
+          <a:p>
+            <a:r>
+              <a:rPr lang="en-US" sz="1380" dirty="0">
+                <a:solidFill>
+                  <a:srgbClr val="17364A"/>
+                </a:solidFill>
+                <a:latin typeface="Aptos" pitchFamily="34" charset="0"/>
+                <a:ea typeface="Aptos" pitchFamily="34" charset="-122"/>
+                <a:cs typeface="Aptos" pitchFamily="34" charset="-120"/>
+              </a:rPr>
+              <a:t>Identify who should participate in the work.</a:t>
+            </a:r>
+            <a:endParaRPr lang="en-US" sz="1380" dirty="0"/>
+          </a:p>
+          <a:p>
+            <a:r>
+              <a:rPr lang="en-US" sz="1380" dirty="0">
+                <a:solidFill>
+                  <a:srgbClr val="17364A"/>
+                </a:solidFill>
+                <a:latin typeface="Aptos" pitchFamily="34" charset="0"/>
+                <a:ea typeface="Aptos" pitchFamily="34" charset="-122"/>
+                <a:cs typeface="Aptos" pitchFamily="34" charset="-120"/>
+              </a:rPr>
+              <a:t>Document the review, approval, or implementation step.</a:t>
+            </a:r>
+            <a:endParaRPr lang="en-US" sz="1380" dirty="0"/>
           </a:p>
         </p:txBody>
       </p:sp>
@@ -15531,20 +13616,20 @@
         </p:nvSpPr>
         <p:spPr>
           <a:xfrm>
-            <a:off x="7818120" y="3977640"/>
-            <a:ext cx="972312" cy="749808"/>
+            <a:off x="8046720" y="3794760"/>
+            <a:ext cx="3063240" cy="1600200"/>
           </a:xfrm>
           <a:prstGeom prst="roundRect">
             <a:avLst>
-              <a:gd name="adj" fmla="val 14634"/>
+              <a:gd name="adj" fmla="val 6857"/>
             </a:avLst>
           </a:prstGeom>
           <a:solidFill>
-            <a:srgbClr val="0068B7"/>
+            <a:srgbClr val="FFFFFF"/>
           </a:solidFill>
           <a:ln w="12700">
             <a:solidFill>
-              <a:srgbClr val="0068B7"/>
+              <a:srgbClr val="B9D7E6"/>
             </a:solidFill>
             <a:prstDash val="solid"/>
           </a:ln>
@@ -15558,172 +13643,100 @@
         </p:nvSpPr>
         <p:spPr>
           <a:xfrm>
-            <a:off x="7891272" y="4169664"/>
-            <a:ext cx="826008" cy="310896"/>
-          </a:xfrm>
-          <a:prstGeom prst="rect">
-            <a:avLst/>
-          </a:prstGeom>
-          <a:noFill/>
-          <a:ln/>
-        </p:spPr>
-        <p:txBody>
-          <a:bodyPr wrap="square" lIns="0" tIns="0" rIns="0" bIns="0" rtlCol="0" anchor="ctr">
+            <a:off x="8211312" y="3941064"/>
+            <a:ext cx="2734056" cy="256032"/>
+          </a:xfrm>
+          <a:prstGeom prst="rect">
+            <a:avLst/>
+          </a:prstGeom>
+          <a:noFill/>
+          <a:ln/>
+        </p:spPr>
+        <p:txBody>
+          <a:bodyPr wrap="square" lIns="0" tIns="0" rIns="0" bIns="0" rtlCol="0" anchor="ctr"/>
+          <a:lstStyle/>
+          <a:p>
+            <a:pPr indent="0" marL="0">
+              <a:buNone/>
+            </a:pPr>
+            <a:r>
+              <a:rPr lang="en-US" sz="1300" b="1" dirty="0">
+                <a:solidFill>
+                  <a:srgbClr val="0068B7"/>
+                </a:solidFill>
+                <a:latin typeface="Aptos" pitchFamily="34" charset="0"/>
+                <a:ea typeface="Aptos" pitchFamily="34" charset="-122"/>
+                <a:cs typeface="Aptos" pitchFamily="34" charset="-120"/>
+              </a:rPr>
+              <a:t>Tool selection cues</a:t>
+            </a:r>
+            <a:endParaRPr lang="en-US" sz="1300" dirty="0"/>
+          </a:p>
+        </p:txBody>
+      </p:sp>
+      <p:sp>
+        <p:nvSpPr>
+          <p:cNvPr id="15" name="Text 13"/>
+          <p:cNvSpPr/>
+          <p:nvPr/>
+        </p:nvSpPr>
+        <p:spPr>
+          <a:xfrm>
+            <a:off x="8229600" y="4306824"/>
+            <a:ext cx="2679192" cy="941832"/>
+          </a:xfrm>
+          <a:prstGeom prst="rect">
+            <a:avLst/>
+          </a:prstGeom>
+          <a:noFill/>
+          <a:ln/>
+        </p:spPr>
+        <p:txBody>
+          <a:bodyPr wrap="square" lIns="254" tIns="254" rIns="254" bIns="254" rtlCol="0" anchor="t">
             <a:normAutofit/>
           </a:bodyPr>
           <a:lstStyle/>
           <a:p>
-            <a:pPr algn="ctr" indent="0" marL="0">
-              <a:buNone/>
-            </a:pPr>
-            <a:r>
-              <a:rPr lang="en-US" sz="1500" b="1" dirty="0">
-                <a:solidFill>
-                  <a:srgbClr val="FFFFFF"/>
-                </a:solidFill>
-                <a:latin typeface="Aptos" pitchFamily="34" charset="0"/>
-                <a:ea typeface="Aptos" pitchFamily="34" charset="-122"/>
-                <a:cs typeface="Aptos" pitchFamily="34" charset="-120"/>
-              </a:rPr>
-              <a:t>Concept</a:t>
-            </a:r>
-            <a:endParaRPr lang="en-US" sz="1500" dirty="0"/>
-          </a:p>
-        </p:txBody>
-      </p:sp>
-      <p:sp>
-        <p:nvSpPr>
-          <p:cNvPr id="15" name="Shape 13"/>
-          <p:cNvSpPr/>
-          <p:nvPr/>
-        </p:nvSpPr>
-        <p:spPr>
-          <a:xfrm>
-            <a:off x="9046464" y="3977640"/>
-            <a:ext cx="972312" cy="749808"/>
-          </a:xfrm>
-          <a:prstGeom prst="roundRect">
-            <a:avLst>
-              <a:gd name="adj" fmla="val 14634"/>
-            </a:avLst>
-          </a:prstGeom>
-          <a:solidFill>
-            <a:srgbClr val="2F8A28"/>
-          </a:solidFill>
-          <a:ln w="12700">
-            <a:solidFill>
-              <a:srgbClr val="2F8A28"/>
-            </a:solidFill>
-            <a:prstDash val="solid"/>
-          </a:ln>
-        </p:spPr>
-      </p:sp>
-      <p:sp>
-        <p:nvSpPr>
-          <p:cNvPr id="16" name="Text 14"/>
-          <p:cNvSpPr/>
-          <p:nvPr/>
-        </p:nvSpPr>
-        <p:spPr>
-          <a:xfrm>
-            <a:off x="9119616" y="4169664"/>
-            <a:ext cx="826008" cy="310896"/>
-          </a:xfrm>
-          <a:prstGeom prst="rect">
-            <a:avLst/>
-          </a:prstGeom>
-          <a:noFill/>
-          <a:ln/>
-        </p:spPr>
-        <p:txBody>
-          <a:bodyPr wrap="square" lIns="0" tIns="0" rIns="0" bIns="0" rtlCol="0" anchor="ctr">
-            <a:normAutofit/>
-          </a:bodyPr>
-          <a:lstStyle/>
-          <a:p>
-            <a:pPr algn="ctr" indent="0" marL="0">
-              <a:buNone/>
-            </a:pPr>
-            <a:r>
-              <a:rPr lang="en-US" sz="1500" b="1" dirty="0">
-                <a:solidFill>
-                  <a:srgbClr val="FFFFFF"/>
-                </a:solidFill>
-                <a:latin typeface="Aptos" pitchFamily="34" charset="0"/>
-                <a:ea typeface="Aptos" pitchFamily="34" charset="-122"/>
-                <a:cs typeface="Aptos" pitchFamily="34" charset="-120"/>
-              </a:rPr>
-              <a:t>Tool</a:t>
-            </a:r>
-            <a:endParaRPr lang="en-US" sz="1500" dirty="0"/>
-          </a:p>
-        </p:txBody>
-      </p:sp>
-      <p:sp>
-        <p:nvSpPr>
-          <p:cNvPr id="17" name="Shape 15"/>
-          <p:cNvSpPr/>
-          <p:nvPr/>
-        </p:nvSpPr>
-        <p:spPr>
-          <a:xfrm>
-            <a:off x="10274808" y="3977640"/>
-            <a:ext cx="972312" cy="749808"/>
-          </a:xfrm>
-          <a:prstGeom prst="roundRect">
-            <a:avLst>
-              <a:gd name="adj" fmla="val 14634"/>
-            </a:avLst>
-          </a:prstGeom>
-          <a:solidFill>
-            <a:srgbClr val="D69A2D"/>
-          </a:solidFill>
-          <a:ln w="12700">
-            <a:solidFill>
-              <a:srgbClr val="D69A2D"/>
-            </a:solidFill>
-            <a:prstDash val="solid"/>
-          </a:ln>
-        </p:spPr>
-      </p:sp>
-      <p:sp>
-        <p:nvSpPr>
-          <p:cNvPr id="18" name="Text 16"/>
-          <p:cNvSpPr/>
-          <p:nvPr/>
-        </p:nvSpPr>
-        <p:spPr>
-          <a:xfrm>
-            <a:off x="10347960" y="4169664"/>
-            <a:ext cx="826008" cy="310896"/>
-          </a:xfrm>
-          <a:prstGeom prst="rect">
-            <a:avLst/>
-          </a:prstGeom>
-          <a:noFill/>
-          <a:ln/>
-        </p:spPr>
-        <p:txBody>
-          <a:bodyPr wrap="square" lIns="0" tIns="0" rIns="0" bIns="0" rtlCol="0" anchor="ctr">
-            <a:normAutofit/>
-          </a:bodyPr>
-          <a:lstStyle/>
-          <a:p>
-            <a:pPr algn="ctr" indent="0" marL="0">
-              <a:buNone/>
-            </a:pPr>
-            <a:r>
-              <a:rPr lang="en-US" sz="1500" b="1" dirty="0">
-                <a:solidFill>
-                  <a:srgbClr val="FFFFFF"/>
-                </a:solidFill>
-                <a:latin typeface="Aptos" pitchFamily="34" charset="0"/>
-                <a:ea typeface="Aptos" pitchFamily="34" charset="-122"/>
-                <a:cs typeface="Aptos" pitchFamily="34" charset="-120"/>
-              </a:rPr>
-              <a:t>Artifact</a:t>
-            </a:r>
-            <a:endParaRPr lang="en-US" sz="1500" dirty="0"/>
+            <a:r>
+              <a:rPr lang="en-US" sz="1380" dirty="0">
+                <a:solidFill>
+                  <a:srgbClr val="17364A"/>
+                </a:solidFill>
+                <a:latin typeface="Aptos" pitchFamily="34" charset="0"/>
+                <a:ea typeface="Aptos" pitchFamily="34" charset="-122"/>
+                <a:cs typeface="Aptos" pitchFamily="34" charset="-120"/>
+              </a:rPr>
+              <a:t>Use a tool when no comparable local process exists.</a:t>
+            </a:r>
+            <a:endParaRPr lang="en-US" sz="1380" dirty="0"/>
+          </a:p>
+          <a:p>
+            <a:r>
+              <a:rPr lang="en-US" sz="1380" dirty="0">
+                <a:solidFill>
+                  <a:srgbClr val="17364A"/>
+                </a:solidFill>
+                <a:latin typeface="Aptos" pitchFamily="34" charset="0"/>
+                <a:ea typeface="Aptos" pitchFamily="34" charset="-122"/>
+                <a:cs typeface="Aptos" pitchFamily="34" charset="-120"/>
+              </a:rPr>
+              <a:t>Adapt existing department templates when they already fit the purpose.</a:t>
+            </a:r>
+            <a:endParaRPr lang="en-US" sz="1380" dirty="0"/>
+          </a:p>
+          <a:p>
+            <a:r>
+              <a:rPr lang="en-US" sz="1380" dirty="0">
+                <a:solidFill>
+                  <a:srgbClr val="17364A"/>
+                </a:solidFill>
+                <a:latin typeface="Aptos" pitchFamily="34" charset="0"/>
+                <a:ea typeface="Aptos" pitchFamily="34" charset="-122"/>
+                <a:cs typeface="Aptos" pitchFamily="34" charset="-120"/>
+              </a:rPr>
+              <a:t>Save the completed artifact as evidence of the decision.</a:t>
+            </a:r>
+            <a:endParaRPr lang="en-US" sz="1380" dirty="0"/>
           </a:p>
         </p:txBody>
       </p:sp>
@@ -16196,13 +14209,11 @@
             </a:avLst>
           </a:prstGeom>
           <a:solidFill>
-            <a:srgbClr val="FFFFFF">
-              <a:alpha val="88000"/>
-            </a:srgbClr>
+            <a:srgbClr val="FFFFFF"/>
           </a:solidFill>
           <a:ln w="12700">
             <a:solidFill>
-              <a:srgbClr val="D6E8F2"/>
+              <a:srgbClr val="B9D7E6"/>
             </a:solidFill>
             <a:prstDash val="solid"/>
           </a:ln>
@@ -16210,261 +14221,98 @@
       </p:sp>
       <p:sp>
         <p:nvSpPr>
-          <p:cNvPr id="14" name="Shape 12"/>
-          <p:cNvSpPr/>
-          <p:nvPr/>
-        </p:nvSpPr>
-        <p:spPr>
-          <a:xfrm>
-            <a:off x="8138160" y="3291840"/>
-            <a:ext cx="329184" cy="329184"/>
-          </a:xfrm>
-          <a:prstGeom prst="ellipse">
-            <a:avLst/>
-          </a:prstGeom>
-          <a:solidFill>
-            <a:srgbClr val="0068B7"/>
-          </a:solidFill>
-          <a:ln w="12700">
-            <a:solidFill>
-              <a:srgbClr val="0068B7"/>
-            </a:solidFill>
-            <a:prstDash val="solid"/>
-          </a:ln>
-        </p:spPr>
-      </p:sp>
-      <p:sp>
-        <p:nvSpPr>
-          <p:cNvPr id="15" name="Shape 13"/>
-          <p:cNvSpPr/>
-          <p:nvPr/>
-        </p:nvSpPr>
-        <p:spPr>
-          <a:xfrm>
-            <a:off x="10332720" y="3383280"/>
-            <a:ext cx="329184" cy="329184"/>
-          </a:xfrm>
-          <a:prstGeom prst="ellipse">
-            <a:avLst/>
-          </a:prstGeom>
-          <a:solidFill>
-            <a:srgbClr val="2F8A28"/>
-          </a:solidFill>
-          <a:ln w="12700">
-            <a:solidFill>
-              <a:srgbClr val="2F8A28"/>
-            </a:solidFill>
-            <a:prstDash val="solid"/>
-          </a:ln>
-        </p:spPr>
+          <p:cNvPr id="14" name="Text 12"/>
+          <p:cNvSpPr/>
+          <p:nvPr/>
+        </p:nvSpPr>
+        <p:spPr>
+          <a:xfrm>
+            <a:off x="7799832" y="2935224"/>
+            <a:ext cx="3145536" cy="256032"/>
+          </a:xfrm>
+          <a:prstGeom prst="rect">
+            <a:avLst/>
+          </a:prstGeom>
+          <a:noFill/>
+          <a:ln/>
+        </p:spPr>
+        <p:txBody>
+          <a:bodyPr wrap="square" lIns="0" tIns="0" rIns="0" bIns="0" rtlCol="0" anchor="ctr"/>
+          <a:lstStyle/>
+          <a:p>
+            <a:pPr indent="0" marL="0">
+              <a:buNone/>
+            </a:pPr>
+            <a:r>
+              <a:rPr lang="en-US" sz="1300" b="1" dirty="0">
+                <a:solidFill>
+                  <a:srgbClr val="0068B7"/>
+                </a:solidFill>
+                <a:latin typeface="Aptos" pitchFamily="34" charset="0"/>
+                <a:ea typeface="Aptos" pitchFamily="34" charset="-122"/>
+                <a:cs typeface="Aptos" pitchFamily="34" charset="-120"/>
+              </a:rPr>
+              <a:t>Concept checkpoints</a:t>
+            </a:r>
+            <a:endParaRPr lang="en-US" sz="1300" dirty="0"/>
+          </a:p>
+        </p:txBody>
+      </p:sp>
+      <p:sp>
+        <p:nvSpPr>
+          <p:cNvPr id="15" name="Text 13"/>
+          <p:cNvSpPr/>
+          <p:nvPr/>
+        </p:nvSpPr>
+        <p:spPr>
+          <a:xfrm>
+            <a:off x="7818120" y="3300984"/>
+            <a:ext cx="3090672" cy="877824"/>
+          </a:xfrm>
+          <a:prstGeom prst="rect">
+            <a:avLst/>
+          </a:prstGeom>
+          <a:noFill/>
+          <a:ln/>
+        </p:spPr>
+        <p:txBody>
+          <a:bodyPr wrap="square" lIns="254" tIns="254" rIns="254" bIns="254" rtlCol="0" anchor="t">
+            <a:normAutofit/>
+          </a:bodyPr>
+          <a:lstStyle/>
+          <a:p>
+            <a:r>
+              <a:rPr lang="en-US" sz="1380" dirty="0">
+                <a:solidFill>
+                  <a:srgbClr val="17364A"/>
+                </a:solidFill>
+                <a:latin typeface="Aptos" pitchFamily="34" charset="0"/>
+                <a:ea typeface="Aptos" pitchFamily="34" charset="-122"/>
+                <a:cs typeface="Aptos" pitchFamily="34" charset="-120"/>
+              </a:rPr>
+              <a:t>Define source verification and human review requirements for NLP outputs.</a:t>
+            </a:r>
+            <a:endParaRPr lang="en-US" sz="1380" dirty="0"/>
+          </a:p>
+          <a:p>
+            <a:r>
+              <a:rPr lang="en-US" sz="1380" dirty="0">
+                <a:solidFill>
+                  <a:srgbClr val="17364A"/>
+                </a:solidFill>
+                <a:latin typeface="Aptos" pitchFamily="34" charset="0"/>
+                <a:ea typeface="Aptos" pitchFamily="34" charset="-122"/>
+                <a:cs typeface="Aptos" pitchFamily="34" charset="-120"/>
+              </a:rPr>
+              <a:t>Produce an NLP evaluation plan for one public health workflow.</a:t>
+            </a:r>
+            <a:endParaRPr lang="en-US" sz="1380" dirty="0"/>
+          </a:p>
+        </p:txBody>
       </p:sp>
       <p:sp>
         <p:nvSpPr>
           <p:cNvPr id="16" name="Shape 14"/>
-          <p:cNvSpPr/>
-          <p:nvPr/>
-        </p:nvSpPr>
-        <p:spPr>
-          <a:xfrm>
-            <a:off x="9235440" y="3502152"/>
-            <a:ext cx="329184" cy="329184"/>
-          </a:xfrm>
-          <a:prstGeom prst="ellipse">
-            <a:avLst/>
-          </a:prstGeom>
-          <a:solidFill>
-            <a:srgbClr val="D69A2D"/>
-          </a:solidFill>
-          <a:ln w="12700">
-            <a:solidFill>
-              <a:srgbClr val="D69A2D"/>
-            </a:solidFill>
-            <a:prstDash val="solid"/>
-          </a:ln>
-        </p:spPr>
-      </p:sp>
-      <p:sp>
-        <p:nvSpPr>
-          <p:cNvPr id="17" name="Shape 15"/>
-          <p:cNvSpPr/>
-          <p:nvPr/>
-        </p:nvSpPr>
-        <p:spPr>
-          <a:xfrm>
-            <a:off x="9235440" y="3657600"/>
-            <a:ext cx="329184" cy="329184"/>
-          </a:xfrm>
-          <a:prstGeom prst="ellipse">
-            <a:avLst/>
-          </a:prstGeom>
-          <a:solidFill>
-            <a:srgbClr val="6A4CA3"/>
-          </a:solidFill>
-          <a:ln w="12700">
-            <a:solidFill>
-              <a:srgbClr val="6A4CA3"/>
-            </a:solidFill>
-            <a:prstDash val="solid"/>
-          </a:ln>
-        </p:spPr>
-      </p:sp>
-      <p:sp>
-        <p:nvSpPr>
-          <p:cNvPr id="18" name="Shape 16"/>
-          <p:cNvSpPr/>
-          <p:nvPr/>
-        </p:nvSpPr>
-        <p:spPr>
-          <a:xfrm>
-            <a:off x="8302752" y="3456432"/>
-            <a:ext cx="1097280" cy="365760"/>
-          </a:xfrm>
-          <a:prstGeom prst="line">
-            <a:avLst/>
-          </a:prstGeom>
-          <a:noFill/>
-          <a:ln w="19050">
-            <a:solidFill>
-              <a:srgbClr val="8ABBD8"/>
-            </a:solidFill>
-            <a:prstDash val="solid"/>
-          </a:ln>
-        </p:spPr>
-      </p:sp>
-      <p:sp>
-        <p:nvSpPr>
-          <p:cNvPr id="19" name="Shape 17"/>
-          <p:cNvSpPr/>
-          <p:nvPr/>
-        </p:nvSpPr>
-        <p:spPr>
-          <a:xfrm>
-            <a:off x="10497312" y="3547872"/>
-            <a:ext cx="-1097280" cy="274320"/>
-          </a:xfrm>
-          <a:prstGeom prst="line">
-            <a:avLst/>
-          </a:prstGeom>
-          <a:noFill/>
-          <a:ln w="19050">
-            <a:solidFill>
-              <a:srgbClr val="8ABBD8"/>
-            </a:solidFill>
-            <a:prstDash val="solid"/>
-          </a:ln>
-        </p:spPr>
-      </p:sp>
-      <p:sp>
-        <p:nvSpPr>
-          <p:cNvPr id="20" name="Shape 18"/>
-          <p:cNvSpPr/>
-          <p:nvPr/>
-        </p:nvSpPr>
-        <p:spPr>
-          <a:xfrm>
-            <a:off x="9400032" y="3666744"/>
-            <a:ext cx="0" cy="155448"/>
-          </a:xfrm>
-          <a:prstGeom prst="line">
-            <a:avLst/>
-          </a:prstGeom>
-          <a:noFill/>
-          <a:ln w="19050">
-            <a:solidFill>
-              <a:srgbClr val="8ABBD8"/>
-            </a:solidFill>
-            <a:prstDash val="solid"/>
-          </a:ln>
-        </p:spPr>
-      </p:sp>
-      <p:sp>
-        <p:nvSpPr>
-          <p:cNvPr id="21" name="Shape 19"/>
-          <p:cNvSpPr/>
-          <p:nvPr/>
-        </p:nvSpPr>
-        <p:spPr>
-          <a:xfrm>
-            <a:off x="8302752" y="3456432"/>
-            <a:ext cx="1097280" cy="210312"/>
-          </a:xfrm>
-          <a:prstGeom prst="line">
-            <a:avLst/>
-          </a:prstGeom>
-          <a:noFill/>
-          <a:ln w="19050">
-            <a:solidFill>
-              <a:srgbClr val="8ABBD8"/>
-            </a:solidFill>
-            <a:prstDash val="solid"/>
-          </a:ln>
-        </p:spPr>
-      </p:sp>
-      <p:sp>
-        <p:nvSpPr>
-          <p:cNvPr id="22" name="Shape 20"/>
-          <p:cNvSpPr/>
-          <p:nvPr/>
-        </p:nvSpPr>
-        <p:spPr>
-          <a:xfrm>
-            <a:off x="10497312" y="3547872"/>
-            <a:ext cx="-1097280" cy="118872"/>
-          </a:xfrm>
-          <a:prstGeom prst="line">
-            <a:avLst/>
-          </a:prstGeom>
-          <a:noFill/>
-          <a:ln w="19050">
-            <a:solidFill>
-              <a:srgbClr val="8ABBD8"/>
-            </a:solidFill>
-            <a:prstDash val="solid"/>
-          </a:ln>
-        </p:spPr>
-      </p:sp>
-      <p:sp>
-        <p:nvSpPr>
-          <p:cNvPr id="23" name="Text 21"/>
-          <p:cNvSpPr/>
-          <p:nvPr/>
-        </p:nvSpPr>
-        <p:spPr>
-          <a:xfrm>
-            <a:off x="7909560" y="3977640"/>
-            <a:ext cx="2926080" cy="182880"/>
-          </a:xfrm>
-          <a:prstGeom prst="rect">
-            <a:avLst/>
-          </a:prstGeom>
-          <a:noFill/>
-          <a:ln/>
-        </p:spPr>
-        <p:txBody>
-          <a:bodyPr wrap="square" lIns="0" tIns="0" rIns="0" bIns="0" rtlCol="0" anchor="ctr"/>
-          <a:lstStyle/>
-          <a:p>
-            <a:pPr algn="ctr" indent="0" marL="0">
-              <a:buNone/>
-            </a:pPr>
-            <a:r>
-              <a:rPr lang="en-US" sz="1000" dirty="0">
-                <a:solidFill>
-                  <a:srgbClr val="003A63"/>
-                </a:solidFill>
-                <a:latin typeface="Aptos" pitchFamily="34" charset="0"/>
-                <a:ea typeface="Aptos" pitchFamily="34" charset="-122"/>
-                <a:cs typeface="Aptos" pitchFamily="34" charset="-120"/>
-              </a:rPr>
-              <a:t>People and trust</a:t>
-            </a:r>
-            <a:endParaRPr lang="en-US" sz="1000" dirty="0"/>
-          </a:p>
-        </p:txBody>
-      </p:sp>
-      <p:sp>
-        <p:nvSpPr>
-          <p:cNvPr id="24" name="Shape 22"/>
           <p:cNvSpPr/>
           <p:nvPr/>
         </p:nvSpPr>
@@ -16491,7 +14339,7 @@
       </p:sp>
       <p:sp>
         <p:nvSpPr>
-          <p:cNvPr id="25" name="Text 23"/>
+          <p:cNvPr id="17" name="Text 15"/>
           <p:cNvSpPr/>
           <p:nvPr/>
         </p:nvSpPr>
@@ -16530,7 +14378,7 @@
       </p:sp>
       <p:sp>
         <p:nvSpPr>
-          <p:cNvPr id="26" name="Text 24"/>
+          <p:cNvPr id="18" name="Text 16"/>
           <p:cNvSpPr/>
           <p:nvPr/>
         </p:nvSpPr>
@@ -17038,13 +14886,11 @@
             </a:avLst>
           </a:prstGeom>
           <a:solidFill>
-            <a:srgbClr val="FFFFFF">
-              <a:alpha val="88000"/>
-            </a:srgbClr>
+            <a:srgbClr val="FFFFFF"/>
           </a:solidFill>
           <a:ln w="12700">
             <a:solidFill>
-              <a:srgbClr val="D6E8F2"/>
+              <a:srgbClr val="B9D7E6"/>
             </a:solidFill>
             <a:prstDash val="solid"/>
           </a:ln>
@@ -17052,261 +14898,112 @@
       </p:sp>
       <p:sp>
         <p:nvSpPr>
-          <p:cNvPr id="14" name="Shape 12"/>
-          <p:cNvSpPr/>
-          <p:nvPr/>
-        </p:nvSpPr>
-        <p:spPr>
-          <a:xfrm>
-            <a:off x="8138160" y="3291840"/>
-            <a:ext cx="329184" cy="329184"/>
-          </a:xfrm>
-          <a:prstGeom prst="ellipse">
-            <a:avLst/>
-          </a:prstGeom>
-          <a:solidFill>
-            <a:srgbClr val="0068B7"/>
-          </a:solidFill>
-          <a:ln w="12700">
-            <a:solidFill>
-              <a:srgbClr val="0068B7"/>
-            </a:solidFill>
-            <a:prstDash val="solid"/>
-          </a:ln>
-        </p:spPr>
-      </p:sp>
-      <p:sp>
-        <p:nvSpPr>
-          <p:cNvPr id="15" name="Shape 13"/>
-          <p:cNvSpPr/>
-          <p:nvPr/>
-        </p:nvSpPr>
-        <p:spPr>
-          <a:xfrm>
-            <a:off x="10332720" y="3383280"/>
-            <a:ext cx="329184" cy="329184"/>
-          </a:xfrm>
-          <a:prstGeom prst="ellipse">
-            <a:avLst/>
-          </a:prstGeom>
-          <a:solidFill>
-            <a:srgbClr val="2F8A28"/>
-          </a:solidFill>
-          <a:ln w="12700">
-            <a:solidFill>
-              <a:srgbClr val="2F8A28"/>
-            </a:solidFill>
-            <a:prstDash val="solid"/>
-          </a:ln>
-        </p:spPr>
+          <p:cNvPr id="14" name="Text 12"/>
+          <p:cNvSpPr/>
+          <p:nvPr/>
+        </p:nvSpPr>
+        <p:spPr>
+          <a:xfrm>
+            <a:off x="7799832" y="2935224"/>
+            <a:ext cx="3145536" cy="256032"/>
+          </a:xfrm>
+          <a:prstGeom prst="rect">
+            <a:avLst/>
+          </a:prstGeom>
+          <a:noFill/>
+          <a:ln/>
+        </p:spPr>
+        <p:txBody>
+          <a:bodyPr wrap="square" lIns="0" tIns="0" rIns="0" bIns="0" rtlCol="0" anchor="ctr"/>
+          <a:lstStyle/>
+          <a:p>
+            <a:pPr indent="0" marL="0">
+              <a:buNone/>
+            </a:pPr>
+            <a:r>
+              <a:rPr lang="en-US" sz="1300" b="1" dirty="0">
+                <a:solidFill>
+                  <a:srgbClr val="0068B7"/>
+                </a:solidFill>
+                <a:latin typeface="Aptos" pitchFamily="34" charset="0"/>
+                <a:ea typeface="Aptos" pitchFamily="34" charset="-122"/>
+                <a:cs typeface="Aptos" pitchFamily="34" charset="-120"/>
+              </a:rPr>
+              <a:t>Concept checkpoints</a:t>
+            </a:r>
+            <a:endParaRPr lang="en-US" sz="1300" dirty="0"/>
+          </a:p>
+        </p:txBody>
+      </p:sp>
+      <p:sp>
+        <p:nvSpPr>
+          <p:cNvPr id="15" name="Text 13"/>
+          <p:cNvSpPr/>
+          <p:nvPr/>
+        </p:nvSpPr>
+        <p:spPr>
+          <a:xfrm>
+            <a:off x="7818120" y="3300984"/>
+            <a:ext cx="3090672" cy="877824"/>
+          </a:xfrm>
+          <a:prstGeom prst="rect">
+            <a:avLst/>
+          </a:prstGeom>
+          <a:noFill/>
+          <a:ln/>
+        </p:spPr>
+        <p:txBody>
+          <a:bodyPr wrap="square" lIns="254" tIns="254" rIns="254" bIns="254" rtlCol="0" anchor="t">
+            <a:normAutofit/>
+          </a:bodyPr>
+          <a:lstStyle/>
+          <a:p>
+            <a:r>
+              <a:rPr lang="en-US" sz="1380" dirty="0">
+                <a:solidFill>
+                  <a:srgbClr val="17364A"/>
+                </a:solidFill>
+                <a:latin typeface="Aptos" pitchFamily="34" charset="0"/>
+                <a:ea typeface="Aptos" pitchFamily="34" charset="-122"/>
+                <a:cs typeface="Aptos" pitchFamily="34" charset="-120"/>
+              </a:rPr>
+              <a:t>Natural language processing is a branch of AI that works with human language.</a:t>
+            </a:r>
+            <a:endParaRPr lang="en-US" sz="1380" dirty="0"/>
+          </a:p>
+          <a:p>
+            <a:r>
+              <a:rPr lang="en-US" sz="1380" dirty="0">
+                <a:solidFill>
+                  <a:srgbClr val="17364A"/>
+                </a:solidFill>
+                <a:latin typeface="Aptos" pitchFamily="34" charset="0"/>
+                <a:ea typeface="Aptos" pitchFamily="34" charset="-122"/>
+                <a:cs typeface="Aptos" pitchFamily="34" charset="-120"/>
+              </a:rPr>
+              <a:t>Public health agencies often hold important information in free-text sources, including.</a:t>
+            </a:r>
+            <a:endParaRPr lang="en-US" sz="1380" dirty="0"/>
+          </a:p>
+          <a:p>
+            <a:r>
+              <a:rPr lang="en-US" sz="1380" dirty="0">
+                <a:solidFill>
+                  <a:srgbClr val="17364A"/>
+                </a:solidFill>
+                <a:latin typeface="Aptos" pitchFamily="34" charset="0"/>
+                <a:ea typeface="Aptos" pitchFamily="34" charset="-122"/>
+                <a:cs typeface="Aptos" pitchFamily="34" charset="-120"/>
+              </a:rPr>
+              <a:t>This module teaches learners how NLP can support public health work and how to evaluate.</a:t>
+            </a:r>
+            <a:endParaRPr lang="en-US" sz="1380" dirty="0"/>
+          </a:p>
+        </p:txBody>
       </p:sp>
       <p:sp>
         <p:nvSpPr>
           <p:cNvPr id="16" name="Shape 14"/>
-          <p:cNvSpPr/>
-          <p:nvPr/>
-        </p:nvSpPr>
-        <p:spPr>
-          <a:xfrm>
-            <a:off x="9235440" y="3502152"/>
-            <a:ext cx="329184" cy="329184"/>
-          </a:xfrm>
-          <a:prstGeom prst="ellipse">
-            <a:avLst/>
-          </a:prstGeom>
-          <a:solidFill>
-            <a:srgbClr val="D69A2D"/>
-          </a:solidFill>
-          <a:ln w="12700">
-            <a:solidFill>
-              <a:srgbClr val="D69A2D"/>
-            </a:solidFill>
-            <a:prstDash val="solid"/>
-          </a:ln>
-        </p:spPr>
-      </p:sp>
-      <p:sp>
-        <p:nvSpPr>
-          <p:cNvPr id="17" name="Shape 15"/>
-          <p:cNvSpPr/>
-          <p:nvPr/>
-        </p:nvSpPr>
-        <p:spPr>
-          <a:xfrm>
-            <a:off x="9235440" y="3657600"/>
-            <a:ext cx="329184" cy="329184"/>
-          </a:xfrm>
-          <a:prstGeom prst="ellipse">
-            <a:avLst/>
-          </a:prstGeom>
-          <a:solidFill>
-            <a:srgbClr val="6A4CA3"/>
-          </a:solidFill>
-          <a:ln w="12700">
-            <a:solidFill>
-              <a:srgbClr val="6A4CA3"/>
-            </a:solidFill>
-            <a:prstDash val="solid"/>
-          </a:ln>
-        </p:spPr>
-      </p:sp>
-      <p:sp>
-        <p:nvSpPr>
-          <p:cNvPr id="18" name="Shape 16"/>
-          <p:cNvSpPr/>
-          <p:nvPr/>
-        </p:nvSpPr>
-        <p:spPr>
-          <a:xfrm>
-            <a:off x="8302752" y="3456432"/>
-            <a:ext cx="1097280" cy="365760"/>
-          </a:xfrm>
-          <a:prstGeom prst="line">
-            <a:avLst/>
-          </a:prstGeom>
-          <a:noFill/>
-          <a:ln w="19050">
-            <a:solidFill>
-              <a:srgbClr val="8ABBD8"/>
-            </a:solidFill>
-            <a:prstDash val="solid"/>
-          </a:ln>
-        </p:spPr>
-      </p:sp>
-      <p:sp>
-        <p:nvSpPr>
-          <p:cNvPr id="19" name="Shape 17"/>
-          <p:cNvSpPr/>
-          <p:nvPr/>
-        </p:nvSpPr>
-        <p:spPr>
-          <a:xfrm>
-            <a:off x="10497312" y="3547872"/>
-            <a:ext cx="-1097280" cy="274320"/>
-          </a:xfrm>
-          <a:prstGeom prst="line">
-            <a:avLst/>
-          </a:prstGeom>
-          <a:noFill/>
-          <a:ln w="19050">
-            <a:solidFill>
-              <a:srgbClr val="8ABBD8"/>
-            </a:solidFill>
-            <a:prstDash val="solid"/>
-          </a:ln>
-        </p:spPr>
-      </p:sp>
-      <p:sp>
-        <p:nvSpPr>
-          <p:cNvPr id="20" name="Shape 18"/>
-          <p:cNvSpPr/>
-          <p:nvPr/>
-        </p:nvSpPr>
-        <p:spPr>
-          <a:xfrm>
-            <a:off x="9400032" y="3666744"/>
-            <a:ext cx="0" cy="155448"/>
-          </a:xfrm>
-          <a:prstGeom prst="line">
-            <a:avLst/>
-          </a:prstGeom>
-          <a:noFill/>
-          <a:ln w="19050">
-            <a:solidFill>
-              <a:srgbClr val="8ABBD8"/>
-            </a:solidFill>
-            <a:prstDash val="solid"/>
-          </a:ln>
-        </p:spPr>
-      </p:sp>
-      <p:sp>
-        <p:nvSpPr>
-          <p:cNvPr id="21" name="Shape 19"/>
-          <p:cNvSpPr/>
-          <p:nvPr/>
-        </p:nvSpPr>
-        <p:spPr>
-          <a:xfrm>
-            <a:off x="8302752" y="3456432"/>
-            <a:ext cx="1097280" cy="210312"/>
-          </a:xfrm>
-          <a:prstGeom prst="line">
-            <a:avLst/>
-          </a:prstGeom>
-          <a:noFill/>
-          <a:ln w="19050">
-            <a:solidFill>
-              <a:srgbClr val="8ABBD8"/>
-            </a:solidFill>
-            <a:prstDash val="solid"/>
-          </a:ln>
-        </p:spPr>
-      </p:sp>
-      <p:sp>
-        <p:nvSpPr>
-          <p:cNvPr id="22" name="Shape 20"/>
-          <p:cNvSpPr/>
-          <p:nvPr/>
-        </p:nvSpPr>
-        <p:spPr>
-          <a:xfrm>
-            <a:off x="10497312" y="3547872"/>
-            <a:ext cx="-1097280" cy="118872"/>
-          </a:xfrm>
-          <a:prstGeom prst="line">
-            <a:avLst/>
-          </a:prstGeom>
-          <a:noFill/>
-          <a:ln w="19050">
-            <a:solidFill>
-              <a:srgbClr val="8ABBD8"/>
-            </a:solidFill>
-            <a:prstDash val="solid"/>
-          </a:ln>
-        </p:spPr>
-      </p:sp>
-      <p:sp>
-        <p:nvSpPr>
-          <p:cNvPr id="23" name="Text 21"/>
-          <p:cNvSpPr/>
-          <p:nvPr/>
-        </p:nvSpPr>
-        <p:spPr>
-          <a:xfrm>
-            <a:off x="7909560" y="3977640"/>
-            <a:ext cx="2926080" cy="182880"/>
-          </a:xfrm>
-          <a:prstGeom prst="rect">
-            <a:avLst/>
-          </a:prstGeom>
-          <a:noFill/>
-          <a:ln/>
-        </p:spPr>
-        <p:txBody>
-          <a:bodyPr wrap="square" lIns="0" tIns="0" rIns="0" bIns="0" rtlCol="0" anchor="ctr"/>
-          <a:lstStyle/>
-          <a:p>
-            <a:pPr algn="ctr" indent="0" marL="0">
-              <a:buNone/>
-            </a:pPr>
-            <a:r>
-              <a:rPr lang="en-US" sz="1000" dirty="0">
-                <a:solidFill>
-                  <a:srgbClr val="003A63"/>
-                </a:solidFill>
-                <a:latin typeface="Aptos" pitchFamily="34" charset="0"/>
-                <a:ea typeface="Aptos" pitchFamily="34" charset="-122"/>
-                <a:cs typeface="Aptos" pitchFamily="34" charset="-120"/>
-              </a:rPr>
-              <a:t>People and trust</a:t>
-            </a:r>
-            <a:endParaRPr lang="en-US" sz="1000" dirty="0"/>
-          </a:p>
-        </p:txBody>
-      </p:sp>
-      <p:sp>
-        <p:nvSpPr>
-          <p:cNvPr id="24" name="Shape 22"/>
           <p:cNvSpPr/>
           <p:nvPr/>
         </p:nvSpPr>
@@ -17333,7 +15030,7 @@
       </p:sp>
       <p:sp>
         <p:nvSpPr>
-          <p:cNvPr id="25" name="Text 23"/>
+          <p:cNvPr id="17" name="Text 15"/>
           <p:cNvSpPr/>
           <p:nvPr/>
         </p:nvSpPr>
@@ -17372,7 +15069,7 @@
       </p:sp>
       <p:sp>
         <p:nvSpPr>
-          <p:cNvPr id="26" name="Text 24"/>
+          <p:cNvPr id="18" name="Text 16"/>
           <p:cNvSpPr/>
           <p:nvPr/>
         </p:nvSpPr>
@@ -17880,13 +15577,11 @@
             </a:avLst>
           </a:prstGeom>
           <a:solidFill>
-            <a:srgbClr val="FFFFFF">
-              <a:alpha val="88000"/>
-            </a:srgbClr>
+            <a:srgbClr val="FFFFFF"/>
           </a:solidFill>
           <a:ln w="12700">
             <a:solidFill>
-              <a:srgbClr val="D6E8F2"/>
+              <a:srgbClr val="B9D7E6"/>
             </a:solidFill>
             <a:prstDash val="solid"/>
           </a:ln>
@@ -17894,261 +15589,112 @@
       </p:sp>
       <p:sp>
         <p:nvSpPr>
-          <p:cNvPr id="14" name="Shape 12"/>
-          <p:cNvSpPr/>
-          <p:nvPr/>
-        </p:nvSpPr>
-        <p:spPr>
-          <a:xfrm>
-            <a:off x="8138160" y="3291840"/>
-            <a:ext cx="329184" cy="329184"/>
-          </a:xfrm>
-          <a:prstGeom prst="ellipse">
-            <a:avLst/>
-          </a:prstGeom>
-          <a:solidFill>
-            <a:srgbClr val="0068B7"/>
-          </a:solidFill>
-          <a:ln w="12700">
-            <a:solidFill>
-              <a:srgbClr val="0068B7"/>
-            </a:solidFill>
-            <a:prstDash val="solid"/>
-          </a:ln>
-        </p:spPr>
-      </p:sp>
-      <p:sp>
-        <p:nvSpPr>
-          <p:cNvPr id="15" name="Shape 13"/>
-          <p:cNvSpPr/>
-          <p:nvPr/>
-        </p:nvSpPr>
-        <p:spPr>
-          <a:xfrm>
-            <a:off x="10332720" y="3383280"/>
-            <a:ext cx="329184" cy="329184"/>
-          </a:xfrm>
-          <a:prstGeom prst="ellipse">
-            <a:avLst/>
-          </a:prstGeom>
-          <a:solidFill>
-            <a:srgbClr val="2F8A28"/>
-          </a:solidFill>
-          <a:ln w="12700">
-            <a:solidFill>
-              <a:srgbClr val="2F8A28"/>
-            </a:solidFill>
-            <a:prstDash val="solid"/>
-          </a:ln>
-        </p:spPr>
+          <p:cNvPr id="14" name="Text 12"/>
+          <p:cNvSpPr/>
+          <p:nvPr/>
+        </p:nvSpPr>
+        <p:spPr>
+          <a:xfrm>
+            <a:off x="7799832" y="2935224"/>
+            <a:ext cx="3145536" cy="256032"/>
+          </a:xfrm>
+          <a:prstGeom prst="rect">
+            <a:avLst/>
+          </a:prstGeom>
+          <a:noFill/>
+          <a:ln/>
+        </p:spPr>
+        <p:txBody>
+          <a:bodyPr wrap="square" lIns="0" tIns="0" rIns="0" bIns="0" rtlCol="0" anchor="ctr"/>
+          <a:lstStyle/>
+          <a:p>
+            <a:pPr indent="0" marL="0">
+              <a:buNone/>
+            </a:pPr>
+            <a:r>
+              <a:rPr lang="en-US" sz="1300" b="1" dirty="0">
+                <a:solidFill>
+                  <a:srgbClr val="0068B7"/>
+                </a:solidFill>
+                <a:latin typeface="Aptos" pitchFamily="34" charset="0"/>
+                <a:ea typeface="Aptos" pitchFamily="34" charset="-122"/>
+                <a:cs typeface="Aptos" pitchFamily="34" charset="-120"/>
+              </a:rPr>
+              <a:t>Concept checkpoints</a:t>
+            </a:r>
+            <a:endParaRPr lang="en-US" sz="1300" dirty="0"/>
+          </a:p>
+        </p:txBody>
+      </p:sp>
+      <p:sp>
+        <p:nvSpPr>
+          <p:cNvPr id="15" name="Text 13"/>
+          <p:cNvSpPr/>
+          <p:nvPr/>
+        </p:nvSpPr>
+        <p:spPr>
+          <a:xfrm>
+            <a:off x="7818120" y="3300984"/>
+            <a:ext cx="3090672" cy="877824"/>
+          </a:xfrm>
+          <a:prstGeom prst="rect">
+            <a:avLst/>
+          </a:prstGeom>
+          <a:noFill/>
+          <a:ln/>
+        </p:spPr>
+        <p:txBody>
+          <a:bodyPr wrap="square" lIns="254" tIns="254" rIns="254" bIns="254" rtlCol="0" anchor="t">
+            <a:normAutofit/>
+          </a:bodyPr>
+          <a:lstStyle/>
+          <a:p>
+            <a:r>
+              <a:rPr lang="en-US" sz="1380" dirty="0">
+                <a:solidFill>
+                  <a:srgbClr val="17364A"/>
+                </a:solidFill>
+                <a:latin typeface="Aptos" pitchFamily="34" charset="0"/>
+                <a:ea typeface="Aptos" pitchFamily="34" charset="-122"/>
+                <a:cs typeface="Aptos" pitchFamily="34" charset="-120"/>
+              </a:rPr>
+              <a:t>NLP can reduce burden by helping staff find, organize, classify, extract, translate, or.</a:t>
+            </a:r>
+            <a:endParaRPr lang="en-US" sz="1380" dirty="0"/>
+          </a:p>
+          <a:p>
+            <a:r>
+              <a:rPr lang="en-US" sz="1380" dirty="0">
+                <a:solidFill>
+                  <a:srgbClr val="17364A"/>
+                </a:solidFill>
+                <a:latin typeface="Aptos" pitchFamily="34" charset="0"/>
+                <a:ea typeface="Aptos" pitchFamily="34" charset="-122"/>
+                <a:cs typeface="Aptos" pitchFamily="34" charset="-120"/>
+              </a:rPr>
+              <a:t>It can support case investigation, environmental health complaint triage, syndromic.</a:t>
+            </a:r>
+            <a:endParaRPr lang="en-US" sz="1380" dirty="0"/>
+          </a:p>
+          <a:p>
+            <a:r>
+              <a:rPr lang="en-US" sz="1380" dirty="0">
+                <a:solidFill>
+                  <a:srgbClr val="17364A"/>
+                </a:solidFill>
+                <a:latin typeface="Aptos" pitchFamily="34" charset="0"/>
+                <a:ea typeface="Aptos" pitchFamily="34" charset="-122"/>
+                <a:cs typeface="Aptos" pitchFamily="34" charset="-120"/>
+              </a:rPr>
+              <a:t>NLP outputs should not be treated as facts without review.</a:t>
+            </a:r>
+            <a:endParaRPr lang="en-US" sz="1380" dirty="0"/>
+          </a:p>
+        </p:txBody>
       </p:sp>
       <p:sp>
         <p:nvSpPr>
           <p:cNvPr id="16" name="Shape 14"/>
-          <p:cNvSpPr/>
-          <p:nvPr/>
-        </p:nvSpPr>
-        <p:spPr>
-          <a:xfrm>
-            <a:off x="9235440" y="3502152"/>
-            <a:ext cx="329184" cy="329184"/>
-          </a:xfrm>
-          <a:prstGeom prst="ellipse">
-            <a:avLst/>
-          </a:prstGeom>
-          <a:solidFill>
-            <a:srgbClr val="D69A2D"/>
-          </a:solidFill>
-          <a:ln w="12700">
-            <a:solidFill>
-              <a:srgbClr val="D69A2D"/>
-            </a:solidFill>
-            <a:prstDash val="solid"/>
-          </a:ln>
-        </p:spPr>
-      </p:sp>
-      <p:sp>
-        <p:nvSpPr>
-          <p:cNvPr id="17" name="Shape 15"/>
-          <p:cNvSpPr/>
-          <p:nvPr/>
-        </p:nvSpPr>
-        <p:spPr>
-          <a:xfrm>
-            <a:off x="9235440" y="3657600"/>
-            <a:ext cx="329184" cy="329184"/>
-          </a:xfrm>
-          <a:prstGeom prst="ellipse">
-            <a:avLst/>
-          </a:prstGeom>
-          <a:solidFill>
-            <a:srgbClr val="6A4CA3"/>
-          </a:solidFill>
-          <a:ln w="12700">
-            <a:solidFill>
-              <a:srgbClr val="6A4CA3"/>
-            </a:solidFill>
-            <a:prstDash val="solid"/>
-          </a:ln>
-        </p:spPr>
-      </p:sp>
-      <p:sp>
-        <p:nvSpPr>
-          <p:cNvPr id="18" name="Shape 16"/>
-          <p:cNvSpPr/>
-          <p:nvPr/>
-        </p:nvSpPr>
-        <p:spPr>
-          <a:xfrm>
-            <a:off x="8302752" y="3456432"/>
-            <a:ext cx="1097280" cy="365760"/>
-          </a:xfrm>
-          <a:prstGeom prst="line">
-            <a:avLst/>
-          </a:prstGeom>
-          <a:noFill/>
-          <a:ln w="19050">
-            <a:solidFill>
-              <a:srgbClr val="8ABBD8"/>
-            </a:solidFill>
-            <a:prstDash val="solid"/>
-          </a:ln>
-        </p:spPr>
-      </p:sp>
-      <p:sp>
-        <p:nvSpPr>
-          <p:cNvPr id="19" name="Shape 17"/>
-          <p:cNvSpPr/>
-          <p:nvPr/>
-        </p:nvSpPr>
-        <p:spPr>
-          <a:xfrm>
-            <a:off x="10497312" y="3547872"/>
-            <a:ext cx="-1097280" cy="274320"/>
-          </a:xfrm>
-          <a:prstGeom prst="line">
-            <a:avLst/>
-          </a:prstGeom>
-          <a:noFill/>
-          <a:ln w="19050">
-            <a:solidFill>
-              <a:srgbClr val="8ABBD8"/>
-            </a:solidFill>
-            <a:prstDash val="solid"/>
-          </a:ln>
-        </p:spPr>
-      </p:sp>
-      <p:sp>
-        <p:nvSpPr>
-          <p:cNvPr id="20" name="Shape 18"/>
-          <p:cNvSpPr/>
-          <p:nvPr/>
-        </p:nvSpPr>
-        <p:spPr>
-          <a:xfrm>
-            <a:off x="9400032" y="3666744"/>
-            <a:ext cx="0" cy="155448"/>
-          </a:xfrm>
-          <a:prstGeom prst="line">
-            <a:avLst/>
-          </a:prstGeom>
-          <a:noFill/>
-          <a:ln w="19050">
-            <a:solidFill>
-              <a:srgbClr val="8ABBD8"/>
-            </a:solidFill>
-            <a:prstDash val="solid"/>
-          </a:ln>
-        </p:spPr>
-      </p:sp>
-      <p:sp>
-        <p:nvSpPr>
-          <p:cNvPr id="21" name="Shape 19"/>
-          <p:cNvSpPr/>
-          <p:nvPr/>
-        </p:nvSpPr>
-        <p:spPr>
-          <a:xfrm>
-            <a:off x="8302752" y="3456432"/>
-            <a:ext cx="1097280" cy="210312"/>
-          </a:xfrm>
-          <a:prstGeom prst="line">
-            <a:avLst/>
-          </a:prstGeom>
-          <a:noFill/>
-          <a:ln w="19050">
-            <a:solidFill>
-              <a:srgbClr val="8ABBD8"/>
-            </a:solidFill>
-            <a:prstDash val="solid"/>
-          </a:ln>
-        </p:spPr>
-      </p:sp>
-      <p:sp>
-        <p:nvSpPr>
-          <p:cNvPr id="22" name="Shape 20"/>
-          <p:cNvSpPr/>
-          <p:nvPr/>
-        </p:nvSpPr>
-        <p:spPr>
-          <a:xfrm>
-            <a:off x="10497312" y="3547872"/>
-            <a:ext cx="-1097280" cy="118872"/>
-          </a:xfrm>
-          <a:prstGeom prst="line">
-            <a:avLst/>
-          </a:prstGeom>
-          <a:noFill/>
-          <a:ln w="19050">
-            <a:solidFill>
-              <a:srgbClr val="8ABBD8"/>
-            </a:solidFill>
-            <a:prstDash val="solid"/>
-          </a:ln>
-        </p:spPr>
-      </p:sp>
-      <p:sp>
-        <p:nvSpPr>
-          <p:cNvPr id="23" name="Text 21"/>
-          <p:cNvSpPr/>
-          <p:nvPr/>
-        </p:nvSpPr>
-        <p:spPr>
-          <a:xfrm>
-            <a:off x="7909560" y="3977640"/>
-            <a:ext cx="2926080" cy="182880"/>
-          </a:xfrm>
-          <a:prstGeom prst="rect">
-            <a:avLst/>
-          </a:prstGeom>
-          <a:noFill/>
-          <a:ln/>
-        </p:spPr>
-        <p:txBody>
-          <a:bodyPr wrap="square" lIns="0" tIns="0" rIns="0" bIns="0" rtlCol="0" anchor="ctr"/>
-          <a:lstStyle/>
-          <a:p>
-            <a:pPr algn="ctr" indent="0" marL="0">
-              <a:buNone/>
-            </a:pPr>
-            <a:r>
-              <a:rPr lang="en-US" sz="1000" dirty="0">
-                <a:solidFill>
-                  <a:srgbClr val="003A63"/>
-                </a:solidFill>
-                <a:latin typeface="Aptos" pitchFamily="34" charset="0"/>
-                <a:ea typeface="Aptos" pitchFamily="34" charset="-122"/>
-                <a:cs typeface="Aptos" pitchFamily="34" charset="-120"/>
-              </a:rPr>
-              <a:t>People and trust</a:t>
-            </a:r>
-            <a:endParaRPr lang="en-US" sz="1000" dirty="0"/>
-          </a:p>
-        </p:txBody>
-      </p:sp>
-      <p:sp>
-        <p:nvSpPr>
-          <p:cNvPr id="24" name="Shape 22"/>
           <p:cNvSpPr/>
           <p:nvPr/>
         </p:nvSpPr>
@@ -18175,7 +15721,7 @@
       </p:sp>
       <p:sp>
         <p:nvSpPr>
-          <p:cNvPr id="25" name="Text 23"/>
+          <p:cNvPr id="17" name="Text 15"/>
           <p:cNvSpPr/>
           <p:nvPr/>
         </p:nvSpPr>
@@ -18214,7 +15760,7 @@
       </p:sp>
       <p:sp>
         <p:nvSpPr>
-          <p:cNvPr id="26" name="Text 24"/>
+          <p:cNvPr id="18" name="Text 16"/>
           <p:cNvSpPr/>
           <p:nvPr/>
         </p:nvSpPr>
@@ -18722,13 +16268,11 @@
             </a:avLst>
           </a:prstGeom>
           <a:solidFill>
-            <a:srgbClr val="FFFFFF">
-              <a:alpha val="88000"/>
-            </a:srgbClr>
+            <a:srgbClr val="FFFFFF"/>
           </a:solidFill>
           <a:ln w="12700">
             <a:solidFill>
-              <a:srgbClr val="D6E8F2"/>
+              <a:srgbClr val="B9D7E6"/>
             </a:solidFill>
             <a:prstDash val="solid"/>
           </a:ln>
@@ -18736,261 +16280,112 @@
       </p:sp>
       <p:sp>
         <p:nvSpPr>
-          <p:cNvPr id="14" name="Shape 12"/>
-          <p:cNvSpPr/>
-          <p:nvPr/>
-        </p:nvSpPr>
-        <p:spPr>
-          <a:xfrm>
-            <a:off x="8138160" y="3291840"/>
-            <a:ext cx="329184" cy="329184"/>
-          </a:xfrm>
-          <a:prstGeom prst="ellipse">
-            <a:avLst/>
-          </a:prstGeom>
-          <a:solidFill>
-            <a:srgbClr val="0068B7"/>
-          </a:solidFill>
-          <a:ln w="12700">
-            <a:solidFill>
-              <a:srgbClr val="0068B7"/>
-            </a:solidFill>
-            <a:prstDash val="solid"/>
-          </a:ln>
-        </p:spPr>
-      </p:sp>
-      <p:sp>
-        <p:nvSpPr>
-          <p:cNvPr id="15" name="Shape 13"/>
-          <p:cNvSpPr/>
-          <p:nvPr/>
-        </p:nvSpPr>
-        <p:spPr>
-          <a:xfrm>
-            <a:off x="10332720" y="3383280"/>
-            <a:ext cx="329184" cy="329184"/>
-          </a:xfrm>
-          <a:prstGeom prst="ellipse">
-            <a:avLst/>
-          </a:prstGeom>
-          <a:solidFill>
-            <a:srgbClr val="2F8A28"/>
-          </a:solidFill>
-          <a:ln w="12700">
-            <a:solidFill>
-              <a:srgbClr val="2F8A28"/>
-            </a:solidFill>
-            <a:prstDash val="solid"/>
-          </a:ln>
-        </p:spPr>
+          <p:cNvPr id="14" name="Text 12"/>
+          <p:cNvSpPr/>
+          <p:nvPr/>
+        </p:nvSpPr>
+        <p:spPr>
+          <a:xfrm>
+            <a:off x="7799832" y="2935224"/>
+            <a:ext cx="3145536" cy="256032"/>
+          </a:xfrm>
+          <a:prstGeom prst="rect">
+            <a:avLst/>
+          </a:prstGeom>
+          <a:noFill/>
+          <a:ln/>
+        </p:spPr>
+        <p:txBody>
+          <a:bodyPr wrap="square" lIns="0" tIns="0" rIns="0" bIns="0" rtlCol="0" anchor="ctr"/>
+          <a:lstStyle/>
+          <a:p>
+            <a:pPr indent="0" marL="0">
+              <a:buNone/>
+            </a:pPr>
+            <a:r>
+              <a:rPr lang="en-US" sz="1300" b="1" dirty="0">
+                <a:solidFill>
+                  <a:srgbClr val="0068B7"/>
+                </a:solidFill>
+                <a:latin typeface="Aptos" pitchFamily="34" charset="0"/>
+                <a:ea typeface="Aptos" pitchFamily="34" charset="-122"/>
+                <a:cs typeface="Aptos" pitchFamily="34" charset="-120"/>
+              </a:rPr>
+              <a:t>Concept checkpoints</a:t>
+            </a:r>
+            <a:endParaRPr lang="en-US" sz="1300" dirty="0"/>
+          </a:p>
+        </p:txBody>
+      </p:sp>
+      <p:sp>
+        <p:nvSpPr>
+          <p:cNvPr id="15" name="Text 13"/>
+          <p:cNvSpPr/>
+          <p:nvPr/>
+        </p:nvSpPr>
+        <p:spPr>
+          <a:xfrm>
+            <a:off x="7818120" y="3300984"/>
+            <a:ext cx="3090672" cy="877824"/>
+          </a:xfrm>
+          <a:prstGeom prst="rect">
+            <a:avLst/>
+          </a:prstGeom>
+          <a:noFill/>
+          <a:ln/>
+        </p:spPr>
+        <p:txBody>
+          <a:bodyPr wrap="square" lIns="254" tIns="254" rIns="254" bIns="254" rtlCol="0" anchor="t">
+            <a:normAutofit/>
+          </a:bodyPr>
+          <a:lstStyle/>
+          <a:p>
+            <a:r>
+              <a:rPr lang="en-US" sz="1380" dirty="0">
+                <a:solidFill>
+                  <a:srgbClr val="17364A"/>
+                </a:solidFill>
+                <a:latin typeface="Aptos" pitchFamily="34" charset="0"/>
+                <a:ea typeface="Aptos" pitchFamily="34" charset="-122"/>
+                <a:cs typeface="Aptos" pitchFamily="34" charset="-120"/>
+              </a:rPr>
+              <a:t>NLP refers to AI methods that process, analyze, classify, summarize, extract, translate,.</a:t>
+            </a:r>
+            <a:endParaRPr lang="en-US" sz="1380" dirty="0"/>
+          </a:p>
+          <a:p>
+            <a:r>
+              <a:rPr lang="en-US" sz="1380" dirty="0">
+                <a:solidFill>
+                  <a:srgbClr val="17364A"/>
+                </a:solidFill>
+                <a:latin typeface="Aptos" pitchFamily="34" charset="0"/>
+                <a:ea typeface="Aptos" pitchFamily="34" charset="-122"/>
+                <a:cs typeface="Aptos" pitchFamily="34" charset="-120"/>
+              </a:rPr>
+              <a:t>Information extraction.</a:t>
+            </a:r>
+            <a:endParaRPr lang="en-US" sz="1380" dirty="0"/>
+          </a:p>
+          <a:p>
+            <a:r>
+              <a:rPr lang="en-US" sz="1380" dirty="0">
+                <a:solidFill>
+                  <a:srgbClr val="17364A"/>
+                </a:solidFill>
+                <a:latin typeface="Aptos" pitchFamily="34" charset="0"/>
+                <a:ea typeface="Aptos" pitchFamily="34" charset="-122"/>
+                <a:cs typeface="Aptos" pitchFamily="34" charset="-120"/>
+              </a:rPr>
+              <a:t>Information extraction pulls specific facts from text, such as symptoms, dates, locations,.</a:t>
+            </a:r>
+            <a:endParaRPr lang="en-US" sz="1380" dirty="0"/>
+          </a:p>
+        </p:txBody>
       </p:sp>
       <p:sp>
         <p:nvSpPr>
           <p:cNvPr id="16" name="Shape 14"/>
-          <p:cNvSpPr/>
-          <p:nvPr/>
-        </p:nvSpPr>
-        <p:spPr>
-          <a:xfrm>
-            <a:off x="9235440" y="3502152"/>
-            <a:ext cx="329184" cy="329184"/>
-          </a:xfrm>
-          <a:prstGeom prst="ellipse">
-            <a:avLst/>
-          </a:prstGeom>
-          <a:solidFill>
-            <a:srgbClr val="D69A2D"/>
-          </a:solidFill>
-          <a:ln w="12700">
-            <a:solidFill>
-              <a:srgbClr val="D69A2D"/>
-            </a:solidFill>
-            <a:prstDash val="solid"/>
-          </a:ln>
-        </p:spPr>
-      </p:sp>
-      <p:sp>
-        <p:nvSpPr>
-          <p:cNvPr id="17" name="Shape 15"/>
-          <p:cNvSpPr/>
-          <p:nvPr/>
-        </p:nvSpPr>
-        <p:spPr>
-          <a:xfrm>
-            <a:off x="9235440" y="3657600"/>
-            <a:ext cx="329184" cy="329184"/>
-          </a:xfrm>
-          <a:prstGeom prst="ellipse">
-            <a:avLst/>
-          </a:prstGeom>
-          <a:solidFill>
-            <a:srgbClr val="6A4CA3"/>
-          </a:solidFill>
-          <a:ln w="12700">
-            <a:solidFill>
-              <a:srgbClr val="6A4CA3"/>
-            </a:solidFill>
-            <a:prstDash val="solid"/>
-          </a:ln>
-        </p:spPr>
-      </p:sp>
-      <p:sp>
-        <p:nvSpPr>
-          <p:cNvPr id="18" name="Shape 16"/>
-          <p:cNvSpPr/>
-          <p:nvPr/>
-        </p:nvSpPr>
-        <p:spPr>
-          <a:xfrm>
-            <a:off x="8302752" y="3456432"/>
-            <a:ext cx="1097280" cy="365760"/>
-          </a:xfrm>
-          <a:prstGeom prst="line">
-            <a:avLst/>
-          </a:prstGeom>
-          <a:noFill/>
-          <a:ln w="19050">
-            <a:solidFill>
-              <a:srgbClr val="8ABBD8"/>
-            </a:solidFill>
-            <a:prstDash val="solid"/>
-          </a:ln>
-        </p:spPr>
-      </p:sp>
-      <p:sp>
-        <p:nvSpPr>
-          <p:cNvPr id="19" name="Shape 17"/>
-          <p:cNvSpPr/>
-          <p:nvPr/>
-        </p:nvSpPr>
-        <p:spPr>
-          <a:xfrm>
-            <a:off x="10497312" y="3547872"/>
-            <a:ext cx="-1097280" cy="274320"/>
-          </a:xfrm>
-          <a:prstGeom prst="line">
-            <a:avLst/>
-          </a:prstGeom>
-          <a:noFill/>
-          <a:ln w="19050">
-            <a:solidFill>
-              <a:srgbClr val="8ABBD8"/>
-            </a:solidFill>
-            <a:prstDash val="solid"/>
-          </a:ln>
-        </p:spPr>
-      </p:sp>
-      <p:sp>
-        <p:nvSpPr>
-          <p:cNvPr id="20" name="Shape 18"/>
-          <p:cNvSpPr/>
-          <p:nvPr/>
-        </p:nvSpPr>
-        <p:spPr>
-          <a:xfrm>
-            <a:off x="9400032" y="3666744"/>
-            <a:ext cx="0" cy="155448"/>
-          </a:xfrm>
-          <a:prstGeom prst="line">
-            <a:avLst/>
-          </a:prstGeom>
-          <a:noFill/>
-          <a:ln w="19050">
-            <a:solidFill>
-              <a:srgbClr val="8ABBD8"/>
-            </a:solidFill>
-            <a:prstDash val="solid"/>
-          </a:ln>
-        </p:spPr>
-      </p:sp>
-      <p:sp>
-        <p:nvSpPr>
-          <p:cNvPr id="21" name="Shape 19"/>
-          <p:cNvSpPr/>
-          <p:nvPr/>
-        </p:nvSpPr>
-        <p:spPr>
-          <a:xfrm>
-            <a:off x="8302752" y="3456432"/>
-            <a:ext cx="1097280" cy="210312"/>
-          </a:xfrm>
-          <a:prstGeom prst="line">
-            <a:avLst/>
-          </a:prstGeom>
-          <a:noFill/>
-          <a:ln w="19050">
-            <a:solidFill>
-              <a:srgbClr val="8ABBD8"/>
-            </a:solidFill>
-            <a:prstDash val="solid"/>
-          </a:ln>
-        </p:spPr>
-      </p:sp>
-      <p:sp>
-        <p:nvSpPr>
-          <p:cNvPr id="22" name="Shape 20"/>
-          <p:cNvSpPr/>
-          <p:nvPr/>
-        </p:nvSpPr>
-        <p:spPr>
-          <a:xfrm>
-            <a:off x="10497312" y="3547872"/>
-            <a:ext cx="-1097280" cy="118872"/>
-          </a:xfrm>
-          <a:prstGeom prst="line">
-            <a:avLst/>
-          </a:prstGeom>
-          <a:noFill/>
-          <a:ln w="19050">
-            <a:solidFill>
-              <a:srgbClr val="8ABBD8"/>
-            </a:solidFill>
-            <a:prstDash val="solid"/>
-          </a:ln>
-        </p:spPr>
-      </p:sp>
-      <p:sp>
-        <p:nvSpPr>
-          <p:cNvPr id="23" name="Text 21"/>
-          <p:cNvSpPr/>
-          <p:nvPr/>
-        </p:nvSpPr>
-        <p:spPr>
-          <a:xfrm>
-            <a:off x="7909560" y="3977640"/>
-            <a:ext cx="2926080" cy="182880"/>
-          </a:xfrm>
-          <a:prstGeom prst="rect">
-            <a:avLst/>
-          </a:prstGeom>
-          <a:noFill/>
-          <a:ln/>
-        </p:spPr>
-        <p:txBody>
-          <a:bodyPr wrap="square" lIns="0" tIns="0" rIns="0" bIns="0" rtlCol="0" anchor="ctr"/>
-          <a:lstStyle/>
-          <a:p>
-            <a:pPr algn="ctr" indent="0" marL="0">
-              <a:buNone/>
-            </a:pPr>
-            <a:r>
-              <a:rPr lang="en-US" sz="1000" dirty="0">
-                <a:solidFill>
-                  <a:srgbClr val="003A63"/>
-                </a:solidFill>
-                <a:latin typeface="Aptos" pitchFamily="34" charset="0"/>
-                <a:ea typeface="Aptos" pitchFamily="34" charset="-122"/>
-                <a:cs typeface="Aptos" pitchFamily="34" charset="-120"/>
-              </a:rPr>
-              <a:t>People and trust</a:t>
-            </a:r>
-            <a:endParaRPr lang="en-US" sz="1000" dirty="0"/>
-          </a:p>
-        </p:txBody>
-      </p:sp>
-      <p:sp>
-        <p:nvSpPr>
-          <p:cNvPr id="24" name="Shape 22"/>
           <p:cNvSpPr/>
           <p:nvPr/>
         </p:nvSpPr>
@@ -19017,7 +16412,7 @@
       </p:sp>
       <p:sp>
         <p:nvSpPr>
-          <p:cNvPr id="25" name="Text 23"/>
+          <p:cNvPr id="17" name="Text 15"/>
           <p:cNvSpPr/>
           <p:nvPr/>
         </p:nvSpPr>
@@ -19056,7 +16451,7 @@
       </p:sp>
       <p:sp>
         <p:nvSpPr>
-          <p:cNvPr id="26" name="Text 24"/>
+          <p:cNvPr id="18" name="Text 16"/>
           <p:cNvSpPr/>
           <p:nvPr/>
         </p:nvSpPr>
@@ -19564,13 +16959,11 @@
             </a:avLst>
           </a:prstGeom>
           <a:solidFill>
-            <a:srgbClr val="FFFFFF">
-              <a:alpha val="88000"/>
-            </a:srgbClr>
+            <a:srgbClr val="FFFFFF"/>
           </a:solidFill>
           <a:ln w="12700">
             <a:solidFill>
-              <a:srgbClr val="D6E8F2"/>
+              <a:srgbClr val="B9D7E6"/>
             </a:solidFill>
             <a:prstDash val="solid"/>
           </a:ln>
@@ -19578,261 +16971,112 @@
       </p:sp>
       <p:sp>
         <p:nvSpPr>
-          <p:cNvPr id="14" name="Shape 12"/>
-          <p:cNvSpPr/>
-          <p:nvPr/>
-        </p:nvSpPr>
-        <p:spPr>
-          <a:xfrm>
-            <a:off x="8138160" y="3291840"/>
-            <a:ext cx="329184" cy="329184"/>
-          </a:xfrm>
-          <a:prstGeom prst="ellipse">
-            <a:avLst/>
-          </a:prstGeom>
-          <a:solidFill>
-            <a:srgbClr val="0068B7"/>
-          </a:solidFill>
-          <a:ln w="12700">
-            <a:solidFill>
-              <a:srgbClr val="0068B7"/>
-            </a:solidFill>
-            <a:prstDash val="solid"/>
-          </a:ln>
-        </p:spPr>
-      </p:sp>
-      <p:sp>
-        <p:nvSpPr>
-          <p:cNvPr id="15" name="Shape 13"/>
-          <p:cNvSpPr/>
-          <p:nvPr/>
-        </p:nvSpPr>
-        <p:spPr>
-          <a:xfrm>
-            <a:off x="10332720" y="3383280"/>
-            <a:ext cx="329184" cy="329184"/>
-          </a:xfrm>
-          <a:prstGeom prst="ellipse">
-            <a:avLst/>
-          </a:prstGeom>
-          <a:solidFill>
-            <a:srgbClr val="2F8A28"/>
-          </a:solidFill>
-          <a:ln w="12700">
-            <a:solidFill>
-              <a:srgbClr val="2F8A28"/>
-            </a:solidFill>
-            <a:prstDash val="solid"/>
-          </a:ln>
-        </p:spPr>
+          <p:cNvPr id="14" name="Text 12"/>
+          <p:cNvSpPr/>
+          <p:nvPr/>
+        </p:nvSpPr>
+        <p:spPr>
+          <a:xfrm>
+            <a:off x="7799832" y="2935224"/>
+            <a:ext cx="3145536" cy="256032"/>
+          </a:xfrm>
+          <a:prstGeom prst="rect">
+            <a:avLst/>
+          </a:prstGeom>
+          <a:noFill/>
+          <a:ln/>
+        </p:spPr>
+        <p:txBody>
+          <a:bodyPr wrap="square" lIns="0" tIns="0" rIns="0" bIns="0" rtlCol="0" anchor="ctr"/>
+          <a:lstStyle/>
+          <a:p>
+            <a:pPr indent="0" marL="0">
+              <a:buNone/>
+            </a:pPr>
+            <a:r>
+              <a:rPr lang="en-US" sz="1300" b="1" dirty="0">
+                <a:solidFill>
+                  <a:srgbClr val="0068B7"/>
+                </a:solidFill>
+                <a:latin typeface="Aptos" pitchFamily="34" charset="0"/>
+                <a:ea typeface="Aptos" pitchFamily="34" charset="-122"/>
+                <a:cs typeface="Aptos" pitchFamily="34" charset="-120"/>
+              </a:rPr>
+              <a:t>Concept checkpoints</a:t>
+            </a:r>
+            <a:endParaRPr lang="en-US" sz="1300" dirty="0"/>
+          </a:p>
+        </p:txBody>
+      </p:sp>
+      <p:sp>
+        <p:nvSpPr>
+          <p:cNvPr id="15" name="Text 13"/>
+          <p:cNvSpPr/>
+          <p:nvPr/>
+        </p:nvSpPr>
+        <p:spPr>
+          <a:xfrm>
+            <a:off x="7818120" y="3300984"/>
+            <a:ext cx="3090672" cy="877824"/>
+          </a:xfrm>
+          <a:prstGeom prst="rect">
+            <a:avLst/>
+          </a:prstGeom>
+          <a:noFill/>
+          <a:ln/>
+        </p:spPr>
+        <p:txBody>
+          <a:bodyPr wrap="square" lIns="254" tIns="254" rIns="254" bIns="254" rtlCol="0" anchor="t">
+            <a:normAutofit/>
+          </a:bodyPr>
+          <a:lstStyle/>
+          <a:p>
+            <a:r>
+              <a:rPr lang="en-US" sz="1380" dirty="0">
+                <a:solidFill>
+                  <a:srgbClr val="17364A"/>
+                </a:solidFill>
+                <a:latin typeface="Aptos" pitchFamily="34" charset="0"/>
+                <a:ea typeface="Aptos" pitchFamily="34" charset="-122"/>
+                <a:cs typeface="Aptos" pitchFamily="34" charset="-120"/>
+              </a:rPr>
+              <a:t>Public health summarization should preserve uncertainty, cite sources when possible, and.</a:t>
+            </a:r>
+            <a:endParaRPr lang="en-US" sz="1380" dirty="0"/>
+          </a:p>
+          <a:p>
+            <a:r>
+              <a:rPr lang="en-US" sz="1380" dirty="0">
+                <a:solidFill>
+                  <a:srgbClr val="17364A"/>
+                </a:solidFill>
+                <a:latin typeface="Aptos" pitchFamily="34" charset="0"/>
+                <a:ea typeface="Aptos" pitchFamily="34" charset="-122"/>
+                <a:cs typeface="Aptos" pitchFamily="34" charset="-120"/>
+              </a:rPr>
+              <a:t>Hallucination.</a:t>
+            </a:r>
+            <a:endParaRPr lang="en-US" sz="1380" dirty="0"/>
+          </a:p>
+          <a:p>
+            <a:r>
+              <a:rPr lang="en-US" sz="1380" dirty="0">
+                <a:solidFill>
+                  <a:srgbClr val="17364A"/>
+                </a:solidFill>
+                <a:latin typeface="Aptos" pitchFamily="34" charset="0"/>
+                <a:ea typeface="Aptos" pitchFamily="34" charset="-122"/>
+                <a:cs typeface="Aptos" pitchFamily="34" charset="-120"/>
+              </a:rPr>
+              <a:t>A hallucination is an AI-generated statement that is false, unsupported, or not present in.</a:t>
+            </a:r>
+            <a:endParaRPr lang="en-US" sz="1380" dirty="0"/>
+          </a:p>
+        </p:txBody>
       </p:sp>
       <p:sp>
         <p:nvSpPr>
           <p:cNvPr id="16" name="Shape 14"/>
-          <p:cNvSpPr/>
-          <p:nvPr/>
-        </p:nvSpPr>
-        <p:spPr>
-          <a:xfrm>
-            <a:off x="9235440" y="3502152"/>
-            <a:ext cx="329184" cy="329184"/>
-          </a:xfrm>
-          <a:prstGeom prst="ellipse">
-            <a:avLst/>
-          </a:prstGeom>
-          <a:solidFill>
-            <a:srgbClr val="D69A2D"/>
-          </a:solidFill>
-          <a:ln w="12700">
-            <a:solidFill>
-              <a:srgbClr val="D69A2D"/>
-            </a:solidFill>
-            <a:prstDash val="solid"/>
-          </a:ln>
-        </p:spPr>
-      </p:sp>
-      <p:sp>
-        <p:nvSpPr>
-          <p:cNvPr id="17" name="Shape 15"/>
-          <p:cNvSpPr/>
-          <p:nvPr/>
-        </p:nvSpPr>
-        <p:spPr>
-          <a:xfrm>
-            <a:off x="9235440" y="3657600"/>
-            <a:ext cx="329184" cy="329184"/>
-          </a:xfrm>
-          <a:prstGeom prst="ellipse">
-            <a:avLst/>
-          </a:prstGeom>
-          <a:solidFill>
-            <a:srgbClr val="6A4CA3"/>
-          </a:solidFill>
-          <a:ln w="12700">
-            <a:solidFill>
-              <a:srgbClr val="6A4CA3"/>
-            </a:solidFill>
-            <a:prstDash val="solid"/>
-          </a:ln>
-        </p:spPr>
-      </p:sp>
-      <p:sp>
-        <p:nvSpPr>
-          <p:cNvPr id="18" name="Shape 16"/>
-          <p:cNvSpPr/>
-          <p:nvPr/>
-        </p:nvSpPr>
-        <p:spPr>
-          <a:xfrm>
-            <a:off x="8302752" y="3456432"/>
-            <a:ext cx="1097280" cy="365760"/>
-          </a:xfrm>
-          <a:prstGeom prst="line">
-            <a:avLst/>
-          </a:prstGeom>
-          <a:noFill/>
-          <a:ln w="19050">
-            <a:solidFill>
-              <a:srgbClr val="8ABBD8"/>
-            </a:solidFill>
-            <a:prstDash val="solid"/>
-          </a:ln>
-        </p:spPr>
-      </p:sp>
-      <p:sp>
-        <p:nvSpPr>
-          <p:cNvPr id="19" name="Shape 17"/>
-          <p:cNvSpPr/>
-          <p:nvPr/>
-        </p:nvSpPr>
-        <p:spPr>
-          <a:xfrm>
-            <a:off x="10497312" y="3547872"/>
-            <a:ext cx="-1097280" cy="274320"/>
-          </a:xfrm>
-          <a:prstGeom prst="line">
-            <a:avLst/>
-          </a:prstGeom>
-          <a:noFill/>
-          <a:ln w="19050">
-            <a:solidFill>
-              <a:srgbClr val="8ABBD8"/>
-            </a:solidFill>
-            <a:prstDash val="solid"/>
-          </a:ln>
-        </p:spPr>
-      </p:sp>
-      <p:sp>
-        <p:nvSpPr>
-          <p:cNvPr id="20" name="Shape 18"/>
-          <p:cNvSpPr/>
-          <p:nvPr/>
-        </p:nvSpPr>
-        <p:spPr>
-          <a:xfrm>
-            <a:off x="9400032" y="3666744"/>
-            <a:ext cx="0" cy="155448"/>
-          </a:xfrm>
-          <a:prstGeom prst="line">
-            <a:avLst/>
-          </a:prstGeom>
-          <a:noFill/>
-          <a:ln w="19050">
-            <a:solidFill>
-              <a:srgbClr val="8ABBD8"/>
-            </a:solidFill>
-            <a:prstDash val="solid"/>
-          </a:ln>
-        </p:spPr>
-      </p:sp>
-      <p:sp>
-        <p:nvSpPr>
-          <p:cNvPr id="21" name="Shape 19"/>
-          <p:cNvSpPr/>
-          <p:nvPr/>
-        </p:nvSpPr>
-        <p:spPr>
-          <a:xfrm>
-            <a:off x="8302752" y="3456432"/>
-            <a:ext cx="1097280" cy="210312"/>
-          </a:xfrm>
-          <a:prstGeom prst="line">
-            <a:avLst/>
-          </a:prstGeom>
-          <a:noFill/>
-          <a:ln w="19050">
-            <a:solidFill>
-              <a:srgbClr val="8ABBD8"/>
-            </a:solidFill>
-            <a:prstDash val="solid"/>
-          </a:ln>
-        </p:spPr>
-      </p:sp>
-      <p:sp>
-        <p:nvSpPr>
-          <p:cNvPr id="22" name="Shape 20"/>
-          <p:cNvSpPr/>
-          <p:nvPr/>
-        </p:nvSpPr>
-        <p:spPr>
-          <a:xfrm>
-            <a:off x="10497312" y="3547872"/>
-            <a:ext cx="-1097280" cy="118872"/>
-          </a:xfrm>
-          <a:prstGeom prst="line">
-            <a:avLst/>
-          </a:prstGeom>
-          <a:noFill/>
-          <a:ln w="19050">
-            <a:solidFill>
-              <a:srgbClr val="8ABBD8"/>
-            </a:solidFill>
-            <a:prstDash val="solid"/>
-          </a:ln>
-        </p:spPr>
-      </p:sp>
-      <p:sp>
-        <p:nvSpPr>
-          <p:cNvPr id="23" name="Text 21"/>
-          <p:cNvSpPr/>
-          <p:nvPr/>
-        </p:nvSpPr>
-        <p:spPr>
-          <a:xfrm>
-            <a:off x="7909560" y="3977640"/>
-            <a:ext cx="2926080" cy="182880"/>
-          </a:xfrm>
-          <a:prstGeom prst="rect">
-            <a:avLst/>
-          </a:prstGeom>
-          <a:noFill/>
-          <a:ln/>
-        </p:spPr>
-        <p:txBody>
-          <a:bodyPr wrap="square" lIns="0" tIns="0" rIns="0" bIns="0" rtlCol="0" anchor="ctr"/>
-          <a:lstStyle/>
-          <a:p>
-            <a:pPr algn="ctr" indent="0" marL="0">
-              <a:buNone/>
-            </a:pPr>
-            <a:r>
-              <a:rPr lang="en-US" sz="1000" dirty="0">
-                <a:solidFill>
-                  <a:srgbClr val="003A63"/>
-                </a:solidFill>
-                <a:latin typeface="Aptos" pitchFamily="34" charset="0"/>
-                <a:ea typeface="Aptos" pitchFamily="34" charset="-122"/>
-                <a:cs typeface="Aptos" pitchFamily="34" charset="-120"/>
-              </a:rPr>
-              <a:t>People and trust</a:t>
-            </a:r>
-            <a:endParaRPr lang="en-US" sz="1000" dirty="0"/>
-          </a:p>
-        </p:txBody>
-      </p:sp>
-      <p:sp>
-        <p:nvSpPr>
-          <p:cNvPr id="24" name="Shape 22"/>
           <p:cNvSpPr/>
           <p:nvPr/>
         </p:nvSpPr>
@@ -19859,7 +17103,7 @@
       </p:sp>
       <p:sp>
         <p:nvSpPr>
-          <p:cNvPr id="25" name="Text 23"/>
+          <p:cNvPr id="17" name="Text 15"/>
           <p:cNvSpPr/>
           <p:nvPr/>
         </p:nvSpPr>
@@ -19898,7 +17142,7 @@
       </p:sp>
       <p:sp>
         <p:nvSpPr>
-          <p:cNvPr id="26" name="Text 24"/>
+          <p:cNvPr id="18" name="Text 16"/>
           <p:cNvSpPr/>
           <p:nvPr/>
         </p:nvSpPr>

--- a/downloads/presentations/modules/anl-200.pptx
+++ b/downloads/presentations/modules/anl-200.pptx
@@ -3352,49 +3352,58 @@
           <a:ln/>
         </p:spPr>
         <p:txBody>
-          <a:bodyPr wrap="square" lIns="635" tIns="635" rIns="635" bIns="635" rtlCol="0" anchor="t">
+          <a:bodyPr wrap="square" lIns="1016" tIns="1016" rIns="1016" bIns="1016" rtlCol="0" anchor="t">
             <a:normAutofit/>
           </a:bodyPr>
           <a:lstStyle/>
           <a:p>
+            <a:pPr indent="0" marL="0">
+              <a:buNone/>
+            </a:pPr>
             <a:r>
               <a:rPr lang="en-US" sz="2100" dirty="0">
                 <a:solidFill>
-                  <a:srgbClr val="17364A"/>
-                </a:solidFill>
-                <a:latin typeface="Aptos" pitchFamily="34" charset="0"/>
-                <a:ea typeface="Aptos" pitchFamily="34" charset="-122"/>
-                <a:cs typeface="Aptos" pitchFamily="34" charset="-120"/>
-              </a:rPr>
-              <a:t>A contact center may receive hundreds of public inquiries during an outbreak.</a:t>
+                  <a:srgbClr val="003A63"/>
+                </a:solidFill>
+                <a:latin typeface="Aptos" pitchFamily="34" charset="0"/>
+                <a:ea typeface="Aptos" pitchFamily="34" charset="-122"/>
+                <a:cs typeface="Aptos" pitchFamily="34" charset="-120"/>
+              </a:rPr>
+              <a:t>• A contact center may receive hundreds of public inquiries during an outbreak.</a:t>
             </a:r>
             <a:endParaRPr lang="en-US" sz="2100" dirty="0"/>
           </a:p>
           <a:p>
+            <a:pPr indent="0" marL="0">
+              <a:buNone/>
+            </a:pPr>
             <a:r>
               <a:rPr lang="en-US" sz="2100" dirty="0">
                 <a:solidFill>
-                  <a:srgbClr val="17364A"/>
-                </a:solidFill>
-                <a:latin typeface="Aptos" pitchFamily="34" charset="0"/>
-                <a:ea typeface="Aptos" pitchFamily="34" charset="-122"/>
-                <a:cs typeface="Aptos" pitchFamily="34" charset="-120"/>
-              </a:rPr>
-              <a:t>NLP could classify messages by topic, identify urgent issues, and draft response summaries for staff.</a:t>
+                  <a:srgbClr val="003A63"/>
+                </a:solidFill>
+                <a:latin typeface="Aptos" pitchFamily="34" charset="0"/>
+                <a:ea typeface="Aptos" pitchFamily="34" charset="-122"/>
+                <a:cs typeface="Aptos" pitchFamily="34" charset="-120"/>
+              </a:rPr>
+              <a:t>• NLP could classify messages by topic, identify urgent issues, and draft response summaries for.</a:t>
             </a:r>
             <a:endParaRPr lang="en-US" sz="2100" dirty="0"/>
           </a:p>
           <a:p>
+            <a:pPr indent="0" marL="0">
+              <a:buNone/>
+            </a:pPr>
             <a:r>
               <a:rPr lang="en-US" sz="2100" dirty="0">
                 <a:solidFill>
-                  <a:srgbClr val="17364A"/>
-                </a:solidFill>
-                <a:latin typeface="Aptos" pitchFamily="34" charset="0"/>
-                <a:ea typeface="Aptos" pitchFamily="34" charset="-122"/>
-                <a:cs typeface="Aptos" pitchFamily="34" charset="-120"/>
-              </a:rPr>
-              <a:t>This can improve timeliness, but messages may contain sensitive information, emotional language,.</a:t>
+                  <a:srgbClr val="003A63"/>
+                </a:solidFill>
+                <a:latin typeface="Aptos" pitchFamily="34" charset="0"/>
+                <a:ea typeface="Aptos" pitchFamily="34" charset="-122"/>
+                <a:cs typeface="Aptos" pitchFamily="34" charset="-120"/>
+              </a:rPr>
+              <a:t>• This can improve timeliness, but messages may contain sensitive information, emotional.</a:t>
             </a:r>
             <a:endParaRPr lang="en-US" sz="2100" dirty="0"/>
           </a:p>
@@ -3474,17 +3483,17 @@
         </p:nvSpPr>
         <p:spPr>
           <a:xfrm>
-            <a:off x="7799832" y="1828800"/>
-            <a:ext cx="3145536" cy="685800"/>
-          </a:xfrm>
-          <a:prstGeom prst="rect">
-            <a:avLst/>
-          </a:prstGeom>
-          <a:noFill/>
-          <a:ln/>
-        </p:spPr>
-        <p:txBody>
-          <a:bodyPr wrap="square" lIns="0" tIns="0" rIns="0" bIns="0" rtlCol="0" anchor="t">
+            <a:off x="7799832" y="1801368"/>
+            <a:ext cx="3145536" cy="758952"/>
+          </a:xfrm>
+          <a:prstGeom prst="rect">
+            <a:avLst/>
+          </a:prstGeom>
+          <a:noFill/>
+          <a:ln/>
+        </p:spPr>
+        <p:txBody>
+          <a:bodyPr wrap="square" lIns="254" tIns="254" rIns="254" bIns="254" rtlCol="0" anchor="t">
             <a:normAutofit/>
           </a:bodyPr>
           <a:lstStyle/>
@@ -3493,7 +3502,7 @@
               <a:buNone/>
             </a:pPr>
             <a:r>
-              <a:rPr lang="en-US" sz="1550" dirty="0">
+              <a:rPr lang="en-US" sz="1320" dirty="0">
                 <a:solidFill>
                   <a:srgbClr val="17364A"/>
                 </a:solidFill>
@@ -3503,7 +3512,7 @@
               </a:rPr>
               <a:t>A contact center may receive hundreds of public inquiries during an outbreak.</a:t>
             </a:r>
-            <a:endParaRPr lang="en-US" sz="1550" dirty="0"/>
+            <a:endParaRPr lang="en-US" sz="1320" dirty="0"/>
           </a:p>
         </p:txBody>
       </p:sp>
@@ -3591,13 +3600,16 @@
           <a:ln/>
         </p:spPr>
         <p:txBody>
-          <a:bodyPr wrap="square" lIns="254" tIns="254" rIns="254" bIns="254" rtlCol="0" anchor="t">
+          <a:bodyPr wrap="square" lIns="508" tIns="508" rIns="508" bIns="508" rtlCol="0" anchor="t">
             <a:normAutofit/>
           </a:bodyPr>
           <a:lstStyle/>
           <a:p>
-            <a:r>
-              <a:rPr lang="en-US" sz="1380" dirty="0">
+            <a:pPr indent="0" marL="0">
+              <a:buNone/>
+            </a:pPr>
+            <a:r>
+              <a:rPr lang="en-US" sz="1220" dirty="0">
                 <a:solidFill>
                   <a:srgbClr val="17364A"/>
                 </a:solidFill>
@@ -3605,13 +3617,16 @@
                 <a:ea typeface="Aptos" pitchFamily="34" charset="-122"/>
                 <a:cs typeface="Aptos" pitchFamily="34" charset="-120"/>
               </a:rPr>
-              <a:t>NLP could classify messages by topic, identify urgent issues, and draft response summaries.</a:t>
-            </a:r>
-            <a:endParaRPr lang="en-US" sz="1380" dirty="0"/>
-          </a:p>
-          <a:p>
-            <a:r>
-              <a:rPr lang="en-US" sz="1380" dirty="0">
+              <a:t>NLP could classify messages by topic, identify urgent issues, and.</a:t>
+            </a:r>
+            <a:endParaRPr lang="en-US" sz="1220" dirty="0"/>
+          </a:p>
+          <a:p>
+            <a:pPr indent="0" marL="0">
+              <a:buNone/>
+            </a:pPr>
+            <a:r>
+              <a:rPr lang="en-US" sz="1220" dirty="0">
                 <a:solidFill>
                   <a:srgbClr val="17364A"/>
                 </a:solidFill>
@@ -3619,13 +3634,16 @@
                 <a:ea typeface="Aptos" pitchFamily="34" charset="-122"/>
                 <a:cs typeface="Aptos" pitchFamily="34" charset="-120"/>
               </a:rPr>
-              <a:t>This can improve timeliness, but messages may contain sensitive information, emotional.</a:t>
-            </a:r>
-            <a:endParaRPr lang="en-US" sz="1380" dirty="0"/>
-          </a:p>
-          <a:p>
-            <a:r>
-              <a:rPr lang="en-US" sz="1380" dirty="0">
+              <a:t>This can improve timeliness, but messages may contain sensitive.</a:t>
+            </a:r>
+            <a:endParaRPr lang="en-US" sz="1220" dirty="0"/>
+          </a:p>
+          <a:p>
+            <a:pPr indent="0" marL="0">
+              <a:buNone/>
+            </a:pPr>
+            <a:r>
+              <a:rPr lang="en-US" sz="1220" dirty="0">
                 <a:solidFill>
                   <a:srgbClr val="17364A"/>
                 </a:solidFill>
@@ -3635,7 +3653,7 @@
               </a:rPr>
               <a:t>Staff need review procedures and escalation criteria.</a:t>
             </a:r>
-            <a:endParaRPr lang="en-US" sz="1380" dirty="0"/>
+            <a:endParaRPr lang="en-US" sz="1220" dirty="0"/>
           </a:p>
         </p:txBody>
       </p:sp>
@@ -3713,17 +3731,17 @@
         </p:nvSpPr>
         <p:spPr>
           <a:xfrm>
-            <a:off x="7799832" y="5001768"/>
-            <a:ext cx="3145536" cy="502920"/>
-          </a:xfrm>
-          <a:prstGeom prst="rect">
-            <a:avLst/>
-          </a:prstGeom>
-          <a:noFill/>
-          <a:ln/>
-        </p:spPr>
-        <p:txBody>
-          <a:bodyPr wrap="square" lIns="0" tIns="0" rIns="0" bIns="0" rtlCol="0" anchor="t">
+            <a:off x="7799832" y="4974336"/>
+            <a:ext cx="3145536" cy="576072"/>
+          </a:xfrm>
+          <a:prstGeom prst="rect">
+            <a:avLst/>
+          </a:prstGeom>
+          <a:noFill/>
+          <a:ln/>
+        </p:spPr>
+        <p:txBody>
+          <a:bodyPr wrap="square" lIns="254" tIns="254" rIns="254" bIns="254" rtlCol="0" anchor="t">
             <a:normAutofit/>
           </a:bodyPr>
           <a:lstStyle/>
@@ -3732,7 +3750,7 @@
               <a:buNone/>
             </a:pPr>
             <a:r>
-              <a:rPr lang="en-US" sz="1550" dirty="0">
+              <a:rPr lang="en-US" sz="1320" dirty="0">
                 <a:solidFill>
                   <a:srgbClr val="17364A"/>
                 </a:solidFill>
@@ -3740,9 +3758,9 @@
                 <a:ea typeface="Aptos" pitchFamily="34" charset="-122"/>
                 <a:cs typeface="Aptos" pitchFamily="34" charset="-120"/>
               </a:rPr>
-              <a:t>Use the concept to plan transparent communication, gather stakeholder input, protect trust, and make sure affected communities are considered early.</a:t>
-            </a:r>
-            <a:endParaRPr lang="en-US" sz="1550" dirty="0"/>
+              <a:t>Use the concept to plan transparent communication, gather stakeholder input, protect trust, and make sure affected.</a:t>
+            </a:r>
+            <a:endParaRPr lang="en-US" sz="1320" dirty="0"/>
           </a:p>
         </p:txBody>
       </p:sp>
@@ -4043,49 +4061,58 @@
           <a:ln/>
         </p:spPr>
         <p:txBody>
-          <a:bodyPr wrap="square" lIns="635" tIns="635" rIns="635" bIns="635" rtlCol="0" anchor="t">
+          <a:bodyPr wrap="square" lIns="1016" tIns="1016" rIns="1016" bIns="1016" rtlCol="0" anchor="t">
             <a:normAutofit/>
           </a:bodyPr>
           <a:lstStyle/>
           <a:p>
+            <a:pPr indent="0" marL="0">
+              <a:buNone/>
+            </a:pPr>
             <a:r>
               <a:rPr lang="en-US" sz="2100" dirty="0">
                 <a:solidFill>
-                  <a:srgbClr val="17364A"/>
-                </a:solidFill>
-                <a:latin typeface="Aptos" pitchFamily="34" charset="0"/>
-                <a:ea typeface="Aptos" pitchFamily="34" charset="-122"/>
-                <a:cs typeface="Aptos" pitchFamily="34" charset="-120"/>
-              </a:rPr>
-              <a:t>NLP implementation begins with task definition.</a:t>
+                  <a:srgbClr val="003A63"/>
+                </a:solidFill>
+                <a:latin typeface="Aptos" pitchFamily="34" charset="0"/>
+                <a:ea typeface="Aptos" pitchFamily="34" charset="-122"/>
+                <a:cs typeface="Aptos" pitchFamily="34" charset="-120"/>
+              </a:rPr>
+              <a:t>• NLP implementation begins with task definition.</a:t>
             </a:r>
             <a:endParaRPr lang="en-US" sz="2100" dirty="0"/>
           </a:p>
           <a:p>
+            <a:pPr indent="0" marL="0">
+              <a:buNone/>
+            </a:pPr>
             <a:r>
               <a:rPr lang="en-US" sz="2100" dirty="0">
                 <a:solidFill>
-                  <a:srgbClr val="17364A"/>
-                </a:solidFill>
-                <a:latin typeface="Aptos" pitchFamily="34" charset="0"/>
-                <a:ea typeface="Aptos" pitchFamily="34" charset="-122"/>
-                <a:cs typeface="Aptos" pitchFamily="34" charset="-120"/>
-              </a:rPr>
-              <a:t>Extraction, classification, summarization, translation, topic modeling, and question answering are.</a:t>
+                  <a:srgbClr val="003A63"/>
+                </a:solidFill>
+                <a:latin typeface="Aptos" pitchFamily="34" charset="0"/>
+                <a:ea typeface="Aptos" pitchFamily="34" charset="-122"/>
+                <a:cs typeface="Aptos" pitchFamily="34" charset="-120"/>
+              </a:rPr>
+              <a:t>• Extraction, classification, summarization, translation, topic modeling, and question answering.</a:t>
             </a:r>
             <a:endParaRPr lang="en-US" sz="2100" dirty="0"/>
           </a:p>
           <a:p>
+            <a:pPr indent="0" marL="0">
+              <a:buNone/>
+            </a:pPr>
             <a:r>
               <a:rPr lang="en-US" sz="2100" dirty="0">
                 <a:solidFill>
-                  <a:srgbClr val="17364A"/>
-                </a:solidFill>
-                <a:latin typeface="Aptos" pitchFamily="34" charset="0"/>
-                <a:ea typeface="Aptos" pitchFamily="34" charset="-122"/>
-                <a:cs typeface="Aptos" pitchFamily="34" charset="-120"/>
-              </a:rPr>
-              <a:t>A tool that performs well at summarization may perform poorly at extracting dates or classifying urgency.</a:t>
+                  <a:srgbClr val="003A63"/>
+                </a:solidFill>
+                <a:latin typeface="Aptos" pitchFamily="34" charset="0"/>
+                <a:ea typeface="Aptos" pitchFamily="34" charset="-122"/>
+                <a:cs typeface="Aptos" pitchFamily="34" charset="-120"/>
+              </a:rPr>
+              <a:t>• A tool that performs well at summarization may perform poorly at extracting dates or.</a:t>
             </a:r>
             <a:endParaRPr lang="en-US" sz="2100" dirty="0"/>
           </a:p>
@@ -4165,17 +4192,17 @@
         </p:nvSpPr>
         <p:spPr>
           <a:xfrm>
-            <a:off x="7799832" y="1828800"/>
-            <a:ext cx="3145536" cy="685800"/>
-          </a:xfrm>
-          <a:prstGeom prst="rect">
-            <a:avLst/>
-          </a:prstGeom>
-          <a:noFill/>
-          <a:ln/>
-        </p:spPr>
-        <p:txBody>
-          <a:bodyPr wrap="square" lIns="0" tIns="0" rIns="0" bIns="0" rtlCol="0" anchor="t">
+            <a:off x="7799832" y="1801368"/>
+            <a:ext cx="3145536" cy="758952"/>
+          </a:xfrm>
+          <a:prstGeom prst="rect">
+            <a:avLst/>
+          </a:prstGeom>
+          <a:noFill/>
+          <a:ln/>
+        </p:spPr>
+        <p:txBody>
+          <a:bodyPr wrap="square" lIns="254" tIns="254" rIns="254" bIns="254" rtlCol="0" anchor="t">
             <a:normAutofit/>
           </a:bodyPr>
           <a:lstStyle/>
@@ -4184,7 +4211,7 @@
               <a:buNone/>
             </a:pPr>
             <a:r>
-              <a:rPr lang="en-US" sz="1550" dirty="0">
+              <a:rPr lang="en-US" sz="1320" dirty="0">
                 <a:solidFill>
                   <a:srgbClr val="17364A"/>
                 </a:solidFill>
@@ -4194,7 +4221,7 @@
               </a:rPr>
               <a:t>NLP implementation begins with task definition.</a:t>
             </a:r>
-            <a:endParaRPr lang="en-US" sz="1550" dirty="0"/>
+            <a:endParaRPr lang="en-US" sz="1320" dirty="0"/>
           </a:p>
         </p:txBody>
       </p:sp>
@@ -4282,13 +4309,16 @@
           <a:ln/>
         </p:spPr>
         <p:txBody>
-          <a:bodyPr wrap="square" lIns="254" tIns="254" rIns="254" bIns="254" rtlCol="0" anchor="t">
+          <a:bodyPr wrap="square" lIns="508" tIns="508" rIns="508" bIns="508" rtlCol="0" anchor="t">
             <a:normAutofit/>
           </a:bodyPr>
           <a:lstStyle/>
           <a:p>
-            <a:r>
-              <a:rPr lang="en-US" sz="1380" dirty="0">
+            <a:pPr indent="0" marL="0">
+              <a:buNone/>
+            </a:pPr>
+            <a:r>
+              <a:rPr lang="en-US" sz="1220" dirty="0">
                 <a:solidFill>
                   <a:srgbClr val="17364A"/>
                 </a:solidFill>
@@ -4296,13 +4326,16 @@
                 <a:ea typeface="Aptos" pitchFamily="34" charset="-122"/>
                 <a:cs typeface="Aptos" pitchFamily="34" charset="-120"/>
               </a:rPr>
-              <a:t>Extraction, classification, summarization, translation, topic modeling, and question.</a:t>
-            </a:r>
-            <a:endParaRPr lang="en-US" sz="1380" dirty="0"/>
-          </a:p>
-          <a:p>
-            <a:r>
-              <a:rPr lang="en-US" sz="1380" dirty="0">
+              <a:t>Extraction, classification, summarization, translation, topic.</a:t>
+            </a:r>
+            <a:endParaRPr lang="en-US" sz="1220" dirty="0"/>
+          </a:p>
+          <a:p>
+            <a:pPr indent="0" marL="0">
+              <a:buNone/>
+            </a:pPr>
+            <a:r>
+              <a:rPr lang="en-US" sz="1220" dirty="0">
                 <a:solidFill>
                   <a:srgbClr val="17364A"/>
                 </a:solidFill>
@@ -4310,13 +4343,16 @@
                 <a:ea typeface="Aptos" pitchFamily="34" charset="-122"/>
                 <a:cs typeface="Aptos" pitchFamily="34" charset="-120"/>
               </a:rPr>
-              <a:t>Staff should define the task narrowly before selecting or testing a tool.</a:t>
-            </a:r>
-            <a:endParaRPr lang="en-US" sz="1380" dirty="0"/>
-          </a:p>
-          <a:p>
-            <a:r>
-              <a:rPr lang="en-US" sz="1380" dirty="0">
+              <a:t>Staff should define the task narrowly before selecting or testing.</a:t>
+            </a:r>
+            <a:endParaRPr lang="en-US" sz="1220" dirty="0"/>
+          </a:p>
+          <a:p>
+            <a:pPr indent="0" marL="0">
+              <a:buNone/>
+            </a:pPr>
+            <a:r>
+              <a:rPr lang="en-US" sz="1220" dirty="0">
                 <a:solidFill>
                   <a:srgbClr val="17364A"/>
                 </a:solidFill>
@@ -4326,7 +4362,7 @@
               </a:rPr>
               <a:t>Evaluation should use representative source text.</a:t>
             </a:r>
-            <a:endParaRPr lang="en-US" sz="1380" dirty="0"/>
+            <a:endParaRPr lang="en-US" sz="1220" dirty="0"/>
           </a:p>
         </p:txBody>
       </p:sp>
@@ -4404,17 +4440,17 @@
         </p:nvSpPr>
         <p:spPr>
           <a:xfrm>
-            <a:off x="7799832" y="5001768"/>
-            <a:ext cx="3145536" cy="502920"/>
-          </a:xfrm>
-          <a:prstGeom prst="rect">
-            <a:avLst/>
-          </a:prstGeom>
-          <a:noFill/>
-          <a:ln/>
-        </p:spPr>
-        <p:txBody>
-          <a:bodyPr wrap="square" lIns="0" tIns="0" rIns="0" bIns="0" rtlCol="0" anchor="t">
+            <a:off x="7799832" y="4974336"/>
+            <a:ext cx="3145536" cy="576072"/>
+          </a:xfrm>
+          <a:prstGeom prst="rect">
+            <a:avLst/>
+          </a:prstGeom>
+          <a:noFill/>
+          <a:ln/>
+        </p:spPr>
+        <p:txBody>
+          <a:bodyPr wrap="square" lIns="254" tIns="254" rIns="254" bIns="254" rtlCol="0" anchor="t">
             <a:normAutofit/>
           </a:bodyPr>
           <a:lstStyle/>
@@ -4423,7 +4459,7 @@
               <a:buNone/>
             </a:pPr>
             <a:r>
-              <a:rPr lang="en-US" sz="1550" dirty="0">
+              <a:rPr lang="en-US" sz="1320" dirty="0">
                 <a:solidFill>
                   <a:srgbClr val="17364A"/>
                 </a:solidFill>
@@ -4431,9 +4467,9 @@
                 <a:ea typeface="Aptos" pitchFamily="34" charset="-122"/>
                 <a:cs typeface="Aptos" pitchFamily="34" charset="-120"/>
               </a:rPr>
-              <a:t>Use the concept to plan transparent communication, gather stakeholder input, protect trust, and make sure affected communities are considered early.</a:t>
-            </a:r>
-            <a:endParaRPr lang="en-US" sz="1550" dirty="0"/>
+              <a:t>Use the concept to plan transparent communication, gather stakeholder input, protect trust, and make sure affected.</a:t>
+            </a:r>
+            <a:endParaRPr lang="en-US" sz="1320" dirty="0"/>
           </a:p>
         </p:txBody>
       </p:sp>
@@ -4734,49 +4770,58 @@
           <a:ln/>
         </p:spPr>
         <p:txBody>
-          <a:bodyPr wrap="square" lIns="635" tIns="635" rIns="635" bIns="635" rtlCol="0" anchor="t">
+          <a:bodyPr wrap="square" lIns="1016" tIns="1016" rIns="1016" bIns="1016" rtlCol="0" anchor="t">
             <a:normAutofit/>
           </a:bodyPr>
           <a:lstStyle/>
           <a:p>
+            <a:pPr indent="0" marL="0">
+              <a:buNone/>
+            </a:pPr>
             <a:r>
               <a:rPr lang="en-US" sz="2100" dirty="0">
                 <a:solidFill>
-                  <a:srgbClr val="17364A"/>
-                </a:solidFill>
-                <a:latin typeface="Aptos" pitchFamily="34" charset="0"/>
-                <a:ea typeface="Aptos" pitchFamily="34" charset="-122"/>
-                <a:cs typeface="Aptos" pitchFamily="34" charset="-120"/>
-              </a:rPr>
-              <a:t>Unsupported summaries.</a:t>
+                  <a:srgbClr val="003A63"/>
+                </a:solidFill>
+                <a:latin typeface="Aptos" pitchFamily="34" charset="0"/>
+                <a:ea typeface="Aptos" pitchFamily="34" charset="-122"/>
+                <a:cs typeface="Aptos" pitchFamily="34" charset="-120"/>
+              </a:rPr>
+              <a:t>• Unsupported summaries.</a:t>
             </a:r>
             <a:endParaRPr lang="en-US" sz="2100" dirty="0"/>
           </a:p>
           <a:p>
+            <a:pPr indent="0" marL="0">
+              <a:buNone/>
+            </a:pPr>
             <a:r>
               <a:rPr lang="en-US" sz="2100" dirty="0">
                 <a:solidFill>
-                  <a:srgbClr val="17364A"/>
-                </a:solidFill>
-                <a:latin typeface="Aptos" pitchFamily="34" charset="0"/>
-                <a:ea typeface="Aptos" pitchFamily="34" charset="-122"/>
-                <a:cs typeface="Aptos" pitchFamily="34" charset="-120"/>
-              </a:rPr>
-              <a:t>NLP tools may omit, distort, or invent information.</a:t>
+                  <a:srgbClr val="003A63"/>
+                </a:solidFill>
+                <a:latin typeface="Aptos" pitchFamily="34" charset="0"/>
+                <a:ea typeface="Aptos" pitchFamily="34" charset="-122"/>
+                <a:cs typeface="Aptos" pitchFamily="34" charset="-120"/>
+              </a:rPr>
+              <a:t>• NLP tools may omit, distort, or invent information.</a:t>
             </a:r>
             <a:endParaRPr lang="en-US" sz="2100" dirty="0"/>
           </a:p>
           <a:p>
+            <a:pPr indent="0" marL="0">
+              <a:buNone/>
+            </a:pPr>
             <a:r>
               <a:rPr lang="en-US" sz="2100" dirty="0">
                 <a:solidFill>
-                  <a:srgbClr val="17364A"/>
-                </a:solidFill>
-                <a:latin typeface="Aptos" pitchFamily="34" charset="0"/>
-                <a:ea typeface="Aptos" pitchFamily="34" charset="-122"/>
-                <a:cs typeface="Aptos" pitchFamily="34" charset="-120"/>
-              </a:rPr>
-              <a:t>Guardrails include source review, citations, factuality checks, and human approval.</a:t>
+                  <a:srgbClr val="003A63"/>
+                </a:solidFill>
+                <a:latin typeface="Aptos" pitchFamily="34" charset="0"/>
+                <a:ea typeface="Aptos" pitchFamily="34" charset="-122"/>
+                <a:cs typeface="Aptos" pitchFamily="34" charset="-120"/>
+              </a:rPr>
+              <a:t>• Guardrails include source review, citations, factuality checks, and human approval.</a:t>
             </a:r>
             <a:endParaRPr lang="en-US" sz="2100" dirty="0"/>
           </a:p>
@@ -4856,17 +4901,17 @@
         </p:nvSpPr>
         <p:spPr>
           <a:xfrm>
-            <a:off x="7799832" y="1828800"/>
-            <a:ext cx="3145536" cy="685800"/>
-          </a:xfrm>
-          <a:prstGeom prst="rect">
-            <a:avLst/>
-          </a:prstGeom>
-          <a:noFill/>
-          <a:ln/>
-        </p:spPr>
-        <p:txBody>
-          <a:bodyPr wrap="square" lIns="0" tIns="0" rIns="0" bIns="0" rtlCol="0" anchor="t">
+            <a:off x="7799832" y="1801368"/>
+            <a:ext cx="3145536" cy="758952"/>
+          </a:xfrm>
+          <a:prstGeom prst="rect">
+            <a:avLst/>
+          </a:prstGeom>
+          <a:noFill/>
+          <a:ln/>
+        </p:spPr>
+        <p:txBody>
+          <a:bodyPr wrap="square" lIns="254" tIns="254" rIns="254" bIns="254" rtlCol="0" anchor="t">
             <a:normAutofit/>
           </a:bodyPr>
           <a:lstStyle/>
@@ -4875,7 +4920,7 @@
               <a:buNone/>
             </a:pPr>
             <a:r>
-              <a:rPr lang="en-US" sz="1550" dirty="0">
+              <a:rPr lang="en-US" sz="1320" dirty="0">
                 <a:solidFill>
                   <a:srgbClr val="17364A"/>
                 </a:solidFill>
@@ -4885,7 +4930,7 @@
               </a:rPr>
               <a:t>Unsupported summaries.</a:t>
             </a:r>
-            <a:endParaRPr lang="en-US" sz="1550" dirty="0"/>
+            <a:endParaRPr lang="en-US" sz="1320" dirty="0"/>
           </a:p>
         </p:txBody>
       </p:sp>
@@ -4973,13 +5018,16 @@
           <a:ln/>
         </p:spPr>
         <p:txBody>
-          <a:bodyPr wrap="square" lIns="254" tIns="254" rIns="254" bIns="254" rtlCol="0" anchor="t">
+          <a:bodyPr wrap="square" lIns="508" tIns="508" rIns="508" bIns="508" rtlCol="0" anchor="t">
             <a:normAutofit/>
           </a:bodyPr>
           <a:lstStyle/>
           <a:p>
-            <a:r>
-              <a:rPr lang="en-US" sz="1380" dirty="0">
+            <a:pPr indent="0" marL="0">
+              <a:buNone/>
+            </a:pPr>
+            <a:r>
+              <a:rPr lang="en-US" sz="1220" dirty="0">
                 <a:solidFill>
                   <a:srgbClr val="17364A"/>
                 </a:solidFill>
@@ -4989,11 +5037,14 @@
               </a:rPr>
               <a:t>Language and accessibility gaps.</a:t>
             </a:r>
-            <a:endParaRPr lang="en-US" sz="1380" dirty="0"/>
-          </a:p>
-          <a:p>
-            <a:r>
-              <a:rPr lang="en-US" sz="1380" dirty="0">
+            <a:endParaRPr lang="en-US" sz="1220" dirty="0"/>
+          </a:p>
+          <a:p>
+            <a:pPr indent="0" marL="0">
+              <a:buNone/>
+            </a:pPr>
+            <a:r>
+              <a:rPr lang="en-US" sz="1220" dirty="0">
                 <a:solidFill>
                   <a:srgbClr val="17364A"/>
                 </a:solidFill>
@@ -5001,13 +5052,16 @@
                 <a:ea typeface="Aptos" pitchFamily="34" charset="-122"/>
                 <a:cs typeface="Aptos" pitchFamily="34" charset="-120"/>
               </a:rPr>
-              <a:t>Models may perform differently across languages, dialects, literacy levels, or.</a:t>
-            </a:r>
-            <a:endParaRPr lang="en-US" sz="1380" dirty="0"/>
-          </a:p>
-          <a:p>
-            <a:r>
-              <a:rPr lang="en-US" sz="1380" dirty="0">
+              <a:t>Models may perform differently across languages, dialects,.</a:t>
+            </a:r>
+            <a:endParaRPr lang="en-US" sz="1220" dirty="0"/>
+          </a:p>
+          <a:p>
+            <a:pPr indent="0" marL="0">
+              <a:buNone/>
+            </a:pPr>
+            <a:r>
+              <a:rPr lang="en-US" sz="1220" dirty="0">
                 <a:solidFill>
                   <a:srgbClr val="17364A"/>
                 </a:solidFill>
@@ -5015,9 +5069,9 @@
                 <a:ea typeface="Aptos" pitchFamily="34" charset="-122"/>
                 <a:cs typeface="Aptos" pitchFamily="34" charset="-120"/>
               </a:rPr>
-              <a:t>Guardrails include multilingual evaluation, accessibility review, and community context.</a:t>
-            </a:r>
-            <a:endParaRPr lang="en-US" sz="1380" dirty="0"/>
+              <a:t>Guardrails include multilingual evaluation, accessibility review,.</a:t>
+            </a:r>
+            <a:endParaRPr lang="en-US" sz="1220" dirty="0"/>
           </a:p>
         </p:txBody>
       </p:sp>
@@ -5095,17 +5149,17 @@
         </p:nvSpPr>
         <p:spPr>
           <a:xfrm>
-            <a:off x="7799832" y="5001768"/>
-            <a:ext cx="3145536" cy="502920"/>
-          </a:xfrm>
-          <a:prstGeom prst="rect">
-            <a:avLst/>
-          </a:prstGeom>
-          <a:noFill/>
-          <a:ln/>
-        </p:spPr>
-        <p:txBody>
-          <a:bodyPr wrap="square" lIns="0" tIns="0" rIns="0" bIns="0" rtlCol="0" anchor="t">
+            <a:off x="7799832" y="4974336"/>
+            <a:ext cx="3145536" cy="576072"/>
+          </a:xfrm>
+          <a:prstGeom prst="rect">
+            <a:avLst/>
+          </a:prstGeom>
+          <a:noFill/>
+          <a:ln/>
+        </p:spPr>
+        <p:txBody>
+          <a:bodyPr wrap="square" lIns="254" tIns="254" rIns="254" bIns="254" rtlCol="0" anchor="t">
             <a:normAutofit/>
           </a:bodyPr>
           <a:lstStyle/>
@@ -5114,7 +5168,7 @@
               <a:buNone/>
             </a:pPr>
             <a:r>
-              <a:rPr lang="en-US" sz="1550" dirty="0">
+              <a:rPr lang="en-US" sz="1320" dirty="0">
                 <a:solidFill>
                   <a:srgbClr val="17364A"/>
                 </a:solidFill>
@@ -5122,9 +5176,9 @@
                 <a:ea typeface="Aptos" pitchFamily="34" charset="-122"/>
                 <a:cs typeface="Aptos" pitchFamily="34" charset="-120"/>
               </a:rPr>
-              <a:t>Identify what could go wrong, who could be affected, what safeguards are needed, and what evidence should be reviewed before use expands.</a:t>
-            </a:r>
-            <a:endParaRPr lang="en-US" sz="1550" dirty="0"/>
+              <a:t>Identify what could go wrong, who could be affected, what safeguards are needed, and what evidence should be reviewed.</a:t>
+            </a:r>
+            <a:endParaRPr lang="en-US" sz="1320" dirty="0"/>
           </a:p>
         </p:txBody>
       </p:sp>
@@ -5425,49 +5479,58 @@
           <a:ln/>
         </p:spPr>
         <p:txBody>
-          <a:bodyPr wrap="square" lIns="635" tIns="635" rIns="635" bIns="635" rtlCol="0" anchor="t">
+          <a:bodyPr wrap="square" lIns="1016" tIns="1016" rIns="1016" bIns="1016" rtlCol="0" anchor="t">
             <a:normAutofit/>
           </a:bodyPr>
           <a:lstStyle/>
           <a:p>
+            <a:pPr indent="0" marL="0">
+              <a:buNone/>
+            </a:pPr>
             <a:r>
               <a:rPr lang="en-US" sz="2100" dirty="0">
                 <a:solidFill>
-                  <a:srgbClr val="17364A"/>
-                </a:solidFill>
-                <a:latin typeface="Aptos" pitchFamily="34" charset="0"/>
-                <a:ea typeface="Aptos" pitchFamily="34" charset="-122"/>
-                <a:cs typeface="Aptos" pitchFamily="34" charset="-120"/>
-              </a:rPr>
-              <a:t>Misclassification.</a:t>
+                  <a:srgbClr val="003A63"/>
+                </a:solidFill>
+                <a:latin typeface="Aptos" pitchFamily="34" charset="0"/>
+                <a:ea typeface="Aptos" pitchFamily="34" charset="-122"/>
+                <a:cs typeface="Aptos" pitchFamily="34" charset="-120"/>
+              </a:rPr>
+              <a:t>• Misclassification.</a:t>
             </a:r>
             <a:endParaRPr lang="en-US" sz="2100" dirty="0"/>
           </a:p>
           <a:p>
+            <a:pPr indent="0" marL="0">
+              <a:buNone/>
+            </a:pPr>
             <a:r>
               <a:rPr lang="en-US" sz="2100" dirty="0">
                 <a:solidFill>
-                  <a:srgbClr val="17364A"/>
-                </a:solidFill>
-                <a:latin typeface="Aptos" pitchFamily="34" charset="0"/>
-                <a:ea typeface="Aptos" pitchFamily="34" charset="-122"/>
-                <a:cs typeface="Aptos" pitchFamily="34" charset="-120"/>
-              </a:rPr>
-              <a:t>Incorrect labels can affect routing or priority.</a:t>
+                  <a:srgbClr val="003A63"/>
+                </a:solidFill>
+                <a:latin typeface="Aptos" pitchFamily="34" charset="0"/>
+                <a:ea typeface="Aptos" pitchFamily="34" charset="-122"/>
+                <a:cs typeface="Aptos" pitchFamily="34" charset="-120"/>
+              </a:rPr>
+              <a:t>• Incorrect labels can affect routing or priority.</a:t>
             </a:r>
             <a:endParaRPr lang="en-US" sz="2100" dirty="0"/>
           </a:p>
           <a:p>
+            <a:pPr indent="0" marL="0">
+              <a:buNone/>
+            </a:pPr>
             <a:r>
               <a:rPr lang="en-US" sz="2100" dirty="0">
                 <a:solidFill>
-                  <a:srgbClr val="17364A"/>
-                </a:solidFill>
-                <a:latin typeface="Aptos" pitchFamily="34" charset="0"/>
-                <a:ea typeface="Aptos" pitchFamily="34" charset="-122"/>
-                <a:cs typeface="Aptos" pitchFamily="34" charset="-120"/>
-              </a:rPr>
-              <a:t>Guardrails include validation, confidence thresholds, review queues, and monitoring of overrides.</a:t>
+                  <a:srgbClr val="003A63"/>
+                </a:solidFill>
+                <a:latin typeface="Aptos" pitchFamily="34" charset="0"/>
+                <a:ea typeface="Aptos" pitchFamily="34" charset="-122"/>
+                <a:cs typeface="Aptos" pitchFamily="34" charset="-120"/>
+              </a:rPr>
+              <a:t>• Guardrails include validation, confidence thresholds, review queues, and monitoring of.</a:t>
             </a:r>
             <a:endParaRPr lang="en-US" sz="2100" dirty="0"/>
           </a:p>
@@ -5547,17 +5610,17 @@
         </p:nvSpPr>
         <p:spPr>
           <a:xfrm>
-            <a:off x="7799832" y="1828800"/>
-            <a:ext cx="3145536" cy="685800"/>
-          </a:xfrm>
-          <a:prstGeom prst="rect">
-            <a:avLst/>
-          </a:prstGeom>
-          <a:noFill/>
-          <a:ln/>
-        </p:spPr>
-        <p:txBody>
-          <a:bodyPr wrap="square" lIns="0" tIns="0" rIns="0" bIns="0" rtlCol="0" anchor="t">
+            <a:off x="7799832" y="1801368"/>
+            <a:ext cx="3145536" cy="758952"/>
+          </a:xfrm>
+          <a:prstGeom prst="rect">
+            <a:avLst/>
+          </a:prstGeom>
+          <a:noFill/>
+          <a:ln/>
+        </p:spPr>
+        <p:txBody>
+          <a:bodyPr wrap="square" lIns="254" tIns="254" rIns="254" bIns="254" rtlCol="0" anchor="t">
             <a:normAutofit/>
           </a:bodyPr>
           <a:lstStyle/>
@@ -5566,7 +5629,7 @@
               <a:buNone/>
             </a:pPr>
             <a:r>
-              <a:rPr lang="en-US" sz="1550" dirty="0">
+              <a:rPr lang="en-US" sz="1320" dirty="0">
                 <a:solidFill>
                   <a:srgbClr val="17364A"/>
                 </a:solidFill>
@@ -5576,7 +5639,7 @@
               </a:rPr>
               <a:t>Misclassification.</a:t>
             </a:r>
-            <a:endParaRPr lang="en-US" sz="1550" dirty="0"/>
+            <a:endParaRPr lang="en-US" sz="1320" dirty="0"/>
           </a:p>
         </p:txBody>
       </p:sp>
@@ -5664,13 +5727,16 @@
           <a:ln/>
         </p:spPr>
         <p:txBody>
-          <a:bodyPr wrap="square" lIns="254" tIns="254" rIns="254" bIns="254" rtlCol="0" anchor="t">
+          <a:bodyPr wrap="square" lIns="508" tIns="508" rIns="508" bIns="508" rtlCol="0" anchor="t">
             <a:normAutofit/>
           </a:bodyPr>
           <a:lstStyle/>
           <a:p>
-            <a:r>
-              <a:rPr lang="en-US" sz="1380" dirty="0">
+            <a:pPr indent="0" marL="0">
+              <a:buNone/>
+            </a:pPr>
+            <a:r>
+              <a:rPr lang="en-US" sz="1220" dirty="0">
                 <a:solidFill>
                   <a:srgbClr val="17364A"/>
                 </a:solidFill>
@@ -5680,11 +5746,14 @@
               </a:rPr>
               <a:t>Misclassification.</a:t>
             </a:r>
-            <a:endParaRPr lang="en-US" sz="1380" dirty="0"/>
-          </a:p>
-          <a:p>
-            <a:r>
-              <a:rPr lang="en-US" sz="1380" dirty="0">
+            <a:endParaRPr lang="en-US" sz="1220" dirty="0"/>
+          </a:p>
+          <a:p>
+            <a:pPr indent="0" marL="0">
+              <a:buNone/>
+            </a:pPr>
+            <a:r>
+              <a:rPr lang="en-US" sz="1220" dirty="0">
                 <a:solidFill>
                   <a:srgbClr val="17364A"/>
                 </a:solidFill>
@@ -5694,11 +5763,14 @@
               </a:rPr>
               <a:t>Incorrect labels can affect routing or priority.</a:t>
             </a:r>
-            <a:endParaRPr lang="en-US" sz="1380" dirty="0"/>
-          </a:p>
-          <a:p>
-            <a:r>
-              <a:rPr lang="en-US" sz="1380" dirty="0">
+            <a:endParaRPr lang="en-US" sz="1220" dirty="0"/>
+          </a:p>
+          <a:p>
+            <a:pPr indent="0" marL="0">
+              <a:buNone/>
+            </a:pPr>
+            <a:r>
+              <a:rPr lang="en-US" sz="1220" dirty="0">
                 <a:solidFill>
                   <a:srgbClr val="17364A"/>
                 </a:solidFill>
@@ -5706,9 +5778,9 @@
                 <a:ea typeface="Aptos" pitchFamily="34" charset="-122"/>
                 <a:cs typeface="Aptos" pitchFamily="34" charset="-120"/>
               </a:rPr>
-              <a:t>Guardrails include validation, confidence thresholds, review queues, and monitoring of.</a:t>
-            </a:r>
-            <a:endParaRPr lang="en-US" sz="1380" dirty="0"/>
+              <a:t>Guardrails include validation, confidence thresholds, review.</a:t>
+            </a:r>
+            <a:endParaRPr lang="en-US" sz="1220" dirty="0"/>
           </a:p>
         </p:txBody>
       </p:sp>
@@ -5786,17 +5858,17 @@
         </p:nvSpPr>
         <p:spPr>
           <a:xfrm>
-            <a:off x="7799832" y="5001768"/>
-            <a:ext cx="3145536" cy="502920"/>
-          </a:xfrm>
-          <a:prstGeom prst="rect">
-            <a:avLst/>
-          </a:prstGeom>
-          <a:noFill/>
-          <a:ln/>
-        </p:spPr>
-        <p:txBody>
-          <a:bodyPr wrap="square" lIns="0" tIns="0" rIns="0" bIns="0" rtlCol="0" anchor="t">
+            <a:off x="7799832" y="4974336"/>
+            <a:ext cx="3145536" cy="576072"/>
+          </a:xfrm>
+          <a:prstGeom prst="rect">
+            <a:avLst/>
+          </a:prstGeom>
+          <a:noFill/>
+          <a:ln/>
+        </p:spPr>
+        <p:txBody>
+          <a:bodyPr wrap="square" lIns="254" tIns="254" rIns="254" bIns="254" rtlCol="0" anchor="t">
             <a:normAutofit/>
           </a:bodyPr>
           <a:lstStyle/>
@@ -5805,7 +5877,7 @@
               <a:buNone/>
             </a:pPr>
             <a:r>
-              <a:rPr lang="en-US" sz="1550" dirty="0">
+              <a:rPr lang="en-US" sz="1320" dirty="0">
                 <a:solidFill>
                   <a:srgbClr val="17364A"/>
                 </a:solidFill>
@@ -5813,9 +5885,9 @@
                 <a:ea typeface="Aptos" pitchFamily="34" charset="-122"/>
                 <a:cs typeface="Aptos" pitchFamily="34" charset="-120"/>
               </a:rPr>
-              <a:t>Identify what could go wrong, who could be affected, what safeguards are needed, and what evidence should be reviewed before use expands.</a:t>
-            </a:r>
-            <a:endParaRPr lang="en-US" sz="1550" dirty="0"/>
+              <a:t>Identify what could go wrong, who could be affected, what safeguards are needed, and what evidence should be reviewed.</a:t>
+            </a:r>
+            <a:endParaRPr lang="en-US" sz="1320" dirty="0"/>
           </a:p>
         </p:txBody>
       </p:sp>
@@ -6116,49 +6188,58 @@
           <a:ln/>
         </p:spPr>
         <p:txBody>
-          <a:bodyPr wrap="square" lIns="635" tIns="635" rIns="635" bIns="635" rtlCol="0" anchor="t">
+          <a:bodyPr wrap="square" lIns="1016" tIns="1016" rIns="1016" bIns="1016" rtlCol="0" anchor="t">
             <a:normAutofit/>
           </a:bodyPr>
           <a:lstStyle/>
           <a:p>
+            <a:pPr indent="0" marL="0">
+              <a:buNone/>
+            </a:pPr>
             <a:r>
               <a:rPr lang="en-US" sz="2100" dirty="0">
                 <a:solidFill>
-                  <a:srgbClr val="17364A"/>
-                </a:solidFill>
-                <a:latin typeface="Aptos" pitchFamily="34" charset="0"/>
-                <a:ea typeface="Aptos" pitchFamily="34" charset="-122"/>
-                <a:cs typeface="Aptos" pitchFamily="34" charset="-120"/>
-              </a:rPr>
-              <a:t>Generative AI is often used for summarization, drafting, and question answering, but outputs must be.</a:t>
+                  <a:srgbClr val="003A63"/>
+                </a:solidFill>
+                <a:latin typeface="Aptos" pitchFamily="34" charset="0"/>
+                <a:ea typeface="Aptos" pitchFamily="34" charset="-122"/>
+                <a:cs typeface="Aptos" pitchFamily="34" charset="-120"/>
+              </a:rPr>
+              <a:t>• Generative AI is often used for summarization, drafting, and question answering, but outputs.</a:t>
             </a:r>
             <a:endParaRPr lang="en-US" sz="2100" dirty="0"/>
           </a:p>
           <a:p>
+            <a:pPr indent="0" marL="0">
+              <a:buNone/>
+            </a:pPr>
             <a:r>
               <a:rPr lang="en-US" sz="2100" dirty="0">
                 <a:solidFill>
-                  <a:srgbClr val="17364A"/>
-                </a:solidFill>
-                <a:latin typeface="Aptos" pitchFamily="34" charset="0"/>
-                <a:ea typeface="Aptos" pitchFamily="34" charset="-122"/>
-                <a:cs typeface="Aptos" pitchFamily="34" charset="-120"/>
-              </a:rPr>
-              <a:t>Predictive analytics may use NLP-derived features, so extraction quality affects model performance.</a:t>
+                  <a:srgbClr val="003A63"/>
+                </a:solidFill>
+                <a:latin typeface="Aptos" pitchFamily="34" charset="0"/>
+                <a:ea typeface="Aptos" pitchFamily="34" charset="-122"/>
+                <a:cs typeface="Aptos" pitchFamily="34" charset="-120"/>
+              </a:rPr>
+              <a:t>• Predictive analytics may use NLP-derived features, so extraction quality affects model.</a:t>
             </a:r>
             <a:endParaRPr lang="en-US" sz="2100" dirty="0"/>
           </a:p>
           <a:p>
+            <a:pPr indent="0" marL="0">
+              <a:buNone/>
+            </a:pPr>
             <a:r>
               <a:rPr lang="en-US" sz="2100" dirty="0">
                 <a:solidFill>
-                  <a:srgbClr val="17364A"/>
-                </a:solidFill>
-                <a:latin typeface="Aptos" pitchFamily="34" charset="0"/>
-                <a:ea typeface="Aptos" pitchFamily="34" charset="-122"/>
-                <a:cs typeface="Aptos" pitchFamily="34" charset="-120"/>
-              </a:rPr>
-              <a:t>RAG systems use NLP to retrieve and summarize documents, which requires document governance and source.</a:t>
+                  <a:srgbClr val="003A63"/>
+                </a:solidFill>
+                <a:latin typeface="Aptos" pitchFamily="34" charset="0"/>
+                <a:ea typeface="Aptos" pitchFamily="34" charset="-122"/>
+                <a:cs typeface="Aptos" pitchFamily="34" charset="-120"/>
+              </a:rPr>
+              <a:t>• RAG systems use NLP to retrieve and summarize documents, which requires document governance.</a:t>
             </a:r>
             <a:endParaRPr lang="en-US" sz="2100" dirty="0"/>
           </a:p>
@@ -6238,17 +6319,17 @@
         </p:nvSpPr>
         <p:spPr>
           <a:xfrm>
-            <a:off x="7799832" y="1828800"/>
-            <a:ext cx="3145536" cy="685800"/>
-          </a:xfrm>
-          <a:prstGeom prst="rect">
-            <a:avLst/>
-          </a:prstGeom>
-          <a:noFill/>
-          <a:ln/>
-        </p:spPr>
-        <p:txBody>
-          <a:bodyPr wrap="square" lIns="0" tIns="0" rIns="0" bIns="0" rtlCol="0" anchor="t">
+            <a:off x="7799832" y="1801368"/>
+            <a:ext cx="3145536" cy="758952"/>
+          </a:xfrm>
+          <a:prstGeom prst="rect">
+            <a:avLst/>
+          </a:prstGeom>
+          <a:noFill/>
+          <a:ln/>
+        </p:spPr>
+        <p:txBody>
+          <a:bodyPr wrap="square" lIns="254" tIns="254" rIns="254" bIns="254" rtlCol="0" anchor="t">
             <a:normAutofit/>
           </a:bodyPr>
           <a:lstStyle/>
@@ -6257,7 +6338,7 @@
               <a:buNone/>
             </a:pPr>
             <a:r>
-              <a:rPr lang="en-US" sz="1550" dirty="0">
+              <a:rPr lang="en-US" sz="1320" dirty="0">
                 <a:solidFill>
                   <a:srgbClr val="17364A"/>
                 </a:solidFill>
@@ -6267,7 +6348,7 @@
               </a:rPr>
               <a:t>Generative AI is often used for summarization, drafting, and question answering, but outputs must be.</a:t>
             </a:r>
-            <a:endParaRPr lang="en-US" sz="1550" dirty="0"/>
+            <a:endParaRPr lang="en-US" sz="1320" dirty="0"/>
           </a:p>
         </p:txBody>
       </p:sp>
@@ -6355,13 +6436,16 @@
           <a:ln/>
         </p:spPr>
         <p:txBody>
-          <a:bodyPr wrap="square" lIns="254" tIns="254" rIns="254" bIns="254" rtlCol="0" anchor="t">
+          <a:bodyPr wrap="square" lIns="508" tIns="508" rIns="508" bIns="508" rtlCol="0" anchor="t">
             <a:normAutofit/>
           </a:bodyPr>
           <a:lstStyle/>
           <a:p>
-            <a:r>
-              <a:rPr lang="en-US" sz="1380" dirty="0">
+            <a:pPr indent="0" marL="0">
+              <a:buNone/>
+            </a:pPr>
+            <a:r>
+              <a:rPr lang="en-US" sz="1220" dirty="0">
                 <a:solidFill>
                   <a:srgbClr val="17364A"/>
                 </a:solidFill>
@@ -6369,13 +6453,16 @@
                 <a:ea typeface="Aptos" pitchFamily="34" charset="-122"/>
                 <a:cs typeface="Aptos" pitchFamily="34" charset="-120"/>
               </a:rPr>
-              <a:t>Generative AI is often used for summarization, drafting, and question answering, but.</a:t>
-            </a:r>
-            <a:endParaRPr lang="en-US" sz="1380" dirty="0"/>
-          </a:p>
-          <a:p>
-            <a:r>
-              <a:rPr lang="en-US" sz="1380" dirty="0">
+              <a:t>Generative AI is often used for summarization, drafting, and.</a:t>
+            </a:r>
+            <a:endParaRPr lang="en-US" sz="1220" dirty="0"/>
+          </a:p>
+          <a:p>
+            <a:pPr indent="0" marL="0">
+              <a:buNone/>
+            </a:pPr>
+            <a:r>
+              <a:rPr lang="en-US" sz="1220" dirty="0">
                 <a:solidFill>
                   <a:srgbClr val="17364A"/>
                 </a:solidFill>
@@ -6383,13 +6470,16 @@
                 <a:ea typeface="Aptos" pitchFamily="34" charset="-122"/>
                 <a:cs typeface="Aptos" pitchFamily="34" charset="-120"/>
               </a:rPr>
-              <a:t>RAG systems use NLP to retrieve and summarize documents, which requires document.</a:t>
-            </a:r>
-            <a:endParaRPr lang="en-US" sz="1380" dirty="0"/>
-          </a:p>
-          <a:p>
-            <a:r>
-              <a:rPr lang="en-US" sz="1380" dirty="0">
+              <a:t>RAG systems use NLP to retrieve and summarize documents, which.</a:t>
+            </a:r>
+            <a:endParaRPr lang="en-US" sz="1220" dirty="0"/>
+          </a:p>
+          <a:p>
+            <a:pPr indent="0" marL="0">
+              <a:buNone/>
+            </a:pPr>
+            <a:r>
+              <a:rPr lang="en-US" sz="1220" dirty="0">
                 <a:solidFill>
                   <a:srgbClr val="17364A"/>
                 </a:solidFill>
@@ -6397,9 +6487,9 @@
                 <a:ea typeface="Aptos" pitchFamily="34" charset="-122"/>
                 <a:cs typeface="Aptos" pitchFamily="34" charset="-120"/>
               </a:rPr>
-              <a:t>Agentic AI using NLP to trigger actions should require clear thresholds and human approval.</a:t>
-            </a:r>
-            <a:endParaRPr lang="en-US" sz="1380" dirty="0"/>
+              <a:t>Agentic AI using NLP to trigger actions should require clear.</a:t>
+            </a:r>
+            <a:endParaRPr lang="en-US" sz="1220" dirty="0"/>
           </a:p>
         </p:txBody>
       </p:sp>
@@ -6477,17 +6567,17 @@
         </p:nvSpPr>
         <p:spPr>
           <a:xfrm>
-            <a:off x="7799832" y="5001768"/>
-            <a:ext cx="3145536" cy="502920"/>
-          </a:xfrm>
-          <a:prstGeom prst="rect">
-            <a:avLst/>
-          </a:prstGeom>
-          <a:noFill/>
-          <a:ln/>
-        </p:spPr>
-        <p:txBody>
-          <a:bodyPr wrap="square" lIns="0" tIns="0" rIns="0" bIns="0" rtlCol="0" anchor="t">
+            <a:off x="7799832" y="4974336"/>
+            <a:ext cx="3145536" cy="576072"/>
+          </a:xfrm>
+          <a:prstGeom prst="rect">
+            <a:avLst/>
+          </a:prstGeom>
+          <a:noFill/>
+          <a:ln/>
+        </p:spPr>
+        <p:txBody>
+          <a:bodyPr wrap="square" lIns="254" tIns="254" rIns="254" bIns="254" rtlCol="0" anchor="t">
             <a:normAutofit/>
           </a:bodyPr>
           <a:lstStyle/>
@@ -6496,7 +6586,7 @@
               <a:buNone/>
             </a:pPr>
             <a:r>
-              <a:rPr lang="en-US" sz="1550" dirty="0">
+              <a:rPr lang="en-US" sz="1320" dirty="0">
                 <a:solidFill>
                   <a:srgbClr val="17364A"/>
                 </a:solidFill>
@@ -6504,9 +6594,9 @@
                 <a:ea typeface="Aptos" pitchFamily="34" charset="-122"/>
                 <a:cs typeface="Aptos" pitchFamily="34" charset="-120"/>
               </a:rPr>
-              <a:t>Use the concept to clarify workflow changes, dependencies, staffing, procurement requirements, training needs, and implementation checkpoints.</a:t>
-            </a:r>
-            <a:endParaRPr lang="en-US" sz="1550" dirty="0"/>
+              <a:t>Use the concept to clarify workflow changes, dependencies, staffing, procurement requirements, training needs, and.</a:t>
+            </a:r>
+            <a:endParaRPr lang="en-US" sz="1320" dirty="0"/>
           </a:p>
         </p:txBody>
       </p:sp>
@@ -6807,49 +6897,58 @@
           <a:ln/>
         </p:spPr>
         <p:txBody>
-          <a:bodyPr wrap="square" lIns="635" tIns="635" rIns="635" bIns="635" rtlCol="0" anchor="t">
+          <a:bodyPr wrap="square" lIns="1016" tIns="1016" rIns="1016" bIns="1016" rtlCol="0" anchor="t">
             <a:normAutofit/>
           </a:bodyPr>
           <a:lstStyle/>
           <a:p>
+            <a:pPr indent="0" marL="0">
+              <a:buNone/>
+            </a:pPr>
             <a:r>
               <a:rPr lang="en-US" sz="2100" dirty="0">
                 <a:solidFill>
-                  <a:srgbClr val="17364A"/>
-                </a:solidFill>
-                <a:latin typeface="Aptos" pitchFamily="34" charset="0"/>
-                <a:ea typeface="Aptos" pitchFamily="34" charset="-122"/>
-                <a:cs typeface="Aptos" pitchFamily="34" charset="-120"/>
-              </a:rPr>
-              <a:t>Which public health workflows involve large volumes of free text?</a:t>
+                  <a:srgbClr val="003A63"/>
+                </a:solidFill>
+                <a:latin typeface="Aptos" pitchFamily="34" charset="0"/>
+                <a:ea typeface="Aptos" pitchFamily="34" charset="-122"/>
+                <a:cs typeface="Aptos" pitchFamily="34" charset="-120"/>
+              </a:rPr>
+              <a:t>• Which public health workflows involve large volumes of free text?</a:t>
             </a:r>
             <a:endParaRPr lang="en-US" sz="2100" dirty="0"/>
           </a:p>
           <a:p>
+            <a:pPr indent="0" marL="0">
+              <a:buNone/>
+            </a:pPr>
             <a:r>
               <a:rPr lang="en-US" sz="2100" dirty="0">
                 <a:solidFill>
-                  <a:srgbClr val="17364A"/>
-                </a:solidFill>
-                <a:latin typeface="Aptos" pitchFamily="34" charset="0"/>
-                <a:ea typeface="Aptos" pitchFamily="34" charset="-122"/>
-                <a:cs typeface="Aptos" pitchFamily="34" charset="-120"/>
-              </a:rPr>
-              <a:t>What task would NLP support: extraction, classification, summarization, translation, or topic detection?</a:t>
+                  <a:srgbClr val="003A63"/>
+                </a:solidFill>
+                <a:latin typeface="Aptos" pitchFamily="34" charset="0"/>
+                <a:ea typeface="Aptos" pitchFamily="34" charset="-122"/>
+                <a:cs typeface="Aptos" pitchFamily="34" charset="-120"/>
+              </a:rPr>
+              <a:t>• What task would NLP support: extraction, classification, summarization, translation, or topic.</a:t>
             </a:r>
             <a:endParaRPr lang="en-US" sz="2100" dirty="0"/>
           </a:p>
           <a:p>
+            <a:pPr indent="0" marL="0">
+              <a:buNone/>
+            </a:pPr>
             <a:r>
               <a:rPr lang="en-US" sz="2100" dirty="0">
                 <a:solidFill>
-                  <a:srgbClr val="17364A"/>
-                </a:solidFill>
-                <a:latin typeface="Aptos" pitchFamily="34" charset="0"/>
-                <a:ea typeface="Aptos" pitchFamily="34" charset="-122"/>
-                <a:cs typeface="Aptos" pitchFamily="34" charset="-120"/>
-              </a:rPr>
-              <a:t>What errors would be most harmful?</a:t>
+                  <a:srgbClr val="003A63"/>
+                </a:solidFill>
+                <a:latin typeface="Aptos" pitchFamily="34" charset="0"/>
+                <a:ea typeface="Aptos" pitchFamily="34" charset="-122"/>
+                <a:cs typeface="Aptos" pitchFamily="34" charset="-120"/>
+              </a:rPr>
+              <a:t>• What errors would be most harmful?</a:t>
             </a:r>
             <a:endParaRPr lang="en-US" sz="2100" dirty="0"/>
           </a:p>
@@ -6929,17 +7028,17 @@
         </p:nvSpPr>
         <p:spPr>
           <a:xfrm>
-            <a:off x="7799832" y="1828800"/>
-            <a:ext cx="3145536" cy="685800"/>
-          </a:xfrm>
-          <a:prstGeom prst="rect">
-            <a:avLst/>
-          </a:prstGeom>
-          <a:noFill/>
-          <a:ln/>
-        </p:spPr>
-        <p:txBody>
-          <a:bodyPr wrap="square" lIns="0" tIns="0" rIns="0" bIns="0" rtlCol="0" anchor="t">
+            <a:off x="7799832" y="1801368"/>
+            <a:ext cx="3145536" cy="758952"/>
+          </a:xfrm>
+          <a:prstGeom prst="rect">
+            <a:avLst/>
+          </a:prstGeom>
+          <a:noFill/>
+          <a:ln/>
+        </p:spPr>
+        <p:txBody>
+          <a:bodyPr wrap="square" lIns="254" tIns="254" rIns="254" bIns="254" rtlCol="0" anchor="t">
             <a:normAutofit/>
           </a:bodyPr>
           <a:lstStyle/>
@@ -6948,7 +7047,7 @@
               <a:buNone/>
             </a:pPr>
             <a:r>
-              <a:rPr lang="en-US" sz="1550" dirty="0">
+              <a:rPr lang="en-US" sz="1320" dirty="0">
                 <a:solidFill>
                   <a:srgbClr val="17364A"/>
                 </a:solidFill>
@@ -6958,7 +7057,7 @@
               </a:rPr>
               <a:t>Which public health workflows involve large volumes of free text?</a:t>
             </a:r>
-            <a:endParaRPr lang="en-US" sz="1550" dirty="0"/>
+            <a:endParaRPr lang="en-US" sz="1320" dirty="0"/>
           </a:p>
         </p:txBody>
       </p:sp>
@@ -7046,13 +7145,16 @@
           <a:ln/>
         </p:spPr>
         <p:txBody>
-          <a:bodyPr wrap="square" lIns="254" tIns="254" rIns="254" bIns="254" rtlCol="0" anchor="t">
+          <a:bodyPr wrap="square" lIns="508" tIns="508" rIns="508" bIns="508" rtlCol="0" anchor="t">
             <a:normAutofit/>
           </a:bodyPr>
           <a:lstStyle/>
           <a:p>
-            <a:r>
-              <a:rPr lang="en-US" sz="1380" dirty="0">
+            <a:pPr indent="0" marL="0">
+              <a:buNone/>
+            </a:pPr>
+            <a:r>
+              <a:rPr lang="en-US" sz="1220" dirty="0">
                 <a:solidFill>
                   <a:srgbClr val="17364A"/>
                 </a:solidFill>
@@ -7062,11 +7164,14 @@
               </a:rPr>
               <a:t>Which public health workflows involve large volumes of free text?</a:t>
             </a:r>
-            <a:endParaRPr lang="en-US" sz="1380" dirty="0"/>
-          </a:p>
-          <a:p>
-            <a:r>
-              <a:rPr lang="en-US" sz="1380" dirty="0">
+            <a:endParaRPr lang="en-US" sz="1220" dirty="0"/>
+          </a:p>
+          <a:p>
+            <a:pPr indent="0" marL="0">
+              <a:buNone/>
+            </a:pPr>
+            <a:r>
+              <a:rPr lang="en-US" sz="1220" dirty="0">
                 <a:solidFill>
                   <a:srgbClr val="17364A"/>
                 </a:solidFill>
@@ -7074,13 +7179,16 @@
                 <a:ea typeface="Aptos" pitchFamily="34" charset="-122"/>
                 <a:cs typeface="Aptos" pitchFamily="34" charset="-120"/>
               </a:rPr>
-              <a:t>What task would NLP support: extraction, classification, summarization, translation, or.</a:t>
-            </a:r>
-            <a:endParaRPr lang="en-US" sz="1380" dirty="0"/>
-          </a:p>
-          <a:p>
-            <a:r>
-              <a:rPr lang="en-US" sz="1380" dirty="0">
+              <a:t>What task would NLP support: extraction, classification,.</a:t>
+            </a:r>
+            <a:endParaRPr lang="en-US" sz="1220" dirty="0"/>
+          </a:p>
+          <a:p>
+            <a:pPr indent="0" marL="0">
+              <a:buNone/>
+            </a:pPr>
+            <a:r>
+              <a:rPr lang="en-US" sz="1220" dirty="0">
                 <a:solidFill>
                   <a:srgbClr val="17364A"/>
                 </a:solidFill>
@@ -7090,7 +7198,7 @@
               </a:rPr>
               <a:t>What errors would be most harmful?</a:t>
             </a:r>
-            <a:endParaRPr lang="en-US" sz="1380" dirty="0"/>
+            <a:endParaRPr lang="en-US" sz="1220" dirty="0"/>
           </a:p>
         </p:txBody>
       </p:sp>
@@ -7168,17 +7276,17 @@
         </p:nvSpPr>
         <p:spPr>
           <a:xfrm>
-            <a:off x="7799832" y="5001768"/>
-            <a:ext cx="3145536" cy="502920"/>
-          </a:xfrm>
-          <a:prstGeom prst="rect">
-            <a:avLst/>
-          </a:prstGeom>
-          <a:noFill/>
-          <a:ln/>
-        </p:spPr>
-        <p:txBody>
-          <a:bodyPr wrap="square" lIns="0" tIns="0" rIns="0" bIns="0" rtlCol="0" anchor="t">
+            <a:off x="7799832" y="4974336"/>
+            <a:ext cx="3145536" cy="576072"/>
+          </a:xfrm>
+          <a:prstGeom prst="rect">
+            <a:avLst/>
+          </a:prstGeom>
+          <a:noFill/>
+          <a:ln/>
+        </p:spPr>
+        <p:txBody>
+          <a:bodyPr wrap="square" lIns="254" tIns="254" rIns="254" bIns="254" rtlCol="0" anchor="t">
             <a:normAutofit/>
           </a:bodyPr>
           <a:lstStyle/>
@@ -7187,7 +7295,7 @@
               <a:buNone/>
             </a:pPr>
             <a:r>
-              <a:rPr lang="en-US" sz="1550" dirty="0">
+              <a:rPr lang="en-US" sz="1320" dirty="0">
                 <a:solidFill>
                   <a:srgbClr val="17364A"/>
                 </a:solidFill>
@@ -7195,9 +7303,9 @@
                 <a:ea typeface="Aptos" pitchFamily="34" charset="-122"/>
                 <a:cs typeface="Aptos" pitchFamily="34" charset="-120"/>
               </a:rPr>
-              <a:t>Use the concept to plan transparent communication, gather stakeholder input, protect trust, and make sure affected communities are considered early.</a:t>
-            </a:r>
-            <a:endParaRPr lang="en-US" sz="1550" dirty="0"/>
+              <a:t>Use the concept to plan transparent communication, gather stakeholder input, protect trust, and make sure affected.</a:t>
+            </a:r>
+            <a:endParaRPr lang="en-US" sz="1320" dirty="0"/>
           </a:p>
         </p:txBody>
       </p:sp>
@@ -7498,35 +7606,41 @@
           <a:ln/>
         </p:spPr>
         <p:txBody>
-          <a:bodyPr wrap="square" lIns="635" tIns="635" rIns="635" bIns="635" rtlCol="0" anchor="t">
+          <a:bodyPr wrap="square" lIns="1016" tIns="1016" rIns="1016" bIns="1016" rtlCol="0" anchor="t">
             <a:normAutofit/>
           </a:bodyPr>
           <a:lstStyle/>
           <a:p>
+            <a:pPr indent="0" marL="0">
+              <a:buNone/>
+            </a:pPr>
             <a:r>
               <a:rPr lang="en-US" sz="2100" dirty="0">
                 <a:solidFill>
-                  <a:srgbClr val="17364A"/>
-                </a:solidFill>
-                <a:latin typeface="Aptos" pitchFamily="34" charset="0"/>
-                <a:ea typeface="Aptos" pitchFamily="34" charset="-122"/>
-                <a:cs typeface="Aptos" pitchFamily="34" charset="-120"/>
-              </a:rPr>
-              <a:t>What source material must be retained for human review?</a:t>
+                  <a:srgbClr val="003A63"/>
+                </a:solidFill>
+                <a:latin typeface="Aptos" pitchFamily="34" charset="0"/>
+                <a:ea typeface="Aptos" pitchFamily="34" charset="-122"/>
+                <a:cs typeface="Aptos" pitchFamily="34" charset="-120"/>
+              </a:rPr>
+              <a:t>• What source material must be retained for human review?</a:t>
             </a:r>
             <a:endParaRPr lang="en-US" sz="2100" dirty="0"/>
           </a:p>
           <a:p>
+            <a:pPr indent="0" marL="0">
+              <a:buNone/>
+            </a:pPr>
             <a:r>
               <a:rPr lang="en-US" sz="2100" dirty="0">
                 <a:solidFill>
-                  <a:srgbClr val="17364A"/>
-                </a:solidFill>
-                <a:latin typeface="Aptos" pitchFamily="34" charset="0"/>
-                <a:ea typeface="Aptos" pitchFamily="34" charset="-122"/>
-                <a:cs typeface="Aptos" pitchFamily="34" charset="-120"/>
-              </a:rPr>
-              <a:t>How will staff evaluate accuracy across languages, populations, and program areas?</a:t>
+                  <a:srgbClr val="003A63"/>
+                </a:solidFill>
+                <a:latin typeface="Aptos" pitchFamily="34" charset="0"/>
+                <a:ea typeface="Aptos" pitchFamily="34" charset="-122"/>
+                <a:cs typeface="Aptos" pitchFamily="34" charset="-120"/>
+              </a:rPr>
+              <a:t>• How will staff evaluate accuracy across languages, populations, and program areas?</a:t>
             </a:r>
             <a:endParaRPr lang="en-US" sz="2100" dirty="0"/>
           </a:p>
@@ -7606,17 +7720,17 @@
         </p:nvSpPr>
         <p:spPr>
           <a:xfrm>
-            <a:off x="7799832" y="1828800"/>
-            <a:ext cx="3145536" cy="685800"/>
-          </a:xfrm>
-          <a:prstGeom prst="rect">
-            <a:avLst/>
-          </a:prstGeom>
-          <a:noFill/>
-          <a:ln/>
-        </p:spPr>
-        <p:txBody>
-          <a:bodyPr wrap="square" lIns="0" tIns="0" rIns="0" bIns="0" rtlCol="0" anchor="t">
+            <a:off x="7799832" y="1801368"/>
+            <a:ext cx="3145536" cy="758952"/>
+          </a:xfrm>
+          <a:prstGeom prst="rect">
+            <a:avLst/>
+          </a:prstGeom>
+          <a:noFill/>
+          <a:ln/>
+        </p:spPr>
+        <p:txBody>
+          <a:bodyPr wrap="square" lIns="254" tIns="254" rIns="254" bIns="254" rtlCol="0" anchor="t">
             <a:normAutofit/>
           </a:bodyPr>
           <a:lstStyle/>
@@ -7625,7 +7739,7 @@
               <a:buNone/>
             </a:pPr>
             <a:r>
-              <a:rPr lang="en-US" sz="1550" dirty="0">
+              <a:rPr lang="en-US" sz="1320" dirty="0">
                 <a:solidFill>
                   <a:srgbClr val="17364A"/>
                 </a:solidFill>
@@ -7635,7 +7749,7 @@
               </a:rPr>
               <a:t>What source material must be retained for human review?</a:t>
             </a:r>
-            <a:endParaRPr lang="en-US" sz="1550" dirty="0"/>
+            <a:endParaRPr lang="en-US" sz="1320" dirty="0"/>
           </a:p>
         </p:txBody>
       </p:sp>
@@ -7723,13 +7837,16 @@
           <a:ln/>
         </p:spPr>
         <p:txBody>
-          <a:bodyPr wrap="square" lIns="254" tIns="254" rIns="254" bIns="254" rtlCol="0" anchor="t">
+          <a:bodyPr wrap="square" lIns="508" tIns="508" rIns="508" bIns="508" rtlCol="0" anchor="t">
             <a:normAutofit/>
           </a:bodyPr>
           <a:lstStyle/>
           <a:p>
-            <a:r>
-              <a:rPr lang="en-US" sz="1380" dirty="0">
+            <a:pPr indent="0" marL="0">
+              <a:buNone/>
+            </a:pPr>
+            <a:r>
+              <a:rPr lang="en-US" sz="1220" dirty="0">
                 <a:solidFill>
                   <a:srgbClr val="17364A"/>
                 </a:solidFill>
@@ -7739,11 +7856,14 @@
               </a:rPr>
               <a:t>What source material must be retained for human review?</a:t>
             </a:r>
-            <a:endParaRPr lang="en-US" sz="1380" dirty="0"/>
-          </a:p>
-          <a:p>
-            <a:r>
-              <a:rPr lang="en-US" sz="1380" dirty="0">
+            <a:endParaRPr lang="en-US" sz="1220" dirty="0"/>
+          </a:p>
+          <a:p>
+            <a:pPr indent="0" marL="0">
+              <a:buNone/>
+            </a:pPr>
+            <a:r>
+              <a:rPr lang="en-US" sz="1220" dirty="0">
                 <a:solidFill>
                   <a:srgbClr val="17364A"/>
                 </a:solidFill>
@@ -7751,9 +7871,9 @@
                 <a:ea typeface="Aptos" pitchFamily="34" charset="-122"/>
                 <a:cs typeface="Aptos" pitchFamily="34" charset="-120"/>
               </a:rPr>
-              <a:t>How will staff evaluate accuracy across languages, populations, and program areas?</a:t>
-            </a:r>
-            <a:endParaRPr lang="en-US" sz="1380" dirty="0"/>
+              <a:t>How will staff evaluate accuracy across languages, populations,.</a:t>
+            </a:r>
+            <a:endParaRPr lang="en-US" sz="1220" dirty="0"/>
           </a:p>
         </p:txBody>
       </p:sp>
@@ -7831,17 +7951,17 @@
         </p:nvSpPr>
         <p:spPr>
           <a:xfrm>
-            <a:off x="7799832" y="5001768"/>
-            <a:ext cx="3145536" cy="502920"/>
-          </a:xfrm>
-          <a:prstGeom prst="rect">
-            <a:avLst/>
-          </a:prstGeom>
-          <a:noFill/>
-          <a:ln/>
-        </p:spPr>
-        <p:txBody>
-          <a:bodyPr wrap="square" lIns="0" tIns="0" rIns="0" bIns="0" rtlCol="0" anchor="t">
+            <a:off x="7799832" y="4974336"/>
+            <a:ext cx="3145536" cy="576072"/>
+          </a:xfrm>
+          <a:prstGeom prst="rect">
+            <a:avLst/>
+          </a:prstGeom>
+          <a:noFill/>
+          <a:ln/>
+        </p:spPr>
+        <p:txBody>
+          <a:bodyPr wrap="square" lIns="254" tIns="254" rIns="254" bIns="254" rtlCol="0" anchor="t">
             <a:normAutofit/>
           </a:bodyPr>
           <a:lstStyle/>
@@ -7850,7 +7970,7 @@
               <a:buNone/>
             </a:pPr>
             <a:r>
-              <a:rPr lang="en-US" sz="1550" dirty="0">
+              <a:rPr lang="en-US" sz="1320" dirty="0">
                 <a:solidFill>
                   <a:srgbClr val="17364A"/>
                 </a:solidFill>
@@ -7858,9 +7978,9 @@
                 <a:ea typeface="Aptos" pitchFamily="34" charset="-122"/>
                 <a:cs typeface="Aptos" pitchFamily="34" charset="-120"/>
               </a:rPr>
-              <a:t>Use the concept to plan transparent communication, gather stakeholder input, protect trust, and make sure affected communities are considered early.</a:t>
-            </a:r>
-            <a:endParaRPr lang="en-US" sz="1550" dirty="0"/>
+              <a:t>Use the concept to plan transparent communication, gather stakeholder input, protect trust, and make sure affected.</a:t>
+            </a:r>
+            <a:endParaRPr lang="en-US" sz="1320" dirty="0"/>
           </a:p>
         </p:txBody>
       </p:sp>
@@ -8161,35 +8281,41 @@
           <a:ln/>
         </p:spPr>
         <p:txBody>
-          <a:bodyPr wrap="square" lIns="635" tIns="635" rIns="635" bIns="635" rtlCol="0" anchor="t">
+          <a:bodyPr wrap="square" lIns="1016" tIns="1016" rIns="1016" bIns="1016" rtlCol="0" anchor="t">
             <a:normAutofit/>
           </a:bodyPr>
           <a:lstStyle/>
           <a:p>
+            <a:pPr indent="0" marL="0">
+              <a:buNone/>
+            </a:pPr>
             <a:r>
               <a:rPr lang="en-US" sz="2100" dirty="0">
                 <a:solidFill>
-                  <a:srgbClr val="17364A"/>
-                </a:solidFill>
-                <a:latin typeface="Aptos" pitchFamily="34" charset="0"/>
-                <a:ea typeface="Aptos" pitchFamily="34" charset="-122"/>
-                <a:cs typeface="Aptos" pitchFamily="34" charset="-120"/>
-              </a:rPr>
-              <a:t>Create an NLP evaluation plan for one public health workflow.</a:t>
+                  <a:srgbClr val="003A63"/>
+                </a:solidFill>
+                <a:latin typeface="Aptos" pitchFamily="34" charset="0"/>
+                <a:ea typeface="Aptos" pitchFamily="34" charset="-122"/>
+                <a:cs typeface="Aptos" pitchFamily="34" charset="-120"/>
+              </a:rPr>
+              <a:t>• Create an NLP evaluation plan for one public health workflow.</a:t>
             </a:r>
             <a:endParaRPr lang="en-US" sz="2100" dirty="0"/>
           </a:p>
           <a:p>
+            <a:pPr indent="0" marL="0">
+              <a:buNone/>
+            </a:pPr>
             <a:r>
               <a:rPr lang="en-US" sz="2100" dirty="0">
                 <a:solidFill>
-                  <a:srgbClr val="17364A"/>
-                </a:solidFill>
-                <a:latin typeface="Aptos" pitchFamily="34" charset="0"/>
-                <a:ea typeface="Aptos" pitchFamily="34" charset="-122"/>
-                <a:cs typeface="Aptos" pitchFamily="34" charset="-120"/>
-              </a:rPr>
-              <a:t>Include the text source, NLP task, intended use, prohibited use, required human review, accuracy.</a:t>
+                  <a:srgbClr val="003A63"/>
+                </a:solidFill>
+                <a:latin typeface="Aptos" pitchFamily="34" charset="0"/>
+                <a:ea typeface="Aptos" pitchFamily="34" charset="-122"/>
+                <a:cs typeface="Aptos" pitchFamily="34" charset="-120"/>
+              </a:rPr>
+              <a:t>• Include the text source, NLP task, intended use, prohibited use, required human review,.</a:t>
             </a:r>
             <a:endParaRPr lang="en-US" sz="2100" dirty="0"/>
           </a:p>
@@ -8269,17 +8395,17 @@
         </p:nvSpPr>
         <p:spPr>
           <a:xfrm>
-            <a:off x="7799832" y="1828800"/>
-            <a:ext cx="3145536" cy="685800"/>
-          </a:xfrm>
-          <a:prstGeom prst="rect">
-            <a:avLst/>
-          </a:prstGeom>
-          <a:noFill/>
-          <a:ln/>
-        </p:spPr>
-        <p:txBody>
-          <a:bodyPr wrap="square" lIns="0" tIns="0" rIns="0" bIns="0" rtlCol="0" anchor="t">
+            <a:off x="7799832" y="1801368"/>
+            <a:ext cx="3145536" cy="758952"/>
+          </a:xfrm>
+          <a:prstGeom prst="rect">
+            <a:avLst/>
+          </a:prstGeom>
+          <a:noFill/>
+          <a:ln/>
+        </p:spPr>
+        <p:txBody>
+          <a:bodyPr wrap="square" lIns="254" tIns="254" rIns="254" bIns="254" rtlCol="0" anchor="t">
             <a:normAutofit/>
           </a:bodyPr>
           <a:lstStyle/>
@@ -8288,7 +8414,7 @@
               <a:buNone/>
             </a:pPr>
             <a:r>
-              <a:rPr lang="en-US" sz="1550" dirty="0">
+              <a:rPr lang="en-US" sz="1320" dirty="0">
                 <a:solidFill>
                   <a:srgbClr val="17364A"/>
                 </a:solidFill>
@@ -8298,7 +8424,7 @@
               </a:rPr>
               <a:t>Create an NLP evaluation plan for one public health workflow.</a:t>
             </a:r>
-            <a:endParaRPr lang="en-US" sz="1550" dirty="0"/>
+            <a:endParaRPr lang="en-US" sz="1320" dirty="0"/>
           </a:p>
         </p:txBody>
       </p:sp>
@@ -8386,13 +8512,16 @@
           <a:ln/>
         </p:spPr>
         <p:txBody>
-          <a:bodyPr wrap="square" lIns="254" tIns="254" rIns="254" bIns="254" rtlCol="0" anchor="t">
+          <a:bodyPr wrap="square" lIns="508" tIns="508" rIns="508" bIns="508" rtlCol="0" anchor="t">
             <a:normAutofit/>
           </a:bodyPr>
           <a:lstStyle/>
           <a:p>
-            <a:r>
-              <a:rPr lang="en-US" sz="1380" dirty="0">
+            <a:pPr indent="0" marL="0">
+              <a:buNone/>
+            </a:pPr>
+            <a:r>
+              <a:rPr lang="en-US" sz="1220" dirty="0">
                 <a:solidFill>
                   <a:srgbClr val="17364A"/>
                 </a:solidFill>
@@ -8402,11 +8531,14 @@
               </a:rPr>
               <a:t>Create an NLP evaluation plan for one public health workflow.</a:t>
             </a:r>
-            <a:endParaRPr lang="en-US" sz="1380" dirty="0"/>
-          </a:p>
-          <a:p>
-            <a:r>
-              <a:rPr lang="en-US" sz="1380" dirty="0">
+            <a:endParaRPr lang="en-US" sz="1220" dirty="0"/>
+          </a:p>
+          <a:p>
+            <a:pPr indent="0" marL="0">
+              <a:buNone/>
+            </a:pPr>
+            <a:r>
+              <a:rPr lang="en-US" sz="1220" dirty="0">
                 <a:solidFill>
                   <a:srgbClr val="17364A"/>
                 </a:solidFill>
@@ -8414,9 +8546,9 @@
                 <a:ea typeface="Aptos" pitchFamily="34" charset="-122"/>
                 <a:cs typeface="Aptos" pitchFamily="34" charset="-120"/>
               </a:rPr>
-              <a:t>Include the text source, NLP task, intended use, prohibited use, required human review,.</a:t>
-            </a:r>
-            <a:endParaRPr lang="en-US" sz="1380" dirty="0"/>
+              <a:t>Include the text source, NLP task, intended use, prohibited use,.</a:t>
+            </a:r>
+            <a:endParaRPr lang="en-US" sz="1220" dirty="0"/>
           </a:p>
         </p:txBody>
       </p:sp>
@@ -8494,17 +8626,17 @@
         </p:nvSpPr>
         <p:spPr>
           <a:xfrm>
-            <a:off x="7799832" y="5001768"/>
-            <a:ext cx="3145536" cy="502920"/>
-          </a:xfrm>
-          <a:prstGeom prst="rect">
-            <a:avLst/>
-          </a:prstGeom>
-          <a:noFill/>
-          <a:ln/>
-        </p:spPr>
-        <p:txBody>
-          <a:bodyPr wrap="square" lIns="0" tIns="0" rIns="0" bIns="0" rtlCol="0" anchor="t">
+            <a:off x="7799832" y="4974336"/>
+            <a:ext cx="3145536" cy="576072"/>
+          </a:xfrm>
+          <a:prstGeom prst="rect">
+            <a:avLst/>
+          </a:prstGeom>
+          <a:noFill/>
+          <a:ln/>
+        </p:spPr>
+        <p:txBody>
+          <a:bodyPr wrap="square" lIns="254" tIns="254" rIns="254" bIns="254" rtlCol="0" anchor="t">
             <a:normAutofit/>
           </a:bodyPr>
           <a:lstStyle/>
@@ -8513,7 +8645,7 @@
               <a:buNone/>
             </a:pPr>
             <a:r>
-              <a:rPr lang="en-US" sz="1550" dirty="0">
+              <a:rPr lang="en-US" sz="1320" dirty="0">
                 <a:solidFill>
                   <a:srgbClr val="17364A"/>
                 </a:solidFill>
@@ -8521,9 +8653,9 @@
                 <a:ea typeface="Aptos" pitchFamily="34" charset="-122"/>
                 <a:cs typeface="Aptos" pitchFamily="34" charset="-120"/>
               </a:rPr>
-              <a:t>Use the assignment to test whether you can explain the concept, apply it to a realistic public health situation, and identify what would need review before the work moves forward.</a:t>
-            </a:r>
-            <a:endParaRPr lang="en-US" sz="1550" dirty="0"/>
+              <a:t>Use the assignment to test whether you can explain the concept, apply it to a realistic public health situation, and.</a:t>
+            </a:r>
+            <a:endParaRPr lang="en-US" sz="1320" dirty="0"/>
           </a:p>
         </p:txBody>
       </p:sp>
@@ -8824,49 +8956,58 @@
           <a:ln/>
         </p:spPr>
         <p:txBody>
-          <a:bodyPr wrap="square" lIns="635" tIns="635" rIns="635" bIns="635" rtlCol="0" anchor="t">
+          <a:bodyPr wrap="square" lIns="1016" tIns="1016" rIns="1016" bIns="1016" rtlCol="0" anchor="t">
             <a:normAutofit/>
           </a:bodyPr>
           <a:lstStyle/>
           <a:p>
+            <a:pPr indent="0" marL="0">
+              <a:buNone/>
+            </a:pPr>
             <a:r>
               <a:rPr lang="en-US" sz="2100" dirty="0">
                 <a:solidFill>
-                  <a:srgbClr val="17364A"/>
-                </a:solidFill>
-                <a:latin typeface="Aptos" pitchFamily="34" charset="0"/>
-                <a:ea typeface="Aptos" pitchFamily="34" charset="-122"/>
-                <a:cs typeface="Aptos" pitchFamily="34" charset="-120"/>
-              </a:rPr>
-              <a:t>NLP use case description</a:t>
+                  <a:srgbClr val="003A63"/>
+                </a:solidFill>
+                <a:latin typeface="Aptos" pitchFamily="34" charset="0"/>
+                <a:ea typeface="Aptos" pitchFamily="34" charset="-122"/>
+                <a:cs typeface="Aptos" pitchFamily="34" charset="-120"/>
+              </a:rPr>
+              <a:t>• NLP use case description</a:t>
             </a:r>
             <a:endParaRPr lang="en-US" sz="2100" dirty="0"/>
           </a:p>
           <a:p>
+            <a:pPr indent="0" marL="0">
+              <a:buNone/>
+            </a:pPr>
             <a:r>
               <a:rPr lang="en-US" sz="2100" dirty="0">
                 <a:solidFill>
-                  <a:srgbClr val="17364A"/>
-                </a:solidFill>
-                <a:latin typeface="Aptos" pitchFamily="34" charset="0"/>
-                <a:ea typeface="Aptos" pitchFamily="34" charset="-122"/>
-                <a:cs typeface="Aptos" pitchFamily="34" charset="-120"/>
-              </a:rPr>
-              <a:t>NLP evaluation plan</a:t>
+                  <a:srgbClr val="003A63"/>
+                </a:solidFill>
+                <a:latin typeface="Aptos" pitchFamily="34" charset="0"/>
+                <a:ea typeface="Aptos" pitchFamily="34" charset="-122"/>
+                <a:cs typeface="Aptos" pitchFamily="34" charset="-120"/>
+              </a:rPr>
+              <a:t>• NLP evaluation plan</a:t>
             </a:r>
             <a:endParaRPr lang="en-US" sz="2100" dirty="0"/>
           </a:p>
           <a:p>
+            <a:pPr indent="0" marL="0">
+              <a:buNone/>
+            </a:pPr>
             <a:r>
               <a:rPr lang="en-US" sz="2100" dirty="0">
                 <a:solidFill>
-                  <a:srgbClr val="17364A"/>
-                </a:solidFill>
-                <a:latin typeface="Aptos" pitchFamily="34" charset="0"/>
-                <a:ea typeface="Aptos" pitchFamily="34" charset="-122"/>
-                <a:cs typeface="Aptos" pitchFamily="34" charset="-120"/>
-              </a:rPr>
-              <a:t>Human review checklist</a:t>
+                  <a:srgbClr val="003A63"/>
+                </a:solidFill>
+                <a:latin typeface="Aptos" pitchFamily="34" charset="0"/>
+                <a:ea typeface="Aptos" pitchFamily="34" charset="-122"/>
+                <a:cs typeface="Aptos" pitchFamily="34" charset="-120"/>
+              </a:rPr>
+              <a:t>• Human review checklist</a:t>
             </a:r>
             <a:endParaRPr lang="en-US" sz="2100" dirty="0"/>
           </a:p>
@@ -8946,17 +9087,17 @@
         </p:nvSpPr>
         <p:spPr>
           <a:xfrm>
-            <a:off x="7799832" y="1828800"/>
-            <a:ext cx="3145536" cy="685800"/>
-          </a:xfrm>
-          <a:prstGeom prst="rect">
-            <a:avLst/>
-          </a:prstGeom>
-          <a:noFill/>
-          <a:ln/>
-        </p:spPr>
-        <p:txBody>
-          <a:bodyPr wrap="square" lIns="0" tIns="0" rIns="0" bIns="0" rtlCol="0" anchor="t">
+            <a:off x="7799832" y="1801368"/>
+            <a:ext cx="3145536" cy="758952"/>
+          </a:xfrm>
+          <a:prstGeom prst="rect">
+            <a:avLst/>
+          </a:prstGeom>
+          <a:noFill/>
+          <a:ln/>
+        </p:spPr>
+        <p:txBody>
+          <a:bodyPr wrap="square" lIns="254" tIns="254" rIns="254" bIns="254" rtlCol="0" anchor="t">
             <a:normAutofit/>
           </a:bodyPr>
           <a:lstStyle/>
@@ -8965,7 +9106,7 @@
               <a:buNone/>
             </a:pPr>
             <a:r>
-              <a:rPr lang="en-US" sz="1550" dirty="0">
+              <a:rPr lang="en-US" sz="1320" dirty="0">
                 <a:solidFill>
                   <a:srgbClr val="17364A"/>
                 </a:solidFill>
@@ -8975,7 +9116,7 @@
               </a:rPr>
               <a:t>NLP use case description</a:t>
             </a:r>
-            <a:endParaRPr lang="en-US" sz="1550" dirty="0"/>
+            <a:endParaRPr lang="en-US" sz="1320" dirty="0"/>
           </a:p>
         </p:txBody>
       </p:sp>
@@ -9063,13 +9204,16 @@
           <a:ln/>
         </p:spPr>
         <p:txBody>
-          <a:bodyPr wrap="square" lIns="254" tIns="254" rIns="254" bIns="254" rtlCol="0" anchor="t">
+          <a:bodyPr wrap="square" lIns="508" tIns="508" rIns="508" bIns="508" rtlCol="0" anchor="t">
             <a:normAutofit/>
           </a:bodyPr>
           <a:lstStyle/>
           <a:p>
-            <a:r>
-              <a:rPr lang="en-US" sz="1380" dirty="0">
+            <a:pPr indent="0" marL="0">
+              <a:buNone/>
+            </a:pPr>
+            <a:r>
+              <a:rPr lang="en-US" sz="1220" dirty="0">
                 <a:solidFill>
                   <a:srgbClr val="17364A"/>
                 </a:solidFill>
@@ -9079,11 +9223,14 @@
               </a:rPr>
               <a:t>NLP use case description</a:t>
             </a:r>
-            <a:endParaRPr lang="en-US" sz="1380" dirty="0"/>
-          </a:p>
-          <a:p>
-            <a:r>
-              <a:rPr lang="en-US" sz="1380" dirty="0">
+            <a:endParaRPr lang="en-US" sz="1220" dirty="0"/>
+          </a:p>
+          <a:p>
+            <a:pPr indent="0" marL="0">
+              <a:buNone/>
+            </a:pPr>
+            <a:r>
+              <a:rPr lang="en-US" sz="1220" dirty="0">
                 <a:solidFill>
                   <a:srgbClr val="17364A"/>
                 </a:solidFill>
@@ -9093,11 +9240,14 @@
               </a:rPr>
               <a:t>NLP evaluation plan</a:t>
             </a:r>
-            <a:endParaRPr lang="en-US" sz="1380" dirty="0"/>
-          </a:p>
-          <a:p>
-            <a:r>
-              <a:rPr lang="en-US" sz="1380" dirty="0">
+            <a:endParaRPr lang="en-US" sz="1220" dirty="0"/>
+          </a:p>
+          <a:p>
+            <a:pPr indent="0" marL="0">
+              <a:buNone/>
+            </a:pPr>
+            <a:r>
+              <a:rPr lang="en-US" sz="1220" dirty="0">
                 <a:solidFill>
                   <a:srgbClr val="17364A"/>
                 </a:solidFill>
@@ -9107,7 +9257,7 @@
               </a:rPr>
               <a:t>Human review checklist</a:t>
             </a:r>
-            <a:endParaRPr lang="en-US" sz="1380" dirty="0"/>
+            <a:endParaRPr lang="en-US" sz="1220" dirty="0"/>
           </a:p>
         </p:txBody>
       </p:sp>
@@ -9185,17 +9335,17 @@
         </p:nvSpPr>
         <p:spPr>
           <a:xfrm>
-            <a:off x="7799832" y="5001768"/>
-            <a:ext cx="3145536" cy="502920"/>
-          </a:xfrm>
-          <a:prstGeom prst="rect">
-            <a:avLst/>
-          </a:prstGeom>
-          <a:noFill/>
-          <a:ln/>
-        </p:spPr>
-        <p:txBody>
-          <a:bodyPr wrap="square" lIns="0" tIns="0" rIns="0" bIns="0" rtlCol="0" anchor="t">
+            <a:off x="7799832" y="4974336"/>
+            <a:ext cx="3145536" cy="576072"/>
+          </a:xfrm>
+          <a:prstGeom prst="rect">
+            <a:avLst/>
+          </a:prstGeom>
+          <a:noFill/>
+          <a:ln/>
+        </p:spPr>
+        <p:txBody>
+          <a:bodyPr wrap="square" lIns="254" tIns="254" rIns="254" bIns="254" rtlCol="0" anchor="t">
             <a:normAutofit/>
           </a:bodyPr>
           <a:lstStyle/>
@@ -9204,7 +9354,7 @@
               <a:buNone/>
             </a:pPr>
             <a:r>
-              <a:rPr lang="en-US" sz="1550" dirty="0">
+              <a:rPr lang="en-US" sz="1320" dirty="0">
                 <a:solidFill>
                   <a:srgbClr val="17364A"/>
                 </a:solidFill>
@@ -9212,9 +9362,9 @@
                 <a:ea typeface="Aptos" pitchFamily="34" charset="-122"/>
                 <a:cs typeface="Aptos" pitchFamily="34" charset="-120"/>
               </a:rPr>
-              <a:t>Use the concept to plan transparent communication, gather stakeholder input, protect trust, and make sure affected communities are considered early.</a:t>
-            </a:r>
-            <a:endParaRPr lang="en-US" sz="1550" dirty="0"/>
+              <a:t>Use the concept to plan transparent communication, gather stakeholder input, protect trust, and make sure affected.</a:t>
+            </a:r>
+            <a:endParaRPr lang="en-US" sz="1320" dirty="0"/>
           </a:p>
         </p:txBody>
       </p:sp>
@@ -9515,21 +9665,24 @@
           <a:ln/>
         </p:spPr>
         <p:txBody>
-          <a:bodyPr wrap="square" lIns="635" tIns="635" rIns="635" bIns="635" rtlCol="0" anchor="t">
+          <a:bodyPr wrap="square" lIns="1016" tIns="1016" rIns="1016" bIns="1016" rtlCol="0" anchor="t">
             <a:normAutofit/>
           </a:bodyPr>
           <a:lstStyle/>
           <a:p>
+            <a:pPr indent="0" marL="0">
+              <a:buNone/>
+            </a:pPr>
             <a:r>
               <a:rPr lang="en-US" sz="2100" dirty="0">
                 <a:solidFill>
-                  <a:srgbClr val="17364A"/>
-                </a:solidFill>
-                <a:latin typeface="Aptos" pitchFamily="34" charset="0"/>
-                <a:ea typeface="Aptos" pitchFamily="34" charset="-122"/>
-                <a:cs typeface="Aptos" pitchFamily="34" charset="-120"/>
-              </a:rPr>
-              <a:t>Source verification and privacy safeguards</a:t>
+                  <a:srgbClr val="003A63"/>
+                </a:solidFill>
+                <a:latin typeface="Aptos" pitchFamily="34" charset="0"/>
+                <a:ea typeface="Aptos" pitchFamily="34" charset="-122"/>
+                <a:cs typeface="Aptos" pitchFamily="34" charset="-120"/>
+              </a:rPr>
+              <a:t>• Source verification and privacy safeguards</a:t>
             </a:r>
             <a:endParaRPr lang="en-US" sz="2100" dirty="0"/>
           </a:p>
@@ -9609,17 +9762,17 @@
         </p:nvSpPr>
         <p:spPr>
           <a:xfrm>
-            <a:off x="7799832" y="1828800"/>
-            <a:ext cx="3145536" cy="685800"/>
-          </a:xfrm>
-          <a:prstGeom prst="rect">
-            <a:avLst/>
-          </a:prstGeom>
-          <a:noFill/>
-          <a:ln/>
-        </p:spPr>
-        <p:txBody>
-          <a:bodyPr wrap="square" lIns="0" tIns="0" rIns="0" bIns="0" rtlCol="0" anchor="t">
+            <a:off x="7799832" y="1801368"/>
+            <a:ext cx="3145536" cy="758952"/>
+          </a:xfrm>
+          <a:prstGeom prst="rect">
+            <a:avLst/>
+          </a:prstGeom>
+          <a:noFill/>
+          <a:ln/>
+        </p:spPr>
+        <p:txBody>
+          <a:bodyPr wrap="square" lIns="254" tIns="254" rIns="254" bIns="254" rtlCol="0" anchor="t">
             <a:normAutofit/>
           </a:bodyPr>
           <a:lstStyle/>
@@ -9628,7 +9781,7 @@
               <a:buNone/>
             </a:pPr>
             <a:r>
-              <a:rPr lang="en-US" sz="1550" dirty="0">
+              <a:rPr lang="en-US" sz="1320" dirty="0">
                 <a:solidFill>
                   <a:srgbClr val="17364A"/>
                 </a:solidFill>
@@ -9638,7 +9791,7 @@
               </a:rPr>
               <a:t>Source verification and privacy safeguards</a:t>
             </a:r>
-            <a:endParaRPr lang="en-US" sz="1550" dirty="0"/>
+            <a:endParaRPr lang="en-US" sz="1320" dirty="0"/>
           </a:p>
         </p:txBody>
       </p:sp>
@@ -9726,13 +9879,16 @@
           <a:ln/>
         </p:spPr>
         <p:txBody>
-          <a:bodyPr wrap="square" lIns="254" tIns="254" rIns="254" bIns="254" rtlCol="0" anchor="t">
+          <a:bodyPr wrap="square" lIns="508" tIns="508" rIns="508" bIns="508" rtlCol="0" anchor="t">
             <a:normAutofit/>
           </a:bodyPr>
           <a:lstStyle/>
           <a:p>
-            <a:r>
-              <a:rPr lang="en-US" sz="1380" dirty="0">
+            <a:pPr indent="0" marL="0">
+              <a:buNone/>
+            </a:pPr>
+            <a:r>
+              <a:rPr lang="en-US" sz="1220" dirty="0">
                 <a:solidFill>
                   <a:srgbClr val="17364A"/>
                 </a:solidFill>
@@ -9742,7 +9898,7 @@
               </a:rPr>
               <a:t>Source verification and privacy safeguards</a:t>
             </a:r>
-            <a:endParaRPr lang="en-US" sz="1380" dirty="0"/>
+            <a:endParaRPr lang="en-US" sz="1220" dirty="0"/>
           </a:p>
         </p:txBody>
       </p:sp>
@@ -9820,17 +9976,17 @@
         </p:nvSpPr>
         <p:spPr>
           <a:xfrm>
-            <a:off x="7799832" y="5001768"/>
-            <a:ext cx="3145536" cy="502920"/>
-          </a:xfrm>
-          <a:prstGeom prst="rect">
-            <a:avLst/>
-          </a:prstGeom>
-          <a:noFill/>
-          <a:ln/>
-        </p:spPr>
-        <p:txBody>
-          <a:bodyPr wrap="square" lIns="0" tIns="0" rIns="0" bIns="0" rtlCol="0" anchor="t">
+            <a:off x="7799832" y="4974336"/>
+            <a:ext cx="3145536" cy="576072"/>
+          </a:xfrm>
+          <a:prstGeom prst="rect">
+            <a:avLst/>
+          </a:prstGeom>
+          <a:noFill/>
+          <a:ln/>
+        </p:spPr>
+        <p:txBody>
+          <a:bodyPr wrap="square" lIns="254" tIns="254" rIns="254" bIns="254" rtlCol="0" anchor="t">
             <a:normAutofit/>
           </a:bodyPr>
           <a:lstStyle/>
@@ -9839,7 +9995,7 @@
               <a:buNone/>
             </a:pPr>
             <a:r>
-              <a:rPr lang="en-US" sz="1550" dirty="0">
+              <a:rPr lang="en-US" sz="1320" dirty="0">
                 <a:solidFill>
                   <a:srgbClr val="17364A"/>
                 </a:solidFill>
@@ -9847,9 +10003,9 @@
                 <a:ea typeface="Aptos" pitchFamily="34" charset="-122"/>
                 <a:cs typeface="Aptos" pitchFamily="34" charset="-120"/>
               </a:rPr>
-              <a:t>Use the concept to plan transparent communication, gather stakeholder input, protect trust, and make sure affected communities are considered early.</a:t>
-            </a:r>
-            <a:endParaRPr lang="en-US" sz="1550" dirty="0"/>
+              <a:t>Use the concept to plan transparent communication, gather stakeholder input, protect trust, and make sure affected.</a:t>
+            </a:r>
+            <a:endParaRPr lang="en-US" sz="1320" dirty="0"/>
           </a:p>
         </p:txBody>
       </p:sp>
@@ -10150,49 +10306,58 @@
           <a:ln/>
         </p:spPr>
         <p:txBody>
-          <a:bodyPr wrap="square" lIns="635" tIns="635" rIns="635" bIns="635" rtlCol="0" anchor="t">
+          <a:bodyPr wrap="square" lIns="1016" tIns="1016" rIns="1016" bIns="1016" rtlCol="0" anchor="t">
             <a:normAutofit/>
           </a:bodyPr>
           <a:lstStyle/>
           <a:p>
+            <a:pPr indent="0" marL="0">
+              <a:buNone/>
+            </a:pPr>
             <a:r>
               <a:rPr lang="en-US" sz="2100" dirty="0">
                 <a:solidFill>
-                  <a:srgbClr val="17364A"/>
-                </a:solidFill>
-                <a:latin typeface="Aptos" pitchFamily="34" charset="0"/>
-                <a:ea typeface="Aptos" pitchFamily="34" charset="-122"/>
-                <a:cs typeface="Aptos" pitchFamily="34" charset="-120"/>
-              </a:rPr>
-              <a:t>Natural language processing is a branch of AI that works with human language.</a:t>
+                  <a:srgbClr val="003A63"/>
+                </a:solidFill>
+                <a:latin typeface="Aptos" pitchFamily="34" charset="0"/>
+                <a:ea typeface="Aptos" pitchFamily="34" charset="-122"/>
+                <a:cs typeface="Aptos" pitchFamily="34" charset="-120"/>
+              </a:rPr>
+              <a:t>• Natural language processing is a branch of AI that works with human language.</a:t>
             </a:r>
             <a:endParaRPr lang="en-US" sz="2100" dirty="0"/>
           </a:p>
           <a:p>
+            <a:pPr indent="0" marL="0">
+              <a:buNone/>
+            </a:pPr>
             <a:r>
               <a:rPr lang="en-US" sz="2100" dirty="0">
                 <a:solidFill>
-                  <a:srgbClr val="17364A"/>
-                </a:solidFill>
-                <a:latin typeface="Aptos" pitchFamily="34" charset="0"/>
-                <a:ea typeface="Aptos" pitchFamily="34" charset="-122"/>
-                <a:cs typeface="Aptos" pitchFamily="34" charset="-120"/>
-              </a:rPr>
-              <a:t>Public health agencies often hold important information in free-text sources, including clinical notes, case.</a:t>
+                  <a:srgbClr val="003A63"/>
+                </a:solidFill>
+                <a:latin typeface="Aptos" pitchFamily="34" charset="0"/>
+                <a:ea typeface="Aptos" pitchFamily="34" charset="-122"/>
+                <a:cs typeface="Aptos" pitchFamily="34" charset="-120"/>
+              </a:rPr>
+              <a:t>• Public health agencies often hold important information in free-text sources, including.</a:t>
             </a:r>
             <a:endParaRPr lang="en-US" sz="2100" dirty="0"/>
           </a:p>
           <a:p>
+            <a:pPr indent="0" marL="0">
+              <a:buNone/>
+            </a:pPr>
             <a:r>
               <a:rPr lang="en-US" sz="2100" dirty="0">
                 <a:solidFill>
-                  <a:srgbClr val="17364A"/>
-                </a:solidFill>
-                <a:latin typeface="Aptos" pitchFamily="34" charset="0"/>
-                <a:ea typeface="Aptos" pitchFamily="34" charset="-122"/>
-                <a:cs typeface="Aptos" pitchFamily="34" charset="-120"/>
-              </a:rPr>
-              <a:t>This module teaches learners how NLP can support public health work and how to evaluate its risks.</a:t>
+                  <a:srgbClr val="003A63"/>
+                </a:solidFill>
+                <a:latin typeface="Aptos" pitchFamily="34" charset="0"/>
+                <a:ea typeface="Aptos" pitchFamily="34" charset="-122"/>
+                <a:cs typeface="Aptos" pitchFamily="34" charset="-120"/>
+              </a:rPr>
+              <a:t>• This module teaches learners how NLP can support public health work and how to evaluate its.</a:t>
             </a:r>
             <a:endParaRPr lang="en-US" sz="2100" dirty="0"/>
           </a:p>
@@ -10272,17 +10437,17 @@
         </p:nvSpPr>
         <p:spPr>
           <a:xfrm>
-            <a:off x="8074152" y="1920240"/>
-            <a:ext cx="2825496" cy="1280160"/>
-          </a:xfrm>
-          <a:prstGeom prst="rect">
-            <a:avLst/>
-          </a:prstGeom>
-          <a:noFill/>
-          <a:ln/>
-        </p:spPr>
-        <p:txBody>
-          <a:bodyPr wrap="square" lIns="0" tIns="0" rIns="0" bIns="0" rtlCol="0" anchor="t">
+            <a:off x="8074152" y="1892808"/>
+            <a:ext cx="2825496" cy="1353312"/>
+          </a:xfrm>
+          <a:prstGeom prst="rect">
+            <a:avLst/>
+          </a:prstGeom>
+          <a:noFill/>
+          <a:ln/>
+        </p:spPr>
+        <p:txBody>
+          <a:bodyPr wrap="square" lIns="254" tIns="254" rIns="254" bIns="254" rtlCol="0" anchor="t">
             <a:normAutofit/>
           </a:bodyPr>
           <a:lstStyle/>
@@ -10291,7 +10456,7 @@
               <a:buNone/>
             </a:pPr>
             <a:r>
-              <a:rPr lang="en-US" sz="1550" dirty="0">
+              <a:rPr lang="en-US" sz="1320" dirty="0">
                 <a:solidFill>
                   <a:srgbClr val="17364A"/>
                 </a:solidFill>
@@ -10299,43 +10464,9 @@
                 <a:ea typeface="Aptos" pitchFamily="34" charset="-122"/>
                 <a:cs typeface="Aptos" pitchFamily="34" charset="-120"/>
               </a:rPr>
-              <a:t>Level: applied/foundational</a:t>
-            </a:r>
-            <a:endParaRPr lang="en-US" sz="1550" dirty="0"/>
-          </a:p>
-          <a:p>
-            <a:pPr indent="0" marL="0">
-              <a:buNone/>
-            </a:pPr>
-            <a:r>
-              <a:rPr lang="en-US" sz="1550" dirty="0">
-                <a:solidFill>
-                  <a:srgbClr val="17364A"/>
-                </a:solidFill>
-                <a:latin typeface="Aptos" pitchFamily="34" charset="0"/>
-                <a:ea typeface="Aptos" pitchFamily="34" charset="-122"/>
-                <a:cs typeface="Aptos" pitchFamily="34" charset="-120"/>
-              </a:rPr>
-              <a:t>Primary track: Analytics and Modeling Track</a:t>
-            </a:r>
-            <a:endParaRPr lang="en-US" sz="1550" dirty="0"/>
-          </a:p>
-          <a:p>
-            <a:pPr indent="0" marL="0">
-              <a:buNone/>
-            </a:pPr>
-            <a:r>
-              <a:rPr lang="en-US" sz="1550" dirty="0">
-                <a:solidFill>
-                  <a:srgbClr val="17364A"/>
-                </a:solidFill>
-                <a:latin typeface="Aptos" pitchFamily="34" charset="0"/>
-                <a:ea typeface="Aptos" pitchFamily="34" charset="-122"/>
-                <a:cs typeface="Aptos" pitchFamily="34" charset="-120"/>
-              </a:rPr>
-              <a:t>Appears in tracks: technical-architecture</a:t>
-            </a:r>
-            <a:endParaRPr lang="en-US" sz="1550" dirty="0"/>
+              <a:t>Level: applied/foundational Primary track: Analytics and Modeling Track Appears in tracks: technical-architecture</a:t>
+            </a:r>
+            <a:endParaRPr lang="en-US" sz="1320" dirty="0"/>
           </a:p>
         </p:txBody>
       </p:sp>
@@ -10423,13 +10554,16 @@
           <a:ln/>
         </p:spPr>
         <p:txBody>
-          <a:bodyPr wrap="square" lIns="254" tIns="254" rIns="254" bIns="254" rtlCol="0" anchor="t">
+          <a:bodyPr wrap="square" lIns="508" tIns="508" rIns="508" bIns="508" rtlCol="0" anchor="t">
             <a:normAutofit/>
           </a:bodyPr>
           <a:lstStyle/>
           <a:p>
-            <a:r>
-              <a:rPr lang="en-US" sz="1380" dirty="0">
+            <a:pPr indent="0" marL="0">
+              <a:buNone/>
+            </a:pPr>
+            <a:r>
+              <a:rPr lang="en-US" sz="1220" dirty="0">
                 <a:solidFill>
                   <a:srgbClr val="17364A"/>
                 </a:solidFill>
@@ -10439,11 +10573,14 @@
               </a:rPr>
               <a:t>Read the module for shared vocabulary and context.</a:t>
             </a:r>
-            <a:endParaRPr lang="en-US" sz="1380" dirty="0"/>
-          </a:p>
-          <a:p>
-            <a:r>
-              <a:rPr lang="en-US" sz="1380" dirty="0">
+            <a:endParaRPr lang="en-US" sz="1220" dirty="0"/>
+          </a:p>
+          <a:p>
+            <a:pPr indent="0" marL="0">
+              <a:buNone/>
+            </a:pPr>
+            <a:r>
+              <a:rPr lang="en-US" sz="1220" dirty="0">
                 <a:solidFill>
                   <a:srgbClr val="17364A"/>
                 </a:solidFill>
@@ -10453,11 +10590,14 @@
               </a:rPr>
               <a:t>Complete the practical exercise to apply the concept.</a:t>
             </a:r>
-            <a:endParaRPr lang="en-US" sz="1380" dirty="0"/>
-          </a:p>
-          <a:p>
-            <a:r>
-              <a:rPr lang="en-US" sz="1380" dirty="0">
+            <a:endParaRPr lang="en-US" sz="1220" dirty="0"/>
+          </a:p>
+          <a:p>
+            <a:pPr indent="0" marL="0">
+              <a:buNone/>
+            </a:pPr>
+            <a:r>
+              <a:rPr lang="en-US" sz="1220" dirty="0">
                 <a:solidFill>
                   <a:srgbClr val="17364A"/>
                 </a:solidFill>
@@ -10467,7 +10607,7 @@
               </a:rPr>
               <a:t>Use the notes and references for deeper review.</a:t>
             </a:r>
-            <a:endParaRPr lang="en-US" sz="1380" dirty="0"/>
+            <a:endParaRPr lang="en-US" sz="1220" dirty="0"/>
           </a:p>
         </p:txBody>
       </p:sp>
@@ -10768,49 +10908,58 @@
           <a:ln/>
         </p:spPr>
         <p:txBody>
-          <a:bodyPr wrap="square" lIns="635" tIns="635" rIns="635" bIns="635" rtlCol="0" anchor="t">
+          <a:bodyPr wrap="square" lIns="1016" tIns="1016" rIns="1016" bIns="1016" rtlCol="0" anchor="t">
             <a:normAutofit/>
           </a:bodyPr>
           <a:lstStyle/>
           <a:p>
+            <a:pPr indent="0" marL="0">
+              <a:buNone/>
+            </a:pPr>
             <a:r>
               <a:rPr lang="en-US" sz="2100" dirty="0">
                 <a:solidFill>
-                  <a:srgbClr val="17364A"/>
-                </a:solidFill>
-                <a:latin typeface="Aptos" pitchFamily="34" charset="0"/>
-                <a:ea typeface="Aptos" pitchFamily="34" charset="-122"/>
-                <a:cs typeface="Aptos" pitchFamily="34" charset="-120"/>
-              </a:rPr>
-              <a:t>NLP use case description</a:t>
+                  <a:srgbClr val="003A63"/>
+                </a:solidFill>
+                <a:latin typeface="Aptos" pitchFamily="34" charset="0"/>
+                <a:ea typeface="Aptos" pitchFamily="34" charset="-122"/>
+                <a:cs typeface="Aptos" pitchFamily="34" charset="-120"/>
+              </a:rPr>
+              <a:t>• NLP use case description</a:t>
             </a:r>
             <a:endParaRPr lang="en-US" sz="2100" dirty="0"/>
           </a:p>
           <a:p>
+            <a:pPr indent="0" marL="0">
+              <a:buNone/>
+            </a:pPr>
             <a:r>
               <a:rPr lang="en-US" sz="2100" dirty="0">
                 <a:solidFill>
-                  <a:srgbClr val="17364A"/>
-                </a:solidFill>
-                <a:latin typeface="Aptos" pitchFamily="34" charset="0"/>
-                <a:ea typeface="Aptos" pitchFamily="34" charset="-122"/>
-                <a:cs typeface="Aptos" pitchFamily="34" charset="-120"/>
-              </a:rPr>
-              <a:t>NLP evaluation plan</a:t>
+                  <a:srgbClr val="003A63"/>
+                </a:solidFill>
+                <a:latin typeface="Aptos" pitchFamily="34" charset="0"/>
+                <a:ea typeface="Aptos" pitchFamily="34" charset="-122"/>
+                <a:cs typeface="Aptos" pitchFamily="34" charset="-120"/>
+              </a:rPr>
+              <a:t>• NLP evaluation plan</a:t>
             </a:r>
             <a:endParaRPr lang="en-US" sz="2100" dirty="0"/>
           </a:p>
           <a:p>
+            <a:pPr indent="0" marL="0">
+              <a:buNone/>
+            </a:pPr>
             <a:r>
               <a:rPr lang="en-US" sz="2100" dirty="0">
                 <a:solidFill>
-                  <a:srgbClr val="17364A"/>
-                </a:solidFill>
-                <a:latin typeface="Aptos" pitchFamily="34" charset="0"/>
-                <a:ea typeface="Aptos" pitchFamily="34" charset="-122"/>
-                <a:cs typeface="Aptos" pitchFamily="34" charset="-120"/>
-              </a:rPr>
-              <a:t>Human review checklist</a:t>
+                  <a:srgbClr val="003A63"/>
+                </a:solidFill>
+                <a:latin typeface="Aptos" pitchFamily="34" charset="0"/>
+                <a:ea typeface="Aptos" pitchFamily="34" charset="-122"/>
+                <a:cs typeface="Aptos" pitchFamily="34" charset="-120"/>
+              </a:rPr>
+              <a:t>• Human review checklist</a:t>
             </a:r>
             <a:endParaRPr lang="en-US" sz="2100" dirty="0"/>
           </a:p>
@@ -10890,17 +11039,17 @@
         </p:nvSpPr>
         <p:spPr>
           <a:xfrm>
-            <a:off x="7799832" y="1828800"/>
-            <a:ext cx="3145536" cy="685800"/>
-          </a:xfrm>
-          <a:prstGeom prst="rect">
-            <a:avLst/>
-          </a:prstGeom>
-          <a:noFill/>
-          <a:ln/>
-        </p:spPr>
-        <p:txBody>
-          <a:bodyPr wrap="square" lIns="0" tIns="0" rIns="0" bIns="0" rtlCol="0" anchor="t">
+            <a:off x="7799832" y="1801368"/>
+            <a:ext cx="3145536" cy="758952"/>
+          </a:xfrm>
+          <a:prstGeom prst="rect">
+            <a:avLst/>
+          </a:prstGeom>
+          <a:noFill/>
+          <a:ln/>
+        </p:spPr>
+        <p:txBody>
+          <a:bodyPr wrap="square" lIns="254" tIns="254" rIns="254" bIns="254" rtlCol="0" anchor="t">
             <a:normAutofit/>
           </a:bodyPr>
           <a:lstStyle/>
@@ -10909,7 +11058,7 @@
               <a:buNone/>
             </a:pPr>
             <a:r>
-              <a:rPr lang="en-US" sz="1550" dirty="0">
+              <a:rPr lang="en-US" sz="1320" dirty="0">
                 <a:solidFill>
                   <a:srgbClr val="17364A"/>
                 </a:solidFill>
@@ -10919,7 +11068,7 @@
               </a:rPr>
               <a:t>NLP use case description</a:t>
             </a:r>
-            <a:endParaRPr lang="en-US" sz="1550" dirty="0"/>
+            <a:endParaRPr lang="en-US" sz="1320" dirty="0"/>
           </a:p>
         </p:txBody>
       </p:sp>
@@ -11007,13 +11156,16 @@
           <a:ln/>
         </p:spPr>
         <p:txBody>
-          <a:bodyPr wrap="square" lIns="254" tIns="254" rIns="254" bIns="254" rtlCol="0" anchor="t">
+          <a:bodyPr wrap="square" lIns="508" tIns="508" rIns="508" bIns="508" rtlCol="0" anchor="t">
             <a:normAutofit/>
           </a:bodyPr>
           <a:lstStyle/>
           <a:p>
-            <a:r>
-              <a:rPr lang="en-US" sz="1380" dirty="0">
+            <a:pPr indent="0" marL="0">
+              <a:buNone/>
+            </a:pPr>
+            <a:r>
+              <a:rPr lang="en-US" sz="1220" dirty="0">
                 <a:solidFill>
                   <a:srgbClr val="17364A"/>
                 </a:solidFill>
@@ -11023,11 +11175,14 @@
               </a:rPr>
               <a:t>NLP use case description</a:t>
             </a:r>
-            <a:endParaRPr lang="en-US" sz="1380" dirty="0"/>
-          </a:p>
-          <a:p>
-            <a:r>
-              <a:rPr lang="en-US" sz="1380" dirty="0">
+            <a:endParaRPr lang="en-US" sz="1220" dirty="0"/>
+          </a:p>
+          <a:p>
+            <a:pPr indent="0" marL="0">
+              <a:buNone/>
+            </a:pPr>
+            <a:r>
+              <a:rPr lang="en-US" sz="1220" dirty="0">
                 <a:solidFill>
                   <a:srgbClr val="17364A"/>
                 </a:solidFill>
@@ -11037,11 +11192,14 @@
               </a:rPr>
               <a:t>NLP evaluation plan</a:t>
             </a:r>
-            <a:endParaRPr lang="en-US" sz="1380" dirty="0"/>
-          </a:p>
-          <a:p>
-            <a:r>
-              <a:rPr lang="en-US" sz="1380" dirty="0">
+            <a:endParaRPr lang="en-US" sz="1220" dirty="0"/>
+          </a:p>
+          <a:p>
+            <a:pPr indent="0" marL="0">
+              <a:buNone/>
+            </a:pPr>
+            <a:r>
+              <a:rPr lang="en-US" sz="1220" dirty="0">
                 <a:solidFill>
                   <a:srgbClr val="17364A"/>
                 </a:solidFill>
@@ -11051,7 +11209,7 @@
               </a:rPr>
               <a:t>Human review checklist</a:t>
             </a:r>
-            <a:endParaRPr lang="en-US" sz="1380" dirty="0"/>
+            <a:endParaRPr lang="en-US" sz="1220" dirty="0"/>
           </a:p>
         </p:txBody>
       </p:sp>
@@ -11129,17 +11287,17 @@
         </p:nvSpPr>
         <p:spPr>
           <a:xfrm>
-            <a:off x="7799832" y="5001768"/>
-            <a:ext cx="3145536" cy="502920"/>
-          </a:xfrm>
-          <a:prstGeom prst="rect">
-            <a:avLst/>
-          </a:prstGeom>
-          <a:noFill/>
-          <a:ln/>
-        </p:spPr>
-        <p:txBody>
-          <a:bodyPr wrap="square" lIns="0" tIns="0" rIns="0" bIns="0" rtlCol="0" anchor="t">
+            <a:off x="7799832" y="4974336"/>
+            <a:ext cx="3145536" cy="576072"/>
+          </a:xfrm>
+          <a:prstGeom prst="rect">
+            <a:avLst/>
+          </a:prstGeom>
+          <a:noFill/>
+          <a:ln/>
+        </p:spPr>
+        <p:txBody>
+          <a:bodyPr wrap="square" lIns="254" tIns="254" rIns="254" bIns="254" rtlCol="0" anchor="t">
             <a:normAutofit/>
           </a:bodyPr>
           <a:lstStyle/>
@@ -11148,7 +11306,7 @@
               <a:buNone/>
             </a:pPr>
             <a:r>
-              <a:rPr lang="en-US" sz="1550" dirty="0">
+              <a:rPr lang="en-US" sz="1320" dirty="0">
                 <a:solidFill>
                   <a:srgbClr val="17364A"/>
                 </a:solidFill>
@@ -11156,9 +11314,9 @@
                 <a:ea typeface="Aptos" pitchFamily="34" charset="-122"/>
                 <a:cs typeface="Aptos" pitchFamily="34" charset="-120"/>
               </a:rPr>
-              <a:t>Use the assignment to test whether you can explain the concept, apply it to a realistic public health situation, and identify what would need review before the work moves forward.</a:t>
-            </a:r>
-            <a:endParaRPr lang="en-US" sz="1550" dirty="0"/>
+              <a:t>Use the assignment to test whether you can explain the concept, apply it to a realistic public health situation, and.</a:t>
+            </a:r>
+            <a:endParaRPr lang="en-US" sz="1320" dirty="0"/>
           </a:p>
         </p:txBody>
       </p:sp>
@@ -11459,49 +11617,58 @@
           <a:ln/>
         </p:spPr>
         <p:txBody>
-          <a:bodyPr wrap="square" lIns="635" tIns="635" rIns="635" bIns="635" rtlCol="0" anchor="t">
+          <a:bodyPr wrap="square" lIns="1016" tIns="1016" rIns="1016" bIns="1016" rtlCol="0" anchor="t">
             <a:normAutofit/>
           </a:bodyPr>
           <a:lstStyle/>
           <a:p>
+            <a:pPr indent="0" marL="0">
+              <a:buNone/>
+            </a:pPr>
             <a:r>
               <a:rPr lang="en-US" sz="2100" dirty="0">
                 <a:solidFill>
-                  <a:srgbClr val="17364A"/>
-                </a:solidFill>
-                <a:latin typeface="Aptos" pitchFamily="34" charset="0"/>
-                <a:ea typeface="Aptos" pitchFamily="34" charset="-122"/>
-                <a:cs typeface="Aptos" pitchFamily="34" charset="-120"/>
-              </a:rPr>
-              <a:t>1. What is NLP?</a:t>
+                  <a:srgbClr val="003A63"/>
+                </a:solidFill>
+                <a:latin typeface="Aptos" pitchFamily="34" charset="0"/>
+                <a:ea typeface="Aptos" pitchFamily="34" charset="-122"/>
+                <a:cs typeface="Aptos" pitchFamily="34" charset="-120"/>
+              </a:rPr>
+              <a:t>• 1. What is NLP?</a:t>
             </a:r>
             <a:endParaRPr lang="en-US" sz="2100" dirty="0"/>
           </a:p>
           <a:p>
+            <a:pPr indent="0" marL="0">
+              <a:buNone/>
+            </a:pPr>
             <a:r>
               <a:rPr lang="en-US" sz="2100" dirty="0">
                 <a:solidFill>
-                  <a:srgbClr val="17364A"/>
-                </a:solidFill>
-                <a:latin typeface="Aptos" pitchFamily="34" charset="0"/>
-                <a:ea typeface="Aptos" pitchFamily="34" charset="-122"/>
-                <a:cs typeface="Aptos" pitchFamily="34" charset="-120"/>
-              </a:rPr>
-              <a:t>2. Which task is an example of information extraction?</a:t>
+                  <a:srgbClr val="003A63"/>
+                </a:solidFill>
+                <a:latin typeface="Aptos" pitchFamily="34" charset="0"/>
+                <a:ea typeface="Aptos" pitchFamily="34" charset="-122"/>
+                <a:cs typeface="Aptos" pitchFamily="34" charset="-120"/>
+              </a:rPr>
+              <a:t>• 2. Which task is an example of information extraction?</a:t>
             </a:r>
             <a:endParaRPr lang="en-US" sz="2100" dirty="0"/>
           </a:p>
           <a:p>
+            <a:pPr indent="0" marL="0">
+              <a:buNone/>
+            </a:pPr>
             <a:r>
               <a:rPr lang="en-US" sz="2100" dirty="0">
                 <a:solidFill>
-                  <a:srgbClr val="17364A"/>
-                </a:solidFill>
-                <a:latin typeface="Aptos" pitchFamily="34" charset="0"/>
-                <a:ea typeface="Aptos" pitchFamily="34" charset="-122"/>
-                <a:cs typeface="Aptos" pitchFamily="34" charset="-120"/>
-              </a:rPr>
-              <a:t>3. Why is source verification important for NLP outputs?</a:t>
+                  <a:srgbClr val="003A63"/>
+                </a:solidFill>
+                <a:latin typeface="Aptos" pitchFamily="34" charset="0"/>
+                <a:ea typeface="Aptos" pitchFamily="34" charset="-122"/>
+                <a:cs typeface="Aptos" pitchFamily="34" charset="-120"/>
+              </a:rPr>
+              <a:t>• 3. Why is source verification important for NLP outputs?</a:t>
             </a:r>
             <a:endParaRPr lang="en-US" sz="2100" dirty="0"/>
           </a:p>
@@ -11581,17 +11748,17 @@
         </p:nvSpPr>
         <p:spPr>
           <a:xfrm>
-            <a:off x="7799832" y="1828800"/>
-            <a:ext cx="3145536" cy="685800"/>
-          </a:xfrm>
-          <a:prstGeom prst="rect">
-            <a:avLst/>
-          </a:prstGeom>
-          <a:noFill/>
-          <a:ln/>
-        </p:spPr>
-        <p:txBody>
-          <a:bodyPr wrap="square" lIns="0" tIns="0" rIns="0" bIns="0" rtlCol="0" anchor="t">
+            <a:off x="7799832" y="1801368"/>
+            <a:ext cx="3145536" cy="758952"/>
+          </a:xfrm>
+          <a:prstGeom prst="rect">
+            <a:avLst/>
+          </a:prstGeom>
+          <a:noFill/>
+          <a:ln/>
+        </p:spPr>
+        <p:txBody>
+          <a:bodyPr wrap="square" lIns="254" tIns="254" rIns="254" bIns="254" rtlCol="0" anchor="t">
             <a:normAutofit/>
           </a:bodyPr>
           <a:lstStyle/>
@@ -11600,7 +11767,7 @@
               <a:buNone/>
             </a:pPr>
             <a:r>
-              <a:rPr lang="en-US" sz="1550" dirty="0">
+              <a:rPr lang="en-US" sz="1320" dirty="0">
                 <a:solidFill>
                   <a:srgbClr val="17364A"/>
                 </a:solidFill>
@@ -11610,7 +11777,7 @@
               </a:rPr>
               <a:t>1. What is NLP?</a:t>
             </a:r>
-            <a:endParaRPr lang="en-US" sz="1550" dirty="0"/>
+            <a:endParaRPr lang="en-US" sz="1320" dirty="0"/>
           </a:p>
         </p:txBody>
       </p:sp>
@@ -11698,13 +11865,16 @@
           <a:ln/>
         </p:spPr>
         <p:txBody>
-          <a:bodyPr wrap="square" lIns="254" tIns="254" rIns="254" bIns="254" rtlCol="0" anchor="t">
+          <a:bodyPr wrap="square" lIns="508" tIns="508" rIns="508" bIns="508" rtlCol="0" anchor="t">
             <a:normAutofit/>
           </a:bodyPr>
           <a:lstStyle/>
           <a:p>
-            <a:r>
-              <a:rPr lang="en-US" sz="1380" dirty="0">
+            <a:pPr indent="0" marL="0">
+              <a:buNone/>
+            </a:pPr>
+            <a:r>
+              <a:rPr lang="en-US" sz="1220" dirty="0">
                 <a:solidFill>
                   <a:srgbClr val="17364A"/>
                 </a:solidFill>
@@ -11714,11 +11884,14 @@
               </a:rPr>
               <a:t>1.</a:t>
             </a:r>
-            <a:endParaRPr lang="en-US" sz="1380" dirty="0"/>
-          </a:p>
-          <a:p>
-            <a:r>
-              <a:rPr lang="en-US" sz="1380" dirty="0">
+            <a:endParaRPr lang="en-US" sz="1220" dirty="0"/>
+          </a:p>
+          <a:p>
+            <a:pPr indent="0" marL="0">
+              <a:buNone/>
+            </a:pPr>
+            <a:r>
+              <a:rPr lang="en-US" sz="1220" dirty="0">
                 <a:solidFill>
                   <a:srgbClr val="17364A"/>
                 </a:solidFill>
@@ -11728,11 +11901,14 @@
               </a:rPr>
               <a:t>What is NLP?</a:t>
             </a:r>
-            <a:endParaRPr lang="en-US" sz="1380" dirty="0"/>
-          </a:p>
-          <a:p>
-            <a:r>
-              <a:rPr lang="en-US" sz="1380" dirty="0">
+            <a:endParaRPr lang="en-US" sz="1220" dirty="0"/>
+          </a:p>
+          <a:p>
+            <a:pPr indent="0" marL="0">
+              <a:buNone/>
+            </a:pPr>
+            <a:r>
+              <a:rPr lang="en-US" sz="1220" dirty="0">
                 <a:solidFill>
                   <a:srgbClr val="17364A"/>
                 </a:solidFill>
@@ -11742,7 +11918,7 @@
               </a:rPr>
               <a:t>2.</a:t>
             </a:r>
-            <a:endParaRPr lang="en-US" sz="1380" dirty="0"/>
+            <a:endParaRPr lang="en-US" sz="1220" dirty="0"/>
           </a:p>
         </p:txBody>
       </p:sp>
@@ -11820,17 +11996,17 @@
         </p:nvSpPr>
         <p:spPr>
           <a:xfrm>
-            <a:off x="7799832" y="5001768"/>
-            <a:ext cx="3145536" cy="502920"/>
-          </a:xfrm>
-          <a:prstGeom prst="rect">
-            <a:avLst/>
-          </a:prstGeom>
-          <a:noFill/>
-          <a:ln/>
-        </p:spPr>
-        <p:txBody>
-          <a:bodyPr wrap="square" lIns="0" tIns="0" rIns="0" bIns="0" rtlCol="0" anchor="t">
+            <a:off x="7799832" y="4974336"/>
+            <a:ext cx="3145536" cy="576072"/>
+          </a:xfrm>
+          <a:prstGeom prst="rect">
+            <a:avLst/>
+          </a:prstGeom>
+          <a:noFill/>
+          <a:ln/>
+        </p:spPr>
+        <p:txBody>
+          <a:bodyPr wrap="square" lIns="254" tIns="254" rIns="254" bIns="254" rtlCol="0" anchor="t">
             <a:normAutofit/>
           </a:bodyPr>
           <a:lstStyle/>
@@ -11839,7 +12015,7 @@
               <a:buNone/>
             </a:pPr>
             <a:r>
-              <a:rPr lang="en-US" sz="1550" dirty="0">
+              <a:rPr lang="en-US" sz="1320" dirty="0">
                 <a:solidFill>
                   <a:srgbClr val="17364A"/>
                 </a:solidFill>
@@ -11847,9 +12023,9 @@
                 <a:ea typeface="Aptos" pitchFamily="34" charset="-122"/>
                 <a:cs typeface="Aptos" pitchFamily="34" charset="-120"/>
               </a:rPr>
-              <a:t>Use the assignment to test whether you can explain the concept, apply it to a realistic public health situation, and identify what would need review before the work moves forward.</a:t>
-            </a:r>
-            <a:endParaRPr lang="en-US" sz="1550" dirty="0"/>
+              <a:t>Use the assignment to test whether you can explain the concept, apply it to a realistic public health situation, and.</a:t>
+            </a:r>
+            <a:endParaRPr lang="en-US" sz="1320" dirty="0"/>
           </a:p>
         </p:txBody>
       </p:sp>
@@ -12150,49 +12326,58 @@
           <a:ln/>
         </p:spPr>
         <p:txBody>
-          <a:bodyPr wrap="square" lIns="635" tIns="635" rIns="635" bIns="635" rtlCol="0" anchor="t">
+          <a:bodyPr wrap="square" lIns="1016" tIns="1016" rIns="1016" bIns="1016" rtlCol="0" anchor="t">
             <a:normAutofit/>
           </a:bodyPr>
           <a:lstStyle/>
           <a:p>
+            <a:pPr indent="0" marL="0">
+              <a:buNone/>
+            </a:pPr>
             <a:r>
               <a:rPr lang="en-US" sz="2100" dirty="0">
                 <a:solidFill>
-                  <a:srgbClr val="17364A"/>
-                </a:solidFill>
-                <a:latin typeface="Aptos" pitchFamily="34" charset="0"/>
-                <a:ea typeface="Aptos" pitchFamily="34" charset="-122"/>
-                <a:cs typeface="Aptos" pitchFamily="34" charset="-120"/>
-              </a:rPr>
-              <a:t>NIST Artificial Intelligence Risk Management Framework:.</a:t>
+                  <a:srgbClr val="003A63"/>
+                </a:solidFill>
+                <a:latin typeface="Aptos" pitchFamily="34" charset="0"/>
+                <a:ea typeface="Aptos" pitchFamily="34" charset="-122"/>
+                <a:cs typeface="Aptos" pitchFamily="34" charset="-120"/>
+              </a:rPr>
+              <a:t>• NIST Artificial Intelligence Risk Management Framework:.</a:t>
             </a:r>
             <a:endParaRPr lang="en-US" sz="2100" dirty="0"/>
           </a:p>
           <a:p>
+            <a:pPr indent="0" marL="0">
+              <a:buNone/>
+            </a:pPr>
             <a:r>
               <a:rPr lang="en-US" sz="2100" dirty="0">
                 <a:solidFill>
-                  <a:srgbClr val="17364A"/>
-                </a:solidFill>
-                <a:latin typeface="Aptos" pitchFamily="34" charset="0"/>
-                <a:ea typeface="Aptos" pitchFamily="34" charset="-122"/>
-                <a:cs typeface="Aptos" pitchFamily="34" charset="-120"/>
-              </a:rPr>
-              <a:t>NIST AI RMF Generative AI Profile:.</a:t>
+                  <a:srgbClr val="003A63"/>
+                </a:solidFill>
+                <a:latin typeface="Aptos" pitchFamily="34" charset="0"/>
+                <a:ea typeface="Aptos" pitchFamily="34" charset="-122"/>
+                <a:cs typeface="Aptos" pitchFamily="34" charset="-120"/>
+              </a:rPr>
+              <a:t>• NIST AI RMF Generative AI Profile:.</a:t>
             </a:r>
             <a:endParaRPr lang="en-US" sz="2100" dirty="0"/>
           </a:p>
           <a:p>
+            <a:pPr indent="0" marL="0">
+              <a:buNone/>
+            </a:pPr>
             <a:r>
               <a:rPr lang="en-US" sz="2100" dirty="0">
                 <a:solidFill>
-                  <a:srgbClr val="17364A"/>
-                </a:solidFill>
-                <a:latin typeface="Aptos" pitchFamily="34" charset="0"/>
-                <a:ea typeface="Aptos" pitchFamily="34" charset="-122"/>
-                <a:cs typeface="Aptos" pitchFamily="34" charset="-120"/>
-              </a:rPr>
-              <a:t>WHO Guidance on Large Multi-Modal Models: https://www.who.int/publications/i/item/9789240084759</a:t>
+                  <a:srgbClr val="003A63"/>
+                </a:solidFill>
+                <a:latin typeface="Aptos" pitchFamily="34" charset="0"/>
+                <a:ea typeface="Aptos" pitchFamily="34" charset="-122"/>
+                <a:cs typeface="Aptos" pitchFamily="34" charset="-120"/>
+              </a:rPr>
+              <a:t>• WHO Guidance on Large Multi-Modal Models: https://www.who.int/publications/i/item/9789240084759</a:t>
             </a:r>
             <a:endParaRPr lang="en-US" sz="2100" dirty="0"/>
           </a:p>
@@ -12272,17 +12457,17 @@
         </p:nvSpPr>
         <p:spPr>
           <a:xfrm>
-            <a:off x="7799832" y="1828800"/>
-            <a:ext cx="3145536" cy="685800"/>
-          </a:xfrm>
-          <a:prstGeom prst="rect">
-            <a:avLst/>
-          </a:prstGeom>
-          <a:noFill/>
-          <a:ln/>
-        </p:spPr>
-        <p:txBody>
-          <a:bodyPr wrap="square" lIns="0" tIns="0" rIns="0" bIns="0" rtlCol="0" anchor="t">
+            <a:off x="7799832" y="1801368"/>
+            <a:ext cx="3145536" cy="758952"/>
+          </a:xfrm>
+          <a:prstGeom prst="rect">
+            <a:avLst/>
+          </a:prstGeom>
+          <a:noFill/>
+          <a:ln/>
+        </p:spPr>
+        <p:txBody>
+          <a:bodyPr wrap="square" lIns="254" tIns="254" rIns="254" bIns="254" rtlCol="0" anchor="t">
             <a:normAutofit/>
           </a:bodyPr>
           <a:lstStyle/>
@@ -12291,7 +12476,7 @@
               <a:buNone/>
             </a:pPr>
             <a:r>
-              <a:rPr lang="en-US" sz="1550" dirty="0">
+              <a:rPr lang="en-US" sz="1320" dirty="0">
                 <a:solidFill>
                   <a:srgbClr val="17364A"/>
                 </a:solidFill>
@@ -12301,7 +12486,7 @@
               </a:rPr>
               <a:t>NIST Artificial Intelligence Risk Management Framework:.</a:t>
             </a:r>
-            <a:endParaRPr lang="en-US" sz="1550" dirty="0"/>
+            <a:endParaRPr lang="en-US" sz="1320" dirty="0"/>
           </a:p>
         </p:txBody>
       </p:sp>
@@ -12389,13 +12574,16 @@
           <a:ln/>
         </p:spPr>
         <p:txBody>
-          <a:bodyPr wrap="square" lIns="254" tIns="254" rIns="254" bIns="254" rtlCol="0" anchor="t">
+          <a:bodyPr wrap="square" lIns="508" tIns="508" rIns="508" bIns="508" rtlCol="0" anchor="t">
             <a:normAutofit/>
           </a:bodyPr>
           <a:lstStyle/>
           <a:p>
-            <a:r>
-              <a:rPr lang="en-US" sz="1380" dirty="0">
+            <a:pPr indent="0" marL="0">
+              <a:buNone/>
+            </a:pPr>
+            <a:r>
+              <a:rPr lang="en-US" sz="1220" dirty="0">
                 <a:solidFill>
                   <a:srgbClr val="17364A"/>
                 </a:solidFill>
@@ -12405,11 +12593,14 @@
               </a:rPr>
               <a:t>NIST Artificial Intelligence Risk Management Framework:.</a:t>
             </a:r>
-            <a:endParaRPr lang="en-US" sz="1380" dirty="0"/>
-          </a:p>
-          <a:p>
-            <a:r>
-              <a:rPr lang="en-US" sz="1380" dirty="0">
+            <a:endParaRPr lang="en-US" sz="1220" dirty="0"/>
+          </a:p>
+          <a:p>
+            <a:pPr indent="0" marL="0">
+              <a:buNone/>
+            </a:pPr>
+            <a:r>
+              <a:rPr lang="en-US" sz="1220" dirty="0">
                 <a:solidFill>
                   <a:srgbClr val="17364A"/>
                 </a:solidFill>
@@ -12419,11 +12610,14 @@
               </a:rPr>
               <a:t>CDC Public Health Data Strategy:.</a:t>
             </a:r>
-            <a:endParaRPr lang="en-US" sz="1380" dirty="0"/>
-          </a:p>
-          <a:p>
-            <a:r>
-              <a:rPr lang="en-US" sz="1380" dirty="0">
+            <a:endParaRPr lang="en-US" sz="1220" dirty="0"/>
+          </a:p>
+          <a:p>
+            <a:pPr indent="0" marL="0">
+              <a:buNone/>
+            </a:pPr>
+            <a:r>
+              <a:rPr lang="en-US" sz="1220" dirty="0">
                 <a:solidFill>
                   <a:srgbClr val="17364A"/>
                 </a:solidFill>
@@ -12433,7 +12627,7 @@
               </a:rPr>
               <a:t>Agency privacy, records, data governance, and program policies</a:t>
             </a:r>
-            <a:endParaRPr lang="en-US" sz="1380" dirty="0"/>
+            <a:endParaRPr lang="en-US" sz="1220" dirty="0"/>
           </a:p>
         </p:txBody>
       </p:sp>
@@ -12511,17 +12705,17 @@
         </p:nvSpPr>
         <p:spPr>
           <a:xfrm>
-            <a:off x="7799832" y="5001768"/>
-            <a:ext cx="3145536" cy="502920"/>
-          </a:xfrm>
-          <a:prstGeom prst="rect">
-            <a:avLst/>
-          </a:prstGeom>
-          <a:noFill/>
-          <a:ln/>
-        </p:spPr>
-        <p:txBody>
-          <a:bodyPr wrap="square" lIns="0" tIns="0" rIns="0" bIns="0" rtlCol="0" anchor="t">
+            <a:off x="7799832" y="4974336"/>
+            <a:ext cx="3145536" cy="576072"/>
+          </a:xfrm>
+          <a:prstGeom prst="rect">
+            <a:avLst/>
+          </a:prstGeom>
+          <a:noFill/>
+          <a:ln/>
+        </p:spPr>
+        <p:txBody>
+          <a:bodyPr wrap="square" lIns="254" tIns="254" rIns="254" bIns="254" rtlCol="0" anchor="t">
             <a:normAutofit/>
           </a:bodyPr>
           <a:lstStyle/>
@@ -12530,7 +12724,7 @@
               <a:buNone/>
             </a:pPr>
             <a:r>
-              <a:rPr lang="en-US" sz="1550" dirty="0">
+              <a:rPr lang="en-US" sz="1320" dirty="0">
                 <a:solidFill>
                   <a:srgbClr val="17364A"/>
                 </a:solidFill>
@@ -12538,9 +12732,9 @@
                 <a:ea typeface="Aptos" pitchFamily="34" charset="-122"/>
                 <a:cs typeface="Aptos" pitchFamily="34" charset="-120"/>
               </a:rPr>
-              <a:t>Use the concept to plan transparent communication, gather stakeholder input, protect trust, and make sure affected communities are considered early.</a:t>
-            </a:r>
-            <a:endParaRPr lang="en-US" sz="1550" dirty="0"/>
+              <a:t>Use the concept to plan transparent communication, gather stakeholder input, protect trust, and make sure affected.</a:t>
+            </a:r>
+            <a:endParaRPr lang="en-US" sz="1320" dirty="0"/>
           </a:p>
         </p:txBody>
       </p:sp>
@@ -12841,63 +13035,75 @@
           <a:ln/>
         </p:spPr>
         <p:txBody>
-          <a:bodyPr wrap="square" lIns="635" tIns="635" rIns="635" bIns="635" rtlCol="0" anchor="t">
+          <a:bodyPr wrap="square" lIns="1016" tIns="1016" rIns="1016" bIns="1016" rtlCol="0" anchor="t">
             <a:normAutofit/>
           </a:bodyPr>
           <a:lstStyle/>
           <a:p>
+            <a:pPr indent="0" marL="0">
+              <a:buNone/>
+            </a:pPr>
             <a:r>
               <a:rPr lang="en-US" sz="1900" dirty="0">
                 <a:solidFill>
-                  <a:srgbClr val="17364A"/>
-                </a:solidFill>
-                <a:latin typeface="Aptos" pitchFamily="34" charset="0"/>
-                <a:ea typeface="Aptos" pitchFamily="34" charset="-122"/>
-                <a:cs typeface="Aptos" pitchFamily="34" charset="-120"/>
-              </a:rPr>
-              <a:t>Play 11: Build and Deploy AI Solutions - This lesson informs Play 11 by helping learners connect the lesson.</a:t>
+                  <a:srgbClr val="003A63"/>
+                </a:solidFill>
+                <a:latin typeface="Aptos" pitchFamily="34" charset="0"/>
+                <a:ea typeface="Aptos" pitchFamily="34" charset="-122"/>
+                <a:cs typeface="Aptos" pitchFamily="34" charset="-120"/>
+              </a:rPr>
+              <a:t>• Play 11: Build and Deploy AI Solutions - This lesson informs Play 11 by helping learners.</a:t>
             </a:r>
             <a:endParaRPr lang="en-US" sz="1900" dirty="0"/>
           </a:p>
           <a:p>
+            <a:pPr indent="0" marL="0">
+              <a:buNone/>
+            </a:pPr>
             <a:r>
               <a:rPr lang="en-US" sz="1900" dirty="0">
                 <a:solidFill>
-                  <a:srgbClr val="17364A"/>
-                </a:solidFill>
-                <a:latin typeface="Aptos" pitchFamily="34" charset="0"/>
-                <a:ea typeface="Aptos" pitchFamily="34" charset="-122"/>
-                <a:cs typeface="Aptos" pitchFamily="34" charset="-120"/>
-              </a:rPr>
-              <a:t>Play 2: Readiness Assessment - This lesson informs Play 2 by helping learners connect the lesson topic to.</a:t>
+                  <a:srgbClr val="003A63"/>
+                </a:solidFill>
+                <a:latin typeface="Aptos" pitchFamily="34" charset="0"/>
+                <a:ea typeface="Aptos" pitchFamily="34" charset="-122"/>
+                <a:cs typeface="Aptos" pitchFamily="34" charset="-120"/>
+              </a:rPr>
+              <a:t>• Play 2: Readiness Assessment - This lesson informs Play 2 by helping learners connect the.</a:t>
             </a:r>
             <a:endParaRPr lang="en-US" sz="1900" dirty="0"/>
           </a:p>
           <a:p>
+            <a:pPr indent="0" marL="0">
+              <a:buNone/>
+            </a:pPr>
             <a:r>
               <a:rPr lang="en-US" sz="1900" dirty="0">
                 <a:solidFill>
-                  <a:srgbClr val="17364A"/>
-                </a:solidFill>
-                <a:latin typeface="Aptos" pitchFamily="34" charset="0"/>
-                <a:ea typeface="Aptos" pitchFamily="34" charset="-122"/>
-                <a:cs typeface="Aptos" pitchFamily="34" charset="-120"/>
-              </a:rPr>
-              <a:t>Play 7: Prioritize Use Cases - This lesson informs Play 7 by helping learners connect the lesson topic to.</a:t>
+                  <a:srgbClr val="003A63"/>
+                </a:solidFill>
+                <a:latin typeface="Aptos" pitchFamily="34" charset="0"/>
+                <a:ea typeface="Aptos" pitchFamily="34" charset="-122"/>
+                <a:cs typeface="Aptos" pitchFamily="34" charset="-120"/>
+              </a:rPr>
+              <a:t>• Play 7: Prioritize Use Cases - This lesson informs Play 7 by helping learners connect the.</a:t>
             </a:r>
             <a:endParaRPr lang="en-US" sz="1900" dirty="0"/>
           </a:p>
           <a:p>
+            <a:pPr indent="0" marL="0">
+              <a:buNone/>
+            </a:pPr>
             <a:r>
               <a:rPr lang="en-US" sz="1900" dirty="0">
                 <a:solidFill>
-                  <a:srgbClr val="17364A"/>
-                </a:solidFill>
-                <a:latin typeface="Aptos" pitchFamily="34" charset="0"/>
-                <a:ea typeface="Aptos" pitchFamily="34" charset="-122"/>
-                <a:cs typeface="Aptos" pitchFamily="34" charset="-120"/>
-              </a:rPr>
-              <a:t>Play 1: Vision &amp; Guardrails - This lesson informs Play 1 by helping learners connect the lesson topic to.</a:t>
+                  <a:srgbClr val="003A63"/>
+                </a:solidFill>
+                <a:latin typeface="Aptos" pitchFamily="34" charset="0"/>
+                <a:ea typeface="Aptos" pitchFamily="34" charset="-122"/>
+                <a:cs typeface="Aptos" pitchFamily="34" charset="-120"/>
+              </a:rPr>
+              <a:t>• Play 1: Vision &amp; Guardrails - This lesson informs Play 1 by helping learners connect the.</a:t>
             </a:r>
             <a:endParaRPr lang="en-US" sz="1900" dirty="0"/>
           </a:p>
@@ -12977,17 +13183,17 @@
         </p:nvSpPr>
         <p:spPr>
           <a:xfrm>
-            <a:off x="8211312" y="1920240"/>
-            <a:ext cx="2734056" cy="1463040"/>
-          </a:xfrm>
-          <a:prstGeom prst="rect">
-            <a:avLst/>
-          </a:prstGeom>
-          <a:noFill/>
-          <a:ln/>
-        </p:spPr>
-        <p:txBody>
-          <a:bodyPr wrap="square" lIns="0" tIns="0" rIns="0" bIns="0" rtlCol="0" anchor="t">
+            <a:off x="8211312" y="1892808"/>
+            <a:ext cx="2734056" cy="1536192"/>
+          </a:xfrm>
+          <a:prstGeom prst="rect">
+            <a:avLst/>
+          </a:prstGeom>
+          <a:noFill/>
+          <a:ln/>
+        </p:spPr>
+        <p:txBody>
+          <a:bodyPr wrap="square" lIns="254" tIns="254" rIns="254" bIns="254" rtlCol="0" anchor="t">
             <a:normAutofit/>
           </a:bodyPr>
           <a:lstStyle/>
@@ -12996,7 +13202,7 @@
               <a:buNone/>
             </a:pPr>
             <a:r>
-              <a:rPr lang="en-US" sz="1550" dirty="0">
+              <a:rPr lang="en-US" sz="1320" dirty="0">
                 <a:solidFill>
                   <a:srgbClr val="17364A"/>
                 </a:solidFill>
@@ -13004,9 +13210,9 @@
                 <a:ea typeface="Aptos" pitchFamily="34" charset="-122"/>
                 <a:cs typeface="Aptos" pitchFamily="34" charset="-120"/>
               </a:rPr>
-              <a:t>Use the related plays to identify decisions, participants, timing, approvals, and documentation needed for responsible implementation.</a:t>
-            </a:r>
-            <a:endParaRPr lang="en-US" sz="1550" dirty="0"/>
+              <a:t>Use the related plays to identify decisions, participants, timing, approvals, and documentation needed for responsible.</a:t>
+            </a:r>
+            <a:endParaRPr lang="en-US" sz="1320" dirty="0"/>
           </a:p>
         </p:txBody>
       </p:sp>
@@ -13094,13 +13300,16 @@
           <a:ln/>
         </p:spPr>
         <p:txBody>
-          <a:bodyPr wrap="square" lIns="254" tIns="254" rIns="254" bIns="254" rtlCol="0" anchor="t">
+          <a:bodyPr wrap="square" lIns="508" tIns="508" rIns="508" bIns="508" rtlCol="0" anchor="t">
             <a:normAutofit/>
           </a:bodyPr>
           <a:lstStyle/>
           <a:p>
-            <a:r>
-              <a:rPr lang="en-US" sz="1380" dirty="0">
+            <a:pPr indent="0" marL="0">
+              <a:buNone/>
+            </a:pPr>
+            <a:r>
+              <a:rPr lang="en-US" sz="1220" dirty="0">
                 <a:solidFill>
                   <a:srgbClr val="17364A"/>
                 </a:solidFill>
@@ -13110,11 +13319,14 @@
               </a:rPr>
               <a:t>Locate the decision point in the playbook sequence.</a:t>
             </a:r>
-            <a:endParaRPr lang="en-US" sz="1380" dirty="0"/>
-          </a:p>
-          <a:p>
-            <a:r>
-              <a:rPr lang="en-US" sz="1380" dirty="0">
+            <a:endParaRPr lang="en-US" sz="1220" dirty="0"/>
+          </a:p>
+          <a:p>
+            <a:pPr indent="0" marL="0">
+              <a:buNone/>
+            </a:pPr>
+            <a:r>
+              <a:rPr lang="en-US" sz="1220" dirty="0">
                 <a:solidFill>
                   <a:srgbClr val="17364A"/>
                 </a:solidFill>
@@ -13124,11 +13336,14 @@
               </a:rPr>
               <a:t>Identify who should participate in the work.</a:t>
             </a:r>
-            <a:endParaRPr lang="en-US" sz="1380" dirty="0"/>
-          </a:p>
-          <a:p>
-            <a:r>
-              <a:rPr lang="en-US" sz="1380" dirty="0">
+            <a:endParaRPr lang="en-US" sz="1220" dirty="0"/>
+          </a:p>
+          <a:p>
+            <a:pPr indent="0" marL="0">
+              <a:buNone/>
+            </a:pPr>
+            <a:r>
+              <a:rPr lang="en-US" sz="1220" dirty="0">
                 <a:solidFill>
                   <a:srgbClr val="17364A"/>
                 </a:solidFill>
@@ -13138,7 +13353,7 @@
               </a:rPr>
               <a:t>Document the review, approval, or implementation step.</a:t>
             </a:r>
-            <a:endParaRPr lang="en-US" sz="1380" dirty="0"/>
+            <a:endParaRPr lang="en-US" sz="1220" dirty="0"/>
           </a:p>
         </p:txBody>
       </p:sp>
@@ -13439,63 +13654,75 @@
           <a:ln/>
         </p:spPr>
         <p:txBody>
-          <a:bodyPr wrap="square" lIns="635" tIns="635" rIns="635" bIns="635" rtlCol="0" anchor="t">
+          <a:bodyPr wrap="square" lIns="1016" tIns="1016" rIns="1016" bIns="1016" rtlCol="0" anchor="t">
             <a:normAutofit/>
           </a:bodyPr>
           <a:lstStyle/>
           <a:p>
+            <a:pPr indent="0" marL="0">
+              <a:buNone/>
+            </a:pPr>
             <a:r>
               <a:rPr lang="en-US" sz="1850" dirty="0">
                 <a:solidFill>
-                  <a:srgbClr val="17364A"/>
-                </a:solidFill>
-                <a:latin typeface="Aptos" pitchFamily="34" charset="0"/>
-                <a:ea typeface="Aptos" pitchFamily="34" charset="-122"/>
-                <a:cs typeface="Aptos" pitchFamily="34" charset="-120"/>
-              </a:rPr>
-              <a:t>Tool 4: AI Policy Landscape Scan (Worksheet) - Use AI Policy Landscape Scan to translate this lesson into a.</a:t>
+                  <a:srgbClr val="003A63"/>
+                </a:solidFill>
+                <a:latin typeface="Aptos" pitchFamily="34" charset="0"/>
+                <a:ea typeface="Aptos" pitchFamily="34" charset="-122"/>
+                <a:cs typeface="Aptos" pitchFamily="34" charset="-120"/>
+              </a:rPr>
+              <a:t>• Tool 4: AI Policy Landscape Scan (Worksheet) - Use AI Policy Landscape Scan to translate this.</a:t>
             </a:r>
             <a:endParaRPr lang="en-US" sz="1850" dirty="0"/>
           </a:p>
           <a:p>
+            <a:pPr indent="0" marL="0">
+              <a:buNone/>
+            </a:pPr>
             <a:r>
               <a:rPr lang="en-US" sz="1850" dirty="0">
                 <a:solidFill>
-                  <a:srgbClr val="17364A"/>
-                </a:solidFill>
-                <a:latin typeface="Aptos" pitchFamily="34" charset="0"/>
-                <a:ea typeface="Aptos" pitchFamily="34" charset="-122"/>
-                <a:cs typeface="Aptos" pitchFamily="34" charset="-120"/>
-              </a:rPr>
-              <a:t>Tool 5: AI Environmental and Resource Impact Review (Checklist) - Use AI Environmental and Resource Impact.</a:t>
+                  <a:srgbClr val="003A63"/>
+                </a:solidFill>
+                <a:latin typeface="Aptos" pitchFamily="34" charset="0"/>
+                <a:ea typeface="Aptos" pitchFamily="34" charset="-122"/>
+                <a:cs typeface="Aptos" pitchFamily="34" charset="-120"/>
+              </a:rPr>
+              <a:t>• Tool 5: AI Environmental and Resource Impact Review (Checklist) - Use AI Environmental and.</a:t>
             </a:r>
             <a:endParaRPr lang="en-US" sz="1850" dirty="0"/>
           </a:p>
           <a:p>
+            <a:pPr indent="0" marL="0">
+              <a:buNone/>
+            </a:pPr>
             <a:r>
               <a:rPr lang="en-US" sz="1850" dirty="0">
                 <a:solidFill>
-                  <a:srgbClr val="17364A"/>
-                </a:solidFill>
-                <a:latin typeface="Aptos" pitchFamily="34" charset="0"/>
-                <a:ea typeface="Aptos" pitchFamily="34" charset="-122"/>
-                <a:cs typeface="Aptos" pitchFamily="34" charset="-120"/>
-              </a:rPr>
-              <a:t>Tool 6: Human-Centered AI Decision Rule Checklist (Checklist) - Use Human-Centered AI Decision Rule.</a:t>
+                  <a:srgbClr val="003A63"/>
+                </a:solidFill>
+                <a:latin typeface="Aptos" pitchFamily="34" charset="0"/>
+                <a:ea typeface="Aptos" pitchFamily="34" charset="-122"/>
+                <a:cs typeface="Aptos" pitchFamily="34" charset="-120"/>
+              </a:rPr>
+              <a:t>• Tool 6: Human-Centered AI Decision Rule Checklist (Checklist) - Use Human-Centered AI Decision.</a:t>
             </a:r>
             <a:endParaRPr lang="en-US" sz="1850" dirty="0"/>
           </a:p>
           <a:p>
+            <a:pPr indent="0" marL="0">
+              <a:buNone/>
+            </a:pPr>
             <a:r>
               <a:rPr lang="en-US" sz="1850" dirty="0">
                 <a:solidFill>
-                  <a:srgbClr val="17364A"/>
-                </a:solidFill>
-                <a:latin typeface="Aptos" pitchFamily="34" charset="0"/>
-                <a:ea typeface="Aptos" pitchFamily="34" charset="-122"/>
-                <a:cs typeface="Aptos" pitchFamily="34" charset="-120"/>
-              </a:rPr>
-              <a:t>Tool 8: AI Project Charter (Planning) - Use AI Project Charter to translate this lesson into a documented.</a:t>
+                  <a:srgbClr val="003A63"/>
+                </a:solidFill>
+                <a:latin typeface="Aptos" pitchFamily="34" charset="0"/>
+                <a:ea typeface="Aptos" pitchFamily="34" charset="-122"/>
+                <a:cs typeface="Aptos" pitchFamily="34" charset="-120"/>
+              </a:rPr>
+              <a:t>• Tool 8: AI Project Charter (Planning) - Use AI Project Charter to translate this lesson into a.</a:t>
             </a:r>
             <a:endParaRPr lang="en-US" sz="1850" dirty="0"/>
           </a:p>
@@ -13575,17 +13802,17 @@
         </p:nvSpPr>
         <p:spPr>
           <a:xfrm>
-            <a:off x="8211312" y="1920240"/>
-            <a:ext cx="2734056" cy="1463040"/>
-          </a:xfrm>
-          <a:prstGeom prst="rect">
-            <a:avLst/>
-          </a:prstGeom>
-          <a:noFill/>
-          <a:ln/>
-        </p:spPr>
-        <p:txBody>
-          <a:bodyPr wrap="square" lIns="0" tIns="0" rIns="0" bIns="0" rtlCol="0" anchor="t">
+            <a:off x="8211312" y="1892808"/>
+            <a:ext cx="2734056" cy="1536192"/>
+          </a:xfrm>
+          <a:prstGeom prst="rect">
+            <a:avLst/>
+          </a:prstGeom>
+          <a:noFill/>
+          <a:ln/>
+        </p:spPr>
+        <p:txBody>
+          <a:bodyPr wrap="square" lIns="254" tIns="254" rIns="254" bIns="254" rtlCol="0" anchor="t">
             <a:normAutofit/>
           </a:bodyPr>
           <a:lstStyle/>
@@ -13594,7 +13821,7 @@
               <a:buNone/>
             </a:pPr>
             <a:r>
-              <a:rPr lang="en-US" sz="1550" dirty="0">
+              <a:rPr lang="en-US" sz="1320" dirty="0">
                 <a:solidFill>
                   <a:srgbClr val="17364A"/>
                 </a:solidFill>
@@ -13602,9 +13829,9 @@
                 <a:ea typeface="Aptos" pitchFamily="34" charset="-122"/>
                 <a:cs typeface="Aptos" pitchFamily="34" charset="-120"/>
               </a:rPr>
-              <a:t>Use linked tools when your department needs a structured worksheet, template, checklist, review process, or documentation artifact.</a:t>
-            </a:r>
-            <a:endParaRPr lang="en-US" sz="1550" dirty="0"/>
+              <a:t>Use linked tools when your department needs a structured worksheet, template, checklist, review process, or.</a:t>
+            </a:r>
+            <a:endParaRPr lang="en-US" sz="1320" dirty="0"/>
           </a:p>
         </p:txBody>
       </p:sp>
@@ -13692,13 +13919,16 @@
           <a:ln/>
         </p:spPr>
         <p:txBody>
-          <a:bodyPr wrap="square" lIns="254" tIns="254" rIns="254" bIns="254" rtlCol="0" anchor="t">
+          <a:bodyPr wrap="square" lIns="508" tIns="508" rIns="508" bIns="508" rtlCol="0" anchor="t">
             <a:normAutofit/>
           </a:bodyPr>
           <a:lstStyle/>
           <a:p>
-            <a:r>
-              <a:rPr lang="en-US" sz="1380" dirty="0">
+            <a:pPr indent="0" marL="0">
+              <a:buNone/>
+            </a:pPr>
+            <a:r>
+              <a:rPr lang="en-US" sz="1220" dirty="0">
                 <a:solidFill>
                   <a:srgbClr val="17364A"/>
                 </a:solidFill>
@@ -13708,11 +13938,14 @@
               </a:rPr>
               <a:t>Use a tool when no comparable local process exists.</a:t>
             </a:r>
-            <a:endParaRPr lang="en-US" sz="1380" dirty="0"/>
-          </a:p>
-          <a:p>
-            <a:r>
-              <a:rPr lang="en-US" sz="1380" dirty="0">
+            <a:endParaRPr lang="en-US" sz="1220" dirty="0"/>
+          </a:p>
+          <a:p>
+            <a:pPr indent="0" marL="0">
+              <a:buNone/>
+            </a:pPr>
+            <a:r>
+              <a:rPr lang="en-US" sz="1220" dirty="0">
                 <a:solidFill>
                   <a:srgbClr val="17364A"/>
                 </a:solidFill>
@@ -13720,13 +13953,16 @@
                 <a:ea typeface="Aptos" pitchFamily="34" charset="-122"/>
                 <a:cs typeface="Aptos" pitchFamily="34" charset="-120"/>
               </a:rPr>
-              <a:t>Adapt existing department templates when they already fit the purpose.</a:t>
-            </a:r>
-            <a:endParaRPr lang="en-US" sz="1380" dirty="0"/>
-          </a:p>
-          <a:p>
-            <a:r>
-              <a:rPr lang="en-US" sz="1380" dirty="0">
+              <a:t>Adapt existing department templates when they already fit the.</a:t>
+            </a:r>
+            <a:endParaRPr lang="en-US" sz="1220" dirty="0"/>
+          </a:p>
+          <a:p>
+            <a:pPr indent="0" marL="0">
+              <a:buNone/>
+            </a:pPr>
+            <a:r>
+              <a:rPr lang="en-US" sz="1220" dirty="0">
                 <a:solidFill>
                   <a:srgbClr val="17364A"/>
                 </a:solidFill>
@@ -13736,7 +13972,7 @@
               </a:rPr>
               <a:t>Save the completed artifact as evidence of the decision.</a:t>
             </a:r>
-            <a:endParaRPr lang="en-US" sz="1380" dirty="0"/>
+            <a:endParaRPr lang="en-US" sz="1220" dirty="0"/>
           </a:p>
         </p:txBody>
       </p:sp>
@@ -14037,49 +14273,58 @@
           <a:ln/>
         </p:spPr>
         <p:txBody>
-          <a:bodyPr wrap="square" lIns="635" tIns="635" rIns="635" bIns="635" rtlCol="0" anchor="t">
+          <a:bodyPr wrap="square" lIns="1016" tIns="1016" rIns="1016" bIns="1016" rtlCol="0" anchor="t">
             <a:normAutofit/>
           </a:bodyPr>
           <a:lstStyle/>
           <a:p>
+            <a:pPr indent="0" marL="0">
+              <a:buNone/>
+            </a:pPr>
             <a:r>
               <a:rPr lang="en-US" sz="2100" dirty="0">
                 <a:solidFill>
-                  <a:srgbClr val="17364A"/>
-                </a:solidFill>
-                <a:latin typeface="Aptos" pitchFamily="34" charset="0"/>
-                <a:ea typeface="Aptos" pitchFamily="34" charset="-122"/>
-                <a:cs typeface="Aptos" pitchFamily="34" charset="-120"/>
-              </a:rPr>
-              <a:t>Define NLP in plain language and distinguish common NLP tasks.</a:t>
+                  <a:srgbClr val="003A63"/>
+                </a:solidFill>
+                <a:latin typeface="Aptos" pitchFamily="34" charset="0"/>
+                <a:ea typeface="Aptos" pitchFamily="34" charset="-122"/>
+                <a:cs typeface="Aptos" pitchFamily="34" charset="-120"/>
+              </a:rPr>
+              <a:t>• Define NLP in plain language and distinguish common NLP tasks.</a:t>
             </a:r>
             <a:endParaRPr lang="en-US" sz="2100" dirty="0"/>
           </a:p>
           <a:p>
+            <a:pPr indent="0" marL="0">
+              <a:buNone/>
+            </a:pPr>
             <a:r>
               <a:rPr lang="en-US" sz="2100" dirty="0">
                 <a:solidFill>
-                  <a:srgbClr val="17364A"/>
-                </a:solidFill>
-                <a:latin typeface="Aptos" pitchFamily="34" charset="0"/>
-                <a:ea typeface="Aptos" pitchFamily="34" charset="-122"/>
-                <a:cs typeface="Aptos" pitchFamily="34" charset="-120"/>
-              </a:rPr>
-              <a:t>Identify public health workflows where NLP may be useful.</a:t>
+                  <a:srgbClr val="003A63"/>
+                </a:solidFill>
+                <a:latin typeface="Aptos" pitchFamily="34" charset="0"/>
+                <a:ea typeface="Aptos" pitchFamily="34" charset="-122"/>
+                <a:cs typeface="Aptos" pitchFamily="34" charset="-120"/>
+              </a:rPr>
+              <a:t>• Identify public health workflows where NLP may be useful.</a:t>
             </a:r>
             <a:endParaRPr lang="en-US" sz="2100" dirty="0"/>
           </a:p>
           <a:p>
+            <a:pPr indent="0" marL="0">
+              <a:buNone/>
+            </a:pPr>
             <a:r>
               <a:rPr lang="en-US" sz="2100" dirty="0">
                 <a:solidFill>
-                  <a:srgbClr val="17364A"/>
-                </a:solidFill>
-                <a:latin typeface="Aptos" pitchFamily="34" charset="0"/>
-                <a:ea typeface="Aptos" pitchFamily="34" charset="-122"/>
-                <a:cs typeface="Aptos" pitchFamily="34" charset="-120"/>
-              </a:rPr>
-              <a:t>Assess risks related to accuracy, bias, privacy, hallucination, language, and missing context.</a:t>
+                  <a:srgbClr val="003A63"/>
+                </a:solidFill>
+                <a:latin typeface="Aptos" pitchFamily="34" charset="0"/>
+                <a:ea typeface="Aptos" pitchFamily="34" charset="-122"/>
+                <a:cs typeface="Aptos" pitchFamily="34" charset="-120"/>
+              </a:rPr>
+              <a:t>• Assess risks related to accuracy, bias, privacy, hallucination, language, and missing context.</a:t>
             </a:r>
             <a:endParaRPr lang="en-US" sz="2100" dirty="0"/>
           </a:p>
@@ -14159,17 +14404,17 @@
         </p:nvSpPr>
         <p:spPr>
           <a:xfrm>
-            <a:off x="7799832" y="1828800"/>
-            <a:ext cx="3145536" cy="685800"/>
-          </a:xfrm>
-          <a:prstGeom prst="rect">
-            <a:avLst/>
-          </a:prstGeom>
-          <a:noFill/>
-          <a:ln/>
-        </p:spPr>
-        <p:txBody>
-          <a:bodyPr wrap="square" lIns="0" tIns="0" rIns="0" bIns="0" rtlCol="0" anchor="t">
+            <a:off x="7799832" y="1801368"/>
+            <a:ext cx="3145536" cy="758952"/>
+          </a:xfrm>
+          <a:prstGeom prst="rect">
+            <a:avLst/>
+          </a:prstGeom>
+          <a:noFill/>
+          <a:ln/>
+        </p:spPr>
+        <p:txBody>
+          <a:bodyPr wrap="square" lIns="254" tIns="254" rIns="254" bIns="254" rtlCol="0" anchor="t">
             <a:normAutofit/>
           </a:bodyPr>
           <a:lstStyle/>
@@ -14178,7 +14423,7 @@
               <a:buNone/>
             </a:pPr>
             <a:r>
-              <a:rPr lang="en-US" sz="1550" dirty="0">
+              <a:rPr lang="en-US" sz="1320" dirty="0">
                 <a:solidFill>
                   <a:srgbClr val="17364A"/>
                 </a:solidFill>
@@ -14188,7 +14433,7 @@
               </a:rPr>
               <a:t>Define NLP in plain language and distinguish common NLP tasks.</a:t>
             </a:r>
-            <a:endParaRPr lang="en-US" sz="1550" dirty="0"/>
+            <a:endParaRPr lang="en-US" sz="1320" dirty="0"/>
           </a:p>
         </p:txBody>
       </p:sp>
@@ -14276,13 +14521,16 @@
           <a:ln/>
         </p:spPr>
         <p:txBody>
-          <a:bodyPr wrap="square" lIns="254" tIns="254" rIns="254" bIns="254" rtlCol="0" anchor="t">
+          <a:bodyPr wrap="square" lIns="508" tIns="508" rIns="508" bIns="508" rtlCol="0" anchor="t">
             <a:normAutofit/>
           </a:bodyPr>
           <a:lstStyle/>
           <a:p>
-            <a:r>
-              <a:rPr lang="en-US" sz="1380" dirty="0">
+            <a:pPr indent="0" marL="0">
+              <a:buNone/>
+            </a:pPr>
+            <a:r>
+              <a:rPr lang="en-US" sz="1220" dirty="0">
                 <a:solidFill>
                   <a:srgbClr val="17364A"/>
                 </a:solidFill>
@@ -14290,13 +14538,16 @@
                 <a:ea typeface="Aptos" pitchFamily="34" charset="-122"/>
                 <a:cs typeface="Aptos" pitchFamily="34" charset="-120"/>
               </a:rPr>
-              <a:t>Define source verification and human review requirements for NLP outputs.</a:t>
-            </a:r>
-            <a:endParaRPr lang="en-US" sz="1380" dirty="0"/>
-          </a:p>
-          <a:p>
-            <a:r>
-              <a:rPr lang="en-US" sz="1380" dirty="0">
+              <a:t>Define source verification and human review requirements for NLP.</a:t>
+            </a:r>
+            <a:endParaRPr lang="en-US" sz="1220" dirty="0"/>
+          </a:p>
+          <a:p>
+            <a:pPr indent="0" marL="0">
+              <a:buNone/>
+            </a:pPr>
+            <a:r>
+              <a:rPr lang="en-US" sz="1220" dirty="0">
                 <a:solidFill>
                   <a:srgbClr val="17364A"/>
                 </a:solidFill>
@@ -14306,7 +14557,7 @@
               </a:rPr>
               <a:t>Produce an NLP evaluation plan for one public health workflow.</a:t>
             </a:r>
-            <a:endParaRPr lang="en-US" sz="1380" dirty="0"/>
+            <a:endParaRPr lang="en-US" sz="1220" dirty="0"/>
           </a:p>
         </p:txBody>
       </p:sp>
@@ -14384,17 +14635,17 @@
         </p:nvSpPr>
         <p:spPr>
           <a:xfrm>
-            <a:off x="7799832" y="5001768"/>
-            <a:ext cx="3145536" cy="502920"/>
-          </a:xfrm>
-          <a:prstGeom prst="rect">
-            <a:avLst/>
-          </a:prstGeom>
-          <a:noFill/>
-          <a:ln/>
-        </p:spPr>
-        <p:txBody>
-          <a:bodyPr wrap="square" lIns="0" tIns="0" rIns="0" bIns="0" rtlCol="0" anchor="t">
+            <a:off x="7799832" y="4974336"/>
+            <a:ext cx="3145536" cy="576072"/>
+          </a:xfrm>
+          <a:prstGeom prst="rect">
+            <a:avLst/>
+          </a:prstGeom>
+          <a:noFill/>
+          <a:ln/>
+        </p:spPr>
+        <p:txBody>
+          <a:bodyPr wrap="square" lIns="254" tIns="254" rIns="254" bIns="254" rtlCol="0" anchor="t">
             <a:normAutofit/>
           </a:bodyPr>
           <a:lstStyle/>
@@ -14403,7 +14654,7 @@
               <a:buNone/>
             </a:pPr>
             <a:r>
-              <a:rPr lang="en-US" sz="1550" dirty="0">
+              <a:rPr lang="en-US" sz="1320" dirty="0">
                 <a:solidFill>
                   <a:srgbClr val="17364A"/>
                 </a:solidFill>
@@ -14411,9 +14662,9 @@
                 <a:ea typeface="Aptos" pitchFamily="34" charset="-122"/>
                 <a:cs typeface="Aptos" pitchFamily="34" charset="-120"/>
               </a:rPr>
-              <a:t>Use the assignment to test whether you can explain the concept, apply it to a realistic public health situation, and identify what would need review before the work moves forward.</a:t>
-            </a:r>
-            <a:endParaRPr lang="en-US" sz="1550" dirty="0"/>
+              <a:t>Use the assignment to test whether you can explain the concept, apply it to a realistic public health situation, and.</a:t>
+            </a:r>
+            <a:endParaRPr lang="en-US" sz="1320" dirty="0"/>
           </a:p>
         </p:txBody>
       </p:sp>
@@ -14714,49 +14965,58 @@
           <a:ln/>
         </p:spPr>
         <p:txBody>
-          <a:bodyPr wrap="square" lIns="635" tIns="635" rIns="635" bIns="635" rtlCol="0" anchor="t">
+          <a:bodyPr wrap="square" lIns="1016" tIns="1016" rIns="1016" bIns="1016" rtlCol="0" anchor="t">
             <a:normAutofit/>
           </a:bodyPr>
           <a:lstStyle/>
           <a:p>
+            <a:pPr indent="0" marL="0">
+              <a:buNone/>
+            </a:pPr>
             <a:r>
               <a:rPr lang="en-US" sz="2100" dirty="0">
                 <a:solidFill>
-                  <a:srgbClr val="17364A"/>
-                </a:solidFill>
-                <a:latin typeface="Aptos" pitchFamily="34" charset="0"/>
-                <a:ea typeface="Aptos" pitchFamily="34" charset="-122"/>
-                <a:cs typeface="Aptos" pitchFamily="34" charset="-120"/>
-              </a:rPr>
-              <a:t>Natural language processing is a branch of AI that works with human language.</a:t>
+                  <a:srgbClr val="003A63"/>
+                </a:solidFill>
+                <a:latin typeface="Aptos" pitchFamily="34" charset="0"/>
+                <a:ea typeface="Aptos" pitchFamily="34" charset="-122"/>
+                <a:cs typeface="Aptos" pitchFamily="34" charset="-120"/>
+              </a:rPr>
+              <a:t>• Natural language processing is a branch of AI that works with human language.</a:t>
             </a:r>
             <a:endParaRPr lang="en-US" sz="2100" dirty="0"/>
           </a:p>
           <a:p>
+            <a:pPr indent="0" marL="0">
+              <a:buNone/>
+            </a:pPr>
             <a:r>
               <a:rPr lang="en-US" sz="2100" dirty="0">
                 <a:solidFill>
-                  <a:srgbClr val="17364A"/>
-                </a:solidFill>
-                <a:latin typeface="Aptos" pitchFamily="34" charset="0"/>
-                <a:ea typeface="Aptos" pitchFamily="34" charset="-122"/>
-                <a:cs typeface="Aptos" pitchFamily="34" charset="-120"/>
-              </a:rPr>
-              <a:t>Public health agencies often hold important information in free-text sources, including clinical notes,.</a:t>
+                  <a:srgbClr val="003A63"/>
+                </a:solidFill>
+                <a:latin typeface="Aptos" pitchFamily="34" charset="0"/>
+                <a:ea typeface="Aptos" pitchFamily="34" charset="-122"/>
+                <a:cs typeface="Aptos" pitchFamily="34" charset="-120"/>
+              </a:rPr>
+              <a:t>• Public health agencies often hold important information in free-text sources, including.</a:t>
             </a:r>
             <a:endParaRPr lang="en-US" sz="2100" dirty="0"/>
           </a:p>
           <a:p>
+            <a:pPr indent="0" marL="0">
+              <a:buNone/>
+            </a:pPr>
             <a:r>
               <a:rPr lang="en-US" sz="2100" dirty="0">
                 <a:solidFill>
-                  <a:srgbClr val="17364A"/>
-                </a:solidFill>
-                <a:latin typeface="Aptos" pitchFamily="34" charset="0"/>
-                <a:ea typeface="Aptos" pitchFamily="34" charset="-122"/>
-                <a:cs typeface="Aptos" pitchFamily="34" charset="-120"/>
-              </a:rPr>
-              <a:t>This module teaches learners how NLP can support public health work and how to evaluate its risks.</a:t>
+                  <a:srgbClr val="003A63"/>
+                </a:solidFill>
+                <a:latin typeface="Aptos" pitchFamily="34" charset="0"/>
+                <a:ea typeface="Aptos" pitchFamily="34" charset="-122"/>
+                <a:cs typeface="Aptos" pitchFamily="34" charset="-120"/>
+              </a:rPr>
+              <a:t>• This module teaches learners how NLP can support public health work and how to evaluate its.</a:t>
             </a:r>
             <a:endParaRPr lang="en-US" sz="2100" dirty="0"/>
           </a:p>
@@ -14836,17 +15096,17 @@
         </p:nvSpPr>
         <p:spPr>
           <a:xfrm>
-            <a:off x="7799832" y="1828800"/>
-            <a:ext cx="3145536" cy="685800"/>
-          </a:xfrm>
-          <a:prstGeom prst="rect">
-            <a:avLst/>
-          </a:prstGeom>
-          <a:noFill/>
-          <a:ln/>
-        </p:spPr>
-        <p:txBody>
-          <a:bodyPr wrap="square" lIns="0" tIns="0" rIns="0" bIns="0" rtlCol="0" anchor="t">
+            <a:off x="7799832" y="1801368"/>
+            <a:ext cx="3145536" cy="758952"/>
+          </a:xfrm>
+          <a:prstGeom prst="rect">
+            <a:avLst/>
+          </a:prstGeom>
+          <a:noFill/>
+          <a:ln/>
+        </p:spPr>
+        <p:txBody>
+          <a:bodyPr wrap="square" lIns="254" tIns="254" rIns="254" bIns="254" rtlCol="0" anchor="t">
             <a:normAutofit/>
           </a:bodyPr>
           <a:lstStyle/>
@@ -14855,7 +15115,7 @@
               <a:buNone/>
             </a:pPr>
             <a:r>
-              <a:rPr lang="en-US" sz="1550" dirty="0">
+              <a:rPr lang="en-US" sz="1320" dirty="0">
                 <a:solidFill>
                   <a:srgbClr val="17364A"/>
                 </a:solidFill>
@@ -14865,7 +15125,7 @@
               </a:rPr>
               <a:t>Natural language processing is a branch of AI that works with human language.</a:t>
             </a:r>
-            <a:endParaRPr lang="en-US" sz="1550" dirty="0"/>
+            <a:endParaRPr lang="en-US" sz="1320" dirty="0"/>
           </a:p>
         </p:txBody>
       </p:sp>
@@ -14953,13 +15213,16 @@
           <a:ln/>
         </p:spPr>
         <p:txBody>
-          <a:bodyPr wrap="square" lIns="254" tIns="254" rIns="254" bIns="254" rtlCol="0" anchor="t">
+          <a:bodyPr wrap="square" lIns="508" tIns="508" rIns="508" bIns="508" rtlCol="0" anchor="t">
             <a:normAutofit/>
           </a:bodyPr>
           <a:lstStyle/>
           <a:p>
-            <a:r>
-              <a:rPr lang="en-US" sz="1380" dirty="0">
+            <a:pPr indent="0" marL="0">
+              <a:buNone/>
+            </a:pPr>
+            <a:r>
+              <a:rPr lang="en-US" sz="1220" dirty="0">
                 <a:solidFill>
                   <a:srgbClr val="17364A"/>
                 </a:solidFill>
@@ -14967,13 +15230,16 @@
                 <a:ea typeface="Aptos" pitchFamily="34" charset="-122"/>
                 <a:cs typeface="Aptos" pitchFamily="34" charset="-120"/>
               </a:rPr>
-              <a:t>Natural language processing is a branch of AI that works with human language.</a:t>
-            </a:r>
-            <a:endParaRPr lang="en-US" sz="1380" dirty="0"/>
-          </a:p>
-          <a:p>
-            <a:r>
-              <a:rPr lang="en-US" sz="1380" dirty="0">
+              <a:t>Natural language processing is a branch of AI that works with.</a:t>
+            </a:r>
+            <a:endParaRPr lang="en-US" sz="1220" dirty="0"/>
+          </a:p>
+          <a:p>
+            <a:pPr indent="0" marL="0">
+              <a:buNone/>
+            </a:pPr>
+            <a:r>
+              <a:rPr lang="en-US" sz="1220" dirty="0">
                 <a:solidFill>
                   <a:srgbClr val="17364A"/>
                 </a:solidFill>
@@ -14981,13 +15247,16 @@
                 <a:ea typeface="Aptos" pitchFamily="34" charset="-122"/>
                 <a:cs typeface="Aptos" pitchFamily="34" charset="-120"/>
               </a:rPr>
-              <a:t>Public health agencies often hold important information in free-text sources, including.</a:t>
-            </a:r>
-            <a:endParaRPr lang="en-US" sz="1380" dirty="0"/>
-          </a:p>
-          <a:p>
-            <a:r>
-              <a:rPr lang="en-US" sz="1380" dirty="0">
+              <a:t>Public health agencies often hold important information in.</a:t>
+            </a:r>
+            <a:endParaRPr lang="en-US" sz="1220" dirty="0"/>
+          </a:p>
+          <a:p>
+            <a:pPr indent="0" marL="0">
+              <a:buNone/>
+            </a:pPr>
+            <a:r>
+              <a:rPr lang="en-US" sz="1220" dirty="0">
                 <a:solidFill>
                   <a:srgbClr val="17364A"/>
                 </a:solidFill>
@@ -14995,9 +15264,9 @@
                 <a:ea typeface="Aptos" pitchFamily="34" charset="-122"/>
                 <a:cs typeface="Aptos" pitchFamily="34" charset="-120"/>
               </a:rPr>
-              <a:t>This module teaches learners how NLP can support public health work and how to evaluate.</a:t>
-            </a:r>
-            <a:endParaRPr lang="en-US" sz="1380" dirty="0"/>
+              <a:t>This module teaches learners how NLP can support public health.</a:t>
+            </a:r>
+            <a:endParaRPr lang="en-US" sz="1220" dirty="0"/>
           </a:p>
         </p:txBody>
       </p:sp>
@@ -15075,17 +15344,17 @@
         </p:nvSpPr>
         <p:spPr>
           <a:xfrm>
-            <a:off x="7799832" y="5001768"/>
-            <a:ext cx="3145536" cy="502920"/>
-          </a:xfrm>
-          <a:prstGeom prst="rect">
-            <a:avLst/>
-          </a:prstGeom>
-          <a:noFill/>
-          <a:ln/>
-        </p:spPr>
-        <p:txBody>
-          <a:bodyPr wrap="square" lIns="0" tIns="0" rIns="0" bIns="0" rtlCol="0" anchor="t">
+            <a:off x="7799832" y="4974336"/>
+            <a:ext cx="3145536" cy="576072"/>
+          </a:xfrm>
+          <a:prstGeom prst="rect">
+            <a:avLst/>
+          </a:prstGeom>
+          <a:noFill/>
+          <a:ln/>
+        </p:spPr>
+        <p:txBody>
+          <a:bodyPr wrap="square" lIns="254" tIns="254" rIns="254" bIns="254" rtlCol="0" anchor="t">
             <a:normAutofit/>
           </a:bodyPr>
           <a:lstStyle/>
@@ -15094,7 +15363,7 @@
               <a:buNone/>
             </a:pPr>
             <a:r>
-              <a:rPr lang="en-US" sz="1550" dirty="0">
+              <a:rPr lang="en-US" sz="1320" dirty="0">
                 <a:solidFill>
                   <a:srgbClr val="17364A"/>
                 </a:solidFill>
@@ -15102,9 +15371,9 @@
                 <a:ea typeface="Aptos" pitchFamily="34" charset="-122"/>
                 <a:cs typeface="Aptos" pitchFamily="34" charset="-120"/>
               </a:rPr>
-              <a:t>Use the concept to plan transparent communication, gather stakeholder input, protect trust, and make sure affected communities are considered early.</a:t>
-            </a:r>
-            <a:endParaRPr lang="en-US" sz="1550" dirty="0"/>
+              <a:t>Use the concept to plan transparent communication, gather stakeholder input, protect trust, and make sure affected.</a:t>
+            </a:r>
+            <a:endParaRPr lang="en-US" sz="1320" dirty="0"/>
           </a:p>
         </p:txBody>
       </p:sp>
@@ -15405,49 +15674,58 @@
           <a:ln/>
         </p:spPr>
         <p:txBody>
-          <a:bodyPr wrap="square" lIns="635" tIns="635" rIns="635" bIns="635" rtlCol="0" anchor="t">
+          <a:bodyPr wrap="square" lIns="1016" tIns="1016" rIns="1016" bIns="1016" rtlCol="0" anchor="t">
             <a:normAutofit/>
           </a:bodyPr>
           <a:lstStyle/>
           <a:p>
+            <a:pPr indent="0" marL="0">
+              <a:buNone/>
+            </a:pPr>
             <a:r>
               <a:rPr lang="en-US" sz="2100" dirty="0">
                 <a:solidFill>
-                  <a:srgbClr val="17364A"/>
-                </a:solidFill>
-                <a:latin typeface="Aptos" pitchFamily="34" charset="0"/>
-                <a:ea typeface="Aptos" pitchFamily="34" charset="-122"/>
-                <a:cs typeface="Aptos" pitchFamily="34" charset="-120"/>
-              </a:rPr>
-              <a:t>NLP can reduce burden by helping staff find, organize, classify, extract, translate, or summarize.</a:t>
+                  <a:srgbClr val="003A63"/>
+                </a:solidFill>
+                <a:latin typeface="Aptos" pitchFamily="34" charset="0"/>
+                <a:ea typeface="Aptos" pitchFamily="34" charset="-122"/>
+                <a:cs typeface="Aptos" pitchFamily="34" charset="-120"/>
+              </a:rPr>
+              <a:t>• NLP can reduce burden by helping staff find, organize, classify, extract, translate, or.</a:t>
             </a:r>
             <a:endParaRPr lang="en-US" sz="2100" dirty="0"/>
           </a:p>
           <a:p>
+            <a:pPr indent="0" marL="0">
+              <a:buNone/>
+            </a:pPr>
             <a:r>
               <a:rPr lang="en-US" sz="2100" dirty="0">
                 <a:solidFill>
-                  <a:srgbClr val="17364A"/>
-                </a:solidFill>
-                <a:latin typeface="Aptos" pitchFamily="34" charset="0"/>
-                <a:ea typeface="Aptos" pitchFamily="34" charset="-122"/>
-                <a:cs typeface="Aptos" pitchFamily="34" charset="-120"/>
-              </a:rPr>
-              <a:t>It can support case investigation, environmental health complaint triage, syndromic surveillance,.</a:t>
+                  <a:srgbClr val="003A63"/>
+                </a:solidFill>
+                <a:latin typeface="Aptos" pitchFamily="34" charset="0"/>
+                <a:ea typeface="Aptos" pitchFamily="34" charset="-122"/>
+                <a:cs typeface="Aptos" pitchFamily="34" charset="-120"/>
+              </a:rPr>
+              <a:t>• It can support case investigation, environmental health complaint triage, syndromic.</a:t>
             </a:r>
             <a:endParaRPr lang="en-US" sz="2100" dirty="0"/>
           </a:p>
           <a:p>
+            <a:pPr indent="0" marL="0">
+              <a:buNone/>
+            </a:pPr>
             <a:r>
               <a:rPr lang="en-US" sz="2100" dirty="0">
                 <a:solidFill>
-                  <a:srgbClr val="17364A"/>
-                </a:solidFill>
-                <a:latin typeface="Aptos" pitchFamily="34" charset="0"/>
-                <a:ea typeface="Aptos" pitchFamily="34" charset="-122"/>
-                <a:cs typeface="Aptos" pitchFamily="34" charset="-120"/>
-              </a:rPr>
-              <a:t>However, text is often ambiguous, incomplete, sensitive, and context-dependent.</a:t>
+                  <a:srgbClr val="003A63"/>
+                </a:solidFill>
+                <a:latin typeface="Aptos" pitchFamily="34" charset="0"/>
+                <a:ea typeface="Aptos" pitchFamily="34" charset="-122"/>
+                <a:cs typeface="Aptos" pitchFamily="34" charset="-120"/>
+              </a:rPr>
+              <a:t>• However, text is often ambiguous, incomplete, sensitive, and context-dependent.</a:t>
             </a:r>
             <a:endParaRPr lang="en-US" sz="2100" dirty="0"/>
           </a:p>
@@ -15527,17 +15805,17 @@
         </p:nvSpPr>
         <p:spPr>
           <a:xfrm>
-            <a:off x="7799832" y="1828800"/>
-            <a:ext cx="3145536" cy="685800"/>
-          </a:xfrm>
-          <a:prstGeom prst="rect">
-            <a:avLst/>
-          </a:prstGeom>
-          <a:noFill/>
-          <a:ln/>
-        </p:spPr>
-        <p:txBody>
-          <a:bodyPr wrap="square" lIns="0" tIns="0" rIns="0" bIns="0" rtlCol="0" anchor="t">
+            <a:off x="7799832" y="1801368"/>
+            <a:ext cx="3145536" cy="758952"/>
+          </a:xfrm>
+          <a:prstGeom prst="rect">
+            <a:avLst/>
+          </a:prstGeom>
+          <a:noFill/>
+          <a:ln/>
+        </p:spPr>
+        <p:txBody>
+          <a:bodyPr wrap="square" lIns="254" tIns="254" rIns="254" bIns="254" rtlCol="0" anchor="t">
             <a:normAutofit/>
           </a:bodyPr>
           <a:lstStyle/>
@@ -15546,7 +15824,7 @@
               <a:buNone/>
             </a:pPr>
             <a:r>
-              <a:rPr lang="en-US" sz="1550" dirty="0">
+              <a:rPr lang="en-US" sz="1320" dirty="0">
                 <a:solidFill>
                   <a:srgbClr val="17364A"/>
                 </a:solidFill>
@@ -15556,7 +15834,7 @@
               </a:rPr>
               <a:t>NLP can reduce burden by helping staff find, organize, classify, extract, translate, or summarize.</a:t>
             </a:r>
-            <a:endParaRPr lang="en-US" sz="1550" dirty="0"/>
+            <a:endParaRPr lang="en-US" sz="1320" dirty="0"/>
           </a:p>
         </p:txBody>
       </p:sp>
@@ -15644,13 +15922,16 @@
           <a:ln/>
         </p:spPr>
         <p:txBody>
-          <a:bodyPr wrap="square" lIns="254" tIns="254" rIns="254" bIns="254" rtlCol="0" anchor="t">
+          <a:bodyPr wrap="square" lIns="508" tIns="508" rIns="508" bIns="508" rtlCol="0" anchor="t">
             <a:normAutofit/>
           </a:bodyPr>
           <a:lstStyle/>
           <a:p>
-            <a:r>
-              <a:rPr lang="en-US" sz="1380" dirty="0">
+            <a:pPr indent="0" marL="0">
+              <a:buNone/>
+            </a:pPr>
+            <a:r>
+              <a:rPr lang="en-US" sz="1220" dirty="0">
                 <a:solidFill>
                   <a:srgbClr val="17364A"/>
                 </a:solidFill>
@@ -15658,13 +15939,16 @@
                 <a:ea typeface="Aptos" pitchFamily="34" charset="-122"/>
                 <a:cs typeface="Aptos" pitchFamily="34" charset="-120"/>
               </a:rPr>
-              <a:t>NLP can reduce burden by helping staff find, organize, classify, extract, translate, or.</a:t>
-            </a:r>
-            <a:endParaRPr lang="en-US" sz="1380" dirty="0"/>
-          </a:p>
-          <a:p>
-            <a:r>
-              <a:rPr lang="en-US" sz="1380" dirty="0">
+              <a:t>NLP can reduce burden by helping staff find, organize, classify,.</a:t>
+            </a:r>
+            <a:endParaRPr lang="en-US" sz="1220" dirty="0"/>
+          </a:p>
+          <a:p>
+            <a:pPr indent="0" marL="0">
+              <a:buNone/>
+            </a:pPr>
+            <a:r>
+              <a:rPr lang="en-US" sz="1220" dirty="0">
                 <a:solidFill>
                   <a:srgbClr val="17364A"/>
                 </a:solidFill>
@@ -15672,13 +15956,16 @@
                 <a:ea typeface="Aptos" pitchFamily="34" charset="-122"/>
                 <a:cs typeface="Aptos" pitchFamily="34" charset="-120"/>
               </a:rPr>
-              <a:t>It can support case investigation, environmental health complaint triage, syndromic.</a:t>
-            </a:r>
-            <a:endParaRPr lang="en-US" sz="1380" dirty="0"/>
-          </a:p>
-          <a:p>
-            <a:r>
-              <a:rPr lang="en-US" sz="1380" dirty="0">
+              <a:t>It can support case investigation, environmental health complaint.</a:t>
+            </a:r>
+            <a:endParaRPr lang="en-US" sz="1220" dirty="0"/>
+          </a:p>
+          <a:p>
+            <a:pPr indent="0" marL="0">
+              <a:buNone/>
+            </a:pPr>
+            <a:r>
+              <a:rPr lang="en-US" sz="1220" dirty="0">
                 <a:solidFill>
                   <a:srgbClr val="17364A"/>
                 </a:solidFill>
@@ -15688,7 +15975,7 @@
               </a:rPr>
               <a:t>NLP outputs should not be treated as facts without review.</a:t>
             </a:r>
-            <a:endParaRPr lang="en-US" sz="1380" dirty="0"/>
+            <a:endParaRPr lang="en-US" sz="1220" dirty="0"/>
           </a:p>
         </p:txBody>
       </p:sp>
@@ -15766,17 +16053,17 @@
         </p:nvSpPr>
         <p:spPr>
           <a:xfrm>
-            <a:off x="7799832" y="5001768"/>
-            <a:ext cx="3145536" cy="502920"/>
-          </a:xfrm>
-          <a:prstGeom prst="rect">
-            <a:avLst/>
-          </a:prstGeom>
-          <a:noFill/>
-          <a:ln/>
-        </p:spPr>
-        <p:txBody>
-          <a:bodyPr wrap="square" lIns="0" tIns="0" rIns="0" bIns="0" rtlCol="0" anchor="t">
+            <a:off x="7799832" y="4974336"/>
+            <a:ext cx="3145536" cy="576072"/>
+          </a:xfrm>
+          <a:prstGeom prst="rect">
+            <a:avLst/>
+          </a:prstGeom>
+          <a:noFill/>
+          <a:ln/>
+        </p:spPr>
+        <p:txBody>
+          <a:bodyPr wrap="square" lIns="254" tIns="254" rIns="254" bIns="254" rtlCol="0" anchor="t">
             <a:normAutofit/>
           </a:bodyPr>
           <a:lstStyle/>
@@ -15785,7 +16072,7 @@
               <a:buNone/>
             </a:pPr>
             <a:r>
-              <a:rPr lang="en-US" sz="1550" dirty="0">
+              <a:rPr lang="en-US" sz="1320" dirty="0">
                 <a:solidFill>
                   <a:srgbClr val="17364A"/>
                 </a:solidFill>
@@ -15793,9 +16080,9 @@
                 <a:ea typeface="Aptos" pitchFamily="34" charset="-122"/>
                 <a:cs typeface="Aptos" pitchFamily="34" charset="-120"/>
               </a:rPr>
-              <a:t>Use the concept to plan transparent communication, gather stakeholder input, protect trust, and make sure affected communities are considered early.</a:t>
-            </a:r>
-            <a:endParaRPr lang="en-US" sz="1550" dirty="0"/>
+              <a:t>Use the concept to plan transparent communication, gather stakeholder input, protect trust, and make sure affected.</a:t>
+            </a:r>
+            <a:endParaRPr lang="en-US" sz="1320" dirty="0"/>
           </a:p>
         </p:txBody>
       </p:sp>
@@ -16096,49 +16383,58 @@
           <a:ln/>
         </p:spPr>
         <p:txBody>
-          <a:bodyPr wrap="square" lIns="635" tIns="635" rIns="635" bIns="635" rtlCol="0" anchor="t">
+          <a:bodyPr wrap="square" lIns="1016" tIns="1016" rIns="1016" bIns="1016" rtlCol="0" anchor="t">
             <a:normAutofit/>
           </a:bodyPr>
           <a:lstStyle/>
           <a:p>
+            <a:pPr indent="0" marL="0">
+              <a:buNone/>
+            </a:pPr>
             <a:r>
               <a:rPr lang="en-US" sz="2100" dirty="0">
                 <a:solidFill>
-                  <a:srgbClr val="17364A"/>
-                </a:solidFill>
-                <a:latin typeface="Aptos" pitchFamily="34" charset="0"/>
-                <a:ea typeface="Aptos" pitchFamily="34" charset="-122"/>
-                <a:cs typeface="Aptos" pitchFamily="34" charset="-120"/>
-              </a:rPr>
-              <a:t>Natural language processing.</a:t>
+                  <a:srgbClr val="003A63"/>
+                </a:solidFill>
+                <a:latin typeface="Aptos" pitchFamily="34" charset="0"/>
+                <a:ea typeface="Aptos" pitchFamily="34" charset="-122"/>
+                <a:cs typeface="Aptos" pitchFamily="34" charset="-120"/>
+              </a:rPr>
+              <a:t>• Natural language processing.</a:t>
             </a:r>
             <a:endParaRPr lang="en-US" sz="2100" dirty="0"/>
           </a:p>
           <a:p>
+            <a:pPr indent="0" marL="0">
+              <a:buNone/>
+            </a:pPr>
             <a:r>
               <a:rPr lang="en-US" sz="2100" dirty="0">
                 <a:solidFill>
-                  <a:srgbClr val="17364A"/>
-                </a:solidFill>
-                <a:latin typeface="Aptos" pitchFamily="34" charset="0"/>
-                <a:ea typeface="Aptos" pitchFamily="34" charset="-122"/>
-                <a:cs typeface="Aptos" pitchFamily="34" charset="-120"/>
-              </a:rPr>
-              <a:t>NLP refers to AI methods that process, analyze, classify, summarize, extract, translate, or generate.</a:t>
+                  <a:srgbClr val="003A63"/>
+                </a:solidFill>
+                <a:latin typeface="Aptos" pitchFamily="34" charset="0"/>
+                <a:ea typeface="Aptos" pitchFamily="34" charset="-122"/>
+                <a:cs typeface="Aptos" pitchFamily="34" charset="-120"/>
+              </a:rPr>
+              <a:t>• NLP refers to AI methods that process, analyze, classify, summarize, extract, translate, or.</a:t>
             </a:r>
             <a:endParaRPr lang="en-US" sz="2100" dirty="0"/>
           </a:p>
           <a:p>
+            <a:pPr indent="0" marL="0">
+              <a:buNone/>
+            </a:pPr>
             <a:r>
               <a:rPr lang="en-US" sz="2100" dirty="0">
                 <a:solidFill>
-                  <a:srgbClr val="17364A"/>
-                </a:solidFill>
-                <a:latin typeface="Aptos" pitchFamily="34" charset="0"/>
-                <a:ea typeface="Aptos" pitchFamily="34" charset="-122"/>
-                <a:cs typeface="Aptos" pitchFamily="34" charset="-120"/>
-              </a:rPr>
-              <a:t>It can work with structured prompts, free-text notes, documents, emails, calls, complaints, or reports.</a:t>
+                  <a:srgbClr val="003A63"/>
+                </a:solidFill>
+                <a:latin typeface="Aptos" pitchFamily="34" charset="0"/>
+                <a:ea typeface="Aptos" pitchFamily="34" charset="-122"/>
+                <a:cs typeface="Aptos" pitchFamily="34" charset="-120"/>
+              </a:rPr>
+              <a:t>• It can work with structured prompts, free-text notes, documents, emails, calls, complaints, or.</a:t>
             </a:r>
             <a:endParaRPr lang="en-US" sz="2100" dirty="0"/>
           </a:p>
@@ -16218,17 +16514,17 @@
         </p:nvSpPr>
         <p:spPr>
           <a:xfrm>
-            <a:off x="7799832" y="1828800"/>
-            <a:ext cx="3145536" cy="685800"/>
-          </a:xfrm>
-          <a:prstGeom prst="rect">
-            <a:avLst/>
-          </a:prstGeom>
-          <a:noFill/>
-          <a:ln/>
-        </p:spPr>
-        <p:txBody>
-          <a:bodyPr wrap="square" lIns="0" tIns="0" rIns="0" bIns="0" rtlCol="0" anchor="t">
+            <a:off x="7799832" y="1801368"/>
+            <a:ext cx="3145536" cy="758952"/>
+          </a:xfrm>
+          <a:prstGeom prst="rect">
+            <a:avLst/>
+          </a:prstGeom>
+          <a:noFill/>
+          <a:ln/>
+        </p:spPr>
+        <p:txBody>
+          <a:bodyPr wrap="square" lIns="254" tIns="254" rIns="254" bIns="254" rtlCol="0" anchor="t">
             <a:normAutofit/>
           </a:bodyPr>
           <a:lstStyle/>
@@ -16237,7 +16533,7 @@
               <a:buNone/>
             </a:pPr>
             <a:r>
-              <a:rPr lang="en-US" sz="1550" dirty="0">
+              <a:rPr lang="en-US" sz="1320" dirty="0">
                 <a:solidFill>
                   <a:srgbClr val="17364A"/>
                 </a:solidFill>
@@ -16247,7 +16543,7 @@
               </a:rPr>
               <a:t>Natural language processing.</a:t>
             </a:r>
-            <a:endParaRPr lang="en-US" sz="1550" dirty="0"/>
+            <a:endParaRPr lang="en-US" sz="1320" dirty="0"/>
           </a:p>
         </p:txBody>
       </p:sp>
@@ -16335,13 +16631,16 @@
           <a:ln/>
         </p:spPr>
         <p:txBody>
-          <a:bodyPr wrap="square" lIns="254" tIns="254" rIns="254" bIns="254" rtlCol="0" anchor="t">
+          <a:bodyPr wrap="square" lIns="508" tIns="508" rIns="508" bIns="508" rtlCol="0" anchor="t">
             <a:normAutofit/>
           </a:bodyPr>
           <a:lstStyle/>
           <a:p>
-            <a:r>
-              <a:rPr lang="en-US" sz="1380" dirty="0">
+            <a:pPr indent="0" marL="0">
+              <a:buNone/>
+            </a:pPr>
+            <a:r>
+              <a:rPr lang="en-US" sz="1220" dirty="0">
                 <a:solidFill>
                   <a:srgbClr val="17364A"/>
                 </a:solidFill>
@@ -16349,13 +16648,16 @@
                 <a:ea typeface="Aptos" pitchFamily="34" charset="-122"/>
                 <a:cs typeface="Aptos" pitchFamily="34" charset="-120"/>
               </a:rPr>
-              <a:t>NLP refers to AI methods that process, analyze, classify, summarize, extract, translate,.</a:t>
-            </a:r>
-            <a:endParaRPr lang="en-US" sz="1380" dirty="0"/>
-          </a:p>
-          <a:p>
-            <a:r>
-              <a:rPr lang="en-US" sz="1380" dirty="0">
+              <a:t>NLP refers to AI methods that process, analyze, classify,.</a:t>
+            </a:r>
+            <a:endParaRPr lang="en-US" sz="1220" dirty="0"/>
+          </a:p>
+          <a:p>
+            <a:pPr indent="0" marL="0">
+              <a:buNone/>
+            </a:pPr>
+            <a:r>
+              <a:rPr lang="en-US" sz="1220" dirty="0">
                 <a:solidFill>
                   <a:srgbClr val="17364A"/>
                 </a:solidFill>
@@ -16365,11 +16667,14 @@
               </a:rPr>
               <a:t>Information extraction.</a:t>
             </a:r>
-            <a:endParaRPr lang="en-US" sz="1380" dirty="0"/>
-          </a:p>
-          <a:p>
-            <a:r>
-              <a:rPr lang="en-US" sz="1380" dirty="0">
+            <a:endParaRPr lang="en-US" sz="1220" dirty="0"/>
+          </a:p>
+          <a:p>
+            <a:pPr indent="0" marL="0">
+              <a:buNone/>
+            </a:pPr>
+            <a:r>
+              <a:rPr lang="en-US" sz="1220" dirty="0">
                 <a:solidFill>
                   <a:srgbClr val="17364A"/>
                 </a:solidFill>
@@ -16377,9 +16682,9 @@
                 <a:ea typeface="Aptos" pitchFamily="34" charset="-122"/>
                 <a:cs typeface="Aptos" pitchFamily="34" charset="-120"/>
               </a:rPr>
-              <a:t>Information extraction pulls specific facts from text, such as symptoms, dates, locations,.</a:t>
-            </a:r>
-            <a:endParaRPr lang="en-US" sz="1380" dirty="0"/>
+              <a:t>Information extraction pulls specific facts from text, such as.</a:t>
+            </a:r>
+            <a:endParaRPr lang="en-US" sz="1220" dirty="0"/>
           </a:p>
         </p:txBody>
       </p:sp>
@@ -16457,17 +16762,17 @@
         </p:nvSpPr>
         <p:spPr>
           <a:xfrm>
-            <a:off x="7799832" y="5001768"/>
-            <a:ext cx="3145536" cy="502920"/>
-          </a:xfrm>
-          <a:prstGeom prst="rect">
-            <a:avLst/>
-          </a:prstGeom>
-          <a:noFill/>
-          <a:ln/>
-        </p:spPr>
-        <p:txBody>
-          <a:bodyPr wrap="square" lIns="0" tIns="0" rIns="0" bIns="0" rtlCol="0" anchor="t">
+            <a:off x="7799832" y="4974336"/>
+            <a:ext cx="3145536" cy="576072"/>
+          </a:xfrm>
+          <a:prstGeom prst="rect">
+            <a:avLst/>
+          </a:prstGeom>
+          <a:noFill/>
+          <a:ln/>
+        </p:spPr>
+        <p:txBody>
+          <a:bodyPr wrap="square" lIns="254" tIns="254" rIns="254" bIns="254" rtlCol="0" anchor="t">
             <a:normAutofit/>
           </a:bodyPr>
           <a:lstStyle/>
@@ -16476,7 +16781,7 @@
               <a:buNone/>
             </a:pPr>
             <a:r>
-              <a:rPr lang="en-US" sz="1550" dirty="0">
+              <a:rPr lang="en-US" sz="1320" dirty="0">
                 <a:solidFill>
                   <a:srgbClr val="17364A"/>
                 </a:solidFill>
@@ -16484,9 +16789,9 @@
                 <a:ea typeface="Aptos" pitchFamily="34" charset="-122"/>
                 <a:cs typeface="Aptos" pitchFamily="34" charset="-120"/>
               </a:rPr>
-              <a:t>Use the concept to plan transparent communication, gather stakeholder input, protect trust, and make sure affected communities are considered early.</a:t>
-            </a:r>
-            <a:endParaRPr lang="en-US" sz="1550" dirty="0"/>
+              <a:t>Use the concept to plan transparent communication, gather stakeholder input, protect trust, and make sure affected.</a:t>
+            </a:r>
+            <a:endParaRPr lang="en-US" sz="1320" dirty="0"/>
           </a:p>
         </p:txBody>
       </p:sp>
@@ -16787,49 +17092,58 @@
           <a:ln/>
         </p:spPr>
         <p:txBody>
-          <a:bodyPr wrap="square" lIns="635" tIns="635" rIns="635" bIns="635" rtlCol="0" anchor="t">
+          <a:bodyPr wrap="square" lIns="1016" tIns="1016" rIns="1016" bIns="1016" rtlCol="0" anchor="t">
             <a:normAutofit/>
           </a:bodyPr>
           <a:lstStyle/>
           <a:p>
+            <a:pPr indent="0" marL="0">
+              <a:buNone/>
+            </a:pPr>
             <a:r>
               <a:rPr lang="en-US" sz="2100" dirty="0">
                 <a:solidFill>
-                  <a:srgbClr val="17364A"/>
-                </a:solidFill>
-                <a:latin typeface="Aptos" pitchFamily="34" charset="0"/>
-                <a:ea typeface="Aptos" pitchFamily="34" charset="-122"/>
-                <a:cs typeface="Aptos" pitchFamily="34" charset="-120"/>
-              </a:rPr>
-              <a:t>Summarization.</a:t>
+                  <a:srgbClr val="003A63"/>
+                </a:solidFill>
+                <a:latin typeface="Aptos" pitchFamily="34" charset="0"/>
+                <a:ea typeface="Aptos" pitchFamily="34" charset="-122"/>
+                <a:cs typeface="Aptos" pitchFamily="34" charset="-120"/>
+              </a:rPr>
+              <a:t>• Summarization.</a:t>
             </a:r>
             <a:endParaRPr lang="en-US" sz="2100" dirty="0"/>
           </a:p>
           <a:p>
+            <a:pPr indent="0" marL="0">
+              <a:buNone/>
+            </a:pPr>
             <a:r>
               <a:rPr lang="en-US" sz="2100" dirty="0">
                 <a:solidFill>
-                  <a:srgbClr val="17364A"/>
-                </a:solidFill>
-                <a:latin typeface="Aptos" pitchFamily="34" charset="0"/>
-                <a:ea typeface="Aptos" pitchFamily="34" charset="-122"/>
-                <a:cs typeface="Aptos" pitchFamily="34" charset="-120"/>
-              </a:rPr>
-              <a:t>Summarization creates a shorter version of longer text.</a:t>
+                  <a:srgbClr val="003A63"/>
+                </a:solidFill>
+                <a:latin typeface="Aptos" pitchFamily="34" charset="0"/>
+                <a:ea typeface="Aptos" pitchFamily="34" charset="-122"/>
+                <a:cs typeface="Aptos" pitchFamily="34" charset="-120"/>
+              </a:rPr>
+              <a:t>• Summarization creates a shorter version of longer text.</a:t>
             </a:r>
             <a:endParaRPr lang="en-US" sz="2100" dirty="0"/>
           </a:p>
           <a:p>
+            <a:pPr indent="0" marL="0">
+              <a:buNone/>
+            </a:pPr>
             <a:r>
               <a:rPr lang="en-US" sz="2100" dirty="0">
                 <a:solidFill>
-                  <a:srgbClr val="17364A"/>
-                </a:solidFill>
-                <a:latin typeface="Aptos" pitchFamily="34" charset="0"/>
-                <a:ea typeface="Aptos" pitchFamily="34" charset="-122"/>
-                <a:cs typeface="Aptos" pitchFamily="34" charset="-120"/>
-              </a:rPr>
-              <a:t>Public health summarization should preserve uncertainty, cite sources when possible, and avoid adding.</a:t>
+                  <a:srgbClr val="003A63"/>
+                </a:solidFill>
+                <a:latin typeface="Aptos" pitchFamily="34" charset="0"/>
+                <a:ea typeface="Aptos" pitchFamily="34" charset="-122"/>
+                <a:cs typeface="Aptos" pitchFamily="34" charset="-120"/>
+              </a:rPr>
+              <a:t>• Public health summarization should preserve uncertainty, cite sources when possible, and avoid.</a:t>
             </a:r>
             <a:endParaRPr lang="en-US" sz="2100" dirty="0"/>
           </a:p>
@@ -16909,17 +17223,17 @@
         </p:nvSpPr>
         <p:spPr>
           <a:xfrm>
-            <a:off x="7799832" y="1828800"/>
-            <a:ext cx="3145536" cy="685800"/>
-          </a:xfrm>
-          <a:prstGeom prst="rect">
-            <a:avLst/>
-          </a:prstGeom>
-          <a:noFill/>
-          <a:ln/>
-        </p:spPr>
-        <p:txBody>
-          <a:bodyPr wrap="square" lIns="0" tIns="0" rIns="0" bIns="0" rtlCol="0" anchor="t">
+            <a:off x="7799832" y="1801368"/>
+            <a:ext cx="3145536" cy="758952"/>
+          </a:xfrm>
+          <a:prstGeom prst="rect">
+            <a:avLst/>
+          </a:prstGeom>
+          <a:noFill/>
+          <a:ln/>
+        </p:spPr>
+        <p:txBody>
+          <a:bodyPr wrap="square" lIns="254" tIns="254" rIns="254" bIns="254" rtlCol="0" anchor="t">
             <a:normAutofit/>
           </a:bodyPr>
           <a:lstStyle/>
@@ -16928,7 +17242,7 @@
               <a:buNone/>
             </a:pPr>
             <a:r>
-              <a:rPr lang="en-US" sz="1550" dirty="0">
+              <a:rPr lang="en-US" sz="1320" dirty="0">
                 <a:solidFill>
                   <a:srgbClr val="17364A"/>
                 </a:solidFill>
@@ -16938,7 +17252,7 @@
               </a:rPr>
               <a:t>Summarization.</a:t>
             </a:r>
-            <a:endParaRPr lang="en-US" sz="1550" dirty="0"/>
+            <a:endParaRPr lang="en-US" sz="1320" dirty="0"/>
           </a:p>
         </p:txBody>
       </p:sp>
@@ -17026,13 +17340,16 @@
           <a:ln/>
         </p:spPr>
         <p:txBody>
-          <a:bodyPr wrap="square" lIns="254" tIns="254" rIns="254" bIns="254" rtlCol="0" anchor="t">
+          <a:bodyPr wrap="square" lIns="508" tIns="508" rIns="508" bIns="508" rtlCol="0" anchor="t">
             <a:normAutofit/>
           </a:bodyPr>
           <a:lstStyle/>
           <a:p>
-            <a:r>
-              <a:rPr lang="en-US" sz="1380" dirty="0">
+            <a:pPr indent="0" marL="0">
+              <a:buNone/>
+            </a:pPr>
+            <a:r>
+              <a:rPr lang="en-US" sz="1220" dirty="0">
                 <a:solidFill>
                   <a:srgbClr val="17364A"/>
                 </a:solidFill>
@@ -17040,13 +17357,16 @@
                 <a:ea typeface="Aptos" pitchFamily="34" charset="-122"/>
                 <a:cs typeface="Aptos" pitchFamily="34" charset="-120"/>
               </a:rPr>
-              <a:t>Public health summarization should preserve uncertainty, cite sources when possible, and.</a:t>
-            </a:r>
-            <a:endParaRPr lang="en-US" sz="1380" dirty="0"/>
-          </a:p>
-          <a:p>
-            <a:r>
-              <a:rPr lang="en-US" sz="1380" dirty="0">
+              <a:t>Public health summarization should preserve uncertainty, cite.</a:t>
+            </a:r>
+            <a:endParaRPr lang="en-US" sz="1220" dirty="0"/>
+          </a:p>
+          <a:p>
+            <a:pPr indent="0" marL="0">
+              <a:buNone/>
+            </a:pPr>
+            <a:r>
+              <a:rPr lang="en-US" sz="1220" dirty="0">
                 <a:solidFill>
                   <a:srgbClr val="17364A"/>
                 </a:solidFill>
@@ -17056,11 +17376,14 @@
               </a:rPr>
               <a:t>Hallucination.</a:t>
             </a:r>
-            <a:endParaRPr lang="en-US" sz="1380" dirty="0"/>
-          </a:p>
-          <a:p>
-            <a:r>
-              <a:rPr lang="en-US" sz="1380" dirty="0">
+            <a:endParaRPr lang="en-US" sz="1220" dirty="0"/>
+          </a:p>
+          <a:p>
+            <a:pPr indent="0" marL="0">
+              <a:buNone/>
+            </a:pPr>
+            <a:r>
+              <a:rPr lang="en-US" sz="1220" dirty="0">
                 <a:solidFill>
                   <a:srgbClr val="17364A"/>
                 </a:solidFill>
@@ -17068,9 +17391,9 @@
                 <a:ea typeface="Aptos" pitchFamily="34" charset="-122"/>
                 <a:cs typeface="Aptos" pitchFamily="34" charset="-120"/>
               </a:rPr>
-              <a:t>A hallucination is an AI-generated statement that is false, unsupported, or not present in.</a:t>
-            </a:r>
-            <a:endParaRPr lang="en-US" sz="1380" dirty="0"/>
+              <a:t>A hallucination is an AI-generated statement that is false,.</a:t>
+            </a:r>
+            <a:endParaRPr lang="en-US" sz="1220" dirty="0"/>
           </a:p>
         </p:txBody>
       </p:sp>
@@ -17148,17 +17471,17 @@
         </p:nvSpPr>
         <p:spPr>
           <a:xfrm>
-            <a:off x="7799832" y="5001768"/>
-            <a:ext cx="3145536" cy="502920"/>
-          </a:xfrm>
-          <a:prstGeom prst="rect">
-            <a:avLst/>
-          </a:prstGeom>
-          <a:noFill/>
-          <a:ln/>
-        </p:spPr>
-        <p:txBody>
-          <a:bodyPr wrap="square" lIns="0" tIns="0" rIns="0" bIns="0" rtlCol="0" anchor="t">
+            <a:off x="7799832" y="4974336"/>
+            <a:ext cx="3145536" cy="576072"/>
+          </a:xfrm>
+          <a:prstGeom prst="rect">
+            <a:avLst/>
+          </a:prstGeom>
+          <a:noFill/>
+          <a:ln/>
+        </p:spPr>
+        <p:txBody>
+          <a:bodyPr wrap="square" lIns="254" tIns="254" rIns="254" bIns="254" rtlCol="0" anchor="t">
             <a:normAutofit/>
           </a:bodyPr>
           <a:lstStyle/>
@@ -17167,7 +17490,7 @@
               <a:buNone/>
             </a:pPr>
             <a:r>
-              <a:rPr lang="en-US" sz="1550" dirty="0">
+              <a:rPr lang="en-US" sz="1320" dirty="0">
                 <a:solidFill>
                   <a:srgbClr val="17364A"/>
                 </a:solidFill>
@@ -17175,9 +17498,9 @@
                 <a:ea typeface="Aptos" pitchFamily="34" charset="-122"/>
                 <a:cs typeface="Aptos" pitchFamily="34" charset="-120"/>
               </a:rPr>
-              <a:t>Use the concept to plan transparent communication, gather stakeholder input, protect trust, and make sure affected communities are considered early.</a:t>
-            </a:r>
-            <a:endParaRPr lang="en-US" sz="1550" dirty="0"/>
+              <a:t>Use the concept to plan transparent communication, gather stakeholder input, protect trust, and make sure affected.</a:t>
+            </a:r>
+            <a:endParaRPr lang="en-US" sz="1320" dirty="0"/>
           </a:p>
         </p:txBody>
       </p:sp>

--- a/downloads/presentations/modules/anl-200.pptx
+++ b/downloads/presentations/modules/anl-200.pptx
@@ -3418,11 +3418,11 @@
         <p:spPr>
           <a:xfrm>
             <a:off x="7635240" y="1325880"/>
-            <a:ext cx="3474720" cy="1325880"/>
+            <a:ext cx="3474720" cy="1207008"/>
           </a:xfrm>
           <a:prstGeom prst="roundRect">
             <a:avLst>
-              <a:gd name="adj" fmla="val 8276"/>
+              <a:gd name="adj" fmla="val 9091"/>
             </a:avLst>
           </a:prstGeom>
           <a:solidFill>
@@ -3484,7 +3484,7 @@
         <p:spPr>
           <a:xfrm>
             <a:off x="7799832" y="1801368"/>
-            <a:ext cx="3145536" cy="758952"/>
+            <a:ext cx="3145536" cy="640080"/>
           </a:xfrm>
           <a:prstGeom prst="rect">
             <a:avLst/>
@@ -3524,12 +3524,12 @@
         </p:nvSpPr>
         <p:spPr>
           <a:xfrm>
-            <a:off x="7635240" y="2788920"/>
-            <a:ext cx="3474720" cy="1536192"/>
+            <a:off x="7635240" y="2670048"/>
+            <a:ext cx="3474720" cy="1377086"/>
           </a:xfrm>
           <a:prstGeom prst="roundRect">
             <a:avLst>
-              <a:gd name="adj" fmla="val 7143"/>
+              <a:gd name="adj" fmla="val 7968"/>
             </a:avLst>
           </a:prstGeom>
           <a:solidFill>
@@ -3551,7 +3551,7 @@
         </p:nvSpPr>
         <p:spPr>
           <a:xfrm>
-            <a:off x="7799832" y="2935224"/>
+            <a:off x="7799832" y="2816352"/>
             <a:ext cx="3145536" cy="256032"/>
           </a:xfrm>
           <a:prstGeom prst="rect">
@@ -3590,8 +3590,8 @@
         </p:nvSpPr>
         <p:spPr>
           <a:xfrm>
-            <a:off x="7818120" y="3300984"/>
-            <a:ext cx="3090672" cy="877824"/>
+            <a:off x="7818120" y="3182112"/>
+            <a:ext cx="3090672" cy="718718"/>
           </a:xfrm>
           <a:prstGeom prst="rect">
             <a:avLst/>
@@ -3665,12 +3665,12 @@
         </p:nvSpPr>
         <p:spPr>
           <a:xfrm>
-            <a:off x="7635240" y="4498848"/>
-            <a:ext cx="3474720" cy="1143000"/>
+            <a:off x="7635240" y="4184294"/>
+            <a:ext cx="3474720" cy="1466698"/>
           </a:xfrm>
           <a:prstGeom prst="roundRect">
             <a:avLst>
-              <a:gd name="adj" fmla="val 9600"/>
+              <a:gd name="adj" fmla="val 7481"/>
             </a:avLst>
           </a:prstGeom>
           <a:solidFill>
@@ -3692,7 +3692,7 @@
         </p:nvSpPr>
         <p:spPr>
           <a:xfrm>
-            <a:off x="7799832" y="4645152"/>
+            <a:off x="7799832" y="4330598"/>
             <a:ext cx="3145536" cy="256032"/>
           </a:xfrm>
           <a:prstGeom prst="rect">
@@ -3731,8 +3731,8 @@
         </p:nvSpPr>
         <p:spPr>
           <a:xfrm>
-            <a:off x="7799832" y="4974336"/>
-            <a:ext cx="3145536" cy="576072"/>
+            <a:off x="7799832" y="4659782"/>
+            <a:ext cx="3145536" cy="899770"/>
           </a:xfrm>
           <a:prstGeom prst="rect">
             <a:avLst/>
@@ -3758,7 +3758,7 @@
                 <a:ea typeface="Aptos" pitchFamily="34" charset="-122"/>
                 <a:cs typeface="Aptos" pitchFamily="34" charset="-120"/>
               </a:rPr>
-              <a:t>Use the concept to plan transparent communication, gather stakeholder input, protect trust, and make sure affected.</a:t>
+              <a:t>Use the concept to plan transparent communication, gather stakeholder input, protect trust, and make sure affected communities are considered early.</a:t>
             </a:r>
             <a:endParaRPr lang="en-US" sz="1320" dirty="0"/>
           </a:p>
@@ -4127,11 +4127,11 @@
         <p:spPr>
           <a:xfrm>
             <a:off x="7635240" y="1325880"/>
-            <a:ext cx="3474720" cy="1325880"/>
+            <a:ext cx="3474720" cy="1207008"/>
           </a:xfrm>
           <a:prstGeom prst="roundRect">
             <a:avLst>
-              <a:gd name="adj" fmla="val 8276"/>
+              <a:gd name="adj" fmla="val 9091"/>
             </a:avLst>
           </a:prstGeom>
           <a:solidFill>
@@ -4193,7 +4193,7 @@
         <p:spPr>
           <a:xfrm>
             <a:off x="7799832" y="1801368"/>
-            <a:ext cx="3145536" cy="758952"/>
+            <a:ext cx="3145536" cy="640080"/>
           </a:xfrm>
           <a:prstGeom prst="rect">
             <a:avLst/>
@@ -4233,12 +4233,12 @@
         </p:nvSpPr>
         <p:spPr>
           <a:xfrm>
-            <a:off x="7635240" y="2788920"/>
-            <a:ext cx="3474720" cy="1536192"/>
+            <a:off x="7635240" y="2670048"/>
+            <a:ext cx="3474720" cy="1377086"/>
           </a:xfrm>
           <a:prstGeom prst="roundRect">
             <a:avLst>
-              <a:gd name="adj" fmla="val 7143"/>
+              <a:gd name="adj" fmla="val 7968"/>
             </a:avLst>
           </a:prstGeom>
           <a:solidFill>
@@ -4260,8 +4260,8 @@
         </p:nvSpPr>
         <p:spPr>
           <a:xfrm>
-            <a:off x="7799832" y="2935224"/>
-            <a:ext cx="3145536" cy="256032"/>
+            <a:off x="7799832" y="2798064"/>
+            <a:ext cx="3145536" cy="237744"/>
           </a:xfrm>
           <a:prstGeom prst="rect">
             <a:avLst/>
@@ -4277,7 +4277,7 @@
               <a:buNone/>
             </a:pPr>
             <a:r>
-              <a:rPr lang="en-US" sz="1300" b="1" dirty="0">
+              <a:rPr lang="en-US" sz="1250" b="1" dirty="0">
                 <a:solidFill>
                   <a:srgbClr val="0068B7"/>
                 </a:solidFill>
@@ -4285,101 +4285,317 @@
                 <a:ea typeface="Aptos" pitchFamily="34" charset="-122"/>
                 <a:cs typeface="Aptos" pitchFamily="34" charset="-120"/>
               </a:rPr>
-              <a:t>Concept checkpoints</a:t>
-            </a:r>
-            <a:endParaRPr lang="en-US" sz="1300" dirty="0"/>
-          </a:p>
-        </p:txBody>
-      </p:sp>
-      <p:sp>
-        <p:nvSpPr>
-          <p:cNvPr id="15" name="Text 13"/>
-          <p:cNvSpPr/>
-          <p:nvPr/>
-        </p:nvSpPr>
-        <p:spPr>
-          <a:xfrm>
-            <a:off x="7818120" y="3300984"/>
-            <a:ext cx="3090672" cy="877824"/>
-          </a:xfrm>
-          <a:prstGeom prst="rect">
-            <a:avLst/>
-          </a:prstGeom>
-          <a:noFill/>
-          <a:ln/>
-        </p:spPr>
-        <p:txBody>
-          <a:bodyPr wrap="square" lIns="508" tIns="508" rIns="508" bIns="508" rtlCol="0" anchor="t">
+              <a:t>Trust cycle</a:t>
+            </a:r>
+            <a:endParaRPr lang="en-US" sz="1250" dirty="0"/>
+          </a:p>
+        </p:txBody>
+      </p:sp>
+      <p:sp>
+        <p:nvSpPr>
+          <p:cNvPr id="15" name="Shape 13"/>
+          <p:cNvSpPr/>
+          <p:nvPr/>
+        </p:nvSpPr>
+        <p:spPr>
+          <a:xfrm>
+            <a:off x="8763000" y="3351276"/>
+            <a:ext cx="164592" cy="0"/>
+          </a:xfrm>
+          <a:prstGeom prst="line">
+            <a:avLst/>
+          </a:prstGeom>
+          <a:noFill/>
+          <a:ln w="15240">
+            <a:solidFill>
+              <a:srgbClr val="8ABBD8"/>
+            </a:solidFill>
+            <a:prstDash val="solid"/>
+          </a:ln>
+        </p:spPr>
+      </p:sp>
+      <p:sp>
+        <p:nvSpPr>
+          <p:cNvPr id="16" name="Shape 14"/>
+          <p:cNvSpPr/>
+          <p:nvPr/>
+        </p:nvSpPr>
+        <p:spPr>
+          <a:xfrm>
+            <a:off x="7872984" y="3200400"/>
+            <a:ext cx="890016" cy="301752"/>
+          </a:xfrm>
+          <a:prstGeom prst="roundRect">
+            <a:avLst>
+              <a:gd name="adj" fmla="val 24242"/>
+            </a:avLst>
+          </a:prstGeom>
+          <a:solidFill>
+            <a:srgbClr val="0068B7"/>
+          </a:solidFill>
+          <a:ln w="12700">
+            <a:solidFill>
+              <a:srgbClr val="0068B7"/>
+            </a:solidFill>
+            <a:prstDash val="solid"/>
+          </a:ln>
+        </p:spPr>
+      </p:sp>
+      <p:sp>
+        <p:nvSpPr>
+          <p:cNvPr id="17" name="Text 15"/>
+          <p:cNvSpPr/>
+          <p:nvPr/>
+        </p:nvSpPr>
+        <p:spPr>
+          <a:xfrm>
+            <a:off x="7909560" y="3273552"/>
+            <a:ext cx="816864" cy="146304"/>
+          </a:xfrm>
+          <a:prstGeom prst="rect">
+            <a:avLst/>
+          </a:prstGeom>
+          <a:noFill/>
+          <a:ln/>
+        </p:spPr>
+        <p:txBody>
+          <a:bodyPr wrap="square" lIns="0" tIns="0" rIns="0" bIns="0" rtlCol="0" anchor="ctr">
             <a:normAutofit/>
           </a:bodyPr>
           <a:lstStyle/>
           <a:p>
-            <a:pPr indent="0" marL="0">
-              <a:buNone/>
-            </a:pPr>
-            <a:r>
-              <a:rPr lang="en-US" sz="1220" dirty="0">
-                <a:solidFill>
-                  <a:srgbClr val="17364A"/>
-                </a:solidFill>
-                <a:latin typeface="Aptos" pitchFamily="34" charset="0"/>
-                <a:ea typeface="Aptos" pitchFamily="34" charset="-122"/>
-                <a:cs typeface="Aptos" pitchFamily="34" charset="-120"/>
-              </a:rPr>
-              <a:t>Extraction, classification, summarization, translation, topic.</a:t>
-            </a:r>
-            <a:endParaRPr lang="en-US" sz="1220" dirty="0"/>
-          </a:p>
-          <a:p>
-            <a:pPr indent="0" marL="0">
-              <a:buNone/>
-            </a:pPr>
-            <a:r>
-              <a:rPr lang="en-US" sz="1220" dirty="0">
-                <a:solidFill>
-                  <a:srgbClr val="17364A"/>
-                </a:solidFill>
-                <a:latin typeface="Aptos" pitchFamily="34" charset="0"/>
-                <a:ea typeface="Aptos" pitchFamily="34" charset="-122"/>
-                <a:cs typeface="Aptos" pitchFamily="34" charset="-120"/>
-              </a:rPr>
-              <a:t>Staff should define the task narrowly before selecting or testing.</a:t>
-            </a:r>
-            <a:endParaRPr lang="en-US" sz="1220" dirty="0"/>
-          </a:p>
-          <a:p>
-            <a:pPr indent="0" marL="0">
-              <a:buNone/>
-            </a:pPr>
-            <a:r>
-              <a:rPr lang="en-US" sz="1220" dirty="0">
-                <a:solidFill>
-                  <a:srgbClr val="17364A"/>
-                </a:solidFill>
-                <a:latin typeface="Aptos" pitchFamily="34" charset="0"/>
-                <a:ea typeface="Aptos" pitchFamily="34" charset="-122"/>
-                <a:cs typeface="Aptos" pitchFamily="34" charset="-120"/>
-              </a:rPr>
-              <a:t>Evaluation should use representative source text.</a:t>
-            </a:r>
-            <a:endParaRPr lang="en-US" sz="1220" dirty="0"/>
-          </a:p>
-        </p:txBody>
-      </p:sp>
-      <p:sp>
-        <p:nvSpPr>
-          <p:cNvPr id="16" name="Shape 14"/>
-          <p:cNvSpPr/>
-          <p:nvPr/>
-        </p:nvSpPr>
-        <p:spPr>
-          <a:xfrm>
-            <a:off x="7635240" y="4498848"/>
-            <a:ext cx="3474720" cy="1143000"/>
+            <a:pPr algn="ctr" indent="0" marL="0">
+              <a:buNone/>
+            </a:pPr>
+            <a:r>
+              <a:rPr lang="en-US" sz="880" b="1" dirty="0">
+                <a:solidFill>
+                  <a:srgbClr val="FFFFFF"/>
+                </a:solidFill>
+                <a:latin typeface="Aptos" pitchFamily="34" charset="0"/>
+                <a:ea typeface="Aptos" pitchFamily="34" charset="-122"/>
+                <a:cs typeface="Aptos" pitchFamily="34" charset="-120"/>
+              </a:rPr>
+              <a:t>Listen</a:t>
+            </a:r>
+            <a:endParaRPr lang="en-US" sz="880" dirty="0"/>
+          </a:p>
+        </p:txBody>
+      </p:sp>
+      <p:sp>
+        <p:nvSpPr>
+          <p:cNvPr id="18" name="Shape 16"/>
+          <p:cNvSpPr/>
+          <p:nvPr/>
+        </p:nvSpPr>
+        <p:spPr>
+          <a:xfrm>
+            <a:off x="9817608" y="3351276"/>
+            <a:ext cx="164592" cy="0"/>
+          </a:xfrm>
+          <a:prstGeom prst="line">
+            <a:avLst/>
+          </a:prstGeom>
+          <a:noFill/>
+          <a:ln w="15240">
+            <a:solidFill>
+              <a:srgbClr val="8ABBD8"/>
+            </a:solidFill>
+            <a:prstDash val="solid"/>
+          </a:ln>
+        </p:spPr>
+      </p:sp>
+      <p:sp>
+        <p:nvSpPr>
+          <p:cNvPr id="19" name="Shape 17"/>
+          <p:cNvSpPr/>
+          <p:nvPr/>
+        </p:nvSpPr>
+        <p:spPr>
+          <a:xfrm>
+            <a:off x="8927592" y="3200400"/>
+            <a:ext cx="890016" cy="301752"/>
           </a:xfrm>
           <a:prstGeom prst="roundRect">
             <a:avLst>
-              <a:gd name="adj" fmla="val 9600"/>
+              <a:gd name="adj" fmla="val 24242"/>
+            </a:avLst>
+          </a:prstGeom>
+          <a:solidFill>
+            <a:srgbClr val="2F8A28"/>
+          </a:solidFill>
+          <a:ln w="12700">
+            <a:solidFill>
+              <a:srgbClr val="2F8A28"/>
+            </a:solidFill>
+            <a:prstDash val="solid"/>
+          </a:ln>
+        </p:spPr>
+      </p:sp>
+      <p:sp>
+        <p:nvSpPr>
+          <p:cNvPr id="20" name="Text 18"/>
+          <p:cNvSpPr/>
+          <p:nvPr/>
+        </p:nvSpPr>
+        <p:spPr>
+          <a:xfrm>
+            <a:off x="8964168" y="3273552"/>
+            <a:ext cx="816864" cy="146304"/>
+          </a:xfrm>
+          <a:prstGeom prst="rect">
+            <a:avLst/>
+          </a:prstGeom>
+          <a:noFill/>
+          <a:ln/>
+        </p:spPr>
+        <p:txBody>
+          <a:bodyPr wrap="square" lIns="0" tIns="0" rIns="0" bIns="0" rtlCol="0" anchor="ctr">
+            <a:normAutofit/>
+          </a:bodyPr>
+          <a:lstStyle/>
+          <a:p>
+            <a:pPr algn="ctr" indent="0" marL="0">
+              <a:buNone/>
+            </a:pPr>
+            <a:r>
+              <a:rPr lang="en-US" sz="880" b="1" dirty="0">
+                <a:solidFill>
+                  <a:srgbClr val="FFFFFF"/>
+                </a:solidFill>
+                <a:latin typeface="Aptos" pitchFamily="34" charset="0"/>
+                <a:ea typeface="Aptos" pitchFamily="34" charset="-122"/>
+                <a:cs typeface="Aptos" pitchFamily="34" charset="-120"/>
+              </a:rPr>
+              <a:t>Adapt</a:t>
+            </a:r>
+            <a:endParaRPr lang="en-US" sz="880" dirty="0"/>
+          </a:p>
+        </p:txBody>
+      </p:sp>
+      <p:sp>
+        <p:nvSpPr>
+          <p:cNvPr id="21" name="Shape 19"/>
+          <p:cNvSpPr/>
+          <p:nvPr/>
+        </p:nvSpPr>
+        <p:spPr>
+          <a:xfrm>
+            <a:off x="9982200" y="3200400"/>
+            <a:ext cx="890016" cy="301752"/>
+          </a:xfrm>
+          <a:prstGeom prst="roundRect">
+            <a:avLst>
+              <a:gd name="adj" fmla="val 24242"/>
+            </a:avLst>
+          </a:prstGeom>
+          <a:solidFill>
+            <a:srgbClr val="6A4CA3"/>
+          </a:solidFill>
+          <a:ln w="12700">
+            <a:solidFill>
+              <a:srgbClr val="6A4CA3"/>
+            </a:solidFill>
+            <a:prstDash val="solid"/>
+          </a:ln>
+        </p:spPr>
+      </p:sp>
+      <p:sp>
+        <p:nvSpPr>
+          <p:cNvPr id="22" name="Text 20"/>
+          <p:cNvSpPr/>
+          <p:nvPr/>
+        </p:nvSpPr>
+        <p:spPr>
+          <a:xfrm>
+            <a:off x="10018776" y="3273552"/>
+            <a:ext cx="816864" cy="146304"/>
+          </a:xfrm>
+          <a:prstGeom prst="rect">
+            <a:avLst/>
+          </a:prstGeom>
+          <a:noFill/>
+          <a:ln/>
+        </p:spPr>
+        <p:txBody>
+          <a:bodyPr wrap="square" lIns="0" tIns="0" rIns="0" bIns="0" rtlCol="0" anchor="ctr">
+            <a:normAutofit/>
+          </a:bodyPr>
+          <a:lstStyle/>
+          <a:p>
+            <a:pPr algn="ctr" indent="0" marL="0">
+              <a:buNone/>
+            </a:pPr>
+            <a:r>
+              <a:rPr lang="en-US" sz="880" b="1" dirty="0">
+                <a:solidFill>
+                  <a:srgbClr val="FFFFFF"/>
+                </a:solidFill>
+                <a:latin typeface="Aptos" pitchFamily="34" charset="0"/>
+                <a:ea typeface="Aptos" pitchFamily="34" charset="-122"/>
+                <a:cs typeface="Aptos" pitchFamily="34" charset="-120"/>
+              </a:rPr>
+              <a:t>Report</a:t>
+            </a:r>
+            <a:endParaRPr lang="en-US" sz="880" dirty="0"/>
+          </a:p>
+        </p:txBody>
+      </p:sp>
+      <p:sp>
+        <p:nvSpPr>
+          <p:cNvPr id="23" name="Text 21"/>
+          <p:cNvSpPr/>
+          <p:nvPr/>
+        </p:nvSpPr>
+        <p:spPr>
+          <a:xfrm>
+            <a:off x="7854696" y="3694176"/>
+            <a:ext cx="3035808" cy="206654"/>
+          </a:xfrm>
+          <a:prstGeom prst="rect">
+            <a:avLst/>
+          </a:prstGeom>
+          <a:noFill/>
+          <a:ln/>
+        </p:spPr>
+        <p:txBody>
+          <a:bodyPr wrap="square" lIns="254" tIns="254" rIns="254" bIns="254" rtlCol="0" anchor="t">
+            <a:normAutofit/>
+          </a:bodyPr>
+          <a:lstStyle/>
+          <a:p>
+            <a:pPr indent="0" marL="0">
+              <a:buNone/>
+            </a:pPr>
+            <a:r>
+              <a:rPr lang="en-US" sz="1120" dirty="0">
+                <a:solidFill>
+                  <a:srgbClr val="17364A"/>
+                </a:solidFill>
+                <a:latin typeface="Aptos" pitchFamily="34" charset="0"/>
+                <a:ea typeface="Aptos" pitchFamily="34" charset="-122"/>
+                <a:cs typeface="Aptos" pitchFamily="34" charset="-120"/>
+              </a:rPr>
+              <a:t>Communication and engagement are stronger when feedback changes the work and the department reports what.</a:t>
+            </a:r>
+            <a:endParaRPr lang="en-US" sz="1120" dirty="0"/>
+          </a:p>
+        </p:txBody>
+      </p:sp>
+      <p:sp>
+        <p:nvSpPr>
+          <p:cNvPr id="24" name="Shape 22"/>
+          <p:cNvSpPr/>
+          <p:nvPr/>
+        </p:nvSpPr>
+        <p:spPr>
+          <a:xfrm>
+            <a:off x="7635240" y="4184294"/>
+            <a:ext cx="3474720" cy="1466698"/>
+          </a:xfrm>
+          <a:prstGeom prst="roundRect">
+            <a:avLst>
+              <a:gd name="adj" fmla="val 7481"/>
             </a:avLst>
           </a:prstGeom>
           <a:solidFill>
@@ -4395,13 +4611,13 @@
       </p:sp>
       <p:sp>
         <p:nvSpPr>
-          <p:cNvPr id="17" name="Text 15"/>
-          <p:cNvSpPr/>
-          <p:nvPr/>
-        </p:nvSpPr>
-        <p:spPr>
-          <a:xfrm>
-            <a:off x="7799832" y="4645152"/>
+          <p:cNvPr id="25" name="Text 23"/>
+          <p:cNvSpPr/>
+          <p:nvPr/>
+        </p:nvSpPr>
+        <p:spPr>
+          <a:xfrm>
+            <a:off x="7799832" y="4330598"/>
             <a:ext cx="3145536" cy="256032"/>
           </a:xfrm>
           <a:prstGeom prst="rect">
@@ -4434,14 +4650,14 @@
       </p:sp>
       <p:sp>
         <p:nvSpPr>
-          <p:cNvPr id="18" name="Text 16"/>
-          <p:cNvSpPr/>
-          <p:nvPr/>
-        </p:nvSpPr>
-        <p:spPr>
-          <a:xfrm>
-            <a:off x="7799832" y="4974336"/>
-            <a:ext cx="3145536" cy="576072"/>
+          <p:cNvPr id="26" name="Text 24"/>
+          <p:cNvSpPr/>
+          <p:nvPr/>
+        </p:nvSpPr>
+        <p:spPr>
+          <a:xfrm>
+            <a:off x="7799832" y="4659782"/>
+            <a:ext cx="3145536" cy="899770"/>
           </a:xfrm>
           <a:prstGeom prst="rect">
             <a:avLst/>
@@ -4467,7 +4683,7 @@
                 <a:ea typeface="Aptos" pitchFamily="34" charset="-122"/>
                 <a:cs typeface="Aptos" pitchFamily="34" charset="-120"/>
               </a:rPr>
-              <a:t>Use the concept to plan transparent communication, gather stakeholder input, protect trust, and make sure affected.</a:t>
+              <a:t>Use the concept to plan transparent communication, gather stakeholder input, protect trust, and make sure affected communities are considered early.</a:t>
             </a:r>
             <a:endParaRPr lang="en-US" sz="1320" dirty="0"/>
           </a:p>
@@ -4836,11 +5052,11 @@
         <p:spPr>
           <a:xfrm>
             <a:off x="7635240" y="1325880"/>
-            <a:ext cx="3474720" cy="1325880"/>
+            <a:ext cx="3474720" cy="1207008"/>
           </a:xfrm>
           <a:prstGeom prst="roundRect">
             <a:avLst>
-              <a:gd name="adj" fmla="val 8276"/>
+              <a:gd name="adj" fmla="val 9091"/>
             </a:avLst>
           </a:prstGeom>
           <a:solidFill>
@@ -4902,7 +5118,7 @@
         <p:spPr>
           <a:xfrm>
             <a:off x="7799832" y="1801368"/>
-            <a:ext cx="3145536" cy="758952"/>
+            <a:ext cx="3145536" cy="640080"/>
           </a:xfrm>
           <a:prstGeom prst="rect">
             <a:avLst/>
@@ -4942,7 +5158,7 @@
         </p:nvSpPr>
         <p:spPr>
           <a:xfrm>
-            <a:off x="7635240" y="2788920"/>
+            <a:off x="7635240" y="2670048"/>
             <a:ext cx="3474720" cy="1536192"/>
           </a:xfrm>
           <a:prstGeom prst="roundRect">
@@ -4969,7 +5185,7 @@
         </p:nvSpPr>
         <p:spPr>
           <a:xfrm>
-            <a:off x="7799832" y="2935224"/>
+            <a:off x="7799832" y="2816352"/>
             <a:ext cx="3145536" cy="256032"/>
           </a:xfrm>
           <a:prstGeom prst="rect">
@@ -5008,7 +5224,7 @@
         </p:nvSpPr>
         <p:spPr>
           <a:xfrm>
-            <a:off x="7818120" y="3300984"/>
+            <a:off x="7818120" y="3182112"/>
             <a:ext cx="3090672" cy="877824"/>
           </a:xfrm>
           <a:prstGeom prst="rect">
@@ -5083,12 +5299,12 @@
         </p:nvSpPr>
         <p:spPr>
           <a:xfrm>
-            <a:off x="7635240" y="4498848"/>
-            <a:ext cx="3474720" cy="1143000"/>
+            <a:off x="7635240" y="4343400"/>
+            <a:ext cx="3474720" cy="1255471"/>
           </a:xfrm>
           <a:prstGeom prst="roundRect">
             <a:avLst>
-              <a:gd name="adj" fmla="val 9600"/>
+              <a:gd name="adj" fmla="val 8740"/>
             </a:avLst>
           </a:prstGeom>
           <a:solidFill>
@@ -5110,7 +5326,7 @@
         </p:nvSpPr>
         <p:spPr>
           <a:xfrm>
-            <a:off x="7799832" y="4645152"/>
+            <a:off x="7799832" y="4489704"/>
             <a:ext cx="3145536" cy="256032"/>
           </a:xfrm>
           <a:prstGeom prst="rect">
@@ -5149,8 +5365,8 @@
         </p:nvSpPr>
         <p:spPr>
           <a:xfrm>
-            <a:off x="7799832" y="4974336"/>
-            <a:ext cx="3145536" cy="576072"/>
+            <a:off x="7799832" y="4818888"/>
+            <a:ext cx="3145536" cy="688543"/>
           </a:xfrm>
           <a:prstGeom prst="rect">
             <a:avLst/>
@@ -5176,7 +5392,7 @@
                 <a:ea typeface="Aptos" pitchFamily="34" charset="-122"/>
                 <a:cs typeface="Aptos" pitchFamily="34" charset="-120"/>
               </a:rPr>
-              <a:t>Identify what could go wrong, who could be affected, what safeguards are needed, and what evidence should be reviewed.</a:t>
+              <a:t>Identify what could go wrong, who could be affected, what safeguards are needed, and what evidence should be reviewed before use.</a:t>
             </a:r>
             <a:endParaRPr lang="en-US" sz="1320" dirty="0"/>
           </a:p>
@@ -5545,11 +5761,11 @@
         <p:spPr>
           <a:xfrm>
             <a:off x="7635240" y="1325880"/>
-            <a:ext cx="3474720" cy="1325880"/>
+            <a:ext cx="3474720" cy="1207008"/>
           </a:xfrm>
           <a:prstGeom prst="roundRect">
             <a:avLst>
-              <a:gd name="adj" fmla="val 8276"/>
+              <a:gd name="adj" fmla="val 9091"/>
             </a:avLst>
           </a:prstGeom>
           <a:solidFill>
@@ -5611,7 +5827,7 @@
         <p:spPr>
           <a:xfrm>
             <a:off x="7799832" y="1801368"/>
-            <a:ext cx="3145536" cy="758952"/>
+            <a:ext cx="3145536" cy="640080"/>
           </a:xfrm>
           <a:prstGeom prst="rect">
             <a:avLst/>
@@ -5651,7 +5867,7 @@
         </p:nvSpPr>
         <p:spPr>
           <a:xfrm>
-            <a:off x="7635240" y="2788920"/>
+            <a:off x="7635240" y="2670048"/>
             <a:ext cx="3474720" cy="1536192"/>
           </a:xfrm>
           <a:prstGeom prst="roundRect">
@@ -5678,7 +5894,7 @@
         </p:nvSpPr>
         <p:spPr>
           <a:xfrm>
-            <a:off x="7799832" y="2935224"/>
+            <a:off x="7799832" y="2816352"/>
             <a:ext cx="3145536" cy="256032"/>
           </a:xfrm>
           <a:prstGeom prst="rect">
@@ -5717,7 +5933,7 @@
         </p:nvSpPr>
         <p:spPr>
           <a:xfrm>
-            <a:off x="7818120" y="3300984"/>
+            <a:off x="7818120" y="3182112"/>
             <a:ext cx="3090672" cy="877824"/>
           </a:xfrm>
           <a:prstGeom prst="rect">
@@ -5792,12 +6008,12 @@
         </p:nvSpPr>
         <p:spPr>
           <a:xfrm>
-            <a:off x="7635240" y="4498848"/>
-            <a:ext cx="3474720" cy="1143000"/>
+            <a:off x="7635240" y="4343400"/>
+            <a:ext cx="3474720" cy="1255471"/>
           </a:xfrm>
           <a:prstGeom prst="roundRect">
             <a:avLst>
-              <a:gd name="adj" fmla="val 9600"/>
+              <a:gd name="adj" fmla="val 8740"/>
             </a:avLst>
           </a:prstGeom>
           <a:solidFill>
@@ -5819,7 +6035,7 @@
         </p:nvSpPr>
         <p:spPr>
           <a:xfrm>
-            <a:off x="7799832" y="4645152"/>
+            <a:off x="7799832" y="4489704"/>
             <a:ext cx="3145536" cy="256032"/>
           </a:xfrm>
           <a:prstGeom prst="rect">
@@ -5858,8 +6074,8 @@
         </p:nvSpPr>
         <p:spPr>
           <a:xfrm>
-            <a:off x="7799832" y="4974336"/>
-            <a:ext cx="3145536" cy="576072"/>
+            <a:off x="7799832" y="4818888"/>
+            <a:ext cx="3145536" cy="688543"/>
           </a:xfrm>
           <a:prstGeom prst="rect">
             <a:avLst/>
@@ -5885,7 +6101,7 @@
                 <a:ea typeface="Aptos" pitchFamily="34" charset="-122"/>
                 <a:cs typeface="Aptos" pitchFamily="34" charset="-120"/>
               </a:rPr>
-              <a:t>Identify what could go wrong, who could be affected, what safeguards are needed, and what evidence should be reviewed.</a:t>
+              <a:t>Identify what could go wrong, who could be affected, what safeguards are needed, and what evidence should be reviewed before use.</a:t>
             </a:r>
             <a:endParaRPr lang="en-US" sz="1320" dirty="0"/>
           </a:p>
@@ -6254,11 +6470,11 @@
         <p:spPr>
           <a:xfrm>
             <a:off x="7635240" y="1325880"/>
-            <a:ext cx="3474720" cy="1325880"/>
+            <a:ext cx="3474720" cy="1255471"/>
           </a:xfrm>
           <a:prstGeom prst="roundRect">
             <a:avLst>
-              <a:gd name="adj" fmla="val 8276"/>
+              <a:gd name="adj" fmla="val 8740"/>
             </a:avLst>
           </a:prstGeom>
           <a:solidFill>
@@ -6320,7 +6536,7 @@
         <p:spPr>
           <a:xfrm>
             <a:off x="7799832" y="1801368"/>
-            <a:ext cx="3145536" cy="758952"/>
+            <a:ext cx="3145536" cy="688543"/>
           </a:xfrm>
           <a:prstGeom prst="rect">
             <a:avLst/>
@@ -6360,12 +6576,12 @@
         </p:nvSpPr>
         <p:spPr>
           <a:xfrm>
-            <a:off x="7635240" y="2788920"/>
-            <a:ext cx="3474720" cy="1536192"/>
+            <a:off x="7635240" y="2718511"/>
+            <a:ext cx="3474720" cy="1328623"/>
           </a:xfrm>
           <a:prstGeom prst="roundRect">
             <a:avLst>
-              <a:gd name="adj" fmla="val 7143"/>
+              <a:gd name="adj" fmla="val 8259"/>
             </a:avLst>
           </a:prstGeom>
           <a:solidFill>
@@ -6387,7 +6603,7 @@
         </p:nvSpPr>
         <p:spPr>
           <a:xfrm>
-            <a:off x="7799832" y="2935224"/>
+            <a:off x="7799832" y="2864815"/>
             <a:ext cx="3145536" cy="256032"/>
           </a:xfrm>
           <a:prstGeom prst="rect">
@@ -6426,8 +6642,8 @@
         </p:nvSpPr>
         <p:spPr>
           <a:xfrm>
-            <a:off x="7818120" y="3300984"/>
-            <a:ext cx="3090672" cy="877824"/>
+            <a:off x="7818120" y="3230575"/>
+            <a:ext cx="3090672" cy="670255"/>
           </a:xfrm>
           <a:prstGeom prst="rect">
             <a:avLst/>
@@ -6501,12 +6717,12 @@
         </p:nvSpPr>
         <p:spPr>
           <a:xfrm>
-            <a:off x="7635240" y="4498848"/>
-            <a:ext cx="3474720" cy="1143000"/>
+            <a:off x="7635240" y="4184294"/>
+            <a:ext cx="3474720" cy="1466698"/>
           </a:xfrm>
           <a:prstGeom prst="roundRect">
             <a:avLst>
-              <a:gd name="adj" fmla="val 9600"/>
+              <a:gd name="adj" fmla="val 7481"/>
             </a:avLst>
           </a:prstGeom>
           <a:solidFill>
@@ -6528,7 +6744,7 @@
         </p:nvSpPr>
         <p:spPr>
           <a:xfrm>
-            <a:off x="7799832" y="4645152"/>
+            <a:off x="7799832" y="4330598"/>
             <a:ext cx="3145536" cy="256032"/>
           </a:xfrm>
           <a:prstGeom prst="rect">
@@ -6567,8 +6783,8 @@
         </p:nvSpPr>
         <p:spPr>
           <a:xfrm>
-            <a:off x="7799832" y="4974336"/>
-            <a:ext cx="3145536" cy="576072"/>
+            <a:off x="7799832" y="4659782"/>
+            <a:ext cx="3145536" cy="899770"/>
           </a:xfrm>
           <a:prstGeom prst="rect">
             <a:avLst/>
@@ -6594,7 +6810,7 @@
                 <a:ea typeface="Aptos" pitchFamily="34" charset="-122"/>
                 <a:cs typeface="Aptos" pitchFamily="34" charset="-120"/>
               </a:rPr>
-              <a:t>Use the concept to clarify workflow changes, dependencies, staffing, procurement requirements, training needs, and.</a:t>
+              <a:t>Use the concept to clarify workflow changes, dependencies, staffing, procurement requirements, training needs, and implementation checkpoints.</a:t>
             </a:r>
             <a:endParaRPr lang="en-US" sz="1320" dirty="0"/>
           </a:p>
@@ -6963,11 +7179,11 @@
         <p:spPr>
           <a:xfrm>
             <a:off x="7635240" y="1325880"/>
-            <a:ext cx="3474720" cy="1325880"/>
+            <a:ext cx="3474720" cy="1207008"/>
           </a:xfrm>
           <a:prstGeom prst="roundRect">
             <a:avLst>
-              <a:gd name="adj" fmla="val 8276"/>
+              <a:gd name="adj" fmla="val 9091"/>
             </a:avLst>
           </a:prstGeom>
           <a:solidFill>
@@ -7029,7 +7245,7 @@
         <p:spPr>
           <a:xfrm>
             <a:off x="7799832" y="1801368"/>
-            <a:ext cx="3145536" cy="758952"/>
+            <a:ext cx="3145536" cy="640080"/>
           </a:xfrm>
           <a:prstGeom prst="rect">
             <a:avLst/>
@@ -7069,12 +7285,12 @@
         </p:nvSpPr>
         <p:spPr>
           <a:xfrm>
-            <a:off x="7635240" y="2788920"/>
-            <a:ext cx="3474720" cy="1536192"/>
+            <a:off x="7635240" y="2670048"/>
+            <a:ext cx="3474720" cy="1377086"/>
           </a:xfrm>
           <a:prstGeom prst="roundRect">
             <a:avLst>
-              <a:gd name="adj" fmla="val 7143"/>
+              <a:gd name="adj" fmla="val 7968"/>
             </a:avLst>
           </a:prstGeom>
           <a:solidFill>
@@ -7096,7 +7312,7 @@
         </p:nvSpPr>
         <p:spPr>
           <a:xfrm>
-            <a:off x="7799832" y="2935224"/>
+            <a:off x="7799832" y="2816352"/>
             <a:ext cx="3145536" cy="256032"/>
           </a:xfrm>
           <a:prstGeom prst="rect">
@@ -7135,8 +7351,8 @@
         </p:nvSpPr>
         <p:spPr>
           <a:xfrm>
-            <a:off x="7818120" y="3300984"/>
-            <a:ext cx="3090672" cy="877824"/>
+            <a:off x="7818120" y="3182112"/>
+            <a:ext cx="3090672" cy="718718"/>
           </a:xfrm>
           <a:prstGeom prst="rect">
             <a:avLst/>
@@ -7210,12 +7426,12 @@
         </p:nvSpPr>
         <p:spPr>
           <a:xfrm>
-            <a:off x="7635240" y="4498848"/>
-            <a:ext cx="3474720" cy="1143000"/>
+            <a:off x="7635240" y="4184294"/>
+            <a:ext cx="3474720" cy="1466698"/>
           </a:xfrm>
           <a:prstGeom prst="roundRect">
             <a:avLst>
-              <a:gd name="adj" fmla="val 9600"/>
+              <a:gd name="adj" fmla="val 7481"/>
             </a:avLst>
           </a:prstGeom>
           <a:solidFill>
@@ -7237,7 +7453,7 @@
         </p:nvSpPr>
         <p:spPr>
           <a:xfrm>
-            <a:off x="7799832" y="4645152"/>
+            <a:off x="7799832" y="4330598"/>
             <a:ext cx="3145536" cy="256032"/>
           </a:xfrm>
           <a:prstGeom prst="rect">
@@ -7276,8 +7492,8 @@
         </p:nvSpPr>
         <p:spPr>
           <a:xfrm>
-            <a:off x="7799832" y="4974336"/>
-            <a:ext cx="3145536" cy="576072"/>
+            <a:off x="7799832" y="4659782"/>
+            <a:ext cx="3145536" cy="899770"/>
           </a:xfrm>
           <a:prstGeom prst="rect">
             <a:avLst/>
@@ -7303,7 +7519,7 @@
                 <a:ea typeface="Aptos" pitchFamily="34" charset="-122"/>
                 <a:cs typeface="Aptos" pitchFamily="34" charset="-120"/>
               </a:rPr>
-              <a:t>Use the concept to plan transparent communication, gather stakeholder input, protect trust, and make sure affected.</a:t>
+              <a:t>Use the concept to plan transparent communication, gather stakeholder input, protect trust, and make sure affected communities are considered early.</a:t>
             </a:r>
             <a:endParaRPr lang="en-US" sz="1320" dirty="0"/>
           </a:p>
@@ -7655,11 +7871,11 @@
         <p:spPr>
           <a:xfrm>
             <a:off x="7635240" y="1325880"/>
-            <a:ext cx="3474720" cy="1325880"/>
+            <a:ext cx="3474720" cy="1207008"/>
           </a:xfrm>
           <a:prstGeom prst="roundRect">
             <a:avLst>
-              <a:gd name="adj" fmla="val 8276"/>
+              <a:gd name="adj" fmla="val 9091"/>
             </a:avLst>
           </a:prstGeom>
           <a:solidFill>
@@ -7721,7 +7937,7 @@
         <p:spPr>
           <a:xfrm>
             <a:off x="7799832" y="1801368"/>
-            <a:ext cx="3145536" cy="758952"/>
+            <a:ext cx="3145536" cy="640080"/>
           </a:xfrm>
           <a:prstGeom prst="rect">
             <a:avLst/>
@@ -7761,12 +7977,12 @@
         </p:nvSpPr>
         <p:spPr>
           <a:xfrm>
-            <a:off x="7635240" y="2788920"/>
-            <a:ext cx="3474720" cy="1536192"/>
+            <a:off x="7635240" y="2670048"/>
+            <a:ext cx="3474720" cy="1377086"/>
           </a:xfrm>
           <a:prstGeom prst="roundRect">
             <a:avLst>
-              <a:gd name="adj" fmla="val 7143"/>
+              <a:gd name="adj" fmla="val 7968"/>
             </a:avLst>
           </a:prstGeom>
           <a:solidFill>
@@ -7788,7 +8004,7 @@
         </p:nvSpPr>
         <p:spPr>
           <a:xfrm>
-            <a:off x="7799832" y="2935224"/>
+            <a:off x="7799832" y="2816352"/>
             <a:ext cx="3145536" cy="256032"/>
           </a:xfrm>
           <a:prstGeom prst="rect">
@@ -7827,8 +8043,8 @@
         </p:nvSpPr>
         <p:spPr>
           <a:xfrm>
-            <a:off x="7818120" y="3300984"/>
-            <a:ext cx="3090672" cy="877824"/>
+            <a:off x="7818120" y="3182112"/>
+            <a:ext cx="3090672" cy="718718"/>
           </a:xfrm>
           <a:prstGeom prst="rect">
             <a:avLst/>
@@ -7885,12 +8101,12 @@
         </p:nvSpPr>
         <p:spPr>
           <a:xfrm>
-            <a:off x="7635240" y="4498848"/>
-            <a:ext cx="3474720" cy="1143000"/>
+            <a:off x="7635240" y="4184294"/>
+            <a:ext cx="3474720" cy="1466698"/>
           </a:xfrm>
           <a:prstGeom prst="roundRect">
             <a:avLst>
-              <a:gd name="adj" fmla="val 9600"/>
+              <a:gd name="adj" fmla="val 7481"/>
             </a:avLst>
           </a:prstGeom>
           <a:solidFill>
@@ -7912,7 +8128,7 @@
         </p:nvSpPr>
         <p:spPr>
           <a:xfrm>
-            <a:off x="7799832" y="4645152"/>
+            <a:off x="7799832" y="4330598"/>
             <a:ext cx="3145536" cy="256032"/>
           </a:xfrm>
           <a:prstGeom prst="rect">
@@ -7951,8 +8167,8 @@
         </p:nvSpPr>
         <p:spPr>
           <a:xfrm>
-            <a:off x="7799832" y="4974336"/>
-            <a:ext cx="3145536" cy="576072"/>
+            <a:off x="7799832" y="4659782"/>
+            <a:ext cx="3145536" cy="899770"/>
           </a:xfrm>
           <a:prstGeom prst="rect">
             <a:avLst/>
@@ -7978,7 +8194,7 @@
                 <a:ea typeface="Aptos" pitchFamily="34" charset="-122"/>
                 <a:cs typeface="Aptos" pitchFamily="34" charset="-120"/>
               </a:rPr>
-              <a:t>Use the concept to plan transparent communication, gather stakeholder input, protect trust, and make sure affected.</a:t>
+              <a:t>Use the concept to plan transparent communication, gather stakeholder input, protect trust, and make sure affected communities are considered early.</a:t>
             </a:r>
             <a:endParaRPr lang="en-US" sz="1320" dirty="0"/>
           </a:p>
@@ -8330,11 +8546,11 @@
         <p:spPr>
           <a:xfrm>
             <a:off x="7635240" y="1325880"/>
-            <a:ext cx="3474720" cy="1325880"/>
+            <a:ext cx="3474720" cy="1207008"/>
           </a:xfrm>
           <a:prstGeom prst="roundRect">
             <a:avLst>
-              <a:gd name="adj" fmla="val 8276"/>
+              <a:gd name="adj" fmla="val 9091"/>
             </a:avLst>
           </a:prstGeom>
           <a:solidFill>
@@ -8396,7 +8612,7 @@
         <p:spPr>
           <a:xfrm>
             <a:off x="7799832" y="1801368"/>
-            <a:ext cx="3145536" cy="758952"/>
+            <a:ext cx="3145536" cy="640080"/>
           </a:xfrm>
           <a:prstGeom prst="rect">
             <a:avLst/>
@@ -8436,12 +8652,12 @@
         </p:nvSpPr>
         <p:spPr>
           <a:xfrm>
-            <a:off x="7635240" y="2788920"/>
-            <a:ext cx="3474720" cy="1536192"/>
+            <a:off x="7635240" y="2670048"/>
+            <a:ext cx="3474720" cy="1377086"/>
           </a:xfrm>
           <a:prstGeom prst="roundRect">
             <a:avLst>
-              <a:gd name="adj" fmla="val 7143"/>
+              <a:gd name="adj" fmla="val 7968"/>
             </a:avLst>
           </a:prstGeom>
           <a:solidFill>
@@ -8463,7 +8679,7 @@
         </p:nvSpPr>
         <p:spPr>
           <a:xfrm>
-            <a:off x="7799832" y="2935224"/>
+            <a:off x="7799832" y="2816352"/>
             <a:ext cx="3145536" cy="256032"/>
           </a:xfrm>
           <a:prstGeom prst="rect">
@@ -8502,8 +8718,8 @@
         </p:nvSpPr>
         <p:spPr>
           <a:xfrm>
-            <a:off x="7818120" y="3300984"/>
-            <a:ext cx="3090672" cy="877824"/>
+            <a:off x="7818120" y="3182112"/>
+            <a:ext cx="3090672" cy="718718"/>
           </a:xfrm>
           <a:prstGeom prst="rect">
             <a:avLst/>
@@ -8560,12 +8776,12 @@
         </p:nvSpPr>
         <p:spPr>
           <a:xfrm>
-            <a:off x="7635240" y="4498848"/>
-            <a:ext cx="3474720" cy="1143000"/>
+            <a:off x="7635240" y="4184294"/>
+            <a:ext cx="3474720" cy="1466698"/>
           </a:xfrm>
           <a:prstGeom prst="roundRect">
             <a:avLst>
-              <a:gd name="adj" fmla="val 9600"/>
+              <a:gd name="adj" fmla="val 7481"/>
             </a:avLst>
           </a:prstGeom>
           <a:solidFill>
@@ -8587,7 +8803,7 @@
         </p:nvSpPr>
         <p:spPr>
           <a:xfrm>
-            <a:off x="7799832" y="4645152"/>
+            <a:off x="7799832" y="4330598"/>
             <a:ext cx="3145536" cy="256032"/>
           </a:xfrm>
           <a:prstGeom prst="rect">
@@ -8626,8 +8842,8 @@
         </p:nvSpPr>
         <p:spPr>
           <a:xfrm>
-            <a:off x="7799832" y="4974336"/>
-            <a:ext cx="3145536" cy="576072"/>
+            <a:off x="7799832" y="4659782"/>
+            <a:ext cx="3145536" cy="899770"/>
           </a:xfrm>
           <a:prstGeom prst="rect">
             <a:avLst/>
@@ -8653,7 +8869,7 @@
                 <a:ea typeface="Aptos" pitchFamily="34" charset="-122"/>
                 <a:cs typeface="Aptos" pitchFamily="34" charset="-120"/>
               </a:rPr>
-              <a:t>Use the assignment to test whether you can explain the concept, apply it to a realistic public health situation, and.</a:t>
+              <a:t>Use the assignment to test whether you can explain the concept, apply it to a realistic public health situation, and identify what would need review before the work moves forward.</a:t>
             </a:r>
             <a:endParaRPr lang="en-US" sz="1320" dirty="0"/>
           </a:p>
@@ -9022,11 +9238,11 @@
         <p:spPr>
           <a:xfrm>
             <a:off x="7635240" y="1325880"/>
-            <a:ext cx="3474720" cy="1325880"/>
+            <a:ext cx="3474720" cy="1207008"/>
           </a:xfrm>
           <a:prstGeom prst="roundRect">
             <a:avLst>
-              <a:gd name="adj" fmla="val 8276"/>
+              <a:gd name="adj" fmla="val 9091"/>
             </a:avLst>
           </a:prstGeom>
           <a:solidFill>
@@ -9088,7 +9304,7 @@
         <p:spPr>
           <a:xfrm>
             <a:off x="7799832" y="1801368"/>
-            <a:ext cx="3145536" cy="758952"/>
+            <a:ext cx="3145536" cy="640080"/>
           </a:xfrm>
           <a:prstGeom prst="rect">
             <a:avLst/>
@@ -9128,12 +9344,12 @@
         </p:nvSpPr>
         <p:spPr>
           <a:xfrm>
-            <a:off x="7635240" y="2788920"/>
-            <a:ext cx="3474720" cy="1536192"/>
+            <a:off x="7635240" y="2670048"/>
+            <a:ext cx="3474720" cy="1377086"/>
           </a:xfrm>
           <a:prstGeom prst="roundRect">
             <a:avLst>
-              <a:gd name="adj" fmla="val 7143"/>
+              <a:gd name="adj" fmla="val 7968"/>
             </a:avLst>
           </a:prstGeom>
           <a:solidFill>
@@ -9155,7 +9371,7 @@
         </p:nvSpPr>
         <p:spPr>
           <a:xfrm>
-            <a:off x="7799832" y="2935224"/>
+            <a:off x="7799832" y="2816352"/>
             <a:ext cx="3145536" cy="256032"/>
           </a:xfrm>
           <a:prstGeom prst="rect">
@@ -9194,8 +9410,8 @@
         </p:nvSpPr>
         <p:spPr>
           <a:xfrm>
-            <a:off x="7818120" y="3300984"/>
-            <a:ext cx="3090672" cy="877824"/>
+            <a:off x="7818120" y="3182112"/>
+            <a:ext cx="3090672" cy="718718"/>
           </a:xfrm>
           <a:prstGeom prst="rect">
             <a:avLst/>
@@ -9269,12 +9485,12 @@
         </p:nvSpPr>
         <p:spPr>
           <a:xfrm>
-            <a:off x="7635240" y="4498848"/>
-            <a:ext cx="3474720" cy="1143000"/>
+            <a:off x="7635240" y="4184294"/>
+            <a:ext cx="3474720" cy="1466698"/>
           </a:xfrm>
           <a:prstGeom prst="roundRect">
             <a:avLst>
-              <a:gd name="adj" fmla="val 9600"/>
+              <a:gd name="adj" fmla="val 7481"/>
             </a:avLst>
           </a:prstGeom>
           <a:solidFill>
@@ -9296,7 +9512,7 @@
         </p:nvSpPr>
         <p:spPr>
           <a:xfrm>
-            <a:off x="7799832" y="4645152"/>
+            <a:off x="7799832" y="4330598"/>
             <a:ext cx="3145536" cy="256032"/>
           </a:xfrm>
           <a:prstGeom prst="rect">
@@ -9335,8 +9551,8 @@
         </p:nvSpPr>
         <p:spPr>
           <a:xfrm>
-            <a:off x="7799832" y="4974336"/>
-            <a:ext cx="3145536" cy="576072"/>
+            <a:off x="7799832" y="4659782"/>
+            <a:ext cx="3145536" cy="899770"/>
           </a:xfrm>
           <a:prstGeom prst="rect">
             <a:avLst/>
@@ -9362,7 +9578,7 @@
                 <a:ea typeface="Aptos" pitchFamily="34" charset="-122"/>
                 <a:cs typeface="Aptos" pitchFamily="34" charset="-120"/>
               </a:rPr>
-              <a:t>Use the concept to plan transparent communication, gather stakeholder input, protect trust, and make sure affected.</a:t>
+              <a:t>Use the concept to plan transparent communication, gather stakeholder input, protect trust, and make sure affected communities are considered early.</a:t>
             </a:r>
             <a:endParaRPr lang="en-US" sz="1320" dirty="0"/>
           </a:p>
@@ -9697,11 +9913,11 @@
         <p:spPr>
           <a:xfrm>
             <a:off x="7635240" y="1325880"/>
-            <a:ext cx="3474720" cy="1325880"/>
+            <a:ext cx="3474720" cy="1207008"/>
           </a:xfrm>
           <a:prstGeom prst="roundRect">
             <a:avLst>
-              <a:gd name="adj" fmla="val 8276"/>
+              <a:gd name="adj" fmla="val 9091"/>
             </a:avLst>
           </a:prstGeom>
           <a:solidFill>
@@ -9763,7 +9979,7 @@
         <p:spPr>
           <a:xfrm>
             <a:off x="7799832" y="1801368"/>
-            <a:ext cx="3145536" cy="758952"/>
+            <a:ext cx="3145536" cy="640080"/>
           </a:xfrm>
           <a:prstGeom prst="rect">
             <a:avLst/>
@@ -9803,12 +10019,12 @@
         </p:nvSpPr>
         <p:spPr>
           <a:xfrm>
-            <a:off x="7635240" y="2788920"/>
-            <a:ext cx="3474720" cy="1536192"/>
+            <a:off x="7635240" y="2670048"/>
+            <a:ext cx="3474720" cy="1377086"/>
           </a:xfrm>
           <a:prstGeom prst="roundRect">
             <a:avLst>
-              <a:gd name="adj" fmla="val 7143"/>
+              <a:gd name="adj" fmla="val 7968"/>
             </a:avLst>
           </a:prstGeom>
           <a:solidFill>
@@ -9830,7 +10046,7 @@
         </p:nvSpPr>
         <p:spPr>
           <a:xfrm>
-            <a:off x="7799832" y="2935224"/>
+            <a:off x="7799832" y="2816352"/>
             <a:ext cx="3145536" cy="256032"/>
           </a:xfrm>
           <a:prstGeom prst="rect">
@@ -9869,8 +10085,8 @@
         </p:nvSpPr>
         <p:spPr>
           <a:xfrm>
-            <a:off x="7818120" y="3300984"/>
-            <a:ext cx="3090672" cy="877824"/>
+            <a:off x="7818120" y="3182112"/>
+            <a:ext cx="3090672" cy="718718"/>
           </a:xfrm>
           <a:prstGeom prst="rect">
             <a:avLst/>
@@ -9910,12 +10126,12 @@
         </p:nvSpPr>
         <p:spPr>
           <a:xfrm>
-            <a:off x="7635240" y="4498848"/>
-            <a:ext cx="3474720" cy="1143000"/>
+            <a:off x="7635240" y="4184294"/>
+            <a:ext cx="3474720" cy="1466698"/>
           </a:xfrm>
           <a:prstGeom prst="roundRect">
             <a:avLst>
-              <a:gd name="adj" fmla="val 9600"/>
+              <a:gd name="adj" fmla="val 7481"/>
             </a:avLst>
           </a:prstGeom>
           <a:solidFill>
@@ -9937,7 +10153,7 @@
         </p:nvSpPr>
         <p:spPr>
           <a:xfrm>
-            <a:off x="7799832" y="4645152"/>
+            <a:off x="7799832" y="4330598"/>
             <a:ext cx="3145536" cy="256032"/>
           </a:xfrm>
           <a:prstGeom prst="rect">
@@ -9976,8 +10192,8 @@
         </p:nvSpPr>
         <p:spPr>
           <a:xfrm>
-            <a:off x="7799832" y="4974336"/>
-            <a:ext cx="3145536" cy="576072"/>
+            <a:off x="7799832" y="4659782"/>
+            <a:ext cx="3145536" cy="899770"/>
           </a:xfrm>
           <a:prstGeom prst="rect">
             <a:avLst/>
@@ -10003,7 +10219,7 @@
                 <a:ea typeface="Aptos" pitchFamily="34" charset="-122"/>
                 <a:cs typeface="Aptos" pitchFamily="34" charset="-120"/>
               </a:rPr>
-              <a:t>Use the concept to plan transparent communication, gather stakeholder input, protect trust, and make sure affected.</a:t>
+              <a:t>Use the concept to plan transparent communication, gather stakeholder input, protect trust, and make sure affected communities are considered early.</a:t>
             </a:r>
             <a:endParaRPr lang="en-US" sz="1320" dirty="0"/>
           </a:p>
@@ -10974,11 +11190,11 @@
         <p:spPr>
           <a:xfrm>
             <a:off x="7635240" y="1325880"/>
-            <a:ext cx="3474720" cy="1325880"/>
+            <a:ext cx="3474720" cy="1207008"/>
           </a:xfrm>
           <a:prstGeom prst="roundRect">
             <a:avLst>
-              <a:gd name="adj" fmla="val 8276"/>
+              <a:gd name="adj" fmla="val 9091"/>
             </a:avLst>
           </a:prstGeom>
           <a:solidFill>
@@ -11040,7 +11256,7 @@
         <p:spPr>
           <a:xfrm>
             <a:off x="7799832" y="1801368"/>
-            <a:ext cx="3145536" cy="758952"/>
+            <a:ext cx="3145536" cy="640080"/>
           </a:xfrm>
           <a:prstGeom prst="rect">
             <a:avLst/>
@@ -11080,12 +11296,12 @@
         </p:nvSpPr>
         <p:spPr>
           <a:xfrm>
-            <a:off x="7635240" y="2788920"/>
-            <a:ext cx="3474720" cy="1536192"/>
+            <a:off x="7635240" y="2670048"/>
+            <a:ext cx="3474720" cy="1377086"/>
           </a:xfrm>
           <a:prstGeom prst="roundRect">
             <a:avLst>
-              <a:gd name="adj" fmla="val 7143"/>
+              <a:gd name="adj" fmla="val 7968"/>
             </a:avLst>
           </a:prstGeom>
           <a:solidFill>
@@ -11107,7 +11323,7 @@
         </p:nvSpPr>
         <p:spPr>
           <a:xfrm>
-            <a:off x="7799832" y="2935224"/>
+            <a:off x="7799832" y="2816352"/>
             <a:ext cx="3145536" cy="256032"/>
           </a:xfrm>
           <a:prstGeom prst="rect">
@@ -11146,8 +11362,8 @@
         </p:nvSpPr>
         <p:spPr>
           <a:xfrm>
-            <a:off x="7818120" y="3300984"/>
-            <a:ext cx="3090672" cy="877824"/>
+            <a:off x="7818120" y="3182112"/>
+            <a:ext cx="3090672" cy="718718"/>
           </a:xfrm>
           <a:prstGeom prst="rect">
             <a:avLst/>
@@ -11221,12 +11437,12 @@
         </p:nvSpPr>
         <p:spPr>
           <a:xfrm>
-            <a:off x="7635240" y="4498848"/>
-            <a:ext cx="3474720" cy="1143000"/>
+            <a:off x="7635240" y="4184294"/>
+            <a:ext cx="3474720" cy="1466698"/>
           </a:xfrm>
           <a:prstGeom prst="roundRect">
             <a:avLst>
-              <a:gd name="adj" fmla="val 9600"/>
+              <a:gd name="adj" fmla="val 7481"/>
             </a:avLst>
           </a:prstGeom>
           <a:solidFill>
@@ -11248,7 +11464,7 @@
         </p:nvSpPr>
         <p:spPr>
           <a:xfrm>
-            <a:off x="7799832" y="4645152"/>
+            <a:off x="7799832" y="4330598"/>
             <a:ext cx="3145536" cy="256032"/>
           </a:xfrm>
           <a:prstGeom prst="rect">
@@ -11287,8 +11503,8 @@
         </p:nvSpPr>
         <p:spPr>
           <a:xfrm>
-            <a:off x="7799832" y="4974336"/>
-            <a:ext cx="3145536" cy="576072"/>
+            <a:off x="7799832" y="4659782"/>
+            <a:ext cx="3145536" cy="899770"/>
           </a:xfrm>
           <a:prstGeom prst="rect">
             <a:avLst/>
@@ -11314,7 +11530,7 @@
                 <a:ea typeface="Aptos" pitchFamily="34" charset="-122"/>
                 <a:cs typeface="Aptos" pitchFamily="34" charset="-120"/>
               </a:rPr>
-              <a:t>Use the assignment to test whether you can explain the concept, apply it to a realistic public health situation, and.</a:t>
+              <a:t>Use the assignment to test whether you can explain the concept, apply it to a realistic public health situation, and identify what would need review before the work moves forward.</a:t>
             </a:r>
             <a:endParaRPr lang="en-US" sz="1320" dirty="0"/>
           </a:p>
@@ -11683,11 +11899,11 @@
         <p:spPr>
           <a:xfrm>
             <a:off x="7635240" y="1325880"/>
-            <a:ext cx="3474720" cy="1325880"/>
+            <a:ext cx="3474720" cy="1207008"/>
           </a:xfrm>
           <a:prstGeom prst="roundRect">
             <a:avLst>
-              <a:gd name="adj" fmla="val 8276"/>
+              <a:gd name="adj" fmla="val 9091"/>
             </a:avLst>
           </a:prstGeom>
           <a:solidFill>
@@ -11749,7 +11965,7 @@
         <p:spPr>
           <a:xfrm>
             <a:off x="7799832" y="1801368"/>
-            <a:ext cx="3145536" cy="758952"/>
+            <a:ext cx="3145536" cy="640080"/>
           </a:xfrm>
           <a:prstGeom prst="rect">
             <a:avLst/>
@@ -11789,12 +12005,12 @@
         </p:nvSpPr>
         <p:spPr>
           <a:xfrm>
-            <a:off x="7635240" y="2788920"/>
-            <a:ext cx="3474720" cy="1536192"/>
+            <a:off x="7635240" y="2670048"/>
+            <a:ext cx="3474720" cy="1377086"/>
           </a:xfrm>
           <a:prstGeom prst="roundRect">
             <a:avLst>
-              <a:gd name="adj" fmla="val 7143"/>
+              <a:gd name="adj" fmla="val 7968"/>
             </a:avLst>
           </a:prstGeom>
           <a:solidFill>
@@ -11816,7 +12032,7 @@
         </p:nvSpPr>
         <p:spPr>
           <a:xfrm>
-            <a:off x="7799832" y="2935224"/>
+            <a:off x="7799832" y="2816352"/>
             <a:ext cx="3145536" cy="256032"/>
           </a:xfrm>
           <a:prstGeom prst="rect">
@@ -11855,8 +12071,8 @@
         </p:nvSpPr>
         <p:spPr>
           <a:xfrm>
-            <a:off x="7818120" y="3300984"/>
-            <a:ext cx="3090672" cy="877824"/>
+            <a:off x="7818120" y="3182112"/>
+            <a:ext cx="3090672" cy="718718"/>
           </a:xfrm>
           <a:prstGeom prst="rect">
             <a:avLst/>
@@ -11930,12 +12146,12 @@
         </p:nvSpPr>
         <p:spPr>
           <a:xfrm>
-            <a:off x="7635240" y="4498848"/>
-            <a:ext cx="3474720" cy="1143000"/>
+            <a:off x="7635240" y="4184294"/>
+            <a:ext cx="3474720" cy="1466698"/>
           </a:xfrm>
           <a:prstGeom prst="roundRect">
             <a:avLst>
-              <a:gd name="adj" fmla="val 9600"/>
+              <a:gd name="adj" fmla="val 7481"/>
             </a:avLst>
           </a:prstGeom>
           <a:solidFill>
@@ -11957,7 +12173,7 @@
         </p:nvSpPr>
         <p:spPr>
           <a:xfrm>
-            <a:off x="7799832" y="4645152"/>
+            <a:off x="7799832" y="4330598"/>
             <a:ext cx="3145536" cy="256032"/>
           </a:xfrm>
           <a:prstGeom prst="rect">
@@ -11996,8 +12212,8 @@
         </p:nvSpPr>
         <p:spPr>
           <a:xfrm>
-            <a:off x="7799832" y="4974336"/>
-            <a:ext cx="3145536" cy="576072"/>
+            <a:off x="7799832" y="4659782"/>
+            <a:ext cx="3145536" cy="899770"/>
           </a:xfrm>
           <a:prstGeom prst="rect">
             <a:avLst/>
@@ -12023,7 +12239,7 @@
                 <a:ea typeface="Aptos" pitchFamily="34" charset="-122"/>
                 <a:cs typeface="Aptos" pitchFamily="34" charset="-120"/>
               </a:rPr>
-              <a:t>Use the assignment to test whether you can explain the concept, apply it to a realistic public health situation, and.</a:t>
+              <a:t>Use the assignment to test whether you can explain the concept, apply it to a realistic public health situation, and identify what would need review before the work moves forward.</a:t>
             </a:r>
             <a:endParaRPr lang="en-US" sz="1320" dirty="0"/>
           </a:p>
@@ -12392,11 +12608,11 @@
         <p:spPr>
           <a:xfrm>
             <a:off x="7635240" y="1325880"/>
-            <a:ext cx="3474720" cy="1325880"/>
+            <a:ext cx="3474720" cy="1207008"/>
           </a:xfrm>
           <a:prstGeom prst="roundRect">
             <a:avLst>
-              <a:gd name="adj" fmla="val 8276"/>
+              <a:gd name="adj" fmla="val 9091"/>
             </a:avLst>
           </a:prstGeom>
           <a:solidFill>
@@ -12458,7 +12674,7 @@
         <p:spPr>
           <a:xfrm>
             <a:off x="7799832" y="1801368"/>
-            <a:ext cx="3145536" cy="758952"/>
+            <a:ext cx="3145536" cy="640080"/>
           </a:xfrm>
           <a:prstGeom prst="rect">
             <a:avLst/>
@@ -12498,12 +12714,12 @@
         </p:nvSpPr>
         <p:spPr>
           <a:xfrm>
-            <a:off x="7635240" y="2788920"/>
-            <a:ext cx="3474720" cy="1536192"/>
+            <a:off x="7635240" y="2670048"/>
+            <a:ext cx="3474720" cy="1377086"/>
           </a:xfrm>
           <a:prstGeom prst="roundRect">
             <a:avLst>
-              <a:gd name="adj" fmla="val 7143"/>
+              <a:gd name="adj" fmla="val 7968"/>
             </a:avLst>
           </a:prstGeom>
           <a:solidFill>
@@ -12525,7 +12741,7 @@
         </p:nvSpPr>
         <p:spPr>
           <a:xfrm>
-            <a:off x="7799832" y="2935224"/>
+            <a:off x="7799832" y="2816352"/>
             <a:ext cx="3145536" cy="256032"/>
           </a:xfrm>
           <a:prstGeom prst="rect">
@@ -12564,8 +12780,8 @@
         </p:nvSpPr>
         <p:spPr>
           <a:xfrm>
-            <a:off x="7818120" y="3300984"/>
-            <a:ext cx="3090672" cy="877824"/>
+            <a:off x="7818120" y="3182112"/>
+            <a:ext cx="3090672" cy="718718"/>
           </a:xfrm>
           <a:prstGeom prst="rect">
             <a:avLst/>
@@ -12639,12 +12855,12 @@
         </p:nvSpPr>
         <p:spPr>
           <a:xfrm>
-            <a:off x="7635240" y="4498848"/>
-            <a:ext cx="3474720" cy="1143000"/>
+            <a:off x="7635240" y="4184294"/>
+            <a:ext cx="3474720" cy="1466698"/>
           </a:xfrm>
           <a:prstGeom prst="roundRect">
             <a:avLst>
-              <a:gd name="adj" fmla="val 9600"/>
+              <a:gd name="adj" fmla="val 7481"/>
             </a:avLst>
           </a:prstGeom>
           <a:solidFill>
@@ -12666,7 +12882,7 @@
         </p:nvSpPr>
         <p:spPr>
           <a:xfrm>
-            <a:off x="7799832" y="4645152"/>
+            <a:off x="7799832" y="4330598"/>
             <a:ext cx="3145536" cy="256032"/>
           </a:xfrm>
           <a:prstGeom prst="rect">
@@ -12705,8 +12921,8 @@
         </p:nvSpPr>
         <p:spPr>
           <a:xfrm>
-            <a:off x="7799832" y="4974336"/>
-            <a:ext cx="3145536" cy="576072"/>
+            <a:off x="7799832" y="4659782"/>
+            <a:ext cx="3145536" cy="899770"/>
           </a:xfrm>
           <a:prstGeom prst="rect">
             <a:avLst/>
@@ -12732,7 +12948,7 @@
                 <a:ea typeface="Aptos" pitchFamily="34" charset="-122"/>
                 <a:cs typeface="Aptos" pitchFamily="34" charset="-120"/>
               </a:rPr>
-              <a:t>Use the concept to plan transparent communication, gather stakeholder input, protect trust, and make sure affected.</a:t>
+              <a:t>Use the concept to plan transparent communication, gather stakeholder input, protect trust, and make sure affected communities are considered early.</a:t>
             </a:r>
             <a:endParaRPr lang="en-US" sz="1320" dirty="0"/>
           </a:p>
@@ -13210,7 +13426,7 @@
                 <a:ea typeface="Aptos" pitchFamily="34" charset="-122"/>
                 <a:cs typeface="Aptos" pitchFamily="34" charset="-120"/>
               </a:rPr>
-              <a:t>Use the related plays to identify decisions, participants, timing, approvals, and documentation needed for responsible.</a:t>
+              <a:t>Use the related plays to identify decisions, participants, timing, approvals, and documentation needed for responsible implementation.</a:t>
             </a:r>
             <a:endParaRPr lang="en-US" sz="1320" dirty="0"/>
           </a:p>
@@ -13829,7 +14045,7 @@
                 <a:ea typeface="Aptos" pitchFamily="34" charset="-122"/>
                 <a:cs typeface="Aptos" pitchFamily="34" charset="-120"/>
               </a:rPr>
-              <a:t>Use linked tools when your department needs a structured worksheet, template, checklist, review process, or.</a:t>
+              <a:t>Use linked tools when your department needs a structured worksheet, template, checklist, review process, or documentation artifact.</a:t>
             </a:r>
             <a:endParaRPr lang="en-US" sz="1320" dirty="0"/>
           </a:p>
@@ -14339,11 +14555,11 @@
         <p:spPr>
           <a:xfrm>
             <a:off x="7635240" y="1325880"/>
-            <a:ext cx="3474720" cy="1325880"/>
+            <a:ext cx="3474720" cy="1207008"/>
           </a:xfrm>
           <a:prstGeom prst="roundRect">
             <a:avLst>
-              <a:gd name="adj" fmla="val 8276"/>
+              <a:gd name="adj" fmla="val 9091"/>
             </a:avLst>
           </a:prstGeom>
           <a:solidFill>
@@ -14405,7 +14621,7 @@
         <p:spPr>
           <a:xfrm>
             <a:off x="7799832" y="1801368"/>
-            <a:ext cx="3145536" cy="758952"/>
+            <a:ext cx="3145536" cy="640080"/>
           </a:xfrm>
           <a:prstGeom prst="rect">
             <a:avLst/>
@@ -14445,12 +14661,12 @@
         </p:nvSpPr>
         <p:spPr>
           <a:xfrm>
-            <a:off x="7635240" y="2788920"/>
-            <a:ext cx="3474720" cy="1536192"/>
+            <a:off x="7635240" y="2670048"/>
+            <a:ext cx="3474720" cy="1377086"/>
           </a:xfrm>
           <a:prstGeom prst="roundRect">
             <a:avLst>
-              <a:gd name="adj" fmla="val 7143"/>
+              <a:gd name="adj" fmla="val 7968"/>
             </a:avLst>
           </a:prstGeom>
           <a:solidFill>
@@ -14472,7 +14688,7 @@
         </p:nvSpPr>
         <p:spPr>
           <a:xfrm>
-            <a:off x="7799832" y="2935224"/>
+            <a:off x="7799832" y="2816352"/>
             <a:ext cx="3145536" cy="256032"/>
           </a:xfrm>
           <a:prstGeom prst="rect">
@@ -14511,8 +14727,8 @@
         </p:nvSpPr>
         <p:spPr>
           <a:xfrm>
-            <a:off x="7818120" y="3300984"/>
-            <a:ext cx="3090672" cy="877824"/>
+            <a:off x="7818120" y="3182112"/>
+            <a:ext cx="3090672" cy="718718"/>
           </a:xfrm>
           <a:prstGeom prst="rect">
             <a:avLst/>
@@ -14569,12 +14785,12 @@
         </p:nvSpPr>
         <p:spPr>
           <a:xfrm>
-            <a:off x="7635240" y="4498848"/>
-            <a:ext cx="3474720" cy="1143000"/>
+            <a:off x="7635240" y="4184294"/>
+            <a:ext cx="3474720" cy="1466698"/>
           </a:xfrm>
           <a:prstGeom prst="roundRect">
             <a:avLst>
-              <a:gd name="adj" fmla="val 9600"/>
+              <a:gd name="adj" fmla="val 7481"/>
             </a:avLst>
           </a:prstGeom>
           <a:solidFill>
@@ -14596,7 +14812,7 @@
         </p:nvSpPr>
         <p:spPr>
           <a:xfrm>
-            <a:off x="7799832" y="4645152"/>
+            <a:off x="7799832" y="4330598"/>
             <a:ext cx="3145536" cy="256032"/>
           </a:xfrm>
           <a:prstGeom prst="rect">
@@ -14635,8 +14851,8 @@
         </p:nvSpPr>
         <p:spPr>
           <a:xfrm>
-            <a:off x="7799832" y="4974336"/>
-            <a:ext cx="3145536" cy="576072"/>
+            <a:off x="7799832" y="4659782"/>
+            <a:ext cx="3145536" cy="899770"/>
           </a:xfrm>
           <a:prstGeom prst="rect">
             <a:avLst/>
@@ -14662,7 +14878,7 @@
                 <a:ea typeface="Aptos" pitchFamily="34" charset="-122"/>
                 <a:cs typeface="Aptos" pitchFamily="34" charset="-120"/>
               </a:rPr>
-              <a:t>Use the assignment to test whether you can explain the concept, apply it to a realistic public health situation, and.</a:t>
+              <a:t>Use the assignment to test whether you can explain the concept, apply it to a realistic public health situation, and identify what would need review before the work moves forward.</a:t>
             </a:r>
             <a:endParaRPr lang="en-US" sz="1320" dirty="0"/>
           </a:p>
@@ -15031,11 +15247,11 @@
         <p:spPr>
           <a:xfrm>
             <a:off x="7635240" y="1325880"/>
-            <a:ext cx="3474720" cy="1325880"/>
+            <a:ext cx="3474720" cy="1207008"/>
           </a:xfrm>
           <a:prstGeom prst="roundRect">
             <a:avLst>
-              <a:gd name="adj" fmla="val 8276"/>
+              <a:gd name="adj" fmla="val 9091"/>
             </a:avLst>
           </a:prstGeom>
           <a:solidFill>
@@ -15097,7 +15313,7 @@
         <p:spPr>
           <a:xfrm>
             <a:off x="7799832" y="1801368"/>
-            <a:ext cx="3145536" cy="758952"/>
+            <a:ext cx="3145536" cy="640080"/>
           </a:xfrm>
           <a:prstGeom prst="rect">
             <a:avLst/>
@@ -15137,12 +15353,12 @@
         </p:nvSpPr>
         <p:spPr>
           <a:xfrm>
-            <a:off x="7635240" y="2788920"/>
-            <a:ext cx="3474720" cy="1536192"/>
+            <a:off x="7635240" y="2670048"/>
+            <a:ext cx="3474720" cy="1377086"/>
           </a:xfrm>
           <a:prstGeom prst="roundRect">
             <a:avLst>
-              <a:gd name="adj" fmla="val 7143"/>
+              <a:gd name="adj" fmla="val 7968"/>
             </a:avLst>
           </a:prstGeom>
           <a:solidFill>
@@ -15164,8 +15380,8 @@
         </p:nvSpPr>
         <p:spPr>
           <a:xfrm>
-            <a:off x="7799832" y="2935224"/>
-            <a:ext cx="3145536" cy="256032"/>
+            <a:off x="7799832" y="2798064"/>
+            <a:ext cx="3145536" cy="237744"/>
           </a:xfrm>
           <a:prstGeom prst="rect">
             <a:avLst/>
@@ -15181,7 +15397,7 @@
               <a:buNone/>
             </a:pPr>
             <a:r>
-              <a:rPr lang="en-US" sz="1300" b="1" dirty="0">
+              <a:rPr lang="en-US" sz="1250" b="1" dirty="0">
                 <a:solidFill>
                   <a:srgbClr val="0068B7"/>
                 </a:solidFill>
@@ -15189,101 +15405,317 @@
                 <a:ea typeface="Aptos" pitchFamily="34" charset="-122"/>
                 <a:cs typeface="Aptos" pitchFamily="34" charset="-120"/>
               </a:rPr>
-              <a:t>Concept checkpoints</a:t>
-            </a:r>
-            <a:endParaRPr lang="en-US" sz="1300" dirty="0"/>
-          </a:p>
-        </p:txBody>
-      </p:sp>
-      <p:sp>
-        <p:nvSpPr>
-          <p:cNvPr id="15" name="Text 13"/>
-          <p:cNvSpPr/>
-          <p:nvPr/>
-        </p:nvSpPr>
-        <p:spPr>
-          <a:xfrm>
-            <a:off x="7818120" y="3300984"/>
-            <a:ext cx="3090672" cy="877824"/>
-          </a:xfrm>
-          <a:prstGeom prst="rect">
-            <a:avLst/>
-          </a:prstGeom>
-          <a:noFill/>
-          <a:ln/>
-        </p:spPr>
-        <p:txBody>
-          <a:bodyPr wrap="square" lIns="508" tIns="508" rIns="508" bIns="508" rtlCol="0" anchor="t">
+              <a:t>Trust cycle</a:t>
+            </a:r>
+            <a:endParaRPr lang="en-US" sz="1250" dirty="0"/>
+          </a:p>
+        </p:txBody>
+      </p:sp>
+      <p:sp>
+        <p:nvSpPr>
+          <p:cNvPr id="15" name="Shape 13"/>
+          <p:cNvSpPr/>
+          <p:nvPr/>
+        </p:nvSpPr>
+        <p:spPr>
+          <a:xfrm>
+            <a:off x="8763000" y="3351276"/>
+            <a:ext cx="164592" cy="0"/>
+          </a:xfrm>
+          <a:prstGeom prst="line">
+            <a:avLst/>
+          </a:prstGeom>
+          <a:noFill/>
+          <a:ln w="15240">
+            <a:solidFill>
+              <a:srgbClr val="8ABBD8"/>
+            </a:solidFill>
+            <a:prstDash val="solid"/>
+          </a:ln>
+        </p:spPr>
+      </p:sp>
+      <p:sp>
+        <p:nvSpPr>
+          <p:cNvPr id="16" name="Shape 14"/>
+          <p:cNvSpPr/>
+          <p:nvPr/>
+        </p:nvSpPr>
+        <p:spPr>
+          <a:xfrm>
+            <a:off x="7872984" y="3200400"/>
+            <a:ext cx="890016" cy="301752"/>
+          </a:xfrm>
+          <a:prstGeom prst="roundRect">
+            <a:avLst>
+              <a:gd name="adj" fmla="val 24242"/>
+            </a:avLst>
+          </a:prstGeom>
+          <a:solidFill>
+            <a:srgbClr val="0068B7"/>
+          </a:solidFill>
+          <a:ln w="12700">
+            <a:solidFill>
+              <a:srgbClr val="0068B7"/>
+            </a:solidFill>
+            <a:prstDash val="solid"/>
+          </a:ln>
+        </p:spPr>
+      </p:sp>
+      <p:sp>
+        <p:nvSpPr>
+          <p:cNvPr id="17" name="Text 15"/>
+          <p:cNvSpPr/>
+          <p:nvPr/>
+        </p:nvSpPr>
+        <p:spPr>
+          <a:xfrm>
+            <a:off x="7909560" y="3273552"/>
+            <a:ext cx="816864" cy="146304"/>
+          </a:xfrm>
+          <a:prstGeom prst="rect">
+            <a:avLst/>
+          </a:prstGeom>
+          <a:noFill/>
+          <a:ln/>
+        </p:spPr>
+        <p:txBody>
+          <a:bodyPr wrap="square" lIns="0" tIns="0" rIns="0" bIns="0" rtlCol="0" anchor="ctr">
             <a:normAutofit/>
           </a:bodyPr>
           <a:lstStyle/>
           <a:p>
-            <a:pPr indent="0" marL="0">
-              <a:buNone/>
-            </a:pPr>
-            <a:r>
-              <a:rPr lang="en-US" sz="1220" dirty="0">
-                <a:solidFill>
-                  <a:srgbClr val="17364A"/>
-                </a:solidFill>
-                <a:latin typeface="Aptos" pitchFamily="34" charset="0"/>
-                <a:ea typeface="Aptos" pitchFamily="34" charset="-122"/>
-                <a:cs typeface="Aptos" pitchFamily="34" charset="-120"/>
-              </a:rPr>
-              <a:t>Natural language processing is a branch of AI that works with.</a:t>
-            </a:r>
-            <a:endParaRPr lang="en-US" sz="1220" dirty="0"/>
-          </a:p>
-          <a:p>
-            <a:pPr indent="0" marL="0">
-              <a:buNone/>
-            </a:pPr>
-            <a:r>
-              <a:rPr lang="en-US" sz="1220" dirty="0">
-                <a:solidFill>
-                  <a:srgbClr val="17364A"/>
-                </a:solidFill>
-                <a:latin typeface="Aptos" pitchFamily="34" charset="0"/>
-                <a:ea typeface="Aptos" pitchFamily="34" charset="-122"/>
-                <a:cs typeface="Aptos" pitchFamily="34" charset="-120"/>
-              </a:rPr>
-              <a:t>Public health agencies often hold important information in.</a:t>
-            </a:r>
-            <a:endParaRPr lang="en-US" sz="1220" dirty="0"/>
-          </a:p>
-          <a:p>
-            <a:pPr indent="0" marL="0">
-              <a:buNone/>
-            </a:pPr>
-            <a:r>
-              <a:rPr lang="en-US" sz="1220" dirty="0">
-                <a:solidFill>
-                  <a:srgbClr val="17364A"/>
-                </a:solidFill>
-                <a:latin typeface="Aptos" pitchFamily="34" charset="0"/>
-                <a:ea typeface="Aptos" pitchFamily="34" charset="-122"/>
-                <a:cs typeface="Aptos" pitchFamily="34" charset="-120"/>
-              </a:rPr>
-              <a:t>This module teaches learners how NLP can support public health.</a:t>
-            </a:r>
-            <a:endParaRPr lang="en-US" sz="1220" dirty="0"/>
-          </a:p>
-        </p:txBody>
-      </p:sp>
-      <p:sp>
-        <p:nvSpPr>
-          <p:cNvPr id="16" name="Shape 14"/>
-          <p:cNvSpPr/>
-          <p:nvPr/>
-        </p:nvSpPr>
-        <p:spPr>
-          <a:xfrm>
-            <a:off x="7635240" y="4498848"/>
-            <a:ext cx="3474720" cy="1143000"/>
+            <a:pPr algn="ctr" indent="0" marL="0">
+              <a:buNone/>
+            </a:pPr>
+            <a:r>
+              <a:rPr lang="en-US" sz="880" b="1" dirty="0">
+                <a:solidFill>
+                  <a:srgbClr val="FFFFFF"/>
+                </a:solidFill>
+                <a:latin typeface="Aptos" pitchFamily="34" charset="0"/>
+                <a:ea typeface="Aptos" pitchFamily="34" charset="-122"/>
+                <a:cs typeface="Aptos" pitchFamily="34" charset="-120"/>
+              </a:rPr>
+              <a:t>Listen</a:t>
+            </a:r>
+            <a:endParaRPr lang="en-US" sz="880" dirty="0"/>
+          </a:p>
+        </p:txBody>
+      </p:sp>
+      <p:sp>
+        <p:nvSpPr>
+          <p:cNvPr id="18" name="Shape 16"/>
+          <p:cNvSpPr/>
+          <p:nvPr/>
+        </p:nvSpPr>
+        <p:spPr>
+          <a:xfrm>
+            <a:off x="9817608" y="3351276"/>
+            <a:ext cx="164592" cy="0"/>
+          </a:xfrm>
+          <a:prstGeom prst="line">
+            <a:avLst/>
+          </a:prstGeom>
+          <a:noFill/>
+          <a:ln w="15240">
+            <a:solidFill>
+              <a:srgbClr val="8ABBD8"/>
+            </a:solidFill>
+            <a:prstDash val="solid"/>
+          </a:ln>
+        </p:spPr>
+      </p:sp>
+      <p:sp>
+        <p:nvSpPr>
+          <p:cNvPr id="19" name="Shape 17"/>
+          <p:cNvSpPr/>
+          <p:nvPr/>
+        </p:nvSpPr>
+        <p:spPr>
+          <a:xfrm>
+            <a:off x="8927592" y="3200400"/>
+            <a:ext cx="890016" cy="301752"/>
           </a:xfrm>
           <a:prstGeom prst="roundRect">
             <a:avLst>
-              <a:gd name="adj" fmla="val 9600"/>
+              <a:gd name="adj" fmla="val 24242"/>
+            </a:avLst>
+          </a:prstGeom>
+          <a:solidFill>
+            <a:srgbClr val="2F8A28"/>
+          </a:solidFill>
+          <a:ln w="12700">
+            <a:solidFill>
+              <a:srgbClr val="2F8A28"/>
+            </a:solidFill>
+            <a:prstDash val="solid"/>
+          </a:ln>
+        </p:spPr>
+      </p:sp>
+      <p:sp>
+        <p:nvSpPr>
+          <p:cNvPr id="20" name="Text 18"/>
+          <p:cNvSpPr/>
+          <p:nvPr/>
+        </p:nvSpPr>
+        <p:spPr>
+          <a:xfrm>
+            <a:off x="8964168" y="3273552"/>
+            <a:ext cx="816864" cy="146304"/>
+          </a:xfrm>
+          <a:prstGeom prst="rect">
+            <a:avLst/>
+          </a:prstGeom>
+          <a:noFill/>
+          <a:ln/>
+        </p:spPr>
+        <p:txBody>
+          <a:bodyPr wrap="square" lIns="0" tIns="0" rIns="0" bIns="0" rtlCol="0" anchor="ctr">
+            <a:normAutofit/>
+          </a:bodyPr>
+          <a:lstStyle/>
+          <a:p>
+            <a:pPr algn="ctr" indent="0" marL="0">
+              <a:buNone/>
+            </a:pPr>
+            <a:r>
+              <a:rPr lang="en-US" sz="880" b="1" dirty="0">
+                <a:solidFill>
+                  <a:srgbClr val="FFFFFF"/>
+                </a:solidFill>
+                <a:latin typeface="Aptos" pitchFamily="34" charset="0"/>
+                <a:ea typeface="Aptos" pitchFamily="34" charset="-122"/>
+                <a:cs typeface="Aptos" pitchFamily="34" charset="-120"/>
+              </a:rPr>
+              <a:t>Adapt</a:t>
+            </a:r>
+            <a:endParaRPr lang="en-US" sz="880" dirty="0"/>
+          </a:p>
+        </p:txBody>
+      </p:sp>
+      <p:sp>
+        <p:nvSpPr>
+          <p:cNvPr id="21" name="Shape 19"/>
+          <p:cNvSpPr/>
+          <p:nvPr/>
+        </p:nvSpPr>
+        <p:spPr>
+          <a:xfrm>
+            <a:off x="9982200" y="3200400"/>
+            <a:ext cx="890016" cy="301752"/>
+          </a:xfrm>
+          <a:prstGeom prst="roundRect">
+            <a:avLst>
+              <a:gd name="adj" fmla="val 24242"/>
+            </a:avLst>
+          </a:prstGeom>
+          <a:solidFill>
+            <a:srgbClr val="6A4CA3"/>
+          </a:solidFill>
+          <a:ln w="12700">
+            <a:solidFill>
+              <a:srgbClr val="6A4CA3"/>
+            </a:solidFill>
+            <a:prstDash val="solid"/>
+          </a:ln>
+        </p:spPr>
+      </p:sp>
+      <p:sp>
+        <p:nvSpPr>
+          <p:cNvPr id="22" name="Text 20"/>
+          <p:cNvSpPr/>
+          <p:nvPr/>
+        </p:nvSpPr>
+        <p:spPr>
+          <a:xfrm>
+            <a:off x="10018776" y="3273552"/>
+            <a:ext cx="816864" cy="146304"/>
+          </a:xfrm>
+          <a:prstGeom prst="rect">
+            <a:avLst/>
+          </a:prstGeom>
+          <a:noFill/>
+          <a:ln/>
+        </p:spPr>
+        <p:txBody>
+          <a:bodyPr wrap="square" lIns="0" tIns="0" rIns="0" bIns="0" rtlCol="0" anchor="ctr">
+            <a:normAutofit/>
+          </a:bodyPr>
+          <a:lstStyle/>
+          <a:p>
+            <a:pPr algn="ctr" indent="0" marL="0">
+              <a:buNone/>
+            </a:pPr>
+            <a:r>
+              <a:rPr lang="en-US" sz="880" b="1" dirty="0">
+                <a:solidFill>
+                  <a:srgbClr val="FFFFFF"/>
+                </a:solidFill>
+                <a:latin typeface="Aptos" pitchFamily="34" charset="0"/>
+                <a:ea typeface="Aptos" pitchFamily="34" charset="-122"/>
+                <a:cs typeface="Aptos" pitchFamily="34" charset="-120"/>
+              </a:rPr>
+              <a:t>Report</a:t>
+            </a:r>
+            <a:endParaRPr lang="en-US" sz="880" dirty="0"/>
+          </a:p>
+        </p:txBody>
+      </p:sp>
+      <p:sp>
+        <p:nvSpPr>
+          <p:cNvPr id="23" name="Text 21"/>
+          <p:cNvSpPr/>
+          <p:nvPr/>
+        </p:nvSpPr>
+        <p:spPr>
+          <a:xfrm>
+            <a:off x="7854696" y="3694176"/>
+            <a:ext cx="3035808" cy="206654"/>
+          </a:xfrm>
+          <a:prstGeom prst="rect">
+            <a:avLst/>
+          </a:prstGeom>
+          <a:noFill/>
+          <a:ln/>
+        </p:spPr>
+        <p:txBody>
+          <a:bodyPr wrap="square" lIns="254" tIns="254" rIns="254" bIns="254" rtlCol="0" anchor="t">
+            <a:normAutofit/>
+          </a:bodyPr>
+          <a:lstStyle/>
+          <a:p>
+            <a:pPr indent="0" marL="0">
+              <a:buNone/>
+            </a:pPr>
+            <a:r>
+              <a:rPr lang="en-US" sz="1120" dirty="0">
+                <a:solidFill>
+                  <a:srgbClr val="17364A"/>
+                </a:solidFill>
+                <a:latin typeface="Aptos" pitchFamily="34" charset="0"/>
+                <a:ea typeface="Aptos" pitchFamily="34" charset="-122"/>
+                <a:cs typeface="Aptos" pitchFamily="34" charset="-120"/>
+              </a:rPr>
+              <a:t>Communication and engagement are stronger when feedback changes the work and the department reports what.</a:t>
+            </a:r>
+            <a:endParaRPr lang="en-US" sz="1120" dirty="0"/>
+          </a:p>
+        </p:txBody>
+      </p:sp>
+      <p:sp>
+        <p:nvSpPr>
+          <p:cNvPr id="24" name="Shape 22"/>
+          <p:cNvSpPr/>
+          <p:nvPr/>
+        </p:nvSpPr>
+        <p:spPr>
+          <a:xfrm>
+            <a:off x="7635240" y="4184294"/>
+            <a:ext cx="3474720" cy="1466698"/>
+          </a:xfrm>
+          <a:prstGeom prst="roundRect">
+            <a:avLst>
+              <a:gd name="adj" fmla="val 7481"/>
             </a:avLst>
           </a:prstGeom>
           <a:solidFill>
@@ -15299,13 +15731,13 @@
       </p:sp>
       <p:sp>
         <p:nvSpPr>
-          <p:cNvPr id="17" name="Text 15"/>
-          <p:cNvSpPr/>
-          <p:nvPr/>
-        </p:nvSpPr>
-        <p:spPr>
-          <a:xfrm>
-            <a:off x="7799832" y="4645152"/>
+          <p:cNvPr id="25" name="Text 23"/>
+          <p:cNvSpPr/>
+          <p:nvPr/>
+        </p:nvSpPr>
+        <p:spPr>
+          <a:xfrm>
+            <a:off x="7799832" y="4330598"/>
             <a:ext cx="3145536" cy="256032"/>
           </a:xfrm>
           <a:prstGeom prst="rect">
@@ -15338,14 +15770,14 @@
       </p:sp>
       <p:sp>
         <p:nvSpPr>
-          <p:cNvPr id="18" name="Text 16"/>
-          <p:cNvSpPr/>
-          <p:nvPr/>
-        </p:nvSpPr>
-        <p:spPr>
-          <a:xfrm>
-            <a:off x="7799832" y="4974336"/>
-            <a:ext cx="3145536" cy="576072"/>
+          <p:cNvPr id="26" name="Text 24"/>
+          <p:cNvSpPr/>
+          <p:nvPr/>
+        </p:nvSpPr>
+        <p:spPr>
+          <a:xfrm>
+            <a:off x="7799832" y="4659782"/>
+            <a:ext cx="3145536" cy="899770"/>
           </a:xfrm>
           <a:prstGeom prst="rect">
             <a:avLst/>
@@ -15371,7 +15803,7 @@
                 <a:ea typeface="Aptos" pitchFamily="34" charset="-122"/>
                 <a:cs typeface="Aptos" pitchFamily="34" charset="-120"/>
               </a:rPr>
-              <a:t>Use the concept to plan transparent communication, gather stakeholder input, protect trust, and make sure affected.</a:t>
+              <a:t>Use the concept to plan transparent communication, gather stakeholder input, protect trust, and make sure affected communities are considered early.</a:t>
             </a:r>
             <a:endParaRPr lang="en-US" sz="1320" dirty="0"/>
           </a:p>
@@ -15740,11 +16172,11 @@
         <p:spPr>
           <a:xfrm>
             <a:off x="7635240" y="1325880"/>
-            <a:ext cx="3474720" cy="1325880"/>
+            <a:ext cx="3474720" cy="1255471"/>
           </a:xfrm>
           <a:prstGeom prst="roundRect">
             <a:avLst>
-              <a:gd name="adj" fmla="val 8276"/>
+              <a:gd name="adj" fmla="val 8740"/>
             </a:avLst>
           </a:prstGeom>
           <a:solidFill>
@@ -15806,7 +16238,7 @@
         <p:spPr>
           <a:xfrm>
             <a:off x="7799832" y="1801368"/>
-            <a:ext cx="3145536" cy="758952"/>
+            <a:ext cx="3145536" cy="688543"/>
           </a:xfrm>
           <a:prstGeom prst="rect">
             <a:avLst/>
@@ -15846,12 +16278,12 @@
         </p:nvSpPr>
         <p:spPr>
           <a:xfrm>
-            <a:off x="7635240" y="2788920"/>
-            <a:ext cx="3474720" cy="1536192"/>
+            <a:off x="7635240" y="2718511"/>
+            <a:ext cx="3474720" cy="1328623"/>
           </a:xfrm>
           <a:prstGeom prst="roundRect">
             <a:avLst>
-              <a:gd name="adj" fmla="val 7143"/>
+              <a:gd name="adj" fmla="val 8259"/>
             </a:avLst>
           </a:prstGeom>
           <a:solidFill>
@@ -15873,8 +16305,8 @@
         </p:nvSpPr>
         <p:spPr>
           <a:xfrm>
-            <a:off x="7799832" y="2935224"/>
-            <a:ext cx="3145536" cy="256032"/>
+            <a:off x="7799832" y="2846527"/>
+            <a:ext cx="3145536" cy="237744"/>
           </a:xfrm>
           <a:prstGeom prst="rect">
             <a:avLst/>
@@ -15890,7 +16322,7 @@
               <a:buNone/>
             </a:pPr>
             <a:r>
-              <a:rPr lang="en-US" sz="1300" b="1" dirty="0">
+              <a:rPr lang="en-US" sz="1250" b="1" dirty="0">
                 <a:solidFill>
                   <a:srgbClr val="0068B7"/>
                 </a:solidFill>
@@ -15898,101 +16330,317 @@
                 <a:ea typeface="Aptos" pitchFamily="34" charset="-122"/>
                 <a:cs typeface="Aptos" pitchFamily="34" charset="-120"/>
               </a:rPr>
-              <a:t>Concept checkpoints</a:t>
-            </a:r>
-            <a:endParaRPr lang="en-US" sz="1300" dirty="0"/>
-          </a:p>
-        </p:txBody>
-      </p:sp>
-      <p:sp>
-        <p:nvSpPr>
-          <p:cNvPr id="15" name="Text 13"/>
-          <p:cNvSpPr/>
-          <p:nvPr/>
-        </p:nvSpPr>
-        <p:spPr>
-          <a:xfrm>
-            <a:off x="7818120" y="3300984"/>
-            <a:ext cx="3090672" cy="877824"/>
-          </a:xfrm>
-          <a:prstGeom prst="rect">
-            <a:avLst/>
-          </a:prstGeom>
-          <a:noFill/>
-          <a:ln/>
-        </p:spPr>
-        <p:txBody>
-          <a:bodyPr wrap="square" lIns="508" tIns="508" rIns="508" bIns="508" rtlCol="0" anchor="t">
+              <a:t>Trust cycle</a:t>
+            </a:r>
+            <a:endParaRPr lang="en-US" sz="1250" dirty="0"/>
+          </a:p>
+        </p:txBody>
+      </p:sp>
+      <p:sp>
+        <p:nvSpPr>
+          <p:cNvPr id="15" name="Shape 13"/>
+          <p:cNvSpPr/>
+          <p:nvPr/>
+        </p:nvSpPr>
+        <p:spPr>
+          <a:xfrm>
+            <a:off x="8763000" y="3399739"/>
+            <a:ext cx="164592" cy="0"/>
+          </a:xfrm>
+          <a:prstGeom prst="line">
+            <a:avLst/>
+          </a:prstGeom>
+          <a:noFill/>
+          <a:ln w="15240">
+            <a:solidFill>
+              <a:srgbClr val="8ABBD8"/>
+            </a:solidFill>
+            <a:prstDash val="solid"/>
+          </a:ln>
+        </p:spPr>
+      </p:sp>
+      <p:sp>
+        <p:nvSpPr>
+          <p:cNvPr id="16" name="Shape 14"/>
+          <p:cNvSpPr/>
+          <p:nvPr/>
+        </p:nvSpPr>
+        <p:spPr>
+          <a:xfrm>
+            <a:off x="7872984" y="3248863"/>
+            <a:ext cx="890016" cy="301752"/>
+          </a:xfrm>
+          <a:prstGeom prst="roundRect">
+            <a:avLst>
+              <a:gd name="adj" fmla="val 24242"/>
+            </a:avLst>
+          </a:prstGeom>
+          <a:solidFill>
+            <a:srgbClr val="0068B7"/>
+          </a:solidFill>
+          <a:ln w="12700">
+            <a:solidFill>
+              <a:srgbClr val="0068B7"/>
+            </a:solidFill>
+            <a:prstDash val="solid"/>
+          </a:ln>
+        </p:spPr>
+      </p:sp>
+      <p:sp>
+        <p:nvSpPr>
+          <p:cNvPr id="17" name="Text 15"/>
+          <p:cNvSpPr/>
+          <p:nvPr/>
+        </p:nvSpPr>
+        <p:spPr>
+          <a:xfrm>
+            <a:off x="7909560" y="3322015"/>
+            <a:ext cx="816864" cy="146304"/>
+          </a:xfrm>
+          <a:prstGeom prst="rect">
+            <a:avLst/>
+          </a:prstGeom>
+          <a:noFill/>
+          <a:ln/>
+        </p:spPr>
+        <p:txBody>
+          <a:bodyPr wrap="square" lIns="0" tIns="0" rIns="0" bIns="0" rtlCol="0" anchor="ctr">
             <a:normAutofit/>
           </a:bodyPr>
           <a:lstStyle/>
           <a:p>
-            <a:pPr indent="0" marL="0">
-              <a:buNone/>
-            </a:pPr>
-            <a:r>
-              <a:rPr lang="en-US" sz="1220" dirty="0">
-                <a:solidFill>
-                  <a:srgbClr val="17364A"/>
-                </a:solidFill>
-                <a:latin typeface="Aptos" pitchFamily="34" charset="0"/>
-                <a:ea typeface="Aptos" pitchFamily="34" charset="-122"/>
-                <a:cs typeface="Aptos" pitchFamily="34" charset="-120"/>
-              </a:rPr>
-              <a:t>NLP can reduce burden by helping staff find, organize, classify,.</a:t>
-            </a:r>
-            <a:endParaRPr lang="en-US" sz="1220" dirty="0"/>
-          </a:p>
-          <a:p>
-            <a:pPr indent="0" marL="0">
-              <a:buNone/>
-            </a:pPr>
-            <a:r>
-              <a:rPr lang="en-US" sz="1220" dirty="0">
-                <a:solidFill>
-                  <a:srgbClr val="17364A"/>
-                </a:solidFill>
-                <a:latin typeface="Aptos" pitchFamily="34" charset="0"/>
-                <a:ea typeface="Aptos" pitchFamily="34" charset="-122"/>
-                <a:cs typeface="Aptos" pitchFamily="34" charset="-120"/>
-              </a:rPr>
-              <a:t>It can support case investigation, environmental health complaint.</a:t>
-            </a:r>
-            <a:endParaRPr lang="en-US" sz="1220" dirty="0"/>
-          </a:p>
-          <a:p>
-            <a:pPr indent="0" marL="0">
-              <a:buNone/>
-            </a:pPr>
-            <a:r>
-              <a:rPr lang="en-US" sz="1220" dirty="0">
-                <a:solidFill>
-                  <a:srgbClr val="17364A"/>
-                </a:solidFill>
-                <a:latin typeface="Aptos" pitchFamily="34" charset="0"/>
-                <a:ea typeface="Aptos" pitchFamily="34" charset="-122"/>
-                <a:cs typeface="Aptos" pitchFamily="34" charset="-120"/>
-              </a:rPr>
-              <a:t>NLP outputs should not be treated as facts without review.</a:t>
-            </a:r>
-            <a:endParaRPr lang="en-US" sz="1220" dirty="0"/>
-          </a:p>
-        </p:txBody>
-      </p:sp>
-      <p:sp>
-        <p:nvSpPr>
-          <p:cNvPr id="16" name="Shape 14"/>
-          <p:cNvSpPr/>
-          <p:nvPr/>
-        </p:nvSpPr>
-        <p:spPr>
-          <a:xfrm>
-            <a:off x="7635240" y="4498848"/>
-            <a:ext cx="3474720" cy="1143000"/>
+            <a:pPr algn="ctr" indent="0" marL="0">
+              <a:buNone/>
+            </a:pPr>
+            <a:r>
+              <a:rPr lang="en-US" sz="880" b="1" dirty="0">
+                <a:solidFill>
+                  <a:srgbClr val="FFFFFF"/>
+                </a:solidFill>
+                <a:latin typeface="Aptos" pitchFamily="34" charset="0"/>
+                <a:ea typeface="Aptos" pitchFamily="34" charset="-122"/>
+                <a:cs typeface="Aptos" pitchFamily="34" charset="-120"/>
+              </a:rPr>
+              <a:t>Listen</a:t>
+            </a:r>
+            <a:endParaRPr lang="en-US" sz="880" dirty="0"/>
+          </a:p>
+        </p:txBody>
+      </p:sp>
+      <p:sp>
+        <p:nvSpPr>
+          <p:cNvPr id="18" name="Shape 16"/>
+          <p:cNvSpPr/>
+          <p:nvPr/>
+        </p:nvSpPr>
+        <p:spPr>
+          <a:xfrm>
+            <a:off x="9817608" y="3399739"/>
+            <a:ext cx="164592" cy="0"/>
+          </a:xfrm>
+          <a:prstGeom prst="line">
+            <a:avLst/>
+          </a:prstGeom>
+          <a:noFill/>
+          <a:ln w="15240">
+            <a:solidFill>
+              <a:srgbClr val="8ABBD8"/>
+            </a:solidFill>
+            <a:prstDash val="solid"/>
+          </a:ln>
+        </p:spPr>
+      </p:sp>
+      <p:sp>
+        <p:nvSpPr>
+          <p:cNvPr id="19" name="Shape 17"/>
+          <p:cNvSpPr/>
+          <p:nvPr/>
+        </p:nvSpPr>
+        <p:spPr>
+          <a:xfrm>
+            <a:off x="8927592" y="3248863"/>
+            <a:ext cx="890016" cy="301752"/>
           </a:xfrm>
           <a:prstGeom prst="roundRect">
             <a:avLst>
-              <a:gd name="adj" fmla="val 9600"/>
+              <a:gd name="adj" fmla="val 24242"/>
+            </a:avLst>
+          </a:prstGeom>
+          <a:solidFill>
+            <a:srgbClr val="2F8A28"/>
+          </a:solidFill>
+          <a:ln w="12700">
+            <a:solidFill>
+              <a:srgbClr val="2F8A28"/>
+            </a:solidFill>
+            <a:prstDash val="solid"/>
+          </a:ln>
+        </p:spPr>
+      </p:sp>
+      <p:sp>
+        <p:nvSpPr>
+          <p:cNvPr id="20" name="Text 18"/>
+          <p:cNvSpPr/>
+          <p:nvPr/>
+        </p:nvSpPr>
+        <p:spPr>
+          <a:xfrm>
+            <a:off x="8964168" y="3322015"/>
+            <a:ext cx="816864" cy="146304"/>
+          </a:xfrm>
+          <a:prstGeom prst="rect">
+            <a:avLst/>
+          </a:prstGeom>
+          <a:noFill/>
+          <a:ln/>
+        </p:spPr>
+        <p:txBody>
+          <a:bodyPr wrap="square" lIns="0" tIns="0" rIns="0" bIns="0" rtlCol="0" anchor="ctr">
+            <a:normAutofit/>
+          </a:bodyPr>
+          <a:lstStyle/>
+          <a:p>
+            <a:pPr algn="ctr" indent="0" marL="0">
+              <a:buNone/>
+            </a:pPr>
+            <a:r>
+              <a:rPr lang="en-US" sz="880" b="1" dirty="0">
+                <a:solidFill>
+                  <a:srgbClr val="FFFFFF"/>
+                </a:solidFill>
+                <a:latin typeface="Aptos" pitchFamily="34" charset="0"/>
+                <a:ea typeface="Aptos" pitchFamily="34" charset="-122"/>
+                <a:cs typeface="Aptos" pitchFamily="34" charset="-120"/>
+              </a:rPr>
+              <a:t>Adapt</a:t>
+            </a:r>
+            <a:endParaRPr lang="en-US" sz="880" dirty="0"/>
+          </a:p>
+        </p:txBody>
+      </p:sp>
+      <p:sp>
+        <p:nvSpPr>
+          <p:cNvPr id="21" name="Shape 19"/>
+          <p:cNvSpPr/>
+          <p:nvPr/>
+        </p:nvSpPr>
+        <p:spPr>
+          <a:xfrm>
+            <a:off x="9982200" y="3248863"/>
+            <a:ext cx="890016" cy="301752"/>
+          </a:xfrm>
+          <a:prstGeom prst="roundRect">
+            <a:avLst>
+              <a:gd name="adj" fmla="val 24242"/>
+            </a:avLst>
+          </a:prstGeom>
+          <a:solidFill>
+            <a:srgbClr val="6A4CA3"/>
+          </a:solidFill>
+          <a:ln w="12700">
+            <a:solidFill>
+              <a:srgbClr val="6A4CA3"/>
+            </a:solidFill>
+            <a:prstDash val="solid"/>
+          </a:ln>
+        </p:spPr>
+      </p:sp>
+      <p:sp>
+        <p:nvSpPr>
+          <p:cNvPr id="22" name="Text 20"/>
+          <p:cNvSpPr/>
+          <p:nvPr/>
+        </p:nvSpPr>
+        <p:spPr>
+          <a:xfrm>
+            <a:off x="10018776" y="3322015"/>
+            <a:ext cx="816864" cy="146304"/>
+          </a:xfrm>
+          <a:prstGeom prst="rect">
+            <a:avLst/>
+          </a:prstGeom>
+          <a:noFill/>
+          <a:ln/>
+        </p:spPr>
+        <p:txBody>
+          <a:bodyPr wrap="square" lIns="0" tIns="0" rIns="0" bIns="0" rtlCol="0" anchor="ctr">
+            <a:normAutofit/>
+          </a:bodyPr>
+          <a:lstStyle/>
+          <a:p>
+            <a:pPr algn="ctr" indent="0" marL="0">
+              <a:buNone/>
+            </a:pPr>
+            <a:r>
+              <a:rPr lang="en-US" sz="880" b="1" dirty="0">
+                <a:solidFill>
+                  <a:srgbClr val="FFFFFF"/>
+                </a:solidFill>
+                <a:latin typeface="Aptos" pitchFamily="34" charset="0"/>
+                <a:ea typeface="Aptos" pitchFamily="34" charset="-122"/>
+                <a:cs typeface="Aptos" pitchFamily="34" charset="-120"/>
+              </a:rPr>
+              <a:t>Report</a:t>
+            </a:r>
+            <a:endParaRPr lang="en-US" sz="880" dirty="0"/>
+          </a:p>
+        </p:txBody>
+      </p:sp>
+      <p:sp>
+        <p:nvSpPr>
+          <p:cNvPr id="23" name="Text 21"/>
+          <p:cNvSpPr/>
+          <p:nvPr/>
+        </p:nvSpPr>
+        <p:spPr>
+          <a:xfrm>
+            <a:off x="7854696" y="3742639"/>
+            <a:ext cx="3035808" cy="158191"/>
+          </a:xfrm>
+          <a:prstGeom prst="rect">
+            <a:avLst/>
+          </a:prstGeom>
+          <a:noFill/>
+          <a:ln/>
+        </p:spPr>
+        <p:txBody>
+          <a:bodyPr wrap="square" lIns="254" tIns="254" rIns="254" bIns="254" rtlCol="0" anchor="t">
+            <a:normAutofit/>
+          </a:bodyPr>
+          <a:lstStyle/>
+          <a:p>
+            <a:pPr indent="0" marL="0">
+              <a:buNone/>
+            </a:pPr>
+            <a:r>
+              <a:rPr lang="en-US" sz="1120" dirty="0">
+                <a:solidFill>
+                  <a:srgbClr val="17364A"/>
+                </a:solidFill>
+                <a:latin typeface="Aptos" pitchFamily="34" charset="0"/>
+                <a:ea typeface="Aptos" pitchFamily="34" charset="-122"/>
+                <a:cs typeface="Aptos" pitchFamily="34" charset="-120"/>
+              </a:rPr>
+              <a:t>Communication and engagement are stronger when feedback changes the work and the department reports what.</a:t>
+            </a:r>
+            <a:endParaRPr lang="en-US" sz="1120" dirty="0"/>
+          </a:p>
+        </p:txBody>
+      </p:sp>
+      <p:sp>
+        <p:nvSpPr>
+          <p:cNvPr id="24" name="Shape 22"/>
+          <p:cNvSpPr/>
+          <p:nvPr/>
+        </p:nvSpPr>
+        <p:spPr>
+          <a:xfrm>
+            <a:off x="7635240" y="4184294"/>
+            <a:ext cx="3474720" cy="1466698"/>
+          </a:xfrm>
+          <a:prstGeom prst="roundRect">
+            <a:avLst>
+              <a:gd name="adj" fmla="val 7481"/>
             </a:avLst>
           </a:prstGeom>
           <a:solidFill>
@@ -16008,13 +16656,13 @@
       </p:sp>
       <p:sp>
         <p:nvSpPr>
-          <p:cNvPr id="17" name="Text 15"/>
-          <p:cNvSpPr/>
-          <p:nvPr/>
-        </p:nvSpPr>
-        <p:spPr>
-          <a:xfrm>
-            <a:off x="7799832" y="4645152"/>
+          <p:cNvPr id="25" name="Text 23"/>
+          <p:cNvSpPr/>
+          <p:nvPr/>
+        </p:nvSpPr>
+        <p:spPr>
+          <a:xfrm>
+            <a:off x="7799832" y="4330598"/>
             <a:ext cx="3145536" cy="256032"/>
           </a:xfrm>
           <a:prstGeom prst="rect">
@@ -16047,14 +16695,14 @@
       </p:sp>
       <p:sp>
         <p:nvSpPr>
-          <p:cNvPr id="18" name="Text 16"/>
-          <p:cNvSpPr/>
-          <p:nvPr/>
-        </p:nvSpPr>
-        <p:spPr>
-          <a:xfrm>
-            <a:off x="7799832" y="4974336"/>
-            <a:ext cx="3145536" cy="576072"/>
+          <p:cNvPr id="26" name="Text 24"/>
+          <p:cNvSpPr/>
+          <p:nvPr/>
+        </p:nvSpPr>
+        <p:spPr>
+          <a:xfrm>
+            <a:off x="7799832" y="4659782"/>
+            <a:ext cx="3145536" cy="899770"/>
           </a:xfrm>
           <a:prstGeom prst="rect">
             <a:avLst/>
@@ -16080,7 +16728,7 @@
                 <a:ea typeface="Aptos" pitchFamily="34" charset="-122"/>
                 <a:cs typeface="Aptos" pitchFamily="34" charset="-120"/>
               </a:rPr>
-              <a:t>Use the concept to plan transparent communication, gather stakeholder input, protect trust, and make sure affected.</a:t>
+              <a:t>Use the concept to plan transparent communication, gather stakeholder input, protect trust, and make sure affected communities are considered early.</a:t>
             </a:r>
             <a:endParaRPr lang="en-US" sz="1320" dirty="0"/>
           </a:p>
@@ -16449,11 +17097,11 @@
         <p:spPr>
           <a:xfrm>
             <a:off x="7635240" y="1325880"/>
-            <a:ext cx="3474720" cy="1325880"/>
+            <a:ext cx="3474720" cy="1207008"/>
           </a:xfrm>
           <a:prstGeom prst="roundRect">
             <a:avLst>
-              <a:gd name="adj" fmla="val 8276"/>
+              <a:gd name="adj" fmla="val 9091"/>
             </a:avLst>
           </a:prstGeom>
           <a:solidFill>
@@ -16515,7 +17163,7 @@
         <p:spPr>
           <a:xfrm>
             <a:off x="7799832" y="1801368"/>
-            <a:ext cx="3145536" cy="758952"/>
+            <a:ext cx="3145536" cy="640080"/>
           </a:xfrm>
           <a:prstGeom prst="rect">
             <a:avLst/>
@@ -16555,12 +17203,12 @@
         </p:nvSpPr>
         <p:spPr>
           <a:xfrm>
-            <a:off x="7635240" y="2788920"/>
-            <a:ext cx="3474720" cy="1536192"/>
+            <a:off x="7635240" y="2670048"/>
+            <a:ext cx="3474720" cy="1377086"/>
           </a:xfrm>
           <a:prstGeom prst="roundRect">
             <a:avLst>
-              <a:gd name="adj" fmla="val 7143"/>
+              <a:gd name="adj" fmla="val 7968"/>
             </a:avLst>
           </a:prstGeom>
           <a:solidFill>
@@ -16582,7 +17230,7 @@
         </p:nvSpPr>
         <p:spPr>
           <a:xfrm>
-            <a:off x="7799832" y="2935224"/>
+            <a:off x="7799832" y="2816352"/>
             <a:ext cx="3145536" cy="256032"/>
           </a:xfrm>
           <a:prstGeom prst="rect">
@@ -16621,8 +17269,8 @@
         </p:nvSpPr>
         <p:spPr>
           <a:xfrm>
-            <a:off x="7818120" y="3300984"/>
-            <a:ext cx="3090672" cy="877824"/>
+            <a:off x="7818120" y="3182112"/>
+            <a:ext cx="3090672" cy="718718"/>
           </a:xfrm>
           <a:prstGeom prst="rect">
             <a:avLst/>
@@ -16696,12 +17344,12 @@
         </p:nvSpPr>
         <p:spPr>
           <a:xfrm>
-            <a:off x="7635240" y="4498848"/>
-            <a:ext cx="3474720" cy="1143000"/>
+            <a:off x="7635240" y="4184294"/>
+            <a:ext cx="3474720" cy="1466698"/>
           </a:xfrm>
           <a:prstGeom prst="roundRect">
             <a:avLst>
-              <a:gd name="adj" fmla="val 9600"/>
+              <a:gd name="adj" fmla="val 7481"/>
             </a:avLst>
           </a:prstGeom>
           <a:solidFill>
@@ -16723,7 +17371,7 @@
         </p:nvSpPr>
         <p:spPr>
           <a:xfrm>
-            <a:off x="7799832" y="4645152"/>
+            <a:off x="7799832" y="4330598"/>
             <a:ext cx="3145536" cy="256032"/>
           </a:xfrm>
           <a:prstGeom prst="rect">
@@ -16762,8 +17410,8 @@
         </p:nvSpPr>
         <p:spPr>
           <a:xfrm>
-            <a:off x="7799832" y="4974336"/>
-            <a:ext cx="3145536" cy="576072"/>
+            <a:off x="7799832" y="4659782"/>
+            <a:ext cx="3145536" cy="899770"/>
           </a:xfrm>
           <a:prstGeom prst="rect">
             <a:avLst/>
@@ -16789,7 +17437,7 @@
                 <a:ea typeface="Aptos" pitchFamily="34" charset="-122"/>
                 <a:cs typeface="Aptos" pitchFamily="34" charset="-120"/>
               </a:rPr>
-              <a:t>Use the concept to plan transparent communication, gather stakeholder input, protect trust, and make sure affected.</a:t>
+              <a:t>Use the concept to plan transparent communication, gather stakeholder input, protect trust, and make sure affected communities are considered early.</a:t>
             </a:r>
             <a:endParaRPr lang="en-US" sz="1320" dirty="0"/>
           </a:p>
@@ -17158,11 +17806,11 @@
         <p:spPr>
           <a:xfrm>
             <a:off x="7635240" y="1325880"/>
-            <a:ext cx="3474720" cy="1325880"/>
+            <a:ext cx="3474720" cy="1207008"/>
           </a:xfrm>
           <a:prstGeom prst="roundRect">
             <a:avLst>
-              <a:gd name="adj" fmla="val 8276"/>
+              <a:gd name="adj" fmla="val 9091"/>
             </a:avLst>
           </a:prstGeom>
           <a:solidFill>
@@ -17224,7 +17872,7 @@
         <p:spPr>
           <a:xfrm>
             <a:off x="7799832" y="1801368"/>
-            <a:ext cx="3145536" cy="758952"/>
+            <a:ext cx="3145536" cy="640080"/>
           </a:xfrm>
           <a:prstGeom prst="rect">
             <a:avLst/>
@@ -17264,12 +17912,12 @@
         </p:nvSpPr>
         <p:spPr>
           <a:xfrm>
-            <a:off x="7635240" y="2788920"/>
-            <a:ext cx="3474720" cy="1536192"/>
+            <a:off x="7635240" y="2670048"/>
+            <a:ext cx="3474720" cy="1377086"/>
           </a:xfrm>
           <a:prstGeom prst="roundRect">
             <a:avLst>
-              <a:gd name="adj" fmla="val 7143"/>
+              <a:gd name="adj" fmla="val 7968"/>
             </a:avLst>
           </a:prstGeom>
           <a:solidFill>
@@ -17291,7 +17939,7 @@
         </p:nvSpPr>
         <p:spPr>
           <a:xfrm>
-            <a:off x="7799832" y="2935224"/>
+            <a:off x="7799832" y="2816352"/>
             <a:ext cx="3145536" cy="256032"/>
           </a:xfrm>
           <a:prstGeom prst="rect">
@@ -17330,8 +17978,8 @@
         </p:nvSpPr>
         <p:spPr>
           <a:xfrm>
-            <a:off x="7818120" y="3300984"/>
-            <a:ext cx="3090672" cy="877824"/>
+            <a:off x="7818120" y="3182112"/>
+            <a:ext cx="3090672" cy="718718"/>
           </a:xfrm>
           <a:prstGeom prst="rect">
             <a:avLst/>
@@ -17405,12 +18053,12 @@
         </p:nvSpPr>
         <p:spPr>
           <a:xfrm>
-            <a:off x="7635240" y="4498848"/>
-            <a:ext cx="3474720" cy="1143000"/>
+            <a:off x="7635240" y="4184294"/>
+            <a:ext cx="3474720" cy="1466698"/>
           </a:xfrm>
           <a:prstGeom prst="roundRect">
             <a:avLst>
-              <a:gd name="adj" fmla="val 9600"/>
+              <a:gd name="adj" fmla="val 7481"/>
             </a:avLst>
           </a:prstGeom>
           <a:solidFill>
@@ -17432,7 +18080,7 @@
         </p:nvSpPr>
         <p:spPr>
           <a:xfrm>
-            <a:off x="7799832" y="4645152"/>
+            <a:off x="7799832" y="4330598"/>
             <a:ext cx="3145536" cy="256032"/>
           </a:xfrm>
           <a:prstGeom prst="rect">
@@ -17471,8 +18119,8 @@
         </p:nvSpPr>
         <p:spPr>
           <a:xfrm>
-            <a:off x="7799832" y="4974336"/>
-            <a:ext cx="3145536" cy="576072"/>
+            <a:off x="7799832" y="4659782"/>
+            <a:ext cx="3145536" cy="899770"/>
           </a:xfrm>
           <a:prstGeom prst="rect">
             <a:avLst/>
@@ -17498,7 +18146,7 @@
                 <a:ea typeface="Aptos" pitchFamily="34" charset="-122"/>
                 <a:cs typeface="Aptos" pitchFamily="34" charset="-120"/>
               </a:rPr>
-              <a:t>Use the concept to plan transparent communication, gather stakeholder input, protect trust, and make sure affected.</a:t>
+              <a:t>Use the concept to plan transparent communication, gather stakeholder input, protect trust, and make sure affected communities are considered early.</a:t>
             </a:r>
             <a:endParaRPr lang="en-US" sz="1320" dirty="0"/>
           </a:p>

--- a/downloads/presentations/modules/anl-200.pptx
+++ b/downloads/presentations/modules/anl-200.pptx
@@ -3342,8 +3342,8 @@
         </p:nvSpPr>
         <p:spPr>
           <a:xfrm>
-            <a:off x="868680" y="1508760"/>
-            <a:ext cx="6309360" cy="4160520"/>
+            <a:off x="822960" y="1463040"/>
+            <a:ext cx="6565392" cy="4343400"/>
           </a:xfrm>
           <a:prstGeom prst="rect">
             <a:avLst/>
@@ -3361,7 +3361,7 @@
               <a:buNone/>
             </a:pPr>
             <a:r>
-              <a:rPr lang="en-US" sz="2100" dirty="0">
+              <a:rPr lang="en-US" sz="1920" dirty="0">
                 <a:solidFill>
                   <a:srgbClr val="003A63"/>
                 </a:solidFill>
@@ -3371,14 +3371,14 @@
               </a:rPr>
               <a:t>• A contact center may receive hundreds of public inquiries during an outbreak.</a:t>
             </a:r>
-            <a:endParaRPr lang="en-US" sz="2100" dirty="0"/>
-          </a:p>
-          <a:p>
-            <a:pPr indent="0" marL="0">
-              <a:buNone/>
-            </a:pPr>
-            <a:r>
-              <a:rPr lang="en-US" sz="2100" dirty="0">
+            <a:endParaRPr lang="en-US" sz="1920" dirty="0"/>
+          </a:p>
+          <a:p>
+            <a:pPr indent="0" marL="0">
+              <a:buNone/>
+            </a:pPr>
+            <a:r>
+              <a:rPr lang="en-US" sz="1920" dirty="0">
                 <a:solidFill>
                   <a:srgbClr val="003A63"/>
                 </a:solidFill>
@@ -3386,16 +3386,16 @@
                 <a:ea typeface="Aptos" pitchFamily="34" charset="-122"/>
                 <a:cs typeface="Aptos" pitchFamily="34" charset="-120"/>
               </a:rPr>
-              <a:t>• NLP could classify messages by topic, identify urgent issues, and draft response summaries for.</a:t>
-            </a:r>
-            <a:endParaRPr lang="en-US" sz="2100" dirty="0"/>
-          </a:p>
-          <a:p>
-            <a:pPr indent="0" marL="0">
-              <a:buNone/>
-            </a:pPr>
-            <a:r>
-              <a:rPr lang="en-US" sz="2100" dirty="0">
+              <a:t>• NLP could classify messages by topic, identify urgent issues, and draft.</a:t>
+            </a:r>
+            <a:endParaRPr lang="en-US" sz="1920" dirty="0"/>
+          </a:p>
+          <a:p>
+            <a:pPr indent="0" marL="0">
+              <a:buNone/>
+            </a:pPr>
+            <a:r>
+              <a:rPr lang="en-US" sz="1920" dirty="0">
                 <a:solidFill>
                   <a:srgbClr val="003A63"/>
                 </a:solidFill>
@@ -3403,9 +3403,9 @@
                 <a:ea typeface="Aptos" pitchFamily="34" charset="-122"/>
                 <a:cs typeface="Aptos" pitchFamily="34" charset="-120"/>
               </a:rPr>
-              <a:t>• This can improve timeliness, but messages may contain sensitive information, emotional.</a:t>
-            </a:r>
-            <a:endParaRPr lang="en-US" sz="2100" dirty="0"/>
+              <a:t>• This can improve timeliness, but messages may contain sensitive information,.</a:t>
+            </a:r>
+            <a:endParaRPr lang="en-US" sz="1920" dirty="0"/>
           </a:p>
         </p:txBody>
       </p:sp>
@@ -3417,12 +3417,12 @@
         </p:nvSpPr>
         <p:spPr>
           <a:xfrm>
-            <a:off x="7635240" y="1325880"/>
-            <a:ext cx="3474720" cy="1207008"/>
+            <a:off x="7543800" y="1325880"/>
+            <a:ext cx="3611880" cy="1261872"/>
           </a:xfrm>
           <a:prstGeom prst="roundRect">
             <a:avLst>
-              <a:gd name="adj" fmla="val 9091"/>
+              <a:gd name="adj" fmla="val 8696"/>
             </a:avLst>
           </a:prstGeom>
           <a:solidFill>
@@ -3444,8 +3444,8 @@
         </p:nvSpPr>
         <p:spPr>
           <a:xfrm>
-            <a:off x="7799832" y="1472184"/>
-            <a:ext cx="3145536" cy="256032"/>
+            <a:off x="7708392" y="1453896"/>
+            <a:ext cx="3282696" cy="228600"/>
           </a:xfrm>
           <a:prstGeom prst="rect">
             <a:avLst/>
@@ -3461,7 +3461,7 @@
               <a:buNone/>
             </a:pPr>
             <a:r>
-              <a:rPr lang="en-US" sz="1300" b="1" dirty="0">
+              <a:rPr lang="en-US" sz="1220" b="1" dirty="0">
                 <a:solidFill>
                   <a:srgbClr val="0068B7"/>
                 </a:solidFill>
@@ -3471,7 +3471,7 @@
               </a:rPr>
               <a:t>Public health lens</a:t>
             </a:r>
-            <a:endParaRPr lang="en-US" sz="1300" dirty="0"/>
+            <a:endParaRPr lang="en-US" sz="1220" dirty="0"/>
           </a:p>
         </p:txBody>
       </p:sp>
@@ -3483,8 +3483,8 @@
         </p:nvSpPr>
         <p:spPr>
           <a:xfrm>
-            <a:off x="7799832" y="1801368"/>
-            <a:ext cx="3145536" cy="640080"/>
+            <a:off x="7708392" y="1764792"/>
+            <a:ext cx="3282696" cy="749808"/>
           </a:xfrm>
           <a:prstGeom prst="rect">
             <a:avLst/>
@@ -3502,7 +3502,7 @@
               <a:buNone/>
             </a:pPr>
             <a:r>
-              <a:rPr lang="en-US" sz="1320" dirty="0">
+              <a:rPr lang="en-US" sz="1220" dirty="0">
                 <a:solidFill>
                   <a:srgbClr val="17364A"/>
                 </a:solidFill>
@@ -3512,7 +3512,7 @@
               </a:rPr>
               <a:t>A contact center may receive hundreds of public inquiries during an outbreak.</a:t>
             </a:r>
-            <a:endParaRPr lang="en-US" sz="1320" dirty="0"/>
+            <a:endParaRPr lang="en-US" sz="1220" dirty="0"/>
           </a:p>
         </p:txBody>
       </p:sp>
@@ -3524,12 +3524,12 @@
         </p:nvSpPr>
         <p:spPr>
           <a:xfrm>
-            <a:off x="7635240" y="2670048"/>
-            <a:ext cx="3474720" cy="1377086"/>
+            <a:off x="7543800" y="2724912"/>
+            <a:ext cx="3611880" cy="1527048"/>
           </a:xfrm>
           <a:prstGeom prst="roundRect">
             <a:avLst>
-              <a:gd name="adj" fmla="val 7968"/>
+              <a:gd name="adj" fmla="val 7186"/>
             </a:avLst>
           </a:prstGeom>
           <a:solidFill>
@@ -3551,8 +3551,8 @@
         </p:nvSpPr>
         <p:spPr>
           <a:xfrm>
-            <a:off x="7799832" y="2816352"/>
-            <a:ext cx="3145536" cy="256032"/>
+            <a:off x="7708392" y="2852928"/>
+            <a:ext cx="3282696" cy="228600"/>
           </a:xfrm>
           <a:prstGeom prst="rect">
             <a:avLst/>
@@ -3568,7 +3568,7 @@
               <a:buNone/>
             </a:pPr>
             <a:r>
-              <a:rPr lang="en-US" sz="1300" b="1" dirty="0">
+              <a:rPr lang="en-US" sz="1220" b="1" dirty="0">
                 <a:solidFill>
                   <a:srgbClr val="0068B7"/>
                 </a:solidFill>
@@ -3578,7 +3578,7 @@
               </a:rPr>
               <a:t>Concept checkpoints</a:t>
             </a:r>
-            <a:endParaRPr lang="en-US" sz="1300" dirty="0"/>
+            <a:endParaRPr lang="en-US" sz="1220" dirty="0"/>
           </a:p>
         </p:txBody>
       </p:sp>
@@ -3590,8 +3590,8 @@
         </p:nvSpPr>
         <p:spPr>
           <a:xfrm>
-            <a:off x="7818120" y="3182112"/>
-            <a:ext cx="3090672" cy="718718"/>
+            <a:off x="7726680" y="3182112"/>
+            <a:ext cx="3227832" cy="960120"/>
           </a:xfrm>
           <a:prstGeom prst="rect">
             <a:avLst/>
@@ -3609,7 +3609,7 @@
               <a:buNone/>
             </a:pPr>
             <a:r>
-              <a:rPr lang="en-US" sz="1220" dirty="0">
+              <a:rPr lang="en-US" sz="1140" dirty="0">
                 <a:solidFill>
                   <a:srgbClr val="17364A"/>
                 </a:solidFill>
@@ -3617,16 +3617,16 @@
                 <a:ea typeface="Aptos" pitchFamily="34" charset="-122"/>
                 <a:cs typeface="Aptos" pitchFamily="34" charset="-120"/>
               </a:rPr>
-              <a:t>NLP could classify messages by topic, identify urgent issues, and.</a:t>
-            </a:r>
-            <a:endParaRPr lang="en-US" sz="1220" dirty="0"/>
-          </a:p>
-          <a:p>
-            <a:pPr indent="0" marL="0">
-              <a:buNone/>
-            </a:pPr>
-            <a:r>
-              <a:rPr lang="en-US" sz="1220" dirty="0">
+              <a:t>NLP could classify messages by topic, identify.</a:t>
+            </a:r>
+            <a:endParaRPr lang="en-US" sz="1140" dirty="0"/>
+          </a:p>
+          <a:p>
+            <a:pPr indent="0" marL="0">
+              <a:buNone/>
+            </a:pPr>
+            <a:r>
+              <a:rPr lang="en-US" sz="1140" dirty="0">
                 <a:solidFill>
                   <a:srgbClr val="17364A"/>
                 </a:solidFill>
@@ -3634,16 +3634,16 @@
                 <a:ea typeface="Aptos" pitchFamily="34" charset="-122"/>
                 <a:cs typeface="Aptos" pitchFamily="34" charset="-120"/>
               </a:rPr>
-              <a:t>This can improve timeliness, but messages may contain sensitive.</a:t>
-            </a:r>
-            <a:endParaRPr lang="en-US" sz="1220" dirty="0"/>
-          </a:p>
-          <a:p>
-            <a:pPr indent="0" marL="0">
-              <a:buNone/>
-            </a:pPr>
-            <a:r>
-              <a:rPr lang="en-US" sz="1220" dirty="0">
+              <a:t>This can improve timeliness, but messages may.</a:t>
+            </a:r>
+            <a:endParaRPr lang="en-US" sz="1140" dirty="0"/>
+          </a:p>
+          <a:p>
+            <a:pPr indent="0" marL="0">
+              <a:buNone/>
+            </a:pPr>
+            <a:r>
+              <a:rPr lang="en-US" sz="1140" dirty="0">
                 <a:solidFill>
                   <a:srgbClr val="17364A"/>
                 </a:solidFill>
@@ -3651,9 +3651,9 @@
                 <a:ea typeface="Aptos" pitchFamily="34" charset="-122"/>
                 <a:cs typeface="Aptos" pitchFamily="34" charset="-120"/>
               </a:rPr>
-              <a:t>Staff need review procedures and escalation criteria.</a:t>
-            </a:r>
-            <a:endParaRPr lang="en-US" sz="1220" dirty="0"/>
+              <a:t>Staff need review procedures and escalation.</a:t>
+            </a:r>
+            <a:endParaRPr lang="en-US" sz="1140" dirty="0"/>
           </a:p>
         </p:txBody>
       </p:sp>
@@ -3665,12 +3665,12 @@
         </p:nvSpPr>
         <p:spPr>
           <a:xfrm>
-            <a:off x="7635240" y="4184294"/>
-            <a:ext cx="3474720" cy="1466698"/>
+            <a:off x="7543800" y="4389120"/>
+            <a:ext cx="3611880" cy="1261872"/>
           </a:xfrm>
           <a:prstGeom prst="roundRect">
             <a:avLst>
-              <a:gd name="adj" fmla="val 7481"/>
+              <a:gd name="adj" fmla="val 8696"/>
             </a:avLst>
           </a:prstGeom>
           <a:solidFill>
@@ -3692,8 +3692,8 @@
         </p:nvSpPr>
         <p:spPr>
           <a:xfrm>
-            <a:off x="7799832" y="4330598"/>
-            <a:ext cx="3145536" cy="256032"/>
+            <a:off x="7708392" y="4517136"/>
+            <a:ext cx="3282696" cy="228600"/>
           </a:xfrm>
           <a:prstGeom prst="rect">
             <a:avLst/>
@@ -3709,7 +3709,7 @@
               <a:buNone/>
             </a:pPr>
             <a:r>
-              <a:rPr lang="en-US" sz="1300" b="1" dirty="0">
+              <a:rPr lang="en-US" sz="1220" b="1" dirty="0">
                 <a:solidFill>
                   <a:srgbClr val="0068B7"/>
                 </a:solidFill>
@@ -3719,7 +3719,7 @@
               </a:rPr>
               <a:t>Engagement move</a:t>
             </a:r>
-            <a:endParaRPr lang="en-US" sz="1300" dirty="0"/>
+            <a:endParaRPr lang="en-US" sz="1220" dirty="0"/>
           </a:p>
         </p:txBody>
       </p:sp>
@@ -3731,8 +3731,8 @@
         </p:nvSpPr>
         <p:spPr>
           <a:xfrm>
-            <a:off x="7799832" y="4659782"/>
-            <a:ext cx="3145536" cy="899770"/>
+            <a:off x="7708392" y="4828032"/>
+            <a:ext cx="3282696" cy="749808"/>
           </a:xfrm>
           <a:prstGeom prst="rect">
             <a:avLst/>
@@ -3750,7 +3750,7 @@
               <a:buNone/>
             </a:pPr>
             <a:r>
-              <a:rPr lang="en-US" sz="1320" dirty="0">
+              <a:rPr lang="en-US" sz="1220" dirty="0">
                 <a:solidFill>
                   <a:srgbClr val="17364A"/>
                 </a:solidFill>
@@ -3758,9 +3758,9 @@
                 <a:ea typeface="Aptos" pitchFamily="34" charset="-122"/>
                 <a:cs typeface="Aptos" pitchFamily="34" charset="-120"/>
               </a:rPr>
-              <a:t>Use the concept to plan transparent communication, gather stakeholder input, protect trust, and make sure affected communities are considered early.</a:t>
-            </a:r>
-            <a:endParaRPr lang="en-US" sz="1320" dirty="0"/>
+              <a:t>Use the concept to plan transparent communication, gather stakeholder input,.</a:t>
+            </a:r>
+            <a:endParaRPr lang="en-US" sz="1220" dirty="0"/>
           </a:p>
         </p:txBody>
       </p:sp>
@@ -4051,8 +4051,8 @@
         </p:nvSpPr>
         <p:spPr>
           <a:xfrm>
-            <a:off x="868680" y="1508760"/>
-            <a:ext cx="6309360" cy="4160520"/>
+            <a:off x="822960" y="1463040"/>
+            <a:ext cx="6565392" cy="4343400"/>
           </a:xfrm>
           <a:prstGeom prst="rect">
             <a:avLst/>
@@ -4070,7 +4070,7 @@
               <a:buNone/>
             </a:pPr>
             <a:r>
-              <a:rPr lang="en-US" sz="2100" dirty="0">
+              <a:rPr lang="en-US" sz="1920" dirty="0">
                 <a:solidFill>
                   <a:srgbClr val="003A63"/>
                 </a:solidFill>
@@ -4080,14 +4080,14 @@
               </a:rPr>
               <a:t>• NLP implementation begins with task definition.</a:t>
             </a:r>
-            <a:endParaRPr lang="en-US" sz="2100" dirty="0"/>
-          </a:p>
-          <a:p>
-            <a:pPr indent="0" marL="0">
-              <a:buNone/>
-            </a:pPr>
-            <a:r>
-              <a:rPr lang="en-US" sz="2100" dirty="0">
+            <a:endParaRPr lang="en-US" sz="1920" dirty="0"/>
+          </a:p>
+          <a:p>
+            <a:pPr indent="0" marL="0">
+              <a:buNone/>
+            </a:pPr>
+            <a:r>
+              <a:rPr lang="en-US" sz="1920" dirty="0">
                 <a:solidFill>
                   <a:srgbClr val="003A63"/>
                 </a:solidFill>
@@ -4095,16 +4095,16 @@
                 <a:ea typeface="Aptos" pitchFamily="34" charset="-122"/>
                 <a:cs typeface="Aptos" pitchFamily="34" charset="-120"/>
               </a:rPr>
-              <a:t>• Extraction, classification, summarization, translation, topic modeling, and question answering.</a:t>
-            </a:r>
-            <a:endParaRPr lang="en-US" sz="2100" dirty="0"/>
-          </a:p>
-          <a:p>
-            <a:pPr indent="0" marL="0">
-              <a:buNone/>
-            </a:pPr>
-            <a:r>
-              <a:rPr lang="en-US" sz="2100" dirty="0">
+              <a:t>• Extraction, classification, summarization, translation, topic modeling, and.</a:t>
+            </a:r>
+            <a:endParaRPr lang="en-US" sz="1920" dirty="0"/>
+          </a:p>
+          <a:p>
+            <a:pPr indent="0" marL="0">
+              <a:buNone/>
+            </a:pPr>
+            <a:r>
+              <a:rPr lang="en-US" sz="1920" dirty="0">
                 <a:solidFill>
                   <a:srgbClr val="003A63"/>
                 </a:solidFill>
@@ -4112,9 +4112,9 @@
                 <a:ea typeface="Aptos" pitchFamily="34" charset="-122"/>
                 <a:cs typeface="Aptos" pitchFamily="34" charset="-120"/>
               </a:rPr>
-              <a:t>• A tool that performs well at summarization may perform poorly at extracting dates or.</a:t>
-            </a:r>
-            <a:endParaRPr lang="en-US" sz="2100" dirty="0"/>
+              <a:t>• A tool that performs well at summarization may perform poorly at extracting.</a:t>
+            </a:r>
+            <a:endParaRPr lang="en-US" sz="1920" dirty="0"/>
           </a:p>
         </p:txBody>
       </p:sp>
@@ -4126,12 +4126,12 @@
         </p:nvSpPr>
         <p:spPr>
           <a:xfrm>
-            <a:off x="7635240" y="1325880"/>
-            <a:ext cx="3474720" cy="1207008"/>
+            <a:off x="7543800" y="1325880"/>
+            <a:ext cx="3611880" cy="1261872"/>
           </a:xfrm>
           <a:prstGeom prst="roundRect">
             <a:avLst>
-              <a:gd name="adj" fmla="val 9091"/>
+              <a:gd name="adj" fmla="val 8696"/>
             </a:avLst>
           </a:prstGeom>
           <a:solidFill>
@@ -4153,8 +4153,8 @@
         </p:nvSpPr>
         <p:spPr>
           <a:xfrm>
-            <a:off x="7799832" y="1472184"/>
-            <a:ext cx="3145536" cy="256032"/>
+            <a:off x="7708392" y="1453896"/>
+            <a:ext cx="3282696" cy="228600"/>
           </a:xfrm>
           <a:prstGeom prst="rect">
             <a:avLst/>
@@ -4170,7 +4170,7 @@
               <a:buNone/>
             </a:pPr>
             <a:r>
-              <a:rPr lang="en-US" sz="1300" b="1" dirty="0">
+              <a:rPr lang="en-US" sz="1220" b="1" dirty="0">
                 <a:solidFill>
                   <a:srgbClr val="0068B7"/>
                 </a:solidFill>
@@ -4180,7 +4180,7 @@
               </a:rPr>
               <a:t>Public health lens</a:t>
             </a:r>
-            <a:endParaRPr lang="en-US" sz="1300" dirty="0"/>
+            <a:endParaRPr lang="en-US" sz="1220" dirty="0"/>
           </a:p>
         </p:txBody>
       </p:sp>
@@ -4192,8 +4192,8 @@
         </p:nvSpPr>
         <p:spPr>
           <a:xfrm>
-            <a:off x="7799832" y="1801368"/>
-            <a:ext cx="3145536" cy="640080"/>
+            <a:off x="7708392" y="1764792"/>
+            <a:ext cx="3282696" cy="749808"/>
           </a:xfrm>
           <a:prstGeom prst="rect">
             <a:avLst/>
@@ -4211,7 +4211,7 @@
               <a:buNone/>
             </a:pPr>
             <a:r>
-              <a:rPr lang="en-US" sz="1320" dirty="0">
+              <a:rPr lang="en-US" sz="1220" dirty="0">
                 <a:solidFill>
                   <a:srgbClr val="17364A"/>
                 </a:solidFill>
@@ -4221,7 +4221,7 @@
               </a:rPr>
               <a:t>NLP implementation begins with task definition.</a:t>
             </a:r>
-            <a:endParaRPr lang="en-US" sz="1320" dirty="0"/>
+            <a:endParaRPr lang="en-US" sz="1220" dirty="0"/>
           </a:p>
         </p:txBody>
       </p:sp>
@@ -4233,12 +4233,12 @@
         </p:nvSpPr>
         <p:spPr>
           <a:xfrm>
-            <a:off x="7635240" y="2670048"/>
-            <a:ext cx="3474720" cy="1377086"/>
+            <a:off x="7543800" y="2724912"/>
+            <a:ext cx="3611880" cy="1527048"/>
           </a:xfrm>
           <a:prstGeom prst="roundRect">
             <a:avLst>
-              <a:gd name="adj" fmla="val 7968"/>
+              <a:gd name="adj" fmla="val 7186"/>
             </a:avLst>
           </a:prstGeom>
           <a:solidFill>
@@ -4260,24 +4260,26 @@
         </p:nvSpPr>
         <p:spPr>
           <a:xfrm>
-            <a:off x="7799832" y="2798064"/>
-            <a:ext cx="3145536" cy="237744"/>
-          </a:xfrm>
-          <a:prstGeom prst="rect">
-            <a:avLst/>
-          </a:prstGeom>
-          <a:noFill/>
-          <a:ln/>
-        </p:spPr>
-        <p:txBody>
-          <a:bodyPr wrap="square" lIns="0" tIns="0" rIns="0" bIns="0" rtlCol="0" anchor="ctr"/>
-          <a:lstStyle/>
-          <a:p>
-            <a:pPr indent="0" marL="0">
-              <a:buNone/>
-            </a:pPr>
-            <a:r>
-              <a:rPr lang="en-US" sz="1250" b="1" dirty="0">
+            <a:off x="7708392" y="2852928"/>
+            <a:ext cx="3282696" cy="219456"/>
+          </a:xfrm>
+          <a:prstGeom prst="rect">
+            <a:avLst/>
+          </a:prstGeom>
+          <a:noFill/>
+          <a:ln/>
+        </p:spPr>
+        <p:txBody>
+          <a:bodyPr wrap="square" lIns="0" tIns="0" rIns="0" bIns="0" rtlCol="0" anchor="ctr">
+            <a:normAutofit/>
+          </a:bodyPr>
+          <a:lstStyle/>
+          <a:p>
+            <a:pPr indent="0" marL="0">
+              <a:buNone/>
+            </a:pPr>
+            <a:r>
+              <a:rPr lang="en-US" sz="1160" b="1" dirty="0">
                 <a:solidFill>
                   <a:srgbClr val="0068B7"/>
                 </a:solidFill>
@@ -4287,7 +4289,7 @@
               </a:rPr>
               <a:t>Trust cycle</a:t>
             </a:r>
-            <a:endParaRPr lang="en-US" sz="1250" dirty="0"/>
+            <a:endParaRPr lang="en-US" sz="1160" dirty="0"/>
           </a:p>
         </p:txBody>
       </p:sp>
@@ -4299,7 +4301,7 @@
         </p:nvSpPr>
         <p:spPr>
           <a:xfrm>
-            <a:off x="8763000" y="3351276"/>
+            <a:off x="8717280" y="3406140"/>
             <a:ext cx="164592" cy="0"/>
           </a:xfrm>
           <a:prstGeom prst="line">
@@ -4322,8 +4324,8 @@
         </p:nvSpPr>
         <p:spPr>
           <a:xfrm>
-            <a:off x="7872984" y="3200400"/>
-            <a:ext cx="890016" cy="301752"/>
+            <a:off x="7781544" y="3255264"/>
+            <a:ext cx="935736" cy="301752"/>
           </a:xfrm>
           <a:prstGeom prst="roundRect">
             <a:avLst>
@@ -4349,8 +4351,8 @@
         </p:nvSpPr>
         <p:spPr>
           <a:xfrm>
-            <a:off x="7909560" y="3273552"/>
-            <a:ext cx="816864" cy="146304"/>
+            <a:off x="7818120" y="3328416"/>
+            <a:ext cx="862584" cy="146304"/>
           </a:xfrm>
           <a:prstGeom prst="rect">
             <a:avLst/>
@@ -4390,7 +4392,7 @@
         </p:nvSpPr>
         <p:spPr>
           <a:xfrm>
-            <a:off x="9817608" y="3351276"/>
+            <a:off x="9817608" y="3406140"/>
             <a:ext cx="164592" cy="0"/>
           </a:xfrm>
           <a:prstGeom prst="line">
@@ -4413,8 +4415,8 @@
         </p:nvSpPr>
         <p:spPr>
           <a:xfrm>
-            <a:off x="8927592" y="3200400"/>
-            <a:ext cx="890016" cy="301752"/>
+            <a:off x="8881872" y="3255264"/>
+            <a:ext cx="935736" cy="301752"/>
           </a:xfrm>
           <a:prstGeom prst="roundRect">
             <a:avLst>
@@ -4440,8 +4442,8 @@
         </p:nvSpPr>
         <p:spPr>
           <a:xfrm>
-            <a:off x="8964168" y="3273552"/>
-            <a:ext cx="816864" cy="146304"/>
+            <a:off x="8918448" y="3328416"/>
+            <a:ext cx="862584" cy="146304"/>
           </a:xfrm>
           <a:prstGeom prst="rect">
             <a:avLst/>
@@ -4481,8 +4483,8 @@
         </p:nvSpPr>
         <p:spPr>
           <a:xfrm>
-            <a:off x="9982200" y="3200400"/>
-            <a:ext cx="890016" cy="301752"/>
+            <a:off x="9982200" y="3255264"/>
+            <a:ext cx="935736" cy="301752"/>
           </a:xfrm>
           <a:prstGeom prst="roundRect">
             <a:avLst>
@@ -4508,8 +4510,8 @@
         </p:nvSpPr>
         <p:spPr>
           <a:xfrm>
-            <a:off x="10018776" y="3273552"/>
-            <a:ext cx="816864" cy="146304"/>
+            <a:off x="10018776" y="3328416"/>
+            <a:ext cx="862584" cy="146304"/>
           </a:xfrm>
           <a:prstGeom prst="rect">
             <a:avLst/>
@@ -4549,8 +4551,8 @@
         </p:nvSpPr>
         <p:spPr>
           <a:xfrm>
-            <a:off x="7854696" y="3694176"/>
-            <a:ext cx="3035808" cy="206654"/>
+            <a:off x="7763256" y="3749040"/>
+            <a:ext cx="3172968" cy="356616"/>
           </a:xfrm>
           <a:prstGeom prst="rect">
             <a:avLst/>
@@ -4568,7 +4570,7 @@
               <a:buNone/>
             </a:pPr>
             <a:r>
-              <a:rPr lang="en-US" sz="1120" dirty="0">
+              <a:rPr lang="en-US" sz="1040" dirty="0">
                 <a:solidFill>
                   <a:srgbClr val="17364A"/>
                 </a:solidFill>
@@ -4576,9 +4578,9 @@
                 <a:ea typeface="Aptos" pitchFamily="34" charset="-122"/>
                 <a:cs typeface="Aptos" pitchFamily="34" charset="-120"/>
               </a:rPr>
-              <a:t>Communication and engagement are stronger when feedback changes the work and the department reports what.</a:t>
-            </a:r>
-            <a:endParaRPr lang="en-US" sz="1120" dirty="0"/>
+              <a:t>Communication and engagement are stronger when feedback changes the.</a:t>
+            </a:r>
+            <a:endParaRPr lang="en-US" sz="1040" dirty="0"/>
           </a:p>
         </p:txBody>
       </p:sp>
@@ -4590,12 +4592,12 @@
         </p:nvSpPr>
         <p:spPr>
           <a:xfrm>
-            <a:off x="7635240" y="4184294"/>
-            <a:ext cx="3474720" cy="1466698"/>
+            <a:off x="7543800" y="4389120"/>
+            <a:ext cx="3611880" cy="1261872"/>
           </a:xfrm>
           <a:prstGeom prst="roundRect">
             <a:avLst>
-              <a:gd name="adj" fmla="val 7481"/>
+              <a:gd name="adj" fmla="val 8696"/>
             </a:avLst>
           </a:prstGeom>
           <a:solidFill>
@@ -4617,8 +4619,8 @@
         </p:nvSpPr>
         <p:spPr>
           <a:xfrm>
-            <a:off x="7799832" y="4330598"/>
-            <a:ext cx="3145536" cy="256032"/>
+            <a:off x="7708392" y="4517136"/>
+            <a:ext cx="3282696" cy="228600"/>
           </a:xfrm>
           <a:prstGeom prst="rect">
             <a:avLst/>
@@ -4634,7 +4636,7 @@
               <a:buNone/>
             </a:pPr>
             <a:r>
-              <a:rPr lang="en-US" sz="1300" b="1" dirty="0">
+              <a:rPr lang="en-US" sz="1220" b="1" dirty="0">
                 <a:solidFill>
                   <a:srgbClr val="0068B7"/>
                 </a:solidFill>
@@ -4644,7 +4646,7 @@
               </a:rPr>
               <a:t>Engagement move</a:t>
             </a:r>
-            <a:endParaRPr lang="en-US" sz="1300" dirty="0"/>
+            <a:endParaRPr lang="en-US" sz="1220" dirty="0"/>
           </a:p>
         </p:txBody>
       </p:sp>
@@ -4656,8 +4658,8 @@
         </p:nvSpPr>
         <p:spPr>
           <a:xfrm>
-            <a:off x="7799832" y="4659782"/>
-            <a:ext cx="3145536" cy="899770"/>
+            <a:off x="7708392" y="4828032"/>
+            <a:ext cx="3282696" cy="749808"/>
           </a:xfrm>
           <a:prstGeom prst="rect">
             <a:avLst/>
@@ -4675,7 +4677,7 @@
               <a:buNone/>
             </a:pPr>
             <a:r>
-              <a:rPr lang="en-US" sz="1320" dirty="0">
+              <a:rPr lang="en-US" sz="1220" dirty="0">
                 <a:solidFill>
                   <a:srgbClr val="17364A"/>
                 </a:solidFill>
@@ -4683,9 +4685,9 @@
                 <a:ea typeface="Aptos" pitchFamily="34" charset="-122"/>
                 <a:cs typeface="Aptos" pitchFamily="34" charset="-120"/>
               </a:rPr>
-              <a:t>Use the concept to plan transparent communication, gather stakeholder input, protect trust, and make sure affected communities are considered early.</a:t>
-            </a:r>
-            <a:endParaRPr lang="en-US" sz="1320" dirty="0"/>
+              <a:t>Use the concept to plan transparent communication, gather stakeholder input,.</a:t>
+            </a:r>
+            <a:endParaRPr lang="en-US" sz="1220" dirty="0"/>
           </a:p>
         </p:txBody>
       </p:sp>
@@ -4976,8 +4978,8 @@
         </p:nvSpPr>
         <p:spPr>
           <a:xfrm>
-            <a:off x="868680" y="1508760"/>
-            <a:ext cx="6309360" cy="4160520"/>
+            <a:off x="822960" y="1463040"/>
+            <a:ext cx="6565392" cy="4343400"/>
           </a:xfrm>
           <a:prstGeom prst="rect">
             <a:avLst/>
@@ -4995,7 +4997,7 @@
               <a:buNone/>
             </a:pPr>
             <a:r>
-              <a:rPr lang="en-US" sz="2100" dirty="0">
+              <a:rPr lang="en-US" sz="1920" dirty="0">
                 <a:solidFill>
                   <a:srgbClr val="003A63"/>
                 </a:solidFill>
@@ -5005,14 +5007,14 @@
               </a:rPr>
               <a:t>• Unsupported summaries.</a:t>
             </a:r>
-            <a:endParaRPr lang="en-US" sz="2100" dirty="0"/>
-          </a:p>
-          <a:p>
-            <a:pPr indent="0" marL="0">
-              <a:buNone/>
-            </a:pPr>
-            <a:r>
-              <a:rPr lang="en-US" sz="2100" dirty="0">
+            <a:endParaRPr lang="en-US" sz="1920" dirty="0"/>
+          </a:p>
+          <a:p>
+            <a:pPr indent="0" marL="0">
+              <a:buNone/>
+            </a:pPr>
+            <a:r>
+              <a:rPr lang="en-US" sz="1920" dirty="0">
                 <a:solidFill>
                   <a:srgbClr val="003A63"/>
                 </a:solidFill>
@@ -5022,14 +5024,14 @@
               </a:rPr>
               <a:t>• NLP tools may omit, distort, or invent information.</a:t>
             </a:r>
-            <a:endParaRPr lang="en-US" sz="2100" dirty="0"/>
-          </a:p>
-          <a:p>
-            <a:pPr indent="0" marL="0">
-              <a:buNone/>
-            </a:pPr>
-            <a:r>
-              <a:rPr lang="en-US" sz="2100" dirty="0">
+            <a:endParaRPr lang="en-US" sz="1920" dirty="0"/>
+          </a:p>
+          <a:p>
+            <a:pPr indent="0" marL="0">
+              <a:buNone/>
+            </a:pPr>
+            <a:r>
+              <a:rPr lang="en-US" sz="1920" dirty="0">
                 <a:solidFill>
                   <a:srgbClr val="003A63"/>
                 </a:solidFill>
@@ -5037,9 +5039,9 @@
                 <a:ea typeface="Aptos" pitchFamily="34" charset="-122"/>
                 <a:cs typeface="Aptos" pitchFamily="34" charset="-120"/>
               </a:rPr>
-              <a:t>• Guardrails include source review, citations, factuality checks, and human approval.</a:t>
-            </a:r>
-            <a:endParaRPr lang="en-US" sz="2100" dirty="0"/>
+              <a:t>• Guardrails include source review, citations, factuality checks, and human.</a:t>
+            </a:r>
+            <a:endParaRPr lang="en-US" sz="1920" dirty="0"/>
           </a:p>
         </p:txBody>
       </p:sp>
@@ -5051,12 +5053,12 @@
         </p:nvSpPr>
         <p:spPr>
           <a:xfrm>
-            <a:off x="7635240" y="1325880"/>
-            <a:ext cx="3474720" cy="1207008"/>
+            <a:off x="7543800" y="1325880"/>
+            <a:ext cx="3611880" cy="1261872"/>
           </a:xfrm>
           <a:prstGeom prst="roundRect">
             <a:avLst>
-              <a:gd name="adj" fmla="val 9091"/>
+              <a:gd name="adj" fmla="val 8696"/>
             </a:avLst>
           </a:prstGeom>
           <a:solidFill>
@@ -5078,8 +5080,8 @@
         </p:nvSpPr>
         <p:spPr>
           <a:xfrm>
-            <a:off x="7799832" y="1472184"/>
-            <a:ext cx="3145536" cy="256032"/>
+            <a:off x="7708392" y="1453896"/>
+            <a:ext cx="3282696" cy="228600"/>
           </a:xfrm>
           <a:prstGeom prst="rect">
             <a:avLst/>
@@ -5095,7 +5097,7 @@
               <a:buNone/>
             </a:pPr>
             <a:r>
-              <a:rPr lang="en-US" sz="1300" b="1" dirty="0">
+              <a:rPr lang="en-US" sz="1220" b="1" dirty="0">
                 <a:solidFill>
                   <a:srgbClr val="0068B7"/>
                 </a:solidFill>
@@ -5105,7 +5107,7 @@
               </a:rPr>
               <a:t>Risk check</a:t>
             </a:r>
-            <a:endParaRPr lang="en-US" sz="1300" dirty="0"/>
+            <a:endParaRPr lang="en-US" sz="1220" dirty="0"/>
           </a:p>
         </p:txBody>
       </p:sp>
@@ -5117,8 +5119,8 @@
         </p:nvSpPr>
         <p:spPr>
           <a:xfrm>
-            <a:off x="7799832" y="1801368"/>
-            <a:ext cx="3145536" cy="640080"/>
+            <a:off x="7708392" y="1764792"/>
+            <a:ext cx="3282696" cy="749808"/>
           </a:xfrm>
           <a:prstGeom prst="rect">
             <a:avLst/>
@@ -5136,7 +5138,7 @@
               <a:buNone/>
             </a:pPr>
             <a:r>
-              <a:rPr lang="en-US" sz="1320" dirty="0">
+              <a:rPr lang="en-US" sz="1220" dirty="0">
                 <a:solidFill>
                   <a:srgbClr val="17364A"/>
                 </a:solidFill>
@@ -5146,7 +5148,7 @@
               </a:rPr>
               <a:t>Unsupported summaries.</a:t>
             </a:r>
-            <a:endParaRPr lang="en-US" sz="1320" dirty="0"/>
+            <a:endParaRPr lang="en-US" sz="1220" dirty="0"/>
           </a:p>
         </p:txBody>
       </p:sp>
@@ -5158,12 +5160,12 @@
         </p:nvSpPr>
         <p:spPr>
           <a:xfrm>
-            <a:off x="7635240" y="2670048"/>
-            <a:ext cx="3474720" cy="1536192"/>
+            <a:off x="7543800" y="2724912"/>
+            <a:ext cx="3611880" cy="1527048"/>
           </a:xfrm>
           <a:prstGeom prst="roundRect">
             <a:avLst>
-              <a:gd name="adj" fmla="val 7143"/>
+              <a:gd name="adj" fmla="val 7186"/>
             </a:avLst>
           </a:prstGeom>
           <a:solidFill>
@@ -5185,8 +5187,8 @@
         </p:nvSpPr>
         <p:spPr>
           <a:xfrm>
-            <a:off x="7799832" y="2816352"/>
-            <a:ext cx="3145536" cy="256032"/>
+            <a:off x="7708392" y="2852928"/>
+            <a:ext cx="3282696" cy="228600"/>
           </a:xfrm>
           <a:prstGeom prst="rect">
             <a:avLst/>
@@ -5202,7 +5204,7 @@
               <a:buNone/>
             </a:pPr>
             <a:r>
-              <a:rPr lang="en-US" sz="1300" b="1" dirty="0">
+              <a:rPr lang="en-US" sz="1220" b="1" dirty="0">
                 <a:solidFill>
                   <a:srgbClr val="0068B7"/>
                 </a:solidFill>
@@ -5212,7 +5214,7 @@
               </a:rPr>
               <a:t>Concept checkpoints</a:t>
             </a:r>
-            <a:endParaRPr lang="en-US" sz="1300" dirty="0"/>
+            <a:endParaRPr lang="en-US" sz="1220" dirty="0"/>
           </a:p>
         </p:txBody>
       </p:sp>
@@ -5224,8 +5226,8 @@
         </p:nvSpPr>
         <p:spPr>
           <a:xfrm>
-            <a:off x="7818120" y="3182112"/>
-            <a:ext cx="3090672" cy="877824"/>
+            <a:off x="7726680" y="3182112"/>
+            <a:ext cx="3227832" cy="960120"/>
           </a:xfrm>
           <a:prstGeom prst="rect">
             <a:avLst/>
@@ -5243,7 +5245,7 @@
               <a:buNone/>
             </a:pPr>
             <a:r>
-              <a:rPr lang="en-US" sz="1220" dirty="0">
+              <a:rPr lang="en-US" sz="1140" dirty="0">
                 <a:solidFill>
                   <a:srgbClr val="17364A"/>
                 </a:solidFill>
@@ -5253,14 +5255,14 @@
               </a:rPr>
               <a:t>Language and accessibility gaps.</a:t>
             </a:r>
-            <a:endParaRPr lang="en-US" sz="1220" dirty="0"/>
-          </a:p>
-          <a:p>
-            <a:pPr indent="0" marL="0">
-              <a:buNone/>
-            </a:pPr>
-            <a:r>
-              <a:rPr lang="en-US" sz="1220" dirty="0">
+            <a:endParaRPr lang="en-US" sz="1140" dirty="0"/>
+          </a:p>
+          <a:p>
+            <a:pPr indent="0" marL="0">
+              <a:buNone/>
+            </a:pPr>
+            <a:r>
+              <a:rPr lang="en-US" sz="1140" dirty="0">
                 <a:solidFill>
                   <a:srgbClr val="17364A"/>
                 </a:solidFill>
@@ -5268,16 +5270,16 @@
                 <a:ea typeface="Aptos" pitchFamily="34" charset="-122"/>
                 <a:cs typeface="Aptos" pitchFamily="34" charset="-120"/>
               </a:rPr>
-              <a:t>Models may perform differently across languages, dialects,.</a:t>
-            </a:r>
-            <a:endParaRPr lang="en-US" sz="1220" dirty="0"/>
-          </a:p>
-          <a:p>
-            <a:pPr indent="0" marL="0">
-              <a:buNone/>
-            </a:pPr>
-            <a:r>
-              <a:rPr lang="en-US" sz="1220" dirty="0">
+              <a:t>Models may perform differently across languages,.</a:t>
+            </a:r>
+            <a:endParaRPr lang="en-US" sz="1140" dirty="0"/>
+          </a:p>
+          <a:p>
+            <a:pPr indent="0" marL="0">
+              <a:buNone/>
+            </a:pPr>
+            <a:r>
+              <a:rPr lang="en-US" sz="1140" dirty="0">
                 <a:solidFill>
                   <a:srgbClr val="17364A"/>
                 </a:solidFill>
@@ -5285,9 +5287,9 @@
                 <a:ea typeface="Aptos" pitchFamily="34" charset="-122"/>
                 <a:cs typeface="Aptos" pitchFamily="34" charset="-120"/>
               </a:rPr>
-              <a:t>Guardrails include multilingual evaluation, accessibility review,.</a:t>
-            </a:r>
-            <a:endParaRPr lang="en-US" sz="1220" dirty="0"/>
+              <a:t>Guardrails include multilingual evaluation,.</a:t>
+            </a:r>
+            <a:endParaRPr lang="en-US" sz="1140" dirty="0"/>
           </a:p>
         </p:txBody>
       </p:sp>
@@ -5299,12 +5301,12 @@
         </p:nvSpPr>
         <p:spPr>
           <a:xfrm>
-            <a:off x="7635240" y="4343400"/>
-            <a:ext cx="3474720" cy="1255471"/>
+            <a:off x="7543800" y="4389120"/>
+            <a:ext cx="3611880" cy="1261872"/>
           </a:xfrm>
           <a:prstGeom prst="roundRect">
             <a:avLst>
-              <a:gd name="adj" fmla="val 8740"/>
+              <a:gd name="adj" fmla="val 8696"/>
             </a:avLst>
           </a:prstGeom>
           <a:solidFill>
@@ -5326,8 +5328,8 @@
         </p:nvSpPr>
         <p:spPr>
           <a:xfrm>
-            <a:off x="7799832" y="4489704"/>
-            <a:ext cx="3145536" cy="256032"/>
+            <a:off x="7708392" y="4517136"/>
+            <a:ext cx="3282696" cy="228600"/>
           </a:xfrm>
           <a:prstGeom prst="rect">
             <a:avLst/>
@@ -5343,7 +5345,7 @@
               <a:buNone/>
             </a:pPr>
             <a:r>
-              <a:rPr lang="en-US" sz="1300" b="1" dirty="0">
+              <a:rPr lang="en-US" sz="1220" b="1" dirty="0">
                 <a:solidFill>
                   <a:srgbClr val="0068B7"/>
                 </a:solidFill>
@@ -5353,7 +5355,7 @@
               </a:rPr>
               <a:t>Safeguard to plan</a:t>
             </a:r>
-            <a:endParaRPr lang="en-US" sz="1300" dirty="0"/>
+            <a:endParaRPr lang="en-US" sz="1220" dirty="0"/>
           </a:p>
         </p:txBody>
       </p:sp>
@@ -5365,8 +5367,8 @@
         </p:nvSpPr>
         <p:spPr>
           <a:xfrm>
-            <a:off x="7799832" y="4818888"/>
-            <a:ext cx="3145536" cy="688543"/>
+            <a:off x="7708392" y="4828032"/>
+            <a:ext cx="3282696" cy="749808"/>
           </a:xfrm>
           <a:prstGeom prst="rect">
             <a:avLst/>
@@ -5384,7 +5386,7 @@
               <a:buNone/>
             </a:pPr>
             <a:r>
-              <a:rPr lang="en-US" sz="1320" dirty="0">
+              <a:rPr lang="en-US" sz="1220" dirty="0">
                 <a:solidFill>
                   <a:srgbClr val="17364A"/>
                 </a:solidFill>
@@ -5392,9 +5394,9 @@
                 <a:ea typeface="Aptos" pitchFamily="34" charset="-122"/>
                 <a:cs typeface="Aptos" pitchFamily="34" charset="-120"/>
               </a:rPr>
-              <a:t>Identify what could go wrong, who could be affected, what safeguards are needed, and what evidence should be reviewed before use.</a:t>
-            </a:r>
-            <a:endParaRPr lang="en-US" sz="1320" dirty="0"/>
+              <a:t>Identify what could go wrong, who could be affected, what safeguards are needed,.</a:t>
+            </a:r>
+            <a:endParaRPr lang="en-US" sz="1220" dirty="0"/>
           </a:p>
         </p:txBody>
       </p:sp>
@@ -5685,8 +5687,8 @@
         </p:nvSpPr>
         <p:spPr>
           <a:xfrm>
-            <a:off x="868680" y="1508760"/>
-            <a:ext cx="6309360" cy="4160520"/>
+            <a:off x="822960" y="1463040"/>
+            <a:ext cx="6565392" cy="4343400"/>
           </a:xfrm>
           <a:prstGeom prst="rect">
             <a:avLst/>
@@ -5704,7 +5706,7 @@
               <a:buNone/>
             </a:pPr>
             <a:r>
-              <a:rPr lang="en-US" sz="2100" dirty="0">
+              <a:rPr lang="en-US" sz="1920" dirty="0">
                 <a:solidFill>
                   <a:srgbClr val="003A63"/>
                 </a:solidFill>
@@ -5714,14 +5716,14 @@
               </a:rPr>
               <a:t>• Misclassification.</a:t>
             </a:r>
-            <a:endParaRPr lang="en-US" sz="2100" dirty="0"/>
-          </a:p>
-          <a:p>
-            <a:pPr indent="0" marL="0">
-              <a:buNone/>
-            </a:pPr>
-            <a:r>
-              <a:rPr lang="en-US" sz="2100" dirty="0">
+            <a:endParaRPr lang="en-US" sz="1920" dirty="0"/>
+          </a:p>
+          <a:p>
+            <a:pPr indent="0" marL="0">
+              <a:buNone/>
+            </a:pPr>
+            <a:r>
+              <a:rPr lang="en-US" sz="1920" dirty="0">
                 <a:solidFill>
                   <a:srgbClr val="003A63"/>
                 </a:solidFill>
@@ -5731,14 +5733,14 @@
               </a:rPr>
               <a:t>• Incorrect labels can affect routing or priority.</a:t>
             </a:r>
-            <a:endParaRPr lang="en-US" sz="2100" dirty="0"/>
-          </a:p>
-          <a:p>
-            <a:pPr indent="0" marL="0">
-              <a:buNone/>
-            </a:pPr>
-            <a:r>
-              <a:rPr lang="en-US" sz="2100" dirty="0">
+            <a:endParaRPr lang="en-US" sz="1920" dirty="0"/>
+          </a:p>
+          <a:p>
+            <a:pPr indent="0" marL="0">
+              <a:buNone/>
+            </a:pPr>
+            <a:r>
+              <a:rPr lang="en-US" sz="1920" dirty="0">
                 <a:solidFill>
                   <a:srgbClr val="003A63"/>
                 </a:solidFill>
@@ -5746,9 +5748,9 @@
                 <a:ea typeface="Aptos" pitchFamily="34" charset="-122"/>
                 <a:cs typeface="Aptos" pitchFamily="34" charset="-120"/>
               </a:rPr>
-              <a:t>• Guardrails include validation, confidence thresholds, review queues, and monitoring of.</a:t>
-            </a:r>
-            <a:endParaRPr lang="en-US" sz="2100" dirty="0"/>
+              <a:t>• Guardrails include validation, confidence thresholds, review queues, and.</a:t>
+            </a:r>
+            <a:endParaRPr lang="en-US" sz="1920" dirty="0"/>
           </a:p>
         </p:txBody>
       </p:sp>
@@ -5760,12 +5762,12 @@
         </p:nvSpPr>
         <p:spPr>
           <a:xfrm>
-            <a:off x="7635240" y="1325880"/>
-            <a:ext cx="3474720" cy="1207008"/>
+            <a:off x="7543800" y="1325880"/>
+            <a:ext cx="3611880" cy="1261872"/>
           </a:xfrm>
           <a:prstGeom prst="roundRect">
             <a:avLst>
-              <a:gd name="adj" fmla="val 9091"/>
+              <a:gd name="adj" fmla="val 8696"/>
             </a:avLst>
           </a:prstGeom>
           <a:solidFill>
@@ -5787,8 +5789,8 @@
         </p:nvSpPr>
         <p:spPr>
           <a:xfrm>
-            <a:off x="7799832" y="1472184"/>
-            <a:ext cx="3145536" cy="256032"/>
+            <a:off x="7708392" y="1453896"/>
+            <a:ext cx="3282696" cy="228600"/>
           </a:xfrm>
           <a:prstGeom prst="rect">
             <a:avLst/>
@@ -5804,7 +5806,7 @@
               <a:buNone/>
             </a:pPr>
             <a:r>
-              <a:rPr lang="en-US" sz="1300" b="1" dirty="0">
+              <a:rPr lang="en-US" sz="1220" b="1" dirty="0">
                 <a:solidFill>
                   <a:srgbClr val="0068B7"/>
                 </a:solidFill>
@@ -5814,7 +5816,7 @@
               </a:rPr>
               <a:t>Risk check</a:t>
             </a:r>
-            <a:endParaRPr lang="en-US" sz="1300" dirty="0"/>
+            <a:endParaRPr lang="en-US" sz="1220" dirty="0"/>
           </a:p>
         </p:txBody>
       </p:sp>
@@ -5826,8 +5828,8 @@
         </p:nvSpPr>
         <p:spPr>
           <a:xfrm>
-            <a:off x="7799832" y="1801368"/>
-            <a:ext cx="3145536" cy="640080"/>
+            <a:off x="7708392" y="1764792"/>
+            <a:ext cx="3282696" cy="749808"/>
           </a:xfrm>
           <a:prstGeom prst="rect">
             <a:avLst/>
@@ -5845,7 +5847,7 @@
               <a:buNone/>
             </a:pPr>
             <a:r>
-              <a:rPr lang="en-US" sz="1320" dirty="0">
+              <a:rPr lang="en-US" sz="1220" dirty="0">
                 <a:solidFill>
                   <a:srgbClr val="17364A"/>
                 </a:solidFill>
@@ -5855,7 +5857,7 @@
               </a:rPr>
               <a:t>Misclassification.</a:t>
             </a:r>
-            <a:endParaRPr lang="en-US" sz="1320" dirty="0"/>
+            <a:endParaRPr lang="en-US" sz="1220" dirty="0"/>
           </a:p>
         </p:txBody>
       </p:sp>
@@ -5867,12 +5869,12 @@
         </p:nvSpPr>
         <p:spPr>
           <a:xfrm>
-            <a:off x="7635240" y="2670048"/>
-            <a:ext cx="3474720" cy="1536192"/>
+            <a:off x="7543800" y="2724912"/>
+            <a:ext cx="3611880" cy="1527048"/>
           </a:xfrm>
           <a:prstGeom prst="roundRect">
             <a:avLst>
-              <a:gd name="adj" fmla="val 7143"/>
+              <a:gd name="adj" fmla="val 7186"/>
             </a:avLst>
           </a:prstGeom>
           <a:solidFill>
@@ -5894,8 +5896,8 @@
         </p:nvSpPr>
         <p:spPr>
           <a:xfrm>
-            <a:off x="7799832" y="2816352"/>
-            <a:ext cx="3145536" cy="256032"/>
+            <a:off x="7708392" y="2852928"/>
+            <a:ext cx="3282696" cy="228600"/>
           </a:xfrm>
           <a:prstGeom prst="rect">
             <a:avLst/>
@@ -5911,7 +5913,7 @@
               <a:buNone/>
             </a:pPr>
             <a:r>
-              <a:rPr lang="en-US" sz="1300" b="1" dirty="0">
+              <a:rPr lang="en-US" sz="1220" b="1" dirty="0">
                 <a:solidFill>
                   <a:srgbClr val="0068B7"/>
                 </a:solidFill>
@@ -5921,7 +5923,7 @@
               </a:rPr>
               <a:t>Concept checkpoints</a:t>
             </a:r>
-            <a:endParaRPr lang="en-US" sz="1300" dirty="0"/>
+            <a:endParaRPr lang="en-US" sz="1220" dirty="0"/>
           </a:p>
         </p:txBody>
       </p:sp>
@@ -5933,8 +5935,8 @@
         </p:nvSpPr>
         <p:spPr>
           <a:xfrm>
-            <a:off x="7818120" y="3182112"/>
-            <a:ext cx="3090672" cy="877824"/>
+            <a:off x="7726680" y="3182112"/>
+            <a:ext cx="3227832" cy="960120"/>
           </a:xfrm>
           <a:prstGeom prst="rect">
             <a:avLst/>
@@ -5952,7 +5954,7 @@
               <a:buNone/>
             </a:pPr>
             <a:r>
-              <a:rPr lang="en-US" sz="1220" dirty="0">
+              <a:rPr lang="en-US" sz="1140" dirty="0">
                 <a:solidFill>
                   <a:srgbClr val="17364A"/>
                 </a:solidFill>
@@ -5962,14 +5964,14 @@
               </a:rPr>
               <a:t>Misclassification.</a:t>
             </a:r>
-            <a:endParaRPr lang="en-US" sz="1220" dirty="0"/>
-          </a:p>
-          <a:p>
-            <a:pPr indent="0" marL="0">
-              <a:buNone/>
-            </a:pPr>
-            <a:r>
-              <a:rPr lang="en-US" sz="1220" dirty="0">
+            <a:endParaRPr lang="en-US" sz="1140" dirty="0"/>
+          </a:p>
+          <a:p>
+            <a:pPr indent="0" marL="0">
+              <a:buNone/>
+            </a:pPr>
+            <a:r>
+              <a:rPr lang="en-US" sz="1140" dirty="0">
                 <a:solidFill>
                   <a:srgbClr val="17364A"/>
                 </a:solidFill>
@@ -5979,14 +5981,14 @@
               </a:rPr>
               <a:t>Incorrect labels can affect routing or priority.</a:t>
             </a:r>
-            <a:endParaRPr lang="en-US" sz="1220" dirty="0"/>
-          </a:p>
-          <a:p>
-            <a:pPr indent="0" marL="0">
-              <a:buNone/>
-            </a:pPr>
-            <a:r>
-              <a:rPr lang="en-US" sz="1220" dirty="0">
+            <a:endParaRPr lang="en-US" sz="1140" dirty="0"/>
+          </a:p>
+          <a:p>
+            <a:pPr indent="0" marL="0">
+              <a:buNone/>
+            </a:pPr>
+            <a:r>
+              <a:rPr lang="en-US" sz="1140" dirty="0">
                 <a:solidFill>
                   <a:srgbClr val="17364A"/>
                 </a:solidFill>
@@ -5994,9 +5996,9 @@
                 <a:ea typeface="Aptos" pitchFamily="34" charset="-122"/>
                 <a:cs typeface="Aptos" pitchFamily="34" charset="-120"/>
               </a:rPr>
-              <a:t>Guardrails include validation, confidence thresholds, review.</a:t>
-            </a:r>
-            <a:endParaRPr lang="en-US" sz="1220" dirty="0"/>
+              <a:t>Guardrails include validation, confidence.</a:t>
+            </a:r>
+            <a:endParaRPr lang="en-US" sz="1140" dirty="0"/>
           </a:p>
         </p:txBody>
       </p:sp>
@@ -6008,12 +6010,12 @@
         </p:nvSpPr>
         <p:spPr>
           <a:xfrm>
-            <a:off x="7635240" y="4343400"/>
-            <a:ext cx="3474720" cy="1255471"/>
+            <a:off x="7543800" y="4389120"/>
+            <a:ext cx="3611880" cy="1261872"/>
           </a:xfrm>
           <a:prstGeom prst="roundRect">
             <a:avLst>
-              <a:gd name="adj" fmla="val 8740"/>
+              <a:gd name="adj" fmla="val 8696"/>
             </a:avLst>
           </a:prstGeom>
           <a:solidFill>
@@ -6035,8 +6037,8 @@
         </p:nvSpPr>
         <p:spPr>
           <a:xfrm>
-            <a:off x="7799832" y="4489704"/>
-            <a:ext cx="3145536" cy="256032"/>
+            <a:off x="7708392" y="4517136"/>
+            <a:ext cx="3282696" cy="228600"/>
           </a:xfrm>
           <a:prstGeom prst="rect">
             <a:avLst/>
@@ -6052,7 +6054,7 @@
               <a:buNone/>
             </a:pPr>
             <a:r>
-              <a:rPr lang="en-US" sz="1300" b="1" dirty="0">
+              <a:rPr lang="en-US" sz="1220" b="1" dirty="0">
                 <a:solidFill>
                   <a:srgbClr val="0068B7"/>
                 </a:solidFill>
@@ -6062,7 +6064,7 @@
               </a:rPr>
               <a:t>Safeguard to plan</a:t>
             </a:r>
-            <a:endParaRPr lang="en-US" sz="1300" dirty="0"/>
+            <a:endParaRPr lang="en-US" sz="1220" dirty="0"/>
           </a:p>
         </p:txBody>
       </p:sp>
@@ -6074,8 +6076,8 @@
         </p:nvSpPr>
         <p:spPr>
           <a:xfrm>
-            <a:off x="7799832" y="4818888"/>
-            <a:ext cx="3145536" cy="688543"/>
+            <a:off x="7708392" y="4828032"/>
+            <a:ext cx="3282696" cy="749808"/>
           </a:xfrm>
           <a:prstGeom prst="rect">
             <a:avLst/>
@@ -6093,7 +6095,7 @@
               <a:buNone/>
             </a:pPr>
             <a:r>
-              <a:rPr lang="en-US" sz="1320" dirty="0">
+              <a:rPr lang="en-US" sz="1220" dirty="0">
                 <a:solidFill>
                   <a:srgbClr val="17364A"/>
                 </a:solidFill>
@@ -6101,9 +6103,9 @@
                 <a:ea typeface="Aptos" pitchFamily="34" charset="-122"/>
                 <a:cs typeface="Aptos" pitchFamily="34" charset="-120"/>
               </a:rPr>
-              <a:t>Identify what could go wrong, who could be affected, what safeguards are needed, and what evidence should be reviewed before use.</a:t>
-            </a:r>
-            <a:endParaRPr lang="en-US" sz="1320" dirty="0"/>
+              <a:t>Identify what could go wrong, who could be affected, what safeguards are needed,.</a:t>
+            </a:r>
+            <a:endParaRPr lang="en-US" sz="1220" dirty="0"/>
           </a:p>
         </p:txBody>
       </p:sp>
@@ -6394,8 +6396,8 @@
         </p:nvSpPr>
         <p:spPr>
           <a:xfrm>
-            <a:off x="868680" y="1508760"/>
-            <a:ext cx="6309360" cy="4160520"/>
+            <a:off x="822960" y="1463040"/>
+            <a:ext cx="6565392" cy="4343400"/>
           </a:xfrm>
           <a:prstGeom prst="rect">
             <a:avLst/>
@@ -6413,7 +6415,7 @@
               <a:buNone/>
             </a:pPr>
             <a:r>
-              <a:rPr lang="en-US" sz="2100" dirty="0">
+              <a:rPr lang="en-US" sz="1920" dirty="0">
                 <a:solidFill>
                   <a:srgbClr val="003A63"/>
                 </a:solidFill>
@@ -6421,16 +6423,16 @@
                 <a:ea typeface="Aptos" pitchFamily="34" charset="-122"/>
                 <a:cs typeface="Aptos" pitchFamily="34" charset="-120"/>
               </a:rPr>
-              <a:t>• Generative AI is often used for summarization, drafting, and question answering, but outputs.</a:t>
-            </a:r>
-            <a:endParaRPr lang="en-US" sz="2100" dirty="0"/>
-          </a:p>
-          <a:p>
-            <a:pPr indent="0" marL="0">
-              <a:buNone/>
-            </a:pPr>
-            <a:r>
-              <a:rPr lang="en-US" sz="2100" dirty="0">
+              <a:t>• Generative AI is often used for summarization, drafting, and question.</a:t>
+            </a:r>
+            <a:endParaRPr lang="en-US" sz="1920" dirty="0"/>
+          </a:p>
+          <a:p>
+            <a:pPr indent="0" marL="0">
+              <a:buNone/>
+            </a:pPr>
+            <a:r>
+              <a:rPr lang="en-US" sz="1920" dirty="0">
                 <a:solidFill>
                   <a:srgbClr val="003A63"/>
                 </a:solidFill>
@@ -6438,16 +6440,16 @@
                 <a:ea typeface="Aptos" pitchFamily="34" charset="-122"/>
                 <a:cs typeface="Aptos" pitchFamily="34" charset="-120"/>
               </a:rPr>
-              <a:t>• Predictive analytics may use NLP-derived features, so extraction quality affects model.</a:t>
-            </a:r>
-            <a:endParaRPr lang="en-US" sz="2100" dirty="0"/>
-          </a:p>
-          <a:p>
-            <a:pPr indent="0" marL="0">
-              <a:buNone/>
-            </a:pPr>
-            <a:r>
-              <a:rPr lang="en-US" sz="2100" dirty="0">
+              <a:t>• Predictive analytics may use NLP-derived features, so extraction quality.</a:t>
+            </a:r>
+            <a:endParaRPr lang="en-US" sz="1920" dirty="0"/>
+          </a:p>
+          <a:p>
+            <a:pPr indent="0" marL="0">
+              <a:buNone/>
+            </a:pPr>
+            <a:r>
+              <a:rPr lang="en-US" sz="1920" dirty="0">
                 <a:solidFill>
                   <a:srgbClr val="003A63"/>
                 </a:solidFill>
@@ -6455,9 +6457,9 @@
                 <a:ea typeface="Aptos" pitchFamily="34" charset="-122"/>
                 <a:cs typeface="Aptos" pitchFamily="34" charset="-120"/>
               </a:rPr>
-              <a:t>• RAG systems use NLP to retrieve and summarize documents, which requires document governance.</a:t>
-            </a:r>
-            <a:endParaRPr lang="en-US" sz="2100" dirty="0"/>
+              <a:t>• RAG systems use NLP to retrieve and summarize documents, which requires.</a:t>
+            </a:r>
+            <a:endParaRPr lang="en-US" sz="1920" dirty="0"/>
           </a:p>
         </p:txBody>
       </p:sp>
@@ -6469,12 +6471,12 @@
         </p:nvSpPr>
         <p:spPr>
           <a:xfrm>
-            <a:off x="7635240" y="1325880"/>
-            <a:ext cx="3474720" cy="1255471"/>
+            <a:off x="7543800" y="1325880"/>
+            <a:ext cx="3611880" cy="1261872"/>
           </a:xfrm>
           <a:prstGeom prst="roundRect">
             <a:avLst>
-              <a:gd name="adj" fmla="val 8740"/>
+              <a:gd name="adj" fmla="val 8696"/>
             </a:avLst>
           </a:prstGeom>
           <a:solidFill>
@@ -6496,8 +6498,8 @@
         </p:nvSpPr>
         <p:spPr>
           <a:xfrm>
-            <a:off x="7799832" y="1472184"/>
-            <a:ext cx="3145536" cy="256032"/>
+            <a:off x="7708392" y="1453896"/>
+            <a:ext cx="3282696" cy="228600"/>
           </a:xfrm>
           <a:prstGeom prst="rect">
             <a:avLst/>
@@ -6513,7 +6515,7 @@
               <a:buNone/>
             </a:pPr>
             <a:r>
-              <a:rPr lang="en-US" sz="1300" b="1" dirty="0">
+              <a:rPr lang="en-US" sz="1220" b="1" dirty="0">
                 <a:solidFill>
                   <a:srgbClr val="0068B7"/>
                 </a:solidFill>
@@ -6523,7 +6525,7 @@
               </a:rPr>
               <a:t>Implementation cue</a:t>
             </a:r>
-            <a:endParaRPr lang="en-US" sz="1300" dirty="0"/>
+            <a:endParaRPr lang="en-US" sz="1220" dirty="0"/>
           </a:p>
         </p:txBody>
       </p:sp>
@@ -6535,8 +6537,8 @@
         </p:nvSpPr>
         <p:spPr>
           <a:xfrm>
-            <a:off x="7799832" y="1801368"/>
-            <a:ext cx="3145536" cy="688543"/>
+            <a:off x="7708392" y="1764792"/>
+            <a:ext cx="3282696" cy="749808"/>
           </a:xfrm>
           <a:prstGeom prst="rect">
             <a:avLst/>
@@ -6554,7 +6556,7 @@
               <a:buNone/>
             </a:pPr>
             <a:r>
-              <a:rPr lang="en-US" sz="1320" dirty="0">
+              <a:rPr lang="en-US" sz="1220" dirty="0">
                 <a:solidFill>
                   <a:srgbClr val="17364A"/>
                 </a:solidFill>
@@ -6562,9 +6564,9 @@
                 <a:ea typeface="Aptos" pitchFamily="34" charset="-122"/>
                 <a:cs typeface="Aptos" pitchFamily="34" charset="-120"/>
               </a:rPr>
-              <a:t>Generative AI is often used for summarization, drafting, and question answering, but outputs must be.</a:t>
-            </a:r>
-            <a:endParaRPr lang="en-US" sz="1320" dirty="0"/>
+              <a:t>Generative AI is often used for summarization, drafting, and question answering,.</a:t>
+            </a:r>
+            <a:endParaRPr lang="en-US" sz="1220" dirty="0"/>
           </a:p>
         </p:txBody>
       </p:sp>
@@ -6576,12 +6578,12 @@
         </p:nvSpPr>
         <p:spPr>
           <a:xfrm>
-            <a:off x="7635240" y="2718511"/>
-            <a:ext cx="3474720" cy="1328623"/>
+            <a:off x="7543800" y="2724912"/>
+            <a:ext cx="3611880" cy="1527048"/>
           </a:xfrm>
           <a:prstGeom prst="roundRect">
             <a:avLst>
-              <a:gd name="adj" fmla="val 8259"/>
+              <a:gd name="adj" fmla="val 7186"/>
             </a:avLst>
           </a:prstGeom>
           <a:solidFill>
@@ -6603,8 +6605,8 @@
         </p:nvSpPr>
         <p:spPr>
           <a:xfrm>
-            <a:off x="7799832" y="2864815"/>
-            <a:ext cx="3145536" cy="256032"/>
+            <a:off x="7708392" y="2852928"/>
+            <a:ext cx="3282696" cy="228600"/>
           </a:xfrm>
           <a:prstGeom prst="rect">
             <a:avLst/>
@@ -6620,7 +6622,7 @@
               <a:buNone/>
             </a:pPr>
             <a:r>
-              <a:rPr lang="en-US" sz="1300" b="1" dirty="0">
+              <a:rPr lang="en-US" sz="1220" b="1" dirty="0">
                 <a:solidFill>
                   <a:srgbClr val="0068B7"/>
                 </a:solidFill>
@@ -6630,7 +6632,7 @@
               </a:rPr>
               <a:t>Concept checkpoints</a:t>
             </a:r>
-            <a:endParaRPr lang="en-US" sz="1300" dirty="0"/>
+            <a:endParaRPr lang="en-US" sz="1220" dirty="0"/>
           </a:p>
         </p:txBody>
       </p:sp>
@@ -6642,8 +6644,8 @@
         </p:nvSpPr>
         <p:spPr>
           <a:xfrm>
-            <a:off x="7818120" y="3230575"/>
-            <a:ext cx="3090672" cy="670255"/>
+            <a:off x="7726680" y="3182112"/>
+            <a:ext cx="3227832" cy="960120"/>
           </a:xfrm>
           <a:prstGeom prst="rect">
             <a:avLst/>
@@ -6661,7 +6663,7 @@
               <a:buNone/>
             </a:pPr>
             <a:r>
-              <a:rPr lang="en-US" sz="1220" dirty="0">
+              <a:rPr lang="en-US" sz="1140" dirty="0">
                 <a:solidFill>
                   <a:srgbClr val="17364A"/>
                 </a:solidFill>
@@ -6669,16 +6671,16 @@
                 <a:ea typeface="Aptos" pitchFamily="34" charset="-122"/>
                 <a:cs typeface="Aptos" pitchFamily="34" charset="-120"/>
               </a:rPr>
-              <a:t>Generative AI is often used for summarization, drafting, and.</a:t>
-            </a:r>
-            <a:endParaRPr lang="en-US" sz="1220" dirty="0"/>
-          </a:p>
-          <a:p>
-            <a:pPr indent="0" marL="0">
-              <a:buNone/>
-            </a:pPr>
-            <a:r>
-              <a:rPr lang="en-US" sz="1220" dirty="0">
+              <a:t>Generative AI is often used for summarization,.</a:t>
+            </a:r>
+            <a:endParaRPr lang="en-US" sz="1140" dirty="0"/>
+          </a:p>
+          <a:p>
+            <a:pPr indent="0" marL="0">
+              <a:buNone/>
+            </a:pPr>
+            <a:r>
+              <a:rPr lang="en-US" sz="1140" dirty="0">
                 <a:solidFill>
                   <a:srgbClr val="17364A"/>
                 </a:solidFill>
@@ -6686,16 +6688,16 @@
                 <a:ea typeface="Aptos" pitchFamily="34" charset="-122"/>
                 <a:cs typeface="Aptos" pitchFamily="34" charset="-120"/>
               </a:rPr>
-              <a:t>RAG systems use NLP to retrieve and summarize documents, which.</a:t>
-            </a:r>
-            <a:endParaRPr lang="en-US" sz="1220" dirty="0"/>
-          </a:p>
-          <a:p>
-            <a:pPr indent="0" marL="0">
-              <a:buNone/>
-            </a:pPr>
-            <a:r>
-              <a:rPr lang="en-US" sz="1220" dirty="0">
+              <a:t>RAG systems use NLP to retrieve and summarize.</a:t>
+            </a:r>
+            <a:endParaRPr lang="en-US" sz="1140" dirty="0"/>
+          </a:p>
+          <a:p>
+            <a:pPr indent="0" marL="0">
+              <a:buNone/>
+            </a:pPr>
+            <a:r>
+              <a:rPr lang="en-US" sz="1140" dirty="0">
                 <a:solidFill>
                   <a:srgbClr val="17364A"/>
                 </a:solidFill>
@@ -6703,9 +6705,9 @@
                 <a:ea typeface="Aptos" pitchFamily="34" charset="-122"/>
                 <a:cs typeface="Aptos" pitchFamily="34" charset="-120"/>
               </a:rPr>
-              <a:t>Agentic AI using NLP to trigger actions should require clear.</a:t>
-            </a:r>
-            <a:endParaRPr lang="en-US" sz="1220" dirty="0"/>
+              <a:t>Agentic AI using NLP to trigger actions should.</a:t>
+            </a:r>
+            <a:endParaRPr lang="en-US" sz="1140" dirty="0"/>
           </a:p>
         </p:txBody>
       </p:sp>
@@ -6717,12 +6719,12 @@
         </p:nvSpPr>
         <p:spPr>
           <a:xfrm>
-            <a:off x="7635240" y="4184294"/>
-            <a:ext cx="3474720" cy="1466698"/>
+            <a:off x="7543800" y="4389120"/>
+            <a:ext cx="3611880" cy="1261872"/>
           </a:xfrm>
           <a:prstGeom prst="roundRect">
             <a:avLst>
-              <a:gd name="adj" fmla="val 7481"/>
+              <a:gd name="adj" fmla="val 8696"/>
             </a:avLst>
           </a:prstGeom>
           <a:solidFill>
@@ -6744,8 +6746,8 @@
         </p:nvSpPr>
         <p:spPr>
           <a:xfrm>
-            <a:off x="7799832" y="4330598"/>
-            <a:ext cx="3145536" cy="256032"/>
+            <a:off x="7708392" y="4517136"/>
+            <a:ext cx="3282696" cy="228600"/>
           </a:xfrm>
           <a:prstGeom prst="rect">
             <a:avLst/>
@@ -6761,7 +6763,7 @@
               <a:buNone/>
             </a:pPr>
             <a:r>
-              <a:rPr lang="en-US" sz="1300" b="1" dirty="0">
+              <a:rPr lang="en-US" sz="1220" b="1" dirty="0">
                 <a:solidFill>
                   <a:srgbClr val="0068B7"/>
                 </a:solidFill>
@@ -6771,7 +6773,7 @@
               </a:rPr>
               <a:t>Next action</a:t>
             </a:r>
-            <a:endParaRPr lang="en-US" sz="1300" dirty="0"/>
+            <a:endParaRPr lang="en-US" sz="1220" dirty="0"/>
           </a:p>
         </p:txBody>
       </p:sp>
@@ -6783,8 +6785,8 @@
         </p:nvSpPr>
         <p:spPr>
           <a:xfrm>
-            <a:off x="7799832" y="4659782"/>
-            <a:ext cx="3145536" cy="899770"/>
+            <a:off x="7708392" y="4828032"/>
+            <a:ext cx="3282696" cy="749808"/>
           </a:xfrm>
           <a:prstGeom prst="rect">
             <a:avLst/>
@@ -6802,7 +6804,7 @@
               <a:buNone/>
             </a:pPr>
             <a:r>
-              <a:rPr lang="en-US" sz="1320" dirty="0">
+              <a:rPr lang="en-US" sz="1220" dirty="0">
                 <a:solidFill>
                   <a:srgbClr val="17364A"/>
                 </a:solidFill>
@@ -6810,9 +6812,9 @@
                 <a:ea typeface="Aptos" pitchFamily="34" charset="-122"/>
                 <a:cs typeface="Aptos" pitchFamily="34" charset="-120"/>
               </a:rPr>
-              <a:t>Use the concept to clarify workflow changes, dependencies, staffing, procurement requirements, training needs, and implementation checkpoints.</a:t>
-            </a:r>
-            <a:endParaRPr lang="en-US" sz="1320" dirty="0"/>
+              <a:t>Use the concept to clarify workflow changes, dependencies, staffing, procurement.</a:t>
+            </a:r>
+            <a:endParaRPr lang="en-US" sz="1220" dirty="0"/>
           </a:p>
         </p:txBody>
       </p:sp>
@@ -7103,8 +7105,8 @@
         </p:nvSpPr>
         <p:spPr>
           <a:xfrm>
-            <a:off x="868680" y="1508760"/>
-            <a:ext cx="6309360" cy="4160520"/>
+            <a:off x="822960" y="1463040"/>
+            <a:ext cx="6565392" cy="4343400"/>
           </a:xfrm>
           <a:prstGeom prst="rect">
             <a:avLst/>
@@ -7122,7 +7124,7 @@
               <a:buNone/>
             </a:pPr>
             <a:r>
-              <a:rPr lang="en-US" sz="2100" dirty="0">
+              <a:rPr lang="en-US" sz="1920" dirty="0">
                 <a:solidFill>
                   <a:srgbClr val="003A63"/>
                 </a:solidFill>
@@ -7132,14 +7134,14 @@
               </a:rPr>
               <a:t>• Which public health workflows involve large volumes of free text?</a:t>
             </a:r>
-            <a:endParaRPr lang="en-US" sz="2100" dirty="0"/>
-          </a:p>
-          <a:p>
-            <a:pPr indent="0" marL="0">
-              <a:buNone/>
-            </a:pPr>
-            <a:r>
-              <a:rPr lang="en-US" sz="2100" dirty="0">
+            <a:endParaRPr lang="en-US" sz="1920" dirty="0"/>
+          </a:p>
+          <a:p>
+            <a:pPr indent="0" marL="0">
+              <a:buNone/>
+            </a:pPr>
+            <a:r>
+              <a:rPr lang="en-US" sz="1920" dirty="0">
                 <a:solidFill>
                   <a:srgbClr val="003A63"/>
                 </a:solidFill>
@@ -7147,16 +7149,16 @@
                 <a:ea typeface="Aptos" pitchFamily="34" charset="-122"/>
                 <a:cs typeface="Aptos" pitchFamily="34" charset="-120"/>
               </a:rPr>
-              <a:t>• What task would NLP support: extraction, classification, summarization, translation, or topic.</a:t>
-            </a:r>
-            <a:endParaRPr lang="en-US" sz="2100" dirty="0"/>
-          </a:p>
-          <a:p>
-            <a:pPr indent="0" marL="0">
-              <a:buNone/>
-            </a:pPr>
-            <a:r>
-              <a:rPr lang="en-US" sz="2100" dirty="0">
+              <a:t>• What task would NLP support: extraction, classification, summarization,.</a:t>
+            </a:r>
+            <a:endParaRPr lang="en-US" sz="1920" dirty="0"/>
+          </a:p>
+          <a:p>
+            <a:pPr indent="0" marL="0">
+              <a:buNone/>
+            </a:pPr>
+            <a:r>
+              <a:rPr lang="en-US" sz="1920" dirty="0">
                 <a:solidFill>
                   <a:srgbClr val="003A63"/>
                 </a:solidFill>
@@ -7166,7 +7168,7 @@
               </a:rPr>
               <a:t>• What errors would be most harmful?</a:t>
             </a:r>
-            <a:endParaRPr lang="en-US" sz="2100" dirty="0"/>
+            <a:endParaRPr lang="en-US" sz="1920" dirty="0"/>
           </a:p>
         </p:txBody>
       </p:sp>
@@ -7178,12 +7180,12 @@
         </p:nvSpPr>
         <p:spPr>
           <a:xfrm>
-            <a:off x="7635240" y="1325880"/>
-            <a:ext cx="3474720" cy="1207008"/>
+            <a:off x="7543800" y="1325880"/>
+            <a:ext cx="3611880" cy="1261872"/>
           </a:xfrm>
           <a:prstGeom prst="roundRect">
             <a:avLst>
-              <a:gd name="adj" fmla="val 9091"/>
+              <a:gd name="adj" fmla="val 8696"/>
             </a:avLst>
           </a:prstGeom>
           <a:solidFill>
@@ -7205,8 +7207,8 @@
         </p:nvSpPr>
         <p:spPr>
           <a:xfrm>
-            <a:off x="7799832" y="1472184"/>
-            <a:ext cx="3145536" cy="256032"/>
+            <a:off x="7708392" y="1453896"/>
+            <a:ext cx="3282696" cy="228600"/>
           </a:xfrm>
           <a:prstGeom prst="rect">
             <a:avLst/>
@@ -7222,7 +7224,7 @@
               <a:buNone/>
             </a:pPr>
             <a:r>
-              <a:rPr lang="en-US" sz="1300" b="1" dirty="0">
+              <a:rPr lang="en-US" sz="1220" b="1" dirty="0">
                 <a:solidFill>
                   <a:srgbClr val="0068B7"/>
                 </a:solidFill>
@@ -7232,7 +7234,7 @@
               </a:rPr>
               <a:t>Public health lens</a:t>
             </a:r>
-            <a:endParaRPr lang="en-US" sz="1300" dirty="0"/>
+            <a:endParaRPr lang="en-US" sz="1220" dirty="0"/>
           </a:p>
         </p:txBody>
       </p:sp>
@@ -7244,8 +7246,8 @@
         </p:nvSpPr>
         <p:spPr>
           <a:xfrm>
-            <a:off x="7799832" y="1801368"/>
-            <a:ext cx="3145536" cy="640080"/>
+            <a:off x="7708392" y="1764792"/>
+            <a:ext cx="3282696" cy="749808"/>
           </a:xfrm>
           <a:prstGeom prst="rect">
             <a:avLst/>
@@ -7263,7 +7265,7 @@
               <a:buNone/>
             </a:pPr>
             <a:r>
-              <a:rPr lang="en-US" sz="1320" dirty="0">
+              <a:rPr lang="en-US" sz="1220" dirty="0">
                 <a:solidFill>
                   <a:srgbClr val="17364A"/>
                 </a:solidFill>
@@ -7273,7 +7275,7 @@
               </a:rPr>
               <a:t>Which public health workflows involve large volumes of free text?</a:t>
             </a:r>
-            <a:endParaRPr lang="en-US" sz="1320" dirty="0"/>
+            <a:endParaRPr lang="en-US" sz="1220" dirty="0"/>
           </a:p>
         </p:txBody>
       </p:sp>
@@ -7285,12 +7287,12 @@
         </p:nvSpPr>
         <p:spPr>
           <a:xfrm>
-            <a:off x="7635240" y="2670048"/>
-            <a:ext cx="3474720" cy="1377086"/>
+            <a:off x="7543800" y="2724912"/>
+            <a:ext cx="3611880" cy="1527048"/>
           </a:xfrm>
           <a:prstGeom prst="roundRect">
             <a:avLst>
-              <a:gd name="adj" fmla="val 7968"/>
+              <a:gd name="adj" fmla="val 7186"/>
             </a:avLst>
           </a:prstGeom>
           <a:solidFill>
@@ -7312,8 +7314,8 @@
         </p:nvSpPr>
         <p:spPr>
           <a:xfrm>
-            <a:off x="7799832" y="2816352"/>
-            <a:ext cx="3145536" cy="256032"/>
+            <a:off x="7708392" y="2852928"/>
+            <a:ext cx="3282696" cy="228600"/>
           </a:xfrm>
           <a:prstGeom prst="rect">
             <a:avLst/>
@@ -7329,7 +7331,7 @@
               <a:buNone/>
             </a:pPr>
             <a:r>
-              <a:rPr lang="en-US" sz="1300" b="1" dirty="0">
+              <a:rPr lang="en-US" sz="1220" b="1" dirty="0">
                 <a:solidFill>
                   <a:srgbClr val="0068B7"/>
                 </a:solidFill>
@@ -7339,7 +7341,7 @@
               </a:rPr>
               <a:t>Concept checkpoints</a:t>
             </a:r>
-            <a:endParaRPr lang="en-US" sz="1300" dirty="0"/>
+            <a:endParaRPr lang="en-US" sz="1220" dirty="0"/>
           </a:p>
         </p:txBody>
       </p:sp>
@@ -7351,8 +7353,8 @@
         </p:nvSpPr>
         <p:spPr>
           <a:xfrm>
-            <a:off x="7818120" y="3182112"/>
-            <a:ext cx="3090672" cy="718718"/>
+            <a:off x="7726680" y="3182112"/>
+            <a:ext cx="3227832" cy="960120"/>
           </a:xfrm>
           <a:prstGeom prst="rect">
             <a:avLst/>
@@ -7370,7 +7372,7 @@
               <a:buNone/>
             </a:pPr>
             <a:r>
-              <a:rPr lang="en-US" sz="1220" dirty="0">
+              <a:rPr lang="en-US" sz="1140" dirty="0">
                 <a:solidFill>
                   <a:srgbClr val="17364A"/>
                 </a:solidFill>
@@ -7378,16 +7380,16 @@
                 <a:ea typeface="Aptos" pitchFamily="34" charset="-122"/>
                 <a:cs typeface="Aptos" pitchFamily="34" charset="-120"/>
               </a:rPr>
-              <a:t>Which public health workflows involve large volumes of free text?</a:t>
-            </a:r>
-            <a:endParaRPr lang="en-US" sz="1220" dirty="0"/>
-          </a:p>
-          <a:p>
-            <a:pPr indent="0" marL="0">
-              <a:buNone/>
-            </a:pPr>
-            <a:r>
-              <a:rPr lang="en-US" sz="1220" dirty="0">
+              <a:t>Which public health workflows involve large.</a:t>
+            </a:r>
+            <a:endParaRPr lang="en-US" sz="1140" dirty="0"/>
+          </a:p>
+          <a:p>
+            <a:pPr indent="0" marL="0">
+              <a:buNone/>
+            </a:pPr>
+            <a:r>
+              <a:rPr lang="en-US" sz="1140" dirty="0">
                 <a:solidFill>
                   <a:srgbClr val="17364A"/>
                 </a:solidFill>
@@ -7395,16 +7397,16 @@
                 <a:ea typeface="Aptos" pitchFamily="34" charset="-122"/>
                 <a:cs typeface="Aptos" pitchFamily="34" charset="-120"/>
               </a:rPr>
-              <a:t>What task would NLP support: extraction, classification,.</a:t>
-            </a:r>
-            <a:endParaRPr lang="en-US" sz="1220" dirty="0"/>
-          </a:p>
-          <a:p>
-            <a:pPr indent="0" marL="0">
-              <a:buNone/>
-            </a:pPr>
-            <a:r>
-              <a:rPr lang="en-US" sz="1220" dirty="0">
+              <a:t>What task would NLP support: extraction,.</a:t>
+            </a:r>
+            <a:endParaRPr lang="en-US" sz="1140" dirty="0"/>
+          </a:p>
+          <a:p>
+            <a:pPr indent="0" marL="0">
+              <a:buNone/>
+            </a:pPr>
+            <a:r>
+              <a:rPr lang="en-US" sz="1140" dirty="0">
                 <a:solidFill>
                   <a:srgbClr val="17364A"/>
                 </a:solidFill>
@@ -7414,7 +7416,7 @@
               </a:rPr>
               <a:t>What errors would be most harmful?</a:t>
             </a:r>
-            <a:endParaRPr lang="en-US" sz="1220" dirty="0"/>
+            <a:endParaRPr lang="en-US" sz="1140" dirty="0"/>
           </a:p>
         </p:txBody>
       </p:sp>
@@ -7426,12 +7428,12 @@
         </p:nvSpPr>
         <p:spPr>
           <a:xfrm>
-            <a:off x="7635240" y="4184294"/>
-            <a:ext cx="3474720" cy="1466698"/>
+            <a:off x="7543800" y="4389120"/>
+            <a:ext cx="3611880" cy="1261872"/>
           </a:xfrm>
           <a:prstGeom prst="roundRect">
             <a:avLst>
-              <a:gd name="adj" fmla="val 7481"/>
+              <a:gd name="adj" fmla="val 8696"/>
             </a:avLst>
           </a:prstGeom>
           <a:solidFill>
@@ -7453,8 +7455,8 @@
         </p:nvSpPr>
         <p:spPr>
           <a:xfrm>
-            <a:off x="7799832" y="4330598"/>
-            <a:ext cx="3145536" cy="256032"/>
+            <a:off x="7708392" y="4517136"/>
+            <a:ext cx="3282696" cy="228600"/>
           </a:xfrm>
           <a:prstGeom prst="rect">
             <a:avLst/>
@@ -7470,7 +7472,7 @@
               <a:buNone/>
             </a:pPr>
             <a:r>
-              <a:rPr lang="en-US" sz="1300" b="1" dirty="0">
+              <a:rPr lang="en-US" sz="1220" b="1" dirty="0">
                 <a:solidFill>
                   <a:srgbClr val="0068B7"/>
                 </a:solidFill>
@@ -7480,7 +7482,7 @@
               </a:rPr>
               <a:t>Engagement move</a:t>
             </a:r>
-            <a:endParaRPr lang="en-US" sz="1300" dirty="0"/>
+            <a:endParaRPr lang="en-US" sz="1220" dirty="0"/>
           </a:p>
         </p:txBody>
       </p:sp>
@@ -7492,8 +7494,8 @@
         </p:nvSpPr>
         <p:spPr>
           <a:xfrm>
-            <a:off x="7799832" y="4659782"/>
-            <a:ext cx="3145536" cy="899770"/>
+            <a:off x="7708392" y="4828032"/>
+            <a:ext cx="3282696" cy="749808"/>
           </a:xfrm>
           <a:prstGeom prst="rect">
             <a:avLst/>
@@ -7511,7 +7513,7 @@
               <a:buNone/>
             </a:pPr>
             <a:r>
-              <a:rPr lang="en-US" sz="1320" dirty="0">
+              <a:rPr lang="en-US" sz="1220" dirty="0">
                 <a:solidFill>
                   <a:srgbClr val="17364A"/>
                 </a:solidFill>
@@ -7519,9 +7521,9 @@
                 <a:ea typeface="Aptos" pitchFamily="34" charset="-122"/>
                 <a:cs typeface="Aptos" pitchFamily="34" charset="-120"/>
               </a:rPr>
-              <a:t>Use the concept to plan transparent communication, gather stakeholder input, protect trust, and make sure affected communities are considered early.</a:t>
-            </a:r>
-            <a:endParaRPr lang="en-US" sz="1320" dirty="0"/>
+              <a:t>Use the concept to plan transparent communication, gather stakeholder input,.</a:t>
+            </a:r>
+            <a:endParaRPr lang="en-US" sz="1220" dirty="0"/>
           </a:p>
         </p:txBody>
       </p:sp>
@@ -7812,8 +7814,8 @@
         </p:nvSpPr>
         <p:spPr>
           <a:xfrm>
-            <a:off x="868680" y="1508760"/>
-            <a:ext cx="6309360" cy="4160520"/>
+            <a:off x="822960" y="1463040"/>
+            <a:ext cx="6565392" cy="4343400"/>
           </a:xfrm>
           <a:prstGeom prst="rect">
             <a:avLst/>
@@ -7831,7 +7833,7 @@
               <a:buNone/>
             </a:pPr>
             <a:r>
-              <a:rPr lang="en-US" sz="2100" dirty="0">
+              <a:rPr lang="en-US" sz="1920" dirty="0">
                 <a:solidFill>
                   <a:srgbClr val="003A63"/>
                 </a:solidFill>
@@ -7841,14 +7843,14 @@
               </a:rPr>
               <a:t>• What source material must be retained for human review?</a:t>
             </a:r>
-            <a:endParaRPr lang="en-US" sz="2100" dirty="0"/>
-          </a:p>
-          <a:p>
-            <a:pPr indent="0" marL="0">
-              <a:buNone/>
-            </a:pPr>
-            <a:r>
-              <a:rPr lang="en-US" sz="2100" dirty="0">
+            <a:endParaRPr lang="en-US" sz="1920" dirty="0"/>
+          </a:p>
+          <a:p>
+            <a:pPr indent="0" marL="0">
+              <a:buNone/>
+            </a:pPr>
+            <a:r>
+              <a:rPr lang="en-US" sz="1920" dirty="0">
                 <a:solidFill>
                   <a:srgbClr val="003A63"/>
                 </a:solidFill>
@@ -7856,9 +7858,9 @@
                 <a:ea typeface="Aptos" pitchFamily="34" charset="-122"/>
                 <a:cs typeface="Aptos" pitchFamily="34" charset="-120"/>
               </a:rPr>
-              <a:t>• How will staff evaluate accuracy across languages, populations, and program areas?</a:t>
-            </a:r>
-            <a:endParaRPr lang="en-US" sz="2100" dirty="0"/>
+              <a:t>• How will staff evaluate accuracy across languages, populations, and program.</a:t>
+            </a:r>
+            <a:endParaRPr lang="en-US" sz="1920" dirty="0"/>
           </a:p>
         </p:txBody>
       </p:sp>
@@ -7870,12 +7872,12 @@
         </p:nvSpPr>
         <p:spPr>
           <a:xfrm>
-            <a:off x="7635240" y="1325880"/>
-            <a:ext cx="3474720" cy="1207008"/>
+            <a:off x="7543800" y="1325880"/>
+            <a:ext cx="3611880" cy="1261872"/>
           </a:xfrm>
           <a:prstGeom prst="roundRect">
             <a:avLst>
-              <a:gd name="adj" fmla="val 9091"/>
+              <a:gd name="adj" fmla="val 8696"/>
             </a:avLst>
           </a:prstGeom>
           <a:solidFill>
@@ -7897,8 +7899,8 @@
         </p:nvSpPr>
         <p:spPr>
           <a:xfrm>
-            <a:off x="7799832" y="1472184"/>
-            <a:ext cx="3145536" cy="256032"/>
+            <a:off x="7708392" y="1453896"/>
+            <a:ext cx="3282696" cy="228600"/>
           </a:xfrm>
           <a:prstGeom prst="rect">
             <a:avLst/>
@@ -7914,7 +7916,7 @@
               <a:buNone/>
             </a:pPr>
             <a:r>
-              <a:rPr lang="en-US" sz="1300" b="1" dirty="0">
+              <a:rPr lang="en-US" sz="1220" b="1" dirty="0">
                 <a:solidFill>
                   <a:srgbClr val="0068B7"/>
                 </a:solidFill>
@@ -7924,7 +7926,7 @@
               </a:rPr>
               <a:t>Public health lens</a:t>
             </a:r>
-            <a:endParaRPr lang="en-US" sz="1300" dirty="0"/>
+            <a:endParaRPr lang="en-US" sz="1220" dirty="0"/>
           </a:p>
         </p:txBody>
       </p:sp>
@@ -7936,8 +7938,8 @@
         </p:nvSpPr>
         <p:spPr>
           <a:xfrm>
-            <a:off x="7799832" y="1801368"/>
-            <a:ext cx="3145536" cy="640080"/>
+            <a:off x="7708392" y="1764792"/>
+            <a:ext cx="3282696" cy="749808"/>
           </a:xfrm>
           <a:prstGeom prst="rect">
             <a:avLst/>
@@ -7955,7 +7957,7 @@
               <a:buNone/>
             </a:pPr>
             <a:r>
-              <a:rPr lang="en-US" sz="1320" dirty="0">
+              <a:rPr lang="en-US" sz="1220" dirty="0">
                 <a:solidFill>
                   <a:srgbClr val="17364A"/>
                 </a:solidFill>
@@ -7965,7 +7967,7 @@
               </a:rPr>
               <a:t>What source material must be retained for human review?</a:t>
             </a:r>
-            <a:endParaRPr lang="en-US" sz="1320" dirty="0"/>
+            <a:endParaRPr lang="en-US" sz="1220" dirty="0"/>
           </a:p>
         </p:txBody>
       </p:sp>
@@ -7977,12 +7979,12 @@
         </p:nvSpPr>
         <p:spPr>
           <a:xfrm>
-            <a:off x="7635240" y="2670048"/>
-            <a:ext cx="3474720" cy="1377086"/>
+            <a:off x="7543800" y="2724912"/>
+            <a:ext cx="3611880" cy="1527048"/>
           </a:xfrm>
           <a:prstGeom prst="roundRect">
             <a:avLst>
-              <a:gd name="adj" fmla="val 7968"/>
+              <a:gd name="adj" fmla="val 7186"/>
             </a:avLst>
           </a:prstGeom>
           <a:solidFill>
@@ -8004,8 +8006,8 @@
         </p:nvSpPr>
         <p:spPr>
           <a:xfrm>
-            <a:off x="7799832" y="2816352"/>
-            <a:ext cx="3145536" cy="256032"/>
+            <a:off x="7708392" y="2852928"/>
+            <a:ext cx="3282696" cy="228600"/>
           </a:xfrm>
           <a:prstGeom prst="rect">
             <a:avLst/>
@@ -8021,7 +8023,7 @@
               <a:buNone/>
             </a:pPr>
             <a:r>
-              <a:rPr lang="en-US" sz="1300" b="1" dirty="0">
+              <a:rPr lang="en-US" sz="1220" b="1" dirty="0">
                 <a:solidFill>
                   <a:srgbClr val="0068B7"/>
                 </a:solidFill>
@@ -8031,7 +8033,7 @@
               </a:rPr>
               <a:t>Concept checkpoints</a:t>
             </a:r>
-            <a:endParaRPr lang="en-US" sz="1300" dirty="0"/>
+            <a:endParaRPr lang="en-US" sz="1220" dirty="0"/>
           </a:p>
         </p:txBody>
       </p:sp>
@@ -8043,8 +8045,8 @@
         </p:nvSpPr>
         <p:spPr>
           <a:xfrm>
-            <a:off x="7818120" y="3182112"/>
-            <a:ext cx="3090672" cy="718718"/>
+            <a:off x="7726680" y="3182112"/>
+            <a:ext cx="3227832" cy="960120"/>
           </a:xfrm>
           <a:prstGeom prst="rect">
             <a:avLst/>
@@ -8062,7 +8064,7 @@
               <a:buNone/>
             </a:pPr>
             <a:r>
-              <a:rPr lang="en-US" sz="1220" dirty="0">
+              <a:rPr lang="en-US" sz="1140" dirty="0">
                 <a:solidFill>
                   <a:srgbClr val="17364A"/>
                 </a:solidFill>
@@ -8070,16 +8072,16 @@
                 <a:ea typeface="Aptos" pitchFamily="34" charset="-122"/>
                 <a:cs typeface="Aptos" pitchFamily="34" charset="-120"/>
               </a:rPr>
-              <a:t>What source material must be retained for human review?</a:t>
-            </a:r>
-            <a:endParaRPr lang="en-US" sz="1220" dirty="0"/>
-          </a:p>
-          <a:p>
-            <a:pPr indent="0" marL="0">
-              <a:buNone/>
-            </a:pPr>
-            <a:r>
-              <a:rPr lang="en-US" sz="1220" dirty="0">
+              <a:t>What source material must be retained for human.</a:t>
+            </a:r>
+            <a:endParaRPr lang="en-US" sz="1140" dirty="0"/>
+          </a:p>
+          <a:p>
+            <a:pPr indent="0" marL="0">
+              <a:buNone/>
+            </a:pPr>
+            <a:r>
+              <a:rPr lang="en-US" sz="1140" dirty="0">
                 <a:solidFill>
                   <a:srgbClr val="17364A"/>
                 </a:solidFill>
@@ -8087,9 +8089,9 @@
                 <a:ea typeface="Aptos" pitchFamily="34" charset="-122"/>
                 <a:cs typeface="Aptos" pitchFamily="34" charset="-120"/>
               </a:rPr>
-              <a:t>How will staff evaluate accuracy across languages, populations,.</a:t>
-            </a:r>
-            <a:endParaRPr lang="en-US" sz="1220" dirty="0"/>
+              <a:t>How will staff evaluate accuracy across languages,.</a:t>
+            </a:r>
+            <a:endParaRPr lang="en-US" sz="1140" dirty="0"/>
           </a:p>
         </p:txBody>
       </p:sp>
@@ -8101,12 +8103,12 @@
         </p:nvSpPr>
         <p:spPr>
           <a:xfrm>
-            <a:off x="7635240" y="4184294"/>
-            <a:ext cx="3474720" cy="1466698"/>
+            <a:off x="7543800" y="4389120"/>
+            <a:ext cx="3611880" cy="1261872"/>
           </a:xfrm>
           <a:prstGeom prst="roundRect">
             <a:avLst>
-              <a:gd name="adj" fmla="val 7481"/>
+              <a:gd name="adj" fmla="val 8696"/>
             </a:avLst>
           </a:prstGeom>
           <a:solidFill>
@@ -8128,8 +8130,8 @@
         </p:nvSpPr>
         <p:spPr>
           <a:xfrm>
-            <a:off x="7799832" y="4330598"/>
-            <a:ext cx="3145536" cy="256032"/>
+            <a:off x="7708392" y="4517136"/>
+            <a:ext cx="3282696" cy="228600"/>
           </a:xfrm>
           <a:prstGeom prst="rect">
             <a:avLst/>
@@ -8145,7 +8147,7 @@
               <a:buNone/>
             </a:pPr>
             <a:r>
-              <a:rPr lang="en-US" sz="1300" b="1" dirty="0">
+              <a:rPr lang="en-US" sz="1220" b="1" dirty="0">
                 <a:solidFill>
                   <a:srgbClr val="0068B7"/>
                 </a:solidFill>
@@ -8155,7 +8157,7 @@
               </a:rPr>
               <a:t>Engagement move</a:t>
             </a:r>
-            <a:endParaRPr lang="en-US" sz="1300" dirty="0"/>
+            <a:endParaRPr lang="en-US" sz="1220" dirty="0"/>
           </a:p>
         </p:txBody>
       </p:sp>
@@ -8167,8 +8169,8 @@
         </p:nvSpPr>
         <p:spPr>
           <a:xfrm>
-            <a:off x="7799832" y="4659782"/>
-            <a:ext cx="3145536" cy="899770"/>
+            <a:off x="7708392" y="4828032"/>
+            <a:ext cx="3282696" cy="749808"/>
           </a:xfrm>
           <a:prstGeom prst="rect">
             <a:avLst/>
@@ -8186,7 +8188,7 @@
               <a:buNone/>
             </a:pPr>
             <a:r>
-              <a:rPr lang="en-US" sz="1320" dirty="0">
+              <a:rPr lang="en-US" sz="1220" dirty="0">
                 <a:solidFill>
                   <a:srgbClr val="17364A"/>
                 </a:solidFill>
@@ -8194,9 +8196,9 @@
                 <a:ea typeface="Aptos" pitchFamily="34" charset="-122"/>
                 <a:cs typeface="Aptos" pitchFamily="34" charset="-120"/>
               </a:rPr>
-              <a:t>Use the concept to plan transparent communication, gather stakeholder input, protect trust, and make sure affected communities are considered early.</a:t>
-            </a:r>
-            <a:endParaRPr lang="en-US" sz="1320" dirty="0"/>
+              <a:t>Use the concept to plan transparent communication, gather stakeholder input,.</a:t>
+            </a:r>
+            <a:endParaRPr lang="en-US" sz="1220" dirty="0"/>
           </a:p>
         </p:txBody>
       </p:sp>
@@ -8487,8 +8489,8 @@
         </p:nvSpPr>
         <p:spPr>
           <a:xfrm>
-            <a:off x="868680" y="1508760"/>
-            <a:ext cx="6309360" cy="4160520"/>
+            <a:off x="822960" y="1463040"/>
+            <a:ext cx="6565392" cy="4343400"/>
           </a:xfrm>
           <a:prstGeom prst="rect">
             <a:avLst/>
@@ -8506,7 +8508,7 @@
               <a:buNone/>
             </a:pPr>
             <a:r>
-              <a:rPr lang="en-US" sz="2100" dirty="0">
+              <a:rPr lang="en-US" sz="1920" dirty="0">
                 <a:solidFill>
                   <a:srgbClr val="003A63"/>
                 </a:solidFill>
@@ -8516,14 +8518,14 @@
               </a:rPr>
               <a:t>• Create an NLP evaluation plan for one public health workflow.</a:t>
             </a:r>
-            <a:endParaRPr lang="en-US" sz="2100" dirty="0"/>
-          </a:p>
-          <a:p>
-            <a:pPr indent="0" marL="0">
-              <a:buNone/>
-            </a:pPr>
-            <a:r>
-              <a:rPr lang="en-US" sz="2100" dirty="0">
+            <a:endParaRPr lang="en-US" sz="1920" dirty="0"/>
+          </a:p>
+          <a:p>
+            <a:pPr indent="0" marL="0">
+              <a:buNone/>
+            </a:pPr>
+            <a:r>
+              <a:rPr lang="en-US" sz="1920" dirty="0">
                 <a:solidFill>
                   <a:srgbClr val="003A63"/>
                 </a:solidFill>
@@ -8531,9 +8533,9 @@
                 <a:ea typeface="Aptos" pitchFamily="34" charset="-122"/>
                 <a:cs typeface="Aptos" pitchFamily="34" charset="-120"/>
               </a:rPr>
-              <a:t>• Include the text source, NLP task, intended use, prohibited use, required human review,.</a:t>
-            </a:r>
-            <a:endParaRPr lang="en-US" sz="2100" dirty="0"/>
+              <a:t>• Include the text source, NLP task, intended use, prohibited use, required.</a:t>
+            </a:r>
+            <a:endParaRPr lang="en-US" sz="1920" dirty="0"/>
           </a:p>
         </p:txBody>
       </p:sp>
@@ -8545,12 +8547,12 @@
         </p:nvSpPr>
         <p:spPr>
           <a:xfrm>
-            <a:off x="7635240" y="1325880"/>
-            <a:ext cx="3474720" cy="1207008"/>
+            <a:off x="7543800" y="1325880"/>
+            <a:ext cx="3611880" cy="1261872"/>
           </a:xfrm>
           <a:prstGeom prst="roundRect">
             <a:avLst>
-              <a:gd name="adj" fmla="val 9091"/>
+              <a:gd name="adj" fmla="val 8696"/>
             </a:avLst>
           </a:prstGeom>
           <a:solidFill>
@@ -8572,8 +8574,8 @@
         </p:nvSpPr>
         <p:spPr>
           <a:xfrm>
-            <a:off x="7799832" y="1472184"/>
-            <a:ext cx="3145536" cy="256032"/>
+            <a:off x="7708392" y="1453896"/>
+            <a:ext cx="3282696" cy="228600"/>
           </a:xfrm>
           <a:prstGeom prst="rect">
             <a:avLst/>
@@ -8589,7 +8591,7 @@
               <a:buNone/>
             </a:pPr>
             <a:r>
-              <a:rPr lang="en-US" sz="1300" b="1" dirty="0">
+              <a:rPr lang="en-US" sz="1220" b="1" dirty="0">
                 <a:solidFill>
                   <a:srgbClr val="0068B7"/>
                 </a:solidFill>
@@ -8599,7 +8601,7 @@
               </a:rPr>
               <a:t>Public health lens</a:t>
             </a:r>
-            <a:endParaRPr lang="en-US" sz="1300" dirty="0"/>
+            <a:endParaRPr lang="en-US" sz="1220" dirty="0"/>
           </a:p>
         </p:txBody>
       </p:sp>
@@ -8611,8 +8613,8 @@
         </p:nvSpPr>
         <p:spPr>
           <a:xfrm>
-            <a:off x="7799832" y="1801368"/>
-            <a:ext cx="3145536" cy="640080"/>
+            <a:off x="7708392" y="1764792"/>
+            <a:ext cx="3282696" cy="749808"/>
           </a:xfrm>
           <a:prstGeom prst="rect">
             <a:avLst/>
@@ -8630,7 +8632,7 @@
               <a:buNone/>
             </a:pPr>
             <a:r>
-              <a:rPr lang="en-US" sz="1320" dirty="0">
+              <a:rPr lang="en-US" sz="1220" dirty="0">
                 <a:solidFill>
                   <a:srgbClr val="17364A"/>
                 </a:solidFill>
@@ -8640,7 +8642,7 @@
               </a:rPr>
               <a:t>Create an NLP evaluation plan for one public health workflow.</a:t>
             </a:r>
-            <a:endParaRPr lang="en-US" sz="1320" dirty="0"/>
+            <a:endParaRPr lang="en-US" sz="1220" dirty="0"/>
           </a:p>
         </p:txBody>
       </p:sp>
@@ -8652,12 +8654,12 @@
         </p:nvSpPr>
         <p:spPr>
           <a:xfrm>
-            <a:off x="7635240" y="2670048"/>
-            <a:ext cx="3474720" cy="1377086"/>
+            <a:off x="7543800" y="2724912"/>
+            <a:ext cx="3611880" cy="1527048"/>
           </a:xfrm>
           <a:prstGeom prst="roundRect">
             <a:avLst>
-              <a:gd name="adj" fmla="val 7968"/>
+              <a:gd name="adj" fmla="val 7186"/>
             </a:avLst>
           </a:prstGeom>
           <a:solidFill>
@@ -8679,8 +8681,8 @@
         </p:nvSpPr>
         <p:spPr>
           <a:xfrm>
-            <a:off x="7799832" y="2816352"/>
-            <a:ext cx="3145536" cy="256032"/>
+            <a:off x="7708392" y="2852928"/>
+            <a:ext cx="3282696" cy="228600"/>
           </a:xfrm>
           <a:prstGeom prst="rect">
             <a:avLst/>
@@ -8696,7 +8698,7 @@
               <a:buNone/>
             </a:pPr>
             <a:r>
-              <a:rPr lang="en-US" sz="1300" b="1" dirty="0">
+              <a:rPr lang="en-US" sz="1220" b="1" dirty="0">
                 <a:solidFill>
                   <a:srgbClr val="0068B7"/>
                 </a:solidFill>
@@ -8706,7 +8708,7 @@
               </a:rPr>
               <a:t>Concept checkpoints</a:t>
             </a:r>
-            <a:endParaRPr lang="en-US" sz="1300" dirty="0"/>
+            <a:endParaRPr lang="en-US" sz="1220" dirty="0"/>
           </a:p>
         </p:txBody>
       </p:sp>
@@ -8718,8 +8720,8 @@
         </p:nvSpPr>
         <p:spPr>
           <a:xfrm>
-            <a:off x="7818120" y="3182112"/>
-            <a:ext cx="3090672" cy="718718"/>
+            <a:off x="7726680" y="3182112"/>
+            <a:ext cx="3227832" cy="960120"/>
           </a:xfrm>
           <a:prstGeom prst="rect">
             <a:avLst/>
@@ -8737,7 +8739,7 @@
               <a:buNone/>
             </a:pPr>
             <a:r>
-              <a:rPr lang="en-US" sz="1220" dirty="0">
+              <a:rPr lang="en-US" sz="1140" dirty="0">
                 <a:solidFill>
                   <a:srgbClr val="17364A"/>
                 </a:solidFill>
@@ -8745,16 +8747,16 @@
                 <a:ea typeface="Aptos" pitchFamily="34" charset="-122"/>
                 <a:cs typeface="Aptos" pitchFamily="34" charset="-120"/>
               </a:rPr>
-              <a:t>Create an NLP evaluation plan for one public health workflow.</a:t>
-            </a:r>
-            <a:endParaRPr lang="en-US" sz="1220" dirty="0"/>
-          </a:p>
-          <a:p>
-            <a:pPr indent="0" marL="0">
-              <a:buNone/>
-            </a:pPr>
-            <a:r>
-              <a:rPr lang="en-US" sz="1220" dirty="0">
+              <a:t>Create an NLP evaluation plan for one public.</a:t>
+            </a:r>
+            <a:endParaRPr lang="en-US" sz="1140" dirty="0"/>
+          </a:p>
+          <a:p>
+            <a:pPr indent="0" marL="0">
+              <a:buNone/>
+            </a:pPr>
+            <a:r>
+              <a:rPr lang="en-US" sz="1140" dirty="0">
                 <a:solidFill>
                   <a:srgbClr val="17364A"/>
                 </a:solidFill>
@@ -8762,9 +8764,9 @@
                 <a:ea typeface="Aptos" pitchFamily="34" charset="-122"/>
                 <a:cs typeface="Aptos" pitchFamily="34" charset="-120"/>
               </a:rPr>
-              <a:t>Include the text source, NLP task, intended use, prohibited use,.</a:t>
-            </a:r>
-            <a:endParaRPr lang="en-US" sz="1220" dirty="0"/>
+              <a:t>Include the text source, NLP task, intended use,.</a:t>
+            </a:r>
+            <a:endParaRPr lang="en-US" sz="1140" dirty="0"/>
           </a:p>
         </p:txBody>
       </p:sp>
@@ -8776,12 +8778,12 @@
         </p:nvSpPr>
         <p:spPr>
           <a:xfrm>
-            <a:off x="7635240" y="4184294"/>
-            <a:ext cx="3474720" cy="1466698"/>
+            <a:off x="7543800" y="4389120"/>
+            <a:ext cx="3611880" cy="1261872"/>
           </a:xfrm>
           <a:prstGeom prst="roundRect">
             <a:avLst>
-              <a:gd name="adj" fmla="val 7481"/>
+              <a:gd name="adj" fmla="val 8696"/>
             </a:avLst>
           </a:prstGeom>
           <a:solidFill>
@@ -8803,8 +8805,8 @@
         </p:nvSpPr>
         <p:spPr>
           <a:xfrm>
-            <a:off x="7799832" y="4330598"/>
-            <a:ext cx="3145536" cy="256032"/>
+            <a:off x="7708392" y="4517136"/>
+            <a:ext cx="3282696" cy="228600"/>
           </a:xfrm>
           <a:prstGeom prst="rect">
             <a:avLst/>
@@ -8820,7 +8822,7 @@
               <a:buNone/>
             </a:pPr>
             <a:r>
-              <a:rPr lang="en-US" sz="1300" b="1" dirty="0">
+              <a:rPr lang="en-US" sz="1220" b="1" dirty="0">
                 <a:solidFill>
                   <a:srgbClr val="0068B7"/>
                 </a:solidFill>
@@ -8830,7 +8832,7 @@
               </a:rPr>
               <a:t>Engagement move</a:t>
             </a:r>
-            <a:endParaRPr lang="en-US" sz="1300" dirty="0"/>
+            <a:endParaRPr lang="en-US" sz="1220" dirty="0"/>
           </a:p>
         </p:txBody>
       </p:sp>
@@ -8842,8 +8844,8 @@
         </p:nvSpPr>
         <p:spPr>
           <a:xfrm>
-            <a:off x="7799832" y="4659782"/>
-            <a:ext cx="3145536" cy="899770"/>
+            <a:off x="7708392" y="4828032"/>
+            <a:ext cx="3282696" cy="749808"/>
           </a:xfrm>
           <a:prstGeom prst="rect">
             <a:avLst/>
@@ -8861,7 +8863,7 @@
               <a:buNone/>
             </a:pPr>
             <a:r>
-              <a:rPr lang="en-US" sz="1320" dirty="0">
+              <a:rPr lang="en-US" sz="1220" dirty="0">
                 <a:solidFill>
                   <a:srgbClr val="17364A"/>
                 </a:solidFill>
@@ -8869,9 +8871,9 @@
                 <a:ea typeface="Aptos" pitchFamily="34" charset="-122"/>
                 <a:cs typeface="Aptos" pitchFamily="34" charset="-120"/>
               </a:rPr>
-              <a:t>Use the assignment to test whether you can explain the concept, apply it to a realistic public health situation, and identify what would need review before the work moves forward.</a:t>
-            </a:r>
-            <a:endParaRPr lang="en-US" sz="1320" dirty="0"/>
+              <a:t>Use the assignment to test whether you can explain the concept, apply it to a.</a:t>
+            </a:r>
+            <a:endParaRPr lang="en-US" sz="1220" dirty="0"/>
           </a:p>
         </p:txBody>
       </p:sp>
@@ -9162,8 +9164,8 @@
         </p:nvSpPr>
         <p:spPr>
           <a:xfrm>
-            <a:off x="868680" y="1508760"/>
-            <a:ext cx="6309360" cy="4160520"/>
+            <a:off x="822960" y="1463040"/>
+            <a:ext cx="6565392" cy="4343400"/>
           </a:xfrm>
           <a:prstGeom prst="rect">
             <a:avLst/>
@@ -9181,7 +9183,7 @@
               <a:buNone/>
             </a:pPr>
             <a:r>
-              <a:rPr lang="en-US" sz="2100" dirty="0">
+              <a:rPr lang="en-US" sz="1920" dirty="0">
                 <a:solidFill>
                   <a:srgbClr val="003A63"/>
                 </a:solidFill>
@@ -9191,14 +9193,14 @@
               </a:rPr>
               <a:t>• NLP use case description</a:t>
             </a:r>
-            <a:endParaRPr lang="en-US" sz="2100" dirty="0"/>
-          </a:p>
-          <a:p>
-            <a:pPr indent="0" marL="0">
-              <a:buNone/>
-            </a:pPr>
-            <a:r>
-              <a:rPr lang="en-US" sz="2100" dirty="0">
+            <a:endParaRPr lang="en-US" sz="1920" dirty="0"/>
+          </a:p>
+          <a:p>
+            <a:pPr indent="0" marL="0">
+              <a:buNone/>
+            </a:pPr>
+            <a:r>
+              <a:rPr lang="en-US" sz="1920" dirty="0">
                 <a:solidFill>
                   <a:srgbClr val="003A63"/>
                 </a:solidFill>
@@ -9208,14 +9210,14 @@
               </a:rPr>
               <a:t>• NLP evaluation plan</a:t>
             </a:r>
-            <a:endParaRPr lang="en-US" sz="2100" dirty="0"/>
-          </a:p>
-          <a:p>
-            <a:pPr indent="0" marL="0">
-              <a:buNone/>
-            </a:pPr>
-            <a:r>
-              <a:rPr lang="en-US" sz="2100" dirty="0">
+            <a:endParaRPr lang="en-US" sz="1920" dirty="0"/>
+          </a:p>
+          <a:p>
+            <a:pPr indent="0" marL="0">
+              <a:buNone/>
+            </a:pPr>
+            <a:r>
+              <a:rPr lang="en-US" sz="1920" dirty="0">
                 <a:solidFill>
                   <a:srgbClr val="003A63"/>
                 </a:solidFill>
@@ -9225,7 +9227,7 @@
               </a:rPr>
               <a:t>• Human review checklist</a:t>
             </a:r>
-            <a:endParaRPr lang="en-US" sz="2100" dirty="0"/>
+            <a:endParaRPr lang="en-US" sz="1920" dirty="0"/>
           </a:p>
         </p:txBody>
       </p:sp>
@@ -9237,12 +9239,12 @@
         </p:nvSpPr>
         <p:spPr>
           <a:xfrm>
-            <a:off x="7635240" y="1325880"/>
-            <a:ext cx="3474720" cy="1207008"/>
+            <a:off x="7543800" y="1325880"/>
+            <a:ext cx="3611880" cy="1261872"/>
           </a:xfrm>
           <a:prstGeom prst="roundRect">
             <a:avLst>
-              <a:gd name="adj" fmla="val 9091"/>
+              <a:gd name="adj" fmla="val 8696"/>
             </a:avLst>
           </a:prstGeom>
           <a:solidFill>
@@ -9264,8 +9266,8 @@
         </p:nvSpPr>
         <p:spPr>
           <a:xfrm>
-            <a:off x="7799832" y="1472184"/>
-            <a:ext cx="3145536" cy="256032"/>
+            <a:off x="7708392" y="1453896"/>
+            <a:ext cx="3282696" cy="228600"/>
           </a:xfrm>
           <a:prstGeom prst="rect">
             <a:avLst/>
@@ -9281,7 +9283,7 @@
               <a:buNone/>
             </a:pPr>
             <a:r>
-              <a:rPr lang="en-US" sz="1300" b="1" dirty="0">
+              <a:rPr lang="en-US" sz="1220" b="1" dirty="0">
                 <a:solidFill>
                   <a:srgbClr val="0068B7"/>
                 </a:solidFill>
@@ -9291,7 +9293,7 @@
               </a:rPr>
               <a:t>Public health lens</a:t>
             </a:r>
-            <a:endParaRPr lang="en-US" sz="1300" dirty="0"/>
+            <a:endParaRPr lang="en-US" sz="1220" dirty="0"/>
           </a:p>
         </p:txBody>
       </p:sp>
@@ -9303,8 +9305,8 @@
         </p:nvSpPr>
         <p:spPr>
           <a:xfrm>
-            <a:off x="7799832" y="1801368"/>
-            <a:ext cx="3145536" cy="640080"/>
+            <a:off x="7708392" y="1764792"/>
+            <a:ext cx="3282696" cy="749808"/>
           </a:xfrm>
           <a:prstGeom prst="rect">
             <a:avLst/>
@@ -9322,7 +9324,7 @@
               <a:buNone/>
             </a:pPr>
             <a:r>
-              <a:rPr lang="en-US" sz="1320" dirty="0">
+              <a:rPr lang="en-US" sz="1220" dirty="0">
                 <a:solidFill>
                   <a:srgbClr val="17364A"/>
                 </a:solidFill>
@@ -9332,7 +9334,7 @@
               </a:rPr>
               <a:t>NLP use case description</a:t>
             </a:r>
-            <a:endParaRPr lang="en-US" sz="1320" dirty="0"/>
+            <a:endParaRPr lang="en-US" sz="1220" dirty="0"/>
           </a:p>
         </p:txBody>
       </p:sp>
@@ -9344,12 +9346,12 @@
         </p:nvSpPr>
         <p:spPr>
           <a:xfrm>
-            <a:off x="7635240" y="2670048"/>
-            <a:ext cx="3474720" cy="1377086"/>
+            <a:off x="7543800" y="2724912"/>
+            <a:ext cx="3611880" cy="1527048"/>
           </a:xfrm>
           <a:prstGeom prst="roundRect">
             <a:avLst>
-              <a:gd name="adj" fmla="val 7968"/>
+              <a:gd name="adj" fmla="val 7186"/>
             </a:avLst>
           </a:prstGeom>
           <a:solidFill>
@@ -9371,8 +9373,8 @@
         </p:nvSpPr>
         <p:spPr>
           <a:xfrm>
-            <a:off x="7799832" y="2816352"/>
-            <a:ext cx="3145536" cy="256032"/>
+            <a:off x="7708392" y="2852928"/>
+            <a:ext cx="3282696" cy="228600"/>
           </a:xfrm>
           <a:prstGeom prst="rect">
             <a:avLst/>
@@ -9388,7 +9390,7 @@
               <a:buNone/>
             </a:pPr>
             <a:r>
-              <a:rPr lang="en-US" sz="1300" b="1" dirty="0">
+              <a:rPr lang="en-US" sz="1220" b="1" dirty="0">
                 <a:solidFill>
                   <a:srgbClr val="0068B7"/>
                 </a:solidFill>
@@ -9398,7 +9400,7 @@
               </a:rPr>
               <a:t>Concept checkpoints</a:t>
             </a:r>
-            <a:endParaRPr lang="en-US" sz="1300" dirty="0"/>
+            <a:endParaRPr lang="en-US" sz="1220" dirty="0"/>
           </a:p>
         </p:txBody>
       </p:sp>
@@ -9410,8 +9412,8 @@
         </p:nvSpPr>
         <p:spPr>
           <a:xfrm>
-            <a:off x="7818120" y="3182112"/>
-            <a:ext cx="3090672" cy="718718"/>
+            <a:off x="7726680" y="3182112"/>
+            <a:ext cx="3227832" cy="960120"/>
           </a:xfrm>
           <a:prstGeom prst="rect">
             <a:avLst/>
@@ -9429,7 +9431,7 @@
               <a:buNone/>
             </a:pPr>
             <a:r>
-              <a:rPr lang="en-US" sz="1220" dirty="0">
+              <a:rPr lang="en-US" sz="1140" dirty="0">
                 <a:solidFill>
                   <a:srgbClr val="17364A"/>
                 </a:solidFill>
@@ -9439,14 +9441,14 @@
               </a:rPr>
               <a:t>NLP use case description</a:t>
             </a:r>
-            <a:endParaRPr lang="en-US" sz="1220" dirty="0"/>
-          </a:p>
-          <a:p>
-            <a:pPr indent="0" marL="0">
-              <a:buNone/>
-            </a:pPr>
-            <a:r>
-              <a:rPr lang="en-US" sz="1220" dirty="0">
+            <a:endParaRPr lang="en-US" sz="1140" dirty="0"/>
+          </a:p>
+          <a:p>
+            <a:pPr indent="0" marL="0">
+              <a:buNone/>
+            </a:pPr>
+            <a:r>
+              <a:rPr lang="en-US" sz="1140" dirty="0">
                 <a:solidFill>
                   <a:srgbClr val="17364A"/>
                 </a:solidFill>
@@ -9456,14 +9458,14 @@
               </a:rPr>
               <a:t>NLP evaluation plan</a:t>
             </a:r>
-            <a:endParaRPr lang="en-US" sz="1220" dirty="0"/>
-          </a:p>
-          <a:p>
-            <a:pPr indent="0" marL="0">
-              <a:buNone/>
-            </a:pPr>
-            <a:r>
-              <a:rPr lang="en-US" sz="1220" dirty="0">
+            <a:endParaRPr lang="en-US" sz="1140" dirty="0"/>
+          </a:p>
+          <a:p>
+            <a:pPr indent="0" marL="0">
+              <a:buNone/>
+            </a:pPr>
+            <a:r>
+              <a:rPr lang="en-US" sz="1140" dirty="0">
                 <a:solidFill>
                   <a:srgbClr val="17364A"/>
                 </a:solidFill>
@@ -9473,7 +9475,7 @@
               </a:rPr>
               <a:t>Human review checklist</a:t>
             </a:r>
-            <a:endParaRPr lang="en-US" sz="1220" dirty="0"/>
+            <a:endParaRPr lang="en-US" sz="1140" dirty="0"/>
           </a:p>
         </p:txBody>
       </p:sp>
@@ -9485,12 +9487,12 @@
         </p:nvSpPr>
         <p:spPr>
           <a:xfrm>
-            <a:off x="7635240" y="4184294"/>
-            <a:ext cx="3474720" cy="1466698"/>
+            <a:off x="7543800" y="4389120"/>
+            <a:ext cx="3611880" cy="1261872"/>
           </a:xfrm>
           <a:prstGeom prst="roundRect">
             <a:avLst>
-              <a:gd name="adj" fmla="val 7481"/>
+              <a:gd name="adj" fmla="val 8696"/>
             </a:avLst>
           </a:prstGeom>
           <a:solidFill>
@@ -9512,8 +9514,8 @@
         </p:nvSpPr>
         <p:spPr>
           <a:xfrm>
-            <a:off x="7799832" y="4330598"/>
-            <a:ext cx="3145536" cy="256032"/>
+            <a:off x="7708392" y="4517136"/>
+            <a:ext cx="3282696" cy="228600"/>
           </a:xfrm>
           <a:prstGeom prst="rect">
             <a:avLst/>
@@ -9529,7 +9531,7 @@
               <a:buNone/>
             </a:pPr>
             <a:r>
-              <a:rPr lang="en-US" sz="1300" b="1" dirty="0">
+              <a:rPr lang="en-US" sz="1220" b="1" dirty="0">
                 <a:solidFill>
                   <a:srgbClr val="0068B7"/>
                 </a:solidFill>
@@ -9539,7 +9541,7 @@
               </a:rPr>
               <a:t>Engagement move</a:t>
             </a:r>
-            <a:endParaRPr lang="en-US" sz="1300" dirty="0"/>
+            <a:endParaRPr lang="en-US" sz="1220" dirty="0"/>
           </a:p>
         </p:txBody>
       </p:sp>
@@ -9551,8 +9553,8 @@
         </p:nvSpPr>
         <p:spPr>
           <a:xfrm>
-            <a:off x="7799832" y="4659782"/>
-            <a:ext cx="3145536" cy="899770"/>
+            <a:off x="7708392" y="4828032"/>
+            <a:ext cx="3282696" cy="749808"/>
           </a:xfrm>
           <a:prstGeom prst="rect">
             <a:avLst/>
@@ -9570,7 +9572,7 @@
               <a:buNone/>
             </a:pPr>
             <a:r>
-              <a:rPr lang="en-US" sz="1320" dirty="0">
+              <a:rPr lang="en-US" sz="1220" dirty="0">
                 <a:solidFill>
                   <a:srgbClr val="17364A"/>
                 </a:solidFill>
@@ -9578,9 +9580,9 @@
                 <a:ea typeface="Aptos" pitchFamily="34" charset="-122"/>
                 <a:cs typeface="Aptos" pitchFamily="34" charset="-120"/>
               </a:rPr>
-              <a:t>Use the concept to plan transparent communication, gather stakeholder input, protect trust, and make sure affected communities are considered early.</a:t>
-            </a:r>
-            <a:endParaRPr lang="en-US" sz="1320" dirty="0"/>
+              <a:t>Use the concept to plan transparent communication, gather stakeholder input,.</a:t>
+            </a:r>
+            <a:endParaRPr lang="en-US" sz="1220" dirty="0"/>
           </a:p>
         </p:txBody>
       </p:sp>
@@ -9871,8 +9873,8 @@
         </p:nvSpPr>
         <p:spPr>
           <a:xfrm>
-            <a:off x="868680" y="1508760"/>
-            <a:ext cx="6309360" cy="4160520"/>
+            <a:off x="822960" y="1463040"/>
+            <a:ext cx="6565392" cy="4343400"/>
           </a:xfrm>
           <a:prstGeom prst="rect">
             <a:avLst/>
@@ -9890,7 +9892,7 @@
               <a:buNone/>
             </a:pPr>
             <a:r>
-              <a:rPr lang="en-US" sz="2100" dirty="0">
+              <a:rPr lang="en-US" sz="1920" dirty="0">
                 <a:solidFill>
                   <a:srgbClr val="003A63"/>
                 </a:solidFill>
@@ -9900,7 +9902,7 @@
               </a:rPr>
               <a:t>• Source verification and privacy safeguards</a:t>
             </a:r>
-            <a:endParaRPr lang="en-US" sz="2100" dirty="0"/>
+            <a:endParaRPr lang="en-US" sz="1920" dirty="0"/>
           </a:p>
         </p:txBody>
       </p:sp>
@@ -9912,12 +9914,12 @@
         </p:nvSpPr>
         <p:spPr>
           <a:xfrm>
-            <a:off x="7635240" y="1325880"/>
-            <a:ext cx="3474720" cy="1207008"/>
+            <a:off x="7543800" y="1325880"/>
+            <a:ext cx="3611880" cy="1261872"/>
           </a:xfrm>
           <a:prstGeom prst="roundRect">
             <a:avLst>
-              <a:gd name="adj" fmla="val 9091"/>
+              <a:gd name="adj" fmla="val 8696"/>
             </a:avLst>
           </a:prstGeom>
           <a:solidFill>
@@ -9939,8 +9941,8 @@
         </p:nvSpPr>
         <p:spPr>
           <a:xfrm>
-            <a:off x="7799832" y="1472184"/>
-            <a:ext cx="3145536" cy="256032"/>
+            <a:off x="7708392" y="1453896"/>
+            <a:ext cx="3282696" cy="228600"/>
           </a:xfrm>
           <a:prstGeom prst="rect">
             <a:avLst/>
@@ -9956,7 +9958,7 @@
               <a:buNone/>
             </a:pPr>
             <a:r>
-              <a:rPr lang="en-US" sz="1300" b="1" dirty="0">
+              <a:rPr lang="en-US" sz="1220" b="1" dirty="0">
                 <a:solidFill>
                   <a:srgbClr val="0068B7"/>
                 </a:solidFill>
@@ -9966,7 +9968,7 @@
               </a:rPr>
               <a:t>Public health lens</a:t>
             </a:r>
-            <a:endParaRPr lang="en-US" sz="1300" dirty="0"/>
+            <a:endParaRPr lang="en-US" sz="1220" dirty="0"/>
           </a:p>
         </p:txBody>
       </p:sp>
@@ -9978,8 +9980,8 @@
         </p:nvSpPr>
         <p:spPr>
           <a:xfrm>
-            <a:off x="7799832" y="1801368"/>
-            <a:ext cx="3145536" cy="640080"/>
+            <a:off x="7708392" y="1764792"/>
+            <a:ext cx="3282696" cy="749808"/>
           </a:xfrm>
           <a:prstGeom prst="rect">
             <a:avLst/>
@@ -9997,7 +9999,7 @@
               <a:buNone/>
             </a:pPr>
             <a:r>
-              <a:rPr lang="en-US" sz="1320" dirty="0">
+              <a:rPr lang="en-US" sz="1220" dirty="0">
                 <a:solidFill>
                   <a:srgbClr val="17364A"/>
                 </a:solidFill>
@@ -10007,7 +10009,7 @@
               </a:rPr>
               <a:t>Source verification and privacy safeguards</a:t>
             </a:r>
-            <a:endParaRPr lang="en-US" sz="1320" dirty="0"/>
+            <a:endParaRPr lang="en-US" sz="1220" dirty="0"/>
           </a:p>
         </p:txBody>
       </p:sp>
@@ -10019,12 +10021,12 @@
         </p:nvSpPr>
         <p:spPr>
           <a:xfrm>
-            <a:off x="7635240" y="2670048"/>
-            <a:ext cx="3474720" cy="1377086"/>
+            <a:off x="7543800" y="2724912"/>
+            <a:ext cx="3611880" cy="1527048"/>
           </a:xfrm>
           <a:prstGeom prst="roundRect">
             <a:avLst>
-              <a:gd name="adj" fmla="val 7968"/>
+              <a:gd name="adj" fmla="val 7186"/>
             </a:avLst>
           </a:prstGeom>
           <a:solidFill>
@@ -10046,8 +10048,8 @@
         </p:nvSpPr>
         <p:spPr>
           <a:xfrm>
-            <a:off x="7799832" y="2816352"/>
-            <a:ext cx="3145536" cy="256032"/>
+            <a:off x="7708392" y="2852928"/>
+            <a:ext cx="3282696" cy="228600"/>
           </a:xfrm>
           <a:prstGeom prst="rect">
             <a:avLst/>
@@ -10063,7 +10065,7 @@
               <a:buNone/>
             </a:pPr>
             <a:r>
-              <a:rPr lang="en-US" sz="1300" b="1" dirty="0">
+              <a:rPr lang="en-US" sz="1220" b="1" dirty="0">
                 <a:solidFill>
                   <a:srgbClr val="0068B7"/>
                 </a:solidFill>
@@ -10073,7 +10075,7 @@
               </a:rPr>
               <a:t>Concept checkpoints</a:t>
             </a:r>
-            <a:endParaRPr lang="en-US" sz="1300" dirty="0"/>
+            <a:endParaRPr lang="en-US" sz="1220" dirty="0"/>
           </a:p>
         </p:txBody>
       </p:sp>
@@ -10085,8 +10087,8 @@
         </p:nvSpPr>
         <p:spPr>
           <a:xfrm>
-            <a:off x="7818120" y="3182112"/>
-            <a:ext cx="3090672" cy="718718"/>
+            <a:off x="7726680" y="3182112"/>
+            <a:ext cx="3227832" cy="960120"/>
           </a:xfrm>
           <a:prstGeom prst="rect">
             <a:avLst/>
@@ -10104,7 +10106,7 @@
               <a:buNone/>
             </a:pPr>
             <a:r>
-              <a:rPr lang="en-US" sz="1220" dirty="0">
+              <a:rPr lang="en-US" sz="1140" dirty="0">
                 <a:solidFill>
                   <a:srgbClr val="17364A"/>
                 </a:solidFill>
@@ -10114,7 +10116,7 @@
               </a:rPr>
               <a:t>Source verification and privacy safeguards</a:t>
             </a:r>
-            <a:endParaRPr lang="en-US" sz="1220" dirty="0"/>
+            <a:endParaRPr lang="en-US" sz="1140" dirty="0"/>
           </a:p>
         </p:txBody>
       </p:sp>
@@ -10126,12 +10128,12 @@
         </p:nvSpPr>
         <p:spPr>
           <a:xfrm>
-            <a:off x="7635240" y="4184294"/>
-            <a:ext cx="3474720" cy="1466698"/>
+            <a:off x="7543800" y="4389120"/>
+            <a:ext cx="3611880" cy="1261872"/>
           </a:xfrm>
           <a:prstGeom prst="roundRect">
             <a:avLst>
-              <a:gd name="adj" fmla="val 7481"/>
+              <a:gd name="adj" fmla="val 8696"/>
             </a:avLst>
           </a:prstGeom>
           <a:solidFill>
@@ -10153,8 +10155,8 @@
         </p:nvSpPr>
         <p:spPr>
           <a:xfrm>
-            <a:off x="7799832" y="4330598"/>
-            <a:ext cx="3145536" cy="256032"/>
+            <a:off x="7708392" y="4517136"/>
+            <a:ext cx="3282696" cy="228600"/>
           </a:xfrm>
           <a:prstGeom prst="rect">
             <a:avLst/>
@@ -10170,7 +10172,7 @@
               <a:buNone/>
             </a:pPr>
             <a:r>
-              <a:rPr lang="en-US" sz="1300" b="1" dirty="0">
+              <a:rPr lang="en-US" sz="1220" b="1" dirty="0">
                 <a:solidFill>
                   <a:srgbClr val="0068B7"/>
                 </a:solidFill>
@@ -10180,7 +10182,7 @@
               </a:rPr>
               <a:t>Engagement move</a:t>
             </a:r>
-            <a:endParaRPr lang="en-US" sz="1300" dirty="0"/>
+            <a:endParaRPr lang="en-US" sz="1220" dirty="0"/>
           </a:p>
         </p:txBody>
       </p:sp>
@@ -10192,8 +10194,8 @@
         </p:nvSpPr>
         <p:spPr>
           <a:xfrm>
-            <a:off x="7799832" y="4659782"/>
-            <a:ext cx="3145536" cy="899770"/>
+            <a:off x="7708392" y="4828032"/>
+            <a:ext cx="3282696" cy="749808"/>
           </a:xfrm>
           <a:prstGeom prst="rect">
             <a:avLst/>
@@ -10211,7 +10213,7 @@
               <a:buNone/>
             </a:pPr>
             <a:r>
-              <a:rPr lang="en-US" sz="1320" dirty="0">
+              <a:rPr lang="en-US" sz="1220" dirty="0">
                 <a:solidFill>
                   <a:srgbClr val="17364A"/>
                 </a:solidFill>
@@ -10219,9 +10221,9 @@
                 <a:ea typeface="Aptos" pitchFamily="34" charset="-122"/>
                 <a:cs typeface="Aptos" pitchFamily="34" charset="-120"/>
               </a:rPr>
-              <a:t>Use the concept to plan transparent communication, gather stakeholder input, protect trust, and make sure affected communities are considered early.</a:t>
-            </a:r>
-            <a:endParaRPr lang="en-US" sz="1320" dirty="0"/>
+              <a:t>Use the concept to plan transparent communication, gather stakeholder input,.</a:t>
+            </a:r>
+            <a:endParaRPr lang="en-US" sz="1220" dirty="0"/>
           </a:p>
         </p:txBody>
       </p:sp>
@@ -10556,7 +10558,7 @@
                 <a:ea typeface="Aptos" pitchFamily="34" charset="-122"/>
                 <a:cs typeface="Aptos" pitchFamily="34" charset="-120"/>
               </a:rPr>
-              <a:t>• Public health agencies often hold important information in free-text sources, including.</a:t>
+              <a:t>• Public health agencies often hold important information in free-text.</a:t>
             </a:r>
             <a:endParaRPr lang="en-US" sz="2100" dirty="0"/>
           </a:p>
@@ -10573,7 +10575,7 @@
                 <a:ea typeface="Aptos" pitchFamily="34" charset="-122"/>
                 <a:cs typeface="Aptos" pitchFamily="34" charset="-120"/>
               </a:rPr>
-              <a:t>• This module teaches learners how NLP can support public health work and how to evaluate its.</a:t>
+              <a:t>• This module teaches learners how NLP can support public health work and how.</a:t>
             </a:r>
             <a:endParaRPr lang="en-US" sz="2100" dirty="0"/>
           </a:p>
@@ -10614,8 +10616,8 @@
         </p:nvSpPr>
         <p:spPr>
           <a:xfrm>
-            <a:off x="8074152" y="1563624"/>
-            <a:ext cx="2825496" cy="256032"/>
+            <a:off x="8074152" y="1545336"/>
+            <a:ext cx="2825496" cy="228600"/>
           </a:xfrm>
           <a:prstGeom prst="rect">
             <a:avLst/>
@@ -10631,7 +10633,7 @@
               <a:buNone/>
             </a:pPr>
             <a:r>
-              <a:rPr lang="en-US" sz="1300" b="1" dirty="0">
+              <a:rPr lang="en-US" sz="1220" b="1" dirty="0">
                 <a:solidFill>
                   <a:srgbClr val="0068B7"/>
                 </a:solidFill>
@@ -10641,7 +10643,7 @@
               </a:rPr>
               <a:t>Module details</a:t>
             </a:r>
-            <a:endParaRPr lang="en-US" sz="1300" dirty="0"/>
+            <a:endParaRPr lang="en-US" sz="1220" dirty="0"/>
           </a:p>
         </p:txBody>
       </p:sp>
@@ -10653,8 +10655,8 @@
         </p:nvSpPr>
         <p:spPr>
           <a:xfrm>
-            <a:off x="8074152" y="1892808"/>
-            <a:ext cx="2825496" cy="1353312"/>
+            <a:off x="8074152" y="1856232"/>
+            <a:ext cx="2825496" cy="1408176"/>
           </a:xfrm>
           <a:prstGeom prst="rect">
             <a:avLst/>
@@ -10672,7 +10674,7 @@
               <a:buNone/>
             </a:pPr>
             <a:r>
-              <a:rPr lang="en-US" sz="1320" dirty="0">
+              <a:rPr lang="en-US" sz="1220" dirty="0">
                 <a:solidFill>
                   <a:srgbClr val="17364A"/>
                 </a:solidFill>
@@ -10680,9 +10682,9 @@
                 <a:ea typeface="Aptos" pitchFamily="34" charset="-122"/>
                 <a:cs typeface="Aptos" pitchFamily="34" charset="-120"/>
               </a:rPr>
-              <a:t>Level: applied/foundational Primary track: Analytics and Modeling Track Appears in tracks: technical-architecture</a:t>
-            </a:r>
-            <a:endParaRPr lang="en-US" sz="1320" dirty="0"/>
+              <a:t>Level: applied/foundational Primary track: Analytics and Modeling Track Appears.</a:t>
+            </a:r>
+            <a:endParaRPr lang="en-US" sz="1220" dirty="0"/>
           </a:p>
         </p:txBody>
       </p:sp>
@@ -10721,8 +10723,8 @@
         </p:nvSpPr>
         <p:spPr>
           <a:xfrm>
-            <a:off x="8074152" y="3822192"/>
-            <a:ext cx="2825496" cy="256032"/>
+            <a:off x="8074152" y="3803904"/>
+            <a:ext cx="2825496" cy="228600"/>
           </a:xfrm>
           <a:prstGeom prst="rect">
             <a:avLst/>
@@ -10738,7 +10740,7 @@
               <a:buNone/>
             </a:pPr>
             <a:r>
-              <a:rPr lang="en-US" sz="1300" b="1" dirty="0">
+              <a:rPr lang="en-US" sz="1220" b="1" dirty="0">
                 <a:solidFill>
                   <a:srgbClr val="0068B7"/>
                 </a:solidFill>
@@ -10748,7 +10750,7 @@
               </a:rPr>
               <a:t>Learning sequence</a:t>
             </a:r>
-            <a:endParaRPr lang="en-US" sz="1300" dirty="0"/>
+            <a:endParaRPr lang="en-US" sz="1220" dirty="0"/>
           </a:p>
         </p:txBody>
       </p:sp>
@@ -10760,8 +10762,8 @@
         </p:nvSpPr>
         <p:spPr>
           <a:xfrm>
-            <a:off x="8092440" y="4187952"/>
-            <a:ext cx="2770632" cy="1033272"/>
+            <a:off x="8092440" y="4133088"/>
+            <a:ext cx="2770632" cy="1124712"/>
           </a:xfrm>
           <a:prstGeom prst="rect">
             <a:avLst/>
@@ -10779,7 +10781,7 @@
               <a:buNone/>
             </a:pPr>
             <a:r>
-              <a:rPr lang="en-US" sz="1220" dirty="0">
+              <a:rPr lang="en-US" sz="1140" dirty="0">
                 <a:solidFill>
                   <a:srgbClr val="17364A"/>
                 </a:solidFill>
@@ -10789,14 +10791,14 @@
               </a:rPr>
               <a:t>Read the module for shared vocabulary and context.</a:t>
             </a:r>
-            <a:endParaRPr lang="en-US" sz="1220" dirty="0"/>
-          </a:p>
-          <a:p>
-            <a:pPr indent="0" marL="0">
-              <a:buNone/>
-            </a:pPr>
-            <a:r>
-              <a:rPr lang="en-US" sz="1220" dirty="0">
+            <a:endParaRPr lang="en-US" sz="1140" dirty="0"/>
+          </a:p>
+          <a:p>
+            <a:pPr indent="0" marL="0">
+              <a:buNone/>
+            </a:pPr>
+            <a:r>
+              <a:rPr lang="en-US" sz="1140" dirty="0">
                 <a:solidFill>
                   <a:srgbClr val="17364A"/>
                 </a:solidFill>
@@ -10804,16 +10806,16 @@
                 <a:ea typeface="Aptos" pitchFamily="34" charset="-122"/>
                 <a:cs typeface="Aptos" pitchFamily="34" charset="-120"/>
               </a:rPr>
-              <a:t>Complete the practical exercise to apply the concept.</a:t>
-            </a:r>
-            <a:endParaRPr lang="en-US" sz="1220" dirty="0"/>
-          </a:p>
-          <a:p>
-            <a:pPr indent="0" marL="0">
-              <a:buNone/>
-            </a:pPr>
-            <a:r>
-              <a:rPr lang="en-US" sz="1220" dirty="0">
+              <a:t>Complete the practical exercise to apply the.</a:t>
+            </a:r>
+            <a:endParaRPr lang="en-US" sz="1140" dirty="0"/>
+          </a:p>
+          <a:p>
+            <a:pPr indent="0" marL="0">
+              <a:buNone/>
+            </a:pPr>
+            <a:r>
+              <a:rPr lang="en-US" sz="1140" dirty="0">
                 <a:solidFill>
                   <a:srgbClr val="17364A"/>
                 </a:solidFill>
@@ -10823,7 +10825,7 @@
               </a:rPr>
               <a:t>Use the notes and references for deeper review.</a:t>
             </a:r>
-            <a:endParaRPr lang="en-US" sz="1220" dirty="0"/>
+            <a:endParaRPr lang="en-US" sz="1140" dirty="0"/>
           </a:p>
         </p:txBody>
       </p:sp>
@@ -11114,8 +11116,8 @@
         </p:nvSpPr>
         <p:spPr>
           <a:xfrm>
-            <a:off x="868680" y="1508760"/>
-            <a:ext cx="6309360" cy="4160520"/>
+            <a:off x="822960" y="1463040"/>
+            <a:ext cx="6565392" cy="4343400"/>
           </a:xfrm>
           <a:prstGeom prst="rect">
             <a:avLst/>
@@ -11133,7 +11135,7 @@
               <a:buNone/>
             </a:pPr>
             <a:r>
-              <a:rPr lang="en-US" sz="2100" dirty="0">
+              <a:rPr lang="en-US" sz="1920" dirty="0">
                 <a:solidFill>
                   <a:srgbClr val="003A63"/>
                 </a:solidFill>
@@ -11143,14 +11145,14 @@
               </a:rPr>
               <a:t>• NLP use case description</a:t>
             </a:r>
-            <a:endParaRPr lang="en-US" sz="2100" dirty="0"/>
-          </a:p>
-          <a:p>
-            <a:pPr indent="0" marL="0">
-              <a:buNone/>
-            </a:pPr>
-            <a:r>
-              <a:rPr lang="en-US" sz="2100" dirty="0">
+            <a:endParaRPr lang="en-US" sz="1920" dirty="0"/>
+          </a:p>
+          <a:p>
+            <a:pPr indent="0" marL="0">
+              <a:buNone/>
+            </a:pPr>
+            <a:r>
+              <a:rPr lang="en-US" sz="1920" dirty="0">
                 <a:solidFill>
                   <a:srgbClr val="003A63"/>
                 </a:solidFill>
@@ -11160,14 +11162,14 @@
               </a:rPr>
               <a:t>• NLP evaluation plan</a:t>
             </a:r>
-            <a:endParaRPr lang="en-US" sz="2100" dirty="0"/>
-          </a:p>
-          <a:p>
-            <a:pPr indent="0" marL="0">
-              <a:buNone/>
-            </a:pPr>
-            <a:r>
-              <a:rPr lang="en-US" sz="2100" dirty="0">
+            <a:endParaRPr lang="en-US" sz="1920" dirty="0"/>
+          </a:p>
+          <a:p>
+            <a:pPr indent="0" marL="0">
+              <a:buNone/>
+            </a:pPr>
+            <a:r>
+              <a:rPr lang="en-US" sz="1920" dirty="0">
                 <a:solidFill>
                   <a:srgbClr val="003A63"/>
                 </a:solidFill>
@@ -11177,7 +11179,7 @@
               </a:rPr>
               <a:t>• Human review checklist</a:t>
             </a:r>
-            <a:endParaRPr lang="en-US" sz="2100" dirty="0"/>
+            <a:endParaRPr lang="en-US" sz="1920" dirty="0"/>
           </a:p>
         </p:txBody>
       </p:sp>
@@ -11189,12 +11191,12 @@
         </p:nvSpPr>
         <p:spPr>
           <a:xfrm>
-            <a:off x="7635240" y="1325880"/>
-            <a:ext cx="3474720" cy="1207008"/>
+            <a:off x="7543800" y="1325880"/>
+            <a:ext cx="3611880" cy="1261872"/>
           </a:xfrm>
           <a:prstGeom prst="roundRect">
             <a:avLst>
-              <a:gd name="adj" fmla="val 9091"/>
+              <a:gd name="adj" fmla="val 8696"/>
             </a:avLst>
           </a:prstGeom>
           <a:solidFill>
@@ -11216,8 +11218,8 @@
         </p:nvSpPr>
         <p:spPr>
           <a:xfrm>
-            <a:off x="7799832" y="1472184"/>
-            <a:ext cx="3145536" cy="256032"/>
+            <a:off x="7708392" y="1453896"/>
+            <a:ext cx="3282696" cy="228600"/>
           </a:xfrm>
           <a:prstGeom prst="rect">
             <a:avLst/>
@@ -11233,7 +11235,7 @@
               <a:buNone/>
             </a:pPr>
             <a:r>
-              <a:rPr lang="en-US" sz="1300" b="1" dirty="0">
+              <a:rPr lang="en-US" sz="1220" b="1" dirty="0">
                 <a:solidFill>
                   <a:srgbClr val="0068B7"/>
                 </a:solidFill>
@@ -11243,7 +11245,7 @@
               </a:rPr>
               <a:t>Public health lens</a:t>
             </a:r>
-            <a:endParaRPr lang="en-US" sz="1300" dirty="0"/>
+            <a:endParaRPr lang="en-US" sz="1220" dirty="0"/>
           </a:p>
         </p:txBody>
       </p:sp>
@@ -11255,8 +11257,8 @@
         </p:nvSpPr>
         <p:spPr>
           <a:xfrm>
-            <a:off x="7799832" y="1801368"/>
-            <a:ext cx="3145536" cy="640080"/>
+            <a:off x="7708392" y="1764792"/>
+            <a:ext cx="3282696" cy="749808"/>
           </a:xfrm>
           <a:prstGeom prst="rect">
             <a:avLst/>
@@ -11274,7 +11276,7 @@
               <a:buNone/>
             </a:pPr>
             <a:r>
-              <a:rPr lang="en-US" sz="1320" dirty="0">
+              <a:rPr lang="en-US" sz="1220" dirty="0">
                 <a:solidFill>
                   <a:srgbClr val="17364A"/>
                 </a:solidFill>
@@ -11284,7 +11286,7 @@
               </a:rPr>
               <a:t>NLP use case description</a:t>
             </a:r>
-            <a:endParaRPr lang="en-US" sz="1320" dirty="0"/>
+            <a:endParaRPr lang="en-US" sz="1220" dirty="0"/>
           </a:p>
         </p:txBody>
       </p:sp>
@@ -11296,12 +11298,12 @@
         </p:nvSpPr>
         <p:spPr>
           <a:xfrm>
-            <a:off x="7635240" y="2670048"/>
-            <a:ext cx="3474720" cy="1377086"/>
+            <a:off x="7543800" y="2724912"/>
+            <a:ext cx="3611880" cy="1527048"/>
           </a:xfrm>
           <a:prstGeom prst="roundRect">
             <a:avLst>
-              <a:gd name="adj" fmla="val 7968"/>
+              <a:gd name="adj" fmla="val 7186"/>
             </a:avLst>
           </a:prstGeom>
           <a:solidFill>
@@ -11323,8 +11325,8 @@
         </p:nvSpPr>
         <p:spPr>
           <a:xfrm>
-            <a:off x="7799832" y="2816352"/>
-            <a:ext cx="3145536" cy="256032"/>
+            <a:off x="7708392" y="2852928"/>
+            <a:ext cx="3282696" cy="228600"/>
           </a:xfrm>
           <a:prstGeom prst="rect">
             <a:avLst/>
@@ -11340,7 +11342,7 @@
               <a:buNone/>
             </a:pPr>
             <a:r>
-              <a:rPr lang="en-US" sz="1300" b="1" dirty="0">
+              <a:rPr lang="en-US" sz="1220" b="1" dirty="0">
                 <a:solidFill>
                   <a:srgbClr val="0068B7"/>
                 </a:solidFill>
@@ -11350,7 +11352,7 @@
               </a:rPr>
               <a:t>Concept checkpoints</a:t>
             </a:r>
-            <a:endParaRPr lang="en-US" sz="1300" dirty="0"/>
+            <a:endParaRPr lang="en-US" sz="1220" dirty="0"/>
           </a:p>
         </p:txBody>
       </p:sp>
@@ -11362,8 +11364,8 @@
         </p:nvSpPr>
         <p:spPr>
           <a:xfrm>
-            <a:off x="7818120" y="3182112"/>
-            <a:ext cx="3090672" cy="718718"/>
+            <a:off x="7726680" y="3182112"/>
+            <a:ext cx="3227832" cy="960120"/>
           </a:xfrm>
           <a:prstGeom prst="rect">
             <a:avLst/>
@@ -11381,7 +11383,7 @@
               <a:buNone/>
             </a:pPr>
             <a:r>
-              <a:rPr lang="en-US" sz="1220" dirty="0">
+              <a:rPr lang="en-US" sz="1140" dirty="0">
                 <a:solidFill>
                   <a:srgbClr val="17364A"/>
                 </a:solidFill>
@@ -11391,14 +11393,14 @@
               </a:rPr>
               <a:t>NLP use case description</a:t>
             </a:r>
-            <a:endParaRPr lang="en-US" sz="1220" dirty="0"/>
-          </a:p>
-          <a:p>
-            <a:pPr indent="0" marL="0">
-              <a:buNone/>
-            </a:pPr>
-            <a:r>
-              <a:rPr lang="en-US" sz="1220" dirty="0">
+            <a:endParaRPr lang="en-US" sz="1140" dirty="0"/>
+          </a:p>
+          <a:p>
+            <a:pPr indent="0" marL="0">
+              <a:buNone/>
+            </a:pPr>
+            <a:r>
+              <a:rPr lang="en-US" sz="1140" dirty="0">
                 <a:solidFill>
                   <a:srgbClr val="17364A"/>
                 </a:solidFill>
@@ -11408,14 +11410,14 @@
               </a:rPr>
               <a:t>NLP evaluation plan</a:t>
             </a:r>
-            <a:endParaRPr lang="en-US" sz="1220" dirty="0"/>
-          </a:p>
-          <a:p>
-            <a:pPr indent="0" marL="0">
-              <a:buNone/>
-            </a:pPr>
-            <a:r>
-              <a:rPr lang="en-US" sz="1220" dirty="0">
+            <a:endParaRPr lang="en-US" sz="1140" dirty="0"/>
+          </a:p>
+          <a:p>
+            <a:pPr indent="0" marL="0">
+              <a:buNone/>
+            </a:pPr>
+            <a:r>
+              <a:rPr lang="en-US" sz="1140" dirty="0">
                 <a:solidFill>
                   <a:srgbClr val="17364A"/>
                 </a:solidFill>
@@ -11425,7 +11427,7 @@
               </a:rPr>
               <a:t>Human review checklist</a:t>
             </a:r>
-            <a:endParaRPr lang="en-US" sz="1220" dirty="0"/>
+            <a:endParaRPr lang="en-US" sz="1140" dirty="0"/>
           </a:p>
         </p:txBody>
       </p:sp>
@@ -11437,12 +11439,12 @@
         </p:nvSpPr>
         <p:spPr>
           <a:xfrm>
-            <a:off x="7635240" y="4184294"/>
-            <a:ext cx="3474720" cy="1466698"/>
+            <a:off x="7543800" y="4389120"/>
+            <a:ext cx="3611880" cy="1261872"/>
           </a:xfrm>
           <a:prstGeom prst="roundRect">
             <a:avLst>
-              <a:gd name="adj" fmla="val 7481"/>
+              <a:gd name="adj" fmla="val 8696"/>
             </a:avLst>
           </a:prstGeom>
           <a:solidFill>
@@ -11464,8 +11466,8 @@
         </p:nvSpPr>
         <p:spPr>
           <a:xfrm>
-            <a:off x="7799832" y="4330598"/>
-            <a:ext cx="3145536" cy="256032"/>
+            <a:off x="7708392" y="4517136"/>
+            <a:ext cx="3282696" cy="228600"/>
           </a:xfrm>
           <a:prstGeom prst="rect">
             <a:avLst/>
@@ -11481,7 +11483,7 @@
               <a:buNone/>
             </a:pPr>
             <a:r>
-              <a:rPr lang="en-US" sz="1300" b="1" dirty="0">
+              <a:rPr lang="en-US" sz="1220" b="1" dirty="0">
                 <a:solidFill>
                   <a:srgbClr val="0068B7"/>
                 </a:solidFill>
@@ -11491,7 +11493,7 @@
               </a:rPr>
               <a:t>Engagement move</a:t>
             </a:r>
-            <a:endParaRPr lang="en-US" sz="1300" dirty="0"/>
+            <a:endParaRPr lang="en-US" sz="1220" dirty="0"/>
           </a:p>
         </p:txBody>
       </p:sp>
@@ -11503,8 +11505,8 @@
         </p:nvSpPr>
         <p:spPr>
           <a:xfrm>
-            <a:off x="7799832" y="4659782"/>
-            <a:ext cx="3145536" cy="899770"/>
+            <a:off x="7708392" y="4828032"/>
+            <a:ext cx="3282696" cy="749808"/>
           </a:xfrm>
           <a:prstGeom prst="rect">
             <a:avLst/>
@@ -11522,7 +11524,7 @@
               <a:buNone/>
             </a:pPr>
             <a:r>
-              <a:rPr lang="en-US" sz="1320" dirty="0">
+              <a:rPr lang="en-US" sz="1220" dirty="0">
                 <a:solidFill>
                   <a:srgbClr val="17364A"/>
                 </a:solidFill>
@@ -11530,9 +11532,9 @@
                 <a:ea typeface="Aptos" pitchFamily="34" charset="-122"/>
                 <a:cs typeface="Aptos" pitchFamily="34" charset="-120"/>
               </a:rPr>
-              <a:t>Use the assignment to test whether you can explain the concept, apply it to a realistic public health situation, and identify what would need review before the work moves forward.</a:t>
-            </a:r>
-            <a:endParaRPr lang="en-US" sz="1320" dirty="0"/>
+              <a:t>Use the assignment to test whether you can explain the concept, apply it to a.</a:t>
+            </a:r>
+            <a:endParaRPr lang="en-US" sz="1220" dirty="0"/>
           </a:p>
         </p:txBody>
       </p:sp>
@@ -11823,8 +11825,8 @@
         </p:nvSpPr>
         <p:spPr>
           <a:xfrm>
-            <a:off x="868680" y="1508760"/>
-            <a:ext cx="6309360" cy="4160520"/>
+            <a:off x="822960" y="1463040"/>
+            <a:ext cx="6565392" cy="4343400"/>
           </a:xfrm>
           <a:prstGeom prst="rect">
             <a:avLst/>
@@ -11842,7 +11844,7 @@
               <a:buNone/>
             </a:pPr>
             <a:r>
-              <a:rPr lang="en-US" sz="2100" dirty="0">
+              <a:rPr lang="en-US" sz="1920" dirty="0">
                 <a:solidFill>
                   <a:srgbClr val="003A63"/>
                 </a:solidFill>
@@ -11852,14 +11854,14 @@
               </a:rPr>
               <a:t>• 1. What is NLP?</a:t>
             </a:r>
-            <a:endParaRPr lang="en-US" sz="2100" dirty="0"/>
-          </a:p>
-          <a:p>
-            <a:pPr indent="0" marL="0">
-              <a:buNone/>
-            </a:pPr>
-            <a:r>
-              <a:rPr lang="en-US" sz="2100" dirty="0">
+            <a:endParaRPr lang="en-US" sz="1920" dirty="0"/>
+          </a:p>
+          <a:p>
+            <a:pPr indent="0" marL="0">
+              <a:buNone/>
+            </a:pPr>
+            <a:r>
+              <a:rPr lang="en-US" sz="1920" dirty="0">
                 <a:solidFill>
                   <a:srgbClr val="003A63"/>
                 </a:solidFill>
@@ -11869,14 +11871,14 @@
               </a:rPr>
               <a:t>• 2. Which task is an example of information extraction?</a:t>
             </a:r>
-            <a:endParaRPr lang="en-US" sz="2100" dirty="0"/>
-          </a:p>
-          <a:p>
-            <a:pPr indent="0" marL="0">
-              <a:buNone/>
-            </a:pPr>
-            <a:r>
-              <a:rPr lang="en-US" sz="2100" dirty="0">
+            <a:endParaRPr lang="en-US" sz="1920" dirty="0"/>
+          </a:p>
+          <a:p>
+            <a:pPr indent="0" marL="0">
+              <a:buNone/>
+            </a:pPr>
+            <a:r>
+              <a:rPr lang="en-US" sz="1920" dirty="0">
                 <a:solidFill>
                   <a:srgbClr val="003A63"/>
                 </a:solidFill>
@@ -11886,7 +11888,7 @@
               </a:rPr>
               <a:t>• 3. Why is source verification important for NLP outputs?</a:t>
             </a:r>
-            <a:endParaRPr lang="en-US" sz="2100" dirty="0"/>
+            <a:endParaRPr lang="en-US" sz="1920" dirty="0"/>
           </a:p>
         </p:txBody>
       </p:sp>
@@ -11898,12 +11900,12 @@
         </p:nvSpPr>
         <p:spPr>
           <a:xfrm>
-            <a:off x="7635240" y="1325880"/>
-            <a:ext cx="3474720" cy="1207008"/>
+            <a:off x="7543800" y="1325880"/>
+            <a:ext cx="3611880" cy="1261872"/>
           </a:xfrm>
           <a:prstGeom prst="roundRect">
             <a:avLst>
-              <a:gd name="adj" fmla="val 9091"/>
+              <a:gd name="adj" fmla="val 8696"/>
             </a:avLst>
           </a:prstGeom>
           <a:solidFill>
@@ -11925,8 +11927,8 @@
         </p:nvSpPr>
         <p:spPr>
           <a:xfrm>
-            <a:off x="7799832" y="1472184"/>
-            <a:ext cx="3145536" cy="256032"/>
+            <a:off x="7708392" y="1453896"/>
+            <a:ext cx="3282696" cy="228600"/>
           </a:xfrm>
           <a:prstGeom prst="rect">
             <a:avLst/>
@@ -11942,7 +11944,7 @@
               <a:buNone/>
             </a:pPr>
             <a:r>
-              <a:rPr lang="en-US" sz="1300" b="1" dirty="0">
+              <a:rPr lang="en-US" sz="1220" b="1" dirty="0">
                 <a:solidFill>
                   <a:srgbClr val="0068B7"/>
                 </a:solidFill>
@@ -11952,7 +11954,7 @@
               </a:rPr>
               <a:t>Public health lens</a:t>
             </a:r>
-            <a:endParaRPr lang="en-US" sz="1300" dirty="0"/>
+            <a:endParaRPr lang="en-US" sz="1220" dirty="0"/>
           </a:p>
         </p:txBody>
       </p:sp>
@@ -11964,8 +11966,8 @@
         </p:nvSpPr>
         <p:spPr>
           <a:xfrm>
-            <a:off x="7799832" y="1801368"/>
-            <a:ext cx="3145536" cy="640080"/>
+            <a:off x="7708392" y="1764792"/>
+            <a:ext cx="3282696" cy="749808"/>
           </a:xfrm>
           <a:prstGeom prst="rect">
             <a:avLst/>
@@ -11983,7 +11985,7 @@
               <a:buNone/>
             </a:pPr>
             <a:r>
-              <a:rPr lang="en-US" sz="1320" dirty="0">
+              <a:rPr lang="en-US" sz="1220" dirty="0">
                 <a:solidFill>
                   <a:srgbClr val="17364A"/>
                 </a:solidFill>
@@ -11993,7 +11995,7 @@
               </a:rPr>
               <a:t>1. What is NLP?</a:t>
             </a:r>
-            <a:endParaRPr lang="en-US" sz="1320" dirty="0"/>
+            <a:endParaRPr lang="en-US" sz="1220" dirty="0"/>
           </a:p>
         </p:txBody>
       </p:sp>
@@ -12005,12 +12007,12 @@
         </p:nvSpPr>
         <p:spPr>
           <a:xfrm>
-            <a:off x="7635240" y="2670048"/>
-            <a:ext cx="3474720" cy="1377086"/>
+            <a:off x="7543800" y="2724912"/>
+            <a:ext cx="3611880" cy="1527048"/>
           </a:xfrm>
           <a:prstGeom prst="roundRect">
             <a:avLst>
-              <a:gd name="adj" fmla="val 7968"/>
+              <a:gd name="adj" fmla="val 7186"/>
             </a:avLst>
           </a:prstGeom>
           <a:solidFill>
@@ -12032,8 +12034,8 @@
         </p:nvSpPr>
         <p:spPr>
           <a:xfrm>
-            <a:off x="7799832" y="2816352"/>
-            <a:ext cx="3145536" cy="256032"/>
+            <a:off x="7708392" y="2852928"/>
+            <a:ext cx="3282696" cy="228600"/>
           </a:xfrm>
           <a:prstGeom prst="rect">
             <a:avLst/>
@@ -12049,7 +12051,7 @@
               <a:buNone/>
             </a:pPr>
             <a:r>
-              <a:rPr lang="en-US" sz="1300" b="1" dirty="0">
+              <a:rPr lang="en-US" sz="1220" b="1" dirty="0">
                 <a:solidFill>
                   <a:srgbClr val="0068B7"/>
                 </a:solidFill>
@@ -12059,7 +12061,7 @@
               </a:rPr>
               <a:t>Concept checkpoints</a:t>
             </a:r>
-            <a:endParaRPr lang="en-US" sz="1300" dirty="0"/>
+            <a:endParaRPr lang="en-US" sz="1220" dirty="0"/>
           </a:p>
         </p:txBody>
       </p:sp>
@@ -12071,8 +12073,8 @@
         </p:nvSpPr>
         <p:spPr>
           <a:xfrm>
-            <a:off x="7818120" y="3182112"/>
-            <a:ext cx="3090672" cy="718718"/>
+            <a:off x="7726680" y="3182112"/>
+            <a:ext cx="3227832" cy="960120"/>
           </a:xfrm>
           <a:prstGeom prst="rect">
             <a:avLst/>
@@ -12090,7 +12092,7 @@
               <a:buNone/>
             </a:pPr>
             <a:r>
-              <a:rPr lang="en-US" sz="1220" dirty="0">
+              <a:rPr lang="en-US" sz="1140" dirty="0">
                 <a:solidFill>
                   <a:srgbClr val="17364A"/>
                 </a:solidFill>
@@ -12100,14 +12102,14 @@
               </a:rPr>
               <a:t>1.</a:t>
             </a:r>
-            <a:endParaRPr lang="en-US" sz="1220" dirty="0"/>
-          </a:p>
-          <a:p>
-            <a:pPr indent="0" marL="0">
-              <a:buNone/>
-            </a:pPr>
-            <a:r>
-              <a:rPr lang="en-US" sz="1220" dirty="0">
+            <a:endParaRPr lang="en-US" sz="1140" dirty="0"/>
+          </a:p>
+          <a:p>
+            <a:pPr indent="0" marL="0">
+              <a:buNone/>
+            </a:pPr>
+            <a:r>
+              <a:rPr lang="en-US" sz="1140" dirty="0">
                 <a:solidFill>
                   <a:srgbClr val="17364A"/>
                 </a:solidFill>
@@ -12117,14 +12119,14 @@
               </a:rPr>
               <a:t>What is NLP?</a:t>
             </a:r>
-            <a:endParaRPr lang="en-US" sz="1220" dirty="0"/>
-          </a:p>
-          <a:p>
-            <a:pPr indent="0" marL="0">
-              <a:buNone/>
-            </a:pPr>
-            <a:r>
-              <a:rPr lang="en-US" sz="1220" dirty="0">
+            <a:endParaRPr lang="en-US" sz="1140" dirty="0"/>
+          </a:p>
+          <a:p>
+            <a:pPr indent="0" marL="0">
+              <a:buNone/>
+            </a:pPr>
+            <a:r>
+              <a:rPr lang="en-US" sz="1140" dirty="0">
                 <a:solidFill>
                   <a:srgbClr val="17364A"/>
                 </a:solidFill>
@@ -12134,7 +12136,7 @@
               </a:rPr>
               <a:t>2.</a:t>
             </a:r>
-            <a:endParaRPr lang="en-US" sz="1220" dirty="0"/>
+            <a:endParaRPr lang="en-US" sz="1140" dirty="0"/>
           </a:p>
         </p:txBody>
       </p:sp>
@@ -12146,12 +12148,12 @@
         </p:nvSpPr>
         <p:spPr>
           <a:xfrm>
-            <a:off x="7635240" y="4184294"/>
-            <a:ext cx="3474720" cy="1466698"/>
+            <a:off x="7543800" y="4389120"/>
+            <a:ext cx="3611880" cy="1261872"/>
           </a:xfrm>
           <a:prstGeom prst="roundRect">
             <a:avLst>
-              <a:gd name="adj" fmla="val 7481"/>
+              <a:gd name="adj" fmla="val 8696"/>
             </a:avLst>
           </a:prstGeom>
           <a:solidFill>
@@ -12173,8 +12175,8 @@
         </p:nvSpPr>
         <p:spPr>
           <a:xfrm>
-            <a:off x="7799832" y="4330598"/>
-            <a:ext cx="3145536" cy="256032"/>
+            <a:off x="7708392" y="4517136"/>
+            <a:ext cx="3282696" cy="228600"/>
           </a:xfrm>
           <a:prstGeom prst="rect">
             <a:avLst/>
@@ -12190,7 +12192,7 @@
               <a:buNone/>
             </a:pPr>
             <a:r>
-              <a:rPr lang="en-US" sz="1300" b="1" dirty="0">
+              <a:rPr lang="en-US" sz="1220" b="1" dirty="0">
                 <a:solidFill>
                   <a:srgbClr val="0068B7"/>
                 </a:solidFill>
@@ -12200,7 +12202,7 @@
               </a:rPr>
               <a:t>Engagement move</a:t>
             </a:r>
-            <a:endParaRPr lang="en-US" sz="1300" dirty="0"/>
+            <a:endParaRPr lang="en-US" sz="1220" dirty="0"/>
           </a:p>
         </p:txBody>
       </p:sp>
@@ -12212,8 +12214,8 @@
         </p:nvSpPr>
         <p:spPr>
           <a:xfrm>
-            <a:off x="7799832" y="4659782"/>
-            <a:ext cx="3145536" cy="899770"/>
+            <a:off x="7708392" y="4828032"/>
+            <a:ext cx="3282696" cy="749808"/>
           </a:xfrm>
           <a:prstGeom prst="rect">
             <a:avLst/>
@@ -12231,7 +12233,7 @@
               <a:buNone/>
             </a:pPr>
             <a:r>
-              <a:rPr lang="en-US" sz="1320" dirty="0">
+              <a:rPr lang="en-US" sz="1220" dirty="0">
                 <a:solidFill>
                   <a:srgbClr val="17364A"/>
                 </a:solidFill>
@@ -12239,9 +12241,9 @@
                 <a:ea typeface="Aptos" pitchFamily="34" charset="-122"/>
                 <a:cs typeface="Aptos" pitchFamily="34" charset="-120"/>
               </a:rPr>
-              <a:t>Use the assignment to test whether you can explain the concept, apply it to a realistic public health situation, and identify what would need review before the work moves forward.</a:t>
-            </a:r>
-            <a:endParaRPr lang="en-US" sz="1320" dirty="0"/>
+              <a:t>Use the assignment to test whether you can explain the concept, apply it to a.</a:t>
+            </a:r>
+            <a:endParaRPr lang="en-US" sz="1220" dirty="0"/>
           </a:p>
         </p:txBody>
       </p:sp>
@@ -12532,8 +12534,8 @@
         </p:nvSpPr>
         <p:spPr>
           <a:xfrm>
-            <a:off x="868680" y="1508760"/>
-            <a:ext cx="6309360" cy="4160520"/>
+            <a:off x="822960" y="1463040"/>
+            <a:ext cx="6565392" cy="4343400"/>
           </a:xfrm>
           <a:prstGeom prst="rect">
             <a:avLst/>
@@ -12551,7 +12553,7 @@
               <a:buNone/>
             </a:pPr>
             <a:r>
-              <a:rPr lang="en-US" sz="2100" dirty="0">
+              <a:rPr lang="en-US" sz="1920" dirty="0">
                 <a:solidFill>
                   <a:srgbClr val="003A63"/>
                 </a:solidFill>
@@ -12561,14 +12563,14 @@
               </a:rPr>
               <a:t>• NIST Artificial Intelligence Risk Management Framework:.</a:t>
             </a:r>
-            <a:endParaRPr lang="en-US" sz="2100" dirty="0"/>
-          </a:p>
-          <a:p>
-            <a:pPr indent="0" marL="0">
-              <a:buNone/>
-            </a:pPr>
-            <a:r>
-              <a:rPr lang="en-US" sz="2100" dirty="0">
+            <a:endParaRPr lang="en-US" sz="1920" dirty="0"/>
+          </a:p>
+          <a:p>
+            <a:pPr indent="0" marL="0">
+              <a:buNone/>
+            </a:pPr>
+            <a:r>
+              <a:rPr lang="en-US" sz="1920" dirty="0">
                 <a:solidFill>
                   <a:srgbClr val="003A63"/>
                 </a:solidFill>
@@ -12578,14 +12580,14 @@
               </a:rPr>
               <a:t>• NIST AI RMF Generative AI Profile:.</a:t>
             </a:r>
-            <a:endParaRPr lang="en-US" sz="2100" dirty="0"/>
-          </a:p>
-          <a:p>
-            <a:pPr indent="0" marL="0">
-              <a:buNone/>
-            </a:pPr>
-            <a:r>
-              <a:rPr lang="en-US" sz="2100" dirty="0">
+            <a:endParaRPr lang="en-US" sz="1920" dirty="0"/>
+          </a:p>
+          <a:p>
+            <a:pPr indent="0" marL="0">
+              <a:buNone/>
+            </a:pPr>
+            <a:r>
+              <a:rPr lang="en-US" sz="1920" dirty="0">
                 <a:solidFill>
                   <a:srgbClr val="003A63"/>
                 </a:solidFill>
@@ -12593,9 +12595,9 @@
                 <a:ea typeface="Aptos" pitchFamily="34" charset="-122"/>
                 <a:cs typeface="Aptos" pitchFamily="34" charset="-120"/>
               </a:rPr>
-              <a:t>• WHO Guidance on Large Multi-Modal Models: https://www.who.int/publications/i/item/9789240084759</a:t>
-            </a:r>
-            <a:endParaRPr lang="en-US" sz="2100" dirty="0"/>
+              <a:t>• WHO Guidance on Large Multi-Modal Models:.</a:t>
+            </a:r>
+            <a:endParaRPr lang="en-US" sz="1920" dirty="0"/>
           </a:p>
         </p:txBody>
       </p:sp>
@@ -12607,12 +12609,12 @@
         </p:nvSpPr>
         <p:spPr>
           <a:xfrm>
-            <a:off x="7635240" y="1325880"/>
-            <a:ext cx="3474720" cy="1207008"/>
+            <a:off x="7543800" y="1325880"/>
+            <a:ext cx="3611880" cy="1261872"/>
           </a:xfrm>
           <a:prstGeom prst="roundRect">
             <a:avLst>
-              <a:gd name="adj" fmla="val 9091"/>
+              <a:gd name="adj" fmla="val 8696"/>
             </a:avLst>
           </a:prstGeom>
           <a:solidFill>
@@ -12634,8 +12636,8 @@
         </p:nvSpPr>
         <p:spPr>
           <a:xfrm>
-            <a:off x="7799832" y="1472184"/>
-            <a:ext cx="3145536" cy="256032"/>
+            <a:off x="7708392" y="1453896"/>
+            <a:ext cx="3282696" cy="228600"/>
           </a:xfrm>
           <a:prstGeom prst="rect">
             <a:avLst/>
@@ -12651,7 +12653,7 @@
               <a:buNone/>
             </a:pPr>
             <a:r>
-              <a:rPr lang="en-US" sz="1300" b="1" dirty="0">
+              <a:rPr lang="en-US" sz="1220" b="1" dirty="0">
                 <a:solidFill>
                   <a:srgbClr val="0068B7"/>
                 </a:solidFill>
@@ -12661,7 +12663,7 @@
               </a:rPr>
               <a:t>Public health lens</a:t>
             </a:r>
-            <a:endParaRPr lang="en-US" sz="1300" dirty="0"/>
+            <a:endParaRPr lang="en-US" sz="1220" dirty="0"/>
           </a:p>
         </p:txBody>
       </p:sp>
@@ -12673,8 +12675,8 @@
         </p:nvSpPr>
         <p:spPr>
           <a:xfrm>
-            <a:off x="7799832" y="1801368"/>
-            <a:ext cx="3145536" cy="640080"/>
+            <a:off x="7708392" y="1764792"/>
+            <a:ext cx="3282696" cy="749808"/>
           </a:xfrm>
           <a:prstGeom prst="rect">
             <a:avLst/>
@@ -12692,7 +12694,7 @@
               <a:buNone/>
             </a:pPr>
             <a:r>
-              <a:rPr lang="en-US" sz="1320" dirty="0">
+              <a:rPr lang="en-US" sz="1220" dirty="0">
                 <a:solidFill>
                   <a:srgbClr val="17364A"/>
                 </a:solidFill>
@@ -12702,7 +12704,7 @@
               </a:rPr>
               <a:t>NIST Artificial Intelligence Risk Management Framework:.</a:t>
             </a:r>
-            <a:endParaRPr lang="en-US" sz="1320" dirty="0"/>
+            <a:endParaRPr lang="en-US" sz="1220" dirty="0"/>
           </a:p>
         </p:txBody>
       </p:sp>
@@ -12714,12 +12716,12 @@
         </p:nvSpPr>
         <p:spPr>
           <a:xfrm>
-            <a:off x="7635240" y="2670048"/>
-            <a:ext cx="3474720" cy="1377086"/>
+            <a:off x="7543800" y="2724912"/>
+            <a:ext cx="3611880" cy="1527048"/>
           </a:xfrm>
           <a:prstGeom prst="roundRect">
             <a:avLst>
-              <a:gd name="adj" fmla="val 7968"/>
+              <a:gd name="adj" fmla="val 7186"/>
             </a:avLst>
           </a:prstGeom>
           <a:solidFill>
@@ -12741,8 +12743,8 @@
         </p:nvSpPr>
         <p:spPr>
           <a:xfrm>
-            <a:off x="7799832" y="2816352"/>
-            <a:ext cx="3145536" cy="256032"/>
+            <a:off x="7708392" y="2852928"/>
+            <a:ext cx="3282696" cy="228600"/>
           </a:xfrm>
           <a:prstGeom prst="rect">
             <a:avLst/>
@@ -12758,7 +12760,7 @@
               <a:buNone/>
             </a:pPr>
             <a:r>
-              <a:rPr lang="en-US" sz="1300" b="1" dirty="0">
+              <a:rPr lang="en-US" sz="1220" b="1" dirty="0">
                 <a:solidFill>
                   <a:srgbClr val="0068B7"/>
                 </a:solidFill>
@@ -12768,7 +12770,7 @@
               </a:rPr>
               <a:t>Concept checkpoints</a:t>
             </a:r>
-            <a:endParaRPr lang="en-US" sz="1300" dirty="0"/>
+            <a:endParaRPr lang="en-US" sz="1220" dirty="0"/>
           </a:p>
         </p:txBody>
       </p:sp>
@@ -12780,8 +12782,8 @@
         </p:nvSpPr>
         <p:spPr>
           <a:xfrm>
-            <a:off x="7818120" y="3182112"/>
-            <a:ext cx="3090672" cy="718718"/>
+            <a:off x="7726680" y="3182112"/>
+            <a:ext cx="3227832" cy="960120"/>
           </a:xfrm>
           <a:prstGeom prst="rect">
             <a:avLst/>
@@ -12799,7 +12801,7 @@
               <a:buNone/>
             </a:pPr>
             <a:r>
-              <a:rPr lang="en-US" sz="1220" dirty="0">
+              <a:rPr lang="en-US" sz="1140" dirty="0">
                 <a:solidFill>
                   <a:srgbClr val="17364A"/>
                 </a:solidFill>
@@ -12807,16 +12809,16 @@
                 <a:ea typeface="Aptos" pitchFamily="34" charset="-122"/>
                 <a:cs typeface="Aptos" pitchFamily="34" charset="-120"/>
               </a:rPr>
-              <a:t>NIST Artificial Intelligence Risk Management Framework:.</a:t>
-            </a:r>
-            <a:endParaRPr lang="en-US" sz="1220" dirty="0"/>
-          </a:p>
-          <a:p>
-            <a:pPr indent="0" marL="0">
-              <a:buNone/>
-            </a:pPr>
-            <a:r>
-              <a:rPr lang="en-US" sz="1220" dirty="0">
+              <a:t>NIST Artificial Intelligence Risk Management.</a:t>
+            </a:r>
+            <a:endParaRPr lang="en-US" sz="1140" dirty="0"/>
+          </a:p>
+          <a:p>
+            <a:pPr indent="0" marL="0">
+              <a:buNone/>
+            </a:pPr>
+            <a:r>
+              <a:rPr lang="en-US" sz="1140" dirty="0">
                 <a:solidFill>
                   <a:srgbClr val="17364A"/>
                 </a:solidFill>
@@ -12826,14 +12828,14 @@
               </a:rPr>
               <a:t>CDC Public Health Data Strategy:.</a:t>
             </a:r>
-            <a:endParaRPr lang="en-US" sz="1220" dirty="0"/>
-          </a:p>
-          <a:p>
-            <a:pPr indent="0" marL="0">
-              <a:buNone/>
-            </a:pPr>
-            <a:r>
-              <a:rPr lang="en-US" sz="1220" dirty="0">
+            <a:endParaRPr lang="en-US" sz="1140" dirty="0"/>
+          </a:p>
+          <a:p>
+            <a:pPr indent="0" marL="0">
+              <a:buNone/>
+            </a:pPr>
+            <a:r>
+              <a:rPr lang="en-US" sz="1140" dirty="0">
                 <a:solidFill>
                   <a:srgbClr val="17364A"/>
                 </a:solidFill>
@@ -12841,9 +12843,9 @@
                 <a:ea typeface="Aptos" pitchFamily="34" charset="-122"/>
                 <a:cs typeface="Aptos" pitchFamily="34" charset="-120"/>
               </a:rPr>
-              <a:t>Agency privacy, records, data governance, and program policies</a:t>
-            </a:r>
-            <a:endParaRPr lang="en-US" sz="1220" dirty="0"/>
+              <a:t>Agency privacy, records, data governance, and.</a:t>
+            </a:r>
+            <a:endParaRPr lang="en-US" sz="1140" dirty="0"/>
           </a:p>
         </p:txBody>
       </p:sp>
@@ -12855,12 +12857,12 @@
         </p:nvSpPr>
         <p:spPr>
           <a:xfrm>
-            <a:off x="7635240" y="4184294"/>
-            <a:ext cx="3474720" cy="1466698"/>
+            <a:off x="7543800" y="4389120"/>
+            <a:ext cx="3611880" cy="1261872"/>
           </a:xfrm>
           <a:prstGeom prst="roundRect">
             <a:avLst>
-              <a:gd name="adj" fmla="val 7481"/>
+              <a:gd name="adj" fmla="val 8696"/>
             </a:avLst>
           </a:prstGeom>
           <a:solidFill>
@@ -12882,8 +12884,8 @@
         </p:nvSpPr>
         <p:spPr>
           <a:xfrm>
-            <a:off x="7799832" y="4330598"/>
-            <a:ext cx="3145536" cy="256032"/>
+            <a:off x="7708392" y="4517136"/>
+            <a:ext cx="3282696" cy="228600"/>
           </a:xfrm>
           <a:prstGeom prst="rect">
             <a:avLst/>
@@ -12899,7 +12901,7 @@
               <a:buNone/>
             </a:pPr>
             <a:r>
-              <a:rPr lang="en-US" sz="1300" b="1" dirty="0">
+              <a:rPr lang="en-US" sz="1220" b="1" dirty="0">
                 <a:solidFill>
                   <a:srgbClr val="0068B7"/>
                 </a:solidFill>
@@ -12909,7 +12911,7 @@
               </a:rPr>
               <a:t>Engagement move</a:t>
             </a:r>
-            <a:endParaRPr lang="en-US" sz="1300" dirty="0"/>
+            <a:endParaRPr lang="en-US" sz="1220" dirty="0"/>
           </a:p>
         </p:txBody>
       </p:sp>
@@ -12921,8 +12923,8 @@
         </p:nvSpPr>
         <p:spPr>
           <a:xfrm>
-            <a:off x="7799832" y="4659782"/>
-            <a:ext cx="3145536" cy="899770"/>
+            <a:off x="7708392" y="4828032"/>
+            <a:ext cx="3282696" cy="749808"/>
           </a:xfrm>
           <a:prstGeom prst="rect">
             <a:avLst/>
@@ -12940,7 +12942,7 @@
               <a:buNone/>
             </a:pPr>
             <a:r>
-              <a:rPr lang="en-US" sz="1320" dirty="0">
+              <a:rPr lang="en-US" sz="1220" dirty="0">
                 <a:solidFill>
                   <a:srgbClr val="17364A"/>
                 </a:solidFill>
@@ -12948,9 +12950,9 @@
                 <a:ea typeface="Aptos" pitchFamily="34" charset="-122"/>
                 <a:cs typeface="Aptos" pitchFamily="34" charset="-120"/>
               </a:rPr>
-              <a:t>Use the concept to plan transparent communication, gather stakeholder input, protect trust, and make sure affected communities are considered early.</a:t>
-            </a:r>
-            <a:endParaRPr lang="en-US" sz="1320" dirty="0"/>
+              <a:t>Use the concept to plan transparent communication, gather stakeholder input,.</a:t>
+            </a:r>
+            <a:endParaRPr lang="en-US" sz="1220" dirty="0"/>
           </a:p>
         </p:txBody>
       </p:sp>
@@ -13268,7 +13270,7 @@
                 <a:ea typeface="Aptos" pitchFamily="34" charset="-122"/>
                 <a:cs typeface="Aptos" pitchFamily="34" charset="-120"/>
               </a:rPr>
-              <a:t>• Play 11: Build and Deploy AI Solutions - This lesson informs Play 11 by helping learners.</a:t>
+              <a:t>• Play 11: Build and Deploy AI Solutions - This lesson informs Play 11 by.</a:t>
             </a:r>
             <a:endParaRPr lang="en-US" sz="1900" dirty="0"/>
           </a:p>
@@ -13285,7 +13287,7 @@
                 <a:ea typeface="Aptos" pitchFamily="34" charset="-122"/>
                 <a:cs typeface="Aptos" pitchFamily="34" charset="-120"/>
               </a:rPr>
-              <a:t>• Play 2: Readiness Assessment - This lesson informs Play 2 by helping learners connect the.</a:t>
+              <a:t>• Play 2: Readiness Assessment - This lesson informs Play 2 by helping.</a:t>
             </a:r>
             <a:endParaRPr lang="en-US" sz="1900" dirty="0"/>
           </a:p>
@@ -13302,7 +13304,7 @@
                 <a:ea typeface="Aptos" pitchFamily="34" charset="-122"/>
                 <a:cs typeface="Aptos" pitchFamily="34" charset="-120"/>
               </a:rPr>
-              <a:t>• Play 7: Prioritize Use Cases - This lesson informs Play 7 by helping learners connect the.</a:t>
+              <a:t>• Play 7: Prioritize Use Cases - This lesson informs Play 7 by helping.</a:t>
             </a:r>
             <a:endParaRPr lang="en-US" sz="1900" dirty="0"/>
           </a:p>
@@ -13319,7 +13321,7 @@
                 <a:ea typeface="Aptos" pitchFamily="34" charset="-122"/>
                 <a:cs typeface="Aptos" pitchFamily="34" charset="-120"/>
               </a:rPr>
-              <a:t>• Play 1: Vision &amp; Guardrails - This lesson informs Play 1 by helping learners connect the.</a:t>
+              <a:t>• Play 1: Vision &amp; Guardrails - This lesson informs Play 1 by helping learners.</a:t>
             </a:r>
             <a:endParaRPr lang="en-US" sz="1900" dirty="0"/>
           </a:p>
@@ -13360,8 +13362,8 @@
         </p:nvSpPr>
         <p:spPr>
           <a:xfrm>
-            <a:off x="8211312" y="1563624"/>
-            <a:ext cx="2734056" cy="256032"/>
+            <a:off x="8211312" y="1545336"/>
+            <a:ext cx="2734056" cy="228600"/>
           </a:xfrm>
           <a:prstGeom prst="rect">
             <a:avLst/>
@@ -13377,7 +13379,7 @@
               <a:buNone/>
             </a:pPr>
             <a:r>
-              <a:rPr lang="en-US" sz="1300" b="1" dirty="0">
+              <a:rPr lang="en-US" sz="1220" b="1" dirty="0">
                 <a:solidFill>
                   <a:srgbClr val="0068B7"/>
                 </a:solidFill>
@@ -13387,7 +13389,7 @@
               </a:rPr>
               <a:t>Apply the lesson</a:t>
             </a:r>
-            <a:endParaRPr lang="en-US" sz="1300" dirty="0"/>
+            <a:endParaRPr lang="en-US" sz="1220" dirty="0"/>
           </a:p>
         </p:txBody>
       </p:sp>
@@ -13399,8 +13401,8 @@
         </p:nvSpPr>
         <p:spPr>
           <a:xfrm>
-            <a:off x="8211312" y="1892808"/>
-            <a:ext cx="2734056" cy="1536192"/>
+            <a:off x="8211312" y="1856232"/>
+            <a:ext cx="2734056" cy="1591056"/>
           </a:xfrm>
           <a:prstGeom prst="rect">
             <a:avLst/>
@@ -13418,7 +13420,7 @@
               <a:buNone/>
             </a:pPr>
             <a:r>
-              <a:rPr lang="en-US" sz="1320" dirty="0">
+              <a:rPr lang="en-US" sz="1220" dirty="0">
                 <a:solidFill>
                   <a:srgbClr val="17364A"/>
                 </a:solidFill>
@@ -13426,9 +13428,9 @@
                 <a:ea typeface="Aptos" pitchFamily="34" charset="-122"/>
                 <a:cs typeface="Aptos" pitchFamily="34" charset="-120"/>
               </a:rPr>
-              <a:t>Use the related plays to identify decisions, participants, timing, approvals, and documentation needed for responsible implementation.</a:t>
-            </a:r>
-            <a:endParaRPr lang="en-US" sz="1320" dirty="0"/>
+              <a:t>Use the related plays to identify decisions, participants, timing, approvals,.</a:t>
+            </a:r>
+            <a:endParaRPr lang="en-US" sz="1220" dirty="0"/>
           </a:p>
         </p:txBody>
       </p:sp>
@@ -13467,8 +13469,8 @@
         </p:nvSpPr>
         <p:spPr>
           <a:xfrm>
-            <a:off x="8211312" y="3941064"/>
-            <a:ext cx="2734056" cy="256032"/>
+            <a:off x="8211312" y="3922776"/>
+            <a:ext cx="2734056" cy="228600"/>
           </a:xfrm>
           <a:prstGeom prst="rect">
             <a:avLst/>
@@ -13484,7 +13486,7 @@
               <a:buNone/>
             </a:pPr>
             <a:r>
-              <a:rPr lang="en-US" sz="1300" b="1" dirty="0">
+              <a:rPr lang="en-US" sz="1220" b="1" dirty="0">
                 <a:solidFill>
                   <a:srgbClr val="0068B7"/>
                 </a:solidFill>
@@ -13494,7 +13496,7 @@
               </a:rPr>
               <a:t>Use the play links to</a:t>
             </a:r>
-            <a:endParaRPr lang="en-US" sz="1300" dirty="0"/>
+            <a:endParaRPr lang="en-US" sz="1220" dirty="0"/>
           </a:p>
         </p:txBody>
       </p:sp>
@@ -13506,8 +13508,8 @@
         </p:nvSpPr>
         <p:spPr>
           <a:xfrm>
-            <a:off x="8229600" y="4306824"/>
-            <a:ext cx="2679192" cy="941832"/>
+            <a:off x="8229600" y="4251960"/>
+            <a:ext cx="2679192" cy="1033272"/>
           </a:xfrm>
           <a:prstGeom prst="rect">
             <a:avLst/>
@@ -13525,7 +13527,7 @@
               <a:buNone/>
             </a:pPr>
             <a:r>
-              <a:rPr lang="en-US" sz="1220" dirty="0">
+              <a:rPr lang="en-US" sz="1140" dirty="0">
                 <a:solidFill>
                   <a:srgbClr val="17364A"/>
                 </a:solidFill>
@@ -13535,14 +13537,14 @@
               </a:rPr>
               <a:t>Locate the decision point in the playbook sequence.</a:t>
             </a:r>
-            <a:endParaRPr lang="en-US" sz="1220" dirty="0"/>
-          </a:p>
-          <a:p>
-            <a:pPr indent="0" marL="0">
-              <a:buNone/>
-            </a:pPr>
-            <a:r>
-              <a:rPr lang="en-US" sz="1220" dirty="0">
+            <a:endParaRPr lang="en-US" sz="1140" dirty="0"/>
+          </a:p>
+          <a:p>
+            <a:pPr indent="0" marL="0">
+              <a:buNone/>
+            </a:pPr>
+            <a:r>
+              <a:rPr lang="en-US" sz="1140" dirty="0">
                 <a:solidFill>
                   <a:srgbClr val="17364A"/>
                 </a:solidFill>
@@ -13552,14 +13554,14 @@
               </a:rPr>
               <a:t>Identify who should participate in the work.</a:t>
             </a:r>
-            <a:endParaRPr lang="en-US" sz="1220" dirty="0"/>
-          </a:p>
-          <a:p>
-            <a:pPr indent="0" marL="0">
-              <a:buNone/>
-            </a:pPr>
-            <a:r>
-              <a:rPr lang="en-US" sz="1220" dirty="0">
+            <a:endParaRPr lang="en-US" sz="1140" dirty="0"/>
+          </a:p>
+          <a:p>
+            <a:pPr indent="0" marL="0">
+              <a:buNone/>
+            </a:pPr>
+            <a:r>
+              <a:rPr lang="en-US" sz="1140" dirty="0">
                 <a:solidFill>
                   <a:srgbClr val="17364A"/>
                 </a:solidFill>
@@ -13567,9 +13569,9 @@
                 <a:ea typeface="Aptos" pitchFamily="34" charset="-122"/>
                 <a:cs typeface="Aptos" pitchFamily="34" charset="-120"/>
               </a:rPr>
-              <a:t>Document the review, approval, or implementation step.</a:t>
-            </a:r>
-            <a:endParaRPr lang="en-US" sz="1220" dirty="0"/>
+              <a:t>Document the review, approval, or implementation.</a:t>
+            </a:r>
+            <a:endParaRPr lang="en-US" sz="1140" dirty="0"/>
           </a:p>
         </p:txBody>
       </p:sp>
@@ -13887,7 +13889,7 @@
                 <a:ea typeface="Aptos" pitchFamily="34" charset="-122"/>
                 <a:cs typeface="Aptos" pitchFamily="34" charset="-120"/>
               </a:rPr>
-              <a:t>• Tool 4: AI Policy Landscape Scan (Worksheet) - Use AI Policy Landscape Scan to translate this.</a:t>
+              <a:t>• Tool 4: AI Policy Landscape Scan (Worksheet) - Use AI Policy Landscape Scan.</a:t>
             </a:r>
             <a:endParaRPr lang="en-US" sz="1850" dirty="0"/>
           </a:p>
@@ -13904,7 +13906,7 @@
                 <a:ea typeface="Aptos" pitchFamily="34" charset="-122"/>
                 <a:cs typeface="Aptos" pitchFamily="34" charset="-120"/>
               </a:rPr>
-              <a:t>• Tool 5: AI Environmental and Resource Impact Review (Checklist) - Use AI Environmental and.</a:t>
+              <a:t>• Tool 5: AI Environmental and Resource Impact Review (Checklist) - Use AI.</a:t>
             </a:r>
             <a:endParaRPr lang="en-US" sz="1850" dirty="0"/>
           </a:p>
@@ -13921,7 +13923,7 @@
                 <a:ea typeface="Aptos" pitchFamily="34" charset="-122"/>
                 <a:cs typeface="Aptos" pitchFamily="34" charset="-120"/>
               </a:rPr>
-              <a:t>• Tool 6: Human-Centered AI Decision Rule Checklist (Checklist) - Use Human-Centered AI Decision.</a:t>
+              <a:t>• Tool 6: Human-Centered AI Decision Rule Checklist (Checklist) - Use.</a:t>
             </a:r>
             <a:endParaRPr lang="en-US" sz="1850" dirty="0"/>
           </a:p>
@@ -13938,7 +13940,7 @@
                 <a:ea typeface="Aptos" pitchFamily="34" charset="-122"/>
                 <a:cs typeface="Aptos" pitchFamily="34" charset="-120"/>
               </a:rPr>
-              <a:t>• Tool 8: AI Project Charter (Planning) - Use AI Project Charter to translate this lesson into a.</a:t>
+              <a:t>• Tool 8: AI Project Charter (Planning) - Use AI Project Charter to translate.</a:t>
             </a:r>
             <a:endParaRPr lang="en-US" sz="1850" dirty="0"/>
           </a:p>
@@ -13979,8 +13981,8 @@
         </p:nvSpPr>
         <p:spPr>
           <a:xfrm>
-            <a:off x="8211312" y="1563624"/>
-            <a:ext cx="2734056" cy="256032"/>
+            <a:off x="8211312" y="1545336"/>
+            <a:ext cx="2734056" cy="228600"/>
           </a:xfrm>
           <a:prstGeom prst="rect">
             <a:avLst/>
@@ -13996,7 +13998,7 @@
               <a:buNone/>
             </a:pPr>
             <a:r>
-              <a:rPr lang="en-US" sz="1300" b="1" dirty="0">
+              <a:rPr lang="en-US" sz="1220" b="1" dirty="0">
                 <a:solidFill>
                   <a:srgbClr val="0068B7"/>
                 </a:solidFill>
@@ -14006,7 +14008,7 @@
               </a:rPr>
               <a:t>Use the tools</a:t>
             </a:r>
-            <a:endParaRPr lang="en-US" sz="1300" dirty="0"/>
+            <a:endParaRPr lang="en-US" sz="1220" dirty="0"/>
           </a:p>
         </p:txBody>
       </p:sp>
@@ -14018,8 +14020,8 @@
         </p:nvSpPr>
         <p:spPr>
           <a:xfrm>
-            <a:off x="8211312" y="1892808"/>
-            <a:ext cx="2734056" cy="1536192"/>
+            <a:off x="8211312" y="1856232"/>
+            <a:ext cx="2734056" cy="1591056"/>
           </a:xfrm>
           <a:prstGeom prst="rect">
             <a:avLst/>
@@ -14037,7 +14039,7 @@
               <a:buNone/>
             </a:pPr>
             <a:r>
-              <a:rPr lang="en-US" sz="1320" dirty="0">
+              <a:rPr lang="en-US" sz="1220" dirty="0">
                 <a:solidFill>
                   <a:srgbClr val="17364A"/>
                 </a:solidFill>
@@ -14045,9 +14047,9 @@
                 <a:ea typeface="Aptos" pitchFamily="34" charset="-122"/>
                 <a:cs typeface="Aptos" pitchFamily="34" charset="-120"/>
               </a:rPr>
-              <a:t>Use linked tools when your department needs a structured worksheet, template, checklist, review process, or documentation artifact.</a:t>
-            </a:r>
-            <a:endParaRPr lang="en-US" sz="1320" dirty="0"/>
+              <a:t>Use linked tools when your department needs a structured worksheet, template,.</a:t>
+            </a:r>
+            <a:endParaRPr lang="en-US" sz="1220" dirty="0"/>
           </a:p>
         </p:txBody>
       </p:sp>
@@ -14086,8 +14088,8 @@
         </p:nvSpPr>
         <p:spPr>
           <a:xfrm>
-            <a:off x="8211312" y="3941064"/>
-            <a:ext cx="2734056" cy="256032"/>
+            <a:off x="8211312" y="3922776"/>
+            <a:ext cx="2734056" cy="228600"/>
           </a:xfrm>
           <a:prstGeom prst="rect">
             <a:avLst/>
@@ -14103,7 +14105,7 @@
               <a:buNone/>
             </a:pPr>
             <a:r>
-              <a:rPr lang="en-US" sz="1300" b="1" dirty="0">
+              <a:rPr lang="en-US" sz="1220" b="1" dirty="0">
                 <a:solidFill>
                   <a:srgbClr val="0068B7"/>
                 </a:solidFill>
@@ -14113,7 +14115,7 @@
               </a:rPr>
               <a:t>Tool selection cues</a:t>
             </a:r>
-            <a:endParaRPr lang="en-US" sz="1300" dirty="0"/>
+            <a:endParaRPr lang="en-US" sz="1220" dirty="0"/>
           </a:p>
         </p:txBody>
       </p:sp>
@@ -14125,8 +14127,8 @@
         </p:nvSpPr>
         <p:spPr>
           <a:xfrm>
-            <a:off x="8229600" y="4306824"/>
-            <a:ext cx="2679192" cy="941832"/>
+            <a:off x="8229600" y="4251960"/>
+            <a:ext cx="2679192" cy="1033272"/>
           </a:xfrm>
           <a:prstGeom prst="rect">
             <a:avLst/>
@@ -14144,7 +14146,7 @@
               <a:buNone/>
             </a:pPr>
             <a:r>
-              <a:rPr lang="en-US" sz="1220" dirty="0">
+              <a:rPr lang="en-US" sz="1140" dirty="0">
                 <a:solidFill>
                   <a:srgbClr val="17364A"/>
                 </a:solidFill>
@@ -14154,14 +14156,14 @@
               </a:rPr>
               <a:t>Use a tool when no comparable local process exists.</a:t>
             </a:r>
-            <a:endParaRPr lang="en-US" sz="1220" dirty="0"/>
-          </a:p>
-          <a:p>
-            <a:pPr indent="0" marL="0">
-              <a:buNone/>
-            </a:pPr>
-            <a:r>
-              <a:rPr lang="en-US" sz="1220" dirty="0">
+            <a:endParaRPr lang="en-US" sz="1140" dirty="0"/>
+          </a:p>
+          <a:p>
+            <a:pPr indent="0" marL="0">
+              <a:buNone/>
+            </a:pPr>
+            <a:r>
+              <a:rPr lang="en-US" sz="1140" dirty="0">
                 <a:solidFill>
                   <a:srgbClr val="17364A"/>
                 </a:solidFill>
@@ -14169,16 +14171,16 @@
                 <a:ea typeface="Aptos" pitchFamily="34" charset="-122"/>
                 <a:cs typeface="Aptos" pitchFamily="34" charset="-120"/>
               </a:rPr>
-              <a:t>Adapt existing department templates when they already fit the.</a:t>
-            </a:r>
-            <a:endParaRPr lang="en-US" sz="1220" dirty="0"/>
-          </a:p>
-          <a:p>
-            <a:pPr indent="0" marL="0">
-              <a:buNone/>
-            </a:pPr>
-            <a:r>
-              <a:rPr lang="en-US" sz="1220" dirty="0">
+              <a:t>Adapt existing department templates when they.</a:t>
+            </a:r>
+            <a:endParaRPr lang="en-US" sz="1140" dirty="0"/>
+          </a:p>
+          <a:p>
+            <a:pPr indent="0" marL="0">
+              <a:buNone/>
+            </a:pPr>
+            <a:r>
+              <a:rPr lang="en-US" sz="1140" dirty="0">
                 <a:solidFill>
                   <a:srgbClr val="17364A"/>
                 </a:solidFill>
@@ -14186,9 +14188,9 @@
                 <a:ea typeface="Aptos" pitchFamily="34" charset="-122"/>
                 <a:cs typeface="Aptos" pitchFamily="34" charset="-120"/>
               </a:rPr>
-              <a:t>Save the completed artifact as evidence of the decision.</a:t>
-            </a:r>
-            <a:endParaRPr lang="en-US" sz="1220" dirty="0"/>
+              <a:t>Save the completed artifact as evidence of the.</a:t>
+            </a:r>
+            <a:endParaRPr lang="en-US" sz="1140" dirty="0"/>
           </a:p>
         </p:txBody>
       </p:sp>
@@ -14479,8 +14481,8 @@
         </p:nvSpPr>
         <p:spPr>
           <a:xfrm>
-            <a:off x="868680" y="1508760"/>
-            <a:ext cx="6309360" cy="4160520"/>
+            <a:off x="822960" y="1463040"/>
+            <a:ext cx="6565392" cy="4343400"/>
           </a:xfrm>
           <a:prstGeom prst="rect">
             <a:avLst/>
@@ -14498,7 +14500,7 @@
               <a:buNone/>
             </a:pPr>
             <a:r>
-              <a:rPr lang="en-US" sz="2100" dirty="0">
+              <a:rPr lang="en-US" sz="1920" dirty="0">
                 <a:solidFill>
                   <a:srgbClr val="003A63"/>
                 </a:solidFill>
@@ -14508,14 +14510,14 @@
               </a:rPr>
               <a:t>• Define NLP in plain language and distinguish common NLP tasks.</a:t>
             </a:r>
-            <a:endParaRPr lang="en-US" sz="2100" dirty="0"/>
-          </a:p>
-          <a:p>
-            <a:pPr indent="0" marL="0">
-              <a:buNone/>
-            </a:pPr>
-            <a:r>
-              <a:rPr lang="en-US" sz="2100" dirty="0">
+            <a:endParaRPr lang="en-US" sz="1920" dirty="0"/>
+          </a:p>
+          <a:p>
+            <a:pPr indent="0" marL="0">
+              <a:buNone/>
+            </a:pPr>
+            <a:r>
+              <a:rPr lang="en-US" sz="1920" dirty="0">
                 <a:solidFill>
                   <a:srgbClr val="003A63"/>
                 </a:solidFill>
@@ -14525,14 +14527,14 @@
               </a:rPr>
               <a:t>• Identify public health workflows where NLP may be useful.</a:t>
             </a:r>
-            <a:endParaRPr lang="en-US" sz="2100" dirty="0"/>
-          </a:p>
-          <a:p>
-            <a:pPr indent="0" marL="0">
-              <a:buNone/>
-            </a:pPr>
-            <a:r>
-              <a:rPr lang="en-US" sz="2100" dirty="0">
+            <a:endParaRPr lang="en-US" sz="1920" dirty="0"/>
+          </a:p>
+          <a:p>
+            <a:pPr indent="0" marL="0">
+              <a:buNone/>
+            </a:pPr>
+            <a:r>
+              <a:rPr lang="en-US" sz="1920" dirty="0">
                 <a:solidFill>
                   <a:srgbClr val="003A63"/>
                 </a:solidFill>
@@ -14540,9 +14542,9 @@
                 <a:ea typeface="Aptos" pitchFamily="34" charset="-122"/>
                 <a:cs typeface="Aptos" pitchFamily="34" charset="-120"/>
               </a:rPr>
-              <a:t>• Assess risks related to accuracy, bias, privacy, hallucination, language, and missing context.</a:t>
-            </a:r>
-            <a:endParaRPr lang="en-US" sz="2100" dirty="0"/>
+              <a:t>• Assess risks related to accuracy, bias, privacy, hallucination, language,.</a:t>
+            </a:r>
+            <a:endParaRPr lang="en-US" sz="1920" dirty="0"/>
           </a:p>
         </p:txBody>
       </p:sp>
@@ -14554,12 +14556,12 @@
         </p:nvSpPr>
         <p:spPr>
           <a:xfrm>
-            <a:off x="7635240" y="1325880"/>
-            <a:ext cx="3474720" cy="1207008"/>
+            <a:off x="7543800" y="1325880"/>
+            <a:ext cx="3611880" cy="1261872"/>
           </a:xfrm>
           <a:prstGeom prst="roundRect">
             <a:avLst>
-              <a:gd name="adj" fmla="val 9091"/>
+              <a:gd name="adj" fmla="val 8696"/>
             </a:avLst>
           </a:prstGeom>
           <a:solidFill>
@@ -14581,8 +14583,8 @@
         </p:nvSpPr>
         <p:spPr>
           <a:xfrm>
-            <a:off x="7799832" y="1472184"/>
-            <a:ext cx="3145536" cy="256032"/>
+            <a:off x="7708392" y="1453896"/>
+            <a:ext cx="3282696" cy="228600"/>
           </a:xfrm>
           <a:prstGeom prst="rect">
             <a:avLst/>
@@ -14598,7 +14600,7 @@
               <a:buNone/>
             </a:pPr>
             <a:r>
-              <a:rPr lang="en-US" sz="1300" b="1" dirty="0">
+              <a:rPr lang="en-US" sz="1220" b="1" dirty="0">
                 <a:solidFill>
                   <a:srgbClr val="0068B7"/>
                 </a:solidFill>
@@ -14608,7 +14610,7 @@
               </a:rPr>
               <a:t>Public health lens</a:t>
             </a:r>
-            <a:endParaRPr lang="en-US" sz="1300" dirty="0"/>
+            <a:endParaRPr lang="en-US" sz="1220" dirty="0"/>
           </a:p>
         </p:txBody>
       </p:sp>
@@ -14620,8 +14622,8 @@
         </p:nvSpPr>
         <p:spPr>
           <a:xfrm>
-            <a:off x="7799832" y="1801368"/>
-            <a:ext cx="3145536" cy="640080"/>
+            <a:off x="7708392" y="1764792"/>
+            <a:ext cx="3282696" cy="749808"/>
           </a:xfrm>
           <a:prstGeom prst="rect">
             <a:avLst/>
@@ -14639,7 +14641,7 @@
               <a:buNone/>
             </a:pPr>
             <a:r>
-              <a:rPr lang="en-US" sz="1320" dirty="0">
+              <a:rPr lang="en-US" sz="1220" dirty="0">
                 <a:solidFill>
                   <a:srgbClr val="17364A"/>
                 </a:solidFill>
@@ -14649,7 +14651,7 @@
               </a:rPr>
               <a:t>Define NLP in plain language and distinguish common NLP tasks.</a:t>
             </a:r>
-            <a:endParaRPr lang="en-US" sz="1320" dirty="0"/>
+            <a:endParaRPr lang="en-US" sz="1220" dirty="0"/>
           </a:p>
         </p:txBody>
       </p:sp>
@@ -14661,12 +14663,12 @@
         </p:nvSpPr>
         <p:spPr>
           <a:xfrm>
-            <a:off x="7635240" y="2670048"/>
-            <a:ext cx="3474720" cy="1377086"/>
+            <a:off x="7543800" y="2724912"/>
+            <a:ext cx="3611880" cy="1527048"/>
           </a:xfrm>
           <a:prstGeom prst="roundRect">
             <a:avLst>
-              <a:gd name="adj" fmla="val 7968"/>
+              <a:gd name="adj" fmla="val 7186"/>
             </a:avLst>
           </a:prstGeom>
           <a:solidFill>
@@ -14688,8 +14690,8 @@
         </p:nvSpPr>
         <p:spPr>
           <a:xfrm>
-            <a:off x="7799832" y="2816352"/>
-            <a:ext cx="3145536" cy="256032"/>
+            <a:off x="7708392" y="2852928"/>
+            <a:ext cx="3282696" cy="228600"/>
           </a:xfrm>
           <a:prstGeom prst="rect">
             <a:avLst/>
@@ -14705,7 +14707,7 @@
               <a:buNone/>
             </a:pPr>
             <a:r>
-              <a:rPr lang="en-US" sz="1300" b="1" dirty="0">
+              <a:rPr lang="en-US" sz="1220" b="1" dirty="0">
                 <a:solidFill>
                   <a:srgbClr val="0068B7"/>
                 </a:solidFill>
@@ -14715,7 +14717,7 @@
               </a:rPr>
               <a:t>Concept checkpoints</a:t>
             </a:r>
-            <a:endParaRPr lang="en-US" sz="1300" dirty="0"/>
+            <a:endParaRPr lang="en-US" sz="1220" dirty="0"/>
           </a:p>
         </p:txBody>
       </p:sp>
@@ -14727,8 +14729,8 @@
         </p:nvSpPr>
         <p:spPr>
           <a:xfrm>
-            <a:off x="7818120" y="3182112"/>
-            <a:ext cx="3090672" cy="718718"/>
+            <a:off x="7726680" y="3182112"/>
+            <a:ext cx="3227832" cy="960120"/>
           </a:xfrm>
           <a:prstGeom prst="rect">
             <a:avLst/>
@@ -14746,7 +14748,7 @@
               <a:buNone/>
             </a:pPr>
             <a:r>
-              <a:rPr lang="en-US" sz="1220" dirty="0">
+              <a:rPr lang="en-US" sz="1140" dirty="0">
                 <a:solidFill>
                   <a:srgbClr val="17364A"/>
                 </a:solidFill>
@@ -14754,16 +14756,16 @@
                 <a:ea typeface="Aptos" pitchFamily="34" charset="-122"/>
                 <a:cs typeface="Aptos" pitchFamily="34" charset="-120"/>
               </a:rPr>
-              <a:t>Define source verification and human review requirements for NLP.</a:t>
-            </a:r>
-            <a:endParaRPr lang="en-US" sz="1220" dirty="0"/>
-          </a:p>
-          <a:p>
-            <a:pPr indent="0" marL="0">
-              <a:buNone/>
-            </a:pPr>
-            <a:r>
-              <a:rPr lang="en-US" sz="1220" dirty="0">
+              <a:t>Define source verification and human review.</a:t>
+            </a:r>
+            <a:endParaRPr lang="en-US" sz="1140" dirty="0"/>
+          </a:p>
+          <a:p>
+            <a:pPr indent="0" marL="0">
+              <a:buNone/>
+            </a:pPr>
+            <a:r>
+              <a:rPr lang="en-US" sz="1140" dirty="0">
                 <a:solidFill>
                   <a:srgbClr val="17364A"/>
                 </a:solidFill>
@@ -14771,9 +14773,9 @@
                 <a:ea typeface="Aptos" pitchFamily="34" charset="-122"/>
                 <a:cs typeface="Aptos" pitchFamily="34" charset="-120"/>
               </a:rPr>
-              <a:t>Produce an NLP evaluation plan for one public health workflow.</a:t>
-            </a:r>
-            <a:endParaRPr lang="en-US" sz="1220" dirty="0"/>
+              <a:t>Produce an NLP evaluation plan for one public.</a:t>
+            </a:r>
+            <a:endParaRPr lang="en-US" sz="1140" dirty="0"/>
           </a:p>
         </p:txBody>
       </p:sp>
@@ -14785,12 +14787,12 @@
         </p:nvSpPr>
         <p:spPr>
           <a:xfrm>
-            <a:off x="7635240" y="4184294"/>
-            <a:ext cx="3474720" cy="1466698"/>
+            <a:off x="7543800" y="4389120"/>
+            <a:ext cx="3611880" cy="1261872"/>
           </a:xfrm>
           <a:prstGeom prst="roundRect">
             <a:avLst>
-              <a:gd name="adj" fmla="val 7481"/>
+              <a:gd name="adj" fmla="val 8696"/>
             </a:avLst>
           </a:prstGeom>
           <a:solidFill>
@@ -14812,8 +14814,8 @@
         </p:nvSpPr>
         <p:spPr>
           <a:xfrm>
-            <a:off x="7799832" y="4330598"/>
-            <a:ext cx="3145536" cy="256032"/>
+            <a:off x="7708392" y="4517136"/>
+            <a:ext cx="3282696" cy="228600"/>
           </a:xfrm>
           <a:prstGeom prst="rect">
             <a:avLst/>
@@ -14829,7 +14831,7 @@
               <a:buNone/>
             </a:pPr>
             <a:r>
-              <a:rPr lang="en-US" sz="1300" b="1" dirty="0">
+              <a:rPr lang="en-US" sz="1220" b="1" dirty="0">
                 <a:solidFill>
                   <a:srgbClr val="0068B7"/>
                 </a:solidFill>
@@ -14839,7 +14841,7 @@
               </a:rPr>
               <a:t>Engagement move</a:t>
             </a:r>
-            <a:endParaRPr lang="en-US" sz="1300" dirty="0"/>
+            <a:endParaRPr lang="en-US" sz="1220" dirty="0"/>
           </a:p>
         </p:txBody>
       </p:sp>
@@ -14851,8 +14853,8 @@
         </p:nvSpPr>
         <p:spPr>
           <a:xfrm>
-            <a:off x="7799832" y="4659782"/>
-            <a:ext cx="3145536" cy="899770"/>
+            <a:off x="7708392" y="4828032"/>
+            <a:ext cx="3282696" cy="749808"/>
           </a:xfrm>
           <a:prstGeom prst="rect">
             <a:avLst/>
@@ -14870,7 +14872,7 @@
               <a:buNone/>
             </a:pPr>
             <a:r>
-              <a:rPr lang="en-US" sz="1320" dirty="0">
+              <a:rPr lang="en-US" sz="1220" dirty="0">
                 <a:solidFill>
                   <a:srgbClr val="17364A"/>
                 </a:solidFill>
@@ -14878,9 +14880,9 @@
                 <a:ea typeface="Aptos" pitchFamily="34" charset="-122"/>
                 <a:cs typeface="Aptos" pitchFamily="34" charset="-120"/>
               </a:rPr>
-              <a:t>Use the assignment to test whether you can explain the concept, apply it to a realistic public health situation, and identify what would need review before the work moves forward.</a:t>
-            </a:r>
-            <a:endParaRPr lang="en-US" sz="1320" dirty="0"/>
+              <a:t>Use the assignment to test whether you can explain the concept, apply it to a.</a:t>
+            </a:r>
+            <a:endParaRPr lang="en-US" sz="1220" dirty="0"/>
           </a:p>
         </p:txBody>
       </p:sp>
@@ -15171,8 +15173,8 @@
         </p:nvSpPr>
         <p:spPr>
           <a:xfrm>
-            <a:off x="868680" y="1508760"/>
-            <a:ext cx="6309360" cy="4160520"/>
+            <a:off x="822960" y="1463040"/>
+            <a:ext cx="6565392" cy="4343400"/>
           </a:xfrm>
           <a:prstGeom prst="rect">
             <a:avLst/>
@@ -15190,7 +15192,7 @@
               <a:buNone/>
             </a:pPr>
             <a:r>
-              <a:rPr lang="en-US" sz="2100" dirty="0">
+              <a:rPr lang="en-US" sz="1920" dirty="0">
                 <a:solidFill>
                   <a:srgbClr val="003A63"/>
                 </a:solidFill>
@@ -15200,14 +15202,14 @@
               </a:rPr>
               <a:t>• Natural language processing is a branch of AI that works with human language.</a:t>
             </a:r>
-            <a:endParaRPr lang="en-US" sz="2100" dirty="0"/>
-          </a:p>
-          <a:p>
-            <a:pPr indent="0" marL="0">
-              <a:buNone/>
-            </a:pPr>
-            <a:r>
-              <a:rPr lang="en-US" sz="2100" dirty="0">
+            <a:endParaRPr lang="en-US" sz="1920" dirty="0"/>
+          </a:p>
+          <a:p>
+            <a:pPr indent="0" marL="0">
+              <a:buNone/>
+            </a:pPr>
+            <a:r>
+              <a:rPr lang="en-US" sz="1920" dirty="0">
                 <a:solidFill>
                   <a:srgbClr val="003A63"/>
                 </a:solidFill>
@@ -15215,16 +15217,16 @@
                 <a:ea typeface="Aptos" pitchFamily="34" charset="-122"/>
                 <a:cs typeface="Aptos" pitchFamily="34" charset="-120"/>
               </a:rPr>
-              <a:t>• Public health agencies often hold important information in free-text sources, including.</a:t>
-            </a:r>
-            <a:endParaRPr lang="en-US" sz="2100" dirty="0"/>
-          </a:p>
-          <a:p>
-            <a:pPr indent="0" marL="0">
-              <a:buNone/>
-            </a:pPr>
-            <a:r>
-              <a:rPr lang="en-US" sz="2100" dirty="0">
+              <a:t>• Public health agencies often hold important information in free-text.</a:t>
+            </a:r>
+            <a:endParaRPr lang="en-US" sz="1920" dirty="0"/>
+          </a:p>
+          <a:p>
+            <a:pPr indent="0" marL="0">
+              <a:buNone/>
+            </a:pPr>
+            <a:r>
+              <a:rPr lang="en-US" sz="1920" dirty="0">
                 <a:solidFill>
                   <a:srgbClr val="003A63"/>
                 </a:solidFill>
@@ -15232,9 +15234,9 @@
                 <a:ea typeface="Aptos" pitchFamily="34" charset="-122"/>
                 <a:cs typeface="Aptos" pitchFamily="34" charset="-120"/>
               </a:rPr>
-              <a:t>• This module teaches learners how NLP can support public health work and how to evaluate its.</a:t>
-            </a:r>
-            <a:endParaRPr lang="en-US" sz="2100" dirty="0"/>
+              <a:t>• This module teaches learners how NLP can support public health work and how.</a:t>
+            </a:r>
+            <a:endParaRPr lang="en-US" sz="1920" dirty="0"/>
           </a:p>
         </p:txBody>
       </p:sp>
@@ -15246,12 +15248,12 @@
         </p:nvSpPr>
         <p:spPr>
           <a:xfrm>
-            <a:off x="7635240" y="1325880"/>
-            <a:ext cx="3474720" cy="1207008"/>
+            <a:off x="7543800" y="1325880"/>
+            <a:ext cx="3611880" cy="1261872"/>
           </a:xfrm>
           <a:prstGeom prst="roundRect">
             <a:avLst>
-              <a:gd name="adj" fmla="val 9091"/>
+              <a:gd name="adj" fmla="val 8696"/>
             </a:avLst>
           </a:prstGeom>
           <a:solidFill>
@@ -15273,8 +15275,8 @@
         </p:nvSpPr>
         <p:spPr>
           <a:xfrm>
-            <a:off x="7799832" y="1472184"/>
-            <a:ext cx="3145536" cy="256032"/>
+            <a:off x="7708392" y="1453896"/>
+            <a:ext cx="3282696" cy="228600"/>
           </a:xfrm>
           <a:prstGeom prst="rect">
             <a:avLst/>
@@ -15290,7 +15292,7 @@
               <a:buNone/>
             </a:pPr>
             <a:r>
-              <a:rPr lang="en-US" sz="1300" b="1" dirty="0">
+              <a:rPr lang="en-US" sz="1220" b="1" dirty="0">
                 <a:solidFill>
                   <a:srgbClr val="0068B7"/>
                 </a:solidFill>
@@ -15300,7 +15302,7 @@
               </a:rPr>
               <a:t>Public health lens</a:t>
             </a:r>
-            <a:endParaRPr lang="en-US" sz="1300" dirty="0"/>
+            <a:endParaRPr lang="en-US" sz="1220" dirty="0"/>
           </a:p>
         </p:txBody>
       </p:sp>
@@ -15312,8 +15314,8 @@
         </p:nvSpPr>
         <p:spPr>
           <a:xfrm>
-            <a:off x="7799832" y="1801368"/>
-            <a:ext cx="3145536" cy="640080"/>
+            <a:off x="7708392" y="1764792"/>
+            <a:ext cx="3282696" cy="749808"/>
           </a:xfrm>
           <a:prstGeom prst="rect">
             <a:avLst/>
@@ -15331,7 +15333,7 @@
               <a:buNone/>
             </a:pPr>
             <a:r>
-              <a:rPr lang="en-US" sz="1320" dirty="0">
+              <a:rPr lang="en-US" sz="1220" dirty="0">
                 <a:solidFill>
                   <a:srgbClr val="17364A"/>
                 </a:solidFill>
@@ -15341,7 +15343,7 @@
               </a:rPr>
               <a:t>Natural language processing is a branch of AI that works with human language.</a:t>
             </a:r>
-            <a:endParaRPr lang="en-US" sz="1320" dirty="0"/>
+            <a:endParaRPr lang="en-US" sz="1220" dirty="0"/>
           </a:p>
         </p:txBody>
       </p:sp>
@@ -15353,12 +15355,12 @@
         </p:nvSpPr>
         <p:spPr>
           <a:xfrm>
-            <a:off x="7635240" y="2670048"/>
-            <a:ext cx="3474720" cy="1377086"/>
+            <a:off x="7543800" y="2724912"/>
+            <a:ext cx="3611880" cy="1527048"/>
           </a:xfrm>
           <a:prstGeom prst="roundRect">
             <a:avLst>
-              <a:gd name="adj" fmla="val 7968"/>
+              <a:gd name="adj" fmla="val 7186"/>
             </a:avLst>
           </a:prstGeom>
           <a:solidFill>
@@ -15380,24 +15382,26 @@
         </p:nvSpPr>
         <p:spPr>
           <a:xfrm>
-            <a:off x="7799832" y="2798064"/>
-            <a:ext cx="3145536" cy="237744"/>
-          </a:xfrm>
-          <a:prstGeom prst="rect">
-            <a:avLst/>
-          </a:prstGeom>
-          <a:noFill/>
-          <a:ln/>
-        </p:spPr>
-        <p:txBody>
-          <a:bodyPr wrap="square" lIns="0" tIns="0" rIns="0" bIns="0" rtlCol="0" anchor="ctr"/>
-          <a:lstStyle/>
-          <a:p>
-            <a:pPr indent="0" marL="0">
-              <a:buNone/>
-            </a:pPr>
-            <a:r>
-              <a:rPr lang="en-US" sz="1250" b="1" dirty="0">
+            <a:off x="7708392" y="2852928"/>
+            <a:ext cx="3282696" cy="219456"/>
+          </a:xfrm>
+          <a:prstGeom prst="rect">
+            <a:avLst/>
+          </a:prstGeom>
+          <a:noFill/>
+          <a:ln/>
+        </p:spPr>
+        <p:txBody>
+          <a:bodyPr wrap="square" lIns="0" tIns="0" rIns="0" bIns="0" rtlCol="0" anchor="ctr">
+            <a:normAutofit/>
+          </a:bodyPr>
+          <a:lstStyle/>
+          <a:p>
+            <a:pPr indent="0" marL="0">
+              <a:buNone/>
+            </a:pPr>
+            <a:r>
+              <a:rPr lang="en-US" sz="1160" b="1" dirty="0">
                 <a:solidFill>
                   <a:srgbClr val="0068B7"/>
                 </a:solidFill>
@@ -15407,7 +15411,7 @@
               </a:rPr>
               <a:t>Trust cycle</a:t>
             </a:r>
-            <a:endParaRPr lang="en-US" sz="1250" dirty="0"/>
+            <a:endParaRPr lang="en-US" sz="1160" dirty="0"/>
           </a:p>
         </p:txBody>
       </p:sp>
@@ -15419,7 +15423,7 @@
         </p:nvSpPr>
         <p:spPr>
           <a:xfrm>
-            <a:off x="8763000" y="3351276"/>
+            <a:off x="8717280" y="3406140"/>
             <a:ext cx="164592" cy="0"/>
           </a:xfrm>
           <a:prstGeom prst="line">
@@ -15442,8 +15446,8 @@
         </p:nvSpPr>
         <p:spPr>
           <a:xfrm>
-            <a:off x="7872984" y="3200400"/>
-            <a:ext cx="890016" cy="301752"/>
+            <a:off x="7781544" y="3255264"/>
+            <a:ext cx="935736" cy="301752"/>
           </a:xfrm>
           <a:prstGeom prst="roundRect">
             <a:avLst>
@@ -15469,8 +15473,8 @@
         </p:nvSpPr>
         <p:spPr>
           <a:xfrm>
-            <a:off x="7909560" y="3273552"/>
-            <a:ext cx="816864" cy="146304"/>
+            <a:off x="7818120" y="3328416"/>
+            <a:ext cx="862584" cy="146304"/>
           </a:xfrm>
           <a:prstGeom prst="rect">
             <a:avLst/>
@@ -15510,7 +15514,7 @@
         </p:nvSpPr>
         <p:spPr>
           <a:xfrm>
-            <a:off x="9817608" y="3351276"/>
+            <a:off x="9817608" y="3406140"/>
             <a:ext cx="164592" cy="0"/>
           </a:xfrm>
           <a:prstGeom prst="line">
@@ -15533,8 +15537,8 @@
         </p:nvSpPr>
         <p:spPr>
           <a:xfrm>
-            <a:off x="8927592" y="3200400"/>
-            <a:ext cx="890016" cy="301752"/>
+            <a:off x="8881872" y="3255264"/>
+            <a:ext cx="935736" cy="301752"/>
           </a:xfrm>
           <a:prstGeom prst="roundRect">
             <a:avLst>
@@ -15560,8 +15564,8 @@
         </p:nvSpPr>
         <p:spPr>
           <a:xfrm>
-            <a:off x="8964168" y="3273552"/>
-            <a:ext cx="816864" cy="146304"/>
+            <a:off x="8918448" y="3328416"/>
+            <a:ext cx="862584" cy="146304"/>
           </a:xfrm>
           <a:prstGeom prst="rect">
             <a:avLst/>
@@ -15601,8 +15605,8 @@
         </p:nvSpPr>
         <p:spPr>
           <a:xfrm>
-            <a:off x="9982200" y="3200400"/>
-            <a:ext cx="890016" cy="301752"/>
+            <a:off x="9982200" y="3255264"/>
+            <a:ext cx="935736" cy="301752"/>
           </a:xfrm>
           <a:prstGeom prst="roundRect">
             <a:avLst>
@@ -15628,8 +15632,8 @@
         </p:nvSpPr>
         <p:spPr>
           <a:xfrm>
-            <a:off x="10018776" y="3273552"/>
-            <a:ext cx="816864" cy="146304"/>
+            <a:off x="10018776" y="3328416"/>
+            <a:ext cx="862584" cy="146304"/>
           </a:xfrm>
           <a:prstGeom prst="rect">
             <a:avLst/>
@@ -15669,8 +15673,8 @@
         </p:nvSpPr>
         <p:spPr>
           <a:xfrm>
-            <a:off x="7854696" y="3694176"/>
-            <a:ext cx="3035808" cy="206654"/>
+            <a:off x="7763256" y="3749040"/>
+            <a:ext cx="3172968" cy="356616"/>
           </a:xfrm>
           <a:prstGeom prst="rect">
             <a:avLst/>
@@ -15688,7 +15692,7 @@
               <a:buNone/>
             </a:pPr>
             <a:r>
-              <a:rPr lang="en-US" sz="1120" dirty="0">
+              <a:rPr lang="en-US" sz="1040" dirty="0">
                 <a:solidFill>
                   <a:srgbClr val="17364A"/>
                 </a:solidFill>
@@ -15696,9 +15700,9 @@
                 <a:ea typeface="Aptos" pitchFamily="34" charset="-122"/>
                 <a:cs typeface="Aptos" pitchFamily="34" charset="-120"/>
               </a:rPr>
-              <a:t>Communication and engagement are stronger when feedback changes the work and the department reports what.</a:t>
-            </a:r>
-            <a:endParaRPr lang="en-US" sz="1120" dirty="0"/>
+              <a:t>Communication and engagement are stronger when feedback changes the.</a:t>
+            </a:r>
+            <a:endParaRPr lang="en-US" sz="1040" dirty="0"/>
           </a:p>
         </p:txBody>
       </p:sp>
@@ -15710,12 +15714,12 @@
         </p:nvSpPr>
         <p:spPr>
           <a:xfrm>
-            <a:off x="7635240" y="4184294"/>
-            <a:ext cx="3474720" cy="1466698"/>
+            <a:off x="7543800" y="4389120"/>
+            <a:ext cx="3611880" cy="1261872"/>
           </a:xfrm>
           <a:prstGeom prst="roundRect">
             <a:avLst>
-              <a:gd name="adj" fmla="val 7481"/>
+              <a:gd name="adj" fmla="val 8696"/>
             </a:avLst>
           </a:prstGeom>
           <a:solidFill>
@@ -15737,8 +15741,8 @@
         </p:nvSpPr>
         <p:spPr>
           <a:xfrm>
-            <a:off x="7799832" y="4330598"/>
-            <a:ext cx="3145536" cy="256032"/>
+            <a:off x="7708392" y="4517136"/>
+            <a:ext cx="3282696" cy="228600"/>
           </a:xfrm>
           <a:prstGeom prst="rect">
             <a:avLst/>
@@ -15754,7 +15758,7 @@
               <a:buNone/>
             </a:pPr>
             <a:r>
-              <a:rPr lang="en-US" sz="1300" b="1" dirty="0">
+              <a:rPr lang="en-US" sz="1220" b="1" dirty="0">
                 <a:solidFill>
                   <a:srgbClr val="0068B7"/>
                 </a:solidFill>
@@ -15764,7 +15768,7 @@
               </a:rPr>
               <a:t>Engagement move</a:t>
             </a:r>
-            <a:endParaRPr lang="en-US" sz="1300" dirty="0"/>
+            <a:endParaRPr lang="en-US" sz="1220" dirty="0"/>
           </a:p>
         </p:txBody>
       </p:sp>
@@ -15776,8 +15780,8 @@
         </p:nvSpPr>
         <p:spPr>
           <a:xfrm>
-            <a:off x="7799832" y="4659782"/>
-            <a:ext cx="3145536" cy="899770"/>
+            <a:off x="7708392" y="4828032"/>
+            <a:ext cx="3282696" cy="749808"/>
           </a:xfrm>
           <a:prstGeom prst="rect">
             <a:avLst/>
@@ -15795,7 +15799,7 @@
               <a:buNone/>
             </a:pPr>
             <a:r>
-              <a:rPr lang="en-US" sz="1320" dirty="0">
+              <a:rPr lang="en-US" sz="1220" dirty="0">
                 <a:solidFill>
                   <a:srgbClr val="17364A"/>
                 </a:solidFill>
@@ -15803,9 +15807,9 @@
                 <a:ea typeface="Aptos" pitchFamily="34" charset="-122"/>
                 <a:cs typeface="Aptos" pitchFamily="34" charset="-120"/>
               </a:rPr>
-              <a:t>Use the concept to plan transparent communication, gather stakeholder input, protect trust, and make sure affected communities are considered early.</a:t>
-            </a:r>
-            <a:endParaRPr lang="en-US" sz="1320" dirty="0"/>
+              <a:t>Use the concept to plan transparent communication, gather stakeholder input,.</a:t>
+            </a:r>
+            <a:endParaRPr lang="en-US" sz="1220" dirty="0"/>
           </a:p>
         </p:txBody>
       </p:sp>
@@ -16096,8 +16100,8 @@
         </p:nvSpPr>
         <p:spPr>
           <a:xfrm>
-            <a:off x="868680" y="1508760"/>
-            <a:ext cx="6309360" cy="4160520"/>
+            <a:off x="822960" y="1463040"/>
+            <a:ext cx="6565392" cy="4343400"/>
           </a:xfrm>
           <a:prstGeom prst="rect">
             <a:avLst/>
@@ -16115,7 +16119,7 @@
               <a:buNone/>
             </a:pPr>
             <a:r>
-              <a:rPr lang="en-US" sz="2100" dirty="0">
+              <a:rPr lang="en-US" sz="1920" dirty="0">
                 <a:solidFill>
                   <a:srgbClr val="003A63"/>
                 </a:solidFill>
@@ -16123,16 +16127,16 @@
                 <a:ea typeface="Aptos" pitchFamily="34" charset="-122"/>
                 <a:cs typeface="Aptos" pitchFamily="34" charset="-120"/>
               </a:rPr>
-              <a:t>• NLP can reduce burden by helping staff find, organize, classify, extract, translate, or.</a:t>
-            </a:r>
-            <a:endParaRPr lang="en-US" sz="2100" dirty="0"/>
-          </a:p>
-          <a:p>
-            <a:pPr indent="0" marL="0">
-              <a:buNone/>
-            </a:pPr>
-            <a:r>
-              <a:rPr lang="en-US" sz="2100" dirty="0">
+              <a:t>• NLP can reduce burden by helping staff find, organize, classify, extract,.</a:t>
+            </a:r>
+            <a:endParaRPr lang="en-US" sz="1920" dirty="0"/>
+          </a:p>
+          <a:p>
+            <a:pPr indent="0" marL="0">
+              <a:buNone/>
+            </a:pPr>
+            <a:r>
+              <a:rPr lang="en-US" sz="1920" dirty="0">
                 <a:solidFill>
                   <a:srgbClr val="003A63"/>
                 </a:solidFill>
@@ -16140,16 +16144,16 @@
                 <a:ea typeface="Aptos" pitchFamily="34" charset="-122"/>
                 <a:cs typeface="Aptos" pitchFamily="34" charset="-120"/>
               </a:rPr>
-              <a:t>• It can support case investigation, environmental health complaint triage, syndromic.</a:t>
-            </a:r>
-            <a:endParaRPr lang="en-US" sz="2100" dirty="0"/>
-          </a:p>
-          <a:p>
-            <a:pPr indent="0" marL="0">
-              <a:buNone/>
-            </a:pPr>
-            <a:r>
-              <a:rPr lang="en-US" sz="2100" dirty="0">
+              <a:t>• It can support case investigation, environmental health complaint triage,.</a:t>
+            </a:r>
+            <a:endParaRPr lang="en-US" sz="1920" dirty="0"/>
+          </a:p>
+          <a:p>
+            <a:pPr indent="0" marL="0">
+              <a:buNone/>
+            </a:pPr>
+            <a:r>
+              <a:rPr lang="en-US" sz="1920" dirty="0">
                 <a:solidFill>
                   <a:srgbClr val="003A63"/>
                 </a:solidFill>
@@ -16157,9 +16161,9 @@
                 <a:ea typeface="Aptos" pitchFamily="34" charset="-122"/>
                 <a:cs typeface="Aptos" pitchFamily="34" charset="-120"/>
               </a:rPr>
-              <a:t>• However, text is often ambiguous, incomplete, sensitive, and context-dependent.</a:t>
-            </a:r>
-            <a:endParaRPr lang="en-US" sz="2100" dirty="0"/>
+              <a:t>• However, text is often ambiguous, incomplete, sensitive, and.</a:t>
+            </a:r>
+            <a:endParaRPr lang="en-US" sz="1920" dirty="0"/>
           </a:p>
         </p:txBody>
       </p:sp>
@@ -16171,12 +16175,12 @@
         </p:nvSpPr>
         <p:spPr>
           <a:xfrm>
-            <a:off x="7635240" y="1325880"/>
-            <a:ext cx="3474720" cy="1255471"/>
+            <a:off x="7543800" y="1325880"/>
+            <a:ext cx="3611880" cy="1261872"/>
           </a:xfrm>
           <a:prstGeom prst="roundRect">
             <a:avLst>
-              <a:gd name="adj" fmla="val 8740"/>
+              <a:gd name="adj" fmla="val 8696"/>
             </a:avLst>
           </a:prstGeom>
           <a:solidFill>
@@ -16198,8 +16202,8 @@
         </p:nvSpPr>
         <p:spPr>
           <a:xfrm>
-            <a:off x="7799832" y="1472184"/>
-            <a:ext cx="3145536" cy="256032"/>
+            <a:off x="7708392" y="1453896"/>
+            <a:ext cx="3282696" cy="228600"/>
           </a:xfrm>
           <a:prstGeom prst="rect">
             <a:avLst/>
@@ -16215,7 +16219,7 @@
               <a:buNone/>
             </a:pPr>
             <a:r>
-              <a:rPr lang="en-US" sz="1300" b="1" dirty="0">
+              <a:rPr lang="en-US" sz="1220" b="1" dirty="0">
                 <a:solidFill>
                   <a:srgbClr val="0068B7"/>
                 </a:solidFill>
@@ -16225,7 +16229,7 @@
               </a:rPr>
               <a:t>Public health lens</a:t>
             </a:r>
-            <a:endParaRPr lang="en-US" sz="1300" dirty="0"/>
+            <a:endParaRPr lang="en-US" sz="1220" dirty="0"/>
           </a:p>
         </p:txBody>
       </p:sp>
@@ -16237,8 +16241,8 @@
         </p:nvSpPr>
         <p:spPr>
           <a:xfrm>
-            <a:off x="7799832" y="1801368"/>
-            <a:ext cx="3145536" cy="688543"/>
+            <a:off x="7708392" y="1764792"/>
+            <a:ext cx="3282696" cy="749808"/>
           </a:xfrm>
           <a:prstGeom prst="rect">
             <a:avLst/>
@@ -16256,7 +16260,7 @@
               <a:buNone/>
             </a:pPr>
             <a:r>
-              <a:rPr lang="en-US" sz="1320" dirty="0">
+              <a:rPr lang="en-US" sz="1220" dirty="0">
                 <a:solidFill>
                   <a:srgbClr val="17364A"/>
                 </a:solidFill>
@@ -16264,9 +16268,9 @@
                 <a:ea typeface="Aptos" pitchFamily="34" charset="-122"/>
                 <a:cs typeface="Aptos" pitchFamily="34" charset="-120"/>
               </a:rPr>
-              <a:t>NLP can reduce burden by helping staff find, organize, classify, extract, translate, or summarize.</a:t>
-            </a:r>
-            <a:endParaRPr lang="en-US" sz="1320" dirty="0"/>
+              <a:t>NLP can reduce burden by helping staff find, organize, classify, extract,.</a:t>
+            </a:r>
+            <a:endParaRPr lang="en-US" sz="1220" dirty="0"/>
           </a:p>
         </p:txBody>
       </p:sp>
@@ -16278,12 +16282,12 @@
         </p:nvSpPr>
         <p:spPr>
           <a:xfrm>
-            <a:off x="7635240" y="2718511"/>
-            <a:ext cx="3474720" cy="1328623"/>
+            <a:off x="7543800" y="2724912"/>
+            <a:ext cx="3611880" cy="1527048"/>
           </a:xfrm>
           <a:prstGeom prst="roundRect">
             <a:avLst>
-              <a:gd name="adj" fmla="val 8259"/>
+              <a:gd name="adj" fmla="val 7186"/>
             </a:avLst>
           </a:prstGeom>
           <a:solidFill>
@@ -16305,24 +16309,26 @@
         </p:nvSpPr>
         <p:spPr>
           <a:xfrm>
-            <a:off x="7799832" y="2846527"/>
-            <a:ext cx="3145536" cy="237744"/>
-          </a:xfrm>
-          <a:prstGeom prst="rect">
-            <a:avLst/>
-          </a:prstGeom>
-          <a:noFill/>
-          <a:ln/>
-        </p:spPr>
-        <p:txBody>
-          <a:bodyPr wrap="square" lIns="0" tIns="0" rIns="0" bIns="0" rtlCol="0" anchor="ctr"/>
-          <a:lstStyle/>
-          <a:p>
-            <a:pPr indent="0" marL="0">
-              <a:buNone/>
-            </a:pPr>
-            <a:r>
-              <a:rPr lang="en-US" sz="1250" b="1" dirty="0">
+            <a:off x="7708392" y="2852928"/>
+            <a:ext cx="3282696" cy="219456"/>
+          </a:xfrm>
+          <a:prstGeom prst="rect">
+            <a:avLst/>
+          </a:prstGeom>
+          <a:noFill/>
+          <a:ln/>
+        </p:spPr>
+        <p:txBody>
+          <a:bodyPr wrap="square" lIns="0" tIns="0" rIns="0" bIns="0" rtlCol="0" anchor="ctr">
+            <a:normAutofit/>
+          </a:bodyPr>
+          <a:lstStyle/>
+          <a:p>
+            <a:pPr indent="0" marL="0">
+              <a:buNone/>
+            </a:pPr>
+            <a:r>
+              <a:rPr lang="en-US" sz="1160" b="1" dirty="0">
                 <a:solidFill>
                   <a:srgbClr val="0068B7"/>
                 </a:solidFill>
@@ -16332,7 +16338,7 @@
               </a:rPr>
               <a:t>Trust cycle</a:t>
             </a:r>
-            <a:endParaRPr lang="en-US" sz="1250" dirty="0"/>
+            <a:endParaRPr lang="en-US" sz="1160" dirty="0"/>
           </a:p>
         </p:txBody>
       </p:sp>
@@ -16344,7 +16350,7 @@
         </p:nvSpPr>
         <p:spPr>
           <a:xfrm>
-            <a:off x="8763000" y="3399739"/>
+            <a:off x="8717280" y="3406140"/>
             <a:ext cx="164592" cy="0"/>
           </a:xfrm>
           <a:prstGeom prst="line">
@@ -16367,8 +16373,8 @@
         </p:nvSpPr>
         <p:spPr>
           <a:xfrm>
-            <a:off x="7872984" y="3248863"/>
-            <a:ext cx="890016" cy="301752"/>
+            <a:off x="7781544" y="3255264"/>
+            <a:ext cx="935736" cy="301752"/>
           </a:xfrm>
           <a:prstGeom prst="roundRect">
             <a:avLst>
@@ -16394,8 +16400,8 @@
         </p:nvSpPr>
         <p:spPr>
           <a:xfrm>
-            <a:off x="7909560" y="3322015"/>
-            <a:ext cx="816864" cy="146304"/>
+            <a:off x="7818120" y="3328416"/>
+            <a:ext cx="862584" cy="146304"/>
           </a:xfrm>
           <a:prstGeom prst="rect">
             <a:avLst/>
@@ -16435,7 +16441,7 @@
         </p:nvSpPr>
         <p:spPr>
           <a:xfrm>
-            <a:off x="9817608" y="3399739"/>
+            <a:off x="9817608" y="3406140"/>
             <a:ext cx="164592" cy="0"/>
           </a:xfrm>
           <a:prstGeom prst="line">
@@ -16458,8 +16464,8 @@
         </p:nvSpPr>
         <p:spPr>
           <a:xfrm>
-            <a:off x="8927592" y="3248863"/>
-            <a:ext cx="890016" cy="301752"/>
+            <a:off x="8881872" y="3255264"/>
+            <a:ext cx="935736" cy="301752"/>
           </a:xfrm>
           <a:prstGeom prst="roundRect">
             <a:avLst>
@@ -16485,8 +16491,8 @@
         </p:nvSpPr>
         <p:spPr>
           <a:xfrm>
-            <a:off x="8964168" y="3322015"/>
-            <a:ext cx="816864" cy="146304"/>
+            <a:off x="8918448" y="3328416"/>
+            <a:ext cx="862584" cy="146304"/>
           </a:xfrm>
           <a:prstGeom prst="rect">
             <a:avLst/>
@@ -16526,8 +16532,8 @@
         </p:nvSpPr>
         <p:spPr>
           <a:xfrm>
-            <a:off x="9982200" y="3248863"/>
-            <a:ext cx="890016" cy="301752"/>
+            <a:off x="9982200" y="3255264"/>
+            <a:ext cx="935736" cy="301752"/>
           </a:xfrm>
           <a:prstGeom prst="roundRect">
             <a:avLst>
@@ -16553,8 +16559,8 @@
         </p:nvSpPr>
         <p:spPr>
           <a:xfrm>
-            <a:off x="10018776" y="3322015"/>
-            <a:ext cx="816864" cy="146304"/>
+            <a:off x="10018776" y="3328416"/>
+            <a:ext cx="862584" cy="146304"/>
           </a:xfrm>
           <a:prstGeom prst="rect">
             <a:avLst/>
@@ -16594,8 +16600,8 @@
         </p:nvSpPr>
         <p:spPr>
           <a:xfrm>
-            <a:off x="7854696" y="3742639"/>
-            <a:ext cx="3035808" cy="158191"/>
+            <a:off x="7763256" y="3749040"/>
+            <a:ext cx="3172968" cy="356616"/>
           </a:xfrm>
           <a:prstGeom prst="rect">
             <a:avLst/>
@@ -16613,7 +16619,7 @@
               <a:buNone/>
             </a:pPr>
             <a:r>
-              <a:rPr lang="en-US" sz="1120" dirty="0">
+              <a:rPr lang="en-US" sz="1040" dirty="0">
                 <a:solidFill>
                   <a:srgbClr val="17364A"/>
                 </a:solidFill>
@@ -16621,9 +16627,9 @@
                 <a:ea typeface="Aptos" pitchFamily="34" charset="-122"/>
                 <a:cs typeface="Aptos" pitchFamily="34" charset="-120"/>
               </a:rPr>
-              <a:t>Communication and engagement are stronger when feedback changes the work and the department reports what.</a:t>
-            </a:r>
-            <a:endParaRPr lang="en-US" sz="1120" dirty="0"/>
+              <a:t>Communication and engagement are stronger when feedback changes the.</a:t>
+            </a:r>
+            <a:endParaRPr lang="en-US" sz="1040" dirty="0"/>
           </a:p>
         </p:txBody>
       </p:sp>
@@ -16635,12 +16641,12 @@
         </p:nvSpPr>
         <p:spPr>
           <a:xfrm>
-            <a:off x="7635240" y="4184294"/>
-            <a:ext cx="3474720" cy="1466698"/>
+            <a:off x="7543800" y="4389120"/>
+            <a:ext cx="3611880" cy="1261872"/>
           </a:xfrm>
           <a:prstGeom prst="roundRect">
             <a:avLst>
-              <a:gd name="adj" fmla="val 7481"/>
+              <a:gd name="adj" fmla="val 8696"/>
             </a:avLst>
           </a:prstGeom>
           <a:solidFill>
@@ -16662,8 +16668,8 @@
         </p:nvSpPr>
         <p:spPr>
           <a:xfrm>
-            <a:off x="7799832" y="4330598"/>
-            <a:ext cx="3145536" cy="256032"/>
+            <a:off x="7708392" y="4517136"/>
+            <a:ext cx="3282696" cy="228600"/>
           </a:xfrm>
           <a:prstGeom prst="rect">
             <a:avLst/>
@@ -16679,7 +16685,7 @@
               <a:buNone/>
             </a:pPr>
             <a:r>
-              <a:rPr lang="en-US" sz="1300" b="1" dirty="0">
+              <a:rPr lang="en-US" sz="1220" b="1" dirty="0">
                 <a:solidFill>
                   <a:srgbClr val="0068B7"/>
                 </a:solidFill>
@@ -16689,7 +16695,7 @@
               </a:rPr>
               <a:t>Engagement move</a:t>
             </a:r>
-            <a:endParaRPr lang="en-US" sz="1300" dirty="0"/>
+            <a:endParaRPr lang="en-US" sz="1220" dirty="0"/>
           </a:p>
         </p:txBody>
       </p:sp>
@@ -16701,8 +16707,8 @@
         </p:nvSpPr>
         <p:spPr>
           <a:xfrm>
-            <a:off x="7799832" y="4659782"/>
-            <a:ext cx="3145536" cy="899770"/>
+            <a:off x="7708392" y="4828032"/>
+            <a:ext cx="3282696" cy="749808"/>
           </a:xfrm>
           <a:prstGeom prst="rect">
             <a:avLst/>
@@ -16720,7 +16726,7 @@
               <a:buNone/>
             </a:pPr>
             <a:r>
-              <a:rPr lang="en-US" sz="1320" dirty="0">
+              <a:rPr lang="en-US" sz="1220" dirty="0">
                 <a:solidFill>
                   <a:srgbClr val="17364A"/>
                 </a:solidFill>
@@ -16728,9 +16734,9 @@
                 <a:ea typeface="Aptos" pitchFamily="34" charset="-122"/>
                 <a:cs typeface="Aptos" pitchFamily="34" charset="-120"/>
               </a:rPr>
-              <a:t>Use the concept to plan transparent communication, gather stakeholder input, protect trust, and make sure affected communities are considered early.</a:t>
-            </a:r>
-            <a:endParaRPr lang="en-US" sz="1320" dirty="0"/>
+              <a:t>Use the concept to plan transparent communication, gather stakeholder input,.</a:t>
+            </a:r>
+            <a:endParaRPr lang="en-US" sz="1220" dirty="0"/>
           </a:p>
         </p:txBody>
       </p:sp>
@@ -17021,8 +17027,8 @@
         </p:nvSpPr>
         <p:spPr>
           <a:xfrm>
-            <a:off x="868680" y="1508760"/>
-            <a:ext cx="6309360" cy="4160520"/>
+            <a:off x="822960" y="1463040"/>
+            <a:ext cx="6565392" cy="4343400"/>
           </a:xfrm>
           <a:prstGeom prst="rect">
             <a:avLst/>
@@ -17040,7 +17046,7 @@
               <a:buNone/>
             </a:pPr>
             <a:r>
-              <a:rPr lang="en-US" sz="2100" dirty="0">
+              <a:rPr lang="en-US" sz="1920" dirty="0">
                 <a:solidFill>
                   <a:srgbClr val="003A63"/>
                 </a:solidFill>
@@ -17050,14 +17056,14 @@
               </a:rPr>
               <a:t>• Natural language processing.</a:t>
             </a:r>
-            <a:endParaRPr lang="en-US" sz="2100" dirty="0"/>
-          </a:p>
-          <a:p>
-            <a:pPr indent="0" marL="0">
-              <a:buNone/>
-            </a:pPr>
-            <a:r>
-              <a:rPr lang="en-US" sz="2100" dirty="0">
+            <a:endParaRPr lang="en-US" sz="1920" dirty="0"/>
+          </a:p>
+          <a:p>
+            <a:pPr indent="0" marL="0">
+              <a:buNone/>
+            </a:pPr>
+            <a:r>
+              <a:rPr lang="en-US" sz="1920" dirty="0">
                 <a:solidFill>
                   <a:srgbClr val="003A63"/>
                 </a:solidFill>
@@ -17065,16 +17071,16 @@
                 <a:ea typeface="Aptos" pitchFamily="34" charset="-122"/>
                 <a:cs typeface="Aptos" pitchFamily="34" charset="-120"/>
               </a:rPr>
-              <a:t>• NLP refers to AI methods that process, analyze, classify, summarize, extract, translate, or.</a:t>
-            </a:r>
-            <a:endParaRPr lang="en-US" sz="2100" dirty="0"/>
-          </a:p>
-          <a:p>
-            <a:pPr indent="0" marL="0">
-              <a:buNone/>
-            </a:pPr>
-            <a:r>
-              <a:rPr lang="en-US" sz="2100" dirty="0">
+              <a:t>• NLP refers to AI methods that process, analyze, classify, summarize,.</a:t>
+            </a:r>
+            <a:endParaRPr lang="en-US" sz="1920" dirty="0"/>
+          </a:p>
+          <a:p>
+            <a:pPr indent="0" marL="0">
+              <a:buNone/>
+            </a:pPr>
+            <a:r>
+              <a:rPr lang="en-US" sz="1920" dirty="0">
                 <a:solidFill>
                   <a:srgbClr val="003A63"/>
                 </a:solidFill>
@@ -17082,9 +17088,9 @@
                 <a:ea typeface="Aptos" pitchFamily="34" charset="-122"/>
                 <a:cs typeface="Aptos" pitchFamily="34" charset="-120"/>
               </a:rPr>
-              <a:t>• It can work with structured prompts, free-text notes, documents, emails, calls, complaints, or.</a:t>
-            </a:r>
-            <a:endParaRPr lang="en-US" sz="2100" dirty="0"/>
+              <a:t>• It can work with structured prompts, free-text notes, documents, emails,.</a:t>
+            </a:r>
+            <a:endParaRPr lang="en-US" sz="1920" dirty="0"/>
           </a:p>
         </p:txBody>
       </p:sp>
@@ -17096,12 +17102,12 @@
         </p:nvSpPr>
         <p:spPr>
           <a:xfrm>
-            <a:off x="7635240" y="1325880"/>
-            <a:ext cx="3474720" cy="1207008"/>
+            <a:off x="7543800" y="1325880"/>
+            <a:ext cx="3611880" cy="1261872"/>
           </a:xfrm>
           <a:prstGeom prst="roundRect">
             <a:avLst>
-              <a:gd name="adj" fmla="val 9091"/>
+              <a:gd name="adj" fmla="val 8696"/>
             </a:avLst>
           </a:prstGeom>
           <a:solidFill>
@@ -17123,8 +17129,8 @@
         </p:nvSpPr>
         <p:spPr>
           <a:xfrm>
-            <a:off x="7799832" y="1472184"/>
-            <a:ext cx="3145536" cy="256032"/>
+            <a:off x="7708392" y="1453896"/>
+            <a:ext cx="3282696" cy="228600"/>
           </a:xfrm>
           <a:prstGeom prst="rect">
             <a:avLst/>
@@ -17140,7 +17146,7 @@
               <a:buNone/>
             </a:pPr>
             <a:r>
-              <a:rPr lang="en-US" sz="1300" b="1" dirty="0">
+              <a:rPr lang="en-US" sz="1220" b="1" dirty="0">
                 <a:solidFill>
                   <a:srgbClr val="0068B7"/>
                 </a:solidFill>
@@ -17150,7 +17156,7 @@
               </a:rPr>
               <a:t>Public health lens</a:t>
             </a:r>
-            <a:endParaRPr lang="en-US" sz="1300" dirty="0"/>
+            <a:endParaRPr lang="en-US" sz="1220" dirty="0"/>
           </a:p>
         </p:txBody>
       </p:sp>
@@ -17162,8 +17168,8 @@
         </p:nvSpPr>
         <p:spPr>
           <a:xfrm>
-            <a:off x="7799832" y="1801368"/>
-            <a:ext cx="3145536" cy="640080"/>
+            <a:off x="7708392" y="1764792"/>
+            <a:ext cx="3282696" cy="749808"/>
           </a:xfrm>
           <a:prstGeom prst="rect">
             <a:avLst/>
@@ -17181,7 +17187,7 @@
               <a:buNone/>
             </a:pPr>
             <a:r>
-              <a:rPr lang="en-US" sz="1320" dirty="0">
+              <a:rPr lang="en-US" sz="1220" dirty="0">
                 <a:solidFill>
                   <a:srgbClr val="17364A"/>
                 </a:solidFill>
@@ -17191,7 +17197,7 @@
               </a:rPr>
               <a:t>Natural language processing.</a:t>
             </a:r>
-            <a:endParaRPr lang="en-US" sz="1320" dirty="0"/>
+            <a:endParaRPr lang="en-US" sz="1220" dirty="0"/>
           </a:p>
         </p:txBody>
       </p:sp>
@@ -17203,12 +17209,12 @@
         </p:nvSpPr>
         <p:spPr>
           <a:xfrm>
-            <a:off x="7635240" y="2670048"/>
-            <a:ext cx="3474720" cy="1377086"/>
+            <a:off x="7543800" y="2724912"/>
+            <a:ext cx="3611880" cy="1527048"/>
           </a:xfrm>
           <a:prstGeom prst="roundRect">
             <a:avLst>
-              <a:gd name="adj" fmla="val 7968"/>
+              <a:gd name="adj" fmla="val 7186"/>
             </a:avLst>
           </a:prstGeom>
           <a:solidFill>
@@ -17230,8 +17236,8 @@
         </p:nvSpPr>
         <p:spPr>
           <a:xfrm>
-            <a:off x="7799832" y="2816352"/>
-            <a:ext cx="3145536" cy="256032"/>
+            <a:off x="7708392" y="2852928"/>
+            <a:ext cx="3282696" cy="228600"/>
           </a:xfrm>
           <a:prstGeom prst="rect">
             <a:avLst/>
@@ -17247,7 +17253,7 @@
               <a:buNone/>
             </a:pPr>
             <a:r>
-              <a:rPr lang="en-US" sz="1300" b="1" dirty="0">
+              <a:rPr lang="en-US" sz="1220" b="1" dirty="0">
                 <a:solidFill>
                   <a:srgbClr val="0068B7"/>
                 </a:solidFill>
@@ -17257,7 +17263,7 @@
               </a:rPr>
               <a:t>Concept checkpoints</a:t>
             </a:r>
-            <a:endParaRPr lang="en-US" sz="1300" dirty="0"/>
+            <a:endParaRPr lang="en-US" sz="1220" dirty="0"/>
           </a:p>
         </p:txBody>
       </p:sp>
@@ -17269,8 +17275,8 @@
         </p:nvSpPr>
         <p:spPr>
           <a:xfrm>
-            <a:off x="7818120" y="3182112"/>
-            <a:ext cx="3090672" cy="718718"/>
+            <a:off x="7726680" y="3182112"/>
+            <a:ext cx="3227832" cy="960120"/>
           </a:xfrm>
           <a:prstGeom prst="rect">
             <a:avLst/>
@@ -17288,7 +17294,7 @@
               <a:buNone/>
             </a:pPr>
             <a:r>
-              <a:rPr lang="en-US" sz="1220" dirty="0">
+              <a:rPr lang="en-US" sz="1140" dirty="0">
                 <a:solidFill>
                   <a:srgbClr val="17364A"/>
                 </a:solidFill>
@@ -17296,16 +17302,16 @@
                 <a:ea typeface="Aptos" pitchFamily="34" charset="-122"/>
                 <a:cs typeface="Aptos" pitchFamily="34" charset="-120"/>
               </a:rPr>
-              <a:t>NLP refers to AI methods that process, analyze, classify,.</a:t>
-            </a:r>
-            <a:endParaRPr lang="en-US" sz="1220" dirty="0"/>
-          </a:p>
-          <a:p>
-            <a:pPr indent="0" marL="0">
-              <a:buNone/>
-            </a:pPr>
-            <a:r>
-              <a:rPr lang="en-US" sz="1220" dirty="0">
+              <a:t>NLP refers to AI methods that process, analyze,.</a:t>
+            </a:r>
+            <a:endParaRPr lang="en-US" sz="1140" dirty="0"/>
+          </a:p>
+          <a:p>
+            <a:pPr indent="0" marL="0">
+              <a:buNone/>
+            </a:pPr>
+            <a:r>
+              <a:rPr lang="en-US" sz="1140" dirty="0">
                 <a:solidFill>
                   <a:srgbClr val="17364A"/>
                 </a:solidFill>
@@ -17315,14 +17321,14 @@
               </a:rPr>
               <a:t>Information extraction.</a:t>
             </a:r>
-            <a:endParaRPr lang="en-US" sz="1220" dirty="0"/>
-          </a:p>
-          <a:p>
-            <a:pPr indent="0" marL="0">
-              <a:buNone/>
-            </a:pPr>
-            <a:r>
-              <a:rPr lang="en-US" sz="1220" dirty="0">
+            <a:endParaRPr lang="en-US" sz="1140" dirty="0"/>
+          </a:p>
+          <a:p>
+            <a:pPr indent="0" marL="0">
+              <a:buNone/>
+            </a:pPr>
+            <a:r>
+              <a:rPr lang="en-US" sz="1140" dirty="0">
                 <a:solidFill>
                   <a:srgbClr val="17364A"/>
                 </a:solidFill>
@@ -17330,9 +17336,9 @@
                 <a:ea typeface="Aptos" pitchFamily="34" charset="-122"/>
                 <a:cs typeface="Aptos" pitchFamily="34" charset="-120"/>
               </a:rPr>
-              <a:t>Information extraction pulls specific facts from text, such as.</a:t>
-            </a:r>
-            <a:endParaRPr lang="en-US" sz="1220" dirty="0"/>
+              <a:t>Information extraction pulls specific facts from.</a:t>
+            </a:r>
+            <a:endParaRPr lang="en-US" sz="1140" dirty="0"/>
           </a:p>
         </p:txBody>
       </p:sp>
@@ -17344,12 +17350,12 @@
         </p:nvSpPr>
         <p:spPr>
           <a:xfrm>
-            <a:off x="7635240" y="4184294"/>
-            <a:ext cx="3474720" cy="1466698"/>
+            <a:off x="7543800" y="4389120"/>
+            <a:ext cx="3611880" cy="1261872"/>
           </a:xfrm>
           <a:prstGeom prst="roundRect">
             <a:avLst>
-              <a:gd name="adj" fmla="val 7481"/>
+              <a:gd name="adj" fmla="val 8696"/>
             </a:avLst>
           </a:prstGeom>
           <a:solidFill>
@@ -17371,8 +17377,8 @@
         </p:nvSpPr>
         <p:spPr>
           <a:xfrm>
-            <a:off x="7799832" y="4330598"/>
-            <a:ext cx="3145536" cy="256032"/>
+            <a:off x="7708392" y="4517136"/>
+            <a:ext cx="3282696" cy="228600"/>
           </a:xfrm>
           <a:prstGeom prst="rect">
             <a:avLst/>
@@ -17388,7 +17394,7 @@
               <a:buNone/>
             </a:pPr>
             <a:r>
-              <a:rPr lang="en-US" sz="1300" b="1" dirty="0">
+              <a:rPr lang="en-US" sz="1220" b="1" dirty="0">
                 <a:solidFill>
                   <a:srgbClr val="0068B7"/>
                 </a:solidFill>
@@ -17398,7 +17404,7 @@
               </a:rPr>
               <a:t>Engagement move</a:t>
             </a:r>
-            <a:endParaRPr lang="en-US" sz="1300" dirty="0"/>
+            <a:endParaRPr lang="en-US" sz="1220" dirty="0"/>
           </a:p>
         </p:txBody>
       </p:sp>
@@ -17410,8 +17416,8 @@
         </p:nvSpPr>
         <p:spPr>
           <a:xfrm>
-            <a:off x="7799832" y="4659782"/>
-            <a:ext cx="3145536" cy="899770"/>
+            <a:off x="7708392" y="4828032"/>
+            <a:ext cx="3282696" cy="749808"/>
           </a:xfrm>
           <a:prstGeom prst="rect">
             <a:avLst/>
@@ -17429,7 +17435,7 @@
               <a:buNone/>
             </a:pPr>
             <a:r>
-              <a:rPr lang="en-US" sz="1320" dirty="0">
+              <a:rPr lang="en-US" sz="1220" dirty="0">
                 <a:solidFill>
                   <a:srgbClr val="17364A"/>
                 </a:solidFill>
@@ -17437,9 +17443,9 @@
                 <a:ea typeface="Aptos" pitchFamily="34" charset="-122"/>
                 <a:cs typeface="Aptos" pitchFamily="34" charset="-120"/>
               </a:rPr>
-              <a:t>Use the concept to plan transparent communication, gather stakeholder input, protect trust, and make sure affected communities are considered early.</a:t>
-            </a:r>
-            <a:endParaRPr lang="en-US" sz="1320" dirty="0"/>
+              <a:t>Use the concept to plan transparent communication, gather stakeholder input,.</a:t>
+            </a:r>
+            <a:endParaRPr lang="en-US" sz="1220" dirty="0"/>
           </a:p>
         </p:txBody>
       </p:sp>
@@ -17730,8 +17736,8 @@
         </p:nvSpPr>
         <p:spPr>
           <a:xfrm>
-            <a:off x="868680" y="1508760"/>
-            <a:ext cx="6309360" cy="4160520"/>
+            <a:off x="822960" y="1463040"/>
+            <a:ext cx="6565392" cy="4343400"/>
           </a:xfrm>
           <a:prstGeom prst="rect">
             <a:avLst/>
@@ -17749,7 +17755,7 @@
               <a:buNone/>
             </a:pPr>
             <a:r>
-              <a:rPr lang="en-US" sz="2100" dirty="0">
+              <a:rPr lang="en-US" sz="1920" dirty="0">
                 <a:solidFill>
                   <a:srgbClr val="003A63"/>
                 </a:solidFill>
@@ -17759,14 +17765,14 @@
               </a:rPr>
               <a:t>• Summarization.</a:t>
             </a:r>
-            <a:endParaRPr lang="en-US" sz="2100" dirty="0"/>
-          </a:p>
-          <a:p>
-            <a:pPr indent="0" marL="0">
-              <a:buNone/>
-            </a:pPr>
-            <a:r>
-              <a:rPr lang="en-US" sz="2100" dirty="0">
+            <a:endParaRPr lang="en-US" sz="1920" dirty="0"/>
+          </a:p>
+          <a:p>
+            <a:pPr indent="0" marL="0">
+              <a:buNone/>
+            </a:pPr>
+            <a:r>
+              <a:rPr lang="en-US" sz="1920" dirty="0">
                 <a:solidFill>
                   <a:srgbClr val="003A63"/>
                 </a:solidFill>
@@ -17776,14 +17782,14 @@
               </a:rPr>
               <a:t>• Summarization creates a shorter version of longer text.</a:t>
             </a:r>
-            <a:endParaRPr lang="en-US" sz="2100" dirty="0"/>
-          </a:p>
-          <a:p>
-            <a:pPr indent="0" marL="0">
-              <a:buNone/>
-            </a:pPr>
-            <a:r>
-              <a:rPr lang="en-US" sz="2100" dirty="0">
+            <a:endParaRPr lang="en-US" sz="1920" dirty="0"/>
+          </a:p>
+          <a:p>
+            <a:pPr indent="0" marL="0">
+              <a:buNone/>
+            </a:pPr>
+            <a:r>
+              <a:rPr lang="en-US" sz="1920" dirty="0">
                 <a:solidFill>
                   <a:srgbClr val="003A63"/>
                 </a:solidFill>
@@ -17791,9 +17797,9 @@
                 <a:ea typeface="Aptos" pitchFamily="34" charset="-122"/>
                 <a:cs typeface="Aptos" pitchFamily="34" charset="-120"/>
               </a:rPr>
-              <a:t>• Public health summarization should preserve uncertainty, cite sources when possible, and avoid.</a:t>
-            </a:r>
-            <a:endParaRPr lang="en-US" sz="2100" dirty="0"/>
+              <a:t>• Public health summarization should preserve uncertainty, cite sources when.</a:t>
+            </a:r>
+            <a:endParaRPr lang="en-US" sz="1920" dirty="0"/>
           </a:p>
         </p:txBody>
       </p:sp>
@@ -17805,12 +17811,12 @@
         </p:nvSpPr>
         <p:spPr>
           <a:xfrm>
-            <a:off x="7635240" y="1325880"/>
-            <a:ext cx="3474720" cy="1207008"/>
+            <a:off x="7543800" y="1325880"/>
+            <a:ext cx="3611880" cy="1261872"/>
           </a:xfrm>
           <a:prstGeom prst="roundRect">
             <a:avLst>
-              <a:gd name="adj" fmla="val 9091"/>
+              <a:gd name="adj" fmla="val 8696"/>
             </a:avLst>
           </a:prstGeom>
           <a:solidFill>
@@ -17832,8 +17838,8 @@
         </p:nvSpPr>
         <p:spPr>
           <a:xfrm>
-            <a:off x="7799832" y="1472184"/>
-            <a:ext cx="3145536" cy="256032"/>
+            <a:off x="7708392" y="1453896"/>
+            <a:ext cx="3282696" cy="228600"/>
           </a:xfrm>
           <a:prstGeom prst="rect">
             <a:avLst/>
@@ -17849,7 +17855,7 @@
               <a:buNone/>
             </a:pPr>
             <a:r>
-              <a:rPr lang="en-US" sz="1300" b="1" dirty="0">
+              <a:rPr lang="en-US" sz="1220" b="1" dirty="0">
                 <a:solidFill>
                   <a:srgbClr val="0068B7"/>
                 </a:solidFill>
@@ -17859,7 +17865,7 @@
               </a:rPr>
               <a:t>Public health lens</a:t>
             </a:r>
-            <a:endParaRPr lang="en-US" sz="1300" dirty="0"/>
+            <a:endParaRPr lang="en-US" sz="1220" dirty="0"/>
           </a:p>
         </p:txBody>
       </p:sp>
@@ -17871,8 +17877,8 @@
         </p:nvSpPr>
         <p:spPr>
           <a:xfrm>
-            <a:off x="7799832" y="1801368"/>
-            <a:ext cx="3145536" cy="640080"/>
+            <a:off x="7708392" y="1764792"/>
+            <a:ext cx="3282696" cy="749808"/>
           </a:xfrm>
           <a:prstGeom prst="rect">
             <a:avLst/>
@@ -17890,7 +17896,7 @@
               <a:buNone/>
             </a:pPr>
             <a:r>
-              <a:rPr lang="en-US" sz="1320" dirty="0">
+              <a:rPr lang="en-US" sz="1220" dirty="0">
                 <a:solidFill>
                   <a:srgbClr val="17364A"/>
                 </a:solidFill>
@@ -17900,7 +17906,7 @@
               </a:rPr>
               <a:t>Summarization.</a:t>
             </a:r>
-            <a:endParaRPr lang="en-US" sz="1320" dirty="0"/>
+            <a:endParaRPr lang="en-US" sz="1220" dirty="0"/>
           </a:p>
         </p:txBody>
       </p:sp>
@@ -17912,12 +17918,12 @@
         </p:nvSpPr>
         <p:spPr>
           <a:xfrm>
-            <a:off x="7635240" y="2670048"/>
-            <a:ext cx="3474720" cy="1377086"/>
+            <a:off x="7543800" y="2724912"/>
+            <a:ext cx="3611880" cy="1527048"/>
           </a:xfrm>
           <a:prstGeom prst="roundRect">
             <a:avLst>
-              <a:gd name="adj" fmla="val 7968"/>
+              <a:gd name="adj" fmla="val 7186"/>
             </a:avLst>
           </a:prstGeom>
           <a:solidFill>
@@ -17939,8 +17945,8 @@
         </p:nvSpPr>
         <p:spPr>
           <a:xfrm>
-            <a:off x="7799832" y="2816352"/>
-            <a:ext cx="3145536" cy="256032"/>
+            <a:off x="7708392" y="2852928"/>
+            <a:ext cx="3282696" cy="228600"/>
           </a:xfrm>
           <a:prstGeom prst="rect">
             <a:avLst/>
@@ -17956,7 +17962,7 @@
               <a:buNone/>
             </a:pPr>
             <a:r>
-              <a:rPr lang="en-US" sz="1300" b="1" dirty="0">
+              <a:rPr lang="en-US" sz="1220" b="1" dirty="0">
                 <a:solidFill>
                   <a:srgbClr val="0068B7"/>
                 </a:solidFill>
@@ -17966,7 +17972,7 @@
               </a:rPr>
               <a:t>Concept checkpoints</a:t>
             </a:r>
-            <a:endParaRPr lang="en-US" sz="1300" dirty="0"/>
+            <a:endParaRPr lang="en-US" sz="1220" dirty="0"/>
           </a:p>
         </p:txBody>
       </p:sp>
@@ -17978,8 +17984,8 @@
         </p:nvSpPr>
         <p:spPr>
           <a:xfrm>
-            <a:off x="7818120" y="3182112"/>
-            <a:ext cx="3090672" cy="718718"/>
+            <a:off x="7726680" y="3182112"/>
+            <a:ext cx="3227832" cy="960120"/>
           </a:xfrm>
           <a:prstGeom prst="rect">
             <a:avLst/>
@@ -17997,7 +18003,7 @@
               <a:buNone/>
             </a:pPr>
             <a:r>
-              <a:rPr lang="en-US" sz="1220" dirty="0">
+              <a:rPr lang="en-US" sz="1140" dirty="0">
                 <a:solidFill>
                   <a:srgbClr val="17364A"/>
                 </a:solidFill>
@@ -18005,16 +18011,16 @@
                 <a:ea typeface="Aptos" pitchFamily="34" charset="-122"/>
                 <a:cs typeface="Aptos" pitchFamily="34" charset="-120"/>
               </a:rPr>
-              <a:t>Public health summarization should preserve uncertainty, cite.</a:t>
-            </a:r>
-            <a:endParaRPr lang="en-US" sz="1220" dirty="0"/>
-          </a:p>
-          <a:p>
-            <a:pPr indent="0" marL="0">
-              <a:buNone/>
-            </a:pPr>
-            <a:r>
-              <a:rPr lang="en-US" sz="1220" dirty="0">
+              <a:t>Public health summarization should preserve.</a:t>
+            </a:r>
+            <a:endParaRPr lang="en-US" sz="1140" dirty="0"/>
+          </a:p>
+          <a:p>
+            <a:pPr indent="0" marL="0">
+              <a:buNone/>
+            </a:pPr>
+            <a:r>
+              <a:rPr lang="en-US" sz="1140" dirty="0">
                 <a:solidFill>
                   <a:srgbClr val="17364A"/>
                 </a:solidFill>
@@ -18024,14 +18030,14 @@
               </a:rPr>
               <a:t>Hallucination.</a:t>
             </a:r>
-            <a:endParaRPr lang="en-US" sz="1220" dirty="0"/>
-          </a:p>
-          <a:p>
-            <a:pPr indent="0" marL="0">
-              <a:buNone/>
-            </a:pPr>
-            <a:r>
-              <a:rPr lang="en-US" sz="1220" dirty="0">
+            <a:endParaRPr lang="en-US" sz="1140" dirty="0"/>
+          </a:p>
+          <a:p>
+            <a:pPr indent="0" marL="0">
+              <a:buNone/>
+            </a:pPr>
+            <a:r>
+              <a:rPr lang="en-US" sz="1140" dirty="0">
                 <a:solidFill>
                   <a:srgbClr val="17364A"/>
                 </a:solidFill>
@@ -18039,9 +18045,9 @@
                 <a:ea typeface="Aptos" pitchFamily="34" charset="-122"/>
                 <a:cs typeface="Aptos" pitchFamily="34" charset="-120"/>
               </a:rPr>
-              <a:t>A hallucination is an AI-generated statement that is false,.</a:t>
-            </a:r>
-            <a:endParaRPr lang="en-US" sz="1220" dirty="0"/>
+              <a:t>A hallucination is an AI-generated statement that.</a:t>
+            </a:r>
+            <a:endParaRPr lang="en-US" sz="1140" dirty="0"/>
           </a:p>
         </p:txBody>
       </p:sp>
@@ -18053,12 +18059,12 @@
         </p:nvSpPr>
         <p:spPr>
           <a:xfrm>
-            <a:off x="7635240" y="4184294"/>
-            <a:ext cx="3474720" cy="1466698"/>
+            <a:off x="7543800" y="4389120"/>
+            <a:ext cx="3611880" cy="1261872"/>
           </a:xfrm>
           <a:prstGeom prst="roundRect">
             <a:avLst>
-              <a:gd name="adj" fmla="val 7481"/>
+              <a:gd name="adj" fmla="val 8696"/>
             </a:avLst>
           </a:prstGeom>
           <a:solidFill>
@@ -18080,8 +18086,8 @@
         </p:nvSpPr>
         <p:spPr>
           <a:xfrm>
-            <a:off x="7799832" y="4330598"/>
-            <a:ext cx="3145536" cy="256032"/>
+            <a:off x="7708392" y="4517136"/>
+            <a:ext cx="3282696" cy="228600"/>
           </a:xfrm>
           <a:prstGeom prst="rect">
             <a:avLst/>
@@ -18097,7 +18103,7 @@
               <a:buNone/>
             </a:pPr>
             <a:r>
-              <a:rPr lang="en-US" sz="1300" b="1" dirty="0">
+              <a:rPr lang="en-US" sz="1220" b="1" dirty="0">
                 <a:solidFill>
                   <a:srgbClr val="0068B7"/>
                 </a:solidFill>
@@ -18107,7 +18113,7 @@
               </a:rPr>
               <a:t>Engagement move</a:t>
             </a:r>
-            <a:endParaRPr lang="en-US" sz="1300" dirty="0"/>
+            <a:endParaRPr lang="en-US" sz="1220" dirty="0"/>
           </a:p>
         </p:txBody>
       </p:sp>
@@ -18119,8 +18125,8 @@
         </p:nvSpPr>
         <p:spPr>
           <a:xfrm>
-            <a:off x="7799832" y="4659782"/>
-            <a:ext cx="3145536" cy="899770"/>
+            <a:off x="7708392" y="4828032"/>
+            <a:ext cx="3282696" cy="749808"/>
           </a:xfrm>
           <a:prstGeom prst="rect">
             <a:avLst/>
@@ -18138,7 +18144,7 @@
               <a:buNone/>
             </a:pPr>
             <a:r>
-              <a:rPr lang="en-US" sz="1320" dirty="0">
+              <a:rPr lang="en-US" sz="1220" dirty="0">
                 <a:solidFill>
                   <a:srgbClr val="17364A"/>
                 </a:solidFill>
@@ -18146,9 +18152,9 @@
                 <a:ea typeface="Aptos" pitchFamily="34" charset="-122"/>
                 <a:cs typeface="Aptos" pitchFamily="34" charset="-120"/>
               </a:rPr>
-              <a:t>Use the concept to plan transparent communication, gather stakeholder input, protect trust, and make sure affected communities are considered early.</a:t>
-            </a:r>
-            <a:endParaRPr lang="en-US" sz="1320" dirty="0"/>
+              <a:t>Use the concept to plan transparent communication, gather stakeholder input,.</a:t>
+            </a:r>
+            <a:endParaRPr lang="en-US" sz="1220" dirty="0"/>
           </a:p>
         </p:txBody>
       </p:sp>

--- a/downloads/presentations/modules/anl-200.pptx
+++ b/downloads/presentations/modules/anl-200.pptx
@@ -11852,7 +11852,7 @@
                 <a:ea typeface="Aptos" pitchFamily="34" charset="-122"/>
                 <a:cs typeface="Aptos" pitchFamily="34" charset="-120"/>
               </a:rPr>
-              <a:t>• 1. What is NLP?</a:t>
+              <a:t>1. What is NLP?</a:t>
             </a:r>
             <a:endParaRPr lang="en-US" sz="1920" dirty="0"/>
           </a:p>
@@ -11869,7 +11869,7 @@
                 <a:ea typeface="Aptos" pitchFamily="34" charset="-122"/>
                 <a:cs typeface="Aptos" pitchFamily="34" charset="-120"/>
               </a:rPr>
-              <a:t>• 2. Which task is an example of information extraction?</a:t>
+              <a:t>2. Which task is an example of information extraction?</a:t>
             </a:r>
             <a:endParaRPr lang="en-US" sz="1920" dirty="0"/>
           </a:p>
@@ -11886,7 +11886,7 @@
                 <a:ea typeface="Aptos" pitchFamily="34" charset="-122"/>
                 <a:cs typeface="Aptos" pitchFamily="34" charset="-120"/>
               </a:rPr>
-              <a:t>• 3. Why is source verification important for NLP outputs?</a:t>
+              <a:t>3. Why is source verification important for NLP outputs?</a:t>
             </a:r>
             <a:endParaRPr lang="en-US" sz="1920" dirty="0"/>
           </a:p>
@@ -11993,7 +11993,7 @@
                 <a:ea typeface="Aptos" pitchFamily="34" charset="-122"/>
                 <a:cs typeface="Aptos" pitchFamily="34" charset="-120"/>
               </a:rPr>
-              <a:t>1. What is NLP?</a:t>
+              <a:t>What is NLP?</a:t>
             </a:r>
             <a:endParaRPr lang="en-US" sz="1220" dirty="0"/>
           </a:p>
@@ -12100,41 +12100,7 @@
                 <a:ea typeface="Aptos" pitchFamily="34" charset="-122"/>
                 <a:cs typeface="Aptos" pitchFamily="34" charset="-120"/>
               </a:rPr>
-              <a:t>1.</a:t>
-            </a:r>
-            <a:endParaRPr lang="en-US" sz="1140" dirty="0"/>
-          </a:p>
-          <a:p>
-            <a:pPr indent="0" marL="0">
-              <a:buNone/>
-            </a:pPr>
-            <a:r>
-              <a:rPr lang="en-US" sz="1140" dirty="0">
-                <a:solidFill>
-                  <a:srgbClr val="17364A"/>
-                </a:solidFill>
-                <a:latin typeface="Aptos" pitchFamily="34" charset="0"/>
-                <a:ea typeface="Aptos" pitchFamily="34" charset="-122"/>
-                <a:cs typeface="Aptos" pitchFamily="34" charset="-120"/>
-              </a:rPr>
               <a:t>What is NLP?</a:t>
-            </a:r>
-            <a:endParaRPr lang="en-US" sz="1140" dirty="0"/>
-          </a:p>
-          <a:p>
-            <a:pPr indent="0" marL="0">
-              <a:buNone/>
-            </a:pPr>
-            <a:r>
-              <a:rPr lang="en-US" sz="1140" dirty="0">
-                <a:solidFill>
-                  <a:srgbClr val="17364A"/>
-                </a:solidFill>
-                <a:latin typeface="Aptos" pitchFamily="34" charset="0"/>
-                <a:ea typeface="Aptos" pitchFamily="34" charset="-122"/>
-                <a:cs typeface="Aptos" pitchFamily="34" charset="-120"/>
-              </a:rPr>
-              <a:t>2.</a:t>
             </a:r>
             <a:endParaRPr lang="en-US" sz="1140" dirty="0"/>
           </a:p>
